--- a/PPTs/Ch12_13_Fixed_Floating_Point_Numbers.pptx
+++ b/PPTs/Ch12_13_Fixed_Floating_Point_Numbers.pptx
@@ -5,10 +5,10 @@
     <p:sldMasterId id="2147483660" r:id="rId1"/>
   </p:sldMasterIdLst>
   <p:notesMasterIdLst>
-    <p:notesMasterId r:id="rId27"/>
+    <p:notesMasterId r:id="rId29"/>
   </p:notesMasterIdLst>
   <p:handoutMasterIdLst>
-    <p:handoutMasterId r:id="rId28"/>
+    <p:handoutMasterId r:id="rId30"/>
   </p:handoutMasterIdLst>
   <p:sldIdLst>
     <p:sldId id="734" r:id="rId2"/>
@@ -29,13 +29,15 @@
     <p:sldId id="282" r:id="rId17"/>
     <p:sldId id="284" r:id="rId18"/>
     <p:sldId id="267" r:id="rId19"/>
-    <p:sldId id="277" r:id="rId20"/>
-    <p:sldId id="278" r:id="rId21"/>
-    <p:sldId id="737" r:id="rId22"/>
-    <p:sldId id="268" r:id="rId23"/>
-    <p:sldId id="258" r:id="rId24"/>
-    <p:sldId id="732" r:id="rId25"/>
-    <p:sldId id="738" r:id="rId26"/>
+    <p:sldId id="739" r:id="rId20"/>
+    <p:sldId id="741" r:id="rId21"/>
+    <p:sldId id="277" r:id="rId22"/>
+    <p:sldId id="278" r:id="rId23"/>
+    <p:sldId id="737" r:id="rId24"/>
+    <p:sldId id="268" r:id="rId25"/>
+    <p:sldId id="258" r:id="rId26"/>
+    <p:sldId id="732" r:id="rId27"/>
+    <p:sldId id="738" r:id="rId28"/>
   </p:sldIdLst>
   <p:sldSz cx="12192000" cy="6858000"/>
   <p:notesSz cx="6858000" cy="9144000"/>
@@ -156,7 +158,7 @@
 <file path=ppt/revisionInfo.xml><?xml version="1.0" encoding="utf-8"?>
 <p1510:revInfo xmlns:a="http://schemas.openxmlformats.org/drawingml/2006/main" xmlns:r="http://schemas.openxmlformats.org/officeDocument/2006/relationships" xmlns:p1510="http://schemas.microsoft.com/office/powerpoint/2015/10/main">
   <p1510:revLst>
-    <p1510:client id="{67564324-3CBA-4E84-95E9-F69DCA3B5F12}" v="193" dt="2025-10-05T01:27:48.972"/>
+    <p1510:client id="{67564324-3CBA-4E84-95E9-F69DCA3B5F12}" v="407" dt="2025-10-07T18:23:40.672"/>
   </p1510:revLst>
 </p1510:revInfo>
 </file>
@@ -166,7 +168,7 @@
   <pc:docChgLst>
     <pc:chgData name="Zonghua Gu" userId="9a7e1853e1951ef5" providerId="LiveId" clId="{CF1FAA12-072C-4ED5-BA76-0FFFAEFDB88A}"/>
     <pc:docChg chg="undo custSel addSld delSld modSld sldOrd">
-      <pc:chgData name="Zonghua Gu" userId="9a7e1853e1951ef5" providerId="LiveId" clId="{CF1FAA12-072C-4ED5-BA76-0FFFAEFDB88A}" dt="2025-10-05T02:00:36.495" v="581" actId="20577"/>
+      <pc:chgData name="Zonghua Gu" userId="9a7e1853e1951ef5" providerId="LiveId" clId="{CF1FAA12-072C-4ED5-BA76-0FFFAEFDB88A}" dt="2025-10-07T18:24:06.118" v="946" actId="1076"/>
       <pc:docMkLst>
         <pc:docMk/>
       </pc:docMkLst>
@@ -190,14 +192,6 @@
           <pc:docMk/>
           <pc:sldMk cId="3618025678" sldId="257"/>
         </pc:sldMkLst>
-        <pc:spChg chg="mod">
-          <ac:chgData name="Zonghua Gu" userId="9a7e1853e1951ef5" providerId="LiveId" clId="{CF1FAA12-072C-4ED5-BA76-0FFFAEFDB88A}" dt="2025-10-04T20:54:49.265" v="129" actId="20577"/>
-          <ac:spMkLst>
-            <pc:docMk/>
-            <pc:sldMk cId="3618025678" sldId="257"/>
-            <ac:spMk id="6" creationId="{00000000-0000-0000-0000-000000000000}"/>
-          </ac:spMkLst>
-        </pc:spChg>
       </pc:sldChg>
       <pc:sldChg chg="add">
         <pc:chgData name="Zonghua Gu" userId="9a7e1853e1951ef5" providerId="LiveId" clId="{CF1FAA12-072C-4ED5-BA76-0FFFAEFDB88A}" dt="2025-10-04T21:14:03.366" v="511"/>
@@ -256,46 +250,6 @@
           <pc:docMk/>
           <pc:sldMk cId="1423005339" sldId="263"/>
         </pc:sldMkLst>
-        <pc:spChg chg="add mod">
-          <ac:chgData name="Zonghua Gu" userId="9a7e1853e1951ef5" providerId="LiveId" clId="{CF1FAA12-072C-4ED5-BA76-0FFFAEFDB88A}" dt="2025-10-04T20:58:40.401" v="134"/>
-          <ac:spMkLst>
-            <pc:docMk/>
-            <pc:sldMk cId="1423005339" sldId="263"/>
-            <ac:spMk id="4" creationId="{588CFBB5-1212-601B-2237-368E039FFF71}"/>
-          </ac:spMkLst>
-        </pc:spChg>
-        <pc:spChg chg="del">
-          <ac:chgData name="Zonghua Gu" userId="9a7e1853e1951ef5" providerId="LiveId" clId="{CF1FAA12-072C-4ED5-BA76-0FFFAEFDB88A}" dt="2025-10-04T20:58:47.114" v="135" actId="478"/>
-          <ac:spMkLst>
-            <pc:docMk/>
-            <pc:sldMk cId="1423005339" sldId="263"/>
-            <ac:spMk id="6" creationId="{00000000-0000-0000-0000-000000000000}"/>
-          </ac:spMkLst>
-        </pc:spChg>
-        <pc:spChg chg="del">
-          <ac:chgData name="Zonghua Gu" userId="9a7e1853e1951ef5" providerId="LiveId" clId="{CF1FAA12-072C-4ED5-BA76-0FFFAEFDB88A}" dt="2025-10-04T20:58:50.017" v="136" actId="478"/>
-          <ac:spMkLst>
-            <pc:docMk/>
-            <pc:sldMk cId="1423005339" sldId="263"/>
-            <ac:spMk id="7" creationId="{00000000-0000-0000-0000-000000000000}"/>
-          </ac:spMkLst>
-        </pc:spChg>
-        <pc:spChg chg="del">
-          <ac:chgData name="Zonghua Gu" userId="9a7e1853e1951ef5" providerId="LiveId" clId="{CF1FAA12-072C-4ED5-BA76-0FFFAEFDB88A}" dt="2025-10-04T20:58:47.114" v="135" actId="478"/>
-          <ac:spMkLst>
-            <pc:docMk/>
-            <pc:sldMk cId="1423005339" sldId="263"/>
-            <ac:spMk id="8" creationId="{00000000-0000-0000-0000-000000000000}"/>
-          </ac:spMkLst>
-        </pc:spChg>
-        <pc:picChg chg="mod">
-          <ac:chgData name="Zonghua Gu" userId="9a7e1853e1951ef5" providerId="LiveId" clId="{CF1FAA12-072C-4ED5-BA76-0FFFAEFDB88A}" dt="2025-10-04T20:58:36.828" v="133" actId="1076"/>
-          <ac:picMkLst>
-            <pc:docMk/>
-            <pc:sldMk cId="1423005339" sldId="263"/>
-            <ac:picMk id="5" creationId="{00000000-0000-0000-0000-000000000000}"/>
-          </ac:picMkLst>
-        </pc:picChg>
       </pc:sldChg>
       <pc:sldChg chg="addSp modSp add mod ord">
         <pc:chgData name="Zonghua Gu" userId="9a7e1853e1951ef5" providerId="LiveId" clId="{CF1FAA12-072C-4ED5-BA76-0FFFAEFDB88A}" dt="2025-10-04T21:05:11.297" v="212" actId="20577"/>
@@ -653,7 +607,7 @@
         </pc:sldMkLst>
       </pc:sldChg>
       <pc:sldChg chg="modSp new mod">
-        <pc:chgData name="Zonghua Gu" userId="9a7e1853e1951ef5" providerId="LiveId" clId="{CF1FAA12-072C-4ED5-BA76-0FFFAEFDB88A}" dt="2025-10-05T01:27:48.967" v="536" actId="20577"/>
+        <pc:chgData name="Zonghua Gu" userId="9a7e1853e1951ef5" providerId="LiveId" clId="{CF1FAA12-072C-4ED5-BA76-0FFFAEFDB88A}" dt="2025-10-07T18:22:15.667" v="937" actId="20577"/>
         <pc:sldMkLst>
           <pc:docMk/>
           <pc:sldMk cId="990295586" sldId="738"/>
@@ -667,11 +621,120 @@
           </ac:spMkLst>
         </pc:spChg>
         <pc:spChg chg="mod">
-          <ac:chgData name="Zonghua Gu" userId="9a7e1853e1951ef5" providerId="LiveId" clId="{CF1FAA12-072C-4ED5-BA76-0FFFAEFDB88A}" dt="2025-10-05T01:27:48.967" v="536" actId="20577"/>
+          <ac:chgData name="Zonghua Gu" userId="9a7e1853e1951ef5" providerId="LiveId" clId="{CF1FAA12-072C-4ED5-BA76-0FFFAEFDB88A}" dt="2025-10-07T18:22:15.667" v="937" actId="20577"/>
           <ac:spMkLst>
             <pc:docMk/>
             <pc:sldMk cId="990295586" sldId="738"/>
             <ac:spMk id="4" creationId="{DB304D09-7213-2F35-AD9D-8F22A94BFA9A}"/>
+          </ac:spMkLst>
+        </pc:spChg>
+      </pc:sldChg>
+      <pc:sldChg chg="addSp delSp modSp add mod modNotesTx">
+        <pc:chgData name="Zonghua Gu" userId="9a7e1853e1951ef5" providerId="LiveId" clId="{CF1FAA12-072C-4ED5-BA76-0FFFAEFDB88A}" dt="2025-10-07T18:17:20.428" v="835"/>
+        <pc:sldMkLst>
+          <pc:docMk/>
+          <pc:sldMk cId="3951653191" sldId="739"/>
+        </pc:sldMkLst>
+        <pc:spChg chg="mod">
+          <ac:chgData name="Zonghua Gu" userId="9a7e1853e1951ef5" providerId="LiveId" clId="{CF1FAA12-072C-4ED5-BA76-0FFFAEFDB88A}" dt="2025-10-07T18:00:28.039" v="584" actId="20577"/>
+          <ac:spMkLst>
+            <pc:docMk/>
+            <pc:sldMk cId="3951653191" sldId="739"/>
+            <ac:spMk id="2" creationId="{06D0CDC3-A7FF-9EEE-C5C3-502A76B1D8CC}"/>
+          </ac:spMkLst>
+        </pc:spChg>
+        <pc:spChg chg="mod">
+          <ac:chgData name="Zonghua Gu" userId="9a7e1853e1951ef5" providerId="LiveId" clId="{CF1FAA12-072C-4ED5-BA76-0FFFAEFDB88A}" dt="2025-10-07T18:17:20.428" v="835"/>
+          <ac:spMkLst>
+            <pc:docMk/>
+            <pc:sldMk cId="3951653191" sldId="739"/>
+            <ac:spMk id="4" creationId="{B3D4FF65-D71D-3471-F040-1E677F86A2DD}"/>
+          </ac:spMkLst>
+        </pc:spChg>
+        <pc:spChg chg="add del">
+          <ac:chgData name="Zonghua Gu" userId="9a7e1853e1951ef5" providerId="LiveId" clId="{CF1FAA12-072C-4ED5-BA76-0FFFAEFDB88A}" dt="2025-10-07T18:04:41.910" v="661" actId="11529"/>
+          <ac:spMkLst>
+            <pc:docMk/>
+            <pc:sldMk cId="3951653191" sldId="739"/>
+            <ac:spMk id="7" creationId="{0CE6181D-1E17-81F0-F87E-AEF67DB40BE8}"/>
+          </ac:spMkLst>
+        </pc:spChg>
+        <pc:spChg chg="add mod">
+          <ac:chgData name="Zonghua Gu" userId="9a7e1853e1951ef5" providerId="LiveId" clId="{CF1FAA12-072C-4ED5-BA76-0FFFAEFDB88A}" dt="2025-10-07T18:09:33.366" v="755" actId="1037"/>
+          <ac:spMkLst>
+            <pc:docMk/>
+            <pc:sldMk cId="3951653191" sldId="739"/>
+            <ac:spMk id="8" creationId="{FADDE5B4-2BF0-3346-B39B-1C17BD95CCA8}"/>
+          </ac:spMkLst>
+        </pc:spChg>
+        <pc:spChg chg="add mod">
+          <ac:chgData name="Zonghua Gu" userId="9a7e1853e1951ef5" providerId="LiveId" clId="{CF1FAA12-072C-4ED5-BA76-0FFFAEFDB88A}" dt="2025-10-07T18:09:37.018" v="756" actId="1076"/>
+          <ac:spMkLst>
+            <pc:docMk/>
+            <pc:sldMk cId="3951653191" sldId="739"/>
+            <ac:spMk id="9" creationId="{ACE7E842-BCEF-B6B4-E109-FC4B047B29D0}"/>
+          </ac:spMkLst>
+        </pc:spChg>
+        <pc:picChg chg="add del mod">
+          <ac:chgData name="Zonghua Gu" userId="9a7e1853e1951ef5" providerId="LiveId" clId="{CF1FAA12-072C-4ED5-BA76-0FFFAEFDB88A}" dt="2025-10-07T18:06:10.113" v="683" actId="478"/>
+          <ac:picMkLst>
+            <pc:docMk/>
+            <pc:sldMk cId="3951653191" sldId="739"/>
+            <ac:picMk id="6" creationId="{65712776-712E-0C93-D4E3-1A7DE02BE06C}"/>
+          </ac:picMkLst>
+        </pc:picChg>
+        <pc:picChg chg="add del mod">
+          <ac:chgData name="Zonghua Gu" userId="9a7e1853e1951ef5" providerId="LiveId" clId="{CF1FAA12-072C-4ED5-BA76-0FFFAEFDB88A}" dt="2025-10-07T18:07:52.111" v="709" actId="478"/>
+          <ac:picMkLst>
+            <pc:docMk/>
+            <pc:sldMk cId="3951653191" sldId="739"/>
+            <ac:picMk id="11" creationId="{4E91E792-991F-7701-8169-50849A501F0A}"/>
+          </ac:picMkLst>
+        </pc:picChg>
+        <pc:picChg chg="add del mod">
+          <ac:chgData name="Zonghua Gu" userId="9a7e1853e1951ef5" providerId="LiveId" clId="{CF1FAA12-072C-4ED5-BA76-0FFFAEFDB88A}" dt="2025-10-07T18:09:51.337" v="757" actId="478"/>
+          <ac:picMkLst>
+            <pc:docMk/>
+            <pc:sldMk cId="3951653191" sldId="739"/>
+            <ac:picMk id="13" creationId="{6816FB5B-F46C-3041-948E-C9A8446AEAE3}"/>
+          </ac:picMkLst>
+        </pc:picChg>
+      </pc:sldChg>
+      <pc:sldChg chg="new del">
+        <pc:chgData name="Zonghua Gu" userId="9a7e1853e1951ef5" providerId="LiveId" clId="{CF1FAA12-072C-4ED5-BA76-0FFFAEFDB88A}" dt="2025-10-07T18:12:44.608" v="780" actId="47"/>
+        <pc:sldMkLst>
+          <pc:docMk/>
+          <pc:sldMk cId="30757699" sldId="740"/>
+        </pc:sldMkLst>
+      </pc:sldChg>
+      <pc:sldChg chg="addSp modSp add mod">
+        <pc:chgData name="Zonghua Gu" userId="9a7e1853e1951ef5" providerId="LiveId" clId="{CF1FAA12-072C-4ED5-BA76-0FFFAEFDB88A}" dt="2025-10-07T18:24:06.118" v="946" actId="1076"/>
+        <pc:sldMkLst>
+          <pc:docMk/>
+          <pc:sldMk cId="598855194" sldId="741"/>
+        </pc:sldMkLst>
+        <pc:spChg chg="mod">
+          <ac:chgData name="Zonghua Gu" userId="9a7e1853e1951ef5" providerId="LiveId" clId="{CF1FAA12-072C-4ED5-BA76-0FFFAEFDB88A}" dt="2025-10-07T18:17:28.947" v="847" actId="20577"/>
+          <ac:spMkLst>
+            <pc:docMk/>
+            <pc:sldMk cId="598855194" sldId="741"/>
+            <ac:spMk id="2" creationId="{EE7BB3F4-71E3-6480-2DD5-AA4EAD4E5DBE}"/>
+          </ac:spMkLst>
+        </pc:spChg>
+        <pc:spChg chg="mod">
+          <ac:chgData name="Zonghua Gu" userId="9a7e1853e1951ef5" providerId="LiveId" clId="{CF1FAA12-072C-4ED5-BA76-0FFFAEFDB88A}" dt="2025-10-07T18:21:37.296" v="930" actId="6549"/>
+          <ac:spMkLst>
+            <pc:docMk/>
+            <pc:sldMk cId="598855194" sldId="741"/>
+            <ac:spMk id="4" creationId="{1E35FFBE-A292-0D67-EFA6-AEFA3301A8EC}"/>
+          </ac:spMkLst>
+        </pc:spChg>
+        <pc:spChg chg="add mod">
+          <ac:chgData name="Zonghua Gu" userId="9a7e1853e1951ef5" providerId="LiveId" clId="{CF1FAA12-072C-4ED5-BA76-0FFFAEFDB88A}" dt="2025-10-07T18:24:06.118" v="946" actId="1076"/>
+          <ac:spMkLst>
+            <pc:docMk/>
+            <pc:sldMk cId="598855194" sldId="741"/>
+            <ac:spMk id="5" creationId="{FFF26C8F-DF03-64D8-CF77-B258AADB637B}"/>
           </ac:spMkLst>
         </pc:spChg>
       </pc:sldChg>
@@ -2149,12 +2212,12 @@
         </a:fontRef>
       </dsp:style>
       <dsp:txBody>
-        <a:bodyPr spcFirstLastPara="0" vert="horz" wrap="square" lIns="45720" tIns="45720" rIns="45720" bIns="45720" numCol="1" spcCol="1270" anchor="ctr" anchorCtr="0">
+        <a:bodyPr spcFirstLastPara="0" vert="horz" wrap="square" lIns="49530" tIns="49530" rIns="49530" bIns="49530" numCol="1" spcCol="1270" anchor="ctr" anchorCtr="0">
           <a:noAutofit/>
         </a:bodyPr>
         <a:lstStyle/>
         <a:p>
-          <a:pPr marL="0" lvl="0" indent="0" algn="ctr" defTabSz="533400">
+          <a:pPr marL="0" lvl="0" indent="0" algn="ctr" defTabSz="577850">
             <a:lnSpc>
               <a:spcPct val="90000"/>
             </a:lnSpc>
@@ -2167,7 +2230,7 @@
             <a:buNone/>
           </a:pPr>
           <a:r>
-            <a:rPr lang="en-US" sz="1200" kern="1200" dirty="0"/>
+            <a:rPr lang="en-US" sz="1300" kern="1200" dirty="0"/>
             <a:t>Higher Performance</a:t>
           </a:r>
         </a:p>
@@ -2226,12 +2289,12 @@
         </a:fontRef>
       </dsp:style>
       <dsp:txBody>
-        <a:bodyPr spcFirstLastPara="0" vert="horz" wrap="square" lIns="45720" tIns="45720" rIns="45720" bIns="45720" numCol="1" spcCol="1270" anchor="ctr" anchorCtr="0">
+        <a:bodyPr spcFirstLastPara="0" vert="horz" wrap="square" lIns="49530" tIns="49530" rIns="49530" bIns="49530" numCol="1" spcCol="1270" anchor="ctr" anchorCtr="0">
           <a:noAutofit/>
         </a:bodyPr>
         <a:lstStyle/>
         <a:p>
-          <a:pPr marL="0" lvl="0" indent="0" algn="ctr" defTabSz="533400">
+          <a:pPr marL="0" lvl="0" indent="0" algn="ctr" defTabSz="577850">
             <a:lnSpc>
               <a:spcPct val="90000"/>
             </a:lnSpc>
@@ -2244,7 +2307,7 @@
             <a:buNone/>
           </a:pPr>
           <a:r>
-            <a:rPr lang="en-US" sz="1200" kern="1200" dirty="0"/>
+            <a:rPr lang="en-US" sz="1300" kern="1200" dirty="0"/>
             <a:t>More bits for precision</a:t>
           </a:r>
         </a:p>
@@ -2303,12 +2366,12 @@
         </a:fontRef>
       </dsp:style>
       <dsp:txBody>
-        <a:bodyPr spcFirstLastPara="0" vert="horz" wrap="square" lIns="45720" tIns="45720" rIns="45720" bIns="45720" numCol="1" spcCol="1270" anchor="ctr" anchorCtr="0">
+        <a:bodyPr spcFirstLastPara="0" vert="horz" wrap="square" lIns="49530" tIns="49530" rIns="49530" bIns="49530" numCol="1" spcCol="1270" anchor="ctr" anchorCtr="0">
           <a:noAutofit/>
         </a:bodyPr>
         <a:lstStyle/>
         <a:p>
-          <a:pPr marL="0" lvl="0" indent="0" algn="ctr" defTabSz="533400">
+          <a:pPr marL="0" lvl="0" indent="0" algn="ctr" defTabSz="577850">
             <a:lnSpc>
               <a:spcPct val="90000"/>
             </a:lnSpc>
@@ -2321,7 +2384,7 @@
             <a:buNone/>
           </a:pPr>
           <a:r>
-            <a:rPr lang="en-US" sz="1200" kern="1200" dirty="0"/>
+            <a:rPr lang="en-US" sz="1300" kern="1200" dirty="0"/>
             <a:t>Lower Product Cost</a:t>
           </a:r>
         </a:p>
@@ -2380,12 +2443,12 @@
         </a:fontRef>
       </dsp:style>
       <dsp:txBody>
-        <a:bodyPr spcFirstLastPara="0" vert="horz" wrap="square" lIns="45720" tIns="45720" rIns="45720" bIns="45720" numCol="1" spcCol="1270" anchor="ctr" anchorCtr="0">
+        <a:bodyPr spcFirstLastPara="0" vert="horz" wrap="square" lIns="49530" tIns="49530" rIns="49530" bIns="49530" numCol="1" spcCol="1270" anchor="ctr" anchorCtr="0">
           <a:noAutofit/>
         </a:bodyPr>
         <a:lstStyle/>
         <a:p>
-          <a:pPr marL="0" lvl="0" indent="0" algn="ctr" defTabSz="533400">
+          <a:pPr marL="0" lvl="0" indent="0" algn="ctr" defTabSz="577850">
             <a:lnSpc>
               <a:spcPct val="90000"/>
             </a:lnSpc>
@@ -2398,7 +2461,7 @@
             <a:buNone/>
           </a:pPr>
           <a:r>
-            <a:rPr lang="en-US" sz="1200" kern="1200" dirty="0"/>
+            <a:rPr lang="en-US" sz="1300" kern="1200" dirty="0"/>
             <a:t>Shorter Development Time</a:t>
           </a:r>
         </a:p>
@@ -2457,12 +2520,12 @@
         </a:fontRef>
       </dsp:style>
       <dsp:txBody>
-        <a:bodyPr spcFirstLastPara="0" vert="horz" wrap="square" lIns="45720" tIns="45720" rIns="45720" bIns="45720" numCol="1" spcCol="1270" anchor="ctr" anchorCtr="0">
+        <a:bodyPr spcFirstLastPara="0" vert="horz" wrap="square" lIns="49530" tIns="49530" rIns="49530" bIns="49530" numCol="1" spcCol="1270" anchor="ctr" anchorCtr="0">
           <a:noAutofit/>
         </a:bodyPr>
         <a:lstStyle/>
         <a:p>
-          <a:pPr marL="0" lvl="0" indent="0" algn="ctr" defTabSz="533400">
+          <a:pPr marL="0" lvl="0" indent="0" algn="ctr" defTabSz="577850">
             <a:lnSpc>
               <a:spcPct val="90000"/>
             </a:lnSpc>
@@ -2475,7 +2538,7 @@
             <a:buNone/>
           </a:pPr>
           <a:r>
-            <a:rPr lang="en-US" sz="1200" kern="1200" dirty="0"/>
+            <a:rPr lang="en-US" sz="1300" kern="1200" dirty="0"/>
             <a:t>Wide Dynamic Range</a:t>
           </a:r>
         </a:p>
@@ -6701,7 +6764,7 @@
             <a:fld id="{BD4F56A7-3CDE-194F-B9AF-D598FBBF1989}" type="datetimeFigureOut">
               <a:rPr lang="en-US" smtClean="0"/>
               <a:pPr/>
-              <a:t>10/4/2025</a:t>
+              <a:t>10/7/2025</a:t>
             </a:fld>
             <a:endParaRPr lang="en-US"/>
           </a:p>
@@ -6869,7 +6932,7 @@
             <a:fld id="{1E52AD58-60CE-E948-9CBA-0BD7030FC28E}" type="datetimeFigureOut">
               <a:rPr lang="en-US" smtClean="0"/>
               <a:pPr/>
-              <a:t>10/4/2025</a:t>
+              <a:t>10/7/2025</a:t>
             </a:fld>
             <a:endParaRPr lang="en-US"/>
           </a:p>
@@ -7667,6 +7730,203 @@
           <a:bodyPr/>
           <a:lstStyle/>
           <a:p>
+            <a:r>
+              <a:rPr lang="en-US" dirty="0"/>
+              <a:t>32-9=23</a:t>
+            </a:r>
+          </a:p>
+        </p:txBody>
+      </p:sp>
+      <p:sp>
+        <p:nvSpPr>
+          <p:cNvPr id="4" name="Slide Number Placeholder 3"/>
+          <p:cNvSpPr>
+            <a:spLocks noGrp="1"/>
+          </p:cNvSpPr>
+          <p:nvPr>
+            <p:ph type="sldNum" sz="quarter" idx="5"/>
+          </p:nvPr>
+        </p:nvSpPr>
+        <p:spPr/>
+        <p:txBody>
+          <a:bodyPr/>
+          <a:lstStyle/>
+          <a:p>
+            <a:fld id="{D624DF53-3DD3-9F45-9E7E-472B96F1AB81}" type="slidenum">
+              <a:rPr lang="en-US" smtClean="0"/>
+              <a:pPr/>
+              <a:t>19</a:t>
+            </a:fld>
+            <a:endParaRPr lang="en-US"/>
+          </a:p>
+        </p:txBody>
+      </p:sp>
+    </p:spTree>
+    <p:extLst>
+      <p:ext uri="{BB962C8B-B14F-4D97-AF65-F5344CB8AC3E}">
+        <p14:creationId xmlns:p14="http://schemas.microsoft.com/office/powerpoint/2010/main" val="2676423194"/>
+      </p:ext>
+    </p:extLst>
+  </p:cSld>
+  <p:clrMapOvr>
+    <a:masterClrMapping/>
+  </p:clrMapOvr>
+</p:notes>
+</file>
+
+<file path=ppt/notesSlides/notesSlide7.xml><?xml version="1.0" encoding="utf-8"?>
+<p:notes xmlns:a="http://schemas.openxmlformats.org/drawingml/2006/main" xmlns:r="http://schemas.openxmlformats.org/officeDocument/2006/relationships" xmlns:p="http://schemas.openxmlformats.org/presentationml/2006/main">
+  <p:cSld>
+    <p:spTree>
+      <p:nvGrpSpPr>
+        <p:cNvPr id="1" name="">
+          <a:extLst>
+            <a:ext uri="{FF2B5EF4-FFF2-40B4-BE49-F238E27FC236}">
+              <a16:creationId xmlns:a16="http://schemas.microsoft.com/office/drawing/2014/main" id="{44452D85-D859-2CF8-7D62-5A49E921D316}"/>
+            </a:ext>
+          </a:extLst>
+        </p:cNvPr>
+        <p:cNvGrpSpPr/>
+        <p:nvPr/>
+      </p:nvGrpSpPr>
+      <p:grpSpPr>
+        <a:xfrm>
+          <a:off x="0" y="0"/>
+          <a:ext cx="0" cy="0"/>
+          <a:chOff x="0" y="0"/>
+          <a:chExt cx="0" cy="0"/>
+        </a:xfrm>
+      </p:grpSpPr>
+      <p:sp>
+        <p:nvSpPr>
+          <p:cNvPr id="2" name="Slide Image Placeholder 1">
+            <a:extLst>
+              <a:ext uri="{FF2B5EF4-FFF2-40B4-BE49-F238E27FC236}">
+                <a16:creationId xmlns:a16="http://schemas.microsoft.com/office/drawing/2014/main" id="{98DF6E65-26C7-0006-F5A4-55C9D53786AD}"/>
+              </a:ext>
+            </a:extLst>
+          </p:cNvPr>
+          <p:cNvSpPr>
+            <a:spLocks noGrp="1" noRot="1" noChangeAspect="1"/>
+          </p:cNvSpPr>
+          <p:nvPr>
+            <p:ph type="sldImg"/>
+          </p:nvPr>
+        </p:nvSpPr>
+        <p:spPr/>
+      </p:sp>
+      <p:sp>
+        <p:nvSpPr>
+          <p:cNvPr id="3" name="Notes Placeholder 2">
+            <a:extLst>
+              <a:ext uri="{FF2B5EF4-FFF2-40B4-BE49-F238E27FC236}">
+                <a16:creationId xmlns:a16="http://schemas.microsoft.com/office/drawing/2014/main" id="{0D6A1A13-74FB-B694-8E30-7E1DD0742705}"/>
+              </a:ext>
+            </a:extLst>
+          </p:cNvPr>
+          <p:cNvSpPr>
+            <a:spLocks noGrp="1"/>
+          </p:cNvSpPr>
+          <p:nvPr>
+            <p:ph type="body" idx="1"/>
+          </p:nvPr>
+        </p:nvSpPr>
+        <p:spPr/>
+        <p:txBody>
+          <a:bodyPr/>
+          <a:lstStyle/>
+          <a:p>
+            <a:endParaRPr lang="en-US" dirty="0"/>
+          </a:p>
+        </p:txBody>
+      </p:sp>
+      <p:sp>
+        <p:nvSpPr>
+          <p:cNvPr id="4" name="Slide Number Placeholder 3">
+            <a:extLst>
+              <a:ext uri="{FF2B5EF4-FFF2-40B4-BE49-F238E27FC236}">
+                <a16:creationId xmlns:a16="http://schemas.microsoft.com/office/drawing/2014/main" id="{30FC9427-E730-9A2A-12E7-328DE01C1AA9}"/>
+              </a:ext>
+            </a:extLst>
+          </p:cNvPr>
+          <p:cNvSpPr>
+            <a:spLocks noGrp="1"/>
+          </p:cNvSpPr>
+          <p:nvPr>
+            <p:ph type="sldNum" sz="quarter" idx="5"/>
+          </p:nvPr>
+        </p:nvSpPr>
+        <p:spPr/>
+        <p:txBody>
+          <a:bodyPr/>
+          <a:lstStyle/>
+          <a:p>
+            <a:fld id="{D624DF53-3DD3-9F45-9E7E-472B96F1AB81}" type="slidenum">
+              <a:rPr lang="en-US" smtClean="0"/>
+              <a:pPr/>
+              <a:t>20</a:t>
+            </a:fld>
+            <a:endParaRPr lang="en-US"/>
+          </a:p>
+        </p:txBody>
+      </p:sp>
+    </p:spTree>
+    <p:extLst>
+      <p:ext uri="{BB962C8B-B14F-4D97-AF65-F5344CB8AC3E}">
+        <p14:creationId xmlns:p14="http://schemas.microsoft.com/office/powerpoint/2010/main" val="245707839"/>
+      </p:ext>
+    </p:extLst>
+  </p:cSld>
+  <p:clrMapOvr>
+    <a:masterClrMapping/>
+  </p:clrMapOvr>
+</p:notes>
+</file>
+
+<file path=ppt/notesSlides/notesSlide8.xml><?xml version="1.0" encoding="utf-8"?>
+<p:notes xmlns:a="http://schemas.openxmlformats.org/drawingml/2006/main" xmlns:r="http://schemas.openxmlformats.org/officeDocument/2006/relationships" xmlns:p="http://schemas.openxmlformats.org/presentationml/2006/main">
+  <p:cSld>
+    <p:spTree>
+      <p:nvGrpSpPr>
+        <p:cNvPr id="1" name=""/>
+        <p:cNvGrpSpPr/>
+        <p:nvPr/>
+      </p:nvGrpSpPr>
+      <p:grpSpPr>
+        <a:xfrm>
+          <a:off x="0" y="0"/>
+          <a:ext cx="0" cy="0"/>
+          <a:chOff x="0" y="0"/>
+          <a:chExt cx="0" cy="0"/>
+        </a:xfrm>
+      </p:grpSpPr>
+      <p:sp>
+        <p:nvSpPr>
+          <p:cNvPr id="2" name="Slide Image Placeholder 1"/>
+          <p:cNvSpPr>
+            <a:spLocks noGrp="1" noRot="1" noChangeAspect="1"/>
+          </p:cNvSpPr>
+          <p:nvPr>
+            <p:ph type="sldImg"/>
+          </p:nvPr>
+        </p:nvSpPr>
+        <p:spPr/>
+      </p:sp>
+      <p:sp>
+        <p:nvSpPr>
+          <p:cNvPr id="3" name="Notes Placeholder 2"/>
+          <p:cNvSpPr>
+            <a:spLocks noGrp="1"/>
+          </p:cNvSpPr>
+          <p:nvPr>
+            <p:ph type="body" idx="1"/>
+          </p:nvPr>
+        </p:nvSpPr>
+        <p:spPr/>
+        <p:txBody>
+          <a:bodyPr/>
+          <a:lstStyle/>
+          <a:p>
             <a:pPr marL="0" marR="0" lvl="0" indent="0" algn="l" defTabSz="457200" rtl="0" eaLnBrk="1" fontAlgn="auto" latinLnBrk="0" hangingPunct="1">
               <a:lnSpc>
                 <a:spcPct val="100000"/>
@@ -7716,7 +7976,7 @@
             <a:fld id="{D624DF53-3DD3-9F45-9E7E-472B96F1AB81}" type="slidenum">
               <a:rPr lang="en-US" smtClean="0"/>
               <a:pPr/>
-              <a:t>22</a:t>
+              <a:t>24</a:t>
             </a:fld>
             <a:endParaRPr lang="en-US"/>
           </a:p>
@@ -7877,7 +8137,7 @@
             <a:pPr eaLnBrk="1" latinLnBrk="0" hangingPunct="1"/>
             <a:fld id="{8E8B2B42-CBC2-7D4E-BA50-0E7F29B4DAAB}" type="datetime1">
               <a:rPr lang="en-US" smtClean="0"/>
-              <a:t>10/4/2025</a:t>
+              <a:t>10/7/2025</a:t>
             </a:fld>
             <a:endParaRPr lang="en-US" sz="1600" dirty="0"/>
           </a:p>
@@ -8237,7 +8497,7 @@
             <a:pPr eaLnBrk="1" latinLnBrk="0" hangingPunct="1"/>
             <a:fld id="{597D1259-3A46-254C-ADDB-B5DA4F1DF3DA}" type="datetime1">
               <a:rPr lang="en-US" smtClean="0"/>
-              <a:t>10/4/2025</a:t>
+              <a:t>10/7/2025</a:t>
             </a:fld>
             <a:endParaRPr lang="en-US"/>
           </a:p>
@@ -8413,7 +8673,7 @@
             <a:pPr eaLnBrk="1" latinLnBrk="0" hangingPunct="1"/>
             <a:fld id="{CCA104EC-54AA-E04F-BDC0-22B4E8892699}" type="datetime1">
               <a:rPr lang="en-US" smtClean="0"/>
-              <a:t>10/4/2025</a:t>
+              <a:t>10/7/2025</a:t>
             </a:fld>
             <a:endParaRPr lang="en-US"/>
           </a:p>
@@ -8649,7 +8909,7 @@
             <a:pPr eaLnBrk="1" latinLnBrk="0" hangingPunct="1"/>
             <a:fld id="{A9E6F060-20EB-3246-9088-08BF5F1271DE}" type="datetime1">
               <a:rPr lang="en-US" smtClean="0"/>
-              <a:t>10/4/2025</a:t>
+              <a:t>10/7/2025</a:t>
             </a:fld>
             <a:endParaRPr lang="en-US" dirty="0"/>
           </a:p>
@@ -8919,7 +9179,7 @@
             <a:pPr eaLnBrk="1" latinLnBrk="0" hangingPunct="1"/>
             <a:fld id="{34C82E41-DA7E-CA4C-823B-C759BEA16CE8}" type="datetime1">
               <a:rPr lang="en-US" smtClean="0"/>
-              <a:t>10/4/2025</a:t>
+              <a:t>10/7/2025</a:t>
             </a:fld>
             <a:endParaRPr lang="en-US" dirty="0"/>
           </a:p>
@@ -9140,7 +9400,7 @@
             <a:pPr eaLnBrk="1" latinLnBrk="0" hangingPunct="1"/>
             <a:fld id="{2500C8B0-EB1A-0A41-B839-C4B99CD2225A}" type="datetime1">
               <a:rPr lang="en-US" smtClean="0"/>
-              <a:t>10/4/2025</a:t>
+              <a:t>10/7/2025</a:t>
             </a:fld>
             <a:endParaRPr lang="en-US"/>
           </a:p>
@@ -9493,7 +9753,7 @@
             <a:pPr eaLnBrk="1" latinLnBrk="0" hangingPunct="1"/>
             <a:fld id="{4F16605B-D952-1149-A111-28A5633BAE48}" type="datetime1">
               <a:rPr lang="en-US" smtClean="0"/>
-              <a:t>10/4/2025</a:t>
+              <a:t>10/7/2025</a:t>
             </a:fld>
             <a:endParaRPr lang="en-US"/>
           </a:p>
@@ -9726,7 +9986,7 @@
             <a:pPr eaLnBrk="1" latinLnBrk="0" hangingPunct="1"/>
             <a:fld id="{91109A1C-29B2-B04E-8365-C9D22C4AE842}" type="datetime1">
               <a:rPr lang="en-US" smtClean="0"/>
-              <a:t>10/4/2025</a:t>
+              <a:t>10/7/2025</a:t>
             </a:fld>
             <a:endParaRPr lang="en-US"/>
           </a:p>
@@ -9868,7 +10128,7 @@
             <a:pPr eaLnBrk="1" latinLnBrk="0" hangingPunct="1"/>
             <a:fld id="{2CE417B6-A42B-064A-8677-46C55C4F613A}" type="datetime1">
               <a:rPr lang="en-US" smtClean="0"/>
-              <a:t>10/4/2025</a:t>
+              <a:t>10/7/2025</a:t>
             </a:fld>
             <a:endParaRPr lang="en-US"/>
           </a:p>
@@ -10146,7 +10406,7 @@
             <a:pPr eaLnBrk="1" latinLnBrk="0" hangingPunct="1"/>
             <a:fld id="{DE76F5AD-3F1F-7141-BC8A-012C5728BE2D}" type="datetime1">
               <a:rPr lang="en-US" smtClean="0"/>
-              <a:t>10/4/2025</a:t>
+              <a:t>10/7/2025</a:t>
             </a:fld>
             <a:endParaRPr lang="en-US"/>
           </a:p>
@@ -10554,7 +10814,7 @@
             <a:pPr eaLnBrk="1" latinLnBrk="0" hangingPunct="1"/>
             <a:fld id="{09FA12B8-739E-4D47-A14C-180C3BC10865}" type="datetime1">
               <a:rPr lang="en-US" smtClean="0"/>
-              <a:t>10/4/2025</a:t>
+              <a:t>10/7/2025</a:t>
             </a:fld>
             <a:endParaRPr lang="en-US"/>
           </a:p>
@@ -10892,7 +11152,7 @@
             <a:pPr eaLnBrk="1" latinLnBrk="0" hangingPunct="1"/>
             <a:fld id="{CDD18CD8-E404-844E-A4BD-DF69B8E5881E}" type="datetime1">
               <a:rPr lang="en-US" smtClean="0"/>
-              <a:t>10/4/2025</a:t>
+              <a:t>10/7/2025</a:t>
             </a:fld>
             <a:endParaRPr lang="en-US" sz="1400" dirty="0">
               <a:solidFill>
@@ -12314,34 +12574,7 @@
                           </a:solidFill>
                           <a:latin typeface="Cambria Math" panose="02040503050406030204" pitchFamily="18" charset="0"/>
                         </a:rPr>
-                        <m:t>10</m:t>
-                      </m:r>
-                      <m:r>
-                        <a:rPr lang="en-US" i="1">
-                          <a:solidFill>
-                            <a:srgbClr val="000000"/>
-                          </a:solidFill>
-                          <a:latin typeface="Cambria Math" panose="02040503050406030204" pitchFamily="18" charset="0"/>
-                        </a:rPr>
-                        <m:t>.</m:t>
-                      </m:r>
-                      <m:r>
-                        <a:rPr lang="en-US" i="1">
-                          <a:solidFill>
-                            <a:srgbClr val="000000"/>
-                          </a:solidFill>
-                          <a:latin typeface="Cambria Math" panose="02040503050406030204" pitchFamily="18" charset="0"/>
-                        </a:rPr>
-                        <m:t>746</m:t>
-                      </m:r>
-                      <m:r>
-                        <a:rPr lang="en-US" i="1">
-                          <a:solidFill>
-                            <a:srgbClr val="000000"/>
-                          </a:solidFill>
-                          <a:latin typeface="Cambria Math" panose="02040503050406030204" pitchFamily="18" charset="0"/>
-                        </a:rPr>
-                        <m:t>×</m:t>
+                        <m:t>10.746×</m:t>
                       </m:r>
                       <m:sSup>
                         <m:sSupPr>
@@ -12405,25 +12638,7 @@
                               </a:solidFill>
                               <a:latin typeface="Cambria Math" panose="02040503050406030204" pitchFamily="18" charset="0"/>
                             </a:rPr>
-                            <m:t>10</m:t>
-                          </m:r>
-                          <m:r>
-                            <a:rPr lang="en-US" i="1">
-                              <a:solidFill>
-                                <a:srgbClr val="000000"/>
-                              </a:solidFill>
-                              <a:latin typeface="Cambria Math" panose="02040503050406030204" pitchFamily="18" charset="0"/>
-                            </a:rPr>
-                            <m:t>.</m:t>
-                          </m:r>
-                          <m:r>
-                            <a:rPr lang="en-US" i="1">
-                              <a:solidFill>
-                                <a:srgbClr val="000000"/>
-                              </a:solidFill>
-                              <a:latin typeface="Cambria Math" panose="02040503050406030204" pitchFamily="18" charset="0"/>
-                            </a:rPr>
-                            <m:t>746</m:t>
+                            <m:t>10.746</m:t>
                           </m:r>
                         </m:num>
                         <m:den>
@@ -12445,25 +12660,7 @@
                           </a:solidFill>
                           <a:latin typeface="Cambria Math" panose="02040503050406030204" pitchFamily="18" charset="0"/>
                         </a:rPr>
-                        <m:t>×</m:t>
-                      </m:r>
-                      <m:r>
-                        <a:rPr lang="en-US" i="1">
-                          <a:solidFill>
-                            <a:srgbClr val="000000"/>
-                          </a:solidFill>
-                          <a:latin typeface="Cambria Math" panose="02040503050406030204" pitchFamily="18" charset="0"/>
-                        </a:rPr>
-                        <m:t>8</m:t>
-                      </m:r>
-                      <m:r>
-                        <a:rPr lang="en-US" i="1">
-                          <a:solidFill>
-                            <a:srgbClr val="000000"/>
-                          </a:solidFill>
-                          <a:latin typeface="Cambria Math" panose="02040503050406030204" pitchFamily="18" charset="0"/>
-                        </a:rPr>
-                        <m:t>×</m:t>
+                        <m:t>×8×</m:t>
                       </m:r>
                       <m:sSup>
                         <m:sSupPr>
@@ -14158,7 +14355,13 @@
                       <a:rPr lang="en-US" sz="2800" i="1">
                         <a:latin typeface="Cambria Math"/>
                       </a:rPr>
-                      <m:t>=129</m:t>
+                      <m:t>=</m:t>
+                    </m:r>
+                    <m:r>
+                      <a:rPr lang="en-US" sz="2800" i="1">
+                        <a:latin typeface="Cambria Math"/>
+                      </a:rPr>
+                      <m:t>129</m:t>
                     </m:r>
                   </m:oMath>
                 </a14:m>
@@ -14184,7 +14387,13 @@
                           <a:rPr lang="en-US" sz="2800" i="1">
                             <a:latin typeface="Cambria Math"/>
                           </a:rPr>
-                          <m:t>0.</m:t>
+                          <m:t>0</m:t>
+                        </m:r>
+                        <m:r>
+                          <a:rPr lang="en-US" sz="2800" i="1">
+                            <a:latin typeface="Cambria Math"/>
+                          </a:rPr>
+                          <m:t>.</m:t>
                         </m:r>
                         <m:r>
                           <a:rPr lang="en-US" sz="2800" b="0" i="1" smtClean="0">
@@ -14244,7 +14453,13 @@
                           <a:rPr lang="en-US" sz="2800" i="1">
                             <a:latin typeface="Cambria Math"/>
                           </a:rPr>
-                          <m:t>−1</m:t>
+                          <m:t>−</m:t>
+                        </m:r>
+                        <m:r>
+                          <a:rPr lang="en-US" sz="2800" i="1">
+                            <a:latin typeface="Cambria Math"/>
+                          </a:rPr>
+                          <m:t>1</m:t>
                         </m:r>
                       </m:sup>
                     </m:sSup>
@@ -14287,7 +14502,13 @@
                           <a:rPr lang="en-US" sz="2800" i="1">
                             <a:latin typeface="Cambria Math"/>
                           </a:rPr>
-                          <m:t>−2</m:t>
+                          <m:t>−</m:t>
+                        </m:r>
+                        <m:r>
+                          <a:rPr lang="en-US" sz="2800" i="1">
+                            <a:latin typeface="Cambria Math"/>
+                          </a:rPr>
+                          <m:t>2</m:t>
                         </m:r>
                       </m:sup>
                     </m:sSup>
@@ -14295,7 +14516,19 @@
                       <a:rPr lang="en-US" sz="2800" i="1">
                         <a:latin typeface="Cambria Math"/>
                       </a:rPr>
-                      <m:t>+1×</m:t>
+                      <m:t>+</m:t>
+                    </m:r>
+                    <m:r>
+                      <a:rPr lang="en-US" sz="2800" i="1">
+                        <a:latin typeface="Cambria Math"/>
+                      </a:rPr>
+                      <m:t>1</m:t>
+                    </m:r>
+                    <m:r>
+                      <a:rPr lang="en-US" sz="2800" i="1">
+                        <a:latin typeface="Cambria Math"/>
+                      </a:rPr>
+                      <m:t>×</m:t>
                     </m:r>
                     <m:sSup>
                       <m:sSupPr>
@@ -14318,7 +14551,13 @@
                           <a:rPr lang="en-US" sz="2800" i="1">
                             <a:latin typeface="Cambria Math"/>
                           </a:rPr>
-                          <m:t>−3</m:t>
+                          <m:t>−</m:t>
+                        </m:r>
+                        <m:r>
+                          <a:rPr lang="en-US" sz="2800" i="1">
+                            <a:latin typeface="Cambria Math"/>
+                          </a:rPr>
+                          <m:t>3</m:t>
                         </m:r>
                       </m:sup>
                     </m:sSup>
@@ -14332,7 +14571,13 @@
                       <a:rPr lang="en-US" sz="2800" i="1">
                         <a:latin typeface="Cambria Math"/>
                       </a:rPr>
-                      <m:t>0.</m:t>
+                      <m:t>0</m:t>
+                    </m:r>
+                    <m:r>
+                      <a:rPr lang="en-US" sz="2800" i="1">
+                        <a:latin typeface="Cambria Math"/>
+                      </a:rPr>
+                      <m:t>.</m:t>
                     </m:r>
                     <m:r>
                       <a:rPr lang="en-US" sz="2800" b="0" i="1" smtClean="0">
@@ -14384,7 +14629,13 @@
                               <a:rPr lang="en-US" sz="2800" i="1">
                                 <a:latin typeface="Cambria Math"/>
                               </a:rPr>
-                              <m:t>−1</m:t>
+                              <m:t>−</m:t>
+                            </m:r>
+                            <m:r>
+                              <a:rPr lang="en-US" sz="2800" i="1">
+                                <a:latin typeface="Cambria Math"/>
+                              </a:rPr>
+                              <m:t>1</m:t>
                             </m:r>
                           </m:e>
                         </m:d>
@@ -14417,7 +14668,13 @@
                           <a:rPr lang="en-US" sz="2800" i="1">
                             <a:latin typeface="Cambria Math"/>
                           </a:rPr>
-                          <m:t>1+</m:t>
+                          <m:t>1</m:t>
+                        </m:r>
+                        <m:r>
+                          <a:rPr lang="en-US" sz="2800" i="1">
+                            <a:latin typeface="Cambria Math"/>
+                          </a:rPr>
+                          <m:t>+</m:t>
                         </m:r>
                         <m:r>
                           <a:rPr lang="en-US" sz="2800" i="1">
@@ -14460,7 +14717,13 @@
                           <a:rPr lang="en-US" sz="2800" i="1">
                             <a:latin typeface="Cambria Math"/>
                           </a:rPr>
-                          <m:t>−127</m:t>
+                          <m:t>−</m:t>
+                        </m:r>
+                        <m:r>
+                          <a:rPr lang="en-US" sz="2800" i="1">
+                            <a:latin typeface="Cambria Math"/>
+                          </a:rPr>
+                          <m:t>127</m:t>
                         </m:r>
                       </m:sup>
                     </m:sSup>
@@ -14511,7 +14774,13 @@
                                 <a:rPr lang="en-US" sz="2800" i="1">
                                   <a:latin typeface="Cambria Math"/>
                                 </a:rPr>
-                                <m:t>−1</m:t>
+                                <m:t>−</m:t>
+                              </m:r>
+                              <m:r>
+                                <a:rPr lang="en-US" sz="2800" i="1">
+                                  <a:latin typeface="Cambria Math"/>
+                                </a:rPr>
+                                <m:t>1</m:t>
                               </m:r>
                             </m:e>
                           </m:d>
@@ -14544,7 +14813,25 @@
                             <a:rPr lang="en-US" sz="2800" i="1">
                               <a:latin typeface="Cambria Math"/>
                             </a:rPr>
-                            <m:t>1+0.</m:t>
+                            <m:t>1</m:t>
+                          </m:r>
+                          <m:r>
+                            <a:rPr lang="en-US" sz="2800" i="1">
+                              <a:latin typeface="Cambria Math"/>
+                            </a:rPr>
+                            <m:t>+</m:t>
+                          </m:r>
+                          <m:r>
+                            <a:rPr lang="en-US" sz="2800" i="1">
+                              <a:latin typeface="Cambria Math"/>
+                            </a:rPr>
+                            <m:t>0</m:t>
+                          </m:r>
+                          <m:r>
+                            <a:rPr lang="en-US" sz="2800" i="1">
+                              <a:latin typeface="Cambria Math"/>
+                            </a:rPr>
+                            <m:t>.</m:t>
                           </m:r>
                           <m:r>
                             <a:rPr lang="en-US" sz="2800" b="0" i="1" smtClean="0">
@@ -14593,7 +14880,13 @@
                             <a:rPr lang="en-US" sz="2800" i="1">
                               <a:latin typeface="Cambria Math"/>
                             </a:rPr>
-                            <m:t>−127</m:t>
+                            <m:t>−</m:t>
+                          </m:r>
+                          <m:r>
+                            <a:rPr lang="en-US" sz="2800" i="1">
+                              <a:latin typeface="Cambria Math"/>
+                            </a:rPr>
+                            <m:t>127</m:t>
                           </m:r>
                         </m:sup>
                       </m:sSup>
@@ -14612,7 +14905,31 @@
                         <a:rPr lang="en-US" sz="2800" i="1">
                           <a:latin typeface="Cambria Math"/>
                         </a:rPr>
-                        <m:t>−1×1.</m:t>
+                        <m:t>−</m:t>
+                      </m:r>
+                      <m:r>
+                        <a:rPr lang="en-US" sz="2800" i="1">
+                          <a:latin typeface="Cambria Math"/>
+                        </a:rPr>
+                        <m:t>1</m:t>
+                      </m:r>
+                      <m:r>
+                        <a:rPr lang="en-US" sz="2800" i="1">
+                          <a:latin typeface="Cambria Math"/>
+                        </a:rPr>
+                        <m:t>×</m:t>
+                      </m:r>
+                      <m:r>
+                        <a:rPr lang="en-US" sz="2800" i="1">
+                          <a:latin typeface="Cambria Math"/>
+                        </a:rPr>
+                        <m:t>1</m:t>
+                      </m:r>
+                      <m:r>
+                        <a:rPr lang="en-US" sz="2800" i="1">
+                          <a:latin typeface="Cambria Math"/>
+                        </a:rPr>
+                        <m:t>.</m:t>
                       </m:r>
                       <m:r>
                         <a:rPr lang="en-US" sz="2800" b="0" i="1" smtClean="0">
@@ -14666,7 +14983,19 @@
                         <a:rPr lang="en-US" sz="2800" b="0" i="1" smtClean="0">
                           <a:latin typeface="Cambria Math" panose="02040503050406030204" pitchFamily="18" charset="0"/>
                         </a:rPr>
-                        <m:t>4.5</m:t>
+                        <m:t>4</m:t>
+                      </m:r>
+                      <m:r>
+                        <a:rPr lang="en-US" sz="2800" b="0" i="1" smtClean="0">
+                          <a:latin typeface="Cambria Math" panose="02040503050406030204" pitchFamily="18" charset="0"/>
+                        </a:rPr>
+                        <m:t>.</m:t>
+                      </m:r>
+                      <m:r>
+                        <a:rPr lang="en-US" sz="2800" b="0" i="1" smtClean="0">
+                          <a:latin typeface="Cambria Math" panose="02040503050406030204" pitchFamily="18" charset="0"/>
+                        </a:rPr>
+                        <m:t>5</m:t>
                       </m:r>
                     </m:oMath>
                   </m:oMathPara>
@@ -15676,7 +16005,13 @@
                       <a:rPr lang="en-US" sz="2800" i="1">
                         <a:latin typeface="Cambria Math"/>
                       </a:rPr>
-                      <m:t>=130</m:t>
+                      <m:t>=</m:t>
+                    </m:r>
+                    <m:r>
+                      <a:rPr lang="en-US" sz="2800" i="1">
+                        <a:latin typeface="Cambria Math"/>
+                      </a:rPr>
+                      <m:t>130</m:t>
                     </m:r>
                   </m:oMath>
                 </a14:m>
@@ -15702,7 +16037,13 @@
                           <a:rPr lang="en-US" sz="2800" i="1">
                             <a:latin typeface="Cambria Math"/>
                           </a:rPr>
-                          <m:t>0.</m:t>
+                          <m:t>0</m:t>
+                        </m:r>
+                        <m:r>
+                          <a:rPr lang="en-US" sz="2800" i="1">
+                            <a:latin typeface="Cambria Math"/>
+                          </a:rPr>
+                          <m:t>.</m:t>
                         </m:r>
                         <m:r>
                           <a:rPr lang="en-US" sz="2800" b="0" i="1" smtClean="0">
@@ -15762,7 +16103,13 @@
                           <a:rPr lang="en-US" sz="2800" i="1">
                             <a:latin typeface="Cambria Math"/>
                           </a:rPr>
-                          <m:t>−1</m:t>
+                          <m:t>−</m:t>
+                        </m:r>
+                        <m:r>
+                          <a:rPr lang="en-US" sz="2800" i="1">
+                            <a:latin typeface="Cambria Math"/>
+                          </a:rPr>
+                          <m:t>1</m:t>
                         </m:r>
                       </m:sup>
                     </m:sSup>
@@ -15805,7 +16152,13 @@
                           <a:rPr lang="en-US" sz="2800" i="1">
                             <a:latin typeface="Cambria Math"/>
                           </a:rPr>
-                          <m:t>−2</m:t>
+                          <m:t>−</m:t>
+                        </m:r>
+                        <m:r>
+                          <a:rPr lang="en-US" sz="2800" i="1">
+                            <a:latin typeface="Cambria Math"/>
+                          </a:rPr>
+                          <m:t>2</m:t>
                         </m:r>
                       </m:sup>
                     </m:sSup>
@@ -15813,7 +16166,19 @@
                       <a:rPr lang="en-US" sz="2800" i="1">
                         <a:latin typeface="Cambria Math"/>
                       </a:rPr>
-                      <m:t>+1×</m:t>
+                      <m:t>+</m:t>
+                    </m:r>
+                    <m:r>
+                      <a:rPr lang="en-US" sz="2800" i="1">
+                        <a:latin typeface="Cambria Math"/>
+                      </a:rPr>
+                      <m:t>1</m:t>
+                    </m:r>
+                    <m:r>
+                      <a:rPr lang="en-US" sz="2800" i="1">
+                        <a:latin typeface="Cambria Math"/>
+                      </a:rPr>
+                      <m:t>×</m:t>
                     </m:r>
                     <m:sSup>
                       <m:sSupPr>
@@ -15850,7 +16215,25 @@
                       <a:rPr lang="en-US" sz="2800" i="1">
                         <a:latin typeface="Cambria Math" panose="02040503050406030204" pitchFamily="18" charset="0"/>
                       </a:rPr>
-                      <m:t>=0.8125</m:t>
+                      <m:t>=</m:t>
+                    </m:r>
+                    <m:r>
+                      <a:rPr lang="en-US" sz="2800" i="1">
+                        <a:latin typeface="Cambria Math" panose="02040503050406030204" pitchFamily="18" charset="0"/>
+                      </a:rPr>
+                      <m:t>0</m:t>
+                    </m:r>
+                    <m:r>
+                      <a:rPr lang="en-US" sz="2800" i="1">
+                        <a:latin typeface="Cambria Math" panose="02040503050406030204" pitchFamily="18" charset="0"/>
+                      </a:rPr>
+                      <m:t>.</m:t>
+                    </m:r>
+                    <m:r>
+                      <a:rPr lang="en-US" sz="2800" i="1">
+                        <a:latin typeface="Cambria Math" panose="02040503050406030204" pitchFamily="18" charset="0"/>
+                      </a:rPr>
+                      <m:t>8125</m:t>
                     </m:r>
                   </m:oMath>
                 </a14:m>
@@ -15896,7 +16279,13 @@
                               <a:rPr lang="en-US" sz="2800" i="1">
                                 <a:latin typeface="Cambria Math"/>
                               </a:rPr>
-                              <m:t>−1</m:t>
+                              <m:t>−</m:t>
+                            </m:r>
+                            <m:r>
+                              <a:rPr lang="en-US" sz="2800" i="1">
+                                <a:latin typeface="Cambria Math"/>
+                              </a:rPr>
+                              <m:t>1</m:t>
                             </m:r>
                           </m:e>
                         </m:d>
@@ -15929,7 +16318,13 @@
                           <a:rPr lang="en-US" sz="2800" i="1">
                             <a:latin typeface="Cambria Math"/>
                           </a:rPr>
-                          <m:t>1+</m:t>
+                          <m:t>1</m:t>
+                        </m:r>
+                        <m:r>
+                          <a:rPr lang="en-US" sz="2800" i="1">
+                            <a:latin typeface="Cambria Math"/>
+                          </a:rPr>
+                          <m:t>+</m:t>
                         </m:r>
                         <m:r>
                           <a:rPr lang="en-US" sz="2800" i="1">
@@ -15972,7 +16367,13 @@
                           <a:rPr lang="en-US" sz="2800" i="1">
                             <a:latin typeface="Cambria Math"/>
                           </a:rPr>
-                          <m:t>−127</m:t>
+                          <m:t>−</m:t>
+                        </m:r>
+                        <m:r>
+                          <a:rPr lang="en-US" sz="2800" i="1">
+                            <a:latin typeface="Cambria Math"/>
+                          </a:rPr>
+                          <m:t>127</m:t>
                         </m:r>
                       </m:sup>
                     </m:sSup>
@@ -16023,7 +16424,13 @@
                                 <a:rPr lang="en-US" sz="2800" i="1">
                                   <a:latin typeface="Cambria Math"/>
                                 </a:rPr>
-                                <m:t>−1</m:t>
+                                <m:t>−</m:t>
+                              </m:r>
+                              <m:r>
+                                <a:rPr lang="en-US" sz="2800" i="1">
+                                  <a:latin typeface="Cambria Math"/>
+                                </a:rPr>
+                                <m:t>1</m:t>
                               </m:r>
                             </m:e>
                           </m:d>
@@ -16056,13 +16463,31 @@
                             <a:rPr lang="en-US" sz="2800" i="1">
                               <a:latin typeface="Cambria Math"/>
                             </a:rPr>
-                            <m:t>1+</m:t>
+                            <m:t>1</m:t>
+                          </m:r>
+                          <m:r>
+                            <a:rPr lang="en-US" sz="2800" i="1">
+                              <a:latin typeface="Cambria Math"/>
+                            </a:rPr>
+                            <m:t>+</m:t>
                           </m:r>
                           <m:r>
                             <a:rPr lang="en-US" sz="2800" i="1">
                               <a:latin typeface="Cambria Math" panose="02040503050406030204" pitchFamily="18" charset="0"/>
                             </a:rPr>
-                            <m:t>0.8125</m:t>
+                            <m:t>0</m:t>
+                          </m:r>
+                          <m:r>
+                            <a:rPr lang="en-US" sz="2800" i="1">
+                              <a:latin typeface="Cambria Math" panose="02040503050406030204" pitchFamily="18" charset="0"/>
+                            </a:rPr>
+                            <m:t>.</m:t>
+                          </m:r>
+                          <m:r>
+                            <a:rPr lang="en-US" sz="2800" i="1">
+                              <a:latin typeface="Cambria Math" panose="02040503050406030204" pitchFamily="18" charset="0"/>
+                            </a:rPr>
+                            <m:t>8125</m:t>
                           </m:r>
                         </m:e>
                       </m:d>
@@ -16105,7 +16530,13 @@
                             <a:rPr lang="en-US" sz="2800" i="1">
                               <a:latin typeface="Cambria Math"/>
                             </a:rPr>
-                            <m:t>−127</m:t>
+                            <m:t>−</m:t>
+                          </m:r>
+                          <m:r>
+                            <a:rPr lang="en-US" sz="2800" i="1">
+                              <a:latin typeface="Cambria Math"/>
+                            </a:rPr>
+                            <m:t>127</m:t>
                           </m:r>
                         </m:sup>
                       </m:sSup>
@@ -16124,7 +16555,25 @@
                         <a:rPr lang="en-US" sz="2800" i="1">
                           <a:latin typeface="Cambria Math"/>
                         </a:rPr>
-                        <m:t>1×1.</m:t>
+                        <m:t>1</m:t>
+                      </m:r>
+                      <m:r>
+                        <a:rPr lang="en-US" sz="2800" i="1">
+                          <a:latin typeface="Cambria Math"/>
+                        </a:rPr>
+                        <m:t>×</m:t>
+                      </m:r>
+                      <m:r>
+                        <a:rPr lang="en-US" sz="2800" i="1">
+                          <a:latin typeface="Cambria Math"/>
+                        </a:rPr>
+                        <m:t>1</m:t>
+                      </m:r>
+                      <m:r>
+                        <a:rPr lang="en-US" sz="2800" i="1">
+                          <a:latin typeface="Cambria Math"/>
+                        </a:rPr>
+                        <m:t>.</m:t>
                       </m:r>
                       <m:r>
                         <a:rPr lang="en-US" sz="2800" b="0" i="1" smtClean="0">
@@ -16178,7 +16627,19 @@
                         <a:rPr lang="en-US" sz="2800" b="0" i="1" smtClean="0">
                           <a:latin typeface="Cambria Math" panose="02040503050406030204" pitchFamily="18" charset="0"/>
                         </a:rPr>
-                        <m:t>14.5</m:t>
+                        <m:t>14</m:t>
+                      </m:r>
+                      <m:r>
+                        <a:rPr lang="en-US" sz="2800" b="0" i="1" smtClean="0">
+                          <a:latin typeface="Cambria Math" panose="02040503050406030204" pitchFamily="18" charset="0"/>
+                        </a:rPr>
+                        <m:t>.</m:t>
+                      </m:r>
+                      <m:r>
+                        <a:rPr lang="en-US" sz="2800" b="0" i="1" smtClean="0">
+                          <a:latin typeface="Cambria Math" panose="02040503050406030204" pitchFamily="18" charset="0"/>
+                        </a:rPr>
+                        <m:t>5</m:t>
                       </m:r>
                     </m:oMath>
                   </m:oMathPara>
@@ -16396,7 +16857,19 @@
                       <a:rPr lang="en-US" i="1" smtClean="0">
                         <a:latin typeface="Cambria Math"/>
                       </a:rPr>
-                      <m:t>14.5</m:t>
+                      <m:t>14</m:t>
+                    </m:r>
+                    <m:r>
+                      <a:rPr lang="en-US" i="1" smtClean="0">
+                        <a:latin typeface="Cambria Math"/>
+                      </a:rPr>
+                      <m:t>.</m:t>
+                    </m:r>
+                    <m:r>
+                      <a:rPr lang="en-US" i="1" smtClean="0">
+                        <a:latin typeface="Cambria Math"/>
+                      </a:rPr>
+                      <m:t>5</m:t>
                     </m:r>
                     <m:r>
                       <a:rPr lang="en-US" b="0" i="1" smtClean="0">
@@ -16448,7 +16921,19 @@
                           <a:rPr lang="en-US" i="1">
                             <a:latin typeface="Cambria Math"/>
                           </a:rPr>
-                          <m:t>14.5</m:t>
+                          <m:t>14</m:t>
+                        </m:r>
+                        <m:r>
+                          <a:rPr lang="en-US" i="1">
+                            <a:latin typeface="Cambria Math"/>
+                          </a:rPr>
+                          <m:t>.</m:t>
+                        </m:r>
+                        <m:r>
+                          <a:rPr lang="en-US" i="1">
+                            <a:latin typeface="Cambria Math"/>
+                          </a:rPr>
+                          <m:t>5</m:t>
                         </m:r>
                       </m:num>
                       <m:den>
@@ -16483,7 +16968,25 @@
                       <a:rPr lang="en-US" b="0" i="1" smtClean="0">
                         <a:latin typeface="Cambria Math" panose="02040503050406030204" pitchFamily="18" charset="0"/>
                       </a:rPr>
-                      <m:t>=1.8125</m:t>
+                      <m:t>=</m:t>
+                    </m:r>
+                    <m:r>
+                      <a:rPr lang="en-US" b="0" i="1" smtClean="0">
+                        <a:latin typeface="Cambria Math" panose="02040503050406030204" pitchFamily="18" charset="0"/>
+                      </a:rPr>
+                      <m:t>1</m:t>
+                    </m:r>
+                    <m:r>
+                      <a:rPr lang="en-US" b="0" i="1" smtClean="0">
+                        <a:latin typeface="Cambria Math" panose="02040503050406030204" pitchFamily="18" charset="0"/>
+                      </a:rPr>
+                      <m:t>.</m:t>
+                    </m:r>
+                    <m:r>
+                      <a:rPr lang="en-US" b="0" i="1" smtClean="0">
+                        <a:latin typeface="Cambria Math" panose="02040503050406030204" pitchFamily="18" charset="0"/>
+                      </a:rPr>
+                      <m:t>8125</m:t>
                     </m:r>
                   </m:oMath>
                 </a14:m>
@@ -16502,7 +17005,49 @@
                       <a:rPr lang="en-US" i="1">
                         <a:latin typeface="Cambria Math"/>
                       </a:rPr>
-                      <m:t>14.5=1.8125×</m:t>
+                      <m:t>14</m:t>
+                    </m:r>
+                    <m:r>
+                      <a:rPr lang="en-US" i="1">
+                        <a:latin typeface="Cambria Math"/>
+                      </a:rPr>
+                      <m:t>.</m:t>
+                    </m:r>
+                    <m:r>
+                      <a:rPr lang="en-US" i="1">
+                        <a:latin typeface="Cambria Math"/>
+                      </a:rPr>
+                      <m:t>5</m:t>
+                    </m:r>
+                    <m:r>
+                      <a:rPr lang="en-US" i="1">
+                        <a:latin typeface="Cambria Math"/>
+                      </a:rPr>
+                      <m:t>=</m:t>
+                    </m:r>
+                    <m:r>
+                      <a:rPr lang="en-US" i="1">
+                        <a:latin typeface="Cambria Math"/>
+                      </a:rPr>
+                      <m:t>1</m:t>
+                    </m:r>
+                    <m:r>
+                      <a:rPr lang="en-US" i="1">
+                        <a:latin typeface="Cambria Math"/>
+                      </a:rPr>
+                      <m:t>.</m:t>
+                    </m:r>
+                    <m:r>
+                      <a:rPr lang="en-US" i="1">
+                        <a:latin typeface="Cambria Math"/>
+                      </a:rPr>
+                      <m:t>8125</m:t>
+                    </m:r>
+                    <m:r>
+                      <a:rPr lang="en-US" i="1">
+                        <a:latin typeface="Cambria Math"/>
+                      </a:rPr>
+                      <m:t>×</m:t>
                     </m:r>
                     <m:sSup>
                       <m:sSupPr>
@@ -16542,7 +17087,43 @@
                       <a:rPr lang="en-US" i="1">
                         <a:latin typeface="Cambria Math"/>
                       </a:rPr>
-                      <m:t>(1+0.8125)×</m:t>
+                      <m:t>(</m:t>
+                    </m:r>
+                    <m:r>
+                      <a:rPr lang="en-US" i="1">
+                        <a:latin typeface="Cambria Math"/>
+                      </a:rPr>
+                      <m:t>1</m:t>
+                    </m:r>
+                    <m:r>
+                      <a:rPr lang="en-US" i="1">
+                        <a:latin typeface="Cambria Math"/>
+                      </a:rPr>
+                      <m:t>+</m:t>
+                    </m:r>
+                    <m:r>
+                      <a:rPr lang="en-US" i="1">
+                        <a:latin typeface="Cambria Math"/>
+                      </a:rPr>
+                      <m:t>0</m:t>
+                    </m:r>
+                    <m:r>
+                      <a:rPr lang="en-US" i="1">
+                        <a:latin typeface="Cambria Math"/>
+                      </a:rPr>
+                      <m:t>.</m:t>
+                    </m:r>
+                    <m:r>
+                      <a:rPr lang="en-US" i="1">
+                        <a:latin typeface="Cambria Math"/>
+                      </a:rPr>
+                      <m:t>8125</m:t>
+                    </m:r>
+                    <m:r>
+                      <a:rPr lang="en-US" i="1">
+                        <a:latin typeface="Cambria Math"/>
+                      </a:rPr>
+                      <m:t>)×</m:t>
                     </m:r>
                     <m:sSup>
                       <m:sSupPr>
@@ -16592,7 +17173,13 @@
                       <a:rPr lang="en-US" b="0" i="1" smtClean="0">
                         <a:latin typeface="Cambria Math"/>
                       </a:rPr>
-                      <m:t>=0</m:t>
+                      <m:t>=</m:t>
+                    </m:r>
+                    <m:r>
+                      <a:rPr lang="en-US" b="0" i="1" smtClean="0">
+                        <a:latin typeface="Cambria Math"/>
+                      </a:rPr>
+                      <m:t>0</m:t>
                     </m:r>
                   </m:oMath>
                 </a14:m>
@@ -16625,7 +17212,37 @@
                       <a:rPr lang="en-US" i="1">
                         <a:latin typeface="Cambria Math"/>
                       </a:rPr>
-                      <m:t>3+127=130=</m:t>
+                      <m:t>3</m:t>
+                    </m:r>
+                    <m:r>
+                      <a:rPr lang="en-US" i="1">
+                        <a:latin typeface="Cambria Math"/>
+                      </a:rPr>
+                      <m:t>+</m:t>
+                    </m:r>
+                    <m:r>
+                      <a:rPr lang="en-US" i="1">
+                        <a:latin typeface="Cambria Math"/>
+                      </a:rPr>
+                      <m:t>127</m:t>
+                    </m:r>
+                    <m:r>
+                      <a:rPr lang="en-US" i="1">
+                        <a:latin typeface="Cambria Math"/>
+                      </a:rPr>
+                      <m:t>=</m:t>
+                    </m:r>
+                    <m:r>
+                      <a:rPr lang="en-US" i="1">
+                        <a:latin typeface="Cambria Math"/>
+                      </a:rPr>
+                      <m:t>130</m:t>
+                    </m:r>
+                    <m:r>
+                      <a:rPr lang="en-US" i="1">
+                        <a:latin typeface="Cambria Math"/>
+                      </a:rPr>
+                      <m:t>=</m:t>
                     </m:r>
                     <m:sSub>
                       <m:sSubPr>
@@ -16687,7 +17304,13 @@
                           <a:rPr lang="en-US" b="0" i="1" smtClean="0">
                             <a:latin typeface="Cambria Math"/>
                           </a:rPr>
-                          <m:t>0.</m:t>
+                          <m:t>0</m:t>
+                        </m:r>
+                        <m:r>
+                          <a:rPr lang="en-US" b="0" i="1" smtClean="0">
+                            <a:latin typeface="Cambria Math"/>
+                          </a:rPr>
+                          <m:t>.</m:t>
                         </m:r>
                         <m:r>
                           <a:rPr lang="en-US" b="0" i="1" smtClean="0">
@@ -16773,7 +17396,13 @@
                           <a:rPr lang="en-US" sz="2400" i="1">
                             <a:latin typeface="Cambria Math"/>
                           </a:rPr>
-                          <m:t>−1</m:t>
+                          <m:t>−</m:t>
+                        </m:r>
+                        <m:r>
+                          <a:rPr lang="en-US" sz="2400" i="1">
+                            <a:latin typeface="Cambria Math"/>
+                          </a:rPr>
+                          <m:t>1</m:t>
                         </m:r>
                       </m:sup>
                     </m:sSup>
@@ -16793,7 +17422,13 @@
                       <a:rPr lang="en-US" sz="2400" b="0" i="1" smtClean="0">
                         <a:latin typeface="Cambria Math" panose="02040503050406030204" pitchFamily="18" charset="0"/>
                       </a:rPr>
-                      <m:t>2×</m:t>
+                      <m:t>2</m:t>
+                    </m:r>
+                    <m:r>
+                      <a:rPr lang="en-US" sz="2400" b="0" i="1" smtClean="0">
+                        <a:latin typeface="Cambria Math" panose="02040503050406030204" pitchFamily="18" charset="0"/>
+                      </a:rPr>
+                      <m:t>×</m:t>
                     </m:r>
                     <m:sSup>
                       <m:sSupPr>
@@ -16816,7 +17451,13 @@
                           <a:rPr lang="en-US" sz="2400" i="1">
                             <a:latin typeface="Cambria Math"/>
                           </a:rPr>
-                          <m:t>−2</m:t>
+                          <m:t>−</m:t>
+                        </m:r>
+                        <m:r>
+                          <a:rPr lang="en-US" sz="2400" i="1">
+                            <a:latin typeface="Cambria Math"/>
+                          </a:rPr>
+                          <m:t>2</m:t>
                         </m:r>
                       </m:sup>
                     </m:sSup>
@@ -16836,7 +17477,13 @@
                       <a:rPr lang="en-US" sz="2400" b="0" i="1" smtClean="0">
                         <a:latin typeface="Cambria Math" panose="02040503050406030204" pitchFamily="18" charset="0"/>
                       </a:rPr>
-                      <m:t>3×</m:t>
+                      <m:t>3</m:t>
+                    </m:r>
+                    <m:r>
+                      <a:rPr lang="en-US" sz="2400" b="0" i="1" smtClean="0">
+                        <a:latin typeface="Cambria Math" panose="02040503050406030204" pitchFamily="18" charset="0"/>
+                      </a:rPr>
+                      <m:t>×</m:t>
                     </m:r>
                     <m:sSup>
                       <m:sSupPr>
@@ -16859,7 +17506,13 @@
                           <a:rPr lang="en-US" sz="2400" i="1">
                             <a:latin typeface="Cambria Math"/>
                           </a:rPr>
-                          <m:t>−3</m:t>
+                          <m:t>−</m:t>
+                        </m:r>
+                        <m:r>
+                          <a:rPr lang="en-US" sz="2400" i="1">
+                            <a:latin typeface="Cambria Math"/>
+                          </a:rPr>
+                          <m:t>3</m:t>
                         </m:r>
                       </m:sup>
                     </m:sSup>
@@ -16879,7 +17532,13 @@
                       <a:rPr lang="en-US" sz="2400" b="0" i="1" smtClean="0">
                         <a:latin typeface="Cambria Math" panose="02040503050406030204" pitchFamily="18" charset="0"/>
                       </a:rPr>
-                      <m:t>4×</m:t>
+                      <m:t>4</m:t>
+                    </m:r>
+                    <m:r>
+                      <a:rPr lang="en-US" sz="2400" b="0" i="1" smtClean="0">
+                        <a:latin typeface="Cambria Math" panose="02040503050406030204" pitchFamily="18" charset="0"/>
+                      </a:rPr>
+                      <m:t>×</m:t>
                     </m:r>
                     <m:sSup>
                       <m:sSupPr>
@@ -16902,7 +17561,13 @@
                           <a:rPr lang="en-US" sz="2400" i="1">
                             <a:latin typeface="Cambria Math"/>
                           </a:rPr>
-                          <m:t>−4</m:t>
+                          <m:t>−</m:t>
+                        </m:r>
+                        <m:r>
+                          <a:rPr lang="en-US" sz="2400" i="1">
+                            <a:latin typeface="Cambria Math"/>
+                          </a:rPr>
+                          <m:t>4</m:t>
                         </m:r>
                       </m:sup>
                     </m:sSup>
@@ -16924,7 +17589,91 @@
                       <a:rPr lang="en-US" i="1">
                         <a:latin typeface="Cambria Math"/>
                       </a:rPr>
-                      <m:t>0.8125×2=1.625=1+0.625</m:t>
+                      <m:t>0</m:t>
+                    </m:r>
+                    <m:r>
+                      <a:rPr lang="en-US" i="1">
+                        <a:latin typeface="Cambria Math"/>
+                      </a:rPr>
+                      <m:t>.</m:t>
+                    </m:r>
+                    <m:r>
+                      <a:rPr lang="en-US" i="1">
+                        <a:latin typeface="Cambria Math"/>
+                      </a:rPr>
+                      <m:t>8125</m:t>
+                    </m:r>
+                    <m:r>
+                      <a:rPr lang="en-US" i="1">
+                        <a:latin typeface="Cambria Math"/>
+                      </a:rPr>
+                      <m:t>×</m:t>
+                    </m:r>
+                    <m:r>
+                      <a:rPr lang="en-US" i="1">
+                        <a:latin typeface="Cambria Math"/>
+                      </a:rPr>
+                      <m:t>2</m:t>
+                    </m:r>
+                    <m:r>
+                      <a:rPr lang="en-US" i="1">
+                        <a:latin typeface="Cambria Math"/>
+                      </a:rPr>
+                      <m:t>=</m:t>
+                    </m:r>
+                    <m:r>
+                      <a:rPr lang="en-US" i="1">
+                        <a:latin typeface="Cambria Math"/>
+                      </a:rPr>
+                      <m:t>1</m:t>
+                    </m:r>
+                    <m:r>
+                      <a:rPr lang="en-US" i="1">
+                        <a:latin typeface="Cambria Math"/>
+                      </a:rPr>
+                      <m:t>.</m:t>
+                    </m:r>
+                    <m:r>
+                      <a:rPr lang="en-US" i="1">
+                        <a:latin typeface="Cambria Math"/>
+                      </a:rPr>
+                      <m:t>625</m:t>
+                    </m:r>
+                    <m:r>
+                      <a:rPr lang="en-US" i="1">
+                        <a:latin typeface="Cambria Math"/>
+                      </a:rPr>
+                      <m:t>=</m:t>
+                    </m:r>
+                    <m:r>
+                      <a:rPr lang="en-US" i="1">
+                        <a:latin typeface="Cambria Math"/>
+                      </a:rPr>
+                      <m:t>1</m:t>
+                    </m:r>
+                    <m:r>
+                      <a:rPr lang="en-US" i="1">
+                        <a:latin typeface="Cambria Math"/>
+                      </a:rPr>
+                      <m:t>+</m:t>
+                    </m:r>
+                    <m:r>
+                      <a:rPr lang="en-US" i="1">
+                        <a:latin typeface="Cambria Math"/>
+                      </a:rPr>
+                      <m:t>0</m:t>
+                    </m:r>
+                    <m:r>
+                      <a:rPr lang="en-US" i="1">
+                        <a:latin typeface="Cambria Math"/>
+                      </a:rPr>
+                      <m:t>.</m:t>
+                    </m:r>
+                    <m:r>
+                      <a:rPr lang="en-US" i="1">
+                        <a:latin typeface="Cambria Math"/>
+                      </a:rPr>
+                      <m:t>625</m:t>
                     </m:r>
                   </m:oMath>
                 </a14:m>
@@ -16941,7 +17690,91 @@
                       <a:rPr lang="en-US" i="1">
                         <a:latin typeface="Cambria Math"/>
                       </a:rPr>
-                      <m:t>0.625×2=1.25=1+0.25</m:t>
+                      <m:t>0</m:t>
+                    </m:r>
+                    <m:r>
+                      <a:rPr lang="en-US" i="1">
+                        <a:latin typeface="Cambria Math"/>
+                      </a:rPr>
+                      <m:t>.</m:t>
+                    </m:r>
+                    <m:r>
+                      <a:rPr lang="en-US" i="1">
+                        <a:latin typeface="Cambria Math"/>
+                      </a:rPr>
+                      <m:t>625</m:t>
+                    </m:r>
+                    <m:r>
+                      <a:rPr lang="en-US" i="1">
+                        <a:latin typeface="Cambria Math"/>
+                      </a:rPr>
+                      <m:t>×</m:t>
+                    </m:r>
+                    <m:r>
+                      <a:rPr lang="en-US" i="1">
+                        <a:latin typeface="Cambria Math"/>
+                      </a:rPr>
+                      <m:t>2</m:t>
+                    </m:r>
+                    <m:r>
+                      <a:rPr lang="en-US" i="1">
+                        <a:latin typeface="Cambria Math"/>
+                      </a:rPr>
+                      <m:t>=</m:t>
+                    </m:r>
+                    <m:r>
+                      <a:rPr lang="en-US" i="1">
+                        <a:latin typeface="Cambria Math"/>
+                      </a:rPr>
+                      <m:t>1</m:t>
+                    </m:r>
+                    <m:r>
+                      <a:rPr lang="en-US" i="1">
+                        <a:latin typeface="Cambria Math"/>
+                      </a:rPr>
+                      <m:t>.</m:t>
+                    </m:r>
+                    <m:r>
+                      <a:rPr lang="en-US" i="1">
+                        <a:latin typeface="Cambria Math"/>
+                      </a:rPr>
+                      <m:t>25</m:t>
+                    </m:r>
+                    <m:r>
+                      <a:rPr lang="en-US" i="1">
+                        <a:latin typeface="Cambria Math"/>
+                      </a:rPr>
+                      <m:t>=</m:t>
+                    </m:r>
+                    <m:r>
+                      <a:rPr lang="en-US" i="1">
+                        <a:latin typeface="Cambria Math"/>
+                      </a:rPr>
+                      <m:t>1</m:t>
+                    </m:r>
+                    <m:r>
+                      <a:rPr lang="en-US" i="1">
+                        <a:latin typeface="Cambria Math"/>
+                      </a:rPr>
+                      <m:t>+</m:t>
+                    </m:r>
+                    <m:r>
+                      <a:rPr lang="en-US" i="1">
+                        <a:latin typeface="Cambria Math"/>
+                      </a:rPr>
+                      <m:t>0</m:t>
+                    </m:r>
+                    <m:r>
+                      <a:rPr lang="en-US" i="1">
+                        <a:latin typeface="Cambria Math"/>
+                      </a:rPr>
+                      <m:t>.</m:t>
+                    </m:r>
+                    <m:r>
+                      <a:rPr lang="en-US" i="1">
+                        <a:latin typeface="Cambria Math"/>
+                      </a:rPr>
+                      <m:t>25</m:t>
                     </m:r>
                   </m:oMath>
                 </a14:m>
@@ -16958,7 +17791,91 @@
                       <a:rPr lang="en-US" i="1">
                         <a:latin typeface="Cambria Math"/>
                       </a:rPr>
-                      <m:t>0.25×2=0.5=0+0.5</m:t>
+                      <m:t>0</m:t>
+                    </m:r>
+                    <m:r>
+                      <a:rPr lang="en-US" i="1">
+                        <a:latin typeface="Cambria Math"/>
+                      </a:rPr>
+                      <m:t>.</m:t>
+                    </m:r>
+                    <m:r>
+                      <a:rPr lang="en-US" i="1">
+                        <a:latin typeface="Cambria Math"/>
+                      </a:rPr>
+                      <m:t>25</m:t>
+                    </m:r>
+                    <m:r>
+                      <a:rPr lang="en-US" i="1">
+                        <a:latin typeface="Cambria Math"/>
+                      </a:rPr>
+                      <m:t>×</m:t>
+                    </m:r>
+                    <m:r>
+                      <a:rPr lang="en-US" i="1">
+                        <a:latin typeface="Cambria Math"/>
+                      </a:rPr>
+                      <m:t>2</m:t>
+                    </m:r>
+                    <m:r>
+                      <a:rPr lang="en-US" i="1">
+                        <a:latin typeface="Cambria Math"/>
+                      </a:rPr>
+                      <m:t>=</m:t>
+                    </m:r>
+                    <m:r>
+                      <a:rPr lang="en-US" i="1">
+                        <a:latin typeface="Cambria Math"/>
+                      </a:rPr>
+                      <m:t>0</m:t>
+                    </m:r>
+                    <m:r>
+                      <a:rPr lang="en-US" i="1">
+                        <a:latin typeface="Cambria Math"/>
+                      </a:rPr>
+                      <m:t>.</m:t>
+                    </m:r>
+                    <m:r>
+                      <a:rPr lang="en-US" i="1">
+                        <a:latin typeface="Cambria Math"/>
+                      </a:rPr>
+                      <m:t>5</m:t>
+                    </m:r>
+                    <m:r>
+                      <a:rPr lang="en-US" i="1">
+                        <a:latin typeface="Cambria Math"/>
+                      </a:rPr>
+                      <m:t>=</m:t>
+                    </m:r>
+                    <m:r>
+                      <a:rPr lang="en-US" i="1">
+                        <a:latin typeface="Cambria Math"/>
+                      </a:rPr>
+                      <m:t>0</m:t>
+                    </m:r>
+                    <m:r>
+                      <a:rPr lang="en-US" i="1">
+                        <a:latin typeface="Cambria Math"/>
+                      </a:rPr>
+                      <m:t>+</m:t>
+                    </m:r>
+                    <m:r>
+                      <a:rPr lang="en-US" i="1">
+                        <a:latin typeface="Cambria Math"/>
+                      </a:rPr>
+                      <m:t>0</m:t>
+                    </m:r>
+                    <m:r>
+                      <a:rPr lang="en-US" i="1">
+                        <a:latin typeface="Cambria Math"/>
+                      </a:rPr>
+                      <m:t>.</m:t>
+                    </m:r>
+                    <m:r>
+                      <a:rPr lang="en-US" i="1">
+                        <a:latin typeface="Cambria Math"/>
+                      </a:rPr>
+                      <m:t>5</m:t>
                     </m:r>
                   </m:oMath>
                 </a14:m>
@@ -16975,7 +17892,43 @@
                       <a:rPr lang="en-US" i="1">
                         <a:latin typeface="Cambria Math"/>
                       </a:rPr>
-                      <m:t>0.5×2=1</m:t>
+                      <m:t>0</m:t>
+                    </m:r>
+                    <m:r>
+                      <a:rPr lang="en-US" i="1">
+                        <a:latin typeface="Cambria Math"/>
+                      </a:rPr>
+                      <m:t>.</m:t>
+                    </m:r>
+                    <m:r>
+                      <a:rPr lang="en-US" i="1">
+                        <a:latin typeface="Cambria Math"/>
+                      </a:rPr>
+                      <m:t>5</m:t>
+                    </m:r>
+                    <m:r>
+                      <a:rPr lang="en-US" i="1">
+                        <a:latin typeface="Cambria Math"/>
+                      </a:rPr>
+                      <m:t>×</m:t>
+                    </m:r>
+                    <m:r>
+                      <a:rPr lang="en-US" i="1">
+                        <a:latin typeface="Cambria Math"/>
+                      </a:rPr>
+                      <m:t>2</m:t>
+                    </m:r>
+                    <m:r>
+                      <a:rPr lang="en-US" i="1">
+                        <a:latin typeface="Cambria Math"/>
+                      </a:rPr>
+                      <m:t>=</m:t>
+                    </m:r>
+                    <m:r>
+                      <a:rPr lang="en-US" i="1">
+                        <a:latin typeface="Cambria Math"/>
+                      </a:rPr>
+                      <m:t>1</m:t>
                     </m:r>
                   </m:oMath>
                 </a14:m>
@@ -17101,7 +18054,13 @@
   <p:cSld>
     <p:spTree>
       <p:nvGrpSpPr>
-        <p:cNvPr id="1" name=""/>
+        <p:cNvPr id="1" name="">
+          <a:extLst>
+            <a:ext uri="{FF2B5EF4-FFF2-40B4-BE49-F238E27FC236}">
+              <a16:creationId xmlns:a16="http://schemas.microsoft.com/office/drawing/2014/main" id="{79CA1E23-1948-4AB3-BE51-06B1176B9EDD}"/>
+            </a:ext>
+          </a:extLst>
+        </p:cNvPr>
         <p:cNvGrpSpPr/>
         <p:nvPr/>
       </p:nvGrpSpPr>
@@ -17115,7 +18074,13 @@
       </p:grpSpPr>
       <p:sp>
         <p:nvSpPr>
-          <p:cNvPr id="2" name="Title 1"/>
+          <p:cNvPr id="2" name="Title 1">
+            <a:extLst>
+              <a:ext uri="{FF2B5EF4-FFF2-40B4-BE49-F238E27FC236}">
+                <a16:creationId xmlns:a16="http://schemas.microsoft.com/office/drawing/2014/main" id="{06D0CDC3-A7FF-9EEE-C5C3-502A76B1D8CC}"/>
+              </a:ext>
+            </a:extLst>
+          </p:cNvPr>
           <p:cNvSpPr>
             <a:spLocks noGrp="1"/>
           </p:cNvSpPr>
@@ -17125,19 +18090,39 @@
         </p:nvSpPr>
         <p:spPr/>
         <p:txBody>
-          <a:bodyPr/>
+          <a:bodyPr>
+            <a:normAutofit/>
+          </a:bodyPr>
           <a:lstStyle/>
           <a:p>
             <a:r>
-              <a:rPr lang="en-US" dirty="0"/>
-              <a:t>Special Values</a:t>
+              <a:rPr lang="en-US" b="1" dirty="0"/>
+              <a:t>Encoding </a:t>
+            </a:r>
+            <a:r>
+              <a:rPr lang="en-US" b="1" dirty="0">
+                <a:solidFill>
+                  <a:srgbClr val="C00000"/>
+                </a:solidFill>
+              </a:rPr>
+              <a:t>1.3</a:t>
+            </a:r>
+            <a:r>
+              <a:rPr lang="en-US" b="1" dirty="0"/>
+              <a:t> into IEEE Std 754 Single-Precision</a:t>
             </a:r>
           </a:p>
         </p:txBody>
       </p:sp>
       <p:sp>
         <p:nvSpPr>
-          <p:cNvPr id="3" name="Slide Number Placeholder 2"/>
+          <p:cNvPr id="3" name="Slide Number Placeholder 2">
+            <a:extLst>
+              <a:ext uri="{FF2B5EF4-FFF2-40B4-BE49-F238E27FC236}">
+                <a16:creationId xmlns:a16="http://schemas.microsoft.com/office/drawing/2014/main" id="{A5CB2435-927F-ED99-AB72-9D349255325E}"/>
+              </a:ext>
+            </a:extLst>
+          </p:cNvPr>
           <p:cNvSpPr>
             <a:spLocks noGrp="1"/>
           </p:cNvSpPr>
@@ -17159,381 +18144,1238 @@
           </a:p>
         </p:txBody>
       </p:sp>
-      <p:sp>
-        <p:nvSpPr>
-          <p:cNvPr id="4" name="Content Placeholder 3"/>
-          <p:cNvSpPr>
-            <a:spLocks noGrp="1"/>
-          </p:cNvSpPr>
-          <p:nvPr>
-            <p:ph sz="quarter" idx="1"/>
-          </p:nvPr>
-        </p:nvSpPr>
-        <p:spPr/>
-        <p:txBody>
-          <a:bodyPr/>
-          <a:lstStyle/>
-          <a:p>
-            <a:r>
-              <a:rPr lang="en-US" dirty="0"/>
-              <a:t>Exponents </a:t>
-            </a:r>
-            <a:r>
-              <a:rPr lang="en-US" dirty="0">
-                <a:latin typeface="Consolas" panose="020B0609020204030204" pitchFamily="49" charset="0"/>
-                <a:cs typeface="Consolas" panose="020B0609020204030204" pitchFamily="49" charset="0"/>
-              </a:rPr>
-              <a:t>00000000</a:t>
-            </a:r>
-            <a:r>
-              <a:rPr lang="en-US" dirty="0"/>
-              <a:t> and </a:t>
-            </a:r>
-            <a:r>
-              <a:rPr lang="en-US" dirty="0">
-                <a:latin typeface="Consolas" panose="020B0609020204030204" pitchFamily="49" charset="0"/>
-                <a:cs typeface="Consolas" panose="020B0609020204030204" pitchFamily="49" charset="0"/>
-              </a:rPr>
-              <a:t>111111111</a:t>
-            </a:r>
-            <a:r>
-              <a:rPr lang="en-US" dirty="0"/>
-              <a:t> are reserved.</a:t>
-            </a:r>
-          </a:p>
-        </p:txBody>
-      </p:sp>
-      <p:pic>
-        <p:nvPicPr>
-          <p:cNvPr id="7" name="Picture 6"/>
-          <p:cNvPicPr>
-            <a:picLocks noChangeAspect="1"/>
-          </p:cNvPicPr>
-          <p:nvPr/>
-        </p:nvPicPr>
-        <p:blipFill>
-          <a:blip r:embed="rId2"/>
-          <a:stretch>
-            <a:fillRect/>
-          </a:stretch>
-        </p:blipFill>
-        <p:spPr>
-          <a:xfrm>
-            <a:off x="1676400" y="1905000"/>
-            <a:ext cx="8687616" cy="2691294"/>
-          </a:xfrm>
-          <a:prstGeom prst="rect">
-            <a:avLst/>
-          </a:prstGeom>
-        </p:spPr>
-      </p:pic>
-      <mc:AlternateContent xmlns:mc="http://schemas.openxmlformats.org/markup-compatibility/2006" xmlns:a14="http://schemas.microsoft.com/office/drawing/2010/main">
-        <mc:Choice Requires="a14">
+      <mc:AlternateContent xmlns:mc="http://schemas.openxmlformats.org/markup-compatibility/2006">
+        <mc:Choice xmlns:a14="http://schemas.microsoft.com/office/drawing/2010/main" Requires="a14">
           <p:sp>
             <p:nvSpPr>
-              <p:cNvPr id="8" name="Content Placeholder 3"/>
-              <p:cNvSpPr txBox="1">
-                <a:spLocks/>
+              <p:cNvPr id="4" name="Content Placeholder 3">
+                <a:extLst>
+                  <a:ext uri="{FF2B5EF4-FFF2-40B4-BE49-F238E27FC236}">
+                    <a16:creationId xmlns:a16="http://schemas.microsoft.com/office/drawing/2014/main" id="{B3D4FF65-D71D-3471-F040-1E677F86A2DD}"/>
+                  </a:ext>
+                </a:extLst>
+              </p:cNvPr>
+              <p:cNvSpPr>
+                <a:spLocks noGrp="1"/>
               </p:cNvSpPr>
-              <p:nvPr/>
+              <p:nvPr>
+                <p:ph sz="quarter" idx="1"/>
+              </p:nvPr>
             </p:nvSpPr>
             <p:spPr>
               <a:xfrm>
-                <a:off x="2133600" y="4795684"/>
-                <a:ext cx="8229600" cy="1513676"/>
+                <a:off x="990600" y="1143000"/>
+                <a:ext cx="10363200" cy="5013960"/>
               </a:xfrm>
-              <a:prstGeom prst="rect">
-                <a:avLst/>
-              </a:prstGeom>
             </p:spPr>
             <p:txBody>
-              <a:bodyPr vert="horz">
-                <a:normAutofit/>
+              <a:bodyPr>
+                <a:normAutofit fontScale="77500" lnSpcReduction="20000"/>
               </a:bodyPr>
-              <a:lstStyle>
-                <a:lvl1pPr marL="274320" indent="-274320" algn="l" rtl="0" eaLnBrk="1" latinLnBrk="0" hangingPunct="1">
-                  <a:spcBef>
-                    <a:spcPts val="600"/>
-                  </a:spcBef>
-                  <a:buClr>
-                    <a:schemeClr val="accent1"/>
-                  </a:buClr>
-                  <a:buSzPct val="76000"/>
-                  <a:buFont typeface="Wingdings 3"/>
-                  <a:buChar char=""/>
-                  <a:defRPr kumimoji="0" sz="2600" kern="1200">
-                    <a:solidFill>
-                      <a:schemeClr val="tx1"/>
-                    </a:solidFill>
-                    <a:latin typeface="+mn-lt"/>
-                    <a:ea typeface="+mn-ea"/>
-                    <a:cs typeface="+mn-cs"/>
-                  </a:defRPr>
-                </a:lvl1pPr>
-                <a:lvl2pPr marL="548640" indent="-274320" algn="l" rtl="0" eaLnBrk="1" latinLnBrk="0" hangingPunct="1">
-                  <a:spcBef>
-                    <a:spcPts val="500"/>
-                  </a:spcBef>
-                  <a:buClr>
-                    <a:schemeClr val="accent2"/>
-                  </a:buClr>
-                  <a:buSzPct val="76000"/>
-                  <a:buFont typeface="Wingdings 3"/>
-                  <a:buChar char=""/>
-                  <a:defRPr kumimoji="0" sz="2300" kern="1200">
-                    <a:solidFill>
-                      <a:schemeClr val="tx2"/>
-                    </a:solidFill>
-                    <a:latin typeface="+mn-lt"/>
-                    <a:ea typeface="+mn-ea"/>
-                    <a:cs typeface="+mn-cs"/>
-                  </a:defRPr>
-                </a:lvl2pPr>
-                <a:lvl3pPr marL="822960" indent="-228600" algn="l" rtl="0" eaLnBrk="1" latinLnBrk="0" hangingPunct="1">
-                  <a:spcBef>
-                    <a:spcPts val="500"/>
-                  </a:spcBef>
-                  <a:buClr>
-                    <a:schemeClr val="bg1">
-                      <a:shade val="50000"/>
-                    </a:schemeClr>
-                  </a:buClr>
-                  <a:buSzPct val="76000"/>
-                  <a:buFont typeface="Wingdings 3"/>
-                  <a:buChar char=""/>
-                  <a:defRPr kumimoji="0" sz="2000" kern="1200">
-                    <a:solidFill>
-                      <a:schemeClr val="tx1"/>
-                    </a:solidFill>
-                    <a:latin typeface="+mn-lt"/>
-                    <a:ea typeface="+mn-ea"/>
-                    <a:cs typeface="+mn-cs"/>
-                  </a:defRPr>
-                </a:lvl3pPr>
-                <a:lvl4pPr marL="1097280" indent="-228600" algn="l" rtl="0" eaLnBrk="1" latinLnBrk="0" hangingPunct="1">
-                  <a:spcBef>
-                    <a:spcPts val="400"/>
-                  </a:spcBef>
-                  <a:buClr>
-                    <a:schemeClr val="accent2">
-                      <a:shade val="75000"/>
-                    </a:schemeClr>
-                  </a:buClr>
-                  <a:buSzPct val="70000"/>
-                  <a:buFont typeface="Wingdings"/>
-                  <a:buChar char=""/>
-                  <a:defRPr kumimoji="0" sz="1800" kern="1200">
-                    <a:solidFill>
-                      <a:schemeClr val="tx1"/>
-                    </a:solidFill>
-                    <a:latin typeface="+mn-lt"/>
-                    <a:ea typeface="+mn-ea"/>
-                    <a:cs typeface="+mn-cs"/>
-                  </a:defRPr>
-                </a:lvl4pPr>
-                <a:lvl5pPr marL="1371600" indent="-228600" algn="l" rtl="0" eaLnBrk="1" latinLnBrk="0" hangingPunct="1">
-                  <a:spcBef>
-                    <a:spcPts val="300"/>
-                  </a:spcBef>
-                  <a:buClr>
-                    <a:schemeClr val="accent2"/>
-                  </a:buClr>
-                  <a:buSzPct val="70000"/>
-                  <a:buFont typeface="Wingdings"/>
-                  <a:buChar char=""/>
-                  <a:defRPr kumimoji="0" sz="1600" kern="1200">
-                    <a:solidFill>
-                      <a:schemeClr val="tx1"/>
-                    </a:solidFill>
-                    <a:latin typeface="+mn-lt"/>
-                    <a:ea typeface="+mn-ea"/>
-                    <a:cs typeface="+mn-cs"/>
-                  </a:defRPr>
-                </a:lvl5pPr>
-                <a:lvl6pPr marL="1645920" indent="-182880" algn="l" rtl="0" eaLnBrk="1" latinLnBrk="0" hangingPunct="1">
-                  <a:spcBef>
-                    <a:spcPts val="300"/>
-                  </a:spcBef>
-                  <a:buClr>
-                    <a:srgbClr val="9FB8CD">
-                      <a:shade val="75000"/>
-                    </a:srgbClr>
-                  </a:buClr>
-                  <a:buSzPct val="75000"/>
-                  <a:buFont typeface="Wingdings 3"/>
-                  <a:buChar char=""/>
-                  <a:defRPr kumimoji="0" lang="en-US" sz="1600" kern="1200" smtClean="0">
-                    <a:solidFill>
-                      <a:schemeClr val="tx1"/>
-                    </a:solidFill>
-                    <a:latin typeface="+mn-lt"/>
-                    <a:ea typeface="+mn-ea"/>
-                    <a:cs typeface="+mn-cs"/>
-                  </a:defRPr>
-                </a:lvl6pPr>
-                <a:lvl7pPr marL="1828800" indent="-182880" algn="l" rtl="0" eaLnBrk="1" latinLnBrk="0" hangingPunct="1">
-                  <a:spcBef>
-                    <a:spcPts val="300"/>
-                  </a:spcBef>
-                  <a:buClr>
-                    <a:srgbClr val="727CA3">
-                      <a:shade val="75000"/>
-                    </a:srgbClr>
-                  </a:buClr>
-                  <a:buSzPct val="75000"/>
-                  <a:buFont typeface="Wingdings 3"/>
-                  <a:buChar char=""/>
-                  <a:defRPr kumimoji="0" lang="en-US" sz="1400" kern="1200" smtClean="0">
-                    <a:solidFill>
-                      <a:schemeClr val="tx1"/>
-                    </a:solidFill>
-                    <a:latin typeface="+mn-lt"/>
-                    <a:ea typeface="+mn-ea"/>
-                    <a:cs typeface="+mn-cs"/>
-                  </a:defRPr>
-                </a:lvl7pPr>
-                <a:lvl8pPr marL="2011680" indent="-182880" algn="l" rtl="0" eaLnBrk="1" latinLnBrk="0" hangingPunct="1">
-                  <a:spcBef>
-                    <a:spcPts val="300"/>
-                  </a:spcBef>
-                  <a:buClr>
-                    <a:prstClr val="white">
-                      <a:shade val="50000"/>
-                    </a:prstClr>
-                  </a:buClr>
-                  <a:buSzPct val="75000"/>
-                  <a:buFont typeface="Wingdings 3"/>
-                  <a:buChar char=""/>
-                  <a:defRPr kumimoji="0" lang="en-US" sz="1400" kern="1200" smtClean="0">
-                    <a:solidFill>
-                      <a:schemeClr val="tx1"/>
-                    </a:solidFill>
-                    <a:latin typeface="+mn-lt"/>
-                    <a:ea typeface="+mn-ea"/>
-                    <a:cs typeface="+mn-cs"/>
-                  </a:defRPr>
-                </a:lvl8pPr>
-                <a:lvl9pPr marL="2194560" indent="-182880" algn="l" rtl="0" eaLnBrk="1" latinLnBrk="0" hangingPunct="1">
-                  <a:spcBef>
-                    <a:spcPts val="300"/>
-                  </a:spcBef>
-                  <a:buClr>
-                    <a:srgbClr val="9FB8CD"/>
-                  </a:buClr>
-                  <a:buSzPct val="75000"/>
-                  <a:buFont typeface="Wingdings 3"/>
-                  <a:buChar char=""/>
-                  <a:defRPr kumimoji="0" lang="en-US" sz="1200" kern="1200" smtClean="0">
-                    <a:solidFill>
-                      <a:schemeClr val="tx1"/>
-                    </a:solidFill>
-                    <a:latin typeface="+mn-lt"/>
-                    <a:ea typeface="+mn-ea"/>
-                    <a:cs typeface="+mn-cs"/>
-                  </a:defRPr>
-                </a:lvl9pPr>
-              </a:lstStyle>
+              <a:lstStyle/>
               <a:p>
                 <a:r>
                   <a:rPr lang="en-US" dirty="0"/>
-                  <a:t>Example of Not-A-Number (</a:t>
+                  <a:t>Normalization:</a:t>
                 </a:r>
-                <a:r>
-                  <a:rPr lang="en-US" dirty="0" err="1"/>
-                  <a:t>NaN</a:t>
-                </a:r>
+                <a:endParaRPr lang="en-US" i="1" dirty="0">
+                  <a:latin typeface="Cambria Math"/>
+                </a:endParaRPr>
+              </a:p>
+              <a:p>
+                <a14:m>
+                  <m:oMath xmlns:m="http://schemas.openxmlformats.org/officeDocument/2006/math">
+                    <m:sSup>
+                      <m:sSupPr>
+                        <m:ctrlPr>
+                          <a:rPr lang="en-US" i="1" smtClean="0">
+                            <a:latin typeface="Cambria Math" panose="02040503050406030204" pitchFamily="18" charset="0"/>
+                          </a:rPr>
+                        </m:ctrlPr>
+                      </m:sSupPr>
+                      <m:e>
+                        <m:r>
+                          <a:rPr lang="en-US" i="1">
+                            <a:latin typeface="Cambria Math" panose="02040503050406030204" pitchFamily="18" charset="0"/>
+                          </a:rPr>
+                          <m:t>2</m:t>
+                        </m:r>
+                      </m:e>
+                      <m:sup>
+                        <m:r>
+                          <a:rPr lang="en-US" b="0" i="1" smtClean="0">
+                            <a:latin typeface="Cambria Math" panose="02040503050406030204" pitchFamily="18" charset="0"/>
+                          </a:rPr>
+                          <m:t>0</m:t>
+                        </m:r>
+                      </m:sup>
+                    </m:sSup>
+                    <m:r>
+                      <a:rPr lang="en-US" b="0" i="1" smtClean="0">
+                        <a:latin typeface="Cambria Math" panose="02040503050406030204" pitchFamily="18" charset="0"/>
+                      </a:rPr>
+                      <m:t>&lt;</m:t>
+                    </m:r>
+                    <m:r>
+                      <a:rPr lang="en-US" i="1" smtClean="0">
+                        <a:latin typeface="Cambria Math"/>
+                      </a:rPr>
+                      <m:t>1</m:t>
+                    </m:r>
+                    <m:r>
+                      <a:rPr lang="en-US" i="1" smtClean="0">
+                        <a:latin typeface="Cambria Math"/>
+                      </a:rPr>
+                      <m:t>.</m:t>
+                    </m:r>
+                    <m:r>
+                      <a:rPr lang="en-US" b="0" i="1" smtClean="0">
+                        <a:latin typeface="Cambria Math" panose="02040503050406030204" pitchFamily="18" charset="0"/>
+                      </a:rPr>
+                      <m:t>3</m:t>
+                    </m:r>
+                    <m:r>
+                      <a:rPr lang="en-US" b="0" i="1" smtClean="0">
+                        <a:latin typeface="Cambria Math" panose="02040503050406030204" pitchFamily="18" charset="0"/>
+                      </a:rPr>
+                      <m:t>&lt;</m:t>
+                    </m:r>
+                    <m:sSup>
+                      <m:sSupPr>
+                        <m:ctrlPr>
+                          <a:rPr lang="en-US" b="0" i="1" smtClean="0">
+                            <a:latin typeface="Cambria Math" panose="02040503050406030204" pitchFamily="18" charset="0"/>
+                          </a:rPr>
+                        </m:ctrlPr>
+                      </m:sSupPr>
+                      <m:e>
+                        <m:r>
+                          <a:rPr lang="en-US" b="0" i="1" smtClean="0">
+                            <a:latin typeface="Cambria Math" panose="02040503050406030204" pitchFamily="18" charset="0"/>
+                          </a:rPr>
+                          <m:t>2</m:t>
+                        </m:r>
+                      </m:e>
+                      <m:sup>
+                        <m:r>
+                          <a:rPr lang="en-US" b="0" i="1" smtClean="0">
+                            <a:latin typeface="Cambria Math" panose="02040503050406030204" pitchFamily="18" charset="0"/>
+                          </a:rPr>
+                          <m:t>1</m:t>
+                        </m:r>
+                      </m:sup>
+                    </m:sSup>
+                    <m:r>
+                      <a:rPr lang="en-US" b="0" i="1" smtClean="0">
+                        <a:latin typeface="Cambria Math" panose="02040503050406030204" pitchFamily="18" charset="0"/>
+                      </a:rPr>
+                      <m:t>,</m:t>
+                    </m:r>
+                    <m:f>
+                      <m:fPr>
+                        <m:ctrlPr>
+                          <a:rPr lang="en-US" b="0" i="1" smtClean="0">
+                            <a:latin typeface="Cambria Math" panose="02040503050406030204" pitchFamily="18" charset="0"/>
+                          </a:rPr>
+                        </m:ctrlPr>
+                      </m:fPr>
+                      <m:num>
+                        <m:r>
+                          <a:rPr lang="en-US" i="1">
+                            <a:latin typeface="Cambria Math"/>
+                          </a:rPr>
+                          <m:t>14</m:t>
+                        </m:r>
+                        <m:r>
+                          <a:rPr lang="en-US" i="1">
+                            <a:latin typeface="Cambria Math"/>
+                          </a:rPr>
+                          <m:t>.</m:t>
+                        </m:r>
+                        <m:r>
+                          <a:rPr lang="en-US" i="1">
+                            <a:latin typeface="Cambria Math"/>
+                          </a:rPr>
+                          <m:t>5</m:t>
+                        </m:r>
+                      </m:num>
+                      <m:den>
+                        <m:sSup>
+                          <m:sSupPr>
+                            <m:ctrlPr>
+                              <a:rPr lang="en-US" b="0" i="1" smtClean="0">
+                                <a:latin typeface="Cambria Math" panose="02040503050406030204" pitchFamily="18" charset="0"/>
+                              </a:rPr>
+                            </m:ctrlPr>
+                          </m:sSupPr>
+                          <m:e>
+                            <m:r>
+                              <a:rPr lang="en-US" b="0" i="1" smtClean="0">
+                                <a:latin typeface="Cambria Math" panose="02040503050406030204" pitchFamily="18" charset="0"/>
+                              </a:rPr>
+                              <m:t>2</m:t>
+                            </m:r>
+                          </m:e>
+                          <m:sup>
+                            <m:r>
+                              <a:rPr lang="en-US" b="0" i="1" smtClean="0">
+                                <a:latin typeface="Cambria Math" panose="02040503050406030204" pitchFamily="18" charset="0"/>
+                              </a:rPr>
+                              <m:t>0</m:t>
+                            </m:r>
+                          </m:sup>
+                        </m:sSup>
+                      </m:den>
+                    </m:f>
+                    <m:r>
+                      <a:rPr lang="en-US" b="0" i="1" smtClean="0">
+                        <a:latin typeface="Cambria Math" panose="02040503050406030204" pitchFamily="18" charset="0"/>
+                      </a:rPr>
+                      <m:t>=</m:t>
+                    </m:r>
+                    <m:r>
+                      <a:rPr lang="en-US" b="0" i="1" smtClean="0">
+                        <a:latin typeface="Cambria Math" panose="02040503050406030204" pitchFamily="18" charset="0"/>
+                      </a:rPr>
+                      <m:t>1</m:t>
+                    </m:r>
+                    <m:r>
+                      <a:rPr lang="en-US" b="0" i="1" smtClean="0">
+                        <a:latin typeface="Cambria Math" panose="02040503050406030204" pitchFamily="18" charset="0"/>
+                      </a:rPr>
+                      <m:t>.</m:t>
+                    </m:r>
+                    <m:r>
+                      <a:rPr lang="en-US" b="0" i="1" smtClean="0">
+                        <a:latin typeface="Cambria Math" panose="02040503050406030204" pitchFamily="18" charset="0"/>
+                      </a:rPr>
+                      <m:t>3</m:t>
+                    </m:r>
+                  </m:oMath>
+                </a14:m>
+                <a:endParaRPr lang="en-US" i="1" dirty="0">
+                  <a:latin typeface="Cambria Math"/>
+                </a:endParaRPr>
+              </a:p>
+              <a:p>
                 <a:r>
                   <a:rPr lang="en-US" dirty="0"/>
-                  <a:t>)</a:t>
+                  <a:t>Hence </a:t>
+                </a:r>
+                <a14:m>
+                  <m:oMath xmlns:m="http://schemas.openxmlformats.org/officeDocument/2006/math">
+                    <m:r>
+                      <a:rPr lang="en-US" i="1">
+                        <a:latin typeface="Cambria Math"/>
+                      </a:rPr>
+                      <m:t>1</m:t>
+                    </m:r>
+                    <m:r>
+                      <a:rPr lang="en-US" i="1">
+                        <a:latin typeface="Cambria Math"/>
+                      </a:rPr>
+                      <m:t>.</m:t>
+                    </m:r>
+                    <m:r>
+                      <a:rPr lang="en-US" b="0" i="1" smtClean="0">
+                        <a:latin typeface="Cambria Math" panose="02040503050406030204" pitchFamily="18" charset="0"/>
+                      </a:rPr>
+                      <m:t>3</m:t>
+                    </m:r>
+                    <m:r>
+                      <a:rPr lang="en-US" i="1">
+                        <a:latin typeface="Cambria Math"/>
+                      </a:rPr>
+                      <m:t>=</m:t>
+                    </m:r>
+                    <m:r>
+                      <a:rPr lang="en-US" i="1" smtClean="0">
+                        <a:latin typeface="Cambria Math"/>
+                      </a:rPr>
+                      <m:t> </m:t>
+                    </m:r>
+                    <m:r>
+                      <a:rPr lang="en-US" i="1">
+                        <a:latin typeface="Cambria Math"/>
+                      </a:rPr>
+                      <m:t>(</m:t>
+                    </m:r>
+                    <m:r>
+                      <a:rPr lang="en-US" i="1">
+                        <a:latin typeface="Cambria Math"/>
+                      </a:rPr>
+                      <m:t>1</m:t>
+                    </m:r>
+                    <m:r>
+                      <a:rPr lang="en-US" i="1">
+                        <a:latin typeface="Cambria Math"/>
+                      </a:rPr>
+                      <m:t>+</m:t>
+                    </m:r>
+                    <m:r>
+                      <a:rPr lang="en-US" i="1">
+                        <a:latin typeface="Cambria Math"/>
+                      </a:rPr>
+                      <m:t>0</m:t>
+                    </m:r>
+                    <m:r>
+                      <a:rPr lang="en-US" i="1">
+                        <a:latin typeface="Cambria Math"/>
+                      </a:rPr>
+                      <m:t>.</m:t>
+                    </m:r>
+                    <m:r>
+                      <a:rPr lang="en-US" b="0" i="1" smtClean="0">
+                        <a:latin typeface="Cambria Math" panose="02040503050406030204" pitchFamily="18" charset="0"/>
+                      </a:rPr>
+                      <m:t>3</m:t>
+                    </m:r>
+                    <m:r>
+                      <a:rPr lang="en-US" i="1">
+                        <a:latin typeface="Cambria Math"/>
+                      </a:rPr>
+                      <m:t>)×</m:t>
+                    </m:r>
+                    <m:sSup>
+                      <m:sSupPr>
+                        <m:ctrlPr>
+                          <a:rPr lang="en-US" i="1">
+                            <a:latin typeface="Cambria Math" panose="02040503050406030204" pitchFamily="18" charset="0"/>
+                          </a:rPr>
+                        </m:ctrlPr>
+                      </m:sSupPr>
+                      <m:e>
+                        <m:r>
+                          <a:rPr lang="en-US" i="1">
+                            <a:latin typeface="Cambria Math"/>
+                          </a:rPr>
+                          <m:t>2</m:t>
+                        </m:r>
+                      </m:e>
+                      <m:sup>
+                        <m:r>
+                          <a:rPr lang="en-US" b="0" i="1" smtClean="0">
+                            <a:latin typeface="Cambria Math" panose="02040503050406030204" pitchFamily="18" charset="0"/>
+                          </a:rPr>
+                          <m:t>0</m:t>
+                        </m:r>
+                      </m:sup>
+                    </m:sSup>
+                  </m:oMath>
+                </a14:m>
+                <a:endParaRPr lang="en-US" dirty="0"/>
+              </a:p>
+              <a:p>
+                <a:r>
+                  <a:rPr lang="en-US" dirty="0"/>
+                  <a:t>Conversion:</a:t>
+                </a:r>
+              </a:p>
+              <a:p>
+                <a14:m>
+                  <m:oMath xmlns:m="http://schemas.openxmlformats.org/officeDocument/2006/math">
+                    <m:r>
+                      <a:rPr lang="en-US" b="0" i="1" smtClean="0">
+                        <a:latin typeface="Cambria Math"/>
+                      </a:rPr>
+                      <m:t>𝑆𝑖𝑔𝑛</m:t>
+                    </m:r>
+                    <m:r>
+                      <a:rPr lang="en-US" b="0" i="1" smtClean="0">
+                        <a:latin typeface="Cambria Math"/>
+                      </a:rPr>
+                      <m:t>=</m:t>
+                    </m:r>
+                    <m:r>
+                      <a:rPr lang="en-US" b="0" i="1" smtClean="0">
+                        <a:latin typeface="Cambria Math"/>
+                      </a:rPr>
+                      <m:t>0</m:t>
+                    </m:r>
+                  </m:oMath>
+                </a14:m>
+                <a:endParaRPr lang="en-US" b="0" i="1" dirty="0">
+                  <a:solidFill>
+                    <a:srgbClr val="C00000"/>
+                  </a:solidFill>
+                  <a:latin typeface="Cambria Math"/>
+                </a:endParaRPr>
+              </a:p>
+              <a:p>
+                <a14:m>
+                  <m:oMath xmlns:m="http://schemas.openxmlformats.org/officeDocument/2006/math">
+                    <m:r>
+                      <a:rPr lang="en-US" i="1">
+                        <a:latin typeface="Cambria Math"/>
+                      </a:rPr>
+                      <m:t>𝐸𝑥𝑝𝑜𝑛𝑒𝑛𝑡</m:t>
+                    </m:r>
+                    <m:r>
+                      <m:rPr>
+                        <m:aln/>
+                      </m:rPr>
+                      <a:rPr lang="en-US" i="1">
+                        <a:latin typeface="Cambria Math"/>
+                      </a:rPr>
+                      <m:t>=</m:t>
+                    </m:r>
+                    <m:r>
+                      <a:rPr lang="en-US" b="0" i="1" smtClean="0">
+                        <a:latin typeface="Cambria Math" panose="02040503050406030204" pitchFamily="18" charset="0"/>
+                      </a:rPr>
+                      <m:t>0</m:t>
+                    </m:r>
+                    <m:r>
+                      <a:rPr lang="en-US" i="1">
+                        <a:latin typeface="Cambria Math"/>
+                      </a:rPr>
+                      <m:t>+</m:t>
+                    </m:r>
+                    <m:r>
+                      <a:rPr lang="en-US" i="1">
+                        <a:latin typeface="Cambria Math"/>
+                      </a:rPr>
+                      <m:t>127</m:t>
+                    </m:r>
+                    <m:r>
+                      <a:rPr lang="en-US" i="1">
+                        <a:latin typeface="Cambria Math"/>
+                      </a:rPr>
+                      <m:t>=</m:t>
+                    </m:r>
+                    <m:r>
+                      <a:rPr lang="en-US" i="1">
+                        <a:latin typeface="Cambria Math"/>
+                      </a:rPr>
+                      <m:t>127</m:t>
+                    </m:r>
+                    <m:r>
+                      <a:rPr lang="en-US" i="1">
+                        <a:latin typeface="Cambria Math"/>
+                      </a:rPr>
+                      <m:t>=</m:t>
+                    </m:r>
+                    <m:sSub>
+                      <m:sSubPr>
+                        <m:ctrlPr>
+                          <a:rPr lang="en-US" i="1">
+                            <a:latin typeface="Cambria Math" panose="02040503050406030204" pitchFamily="18" charset="0"/>
+                          </a:rPr>
+                        </m:ctrlPr>
+                      </m:sSubPr>
+                      <m:e>
+                        <m:r>
+                          <a:rPr lang="en-US" b="0" i="1" smtClean="0">
+                            <a:solidFill>
+                              <a:srgbClr val="0000FF"/>
+                            </a:solidFill>
+                            <a:latin typeface="Cambria Math" panose="02040503050406030204" pitchFamily="18" charset="0"/>
+                          </a:rPr>
+                          <m:t>01111111</m:t>
+                        </m:r>
+                      </m:e>
+                      <m:sub>
+                        <m:r>
+                          <a:rPr lang="en-US" i="1">
+                            <a:latin typeface="Cambria Math"/>
+                          </a:rPr>
+                          <m:t>2</m:t>
+                        </m:r>
+                      </m:sub>
+                    </m:sSub>
+                  </m:oMath>
+                </a14:m>
+                <a:endParaRPr lang="en-US" dirty="0"/>
+              </a:p>
+              <a:p>
+                <a14:m>
+                  <m:oMath xmlns:m="http://schemas.openxmlformats.org/officeDocument/2006/math">
+                    <m:r>
+                      <a:rPr lang="en-US" b="0" i="1" smtClean="0">
+                        <a:latin typeface="Cambria Math"/>
+                      </a:rPr>
+                      <m:t>𝐹𝑟𝑎𝑐𝑡𝑖𝑜𝑛</m:t>
+                    </m:r>
+                    <m:r>
+                      <a:rPr lang="en-US" i="1">
+                        <a:latin typeface="Cambria Math"/>
+                      </a:rPr>
+                      <m:t>=</m:t>
+                    </m:r>
+                    <m:sSub>
+                      <m:sSubPr>
+                        <m:ctrlPr>
+                          <a:rPr lang="en-US" i="1">
+                            <a:latin typeface="Cambria Math" panose="02040503050406030204" pitchFamily="18" charset="0"/>
+                          </a:rPr>
+                        </m:ctrlPr>
+                      </m:sSubPr>
+                      <m:e>
+                        <m:r>
+                          <a:rPr lang="en-US" b="0" i="1" smtClean="0">
+                            <a:latin typeface="Cambria Math"/>
+                          </a:rPr>
+                          <m:t>0</m:t>
+                        </m:r>
+                        <m:r>
+                          <a:rPr lang="en-US" b="0" i="1" smtClean="0">
+                            <a:latin typeface="Cambria Math"/>
+                          </a:rPr>
+                          <m:t>.</m:t>
+                        </m:r>
+                        <m:r>
+                          <a:rPr lang="en-US" b="0" i="1" smtClean="0">
+                            <a:solidFill>
+                              <a:srgbClr val="00B050"/>
+                            </a:solidFill>
+                            <a:latin typeface="Cambria Math"/>
+                          </a:rPr>
+                          <m:t>01</m:t>
+                        </m:r>
+                        <m:r>
+                          <a:rPr lang="en-US" b="0" i="1" smtClean="0">
+                            <a:solidFill>
+                              <a:srgbClr val="00B050"/>
+                            </a:solidFill>
+                            <a:latin typeface="Cambria Math" panose="02040503050406030204" pitchFamily="18" charset="0"/>
+                          </a:rPr>
+                          <m:t>001100110011</m:t>
+                        </m:r>
+                        <m:r>
+                          <a:rPr lang="en-US" b="0" i="1" smtClean="0">
+                            <a:solidFill>
+                              <a:srgbClr val="00B050"/>
+                            </a:solidFill>
+                            <a:latin typeface="Cambria Math" panose="02040503050406030204" pitchFamily="18" charset="0"/>
+                          </a:rPr>
+                          <m:t>…</m:t>
+                        </m:r>
+                      </m:e>
+                      <m:sub>
+                        <m:r>
+                          <a:rPr lang="en-US" i="1">
+                            <a:latin typeface="Cambria Math"/>
+                          </a:rPr>
+                          <m:t>2</m:t>
+                        </m:r>
+                      </m:sub>
+                    </m:sSub>
+                  </m:oMath>
+                </a14:m>
+                <a:r>
+                  <a:rPr lang="en-US" dirty="0"/>
+                  <a:t> (multiply by 2 repeatedly)</a:t>
+                </a:r>
+              </a:p>
+              <a:p>
+                <a:r>
+                  <a:rPr lang="en-US" dirty="0"/>
+                  <a:t>Assume </a:t>
+                </a:r>
+                <a14:m>
+                  <m:oMath xmlns:m="http://schemas.openxmlformats.org/officeDocument/2006/math">
+                    <m:r>
+                      <a:rPr lang="en-US" i="1">
+                        <a:latin typeface="Cambria Math"/>
+                      </a:rPr>
+                      <m:t>𝐹𝑟𝑎𝑐𝑡𝑖𝑜𝑛</m:t>
+                    </m:r>
+                    <m:r>
+                      <a:rPr lang="en-US" b="0" i="1" smtClean="0">
+                        <a:latin typeface="Cambria Math" panose="02040503050406030204" pitchFamily="18" charset="0"/>
+                      </a:rPr>
+                      <m:t>=</m:t>
+                    </m:r>
+                    <m:r>
+                      <a:rPr lang="en-US" b="0" i="1" smtClean="0">
+                        <a:latin typeface="Cambria Math" panose="02040503050406030204" pitchFamily="18" charset="0"/>
+                      </a:rPr>
+                      <m:t>𝑏</m:t>
+                    </m:r>
+                    <m:r>
+                      <a:rPr lang="en-US" b="0" i="1" smtClean="0">
+                        <a:latin typeface="Cambria Math" panose="02040503050406030204" pitchFamily="18" charset="0"/>
+                      </a:rPr>
+                      <m:t>1</m:t>
+                    </m:r>
+                    <m:r>
+                      <a:rPr lang="en-US" sz="2400" i="1">
+                        <a:latin typeface="Cambria Math"/>
+                      </a:rPr>
+                      <m:t>×</m:t>
+                    </m:r>
+                    <m:sSup>
+                      <m:sSupPr>
+                        <m:ctrlPr>
+                          <a:rPr lang="en-US" sz="2400" i="1">
+                            <a:latin typeface="Cambria Math" panose="02040503050406030204" pitchFamily="18" charset="0"/>
+                          </a:rPr>
+                        </m:ctrlPr>
+                      </m:sSupPr>
+                      <m:e>
+                        <m:r>
+                          <a:rPr lang="en-US" sz="2400" i="1">
+                            <a:latin typeface="Cambria Math"/>
+                          </a:rPr>
+                          <m:t>2</m:t>
+                        </m:r>
+                      </m:e>
+                      <m:sup>
+                        <m:r>
+                          <a:rPr lang="en-US" sz="2400" i="1">
+                            <a:latin typeface="Cambria Math"/>
+                          </a:rPr>
+                          <m:t>−</m:t>
+                        </m:r>
+                        <m:r>
+                          <a:rPr lang="en-US" sz="2400" i="1">
+                            <a:latin typeface="Cambria Math"/>
+                          </a:rPr>
+                          <m:t>1</m:t>
+                        </m:r>
+                      </m:sup>
+                    </m:sSup>
+                    <m:r>
+                      <a:rPr lang="en-US" sz="2400" i="1">
+                        <a:latin typeface="Cambria Math"/>
+                      </a:rPr>
+                      <m:t>+</m:t>
+                    </m:r>
+                    <m:r>
+                      <a:rPr lang="en-US" sz="2400" b="0" i="1" smtClean="0">
+                        <a:latin typeface="Cambria Math" panose="02040503050406030204" pitchFamily="18" charset="0"/>
+                      </a:rPr>
+                      <m:t>𝑏</m:t>
+                    </m:r>
+                    <m:r>
+                      <a:rPr lang="en-US" sz="2400" b="0" i="1" smtClean="0">
+                        <a:latin typeface="Cambria Math" panose="02040503050406030204" pitchFamily="18" charset="0"/>
+                      </a:rPr>
+                      <m:t>2</m:t>
+                    </m:r>
+                    <m:r>
+                      <a:rPr lang="en-US" sz="2400" b="0" i="1" smtClean="0">
+                        <a:latin typeface="Cambria Math" panose="02040503050406030204" pitchFamily="18" charset="0"/>
+                      </a:rPr>
+                      <m:t>×</m:t>
+                    </m:r>
+                    <m:sSup>
+                      <m:sSupPr>
+                        <m:ctrlPr>
+                          <a:rPr lang="en-US" sz="2400" i="1">
+                            <a:latin typeface="Cambria Math" panose="02040503050406030204" pitchFamily="18" charset="0"/>
+                          </a:rPr>
+                        </m:ctrlPr>
+                      </m:sSupPr>
+                      <m:e>
+                        <m:r>
+                          <a:rPr lang="en-US" sz="2400" i="1">
+                            <a:latin typeface="Cambria Math"/>
+                          </a:rPr>
+                          <m:t>2</m:t>
+                        </m:r>
+                      </m:e>
+                      <m:sup>
+                        <m:r>
+                          <a:rPr lang="en-US" sz="2400" i="1">
+                            <a:latin typeface="Cambria Math"/>
+                          </a:rPr>
+                          <m:t>−</m:t>
+                        </m:r>
+                        <m:r>
+                          <a:rPr lang="en-US" sz="2400" i="1">
+                            <a:latin typeface="Cambria Math"/>
+                          </a:rPr>
+                          <m:t>2</m:t>
+                        </m:r>
+                      </m:sup>
+                    </m:sSup>
+                    <m:r>
+                      <a:rPr lang="en-US" sz="2400" i="1">
+                        <a:latin typeface="Cambria Math"/>
+                      </a:rPr>
+                      <m:t>+</m:t>
+                    </m:r>
+                    <m:r>
+                      <a:rPr lang="en-US" sz="2400" b="0" i="1" smtClean="0">
+                        <a:latin typeface="Cambria Math" panose="02040503050406030204" pitchFamily="18" charset="0"/>
+                      </a:rPr>
+                      <m:t>𝑏</m:t>
+                    </m:r>
+                    <m:r>
+                      <a:rPr lang="en-US" sz="2400" b="0" i="1" smtClean="0">
+                        <a:latin typeface="Cambria Math" panose="02040503050406030204" pitchFamily="18" charset="0"/>
+                      </a:rPr>
+                      <m:t>3</m:t>
+                    </m:r>
+                    <m:r>
+                      <a:rPr lang="en-US" sz="2400" b="0" i="1" smtClean="0">
+                        <a:latin typeface="Cambria Math" panose="02040503050406030204" pitchFamily="18" charset="0"/>
+                      </a:rPr>
+                      <m:t>×</m:t>
+                    </m:r>
+                    <m:sSup>
+                      <m:sSupPr>
+                        <m:ctrlPr>
+                          <a:rPr lang="en-US" sz="2400" i="1">
+                            <a:latin typeface="Cambria Math" panose="02040503050406030204" pitchFamily="18" charset="0"/>
+                          </a:rPr>
+                        </m:ctrlPr>
+                      </m:sSupPr>
+                      <m:e>
+                        <m:r>
+                          <a:rPr lang="en-US" sz="2400" i="1">
+                            <a:latin typeface="Cambria Math"/>
+                          </a:rPr>
+                          <m:t>2</m:t>
+                        </m:r>
+                      </m:e>
+                      <m:sup>
+                        <m:r>
+                          <a:rPr lang="en-US" sz="2400" i="1">
+                            <a:latin typeface="Cambria Math"/>
+                          </a:rPr>
+                          <m:t>−</m:t>
+                        </m:r>
+                        <m:r>
+                          <a:rPr lang="en-US" sz="2400" i="1">
+                            <a:latin typeface="Cambria Math"/>
+                          </a:rPr>
+                          <m:t>3</m:t>
+                        </m:r>
+                      </m:sup>
+                    </m:sSup>
+                    <m:r>
+                      <a:rPr lang="en-US" sz="2400" i="1">
+                        <a:latin typeface="Cambria Math"/>
+                      </a:rPr>
+                      <m:t>+</m:t>
+                    </m:r>
+                    <m:r>
+                      <a:rPr lang="en-US" sz="2400" b="0" i="1" smtClean="0">
+                        <a:latin typeface="Cambria Math" panose="02040503050406030204" pitchFamily="18" charset="0"/>
+                      </a:rPr>
+                      <m:t>𝑏</m:t>
+                    </m:r>
+                    <m:r>
+                      <a:rPr lang="en-US" sz="2400" b="0" i="1" smtClean="0">
+                        <a:latin typeface="Cambria Math" panose="02040503050406030204" pitchFamily="18" charset="0"/>
+                      </a:rPr>
+                      <m:t>4</m:t>
+                    </m:r>
+                    <m:r>
+                      <a:rPr lang="en-US" sz="2400" b="0" i="1" smtClean="0">
+                        <a:latin typeface="Cambria Math" panose="02040503050406030204" pitchFamily="18" charset="0"/>
+                      </a:rPr>
+                      <m:t>×</m:t>
+                    </m:r>
+                    <m:sSup>
+                      <m:sSupPr>
+                        <m:ctrlPr>
+                          <a:rPr lang="en-US" sz="2400" i="1">
+                            <a:latin typeface="Cambria Math" panose="02040503050406030204" pitchFamily="18" charset="0"/>
+                          </a:rPr>
+                        </m:ctrlPr>
+                      </m:sSupPr>
+                      <m:e>
+                        <m:r>
+                          <a:rPr lang="en-US" sz="2400" i="1">
+                            <a:latin typeface="Cambria Math"/>
+                          </a:rPr>
+                          <m:t>2</m:t>
+                        </m:r>
+                      </m:e>
+                      <m:sup>
+                        <m:r>
+                          <a:rPr lang="en-US" sz="2400" i="1">
+                            <a:latin typeface="Cambria Math"/>
+                          </a:rPr>
+                          <m:t>−</m:t>
+                        </m:r>
+                        <m:r>
+                          <a:rPr lang="en-US" sz="2400" i="1">
+                            <a:latin typeface="Cambria Math"/>
+                          </a:rPr>
+                          <m:t>4</m:t>
+                        </m:r>
+                      </m:sup>
+                    </m:sSup>
+                    <m:r>
+                      <a:rPr lang="en-US" sz="2400" b="0" i="1" smtClean="0">
+                        <a:latin typeface="Cambria Math" panose="02040503050406030204" pitchFamily="18" charset="0"/>
+                      </a:rPr>
+                      <m:t>+…</m:t>
+                    </m:r>
+                  </m:oMath>
+                </a14:m>
+                <a:endParaRPr lang="en-US" dirty="0"/>
+              </a:p>
+              <a:p>
+                <a:pPr lvl="1"/>
+                <a14:m>
+                  <m:oMath xmlns:m="http://schemas.openxmlformats.org/officeDocument/2006/math">
+                    <m:r>
+                      <a:rPr lang="en-US" i="1">
+                        <a:latin typeface="Cambria Math"/>
+                      </a:rPr>
+                      <m:t>0</m:t>
+                    </m:r>
+                    <m:r>
+                      <a:rPr lang="en-US" i="1">
+                        <a:latin typeface="Cambria Math"/>
+                      </a:rPr>
+                      <m:t>.</m:t>
+                    </m:r>
+                    <m:r>
+                      <a:rPr lang="en-US" b="0" i="1" smtClean="0">
+                        <a:latin typeface="Cambria Math" panose="02040503050406030204" pitchFamily="18" charset="0"/>
+                      </a:rPr>
+                      <m:t>3</m:t>
+                    </m:r>
+                    <m:r>
+                      <a:rPr lang="en-US" i="1">
+                        <a:latin typeface="Cambria Math"/>
+                      </a:rPr>
+                      <m:t>×</m:t>
+                    </m:r>
+                    <m:r>
+                      <a:rPr lang="en-US" i="1">
+                        <a:latin typeface="Cambria Math"/>
+                      </a:rPr>
+                      <m:t>2</m:t>
+                    </m:r>
+                    <m:r>
+                      <a:rPr lang="en-US" i="1">
+                        <a:latin typeface="Cambria Math"/>
+                      </a:rPr>
+                      <m:t>=</m:t>
+                    </m:r>
+                    <m:r>
+                      <a:rPr lang="en-US" b="0" i="1" smtClean="0">
+                        <a:latin typeface="Cambria Math" panose="02040503050406030204" pitchFamily="18" charset="0"/>
+                      </a:rPr>
+                      <m:t>0</m:t>
+                    </m:r>
+                    <m:r>
+                      <a:rPr lang="en-US" i="1">
+                        <a:latin typeface="Cambria Math"/>
+                      </a:rPr>
+                      <m:t>.</m:t>
+                    </m:r>
+                    <m:r>
+                      <a:rPr lang="en-US" i="1">
+                        <a:latin typeface="Cambria Math"/>
+                      </a:rPr>
+                      <m:t>6</m:t>
+                    </m:r>
+                  </m:oMath>
+                </a14:m>
+                <a:r>
+                  <a:rPr lang="en-US" dirty="0"/>
+                  <a:t> =&gt; b1 = 0</a:t>
                 </a:r>
               </a:p>
               <a:p>
                 <a:pPr lvl="1"/>
+                <a14:m>
+                  <m:oMath xmlns:m="http://schemas.openxmlformats.org/officeDocument/2006/math">
+                    <m:r>
+                      <a:rPr lang="en-US" i="1">
+                        <a:latin typeface="Cambria Math"/>
+                      </a:rPr>
+                      <m:t>0</m:t>
+                    </m:r>
+                    <m:r>
+                      <a:rPr lang="en-US" i="1">
+                        <a:latin typeface="Cambria Math"/>
+                      </a:rPr>
+                      <m:t>.</m:t>
+                    </m:r>
+                    <m:r>
+                      <a:rPr lang="en-US" i="1">
+                        <a:latin typeface="Cambria Math"/>
+                      </a:rPr>
+                      <m:t>6</m:t>
+                    </m:r>
+                    <m:r>
+                      <a:rPr lang="en-US" i="1">
+                        <a:latin typeface="Cambria Math"/>
+                      </a:rPr>
+                      <m:t>×</m:t>
+                    </m:r>
+                    <m:r>
+                      <a:rPr lang="en-US" i="1">
+                        <a:latin typeface="Cambria Math"/>
+                      </a:rPr>
+                      <m:t>2</m:t>
+                    </m:r>
+                    <m:r>
+                      <a:rPr lang="en-US" i="1">
+                        <a:latin typeface="Cambria Math"/>
+                      </a:rPr>
+                      <m:t>=</m:t>
+                    </m:r>
+                    <m:r>
+                      <a:rPr lang="en-US" i="1">
+                        <a:latin typeface="Cambria Math"/>
+                      </a:rPr>
+                      <m:t>1</m:t>
+                    </m:r>
+                    <m:r>
+                      <a:rPr lang="en-US" i="1">
+                        <a:latin typeface="Cambria Math"/>
+                      </a:rPr>
+                      <m:t>.</m:t>
+                    </m:r>
+                    <m:r>
+                      <a:rPr lang="en-US" i="1">
+                        <a:latin typeface="Cambria Math"/>
+                      </a:rPr>
+                      <m:t>2</m:t>
+                    </m:r>
+                  </m:oMath>
+                </a14:m>
+                <a:r>
+                  <a:rPr lang="en-US" dirty="0"/>
+                  <a:t> =&gt; b2 = 1</a:t>
+                </a:r>
+              </a:p>
+              <a:p>
+                <a:pPr lvl="1"/>
+                <a14:m>
+                  <m:oMath xmlns:m="http://schemas.openxmlformats.org/officeDocument/2006/math">
+                    <m:r>
+                      <a:rPr lang="en-US" i="1">
+                        <a:latin typeface="Cambria Math"/>
+                      </a:rPr>
+                      <m:t>0</m:t>
+                    </m:r>
+                    <m:r>
+                      <a:rPr lang="en-US" i="1">
+                        <a:latin typeface="Cambria Math"/>
+                      </a:rPr>
+                      <m:t>.</m:t>
+                    </m:r>
+                    <m:r>
+                      <a:rPr lang="en-US" i="1">
+                        <a:latin typeface="Cambria Math"/>
+                      </a:rPr>
+                      <m:t>2</m:t>
+                    </m:r>
+                    <m:r>
+                      <a:rPr lang="en-US" i="1">
+                        <a:latin typeface="Cambria Math"/>
+                      </a:rPr>
+                      <m:t>×</m:t>
+                    </m:r>
+                    <m:r>
+                      <a:rPr lang="en-US" i="1">
+                        <a:latin typeface="Cambria Math"/>
+                      </a:rPr>
+                      <m:t>2</m:t>
+                    </m:r>
+                    <m:r>
+                      <a:rPr lang="en-US" i="1">
+                        <a:latin typeface="Cambria Math"/>
+                      </a:rPr>
+                      <m:t>=</m:t>
+                    </m:r>
+                    <m:r>
+                      <a:rPr lang="en-US" i="1">
+                        <a:latin typeface="Cambria Math"/>
+                      </a:rPr>
+                      <m:t>0</m:t>
+                    </m:r>
+                    <m:r>
+                      <a:rPr lang="en-US" i="1">
+                        <a:latin typeface="Cambria Math"/>
+                      </a:rPr>
+                      <m:t>.</m:t>
+                    </m:r>
+                    <m:r>
+                      <a:rPr lang="en-US" b="0" i="1" smtClean="0">
+                        <a:latin typeface="Cambria Math" panose="02040503050406030204" pitchFamily="18" charset="0"/>
+                      </a:rPr>
+                      <m:t>4</m:t>
+                    </m:r>
+                  </m:oMath>
+                </a14:m>
+                <a:r>
+                  <a:rPr lang="en-US" dirty="0"/>
+                  <a:t> =&gt; b3 = 0</a:t>
+                </a:r>
+              </a:p>
+              <a:p>
+                <a:pPr lvl="1"/>
+                <a14:m>
+                  <m:oMath xmlns:m="http://schemas.openxmlformats.org/officeDocument/2006/math">
+                    <m:r>
+                      <a:rPr lang="en-US" i="1">
+                        <a:latin typeface="Cambria Math"/>
+                      </a:rPr>
+                      <m:t>0</m:t>
+                    </m:r>
+                    <m:r>
+                      <a:rPr lang="en-US" i="1">
+                        <a:latin typeface="Cambria Math"/>
+                      </a:rPr>
+                      <m:t>.</m:t>
+                    </m:r>
+                    <m:r>
+                      <a:rPr lang="en-US" b="0" i="1" smtClean="0">
+                        <a:latin typeface="Cambria Math" panose="02040503050406030204" pitchFamily="18" charset="0"/>
+                      </a:rPr>
+                      <m:t>4</m:t>
+                    </m:r>
+                    <m:r>
+                      <a:rPr lang="en-US" i="1">
+                        <a:latin typeface="Cambria Math"/>
+                      </a:rPr>
+                      <m:t>×</m:t>
+                    </m:r>
+                    <m:r>
+                      <a:rPr lang="en-US" i="1">
+                        <a:latin typeface="Cambria Math"/>
+                      </a:rPr>
+                      <m:t>2</m:t>
+                    </m:r>
+                    <m:r>
+                      <a:rPr lang="en-US" i="1">
+                        <a:latin typeface="Cambria Math"/>
+                      </a:rPr>
+                      <m:t>=</m:t>
+                    </m:r>
+                    <m:r>
+                      <a:rPr lang="en-US" b="0" i="1" smtClean="0">
+                        <a:latin typeface="Cambria Math" panose="02040503050406030204" pitchFamily="18" charset="0"/>
+                      </a:rPr>
+                      <m:t>0</m:t>
+                    </m:r>
+                    <m:r>
+                      <a:rPr lang="en-US" b="0" i="1" smtClean="0">
+                        <a:latin typeface="Cambria Math" panose="02040503050406030204" pitchFamily="18" charset="0"/>
+                      </a:rPr>
+                      <m:t>.</m:t>
+                    </m:r>
+                    <m:r>
+                      <a:rPr lang="en-US" b="0" i="1" smtClean="0">
+                        <a:latin typeface="Cambria Math" panose="02040503050406030204" pitchFamily="18" charset="0"/>
+                      </a:rPr>
+                      <m:t>8</m:t>
+                    </m:r>
+                  </m:oMath>
+                </a14:m>
+                <a:r>
+                  <a:rPr lang="en-US" dirty="0"/>
+                  <a:t> =&gt; b4 = 0</a:t>
+                </a:r>
+              </a:p>
+              <a:p>
+                <a:pPr lvl="1"/>
+                <a14:m>
+                  <m:oMath xmlns:m="http://schemas.openxmlformats.org/officeDocument/2006/math">
+                    <m:r>
+                      <a:rPr lang="en-US" i="1">
+                        <a:latin typeface="Cambria Math"/>
+                      </a:rPr>
+                      <m:t>0</m:t>
+                    </m:r>
+                    <m:r>
+                      <a:rPr lang="en-US" i="1">
+                        <a:latin typeface="Cambria Math"/>
+                      </a:rPr>
+                      <m:t>.</m:t>
+                    </m:r>
+                    <m:r>
+                      <a:rPr lang="en-US" b="0" i="1" smtClean="0">
+                        <a:latin typeface="Cambria Math" panose="02040503050406030204" pitchFamily="18" charset="0"/>
+                      </a:rPr>
+                      <m:t>8</m:t>
+                    </m:r>
+                    <m:r>
+                      <a:rPr lang="en-US" i="1">
+                        <a:latin typeface="Cambria Math"/>
+                      </a:rPr>
+                      <m:t>×</m:t>
+                    </m:r>
+                    <m:r>
+                      <a:rPr lang="en-US" i="1">
+                        <a:latin typeface="Cambria Math"/>
+                      </a:rPr>
+                      <m:t>2</m:t>
+                    </m:r>
+                    <m:r>
+                      <a:rPr lang="en-US" i="1">
+                        <a:latin typeface="Cambria Math"/>
+                      </a:rPr>
+                      <m:t>=</m:t>
+                    </m:r>
+                    <m:r>
+                      <a:rPr lang="en-US" b="0" i="1" smtClean="0">
+                        <a:latin typeface="Cambria Math" panose="02040503050406030204" pitchFamily="18" charset="0"/>
+                      </a:rPr>
+                      <m:t>1</m:t>
+                    </m:r>
+                    <m:r>
+                      <a:rPr lang="en-US" b="0" i="1" smtClean="0">
+                        <a:latin typeface="Cambria Math" panose="02040503050406030204" pitchFamily="18" charset="0"/>
+                      </a:rPr>
+                      <m:t>.</m:t>
+                    </m:r>
+                    <m:r>
+                      <a:rPr lang="en-US" b="0" i="1" smtClean="0">
+                        <a:latin typeface="Cambria Math" panose="02040503050406030204" pitchFamily="18" charset="0"/>
+                      </a:rPr>
+                      <m:t>6</m:t>
+                    </m:r>
+                  </m:oMath>
+                </a14:m>
+                <a:r>
+                  <a:rPr lang="en-US" dirty="0"/>
+                  <a:t> =&gt; b5 = 1</a:t>
+                </a:r>
+              </a:p>
+              <a:p>
+                <a:pPr lvl="1"/>
+                <a14:m>
+                  <m:oMath xmlns:m="http://schemas.openxmlformats.org/officeDocument/2006/math">
+                    <m:r>
+                      <a:rPr lang="en-US" i="1">
+                        <a:latin typeface="Cambria Math"/>
+                      </a:rPr>
+                      <m:t>0</m:t>
+                    </m:r>
+                    <m:r>
+                      <a:rPr lang="en-US" i="1">
+                        <a:latin typeface="Cambria Math"/>
+                      </a:rPr>
+                      <m:t>.</m:t>
+                    </m:r>
+                    <m:r>
+                      <a:rPr lang="en-US" b="0" i="1" smtClean="0">
+                        <a:latin typeface="Cambria Math" panose="02040503050406030204" pitchFamily="18" charset="0"/>
+                      </a:rPr>
+                      <m:t>6</m:t>
+                    </m:r>
+                    <m:r>
+                      <a:rPr lang="en-US" i="1">
+                        <a:latin typeface="Cambria Math"/>
+                      </a:rPr>
+                      <m:t>×</m:t>
+                    </m:r>
+                    <m:r>
+                      <a:rPr lang="en-US" i="1">
+                        <a:latin typeface="Cambria Math"/>
+                      </a:rPr>
+                      <m:t>2</m:t>
+                    </m:r>
+                    <m:r>
+                      <a:rPr lang="en-US" i="1">
+                        <a:latin typeface="Cambria Math"/>
+                      </a:rPr>
+                      <m:t>=</m:t>
+                    </m:r>
+                    <m:r>
+                      <a:rPr lang="en-US" b="0" i="1" smtClean="0">
+                        <a:latin typeface="Cambria Math" panose="02040503050406030204" pitchFamily="18" charset="0"/>
+                      </a:rPr>
+                      <m:t>1</m:t>
+                    </m:r>
+                    <m:r>
+                      <a:rPr lang="en-US" i="1">
+                        <a:latin typeface="Cambria Math" panose="02040503050406030204" pitchFamily="18" charset="0"/>
+                      </a:rPr>
+                      <m:t>.</m:t>
+                    </m:r>
+                    <m:r>
+                      <a:rPr lang="en-US" b="0" i="1" smtClean="0">
+                        <a:latin typeface="Cambria Math" panose="02040503050406030204" pitchFamily="18" charset="0"/>
+                      </a:rPr>
+                      <m:t>2</m:t>
+                    </m:r>
+                  </m:oMath>
+                </a14:m>
+                <a:r>
+                  <a:rPr lang="en-US" dirty="0"/>
+                  <a:t> =&gt; b6 = 1</a:t>
+                </a:r>
+              </a:p>
+              <a:p>
                 <a:r>
                   <a:rPr lang="en-US" dirty="0">
                     <a:latin typeface="Consolas" panose="020B0609020204030204" pitchFamily="49" charset="0"/>
                     <a:cs typeface="Consolas" panose="020B0609020204030204" pitchFamily="49" charset="0"/>
                   </a:rPr>
-                  <a:t>log(-10.0), </a:t>
+                  <a:t>14.5</a:t>
                 </a:r>
                 <a:r>
-                  <a:rPr lang="en-US" dirty="0" err="1">
+                  <a:rPr lang="en-US" dirty="0"/>
+                  <a:t> = </a:t>
+                </a:r>
+                <a:r>
+                  <a:rPr lang="en-US" dirty="0">
+                    <a:solidFill>
+                      <a:srgbClr val="C00000"/>
+                    </a:solidFill>
                     <a:latin typeface="Consolas" panose="020B0609020204030204" pitchFamily="49" charset="0"/>
                     <a:cs typeface="Consolas" panose="020B0609020204030204" pitchFamily="49" charset="0"/>
                   </a:rPr>
-                  <a:t>sqrt</a:t>
+                  <a:t>0</a:t>
                 </a:r>
                 <a:r>
                   <a:rPr lang="en-US" dirty="0">
+                    <a:solidFill>
+                      <a:srgbClr val="0000FF"/>
+                    </a:solidFill>
                     <a:latin typeface="Consolas" panose="020B0609020204030204" pitchFamily="49" charset="0"/>
                     <a:cs typeface="Consolas" panose="020B0609020204030204" pitchFamily="49" charset="0"/>
                   </a:rPr>
-                  <a:t>(-1.0), 0.0/0.0</a:t>
+                  <a:t>01111111</a:t>
+                </a:r>
+                <a:r>
+                  <a:rPr lang="en-US" dirty="0">
+                    <a:solidFill>
+                      <a:srgbClr val="00B050"/>
+                    </a:solidFill>
+                    <a:latin typeface="Consolas" panose="020B0609020204030204" pitchFamily="49" charset="0"/>
+                    <a:cs typeface="Consolas" panose="020B0609020204030204" pitchFamily="49" charset="0"/>
+                  </a:rPr>
+                  <a:t>01001100110011001100110</a:t>
                 </a:r>
                 <a:r>
                   <a:rPr lang="en-US" dirty="0"/>
-                  <a:t>, </a:t>
-                </a:r>
-                <a14:m>
-                  <m:oMath xmlns:m="http://schemas.openxmlformats.org/officeDocument/2006/math">
-                    <m:r>
-                      <a:rPr lang="en-US" i="1">
-                        <a:latin typeface="Cambria Math" panose="02040503050406030204" pitchFamily="18" charset="0"/>
-                      </a:rPr>
-                      <m:t>−</m:t>
-                    </m:r>
-                    <m:r>
-                      <a:rPr lang="en-US" i="1">
-                        <a:latin typeface="Cambria Math" panose="02040503050406030204" pitchFamily="18" charset="0"/>
-                        <a:ea typeface="Cambria Math" panose="02040503050406030204" pitchFamily="18" charset="0"/>
-                      </a:rPr>
-                      <m:t>∞</m:t>
-                    </m:r>
-                    <m:r>
-                      <a:rPr lang="en-US" i="1">
-                        <a:latin typeface="Cambria Math" panose="02040503050406030204" pitchFamily="18" charset="0"/>
-                        <a:ea typeface="Cambria Math" panose="02040503050406030204" pitchFamily="18" charset="0"/>
-                      </a:rPr>
-                      <m:t>+</m:t>
-                    </m:r>
-                    <m:r>
-                      <a:rPr lang="en-US" i="1">
-                        <a:latin typeface="Cambria Math" panose="02040503050406030204" pitchFamily="18" charset="0"/>
-                        <a:ea typeface="Cambria Math" panose="02040503050406030204" pitchFamily="18" charset="0"/>
-                      </a:rPr>
-                      <m:t>∞</m:t>
-                    </m:r>
-                  </m:oMath>
-                </a14:m>
-                <a:r>
-                  <a:rPr lang="en-US" dirty="0"/>
-                  <a:t>, </a:t>
+                  <a:t> in binary or 0x3FA66666 in hex</a:t>
                 </a:r>
               </a:p>
             </p:txBody>
           </p:sp>
         </mc:Choice>
-        <mc:Fallback xmlns="">
+        <mc:Fallback>
           <p:sp>
             <p:nvSpPr>
-              <p:cNvPr id="8" name="Content Placeholder 3"/>
-              <p:cNvSpPr txBox="1">
-                <a:spLocks noRot="1" noChangeAspect="1" noMove="1" noResize="1" noEditPoints="1" noAdjustHandles="1" noChangeArrowheads="1" noChangeShapeType="1" noTextEdit="1"/>
+              <p:cNvPr id="4" name="Content Placeholder 3">
+                <a:extLst>
+                  <a:ext uri="{FF2B5EF4-FFF2-40B4-BE49-F238E27FC236}">
+                    <a16:creationId xmlns:a16="http://schemas.microsoft.com/office/drawing/2014/main" id="{B3D4FF65-D71D-3471-F040-1E677F86A2DD}"/>
+                  </a:ext>
+                </a:extLst>
+              </p:cNvPr>
+              <p:cNvSpPr>
+                <a:spLocks noGrp="1" noRot="1" noChangeAspect="1" noMove="1" noResize="1" noEditPoints="1" noAdjustHandles="1" noChangeArrowheads="1" noChangeShapeType="1" noTextEdit="1"/>
               </p:cNvSpPr>
-              <p:nvPr/>
+              <p:nvPr>
+                <p:ph sz="quarter" idx="1"/>
+              </p:nvPr>
             </p:nvSpPr>
             <p:spPr>
               <a:xfrm>
-                <a:off x="2133600" y="4795684"/>
-                <a:ext cx="8229600" cy="1513676"/>
+                <a:off x="990600" y="1143000"/>
+                <a:ext cx="10363200" cy="5013960"/>
               </a:xfrm>
-              <a:prstGeom prst="rect">
-                <a:avLst/>
-              </a:prstGeom>
               <a:blipFill>
                 <a:blip r:embed="rId3"/>
                 <a:stretch>
-                  <a:fillRect l="-770" t="-3333"/>
+                  <a:fillRect l="-235" t="-1946" b="-122"/>
                 </a:stretch>
               </a:blipFill>
             </p:spPr>
@@ -17552,10 +19394,93 @@
           </p:sp>
         </mc:Fallback>
       </mc:AlternateContent>
+      <p:sp>
+        <p:nvSpPr>
+          <p:cNvPr id="8" name="Right Brace 7">
+            <a:extLst>
+              <a:ext uri="{FF2B5EF4-FFF2-40B4-BE49-F238E27FC236}">
+                <a16:creationId xmlns:a16="http://schemas.microsoft.com/office/drawing/2014/main" id="{FADDE5B4-2BF0-3346-B39B-1C17BD95CCA8}"/>
+              </a:ext>
+            </a:extLst>
+          </p:cNvPr>
+          <p:cNvSpPr/>
+          <p:nvPr/>
+        </p:nvSpPr>
+        <p:spPr>
+          <a:xfrm>
+            <a:off x="3979432" y="4686292"/>
+            <a:ext cx="228597" cy="914400"/>
+          </a:xfrm>
+          <a:prstGeom prst="rightBrace">
+            <a:avLst>
+              <a:gd name="adj1" fmla="val 8333"/>
+              <a:gd name="adj2" fmla="val 48117"/>
+            </a:avLst>
+          </a:prstGeom>
+          <a:ln w="19050"/>
+        </p:spPr>
+        <p:style>
+          <a:lnRef idx="1">
+            <a:schemeClr val="accent1"/>
+          </a:lnRef>
+          <a:fillRef idx="0">
+            <a:schemeClr val="accent1"/>
+          </a:fillRef>
+          <a:effectRef idx="0">
+            <a:schemeClr val="accent1"/>
+          </a:effectRef>
+          <a:fontRef idx="minor">
+            <a:schemeClr val="tx1"/>
+          </a:fontRef>
+        </p:style>
+        <p:txBody>
+          <a:bodyPr rtlCol="0" anchor="ctr"/>
+          <a:lstStyle/>
+          <a:p>
+            <a:pPr algn="ctr"/>
+            <a:endParaRPr lang="en-US"/>
+          </a:p>
+        </p:txBody>
+      </p:sp>
+      <p:sp>
+        <p:nvSpPr>
+          <p:cNvPr id="9" name="TextBox 8">
+            <a:extLst>
+              <a:ext uri="{FF2B5EF4-FFF2-40B4-BE49-F238E27FC236}">
+                <a16:creationId xmlns:a16="http://schemas.microsoft.com/office/drawing/2014/main" id="{ACE7E842-BCEF-B6B4-E109-FC4B047B29D0}"/>
+              </a:ext>
+            </a:extLst>
+          </p:cNvPr>
+          <p:cNvSpPr txBox="1"/>
+          <p:nvPr/>
+        </p:nvSpPr>
+        <p:spPr>
+          <a:xfrm flipH="1">
+            <a:off x="4244784" y="4876800"/>
+            <a:ext cx="2057402" cy="369332"/>
+          </a:xfrm>
+          <a:prstGeom prst="rect">
+            <a:avLst/>
+          </a:prstGeom>
+          <a:noFill/>
+        </p:spPr>
+        <p:txBody>
+          <a:bodyPr wrap="square" rtlCol="0">
+            <a:spAutoFit/>
+          </a:bodyPr>
+          <a:lstStyle/>
+          <a:p>
+            <a:r>
+              <a:rPr lang="en-US" dirty="0"/>
+              <a:t>Repeats infinitely</a:t>
+            </a:r>
+          </a:p>
+        </p:txBody>
+      </p:sp>
     </p:spTree>
     <p:extLst>
       <p:ext uri="{BB962C8B-B14F-4D97-AF65-F5344CB8AC3E}">
-        <p14:creationId xmlns:p14="http://schemas.microsoft.com/office/powerpoint/2010/main" val="430635750"/>
+        <p14:creationId xmlns:p14="http://schemas.microsoft.com/office/powerpoint/2010/main" val="3951653191"/>
       </p:ext>
     </p:extLst>
   </p:cSld>
@@ -18732,6 +20657,1182 @@
   <p:cSld>
     <p:spTree>
       <p:nvGrpSpPr>
+        <p:cNvPr id="1" name="">
+          <a:extLst>
+            <a:ext uri="{FF2B5EF4-FFF2-40B4-BE49-F238E27FC236}">
+              <a16:creationId xmlns:a16="http://schemas.microsoft.com/office/drawing/2014/main" id="{6893DE8F-D6F6-AAA1-D94A-86C18C17534D}"/>
+            </a:ext>
+          </a:extLst>
+        </p:cNvPr>
+        <p:cNvGrpSpPr/>
+        <p:nvPr/>
+      </p:nvGrpSpPr>
+      <p:grpSpPr>
+        <a:xfrm>
+          <a:off x="0" y="0"/>
+          <a:ext cx="0" cy="0"/>
+          <a:chOff x="0" y="0"/>
+          <a:chExt cx="0" cy="0"/>
+        </a:xfrm>
+      </p:grpSpPr>
+      <p:sp>
+        <p:nvSpPr>
+          <p:cNvPr id="2" name="Title 1">
+            <a:extLst>
+              <a:ext uri="{FF2B5EF4-FFF2-40B4-BE49-F238E27FC236}">
+                <a16:creationId xmlns:a16="http://schemas.microsoft.com/office/drawing/2014/main" id="{EE7BB3F4-71E3-6480-2DD5-AA4EAD4E5DBE}"/>
+              </a:ext>
+            </a:extLst>
+          </p:cNvPr>
+          <p:cNvSpPr>
+            <a:spLocks noGrp="1"/>
+          </p:cNvSpPr>
+          <p:nvPr>
+            <p:ph type="title"/>
+          </p:nvPr>
+        </p:nvSpPr>
+        <p:spPr/>
+        <p:txBody>
+          <a:bodyPr>
+            <a:normAutofit fontScale="90000"/>
+          </a:bodyPr>
+          <a:lstStyle/>
+          <a:p>
+            <a:r>
+              <a:rPr lang="en-US" b="1" dirty="0"/>
+              <a:t>Decoding </a:t>
+            </a:r>
+            <a:r>
+              <a:rPr lang="en-US" sz="3600" b="1" dirty="0">
+                <a:solidFill>
+                  <a:srgbClr val="C00000"/>
+                </a:solidFill>
+                <a:latin typeface="Consolas" panose="020B0609020204030204" pitchFamily="49" charset="0"/>
+                <a:cs typeface="Consolas" panose="020B0609020204030204" pitchFamily="49" charset="0"/>
+              </a:rPr>
+              <a:t>0x3FA66666 </a:t>
+            </a:r>
+            <a:br>
+              <a:rPr lang="en-US" b="1" dirty="0"/>
+            </a:br>
+            <a:r>
+              <a:rPr lang="en-US" b="1" dirty="0"/>
+              <a:t>into a floating-point number</a:t>
+            </a:r>
+            <a:endParaRPr lang="en-US" dirty="0"/>
+          </a:p>
+        </p:txBody>
+      </p:sp>
+      <p:sp>
+        <p:nvSpPr>
+          <p:cNvPr id="3" name="Slide Number Placeholder 2">
+            <a:extLst>
+              <a:ext uri="{FF2B5EF4-FFF2-40B4-BE49-F238E27FC236}">
+                <a16:creationId xmlns:a16="http://schemas.microsoft.com/office/drawing/2014/main" id="{1D830A94-D33B-2B5A-4A7E-B773BA88B436}"/>
+              </a:ext>
+            </a:extLst>
+          </p:cNvPr>
+          <p:cNvSpPr>
+            <a:spLocks noGrp="1"/>
+          </p:cNvSpPr>
+          <p:nvPr>
+            <p:ph type="sldNum" sz="quarter" idx="12"/>
+          </p:nvPr>
+        </p:nvSpPr>
+        <p:spPr/>
+        <p:txBody>
+          <a:bodyPr/>
+          <a:lstStyle/>
+          <a:p>
+            <a:fld id="{EA7C8D44-3667-46F6-9772-CC52308E2A7F}" type="slidenum">
+              <a:rPr kumimoji="0" lang="en-US" smtClean="0"/>
+              <a:pPr/>
+              <a:t>20</a:t>
+            </a:fld>
+            <a:endParaRPr kumimoji="0" lang="en-US" dirty="0"/>
+          </a:p>
+        </p:txBody>
+      </p:sp>
+      <mc:AlternateContent xmlns:mc="http://schemas.openxmlformats.org/markup-compatibility/2006">
+        <mc:Choice xmlns:a14="http://schemas.microsoft.com/office/drawing/2010/main" Requires="a14">
+          <p:sp>
+            <p:nvSpPr>
+              <p:cNvPr id="4" name="Content Placeholder 3">
+                <a:extLst>
+                  <a:ext uri="{FF2B5EF4-FFF2-40B4-BE49-F238E27FC236}">
+                    <a16:creationId xmlns:a16="http://schemas.microsoft.com/office/drawing/2014/main" id="{1E35FFBE-A292-0D67-EFA6-AEFA3301A8EC}"/>
+                  </a:ext>
+                </a:extLst>
+              </p:cNvPr>
+              <p:cNvSpPr>
+                <a:spLocks noGrp="1"/>
+              </p:cNvSpPr>
+              <p:nvPr>
+                <p:ph sz="quarter" idx="1"/>
+              </p:nvPr>
+            </p:nvSpPr>
+            <p:spPr/>
+            <p:txBody>
+              <a:bodyPr>
+                <a:normAutofit/>
+              </a:bodyPr>
+              <a:lstStyle/>
+              <a:p>
+                <a:r>
+                  <a:rPr lang="en-US" dirty="0"/>
+                  <a:t>Binary </a:t>
+                </a:r>
+                <a:r>
+                  <a:rPr lang="en-US" dirty="0">
+                    <a:solidFill>
+                      <a:srgbClr val="C00000"/>
+                    </a:solidFill>
+                    <a:latin typeface="Consolas" panose="020B0609020204030204" pitchFamily="49" charset="0"/>
+                    <a:cs typeface="Consolas" panose="020B0609020204030204" pitchFamily="49" charset="0"/>
+                  </a:rPr>
+                  <a:t>0</a:t>
+                </a:r>
+                <a:r>
+                  <a:rPr lang="en-US" dirty="0">
+                    <a:solidFill>
+                      <a:srgbClr val="0000FF"/>
+                    </a:solidFill>
+                    <a:latin typeface="Consolas" panose="020B0609020204030204" pitchFamily="49" charset="0"/>
+                    <a:cs typeface="Consolas" panose="020B0609020204030204" pitchFamily="49" charset="0"/>
+                  </a:rPr>
+                  <a:t>01111111</a:t>
+                </a:r>
+                <a:r>
+                  <a:rPr lang="en-US" dirty="0">
+                    <a:solidFill>
+                      <a:srgbClr val="00B050"/>
+                    </a:solidFill>
+                    <a:latin typeface="Consolas" panose="020B0609020204030204" pitchFamily="49" charset="0"/>
+                    <a:cs typeface="Consolas" panose="020B0609020204030204" pitchFamily="49" charset="0"/>
+                  </a:rPr>
+                  <a:t>01001100110011001100110 </a:t>
+                </a:r>
+              </a:p>
+              <a:p>
+                <a:r>
+                  <a:rPr lang="en-US" sz="2800" dirty="0"/>
+                  <a:t>Sign = </a:t>
+                </a:r>
+                <a:r>
+                  <a:rPr lang="en-US" sz="2800" dirty="0">
+                    <a:latin typeface="Consolas" panose="020B0609020204030204" pitchFamily="49" charset="0"/>
+                    <a:cs typeface="Consolas" panose="020B0609020204030204" pitchFamily="49" charset="0"/>
+                  </a:rPr>
+                  <a:t>0</a:t>
+                </a:r>
+              </a:p>
+              <a:p>
+                <a:r>
+                  <a:rPr lang="en-US" sz="2800" dirty="0"/>
+                  <a:t>Exponent = </a:t>
+                </a:r>
+                <a14:m>
+                  <m:oMath xmlns:m="http://schemas.openxmlformats.org/officeDocument/2006/math">
+                    <m:sSub>
+                      <m:sSubPr>
+                        <m:ctrlPr>
+                          <a:rPr lang="en-US" sz="2800" i="1">
+                            <a:latin typeface="Cambria Math" panose="02040503050406030204" pitchFamily="18" charset="0"/>
+                          </a:rPr>
+                        </m:ctrlPr>
+                      </m:sSubPr>
+                      <m:e>
+                        <m:r>
+                          <a:rPr lang="en-US" sz="2800" b="0" i="1" smtClean="0">
+                            <a:latin typeface="Cambria Math" panose="02040503050406030204" pitchFamily="18" charset="0"/>
+                          </a:rPr>
+                          <m:t>01111111</m:t>
+                        </m:r>
+                      </m:e>
+                      <m:sub>
+                        <m:r>
+                          <a:rPr lang="en-US" sz="2800" i="1">
+                            <a:latin typeface="Cambria Math"/>
+                          </a:rPr>
+                          <m:t>2</m:t>
+                        </m:r>
+                      </m:sub>
+                    </m:sSub>
+                    <m:r>
+                      <a:rPr lang="en-US" sz="2800" i="1">
+                        <a:latin typeface="Cambria Math"/>
+                      </a:rPr>
+                      <m:t>=1</m:t>
+                    </m:r>
+                    <m:r>
+                      <a:rPr lang="en-US" sz="2800" b="0" i="1" smtClean="0">
+                        <a:latin typeface="Cambria Math" panose="02040503050406030204" pitchFamily="18" charset="0"/>
+                      </a:rPr>
+                      <m:t>27</m:t>
+                    </m:r>
+                  </m:oMath>
+                </a14:m>
+                <a:endParaRPr lang="en-US" sz="2800" dirty="0"/>
+              </a:p>
+              <a:p>
+                <a:r>
+                  <a:rPr lang="en-US" sz="2800" dirty="0"/>
+                  <a:t>Fraction = </a:t>
+                </a:r>
+                <a14:m>
+                  <m:oMath xmlns:m="http://schemas.openxmlformats.org/officeDocument/2006/math">
+                    <m:r>
+                      <a:rPr lang="en-US" sz="2800" i="1" dirty="0" smtClean="0">
+                        <a:latin typeface="Cambria Math" panose="02040503050406030204" pitchFamily="18" charset="0"/>
+                      </a:rPr>
+                      <m:t>0</m:t>
+                    </m:r>
+                    <m:r>
+                      <a:rPr lang="en-US" sz="2800" i="1">
+                        <a:latin typeface="Cambria Math" panose="02040503050406030204" pitchFamily="18" charset="0"/>
+                      </a:rPr>
+                      <m:t>.29999995</m:t>
+                    </m:r>
+                  </m:oMath>
+                </a14:m>
+                <a:r>
+                  <a:rPr lang="en-US" sz="2800" dirty="0"/>
+                  <a:t> (calculation process skipped)</a:t>
+                </a:r>
+              </a:p>
+              <a:p>
+                <a14:m>
+                  <m:oMath xmlns:m="http://schemas.openxmlformats.org/officeDocument/2006/math">
+                    <m:r>
+                      <a:rPr lang="en-US" sz="2800" i="1">
+                        <a:latin typeface="Cambria Math"/>
+                      </a:rPr>
+                      <m:t>𝑓</m:t>
+                    </m:r>
+                    <m:r>
+                      <m:rPr>
+                        <m:aln/>
+                      </m:rPr>
+                      <a:rPr lang="en-US" sz="2800" i="1">
+                        <a:latin typeface="Cambria Math"/>
+                      </a:rPr>
+                      <m:t>=</m:t>
+                    </m:r>
+                    <m:sSup>
+                      <m:sSupPr>
+                        <m:ctrlPr>
+                          <a:rPr lang="en-US" sz="2800" i="1">
+                            <a:latin typeface="Cambria Math" panose="02040503050406030204" pitchFamily="18" charset="0"/>
+                          </a:rPr>
+                        </m:ctrlPr>
+                      </m:sSupPr>
+                      <m:e>
+                        <m:d>
+                          <m:dPr>
+                            <m:ctrlPr>
+                              <a:rPr lang="en-US" sz="2800" i="1">
+                                <a:latin typeface="Cambria Math" panose="02040503050406030204" pitchFamily="18" charset="0"/>
+                              </a:rPr>
+                            </m:ctrlPr>
+                          </m:dPr>
+                          <m:e>
+                            <m:r>
+                              <a:rPr lang="en-US" sz="2800" i="1">
+                                <a:latin typeface="Cambria Math"/>
+                              </a:rPr>
+                              <m:t>−1</m:t>
+                            </m:r>
+                          </m:e>
+                        </m:d>
+                      </m:e>
+                      <m:sup>
+                        <m:r>
+                          <a:rPr lang="en-US" sz="2800" i="1">
+                            <a:latin typeface="Cambria Math"/>
+                          </a:rPr>
+                          <m:t>𝑆</m:t>
+                        </m:r>
+                      </m:sup>
+                    </m:sSup>
+                    <m:r>
+                      <a:rPr lang="en-US" sz="2800" i="1">
+                        <a:latin typeface="Cambria Math"/>
+                      </a:rPr>
+                      <m:t>×</m:t>
+                    </m:r>
+                    <m:d>
+                      <m:dPr>
+                        <m:ctrlPr>
+                          <a:rPr lang="en-US" sz="2800" i="1">
+                            <a:latin typeface="Cambria Math" panose="02040503050406030204" pitchFamily="18" charset="0"/>
+                          </a:rPr>
+                        </m:ctrlPr>
+                      </m:dPr>
+                      <m:e>
+                        <m:r>
+                          <a:rPr lang="en-US" sz="2800" i="1">
+                            <a:latin typeface="Cambria Math"/>
+                          </a:rPr>
+                          <m:t>1+</m:t>
+                        </m:r>
+                        <m:r>
+                          <a:rPr lang="en-US" sz="2800" i="1">
+                            <a:latin typeface="Cambria Math"/>
+                          </a:rPr>
+                          <m:t>𝐹𝑟𝑎𝑐𝑡𝑖𝑜𝑛</m:t>
+                        </m:r>
+                      </m:e>
+                    </m:d>
+                    <m:r>
+                      <a:rPr lang="en-US" sz="2800" i="1">
+                        <a:latin typeface="Cambria Math"/>
+                      </a:rPr>
+                      <m:t>×</m:t>
+                    </m:r>
+                    <m:sSup>
+                      <m:sSupPr>
+                        <m:ctrlPr>
+                          <a:rPr lang="en-US" sz="2800" i="1">
+                            <a:latin typeface="Cambria Math" panose="02040503050406030204" pitchFamily="18" charset="0"/>
+                          </a:rPr>
+                        </m:ctrlPr>
+                      </m:sSupPr>
+                      <m:e>
+                        <m:r>
+                          <a:rPr lang="en-US" sz="2800" i="1">
+                            <a:latin typeface="Cambria Math"/>
+                          </a:rPr>
+                          <m:t>2</m:t>
+                        </m:r>
+                      </m:e>
+                      <m:sup>
+                        <m:r>
+                          <a:rPr lang="en-US" sz="2800" i="1">
+                            <a:latin typeface="Cambria Math"/>
+                          </a:rPr>
+                          <m:t>𝐸𝑥𝑝𝑜𝑛𝑒𝑛𝑡</m:t>
+                        </m:r>
+                        <m:r>
+                          <a:rPr lang="en-US" sz="2800" i="1">
+                            <a:latin typeface="Cambria Math"/>
+                          </a:rPr>
+                          <m:t>−127</m:t>
+                        </m:r>
+                      </m:sup>
+                    </m:sSup>
+                  </m:oMath>
+                </a14:m>
+                <a:endParaRPr lang="en-US" sz="2800" i="1" dirty="0">
+                  <a:latin typeface="Cambria Math" panose="02040503050406030204" pitchFamily="18" charset="0"/>
+                </a:endParaRPr>
+              </a:p>
+              <a:p>
+                <a:pPr marL="0" indent="0">
+                  <a:buNone/>
+                </a:pPr>
+                <a14:m>
+                  <m:oMathPara xmlns:m="http://schemas.openxmlformats.org/officeDocument/2006/math">
+                    <m:oMathParaPr>
+                      <m:jc m:val="centerGroup"/>
+                    </m:oMathParaPr>
+                    <m:oMath xmlns:m="http://schemas.openxmlformats.org/officeDocument/2006/math">
+                      <m:r>
+                        <m:rPr>
+                          <m:aln/>
+                        </m:rPr>
+                        <a:rPr lang="en-US" sz="2800" i="1">
+                          <a:latin typeface="Cambria Math"/>
+                        </a:rPr>
+                        <m:t>=</m:t>
+                      </m:r>
+                      <m:sSup>
+                        <m:sSupPr>
+                          <m:ctrlPr>
+                            <a:rPr lang="en-US" sz="2800" i="1">
+                              <a:latin typeface="Cambria Math" panose="02040503050406030204" pitchFamily="18" charset="0"/>
+                            </a:rPr>
+                          </m:ctrlPr>
+                        </m:sSupPr>
+                        <m:e>
+                          <m:d>
+                            <m:dPr>
+                              <m:ctrlPr>
+                                <a:rPr lang="en-US" sz="2800" i="1">
+                                  <a:latin typeface="Cambria Math" panose="02040503050406030204" pitchFamily="18" charset="0"/>
+                                </a:rPr>
+                              </m:ctrlPr>
+                            </m:dPr>
+                            <m:e>
+                              <m:r>
+                                <a:rPr lang="en-US" sz="2800" i="1">
+                                  <a:latin typeface="Cambria Math"/>
+                                </a:rPr>
+                                <m:t>−1</m:t>
+                              </m:r>
+                            </m:e>
+                          </m:d>
+                        </m:e>
+                        <m:sup>
+                          <m:r>
+                            <a:rPr lang="en-US" sz="2800" i="1">
+                              <a:latin typeface="Cambria Math" panose="02040503050406030204" pitchFamily="18" charset="0"/>
+                            </a:rPr>
+                            <m:t>0</m:t>
+                          </m:r>
+                        </m:sup>
+                      </m:sSup>
+                      <m:r>
+                        <a:rPr lang="en-US" sz="2800" i="1">
+                          <a:latin typeface="Cambria Math"/>
+                        </a:rPr>
+                        <m:t>×</m:t>
+                      </m:r>
+                      <m:d>
+                        <m:dPr>
+                          <m:ctrlPr>
+                            <a:rPr lang="en-US" sz="2800" i="1">
+                              <a:latin typeface="Cambria Math" panose="02040503050406030204" pitchFamily="18" charset="0"/>
+                            </a:rPr>
+                          </m:ctrlPr>
+                        </m:dPr>
+                        <m:e>
+                          <m:r>
+                            <a:rPr lang="en-US" sz="2800" i="1">
+                              <a:latin typeface="Cambria Math"/>
+                            </a:rPr>
+                            <m:t>1+</m:t>
+                          </m:r>
+                          <m:r>
+                            <a:rPr lang="en-US" sz="2800" i="1" dirty="0">
+                              <a:latin typeface="Cambria Math" panose="02040503050406030204" pitchFamily="18" charset="0"/>
+                            </a:rPr>
+                            <m:t>0</m:t>
+                          </m:r>
+                          <m:r>
+                            <a:rPr lang="en-US" sz="2800" i="1">
+                              <a:latin typeface="Cambria Math" panose="02040503050406030204" pitchFamily="18" charset="0"/>
+                            </a:rPr>
+                            <m:t>.29999995</m:t>
+                          </m:r>
+                        </m:e>
+                      </m:d>
+                      <m:r>
+                        <a:rPr lang="en-US" sz="2800" i="1">
+                          <a:latin typeface="Cambria Math"/>
+                        </a:rPr>
+                        <m:t>×</m:t>
+                      </m:r>
+                      <m:sSup>
+                        <m:sSupPr>
+                          <m:ctrlPr>
+                            <a:rPr lang="en-US" sz="2800" i="1">
+                              <a:latin typeface="Cambria Math" panose="02040503050406030204" pitchFamily="18" charset="0"/>
+                            </a:rPr>
+                          </m:ctrlPr>
+                        </m:sSupPr>
+                        <m:e>
+                          <m:r>
+                            <a:rPr lang="en-US" sz="2800" i="1">
+                              <a:latin typeface="Cambria Math"/>
+                            </a:rPr>
+                            <m:t>2</m:t>
+                          </m:r>
+                        </m:e>
+                        <m:sup>
+                          <m:r>
+                            <a:rPr lang="en-US" sz="2800" i="1">
+                              <a:latin typeface="Cambria Math"/>
+                            </a:rPr>
+                            <m:t>1</m:t>
+                          </m:r>
+                          <m:r>
+                            <a:rPr lang="en-US" sz="2800" i="1">
+                              <a:latin typeface="Cambria Math" panose="02040503050406030204" pitchFamily="18" charset="0"/>
+                            </a:rPr>
+                            <m:t>27</m:t>
+                          </m:r>
+                          <m:r>
+                            <a:rPr lang="en-US" sz="2800" i="1">
+                              <a:latin typeface="Cambria Math"/>
+                            </a:rPr>
+                            <m:t>−127</m:t>
+                          </m:r>
+                        </m:sup>
+                      </m:sSup>
+                    </m:oMath>
+                    <m:oMath xmlns:m="http://schemas.openxmlformats.org/officeDocument/2006/math">
+                      <m:r>
+                        <m:rPr>
+                          <m:aln/>
+                        </m:rPr>
+                        <a:rPr lang="en-US" sz="2800" i="1">
+                          <a:latin typeface="Cambria Math"/>
+                        </a:rPr>
+                        <m:t>=</m:t>
+                      </m:r>
+                      <m:r>
+                        <a:rPr lang="en-US" sz="2800" i="1" dirty="0">
+                          <a:latin typeface="Cambria Math" panose="02040503050406030204" pitchFamily="18" charset="0"/>
+                        </a:rPr>
+                        <m:t>1</m:t>
+                      </m:r>
+                      <m:r>
+                        <a:rPr lang="en-US" sz="2800" i="1">
+                          <a:latin typeface="Cambria Math" panose="02040503050406030204" pitchFamily="18" charset="0"/>
+                        </a:rPr>
+                        <m:t>.29999995</m:t>
+                      </m:r>
+                    </m:oMath>
+                  </m:oMathPara>
+                </a14:m>
+                <a:endParaRPr lang="en-US" sz="2800" dirty="0"/>
+              </a:p>
+              <a:p>
+                <a:r>
+                  <a:rPr lang="en-US" sz="2800" dirty="0"/>
+                  <a:t>Error: </a:t>
+                </a:r>
+                <a14:m>
+                  <m:oMath xmlns:m="http://schemas.openxmlformats.org/officeDocument/2006/math">
+                    <m:r>
+                      <a:rPr lang="en-US" sz="2800" b="0" i="0" smtClean="0">
+                        <a:latin typeface="Cambria Math" panose="02040503050406030204" pitchFamily="18" charset="0"/>
+                      </a:rPr>
+                      <m:t>1.3−</m:t>
+                    </m:r>
+                    <m:r>
+                      <a:rPr lang="en-US" sz="2800" i="1" dirty="0">
+                        <a:latin typeface="Cambria Math" panose="02040503050406030204" pitchFamily="18" charset="0"/>
+                      </a:rPr>
+                      <m:t>1</m:t>
+                    </m:r>
+                    <m:r>
+                      <a:rPr lang="en-US" sz="2800" i="1">
+                        <a:latin typeface="Cambria Math" panose="02040503050406030204" pitchFamily="18" charset="0"/>
+                      </a:rPr>
+                      <m:t>.29999995</m:t>
+                    </m:r>
+                    <m:r>
+                      <a:rPr lang="en-US" sz="2800" i="1">
+                        <a:latin typeface="Cambria Math" panose="02040503050406030204" pitchFamily="18" charset="0"/>
+                      </a:rPr>
+                      <m:t>=5×</m:t>
+                    </m:r>
+                    <m:sSup>
+                      <m:sSupPr>
+                        <m:ctrlPr>
+                          <a:rPr lang="en-US" sz="2800" b="0" i="1" smtClean="0">
+                            <a:latin typeface="Cambria Math" panose="02040503050406030204" pitchFamily="18" charset="0"/>
+                          </a:rPr>
+                        </m:ctrlPr>
+                      </m:sSupPr>
+                      <m:e>
+                        <m:r>
+                          <a:rPr lang="en-US" sz="2800" i="1">
+                            <a:latin typeface="Cambria Math" panose="02040503050406030204" pitchFamily="18" charset="0"/>
+                          </a:rPr>
+                          <m:t>10</m:t>
+                        </m:r>
+                      </m:e>
+                      <m:sup>
+                        <m:r>
+                          <a:rPr lang="en-US" sz="2800" b="0" i="1" smtClean="0">
+                            <a:latin typeface="Cambria Math" panose="02040503050406030204" pitchFamily="18" charset="0"/>
+                          </a:rPr>
+                          <m:t>−8</m:t>
+                        </m:r>
+                      </m:sup>
+                    </m:sSup>
+                  </m:oMath>
+                </a14:m>
+                <a:endParaRPr lang="en-US" sz="2800" dirty="0"/>
+              </a:p>
+              <a:p>
+                <a:endParaRPr lang="en-US" sz="2800" i="1" dirty="0">
+                  <a:latin typeface="Cambria Math"/>
+                </a:endParaRPr>
+              </a:p>
+            </p:txBody>
+          </p:sp>
+        </mc:Choice>
+        <mc:Fallback>
+          <p:sp>
+            <p:nvSpPr>
+              <p:cNvPr id="4" name="Content Placeholder 3">
+                <a:extLst>
+                  <a:ext uri="{FF2B5EF4-FFF2-40B4-BE49-F238E27FC236}">
+                    <a16:creationId xmlns:a16="http://schemas.microsoft.com/office/drawing/2014/main" id="{1E35FFBE-A292-0D67-EFA6-AEFA3301A8EC}"/>
+                  </a:ext>
+                </a:extLst>
+              </p:cNvPr>
+              <p:cNvSpPr>
+                <a:spLocks noGrp="1" noRot="1" noChangeAspect="1" noMove="1" noResize="1" noEditPoints="1" noAdjustHandles="1" noChangeArrowheads="1" noChangeShapeType="1" noTextEdit="1"/>
+              </p:cNvSpPr>
+              <p:nvPr>
+                <p:ph sz="quarter" idx="1"/>
+              </p:nvPr>
+            </p:nvSpPr>
+            <p:spPr>
+              <a:blipFill>
+                <a:blip r:embed="rId3"/>
+                <a:stretch>
+                  <a:fillRect l="-556" t="-1235"/>
+                </a:stretch>
+              </a:blipFill>
+            </p:spPr>
+            <p:txBody>
+              <a:bodyPr/>
+              <a:lstStyle/>
+              <a:p>
+                <a:r>
+                  <a:rPr lang="en-US">
+                    <a:noFill/>
+                  </a:rPr>
+                  <a:t> </a:t>
+                </a:r>
+              </a:p>
+            </p:txBody>
+          </p:sp>
+        </mc:Fallback>
+      </mc:AlternateContent>
+      <p:sp>
+        <p:nvSpPr>
+          <p:cNvPr id="5" name="TextBox 4">
+            <a:extLst>
+              <a:ext uri="{FF2B5EF4-FFF2-40B4-BE49-F238E27FC236}">
+                <a16:creationId xmlns:a16="http://schemas.microsoft.com/office/drawing/2014/main" id="{FFF26C8F-DF03-64D8-CF77-B258AADB637B}"/>
+              </a:ext>
+            </a:extLst>
+          </p:cNvPr>
+          <p:cNvSpPr txBox="1"/>
+          <p:nvPr/>
+        </p:nvSpPr>
+        <p:spPr>
+          <a:xfrm>
+            <a:off x="2895600" y="5638800"/>
+            <a:ext cx="5360378" cy="646331"/>
+          </a:xfrm>
+          <a:prstGeom prst="rect">
+            <a:avLst/>
+          </a:prstGeom>
+          <a:solidFill>
+            <a:schemeClr val="bg1">
+              <a:lumMod val="85000"/>
+            </a:schemeClr>
+          </a:solidFill>
+        </p:spPr>
+        <p:style>
+          <a:lnRef idx="1">
+            <a:schemeClr val="dk1"/>
+          </a:lnRef>
+          <a:fillRef idx="2">
+            <a:schemeClr val="dk1"/>
+          </a:fillRef>
+          <a:effectRef idx="1">
+            <a:schemeClr val="dk1"/>
+          </a:effectRef>
+          <a:fontRef idx="minor">
+            <a:schemeClr val="dk1"/>
+          </a:fontRef>
+        </p:style>
+        <p:txBody>
+          <a:bodyPr wrap="none" rtlCol="0">
+            <a:spAutoFit/>
+          </a:bodyPr>
+          <a:lstStyle/>
+          <a:p>
+            <a:r>
+              <a:rPr lang="en-US" dirty="0"/>
+              <a:t>Why Is This Happening?! Floating Point Approximation4</a:t>
+            </a:r>
+          </a:p>
+          <a:p>
+            <a:r>
+              <a:rPr lang="en-US" dirty="0">
+                <a:hlinkClick r:id="rId4"/>
+              </a:rPr>
+              <a:t>https://www.youtube.com/watch?v=2gIxbTn7GSc</a:t>
+            </a:r>
+            <a:r>
+              <a:rPr lang="en-US" dirty="0"/>
+              <a:t> </a:t>
+            </a:r>
+          </a:p>
+        </p:txBody>
+      </p:sp>
+    </p:spTree>
+    <p:extLst>
+      <p:ext uri="{BB962C8B-B14F-4D97-AF65-F5344CB8AC3E}">
+        <p14:creationId xmlns:p14="http://schemas.microsoft.com/office/powerpoint/2010/main" val="598855194"/>
+      </p:ext>
+    </p:extLst>
+  </p:cSld>
+  <p:clrMapOvr>
+    <a:masterClrMapping/>
+  </p:clrMapOvr>
+</p:sld>
+</file>
+
+<file path=ppt/slides/slide21.xml><?xml version="1.0" encoding="utf-8"?>
+<p:sld xmlns:a="http://schemas.openxmlformats.org/drawingml/2006/main" xmlns:r="http://schemas.openxmlformats.org/officeDocument/2006/relationships" xmlns:p="http://schemas.openxmlformats.org/presentationml/2006/main">
+  <p:cSld>
+    <p:spTree>
+      <p:nvGrpSpPr>
+        <p:cNvPr id="1" name=""/>
+        <p:cNvGrpSpPr/>
+        <p:nvPr/>
+      </p:nvGrpSpPr>
+      <p:grpSpPr>
+        <a:xfrm>
+          <a:off x="0" y="0"/>
+          <a:ext cx="0" cy="0"/>
+          <a:chOff x="0" y="0"/>
+          <a:chExt cx="0" cy="0"/>
+        </a:xfrm>
+      </p:grpSpPr>
+      <p:sp>
+        <p:nvSpPr>
+          <p:cNvPr id="2" name="Title 1"/>
+          <p:cNvSpPr>
+            <a:spLocks noGrp="1"/>
+          </p:cNvSpPr>
+          <p:nvPr>
+            <p:ph type="title"/>
+          </p:nvPr>
+        </p:nvSpPr>
+        <p:spPr/>
+        <p:txBody>
+          <a:bodyPr/>
+          <a:lstStyle/>
+          <a:p>
+            <a:r>
+              <a:rPr lang="en-US" dirty="0"/>
+              <a:t>Special Values</a:t>
+            </a:r>
+          </a:p>
+        </p:txBody>
+      </p:sp>
+      <p:sp>
+        <p:nvSpPr>
+          <p:cNvPr id="3" name="Slide Number Placeholder 2"/>
+          <p:cNvSpPr>
+            <a:spLocks noGrp="1"/>
+          </p:cNvSpPr>
+          <p:nvPr>
+            <p:ph type="sldNum" sz="quarter" idx="12"/>
+          </p:nvPr>
+        </p:nvSpPr>
+        <p:spPr/>
+        <p:txBody>
+          <a:bodyPr/>
+          <a:lstStyle/>
+          <a:p>
+            <a:fld id="{EA7C8D44-3667-46F6-9772-CC52308E2A7F}" type="slidenum">
+              <a:rPr kumimoji="0" lang="en-US" smtClean="0"/>
+              <a:pPr/>
+              <a:t>21</a:t>
+            </a:fld>
+            <a:endParaRPr kumimoji="0" lang="en-US" dirty="0"/>
+          </a:p>
+        </p:txBody>
+      </p:sp>
+      <p:sp>
+        <p:nvSpPr>
+          <p:cNvPr id="4" name="Content Placeholder 3"/>
+          <p:cNvSpPr>
+            <a:spLocks noGrp="1"/>
+          </p:cNvSpPr>
+          <p:nvPr>
+            <p:ph sz="quarter" idx="1"/>
+          </p:nvPr>
+        </p:nvSpPr>
+        <p:spPr/>
+        <p:txBody>
+          <a:bodyPr/>
+          <a:lstStyle/>
+          <a:p>
+            <a:r>
+              <a:rPr lang="en-US" dirty="0"/>
+              <a:t>Exponents </a:t>
+            </a:r>
+            <a:r>
+              <a:rPr lang="en-US" dirty="0">
+                <a:latin typeface="Consolas" panose="020B0609020204030204" pitchFamily="49" charset="0"/>
+                <a:cs typeface="Consolas" panose="020B0609020204030204" pitchFamily="49" charset="0"/>
+              </a:rPr>
+              <a:t>00000000</a:t>
+            </a:r>
+            <a:r>
+              <a:rPr lang="en-US" dirty="0"/>
+              <a:t> and </a:t>
+            </a:r>
+            <a:r>
+              <a:rPr lang="en-US" dirty="0">
+                <a:latin typeface="Consolas" panose="020B0609020204030204" pitchFamily="49" charset="0"/>
+                <a:cs typeface="Consolas" panose="020B0609020204030204" pitchFamily="49" charset="0"/>
+              </a:rPr>
+              <a:t>111111111</a:t>
+            </a:r>
+            <a:r>
+              <a:rPr lang="en-US" dirty="0"/>
+              <a:t> are reserved.</a:t>
+            </a:r>
+          </a:p>
+        </p:txBody>
+      </p:sp>
+      <p:pic>
+        <p:nvPicPr>
+          <p:cNvPr id="7" name="Picture 6"/>
+          <p:cNvPicPr>
+            <a:picLocks noChangeAspect="1"/>
+          </p:cNvPicPr>
+          <p:nvPr/>
+        </p:nvPicPr>
+        <p:blipFill>
+          <a:blip r:embed="rId2"/>
+          <a:stretch>
+            <a:fillRect/>
+          </a:stretch>
+        </p:blipFill>
+        <p:spPr>
+          <a:xfrm>
+            <a:off x="1676400" y="1905000"/>
+            <a:ext cx="8687616" cy="2691294"/>
+          </a:xfrm>
+          <a:prstGeom prst="rect">
+            <a:avLst/>
+          </a:prstGeom>
+        </p:spPr>
+      </p:pic>
+      <mc:AlternateContent xmlns:mc="http://schemas.openxmlformats.org/markup-compatibility/2006" xmlns:a14="http://schemas.microsoft.com/office/drawing/2010/main">
+        <mc:Choice Requires="a14">
+          <p:sp>
+            <p:nvSpPr>
+              <p:cNvPr id="8" name="Content Placeholder 3"/>
+              <p:cNvSpPr txBox="1">
+                <a:spLocks/>
+              </p:cNvSpPr>
+              <p:nvPr/>
+            </p:nvSpPr>
+            <p:spPr>
+              <a:xfrm>
+                <a:off x="2133600" y="4795684"/>
+                <a:ext cx="8229600" cy="1513676"/>
+              </a:xfrm>
+              <a:prstGeom prst="rect">
+                <a:avLst/>
+              </a:prstGeom>
+            </p:spPr>
+            <p:txBody>
+              <a:bodyPr vert="horz">
+                <a:normAutofit/>
+              </a:bodyPr>
+              <a:lstStyle>
+                <a:lvl1pPr marL="274320" indent="-274320" algn="l" rtl="0" eaLnBrk="1" latinLnBrk="0" hangingPunct="1">
+                  <a:spcBef>
+                    <a:spcPts val="600"/>
+                  </a:spcBef>
+                  <a:buClr>
+                    <a:schemeClr val="accent1"/>
+                  </a:buClr>
+                  <a:buSzPct val="76000"/>
+                  <a:buFont typeface="Wingdings 3"/>
+                  <a:buChar char=""/>
+                  <a:defRPr kumimoji="0" sz="2600" kern="1200">
+                    <a:solidFill>
+                      <a:schemeClr val="tx1"/>
+                    </a:solidFill>
+                    <a:latin typeface="+mn-lt"/>
+                    <a:ea typeface="+mn-ea"/>
+                    <a:cs typeface="+mn-cs"/>
+                  </a:defRPr>
+                </a:lvl1pPr>
+                <a:lvl2pPr marL="548640" indent="-274320" algn="l" rtl="0" eaLnBrk="1" latinLnBrk="0" hangingPunct="1">
+                  <a:spcBef>
+                    <a:spcPts val="500"/>
+                  </a:spcBef>
+                  <a:buClr>
+                    <a:schemeClr val="accent2"/>
+                  </a:buClr>
+                  <a:buSzPct val="76000"/>
+                  <a:buFont typeface="Wingdings 3"/>
+                  <a:buChar char=""/>
+                  <a:defRPr kumimoji="0" sz="2300" kern="1200">
+                    <a:solidFill>
+                      <a:schemeClr val="tx2"/>
+                    </a:solidFill>
+                    <a:latin typeface="+mn-lt"/>
+                    <a:ea typeface="+mn-ea"/>
+                    <a:cs typeface="+mn-cs"/>
+                  </a:defRPr>
+                </a:lvl2pPr>
+                <a:lvl3pPr marL="822960" indent="-228600" algn="l" rtl="0" eaLnBrk="1" latinLnBrk="0" hangingPunct="1">
+                  <a:spcBef>
+                    <a:spcPts val="500"/>
+                  </a:spcBef>
+                  <a:buClr>
+                    <a:schemeClr val="bg1">
+                      <a:shade val="50000"/>
+                    </a:schemeClr>
+                  </a:buClr>
+                  <a:buSzPct val="76000"/>
+                  <a:buFont typeface="Wingdings 3"/>
+                  <a:buChar char=""/>
+                  <a:defRPr kumimoji="0" sz="2000" kern="1200">
+                    <a:solidFill>
+                      <a:schemeClr val="tx1"/>
+                    </a:solidFill>
+                    <a:latin typeface="+mn-lt"/>
+                    <a:ea typeface="+mn-ea"/>
+                    <a:cs typeface="+mn-cs"/>
+                  </a:defRPr>
+                </a:lvl3pPr>
+                <a:lvl4pPr marL="1097280" indent="-228600" algn="l" rtl="0" eaLnBrk="1" latinLnBrk="0" hangingPunct="1">
+                  <a:spcBef>
+                    <a:spcPts val="400"/>
+                  </a:spcBef>
+                  <a:buClr>
+                    <a:schemeClr val="accent2">
+                      <a:shade val="75000"/>
+                    </a:schemeClr>
+                  </a:buClr>
+                  <a:buSzPct val="70000"/>
+                  <a:buFont typeface="Wingdings"/>
+                  <a:buChar char=""/>
+                  <a:defRPr kumimoji="0" sz="1800" kern="1200">
+                    <a:solidFill>
+                      <a:schemeClr val="tx1"/>
+                    </a:solidFill>
+                    <a:latin typeface="+mn-lt"/>
+                    <a:ea typeface="+mn-ea"/>
+                    <a:cs typeface="+mn-cs"/>
+                  </a:defRPr>
+                </a:lvl4pPr>
+                <a:lvl5pPr marL="1371600" indent="-228600" algn="l" rtl="0" eaLnBrk="1" latinLnBrk="0" hangingPunct="1">
+                  <a:spcBef>
+                    <a:spcPts val="300"/>
+                  </a:spcBef>
+                  <a:buClr>
+                    <a:schemeClr val="accent2"/>
+                  </a:buClr>
+                  <a:buSzPct val="70000"/>
+                  <a:buFont typeface="Wingdings"/>
+                  <a:buChar char=""/>
+                  <a:defRPr kumimoji="0" sz="1600" kern="1200">
+                    <a:solidFill>
+                      <a:schemeClr val="tx1"/>
+                    </a:solidFill>
+                    <a:latin typeface="+mn-lt"/>
+                    <a:ea typeface="+mn-ea"/>
+                    <a:cs typeface="+mn-cs"/>
+                  </a:defRPr>
+                </a:lvl5pPr>
+                <a:lvl6pPr marL="1645920" indent="-182880" algn="l" rtl="0" eaLnBrk="1" latinLnBrk="0" hangingPunct="1">
+                  <a:spcBef>
+                    <a:spcPts val="300"/>
+                  </a:spcBef>
+                  <a:buClr>
+                    <a:srgbClr val="9FB8CD">
+                      <a:shade val="75000"/>
+                    </a:srgbClr>
+                  </a:buClr>
+                  <a:buSzPct val="75000"/>
+                  <a:buFont typeface="Wingdings 3"/>
+                  <a:buChar char=""/>
+                  <a:defRPr kumimoji="0" lang="en-US" sz="1600" kern="1200" smtClean="0">
+                    <a:solidFill>
+                      <a:schemeClr val="tx1"/>
+                    </a:solidFill>
+                    <a:latin typeface="+mn-lt"/>
+                    <a:ea typeface="+mn-ea"/>
+                    <a:cs typeface="+mn-cs"/>
+                  </a:defRPr>
+                </a:lvl6pPr>
+                <a:lvl7pPr marL="1828800" indent="-182880" algn="l" rtl="0" eaLnBrk="1" latinLnBrk="0" hangingPunct="1">
+                  <a:spcBef>
+                    <a:spcPts val="300"/>
+                  </a:spcBef>
+                  <a:buClr>
+                    <a:srgbClr val="727CA3">
+                      <a:shade val="75000"/>
+                    </a:srgbClr>
+                  </a:buClr>
+                  <a:buSzPct val="75000"/>
+                  <a:buFont typeface="Wingdings 3"/>
+                  <a:buChar char=""/>
+                  <a:defRPr kumimoji="0" lang="en-US" sz="1400" kern="1200" smtClean="0">
+                    <a:solidFill>
+                      <a:schemeClr val="tx1"/>
+                    </a:solidFill>
+                    <a:latin typeface="+mn-lt"/>
+                    <a:ea typeface="+mn-ea"/>
+                    <a:cs typeface="+mn-cs"/>
+                  </a:defRPr>
+                </a:lvl7pPr>
+                <a:lvl8pPr marL="2011680" indent="-182880" algn="l" rtl="0" eaLnBrk="1" latinLnBrk="0" hangingPunct="1">
+                  <a:spcBef>
+                    <a:spcPts val="300"/>
+                  </a:spcBef>
+                  <a:buClr>
+                    <a:prstClr val="white">
+                      <a:shade val="50000"/>
+                    </a:prstClr>
+                  </a:buClr>
+                  <a:buSzPct val="75000"/>
+                  <a:buFont typeface="Wingdings 3"/>
+                  <a:buChar char=""/>
+                  <a:defRPr kumimoji="0" lang="en-US" sz="1400" kern="1200" smtClean="0">
+                    <a:solidFill>
+                      <a:schemeClr val="tx1"/>
+                    </a:solidFill>
+                    <a:latin typeface="+mn-lt"/>
+                    <a:ea typeface="+mn-ea"/>
+                    <a:cs typeface="+mn-cs"/>
+                  </a:defRPr>
+                </a:lvl8pPr>
+                <a:lvl9pPr marL="2194560" indent="-182880" algn="l" rtl="0" eaLnBrk="1" latinLnBrk="0" hangingPunct="1">
+                  <a:spcBef>
+                    <a:spcPts val="300"/>
+                  </a:spcBef>
+                  <a:buClr>
+                    <a:srgbClr val="9FB8CD"/>
+                  </a:buClr>
+                  <a:buSzPct val="75000"/>
+                  <a:buFont typeface="Wingdings 3"/>
+                  <a:buChar char=""/>
+                  <a:defRPr kumimoji="0" lang="en-US" sz="1200" kern="1200" smtClean="0">
+                    <a:solidFill>
+                      <a:schemeClr val="tx1"/>
+                    </a:solidFill>
+                    <a:latin typeface="+mn-lt"/>
+                    <a:ea typeface="+mn-ea"/>
+                    <a:cs typeface="+mn-cs"/>
+                  </a:defRPr>
+                </a:lvl9pPr>
+              </a:lstStyle>
+              <a:p>
+                <a:r>
+                  <a:rPr lang="en-US" dirty="0"/>
+                  <a:t>Example of Not-A-Number (</a:t>
+                </a:r>
+                <a:r>
+                  <a:rPr lang="en-US" dirty="0" err="1"/>
+                  <a:t>NaN</a:t>
+                </a:r>
+                <a:r>
+                  <a:rPr lang="en-US" dirty="0"/>
+                  <a:t>)</a:t>
+                </a:r>
+              </a:p>
+              <a:p>
+                <a:pPr lvl="1"/>
+                <a:r>
+                  <a:rPr lang="en-US" dirty="0">
+                    <a:latin typeface="Consolas" panose="020B0609020204030204" pitchFamily="49" charset="0"/>
+                    <a:cs typeface="Consolas" panose="020B0609020204030204" pitchFamily="49" charset="0"/>
+                  </a:rPr>
+                  <a:t>log(-10.0), </a:t>
+                </a:r>
+                <a:r>
+                  <a:rPr lang="en-US" dirty="0" err="1">
+                    <a:latin typeface="Consolas" panose="020B0609020204030204" pitchFamily="49" charset="0"/>
+                    <a:cs typeface="Consolas" panose="020B0609020204030204" pitchFamily="49" charset="0"/>
+                  </a:rPr>
+                  <a:t>sqrt</a:t>
+                </a:r>
+                <a:r>
+                  <a:rPr lang="en-US" dirty="0">
+                    <a:latin typeface="Consolas" panose="020B0609020204030204" pitchFamily="49" charset="0"/>
+                    <a:cs typeface="Consolas" panose="020B0609020204030204" pitchFamily="49" charset="0"/>
+                  </a:rPr>
+                  <a:t>(-1.0), 0.0/0.0</a:t>
+                </a:r>
+                <a:r>
+                  <a:rPr lang="en-US" dirty="0"/>
+                  <a:t>, </a:t>
+                </a:r>
+                <a14:m>
+                  <m:oMath xmlns:m="http://schemas.openxmlformats.org/officeDocument/2006/math">
+                    <m:r>
+                      <a:rPr lang="en-US" i="1">
+                        <a:latin typeface="Cambria Math" panose="02040503050406030204" pitchFamily="18" charset="0"/>
+                      </a:rPr>
+                      <m:t>−</m:t>
+                    </m:r>
+                    <m:r>
+                      <a:rPr lang="en-US" i="1">
+                        <a:latin typeface="Cambria Math" panose="02040503050406030204" pitchFamily="18" charset="0"/>
+                        <a:ea typeface="Cambria Math" panose="02040503050406030204" pitchFamily="18" charset="0"/>
+                      </a:rPr>
+                      <m:t>∞+∞</m:t>
+                    </m:r>
+                  </m:oMath>
+                </a14:m>
+                <a:r>
+                  <a:rPr lang="en-US" dirty="0"/>
+                  <a:t>, </a:t>
+                </a:r>
+              </a:p>
+            </p:txBody>
+          </p:sp>
+        </mc:Choice>
+        <mc:Fallback xmlns="">
+          <p:sp>
+            <p:nvSpPr>
+              <p:cNvPr id="8" name="Content Placeholder 3"/>
+              <p:cNvSpPr txBox="1">
+                <a:spLocks noRot="1" noChangeAspect="1" noMove="1" noResize="1" noEditPoints="1" noAdjustHandles="1" noChangeArrowheads="1" noChangeShapeType="1" noTextEdit="1"/>
+              </p:cNvSpPr>
+              <p:nvPr/>
+            </p:nvSpPr>
+            <p:spPr>
+              <a:xfrm>
+                <a:off x="2133600" y="4795684"/>
+                <a:ext cx="8229600" cy="1513676"/>
+              </a:xfrm>
+              <a:prstGeom prst="rect">
+                <a:avLst/>
+              </a:prstGeom>
+              <a:blipFill>
+                <a:blip r:embed="rId3"/>
+                <a:stretch>
+                  <a:fillRect l="-770" t="-3333"/>
+                </a:stretch>
+              </a:blipFill>
+            </p:spPr>
+            <p:txBody>
+              <a:bodyPr/>
+              <a:lstStyle/>
+              <a:p>
+                <a:r>
+                  <a:rPr lang="en-US">
+                    <a:noFill/>
+                  </a:rPr>
+                  <a:t> </a:t>
+                </a:r>
+              </a:p>
+            </p:txBody>
+          </p:sp>
+        </mc:Fallback>
+      </mc:AlternateContent>
+    </p:spTree>
+    <p:extLst>
+      <p:ext uri="{BB962C8B-B14F-4D97-AF65-F5344CB8AC3E}">
+        <p14:creationId xmlns:p14="http://schemas.microsoft.com/office/powerpoint/2010/main" val="430635750"/>
+      </p:ext>
+    </p:extLst>
+  </p:cSld>
+  <p:clrMapOvr>
+    <a:masterClrMapping/>
+  </p:clrMapOvr>
+</p:sld>
+</file>
+
+<file path=ppt/slides/slide22.xml><?xml version="1.0" encoding="utf-8"?>
+<p:sld xmlns:a="http://schemas.openxmlformats.org/drawingml/2006/main" xmlns:r="http://schemas.openxmlformats.org/officeDocument/2006/relationships" xmlns:p="http://schemas.openxmlformats.org/presentationml/2006/main">
+  <p:cSld>
+    <p:spTree>
+      <p:nvGrpSpPr>
         <p:cNvPr id="1" name=""/>
         <p:cNvGrpSpPr/>
         <p:nvPr/>
@@ -18788,7 +21889,7 @@
             <a:fld id="{EA7C8D44-3667-46F6-9772-CC52308E2A7F}" type="slidenum">
               <a:rPr kumimoji="0" lang="en-US" smtClean="0"/>
               <a:pPr/>
-              <a:t>20</a:t>
+              <a:t>22</a:t>
             </a:fld>
             <a:endParaRPr kumimoji="0" lang="en-US" dirty="0"/>
           </a:p>
@@ -18901,7 +22002,13 @@
                                 <a:rPr lang="en-US" sz="2800">
                                   <a:latin typeface="Cambria Math" panose="02040503050406030204" pitchFamily="18" charset="0"/>
                                 </a:rPr>
-                                <m:t>−1</m:t>
+                                <m:t>−</m:t>
+                              </m:r>
+                              <m:r>
+                                <a:rPr lang="en-US" sz="2800">
+                                  <a:latin typeface="Cambria Math" panose="02040503050406030204" pitchFamily="18" charset="0"/>
+                                </a:rPr>
+                                <m:t>1</m:t>
                               </m:r>
                             </m:e>
                           </m:d>
@@ -18957,7 +22064,16 @@
                               </a:solidFill>
                               <a:latin typeface="Cambria Math" panose="02040503050406030204" pitchFamily="18" charset="0"/>
                             </a:rPr>
-                            <m:t>−126</m:t>
+                            <m:t>−</m:t>
+                          </m:r>
+                          <m:r>
+                            <a:rPr lang="en-US" sz="2800">
+                              <a:solidFill>
+                                <a:srgbClr val="FF0000"/>
+                              </a:solidFill>
+                              <a:latin typeface="Cambria Math" panose="02040503050406030204" pitchFamily="18" charset="0"/>
+                            </a:rPr>
+                            <m:t>126</m:t>
                           </m:r>
                         </m:sup>
                       </m:sSup>
@@ -19060,7 +22176,13 @@
                                 <a:rPr lang="en-US" sz="2800">
                                   <a:latin typeface="Cambria Math" panose="02040503050406030204" pitchFamily="18" charset="0"/>
                                 </a:rPr>
-                                <m:t>−1</m:t>
+                                <m:t>−</m:t>
+                              </m:r>
+                              <m:r>
+                                <a:rPr lang="en-US" sz="2800">
+                                  <a:latin typeface="Cambria Math" panose="02040503050406030204" pitchFamily="18" charset="0"/>
+                                </a:rPr>
+                                <m:t>1</m:t>
                               </m:r>
                             </m:e>
                           </m:d>
@@ -19152,7 +22274,16 @@
                               </a:solidFill>
                               <a:latin typeface="Cambria Math" panose="02040503050406030204" pitchFamily="18" charset="0"/>
                             </a:rPr>
-                            <m:t>−12</m:t>
+                            <m:t>−</m:t>
+                          </m:r>
+                          <m:r>
+                            <a:rPr lang="en-US" sz="2800">
+                              <a:solidFill>
+                                <a:srgbClr val="FF0000"/>
+                              </a:solidFill>
+                              <a:latin typeface="Cambria Math" panose="02040503050406030204" pitchFamily="18" charset="0"/>
+                            </a:rPr>
+                            <m:t>12</m:t>
                           </m:r>
                           <m:r>
                             <a:rPr lang="en-US" sz="2800" i="1">
@@ -19225,7 +22356,7 @@
 </p:sld>
 </file>
 
-<file path=ppt/slides/slide21.xml><?xml version="1.0" encoding="utf-8"?>
+<file path=ppt/slides/slide23.xml><?xml version="1.0" encoding="utf-8"?>
 <p:sld xmlns:a="http://schemas.openxmlformats.org/drawingml/2006/main" xmlns:r="http://schemas.openxmlformats.org/officeDocument/2006/relationships" xmlns:p="http://schemas.openxmlformats.org/presentationml/2006/main">
   <p:cSld>
     <p:spTree>
@@ -19282,7 +22413,7 @@
             <a:fld id="{EA7C8D44-3667-46F6-9772-CC52308E2A7F}" type="slidenum">
               <a:rPr kumimoji="0" lang="en-US" smtClean="0"/>
               <a:pPr/>
-              <a:t>21</a:t>
+              <a:t>23</a:t>
             </a:fld>
             <a:endParaRPr kumimoji="0" lang="en-US" dirty="0"/>
           </a:p>
@@ -19363,7 +22494,19 @@
                             <a:rPr lang="en-US" sz="2400" i="1">
                               <a:latin typeface="Cambria Math"/>
                             </a:rPr>
-                            <m:t>(−1)</m:t>
+                            <m:t>(−</m:t>
+                          </m:r>
+                          <m:r>
+                            <a:rPr lang="en-US" sz="2400" i="1">
+                              <a:latin typeface="Cambria Math"/>
+                            </a:rPr>
+                            <m:t>1</m:t>
+                          </m:r>
+                          <m:r>
+                            <a:rPr lang="en-US" sz="2400" i="1">
+                              <a:latin typeface="Cambria Math"/>
+                            </a:rPr>
+                            <m:t>)</m:t>
                           </m:r>
                         </m:e>
                         <m:sup>
@@ -19394,7 +22537,19 @@
                             <a:rPr lang="en-US" sz="2400" i="1">
                               <a:latin typeface="Cambria Math"/>
                             </a:rPr>
-                            <m:t>1+0</m:t>
+                            <m:t>1</m:t>
+                          </m:r>
+                          <m:r>
+                            <a:rPr lang="en-US" sz="2400" i="1">
+                              <a:latin typeface="Cambria Math"/>
+                            </a:rPr>
+                            <m:t>+</m:t>
+                          </m:r>
+                          <m:r>
+                            <a:rPr lang="en-US" sz="2400" i="1">
+                              <a:latin typeface="Cambria Math"/>
+                            </a:rPr>
+                            <m:t>0</m:t>
                           </m:r>
                         </m:e>
                       </m:d>
@@ -19425,7 +22580,19 @@
                             <a:rPr lang="en-US" sz="2400" i="1">
                               <a:latin typeface="Cambria Math"/>
                             </a:rPr>
-                            <m:t>1−127</m:t>
+                            <m:t>1</m:t>
+                          </m:r>
+                          <m:r>
+                            <a:rPr lang="en-US" sz="2400" i="1">
+                              <a:latin typeface="Cambria Math"/>
+                            </a:rPr>
+                            <m:t>−</m:t>
+                          </m:r>
+                          <m:r>
+                            <a:rPr lang="en-US" sz="2400" i="1">
+                              <a:latin typeface="Cambria Math"/>
+                            </a:rPr>
+                            <m:t>127</m:t>
                           </m:r>
                         </m:sup>
                       </m:sSup>
@@ -19456,7 +22623,13 @@
                             <a:rPr lang="en-US" sz="2400" i="1">
                               <a:latin typeface="Cambria Math"/>
                             </a:rPr>
-                            <m:t>−126</m:t>
+                            <m:t>−</m:t>
+                          </m:r>
+                          <m:r>
+                            <a:rPr lang="en-US" sz="2400" i="1">
+                              <a:latin typeface="Cambria Math"/>
+                            </a:rPr>
+                            <m:t>126</m:t>
                           </m:r>
                         </m:sup>
                       </m:sSup>
@@ -19464,7 +22637,31 @@
                         <a:rPr lang="en-US" sz="2400" i="1">
                           <a:latin typeface="Cambria Math"/>
                         </a:rPr>
-                        <m:t>≈1.18×</m:t>
+                        <m:t>≈</m:t>
+                      </m:r>
+                      <m:r>
+                        <a:rPr lang="en-US" sz="2400" i="1">
+                          <a:latin typeface="Cambria Math"/>
+                        </a:rPr>
+                        <m:t>1</m:t>
+                      </m:r>
+                      <m:r>
+                        <a:rPr lang="en-US" sz="2400" i="1">
+                          <a:latin typeface="Cambria Math"/>
+                        </a:rPr>
+                        <m:t>.</m:t>
+                      </m:r>
+                      <m:r>
+                        <a:rPr lang="en-US" sz="2400" i="1">
+                          <a:latin typeface="Cambria Math"/>
+                        </a:rPr>
+                        <m:t>18</m:t>
+                      </m:r>
+                      <m:r>
+                        <a:rPr lang="en-US" sz="2400" i="1">
+                          <a:latin typeface="Cambria Math"/>
+                        </a:rPr>
+                        <m:t>×</m:t>
                       </m:r>
                       <m:sSup>
                         <m:sSupPr>
@@ -19487,7 +22684,13 @@
                             <a:rPr lang="en-US" sz="2400" i="1">
                               <a:latin typeface="Cambria Math"/>
                             </a:rPr>
-                            <m:t>−38</m:t>
+                            <m:t>−</m:t>
+                          </m:r>
+                          <m:r>
+                            <a:rPr lang="en-US" sz="2400" i="1">
+                              <a:latin typeface="Cambria Math"/>
+                            </a:rPr>
+                            <m:t>38</m:t>
                           </m:r>
                         </m:sup>
                       </m:sSup>
@@ -19767,7 +22970,19 @@
                             <a:rPr lang="en-US" sz="2400" i="1">
                               <a:latin typeface="Cambria Math"/>
                             </a:rPr>
-                            <m:t>(−1)</m:t>
+                            <m:t>(−</m:t>
+                          </m:r>
+                          <m:r>
+                            <a:rPr lang="en-US" sz="2400" i="1">
+                              <a:latin typeface="Cambria Math"/>
+                            </a:rPr>
+                            <m:t>1</m:t>
+                          </m:r>
+                          <m:r>
+                            <a:rPr lang="en-US" sz="2400" i="1">
+                              <a:latin typeface="Cambria Math"/>
+                            </a:rPr>
+                            <m:t>)</m:t>
                           </m:r>
                         </m:e>
                         <m:sup>
@@ -19866,7 +23081,19 @@
                             <a:rPr lang="en-US" sz="2400" i="1">
                               <a:latin typeface="Cambria Math"/>
                             </a:rPr>
-                            <m:t>1−127</m:t>
+                            <m:t>1</m:t>
+                          </m:r>
+                          <m:r>
+                            <a:rPr lang="en-US" sz="2400" i="1">
+                              <a:latin typeface="Cambria Math"/>
+                            </a:rPr>
+                            <m:t>−</m:t>
+                          </m:r>
+                          <m:r>
+                            <a:rPr lang="en-US" sz="2400" i="1">
+                              <a:latin typeface="Cambria Math"/>
+                            </a:rPr>
+                            <m:t>127</m:t>
                           </m:r>
                         </m:sup>
                       </m:sSup>
@@ -19897,7 +23124,13 @@
                             <a:rPr lang="en-US" sz="2400" i="1">
                               <a:latin typeface="Cambria Math"/>
                             </a:rPr>
-                            <m:t>−149</m:t>
+                            <m:t>−</m:t>
+                          </m:r>
+                          <m:r>
+                            <a:rPr lang="en-US" sz="2400" i="1">
+                              <a:latin typeface="Cambria Math"/>
+                            </a:rPr>
+                            <m:t>149</m:t>
                           </m:r>
                         </m:sup>
                       </m:sSup>
@@ -19905,7 +23138,19 @@
                         <a:rPr lang="en-US" sz="2400" i="1">
                           <a:latin typeface="Cambria Math"/>
                         </a:rPr>
-                        <m:t>≈1.</m:t>
+                        <m:t>≈</m:t>
+                      </m:r>
+                      <m:r>
+                        <a:rPr lang="en-US" sz="2400" i="1">
+                          <a:latin typeface="Cambria Math"/>
+                        </a:rPr>
+                        <m:t>1</m:t>
+                      </m:r>
+                      <m:r>
+                        <a:rPr lang="en-US" sz="2400" i="1">
+                          <a:latin typeface="Cambria Math"/>
+                        </a:rPr>
+                        <m:t>.</m:t>
                       </m:r>
                       <m:r>
                         <a:rPr lang="en-US" sz="2400" b="0" i="1" smtClean="0">
@@ -20104,7 +23349,7 @@
 </p:sld>
 </file>
 
-<file path=ppt/slides/slide22.xml><?xml version="1.0" encoding="utf-8"?>
+<file path=ppt/slides/slide24.xml><?xml version="1.0" encoding="utf-8"?>
 <p:sld xmlns:a="http://schemas.openxmlformats.org/drawingml/2006/main" xmlns:r="http://schemas.openxmlformats.org/officeDocument/2006/relationships" xmlns:p="http://schemas.openxmlformats.org/presentationml/2006/main">
   <p:cSld>
     <p:spTree>
@@ -20161,7 +23406,7 @@
             <a:fld id="{EA7C8D44-3667-46F6-9772-CC52308E2A7F}" type="slidenum">
               <a:rPr kumimoji="0" lang="en-US" smtClean="0"/>
               <a:pPr/>
-              <a:t>22</a:t>
+              <a:t>24</a:t>
             </a:fld>
             <a:endParaRPr kumimoji="0" lang="en-US" dirty="0"/>
           </a:p>
@@ -20764,7 +24009,7 @@
 </p:sld>
 </file>
 
-<file path=ppt/slides/slide23.xml><?xml version="1.0" encoding="utf-8"?>
+<file path=ppt/slides/slide25.xml><?xml version="1.0" encoding="utf-8"?>
 <p:sld xmlns:a="http://schemas.openxmlformats.org/drawingml/2006/main" xmlns:r="http://schemas.openxmlformats.org/officeDocument/2006/relationships" xmlns:p="http://schemas.openxmlformats.org/presentationml/2006/main">
   <p:cSld>
     <p:spTree>
@@ -20821,7 +24066,7 @@
             <a:fld id="{EA7C8D44-3667-46F6-9772-CC52308E2A7F}" type="slidenum">
               <a:rPr kumimoji="0" lang="en-US" smtClean="0"/>
               <a:pPr/>
-              <a:t>23</a:t>
+              <a:t>25</a:t>
             </a:fld>
             <a:endParaRPr kumimoji="0" lang="en-US" dirty="0"/>
           </a:p>
@@ -20931,7 +24176,7 @@
 </p:sld>
 </file>
 
-<file path=ppt/slides/slide24.xml><?xml version="1.0" encoding="utf-8"?>
+<file path=ppt/slides/slide26.xml><?xml version="1.0" encoding="utf-8"?>
 <p:sld xmlns:a="http://schemas.openxmlformats.org/drawingml/2006/main" xmlns:r="http://schemas.openxmlformats.org/officeDocument/2006/relationships" xmlns:p="http://schemas.openxmlformats.org/presentationml/2006/main">
   <p:cSld>
     <p:spTree>
@@ -21000,7 +24245,7 @@
             <a:fld id="{EA7C8D44-3667-46F6-9772-CC52308E2A7F}" type="slidenum">
               <a:rPr kumimoji="0" lang="en-US" smtClean="0"/>
               <a:pPr/>
-              <a:t>24</a:t>
+              <a:t>26</a:t>
             </a:fld>
             <a:endParaRPr kumimoji="0" lang="en-US" dirty="0"/>
           </a:p>
@@ -21163,7 +24408,7 @@
 </p:sld>
 </file>
 
-<file path=ppt/slides/slide25.xml><?xml version="1.0" encoding="utf-8"?>
+<file path=ppt/slides/slide27.xml><?xml version="1.0" encoding="utf-8"?>
 <p:sld xmlns:a="http://schemas.openxmlformats.org/drawingml/2006/main" xmlns:r="http://schemas.openxmlformats.org/officeDocument/2006/relationships" xmlns:p="http://schemas.openxmlformats.org/presentationml/2006/main">
   <p:cSld>
     <p:spTree>
@@ -21232,7 +24477,7 @@
             <a:fld id="{EA7C8D44-3667-46F6-9772-CC52308E2A7F}" type="slidenum">
               <a:rPr kumimoji="0" lang="en-US" smtClean="0"/>
               <a:pPr/>
-              <a:t>25</a:t>
+              <a:t>27</a:t>
             </a:fld>
             <a:endParaRPr kumimoji="0" lang="en-US" dirty="0"/>
           </a:p>
@@ -21286,19 +24531,31 @@
               <a:rPr lang="en-US" dirty="0">
                 <a:hlinkClick r:id="rId3"/>
               </a:rPr>
-              <a:t>https://www.youtube.com/watch?v</a:t>
+              <a:t>https://www.youtube.com/watch?v=4DfXdJdaNYs</a:t>
             </a:r>
             <a:r>
-              <a:rPr lang="en-US">
-                <a:hlinkClick r:id="rId3"/>
+              <a:rPr lang="en-US" dirty="0"/>
+              <a:t> </a:t>
+            </a:r>
+          </a:p>
+          <a:p>
+            <a:r>
+              <a:rPr lang="en-US" dirty="0"/>
+              <a:t>Why Is This Happening?! Floating Point Approximation</a:t>
+            </a:r>
+          </a:p>
+          <a:p>
+            <a:pPr lvl="1"/>
+            <a:r>
+              <a:rPr lang="en-US" dirty="0">
+                <a:hlinkClick r:id="rId4"/>
               </a:rPr>
-              <a:t>=4DfXdJdaNYs</a:t>
+              <a:t>https://www.youtube.com/watch?v=2gIxbTn7GSc</a:t>
             </a:r>
             <a:r>
-              <a:rPr lang="en-US"/>
+              <a:rPr lang="en-US" dirty="0"/>
               <a:t> </a:t>
             </a:r>
-            <a:endParaRPr lang="en-US" dirty="0"/>
           </a:p>
         </p:txBody>
       </p:sp>
@@ -21674,19 +24931,7 @@
                         <a:rPr lang="en-US" sz="2400">
                           <a:latin typeface="Cambria Math"/>
                         </a:rPr>
-                        <m:t>01</m:t>
-                      </m:r>
-                      <m:r>
-                        <a:rPr lang="en-US" sz="2400">
-                          <a:latin typeface="Cambria Math"/>
-                        </a:rPr>
-                        <m:t>.</m:t>
-                      </m:r>
-                      <m:r>
-                        <a:rPr lang="en-US" sz="2400">
-                          <a:latin typeface="Cambria Math"/>
-                        </a:rPr>
-                        <m:t>10</m:t>
+                        <m:t>01.10</m:t>
                       </m:r>
                       <m:sSub>
                         <m:sSubPr>
@@ -21709,13 +24954,7 @@
                             <a:rPr lang="en-US" sz="2400">
                               <a:latin typeface="Cambria Math"/>
                             </a:rPr>
-                            <m:t>2</m:t>
-                          </m:r>
-                          <m:r>
-                            <a:rPr lang="en-US" sz="2400">
-                              <a:latin typeface="Cambria Math"/>
-                            </a:rPr>
-                            <m:t> </m:t>
+                            <m:t>2 </m:t>
                           </m:r>
                         </m:sub>
                       </m:sSub>
@@ -21808,13 +25047,7 @@
                             <a:rPr lang="en-US" sz="2400" i="1">
                               <a:latin typeface="Cambria Math"/>
                             </a:rPr>
-                            <m:t>−</m:t>
-                          </m:r>
-                          <m:r>
-                            <a:rPr lang="en-US" sz="2400" i="1">
-                              <a:latin typeface="Cambria Math"/>
-                            </a:rPr>
-                            <m:t>3</m:t>
+                            <m:t>−3</m:t>
                           </m:r>
                         </m:sup>
                       </m:sSup>
@@ -21899,25 +25132,7 @@
                         <a:rPr lang="en-US" sz="2400">
                           <a:latin typeface="Cambria Math"/>
                         </a:rPr>
-                        <m:t>=</m:t>
-                      </m:r>
-                      <m:r>
-                        <a:rPr lang="en-US" sz="2400">
-                          <a:latin typeface="Cambria Math"/>
-                        </a:rPr>
-                        <m:t>21</m:t>
-                      </m:r>
-                      <m:r>
-                        <a:rPr lang="en-US" sz="2400">
-                          <a:latin typeface="Cambria Math"/>
-                        </a:rPr>
-                        <m:t>+</m:t>
-                      </m:r>
-                      <m:r>
-                        <a:rPr lang="en-US" sz="2400">
-                          <a:latin typeface="Cambria Math"/>
-                        </a:rPr>
-                        <m:t>5</m:t>
+                        <m:t>=21+5</m:t>
                       </m:r>
                       <m:r>
                         <a:rPr lang="en-US" sz="2400" i="1">
@@ -21946,13 +25161,7 @@
                             <a:rPr lang="en-US" sz="2400" i="1">
                               <a:latin typeface="Cambria Math"/>
                             </a:rPr>
-                            <m:t>−</m:t>
-                          </m:r>
-                          <m:r>
-                            <a:rPr lang="en-US" sz="2400" i="1">
-                              <a:latin typeface="Cambria Math"/>
-                            </a:rPr>
-                            <m:t>3</m:t>
+                            <m:t>−3</m:t>
                           </m:r>
                         </m:sup>
                       </m:sSup>
@@ -22037,25 +25246,7 @@
                         <a:rPr lang="en-US" sz="2400">
                           <a:latin typeface="Cambria Math"/>
                         </a:rPr>
-                        <m:t>=</m:t>
-                      </m:r>
-                      <m:r>
-                        <a:rPr lang="en-US" sz="2400">
-                          <a:latin typeface="Cambria Math"/>
-                        </a:rPr>
-                        <m:t>21</m:t>
-                      </m:r>
-                      <m:r>
-                        <a:rPr lang="en-US" sz="2400">
-                          <a:latin typeface="Cambria Math"/>
-                        </a:rPr>
-                        <m:t>.</m:t>
-                      </m:r>
-                      <m:r>
-                        <a:rPr lang="en-US" sz="2400">
-                          <a:latin typeface="Cambria Math"/>
-                        </a:rPr>
-                        <m:t>625</m:t>
+                        <m:t>=21.625</m:t>
                       </m:r>
                     </m:oMath>
                   </m:oMathPara>
@@ -23436,7 +26627,13 @@
                             <a:rPr lang="en-US" sz="2000">
                               <a:latin typeface="Cambria Math" panose="02040503050406030204" pitchFamily="18" charset="0"/>
                             </a:rPr>
-                            <m:t>2 </m:t>
+                            <m:t>2</m:t>
+                          </m:r>
+                          <m:r>
+                            <a:rPr lang="en-US" sz="2000">
+                              <a:latin typeface="Cambria Math" panose="02040503050406030204" pitchFamily="18" charset="0"/>
+                            </a:rPr>
+                            <m:t> </m:t>
                           </m:r>
                         </m:sub>
                       </m:sSub>
@@ -23732,7 +26929,13 @@
                             <a:rPr lang="en-US" sz="2000">
                               <a:latin typeface="Cambria Math" panose="02040503050406030204" pitchFamily="18" charset="0"/>
                             </a:rPr>
-                            <m:t>−1</m:t>
+                            <m:t>−</m:t>
+                          </m:r>
+                          <m:r>
+                            <a:rPr lang="en-US" sz="2000">
+                              <a:latin typeface="Cambria Math" panose="02040503050406030204" pitchFamily="18" charset="0"/>
+                            </a:rPr>
+                            <m:t>1</m:t>
                           </m:r>
                         </m:sup>
                       </m:sSup>
@@ -23778,7 +26981,13 @@
                             <a:rPr lang="en-US" sz="2000">
                               <a:latin typeface="Cambria Math" panose="02040503050406030204" pitchFamily="18" charset="0"/>
                             </a:rPr>
-                            <m:t>−2</m:t>
+                            <m:t>−</m:t>
+                          </m:r>
+                          <m:r>
+                            <a:rPr lang="en-US" sz="2000">
+                              <a:latin typeface="Cambria Math" panose="02040503050406030204" pitchFamily="18" charset="0"/>
+                            </a:rPr>
+                            <m:t>2</m:t>
                           </m:r>
                         </m:sup>
                       </m:sSup>
@@ -23824,7 +27033,13 @@
                             <a:rPr lang="en-US" sz="2000">
                               <a:latin typeface="Cambria Math" panose="02040503050406030204" pitchFamily="18" charset="0"/>
                             </a:rPr>
-                            <m:t>−3</m:t>
+                            <m:t>−</m:t>
+                          </m:r>
+                          <m:r>
+                            <a:rPr lang="en-US" sz="2000">
+                              <a:latin typeface="Cambria Math" panose="02040503050406030204" pitchFamily="18" charset="0"/>
+                            </a:rPr>
+                            <m:t>3</m:t>
                           </m:r>
                         </m:sup>
                       </m:sSup>
@@ -23870,7 +27085,13 @@
                         <a:rPr lang="en-US" sz="2000">
                           <a:latin typeface="Cambria Math" panose="02040503050406030204" pitchFamily="18" charset="0"/>
                         </a:rPr>
-                        <m:t>.625</m:t>
+                        <m:t>.</m:t>
+                      </m:r>
+                      <m:r>
+                        <a:rPr lang="en-US" sz="2000">
+                          <a:latin typeface="Cambria Math" panose="02040503050406030204" pitchFamily="18" charset="0"/>
+                        </a:rPr>
+                        <m:t>625</m:t>
                       </m:r>
                     </m:oMath>
                   </m:oMathPara>
@@ -24191,7 +27412,13 @@
                             <a:rPr lang="en-US" sz="2000">
                               <a:latin typeface="Cambria Math" panose="02040503050406030204" pitchFamily="18" charset="0"/>
                             </a:rPr>
-                            <m:t>2 </m:t>
+                            <m:t>2</m:t>
+                          </m:r>
+                          <m:r>
+                            <a:rPr lang="en-US" sz="2000">
+                              <a:latin typeface="Cambria Math" panose="02040503050406030204" pitchFamily="18" charset="0"/>
+                            </a:rPr>
+                            <m:t> </m:t>
                           </m:r>
                         </m:sub>
                       </m:sSub>
@@ -24299,7 +27526,25 @@
                         <a:rPr lang="en-US" sz="2000" i="1">
                           <a:latin typeface="Cambria Math" panose="02040503050406030204" pitchFamily="18" charset="0"/>
                         </a:rPr>
-                        <m:t>=21.625</m:t>
+                        <m:t>=</m:t>
+                      </m:r>
+                      <m:r>
+                        <a:rPr lang="en-US" sz="2000" i="1">
+                          <a:latin typeface="Cambria Math" panose="02040503050406030204" pitchFamily="18" charset="0"/>
+                        </a:rPr>
+                        <m:t>21</m:t>
+                      </m:r>
+                      <m:r>
+                        <a:rPr lang="en-US" sz="2000" i="1">
+                          <a:latin typeface="Cambria Math" panose="02040503050406030204" pitchFamily="18" charset="0"/>
+                        </a:rPr>
+                        <m:t>.</m:t>
+                      </m:r>
+                      <m:r>
+                        <a:rPr lang="en-US" sz="2000" i="1">
+                          <a:latin typeface="Cambria Math" panose="02040503050406030204" pitchFamily="18" charset="0"/>
+                        </a:rPr>
+                        <m:t>625</m:t>
                       </m:r>
                     </m:oMath>
                   </m:oMathPara>
@@ -25990,13 +29235,7 @@
                             <a:rPr lang="en-US" sz="2000">
                               <a:latin typeface="Cambria Math" panose="02040503050406030204" pitchFamily="18" charset="0"/>
                             </a:rPr>
-                            <m:t>2</m:t>
-                          </m:r>
-                          <m:r>
-                            <a:rPr lang="en-US" sz="2000">
-                              <a:latin typeface="Cambria Math" panose="02040503050406030204" pitchFamily="18" charset="0"/>
-                            </a:rPr>
-                            <m:t> </m:t>
+                            <m:t>2 </m:t>
                           </m:r>
                         </m:sub>
                       </m:sSub>
@@ -26088,13 +29327,7 @@
                             <a:rPr lang="en-US" sz="2000" i="1">
                               <a:latin typeface="Cambria Math" panose="02040503050406030204" pitchFamily="18" charset="0"/>
                             </a:rPr>
-                            <m:t>−</m:t>
-                          </m:r>
-                          <m:r>
-                            <a:rPr lang="en-US" sz="2000" i="1">
-                              <a:latin typeface="Cambria Math" panose="02040503050406030204" pitchFamily="18" charset="0"/>
-                            </a:rPr>
-                            <m:t>83</m:t>
+                            <m:t>−83</m:t>
                           </m:r>
                         </m:num>
                         <m:den>
@@ -26110,25 +29343,7 @@
                         <a:rPr lang="en-US" sz="2000" i="1">
                           <a:latin typeface="Cambria Math" panose="02040503050406030204" pitchFamily="18" charset="0"/>
                         </a:rPr>
-                        <m:t>=−</m:t>
-                      </m:r>
-                      <m:r>
-                        <a:rPr lang="en-US" sz="2000" i="1">
-                          <a:latin typeface="Cambria Math" panose="02040503050406030204" pitchFamily="18" charset="0"/>
-                        </a:rPr>
-                        <m:t>10</m:t>
-                      </m:r>
-                      <m:r>
-                        <a:rPr lang="en-US" sz="2000" i="1">
-                          <a:latin typeface="Cambria Math" panose="02040503050406030204" pitchFamily="18" charset="0"/>
-                        </a:rPr>
-                        <m:t>.</m:t>
-                      </m:r>
-                      <m:r>
-                        <a:rPr lang="en-US" sz="2000" i="1">
-                          <a:latin typeface="Cambria Math" panose="02040503050406030204" pitchFamily="18" charset="0"/>
-                        </a:rPr>
-                        <m:t>375</m:t>
+                        <m:t>=−10.375</m:t>
                       </m:r>
                     </m:oMath>
                   </m:oMathPara>
@@ -26613,13 +29828,7 @@
                             <a:rPr lang="en-US" sz="2000">
                               <a:latin typeface="Cambria Math" panose="02040503050406030204" pitchFamily="18" charset="0"/>
                             </a:rPr>
-                            <m:t>2</m:t>
-                          </m:r>
-                          <m:r>
-                            <a:rPr lang="en-US" sz="2000">
-                              <a:latin typeface="Cambria Math" panose="02040503050406030204" pitchFamily="18" charset="0"/>
-                            </a:rPr>
-                            <m:t> </m:t>
+                            <m:t>2 </m:t>
                           </m:r>
                         </m:sub>
                       </m:sSub>
@@ -26944,13 +30153,7 @@
                             <a:rPr lang="en-US" sz="2000">
                               <a:latin typeface="Cambria Math" panose="02040503050406030204" pitchFamily="18" charset="0"/>
                             </a:rPr>
-                            <m:t>−</m:t>
-                          </m:r>
-                          <m:r>
-                            <a:rPr lang="en-US" sz="2000">
-                              <a:latin typeface="Cambria Math" panose="02040503050406030204" pitchFamily="18" charset="0"/>
-                            </a:rPr>
-                            <m:t>1</m:t>
+                            <m:t>−1</m:t>
                           </m:r>
                         </m:sup>
                       </m:sSup>
@@ -26996,13 +30199,7 @@
                             <a:rPr lang="en-US" sz="2000">
                               <a:latin typeface="Cambria Math" panose="02040503050406030204" pitchFamily="18" charset="0"/>
                             </a:rPr>
-                            <m:t>−</m:t>
-                          </m:r>
-                          <m:r>
-                            <a:rPr lang="en-US" sz="2000">
-                              <a:latin typeface="Cambria Math" panose="02040503050406030204" pitchFamily="18" charset="0"/>
-                            </a:rPr>
-                            <m:t>2</m:t>
+                            <m:t>−2</m:t>
                           </m:r>
                         </m:sup>
                       </m:sSup>
@@ -27048,13 +30245,7 @@
                             <a:rPr lang="en-US" sz="2000">
                               <a:latin typeface="Cambria Math" panose="02040503050406030204" pitchFamily="18" charset="0"/>
                             </a:rPr>
-                            <m:t>−</m:t>
-                          </m:r>
-                          <m:r>
-                            <a:rPr lang="en-US" sz="2000">
-                              <a:latin typeface="Cambria Math" panose="02040503050406030204" pitchFamily="18" charset="0"/>
-                            </a:rPr>
-                            <m:t>3</m:t>
+                            <m:t>−3</m:t>
                           </m:r>
                         </m:sup>
                       </m:sSup>
@@ -27094,25 +30285,7 @@
                         <a:rPr lang="en-US" altLang="zh-CN" sz="2000">
                           <a:latin typeface="Cambria Math" panose="02040503050406030204" pitchFamily="18" charset="0"/>
                         </a:rPr>
-                        <m:t>−</m:t>
-                      </m:r>
-                      <m:r>
-                        <a:rPr lang="en-US" altLang="zh-CN" sz="2000">
-                          <a:latin typeface="Cambria Math" panose="02040503050406030204" pitchFamily="18" charset="0"/>
-                        </a:rPr>
-                        <m:t>10</m:t>
-                      </m:r>
-                      <m:r>
-                        <a:rPr lang="en-US" altLang="zh-CN" sz="2000">
-                          <a:latin typeface="Cambria Math" panose="02040503050406030204" pitchFamily="18" charset="0"/>
-                        </a:rPr>
-                        <m:t>.</m:t>
-                      </m:r>
-                      <m:r>
-                        <a:rPr lang="en-US" altLang="zh-CN" sz="2000">
-                          <a:latin typeface="Cambria Math" panose="02040503050406030204" pitchFamily="18" charset="0"/>
-                        </a:rPr>
-                        <m:t>375</m:t>
+                        <m:t>−10.375</m:t>
                       </m:r>
                     </m:oMath>
                   </m:oMathPara>
@@ -27903,19 +31076,7 @@
                         <a:rPr lang="en-US" sz="2400">
                           <a:latin typeface="Cambria Math"/>
                         </a:rPr>
-                        <m:t>01</m:t>
-                      </m:r>
-                      <m:r>
-                        <a:rPr lang="en-US" sz="2400">
-                          <a:latin typeface="Cambria Math"/>
-                        </a:rPr>
-                        <m:t>.</m:t>
-                      </m:r>
-                      <m:r>
-                        <a:rPr lang="en-US" sz="2400">
-                          <a:latin typeface="Cambria Math"/>
-                        </a:rPr>
-                        <m:t>10</m:t>
+                        <m:t>01.10</m:t>
                       </m:r>
                       <m:sSub>
                         <m:sSubPr>
@@ -27938,13 +31099,7 @@
                             <a:rPr lang="en-US" sz="2400">
                               <a:latin typeface="Cambria Math"/>
                             </a:rPr>
-                            <m:t>2</m:t>
-                          </m:r>
-                          <m:r>
-                            <a:rPr lang="en-US" sz="2400">
-                              <a:latin typeface="Cambria Math"/>
-                            </a:rPr>
-                            <m:t> </m:t>
+                            <m:t>2 </m:t>
                           </m:r>
                         </m:sub>
                       </m:sSub>
@@ -28037,13 +31192,7 @@
                             <a:rPr lang="en-US" sz="2400" i="1">
                               <a:latin typeface="Cambria Math"/>
                             </a:rPr>
-                            <m:t>−</m:t>
-                          </m:r>
-                          <m:r>
-                            <a:rPr lang="en-US" sz="2400" i="1">
-                              <a:latin typeface="Cambria Math"/>
-                            </a:rPr>
-                            <m:t>3</m:t>
+                            <m:t>−3</m:t>
                           </m:r>
                         </m:sup>
                       </m:sSup>
@@ -28140,25 +31289,7 @@
                         <a:rPr lang="en-US" sz="2400">
                           <a:latin typeface="Cambria Math"/>
                         </a:rPr>
-                        <m:t>=</m:t>
-                      </m:r>
-                      <m:r>
-                        <a:rPr lang="en-US" sz="2400">
-                          <a:latin typeface="Cambria Math"/>
-                        </a:rPr>
-                        <m:t>21</m:t>
-                      </m:r>
-                      <m:r>
-                        <a:rPr lang="en-US" sz="2400">
-                          <a:latin typeface="Cambria Math"/>
-                        </a:rPr>
-                        <m:t>+</m:t>
-                      </m:r>
-                      <m:r>
-                        <a:rPr lang="en-US" sz="2400">
-                          <a:latin typeface="Cambria Math"/>
-                        </a:rPr>
-                        <m:t>5</m:t>
+                        <m:t>=21+5</m:t>
                       </m:r>
                       <m:r>
                         <a:rPr lang="en-US" sz="2400" i="1">
@@ -28187,13 +31318,7 @@
                             <a:rPr lang="en-US" sz="2400" i="1">
                               <a:latin typeface="Cambria Math"/>
                             </a:rPr>
-                            <m:t>−</m:t>
-                          </m:r>
-                          <m:r>
-                            <a:rPr lang="en-US" sz="2400" i="1">
-                              <a:latin typeface="Cambria Math"/>
-                            </a:rPr>
-                            <m:t>3</m:t>
+                            <m:t>−3</m:t>
                           </m:r>
                         </m:sup>
                       </m:sSup>
@@ -28290,25 +31415,7 @@
                         <a:rPr lang="en-US" sz="2400">
                           <a:latin typeface="Cambria Math"/>
                         </a:rPr>
-                        <m:t>=</m:t>
-                      </m:r>
-                      <m:r>
-                        <a:rPr lang="en-US" sz="2400">
-                          <a:latin typeface="Cambria Math"/>
-                        </a:rPr>
-                        <m:t>21</m:t>
-                      </m:r>
-                      <m:r>
-                        <a:rPr lang="en-US" sz="2400">
-                          <a:latin typeface="Cambria Math"/>
-                        </a:rPr>
-                        <m:t>.</m:t>
-                      </m:r>
-                      <m:r>
-                        <a:rPr lang="en-US" sz="2400">
-                          <a:latin typeface="Cambria Math"/>
-                        </a:rPr>
-                        <m:t>625</m:t>
+                        <m:t>=21.625</m:t>
                       </m:r>
                     </m:oMath>
                   </m:oMathPara>
@@ -28409,19 +31516,7 @@
                         <a:rPr lang="en-US" sz="2400">
                           <a:latin typeface="Cambria Math"/>
                         </a:rPr>
-                        <m:t>01</m:t>
-                      </m:r>
-                      <m:r>
-                        <a:rPr lang="en-US" sz="2400">
-                          <a:latin typeface="Cambria Math"/>
-                        </a:rPr>
-                        <m:t>.</m:t>
-                      </m:r>
-                      <m:r>
-                        <a:rPr lang="en-US" sz="2400">
-                          <a:latin typeface="Cambria Math"/>
-                        </a:rPr>
-                        <m:t>10</m:t>
+                        <m:t>01.10</m:t>
                       </m:r>
                       <m:sSub>
                         <m:sSubPr>
@@ -28444,13 +31539,7 @@
                             <a:rPr lang="en-US" sz="2400">
                               <a:latin typeface="Cambria Math"/>
                             </a:rPr>
-                            <m:t>2</m:t>
-                          </m:r>
-                          <m:r>
-                            <a:rPr lang="en-US" sz="2400">
-                              <a:latin typeface="Cambria Math"/>
-                            </a:rPr>
-                            <m:t> </m:t>
+                            <m:t>2 </m:t>
                           </m:r>
                         </m:sub>
                       </m:sSub>
@@ -28543,13 +31632,7 @@
                             <a:rPr lang="en-US" sz="2400" i="1">
                               <a:latin typeface="Cambria Math"/>
                             </a:rPr>
-                            <m:t>−</m:t>
-                          </m:r>
-                          <m:r>
-                            <a:rPr lang="en-US" sz="2400" i="1">
-                              <a:latin typeface="Cambria Math"/>
-                            </a:rPr>
-                            <m:t>3</m:t>
+                            <m:t>−3</m:t>
                           </m:r>
                         </m:sup>
                       </m:sSup>
@@ -28652,25 +31735,13 @@
                         <a:rPr lang="en-US" sz="2400" b="0" i="0" smtClean="0">
                           <a:latin typeface="Cambria Math" panose="02040503050406030204" pitchFamily="18" charset="0"/>
                         </a:rPr>
-                        <m:t>−</m:t>
-                      </m:r>
-                      <m:r>
-                        <a:rPr lang="en-US" sz="2400" b="0" i="0" smtClean="0">
-                          <a:latin typeface="Cambria Math" panose="02040503050406030204" pitchFamily="18" charset="0"/>
-                        </a:rPr>
-                        <m:t>11</m:t>
+                        <m:t>−11</m:t>
                       </m:r>
                       <m:r>
                         <a:rPr lang="en-US" sz="2400">
                           <a:latin typeface="Cambria Math"/>
                         </a:rPr>
-                        <m:t>+</m:t>
-                      </m:r>
-                      <m:r>
-                        <a:rPr lang="en-US" sz="2400">
-                          <a:latin typeface="Cambria Math"/>
-                        </a:rPr>
-                        <m:t>5</m:t>
+                        <m:t>+5</m:t>
                       </m:r>
                       <m:r>
                         <a:rPr lang="en-US" sz="2400" i="1">
@@ -28699,13 +31770,7 @@
                             <a:rPr lang="en-US" sz="2400" i="1">
                               <a:latin typeface="Cambria Math"/>
                             </a:rPr>
-                            <m:t>−</m:t>
-                          </m:r>
-                          <m:r>
-                            <a:rPr lang="en-US" sz="2400" i="1">
-                              <a:latin typeface="Cambria Math"/>
-                            </a:rPr>
-                            <m:t>3</m:t>
+                            <m:t>−3</m:t>
                           </m:r>
                         </m:sup>
                       </m:sSup>
@@ -28808,25 +31873,7 @@
                         <a:rPr lang="en-US" sz="2400" b="0" i="0" smtClean="0">
                           <a:latin typeface="Cambria Math" panose="02040503050406030204" pitchFamily="18" charset="0"/>
                         </a:rPr>
-                        <m:t>−</m:t>
-                      </m:r>
-                      <m:r>
-                        <a:rPr lang="en-US" sz="2400" b="0" i="0" smtClean="0">
-                          <a:latin typeface="Cambria Math" panose="02040503050406030204" pitchFamily="18" charset="0"/>
-                        </a:rPr>
-                        <m:t>10</m:t>
-                      </m:r>
-                      <m:r>
-                        <a:rPr lang="en-US" sz="2400" b="0" i="0" smtClean="0">
-                          <a:latin typeface="Cambria Math" panose="02040503050406030204" pitchFamily="18" charset="0"/>
-                        </a:rPr>
-                        <m:t>.</m:t>
-                      </m:r>
-                      <m:r>
-                        <a:rPr lang="en-US" sz="2400" b="0" i="0" smtClean="0">
-                          <a:latin typeface="Cambria Math" panose="02040503050406030204" pitchFamily="18" charset="0"/>
-                        </a:rPr>
-                        <m:t>375</m:t>
+                        <m:t>−10.375</m:t>
                       </m:r>
                     </m:oMath>
                   </m:oMathPara>
@@ -29582,25 +32629,7 @@
                         </a:solidFill>
                         <a:latin typeface="Cambria Math" panose="02040503050406030204" pitchFamily="18" charset="0"/>
                       </a:rPr>
-                      <m:t>12867</m:t>
-                    </m:r>
-                    <m:r>
-                      <a:rPr lang="en-US" sz="2200" i="1">
-                        <a:solidFill>
-                          <a:srgbClr val="0000FF"/>
-                        </a:solidFill>
-                        <a:latin typeface="Cambria Math" panose="02040503050406030204" pitchFamily="18" charset="0"/>
-                      </a:rPr>
-                      <m:t>.</m:t>
-                    </m:r>
-                    <m:r>
-                      <a:rPr lang="en-US" sz="2200" i="1">
-                        <a:solidFill>
-                          <a:srgbClr val="0000FF"/>
-                        </a:solidFill>
-                        <a:latin typeface="Cambria Math" panose="02040503050406030204" pitchFamily="18" charset="0"/>
-                      </a:rPr>
-                      <m:t>964928</m:t>
+                      <m:t>12867.964928</m:t>
                     </m:r>
                   </m:oMath>
                 </a14:m>
@@ -29636,19 +32665,7 @@
                           <a:rPr lang="en-US" sz="2200" i="1">
                             <a:latin typeface="Cambria Math" panose="02040503050406030204" pitchFamily="18" charset="0"/>
                           </a:rPr>
-                          <m:t>12867</m:t>
-                        </m:r>
-                        <m:r>
-                          <a:rPr lang="en-US" sz="2200" i="1">
-                            <a:latin typeface="Cambria Math" panose="02040503050406030204" pitchFamily="18" charset="0"/>
-                          </a:rPr>
-                          <m:t>.</m:t>
-                        </m:r>
-                        <m:r>
-                          <a:rPr lang="en-US" sz="2200" i="1">
-                            <a:latin typeface="Cambria Math" panose="02040503050406030204" pitchFamily="18" charset="0"/>
-                          </a:rPr>
-                          <m:t>964928</m:t>
+                          <m:t>12867.964928</m:t>
                         </m:r>
                         <m:r>
                           <a:rPr lang="en-US" sz="2200">
@@ -29827,31 +32844,7 @@
                       <a:rPr lang="en-US" sz="2200" i="1">
                         <a:latin typeface="Cambria Math" panose="02040503050406030204" pitchFamily="18" charset="0"/>
                       </a:rPr>
-                      <m:t>=</m:t>
-                    </m:r>
-                    <m:r>
-                      <a:rPr lang="en-US" sz="2200" i="1">
-                        <a:latin typeface="Cambria Math" panose="02040503050406030204" pitchFamily="18" charset="0"/>
-                      </a:rPr>
-                      <m:t>8</m:t>
-                    </m:r>
-                    <m:r>
-                      <a:rPr lang="en-US" sz="2200" i="1">
-                        <a:latin typeface="Cambria Math" panose="02040503050406030204" pitchFamily="18" charset="0"/>
-                      </a:rPr>
-                      <m:t>.</m:t>
-                    </m:r>
-                    <m:r>
-                      <a:rPr lang="en-US" sz="2200" i="1">
-                        <a:latin typeface="Cambria Math" panose="02040503050406030204" pitchFamily="18" charset="0"/>
-                      </a:rPr>
-                      <m:t>5625</m:t>
-                    </m:r>
-                    <m:r>
-                      <a:rPr lang="en-US" sz="2200" i="1">
-                        <a:latin typeface="Cambria Math" panose="02040503050406030204" pitchFamily="18" charset="0"/>
-                      </a:rPr>
-                      <m:t>×</m:t>
+                      <m:t>=8.5625×</m:t>
                     </m:r>
                     <m:sSup>
                       <m:sSupPr>
@@ -29874,13 +32867,7 @@
                           <a:rPr lang="en-US" sz="2200" i="1">
                             <a:latin typeface="Cambria Math" panose="02040503050406030204" pitchFamily="18" charset="0"/>
                           </a:rPr>
-                          <m:t>−</m:t>
-                        </m:r>
-                        <m:r>
-                          <a:rPr lang="en-US" sz="2200" i="1">
-                            <a:latin typeface="Cambria Math" panose="02040503050406030204" pitchFamily="18" charset="0"/>
-                          </a:rPr>
-                          <m:t>6</m:t>
+                          <m:t>−6</m:t>
                         </m:r>
                       </m:sup>
                     </m:sSup>
@@ -29971,31 +32958,7 @@
                       <a:rPr lang="en-US" sz="2400">
                         <a:latin typeface="Cambria Math" panose="02040503050406030204" pitchFamily="18" charset="0"/>
                       </a:rPr>
-                      <m:t> = </m:t>
-                    </m:r>
-                    <m:r>
-                      <a:rPr lang="en-US" sz="2400">
-                        <a:latin typeface="Cambria Math" panose="02040503050406030204" pitchFamily="18" charset="0"/>
-                      </a:rPr>
-                      <m:t>3</m:t>
-                    </m:r>
-                    <m:r>
-                      <a:rPr lang="en-US" sz="2400">
-                        <a:latin typeface="Cambria Math" panose="02040503050406030204" pitchFamily="18" charset="0"/>
-                      </a:rPr>
-                      <m:t>. </m:t>
-                    </m:r>
-                    <m:r>
-                      <a:rPr lang="en-US" sz="2400">
-                        <a:latin typeface="Cambria Math" panose="02040503050406030204" pitchFamily="18" charset="0"/>
-                      </a:rPr>
-                      <m:t>141593</m:t>
-                    </m:r>
-                    <m:r>
-                      <a:rPr lang="en-US" sz="2400">
-                        <a:latin typeface="Cambria Math" panose="02040503050406030204" pitchFamily="18" charset="0"/>
-                      </a:rPr>
-                      <m:t> </m:t>
+                      <m:t> = 3. 141593 </m:t>
                     </m:r>
                   </m:oMath>
                 </a14:m>
@@ -30816,7 +33779,34 @@
                         </a:solidFill>
                         <a:latin typeface="Cambria Math" panose="02040503050406030204" pitchFamily="18" charset="0"/>
                       </a:rPr>
-                      <m:t>−12867.964928</m:t>
+                      <m:t>−</m:t>
+                    </m:r>
+                    <m:r>
+                      <a:rPr lang="en-US" sz="2000" i="1">
+                        <a:solidFill>
+                          <a:srgbClr val="0000FF"/>
+                        </a:solidFill>
+                        <a:latin typeface="Cambria Math" panose="02040503050406030204" pitchFamily="18" charset="0"/>
+                      </a:rPr>
+                      <m:t>12867</m:t>
+                    </m:r>
+                    <m:r>
+                      <a:rPr lang="en-US" sz="2000" i="1">
+                        <a:solidFill>
+                          <a:srgbClr val="0000FF"/>
+                        </a:solidFill>
+                        <a:latin typeface="Cambria Math" panose="02040503050406030204" pitchFamily="18" charset="0"/>
+                      </a:rPr>
+                      <m:t>.</m:t>
+                    </m:r>
+                    <m:r>
+                      <a:rPr lang="en-US" sz="2000" i="1">
+                        <a:solidFill>
+                          <a:srgbClr val="0000FF"/>
+                        </a:solidFill>
+                        <a:latin typeface="Cambria Math" panose="02040503050406030204" pitchFamily="18" charset="0"/>
+                      </a:rPr>
+                      <m:t>964928</m:t>
                     </m:r>
                   </m:oMath>
                 </a14:m>
@@ -30857,7 +33847,25 @@
                           <a:rPr lang="en-US" sz="2000" i="1">
                             <a:latin typeface="Cambria Math" panose="02040503050406030204" pitchFamily="18" charset="0"/>
                           </a:rPr>
-                          <m:t>−12867.964928</m:t>
+                          <m:t>−</m:t>
+                        </m:r>
+                        <m:r>
+                          <a:rPr lang="en-US" sz="2000" i="1">
+                            <a:latin typeface="Cambria Math" panose="02040503050406030204" pitchFamily="18" charset="0"/>
+                          </a:rPr>
+                          <m:t>12867</m:t>
+                        </m:r>
+                        <m:r>
+                          <a:rPr lang="en-US" sz="2000" i="1">
+                            <a:latin typeface="Cambria Math" panose="02040503050406030204" pitchFamily="18" charset="0"/>
+                          </a:rPr>
+                          <m:t>.</m:t>
+                        </m:r>
+                        <m:r>
+                          <a:rPr lang="en-US" sz="2000" i="1">
+                            <a:latin typeface="Cambria Math" panose="02040503050406030204" pitchFamily="18" charset="0"/>
+                          </a:rPr>
+                          <m:t>964928</m:t>
                         </m:r>
                         <m:r>
                           <a:rPr lang="en-US" sz="2000">

--- a/PPTs/Ch12_13_Fixed_Floating_Point_Numbers.pptx
+++ b/PPTs/Ch12_13_Fixed_Floating_Point_Numbers.pptx
@@ -5,10 +5,10 @@
     <p:sldMasterId id="2147483660" r:id="rId1"/>
   </p:sldMasterIdLst>
   <p:notesMasterIdLst>
-    <p:notesMasterId r:id="rId29"/>
+    <p:notesMasterId r:id="rId30"/>
   </p:notesMasterIdLst>
   <p:handoutMasterIdLst>
-    <p:handoutMasterId r:id="rId30"/>
+    <p:handoutMasterId r:id="rId31"/>
   </p:handoutMasterIdLst>
   <p:sldIdLst>
     <p:sldId id="734" r:id="rId2"/>
@@ -37,7 +37,8 @@
     <p:sldId id="268" r:id="rId25"/>
     <p:sldId id="258" r:id="rId26"/>
     <p:sldId id="732" r:id="rId27"/>
-    <p:sldId id="738" r:id="rId28"/>
+    <p:sldId id="742" r:id="rId28"/>
+    <p:sldId id="738" r:id="rId29"/>
   </p:sldIdLst>
   <p:sldSz cx="12192000" cy="6858000"/>
   <p:notesSz cx="6858000" cy="9144000"/>
@@ -158,7 +159,7 @@
 <file path=ppt/revisionInfo.xml><?xml version="1.0" encoding="utf-8"?>
 <p1510:revInfo xmlns:a="http://schemas.openxmlformats.org/drawingml/2006/main" xmlns:r="http://schemas.openxmlformats.org/officeDocument/2006/relationships" xmlns:p1510="http://schemas.microsoft.com/office/powerpoint/2015/10/main">
   <p1510:revLst>
-    <p1510:client id="{67564324-3CBA-4E84-95E9-F69DCA3B5F12}" v="407" dt="2025-10-07T18:23:40.672"/>
+    <p1510:client id="{67564324-3CBA-4E84-95E9-F69DCA3B5F12}" v="408" dt="2025-10-12T18:48:07.839"/>
   </p1510:revLst>
 </p1510:revInfo>
 </file>
@@ -168,7 +169,7 @@
   <pc:docChgLst>
     <pc:chgData name="Zonghua Gu" userId="9a7e1853e1951ef5" providerId="LiveId" clId="{CF1FAA12-072C-4ED5-BA76-0FFFAEFDB88A}"/>
     <pc:docChg chg="undo custSel addSld delSld modSld sldOrd">
-      <pc:chgData name="Zonghua Gu" userId="9a7e1853e1951ef5" providerId="LiveId" clId="{CF1FAA12-072C-4ED5-BA76-0FFFAEFDB88A}" dt="2025-10-07T18:24:06.118" v="946" actId="1076"/>
+      <pc:chgData name="Zonghua Gu" userId="9a7e1853e1951ef5" providerId="LiveId" clId="{CF1FAA12-072C-4ED5-BA76-0FFFAEFDB88A}" dt="2025-10-12T18:47:22.216" v="981" actId="20577"/>
       <pc:docMkLst>
         <pc:docMk/>
       </pc:docMkLst>
@@ -651,14 +652,6 @@
             <ac:spMk id="4" creationId="{B3D4FF65-D71D-3471-F040-1E677F86A2DD}"/>
           </ac:spMkLst>
         </pc:spChg>
-        <pc:spChg chg="add del">
-          <ac:chgData name="Zonghua Gu" userId="9a7e1853e1951ef5" providerId="LiveId" clId="{CF1FAA12-072C-4ED5-BA76-0FFFAEFDB88A}" dt="2025-10-07T18:04:41.910" v="661" actId="11529"/>
-          <ac:spMkLst>
-            <pc:docMk/>
-            <pc:sldMk cId="3951653191" sldId="739"/>
-            <ac:spMk id="7" creationId="{0CE6181D-1E17-81F0-F87E-AEF67DB40BE8}"/>
-          </ac:spMkLst>
-        </pc:spChg>
         <pc:spChg chg="add mod">
           <ac:chgData name="Zonghua Gu" userId="9a7e1853e1951ef5" providerId="LiveId" clId="{CF1FAA12-072C-4ED5-BA76-0FFFAEFDB88A}" dt="2025-10-07T18:09:33.366" v="755" actId="1037"/>
           <ac:spMkLst>
@@ -675,30 +668,6 @@
             <ac:spMk id="9" creationId="{ACE7E842-BCEF-B6B4-E109-FC4B047B29D0}"/>
           </ac:spMkLst>
         </pc:spChg>
-        <pc:picChg chg="add del mod">
-          <ac:chgData name="Zonghua Gu" userId="9a7e1853e1951ef5" providerId="LiveId" clId="{CF1FAA12-072C-4ED5-BA76-0FFFAEFDB88A}" dt="2025-10-07T18:06:10.113" v="683" actId="478"/>
-          <ac:picMkLst>
-            <pc:docMk/>
-            <pc:sldMk cId="3951653191" sldId="739"/>
-            <ac:picMk id="6" creationId="{65712776-712E-0C93-D4E3-1A7DE02BE06C}"/>
-          </ac:picMkLst>
-        </pc:picChg>
-        <pc:picChg chg="add del mod">
-          <ac:chgData name="Zonghua Gu" userId="9a7e1853e1951ef5" providerId="LiveId" clId="{CF1FAA12-072C-4ED5-BA76-0FFFAEFDB88A}" dt="2025-10-07T18:07:52.111" v="709" actId="478"/>
-          <ac:picMkLst>
-            <pc:docMk/>
-            <pc:sldMk cId="3951653191" sldId="739"/>
-            <ac:picMk id="11" creationId="{4E91E792-991F-7701-8169-50849A501F0A}"/>
-          </ac:picMkLst>
-        </pc:picChg>
-        <pc:picChg chg="add del mod">
-          <ac:chgData name="Zonghua Gu" userId="9a7e1853e1951ef5" providerId="LiveId" clId="{CF1FAA12-072C-4ED5-BA76-0FFFAEFDB88A}" dt="2025-10-07T18:09:51.337" v="757" actId="478"/>
-          <ac:picMkLst>
-            <pc:docMk/>
-            <pc:sldMk cId="3951653191" sldId="739"/>
-            <ac:picMk id="13" creationId="{6816FB5B-F46C-3041-948E-C9A8446AEAE3}"/>
-          </ac:picMkLst>
-        </pc:picChg>
       </pc:sldChg>
       <pc:sldChg chg="new del">
         <pc:chgData name="Zonghua Gu" userId="9a7e1853e1951ef5" providerId="LiveId" clId="{CF1FAA12-072C-4ED5-BA76-0FFFAEFDB88A}" dt="2025-10-07T18:12:44.608" v="780" actId="47"/>
@@ -737,6 +706,37 @@
             <ac:spMk id="5" creationId="{FFF26C8F-DF03-64D8-CF77-B258AADB637B}"/>
           </ac:spMkLst>
         </pc:spChg>
+      </pc:sldChg>
+      <pc:sldChg chg="addSp modSp new mod">
+        <pc:chgData name="Zonghua Gu" userId="9a7e1853e1951ef5" providerId="LiveId" clId="{CF1FAA12-072C-4ED5-BA76-0FFFAEFDB88A}" dt="2025-10-12T18:47:22.216" v="981" actId="20577"/>
+        <pc:sldMkLst>
+          <pc:docMk/>
+          <pc:sldMk cId="4167531389" sldId="742"/>
+        </pc:sldMkLst>
+        <pc:spChg chg="mod">
+          <ac:chgData name="Zonghua Gu" userId="9a7e1853e1951ef5" providerId="LiveId" clId="{CF1FAA12-072C-4ED5-BA76-0FFFAEFDB88A}" dt="2025-10-12T18:47:22.216" v="981" actId="20577"/>
+          <ac:spMkLst>
+            <pc:docMk/>
+            <pc:sldMk cId="4167531389" sldId="742"/>
+            <ac:spMk id="2" creationId="{162E9A7F-FF94-CF8B-8F58-AA740C0B8A5F}"/>
+          </ac:spMkLst>
+        </pc:spChg>
+        <pc:spChg chg="mod">
+          <ac:chgData name="Zonghua Gu" userId="9a7e1853e1951ef5" providerId="LiveId" clId="{CF1FAA12-072C-4ED5-BA76-0FFFAEFDB88A}" dt="2025-10-12T18:46:57.308" v="970" actId="20577"/>
+          <ac:spMkLst>
+            <pc:docMk/>
+            <pc:sldMk cId="4167531389" sldId="742"/>
+            <ac:spMk id="4" creationId="{1F04D77F-669A-A724-34EC-94F5C04F32A5}"/>
+          </ac:spMkLst>
+        </pc:spChg>
+        <pc:picChg chg="add mod">
+          <ac:chgData name="Zonghua Gu" userId="9a7e1853e1951ef5" providerId="LiveId" clId="{CF1FAA12-072C-4ED5-BA76-0FFFAEFDB88A}" dt="2025-10-12T18:47:08.554" v="976" actId="1076"/>
+          <ac:picMkLst>
+            <pc:docMk/>
+            <pc:sldMk cId="4167531389" sldId="742"/>
+            <ac:picMk id="6" creationId="{FFC9B12A-5BB4-5F2F-BCC2-1CB754290CEB}"/>
+          </ac:picMkLst>
+        </pc:picChg>
       </pc:sldChg>
     </pc:docChg>
   </pc:docChgLst>
@@ -6764,7 +6764,7 @@
             <a:fld id="{BD4F56A7-3CDE-194F-B9AF-D598FBBF1989}" type="datetimeFigureOut">
               <a:rPr lang="en-US" smtClean="0"/>
               <a:pPr/>
-              <a:t>10/7/2025</a:t>
+              <a:t>10/12/2025</a:t>
             </a:fld>
             <a:endParaRPr lang="en-US"/>
           </a:p>
@@ -6932,7 +6932,7 @@
             <a:fld id="{1E52AD58-60CE-E948-9CBA-0BD7030FC28E}" type="datetimeFigureOut">
               <a:rPr lang="en-US" smtClean="0"/>
               <a:pPr/>
-              <a:t>10/7/2025</a:t>
+              <a:t>10/12/2025</a:t>
             </a:fld>
             <a:endParaRPr lang="en-US"/>
           </a:p>
@@ -7995,6 +7995,94 @@
 </p:notes>
 </file>
 
+<file path=ppt/notesSlides/notesSlide9.xml><?xml version="1.0" encoding="utf-8"?>
+<p:notes xmlns:a="http://schemas.openxmlformats.org/drawingml/2006/main" xmlns:r="http://schemas.openxmlformats.org/officeDocument/2006/relationships" xmlns:p="http://schemas.openxmlformats.org/presentationml/2006/main">
+  <p:cSld>
+    <p:spTree>
+      <p:nvGrpSpPr>
+        <p:cNvPr id="1" name=""/>
+        <p:cNvGrpSpPr/>
+        <p:nvPr/>
+      </p:nvGrpSpPr>
+      <p:grpSpPr>
+        <a:xfrm>
+          <a:off x="0" y="0"/>
+          <a:ext cx="0" cy="0"/>
+          <a:chOff x="0" y="0"/>
+          <a:chExt cx="0" cy="0"/>
+        </a:xfrm>
+      </p:grpSpPr>
+      <p:sp>
+        <p:nvSpPr>
+          <p:cNvPr id="2" name="Slide Image Placeholder 1"/>
+          <p:cNvSpPr>
+            <a:spLocks noGrp="1" noRot="1" noChangeAspect="1"/>
+          </p:cNvSpPr>
+          <p:nvPr>
+            <p:ph type="sldImg"/>
+          </p:nvPr>
+        </p:nvSpPr>
+        <p:spPr/>
+      </p:sp>
+      <p:sp>
+        <p:nvSpPr>
+          <p:cNvPr id="3" name="Notes Placeholder 2"/>
+          <p:cNvSpPr>
+            <a:spLocks noGrp="1"/>
+          </p:cNvSpPr>
+          <p:nvPr>
+            <p:ph type="body" idx="1"/>
+          </p:nvPr>
+        </p:nvSpPr>
+        <p:spPr/>
+        <p:txBody>
+          <a:bodyPr/>
+          <a:lstStyle/>
+          <a:p>
+            <a:r>
+              <a:rPr lang="en-US"/>
+              <a:t>https://www.edge-ai-vision.com/2025/08/introduction-to-data-types-for-ai-trade-offs-and-trends-a-presentation-from-synopsys/</a:t>
+            </a:r>
+          </a:p>
+        </p:txBody>
+      </p:sp>
+      <p:sp>
+        <p:nvSpPr>
+          <p:cNvPr id="4" name="Slide Number Placeholder 3"/>
+          <p:cNvSpPr>
+            <a:spLocks noGrp="1"/>
+          </p:cNvSpPr>
+          <p:nvPr>
+            <p:ph type="sldNum" sz="quarter" idx="5"/>
+          </p:nvPr>
+        </p:nvSpPr>
+        <p:spPr/>
+        <p:txBody>
+          <a:bodyPr/>
+          <a:lstStyle/>
+          <a:p>
+            <a:fld id="{D624DF53-3DD3-9F45-9E7E-472B96F1AB81}" type="slidenum">
+              <a:rPr lang="en-US" smtClean="0"/>
+              <a:pPr/>
+              <a:t>27</a:t>
+            </a:fld>
+            <a:endParaRPr lang="en-US"/>
+          </a:p>
+        </p:txBody>
+      </p:sp>
+    </p:spTree>
+    <p:extLst>
+      <p:ext uri="{BB962C8B-B14F-4D97-AF65-F5344CB8AC3E}">
+        <p14:creationId xmlns:p14="http://schemas.microsoft.com/office/powerpoint/2010/main" val="706307618"/>
+      </p:ext>
+    </p:extLst>
+  </p:cSld>
+  <p:clrMapOvr>
+    <a:masterClrMapping/>
+  </p:clrMapOvr>
+</p:notes>
+</file>
+
 <file path=ppt/slideLayouts/slideLayout1.xml><?xml version="1.0" encoding="utf-8"?>
 <p:sldLayout xmlns:a="http://schemas.openxmlformats.org/drawingml/2006/main" xmlns:r="http://schemas.openxmlformats.org/officeDocument/2006/relationships" xmlns:p="http://schemas.openxmlformats.org/presentationml/2006/main" showMasterSp="0" type="title" preserve="1">
   <p:cSld name="Title Slide">
@@ -8137,7 +8225,7 @@
             <a:pPr eaLnBrk="1" latinLnBrk="0" hangingPunct="1"/>
             <a:fld id="{8E8B2B42-CBC2-7D4E-BA50-0E7F29B4DAAB}" type="datetime1">
               <a:rPr lang="en-US" smtClean="0"/>
-              <a:t>10/7/2025</a:t>
+              <a:t>10/12/2025</a:t>
             </a:fld>
             <a:endParaRPr lang="en-US" sz="1600" dirty="0"/>
           </a:p>
@@ -8497,7 +8585,7 @@
             <a:pPr eaLnBrk="1" latinLnBrk="0" hangingPunct="1"/>
             <a:fld id="{597D1259-3A46-254C-ADDB-B5DA4F1DF3DA}" type="datetime1">
               <a:rPr lang="en-US" smtClean="0"/>
-              <a:t>10/7/2025</a:t>
+              <a:t>10/12/2025</a:t>
             </a:fld>
             <a:endParaRPr lang="en-US"/>
           </a:p>
@@ -8673,7 +8761,7 @@
             <a:pPr eaLnBrk="1" latinLnBrk="0" hangingPunct="1"/>
             <a:fld id="{CCA104EC-54AA-E04F-BDC0-22B4E8892699}" type="datetime1">
               <a:rPr lang="en-US" smtClean="0"/>
-              <a:t>10/7/2025</a:t>
+              <a:t>10/12/2025</a:t>
             </a:fld>
             <a:endParaRPr lang="en-US"/>
           </a:p>
@@ -8909,7 +8997,7 @@
             <a:pPr eaLnBrk="1" latinLnBrk="0" hangingPunct="1"/>
             <a:fld id="{A9E6F060-20EB-3246-9088-08BF5F1271DE}" type="datetime1">
               <a:rPr lang="en-US" smtClean="0"/>
-              <a:t>10/7/2025</a:t>
+              <a:t>10/12/2025</a:t>
             </a:fld>
             <a:endParaRPr lang="en-US" dirty="0"/>
           </a:p>
@@ -9179,7 +9267,7 @@
             <a:pPr eaLnBrk="1" latinLnBrk="0" hangingPunct="1"/>
             <a:fld id="{34C82E41-DA7E-CA4C-823B-C759BEA16CE8}" type="datetime1">
               <a:rPr lang="en-US" smtClean="0"/>
-              <a:t>10/7/2025</a:t>
+              <a:t>10/12/2025</a:t>
             </a:fld>
             <a:endParaRPr lang="en-US" dirty="0"/>
           </a:p>
@@ -9400,7 +9488,7 @@
             <a:pPr eaLnBrk="1" latinLnBrk="0" hangingPunct="1"/>
             <a:fld id="{2500C8B0-EB1A-0A41-B839-C4B99CD2225A}" type="datetime1">
               <a:rPr lang="en-US" smtClean="0"/>
-              <a:t>10/7/2025</a:t>
+              <a:t>10/12/2025</a:t>
             </a:fld>
             <a:endParaRPr lang="en-US"/>
           </a:p>
@@ -9753,7 +9841,7 @@
             <a:pPr eaLnBrk="1" latinLnBrk="0" hangingPunct="1"/>
             <a:fld id="{4F16605B-D952-1149-A111-28A5633BAE48}" type="datetime1">
               <a:rPr lang="en-US" smtClean="0"/>
-              <a:t>10/7/2025</a:t>
+              <a:t>10/12/2025</a:t>
             </a:fld>
             <a:endParaRPr lang="en-US"/>
           </a:p>
@@ -9986,7 +10074,7 @@
             <a:pPr eaLnBrk="1" latinLnBrk="0" hangingPunct="1"/>
             <a:fld id="{91109A1C-29B2-B04E-8365-C9D22C4AE842}" type="datetime1">
               <a:rPr lang="en-US" smtClean="0"/>
-              <a:t>10/7/2025</a:t>
+              <a:t>10/12/2025</a:t>
             </a:fld>
             <a:endParaRPr lang="en-US"/>
           </a:p>
@@ -10128,7 +10216,7 @@
             <a:pPr eaLnBrk="1" latinLnBrk="0" hangingPunct="1"/>
             <a:fld id="{2CE417B6-A42B-064A-8677-46C55C4F613A}" type="datetime1">
               <a:rPr lang="en-US" smtClean="0"/>
-              <a:t>10/7/2025</a:t>
+              <a:t>10/12/2025</a:t>
             </a:fld>
             <a:endParaRPr lang="en-US"/>
           </a:p>
@@ -10406,7 +10494,7 @@
             <a:pPr eaLnBrk="1" latinLnBrk="0" hangingPunct="1"/>
             <a:fld id="{DE76F5AD-3F1F-7141-BC8A-012C5728BE2D}" type="datetime1">
               <a:rPr lang="en-US" smtClean="0"/>
-              <a:t>10/7/2025</a:t>
+              <a:t>10/12/2025</a:t>
             </a:fld>
             <a:endParaRPr lang="en-US"/>
           </a:p>
@@ -10814,7 +10902,7 @@
             <a:pPr eaLnBrk="1" latinLnBrk="0" hangingPunct="1"/>
             <a:fld id="{09FA12B8-739E-4D47-A14C-180C3BC10865}" type="datetime1">
               <a:rPr lang="en-US" smtClean="0"/>
-              <a:t>10/7/2025</a:t>
+              <a:t>10/12/2025</a:t>
             </a:fld>
             <a:endParaRPr lang="en-US"/>
           </a:p>
@@ -11152,7 +11240,7 @@
             <a:pPr eaLnBrk="1" latinLnBrk="0" hangingPunct="1"/>
             <a:fld id="{CDD18CD8-E404-844E-A4BD-DF69B8E5881E}" type="datetime1">
               <a:rPr lang="en-US" smtClean="0"/>
-              <a:t>10/7/2025</a:t>
+              <a:t>10/12/2025</a:t>
             </a:fld>
             <a:endParaRPr lang="en-US" sz="1400" dirty="0">
               <a:solidFill>
@@ -12574,7 +12662,34 @@
                           </a:solidFill>
                           <a:latin typeface="Cambria Math" panose="02040503050406030204" pitchFamily="18" charset="0"/>
                         </a:rPr>
-                        <m:t>10.746×</m:t>
+                        <m:t>10</m:t>
+                      </m:r>
+                      <m:r>
+                        <a:rPr lang="en-US" i="1">
+                          <a:solidFill>
+                            <a:srgbClr val="000000"/>
+                          </a:solidFill>
+                          <a:latin typeface="Cambria Math" panose="02040503050406030204" pitchFamily="18" charset="0"/>
+                        </a:rPr>
+                        <m:t>.</m:t>
+                      </m:r>
+                      <m:r>
+                        <a:rPr lang="en-US" i="1">
+                          <a:solidFill>
+                            <a:srgbClr val="000000"/>
+                          </a:solidFill>
+                          <a:latin typeface="Cambria Math" panose="02040503050406030204" pitchFamily="18" charset="0"/>
+                        </a:rPr>
+                        <m:t>746</m:t>
+                      </m:r>
+                      <m:r>
+                        <a:rPr lang="en-US" i="1">
+                          <a:solidFill>
+                            <a:srgbClr val="000000"/>
+                          </a:solidFill>
+                          <a:latin typeface="Cambria Math" panose="02040503050406030204" pitchFamily="18" charset="0"/>
+                        </a:rPr>
+                        <m:t>×</m:t>
                       </m:r>
                       <m:sSup>
                         <m:sSupPr>
@@ -12638,7 +12753,25 @@
                               </a:solidFill>
                               <a:latin typeface="Cambria Math" panose="02040503050406030204" pitchFamily="18" charset="0"/>
                             </a:rPr>
-                            <m:t>10.746</m:t>
+                            <m:t>10</m:t>
+                          </m:r>
+                          <m:r>
+                            <a:rPr lang="en-US" i="1">
+                              <a:solidFill>
+                                <a:srgbClr val="000000"/>
+                              </a:solidFill>
+                              <a:latin typeface="Cambria Math" panose="02040503050406030204" pitchFamily="18" charset="0"/>
+                            </a:rPr>
+                            <m:t>.</m:t>
+                          </m:r>
+                          <m:r>
+                            <a:rPr lang="en-US" i="1">
+                              <a:solidFill>
+                                <a:srgbClr val="000000"/>
+                              </a:solidFill>
+                              <a:latin typeface="Cambria Math" panose="02040503050406030204" pitchFamily="18" charset="0"/>
+                            </a:rPr>
+                            <m:t>746</m:t>
                           </m:r>
                         </m:num>
                         <m:den>
@@ -12660,7 +12793,25 @@
                           </a:solidFill>
                           <a:latin typeface="Cambria Math" panose="02040503050406030204" pitchFamily="18" charset="0"/>
                         </a:rPr>
-                        <m:t>×8×</m:t>
+                        <m:t>×</m:t>
+                      </m:r>
+                      <m:r>
+                        <a:rPr lang="en-US" i="1">
+                          <a:solidFill>
+                            <a:srgbClr val="000000"/>
+                          </a:solidFill>
+                          <a:latin typeface="Cambria Math" panose="02040503050406030204" pitchFamily="18" charset="0"/>
+                        </a:rPr>
+                        <m:t>8</m:t>
+                      </m:r>
+                      <m:r>
+                        <a:rPr lang="en-US" i="1">
+                          <a:solidFill>
+                            <a:srgbClr val="000000"/>
+                          </a:solidFill>
+                          <a:latin typeface="Cambria Math" panose="02040503050406030204" pitchFamily="18" charset="0"/>
+                        </a:rPr>
+                        <m:t>×</m:t>
                       </m:r>
                       <m:sSup>
                         <m:sSupPr>
@@ -13019,7 +13170,19 @@
                             <a:rPr lang="en-US" sz="2400" i="1">
                               <a:latin typeface="Cambria Math"/>
                             </a:rPr>
-                            <m:t>(−1)</m:t>
+                            <m:t>(−</m:t>
+                          </m:r>
+                          <m:r>
+                            <a:rPr lang="en-US" sz="2400" i="1">
+                              <a:latin typeface="Cambria Math"/>
+                            </a:rPr>
+                            <m:t>1</m:t>
+                          </m:r>
+                          <m:r>
+                            <a:rPr lang="en-US" sz="2400" i="1">
+                              <a:latin typeface="Cambria Math"/>
+                            </a:rPr>
+                            <m:t>)</m:t>
                           </m:r>
                         </m:e>
                         <m:sup>
@@ -13038,7 +13201,19 @@
                         <a:rPr lang="en-US" sz="2400" i="1">
                           <a:latin typeface="Cambria Math"/>
                         </a:rPr>
-                        <m:t>×(1+</m:t>
+                        <m:t>×(</m:t>
+                      </m:r>
+                      <m:r>
+                        <a:rPr lang="en-US" sz="2400" i="1">
+                          <a:latin typeface="Cambria Math"/>
+                        </a:rPr>
+                        <m:t>1</m:t>
+                      </m:r>
+                      <m:r>
+                        <a:rPr lang="en-US" sz="2400" i="1">
+                          <a:latin typeface="Cambria Math"/>
+                        </a:rPr>
+                        <m:t>+</m:t>
                       </m:r>
                       <m:r>
                         <a:rPr lang="en-US" sz="2400" i="1">
@@ -14355,13 +14530,7 @@
                       <a:rPr lang="en-US" sz="2800" i="1">
                         <a:latin typeface="Cambria Math"/>
                       </a:rPr>
-                      <m:t>=</m:t>
-                    </m:r>
-                    <m:r>
-                      <a:rPr lang="en-US" sz="2800" i="1">
-                        <a:latin typeface="Cambria Math"/>
-                      </a:rPr>
-                      <m:t>129</m:t>
+                      <m:t>=129</m:t>
                     </m:r>
                   </m:oMath>
                 </a14:m>
@@ -14387,13 +14556,7 @@
                           <a:rPr lang="en-US" sz="2800" i="1">
                             <a:latin typeface="Cambria Math"/>
                           </a:rPr>
-                          <m:t>0</m:t>
-                        </m:r>
-                        <m:r>
-                          <a:rPr lang="en-US" sz="2800" i="1">
-                            <a:latin typeface="Cambria Math"/>
-                          </a:rPr>
-                          <m:t>.</m:t>
+                          <m:t>0.</m:t>
                         </m:r>
                         <m:r>
                           <a:rPr lang="en-US" sz="2800" b="0" i="1" smtClean="0">
@@ -14453,13 +14616,7 @@
                           <a:rPr lang="en-US" sz="2800" i="1">
                             <a:latin typeface="Cambria Math"/>
                           </a:rPr>
-                          <m:t>−</m:t>
-                        </m:r>
-                        <m:r>
-                          <a:rPr lang="en-US" sz="2800" i="1">
-                            <a:latin typeface="Cambria Math"/>
-                          </a:rPr>
-                          <m:t>1</m:t>
+                          <m:t>−1</m:t>
                         </m:r>
                       </m:sup>
                     </m:sSup>
@@ -14502,13 +14659,7 @@
                           <a:rPr lang="en-US" sz="2800" i="1">
                             <a:latin typeface="Cambria Math"/>
                           </a:rPr>
-                          <m:t>−</m:t>
-                        </m:r>
-                        <m:r>
-                          <a:rPr lang="en-US" sz="2800" i="1">
-                            <a:latin typeface="Cambria Math"/>
-                          </a:rPr>
-                          <m:t>2</m:t>
+                          <m:t>−2</m:t>
                         </m:r>
                       </m:sup>
                     </m:sSup>
@@ -14516,19 +14667,7 @@
                       <a:rPr lang="en-US" sz="2800" i="1">
                         <a:latin typeface="Cambria Math"/>
                       </a:rPr>
-                      <m:t>+</m:t>
-                    </m:r>
-                    <m:r>
-                      <a:rPr lang="en-US" sz="2800" i="1">
-                        <a:latin typeface="Cambria Math"/>
-                      </a:rPr>
-                      <m:t>1</m:t>
-                    </m:r>
-                    <m:r>
-                      <a:rPr lang="en-US" sz="2800" i="1">
-                        <a:latin typeface="Cambria Math"/>
-                      </a:rPr>
-                      <m:t>×</m:t>
+                      <m:t>+1×</m:t>
                     </m:r>
                     <m:sSup>
                       <m:sSupPr>
@@ -14551,13 +14690,7 @@
                           <a:rPr lang="en-US" sz="2800" i="1">
                             <a:latin typeface="Cambria Math"/>
                           </a:rPr>
-                          <m:t>−</m:t>
-                        </m:r>
-                        <m:r>
-                          <a:rPr lang="en-US" sz="2800" i="1">
-                            <a:latin typeface="Cambria Math"/>
-                          </a:rPr>
-                          <m:t>3</m:t>
+                          <m:t>−3</m:t>
                         </m:r>
                       </m:sup>
                     </m:sSup>
@@ -14571,13 +14704,7 @@
                       <a:rPr lang="en-US" sz="2800" i="1">
                         <a:latin typeface="Cambria Math"/>
                       </a:rPr>
-                      <m:t>0</m:t>
-                    </m:r>
-                    <m:r>
-                      <a:rPr lang="en-US" sz="2800" i="1">
-                        <a:latin typeface="Cambria Math"/>
-                      </a:rPr>
-                      <m:t>.</m:t>
+                      <m:t>0.</m:t>
                     </m:r>
                     <m:r>
                       <a:rPr lang="en-US" sz="2800" b="0" i="1" smtClean="0">
@@ -14629,13 +14756,7 @@
                               <a:rPr lang="en-US" sz="2800" i="1">
                                 <a:latin typeface="Cambria Math"/>
                               </a:rPr>
-                              <m:t>−</m:t>
-                            </m:r>
-                            <m:r>
-                              <a:rPr lang="en-US" sz="2800" i="1">
-                                <a:latin typeface="Cambria Math"/>
-                              </a:rPr>
-                              <m:t>1</m:t>
+                              <m:t>−1</m:t>
                             </m:r>
                           </m:e>
                         </m:d>
@@ -14668,13 +14789,7 @@
                           <a:rPr lang="en-US" sz="2800" i="1">
                             <a:latin typeface="Cambria Math"/>
                           </a:rPr>
-                          <m:t>1</m:t>
-                        </m:r>
-                        <m:r>
-                          <a:rPr lang="en-US" sz="2800" i="1">
-                            <a:latin typeface="Cambria Math"/>
-                          </a:rPr>
-                          <m:t>+</m:t>
+                          <m:t>1+</m:t>
                         </m:r>
                         <m:r>
                           <a:rPr lang="en-US" sz="2800" i="1">
@@ -14717,13 +14832,7 @@
                           <a:rPr lang="en-US" sz="2800" i="1">
                             <a:latin typeface="Cambria Math"/>
                           </a:rPr>
-                          <m:t>−</m:t>
-                        </m:r>
-                        <m:r>
-                          <a:rPr lang="en-US" sz="2800" i="1">
-                            <a:latin typeface="Cambria Math"/>
-                          </a:rPr>
-                          <m:t>127</m:t>
+                          <m:t>−127</m:t>
                         </m:r>
                       </m:sup>
                     </m:sSup>
@@ -14774,13 +14883,7 @@
                                 <a:rPr lang="en-US" sz="2800" i="1">
                                   <a:latin typeface="Cambria Math"/>
                                 </a:rPr>
-                                <m:t>−</m:t>
-                              </m:r>
-                              <m:r>
-                                <a:rPr lang="en-US" sz="2800" i="1">
-                                  <a:latin typeface="Cambria Math"/>
-                                </a:rPr>
-                                <m:t>1</m:t>
+                                <m:t>−1</m:t>
                               </m:r>
                             </m:e>
                           </m:d>
@@ -14813,25 +14916,7 @@
                             <a:rPr lang="en-US" sz="2800" i="1">
                               <a:latin typeface="Cambria Math"/>
                             </a:rPr>
-                            <m:t>1</m:t>
-                          </m:r>
-                          <m:r>
-                            <a:rPr lang="en-US" sz="2800" i="1">
-                              <a:latin typeface="Cambria Math"/>
-                            </a:rPr>
-                            <m:t>+</m:t>
-                          </m:r>
-                          <m:r>
-                            <a:rPr lang="en-US" sz="2800" i="1">
-                              <a:latin typeface="Cambria Math"/>
-                            </a:rPr>
-                            <m:t>0</m:t>
-                          </m:r>
-                          <m:r>
-                            <a:rPr lang="en-US" sz="2800" i="1">
-                              <a:latin typeface="Cambria Math"/>
-                            </a:rPr>
-                            <m:t>.</m:t>
+                            <m:t>1+0.</m:t>
                           </m:r>
                           <m:r>
                             <a:rPr lang="en-US" sz="2800" b="0" i="1" smtClean="0">
@@ -14880,13 +14965,7 @@
                             <a:rPr lang="en-US" sz="2800" i="1">
                               <a:latin typeface="Cambria Math"/>
                             </a:rPr>
-                            <m:t>−</m:t>
-                          </m:r>
-                          <m:r>
-                            <a:rPr lang="en-US" sz="2800" i="1">
-                              <a:latin typeface="Cambria Math"/>
-                            </a:rPr>
-                            <m:t>127</m:t>
+                            <m:t>−127</m:t>
                           </m:r>
                         </m:sup>
                       </m:sSup>
@@ -14905,31 +14984,7 @@
                         <a:rPr lang="en-US" sz="2800" i="1">
                           <a:latin typeface="Cambria Math"/>
                         </a:rPr>
-                        <m:t>−</m:t>
-                      </m:r>
-                      <m:r>
-                        <a:rPr lang="en-US" sz="2800" i="1">
-                          <a:latin typeface="Cambria Math"/>
-                        </a:rPr>
-                        <m:t>1</m:t>
-                      </m:r>
-                      <m:r>
-                        <a:rPr lang="en-US" sz="2800" i="1">
-                          <a:latin typeface="Cambria Math"/>
-                        </a:rPr>
-                        <m:t>×</m:t>
-                      </m:r>
-                      <m:r>
-                        <a:rPr lang="en-US" sz="2800" i="1">
-                          <a:latin typeface="Cambria Math"/>
-                        </a:rPr>
-                        <m:t>1</m:t>
-                      </m:r>
-                      <m:r>
-                        <a:rPr lang="en-US" sz="2800" i="1">
-                          <a:latin typeface="Cambria Math"/>
-                        </a:rPr>
-                        <m:t>.</m:t>
+                        <m:t>−1×1.</m:t>
                       </m:r>
                       <m:r>
                         <a:rPr lang="en-US" sz="2800" b="0" i="1" smtClean="0">
@@ -14983,19 +15038,7 @@
                         <a:rPr lang="en-US" sz="2800" b="0" i="1" smtClean="0">
                           <a:latin typeface="Cambria Math" panose="02040503050406030204" pitchFamily="18" charset="0"/>
                         </a:rPr>
-                        <m:t>4</m:t>
-                      </m:r>
-                      <m:r>
-                        <a:rPr lang="en-US" sz="2800" b="0" i="1" smtClean="0">
-                          <a:latin typeface="Cambria Math" panose="02040503050406030204" pitchFamily="18" charset="0"/>
-                        </a:rPr>
-                        <m:t>.</m:t>
-                      </m:r>
-                      <m:r>
-                        <a:rPr lang="en-US" sz="2800" b="0" i="1" smtClean="0">
-                          <a:latin typeface="Cambria Math" panose="02040503050406030204" pitchFamily="18" charset="0"/>
-                        </a:rPr>
-                        <m:t>5</m:t>
+                        <m:t>4.5</m:t>
                       </m:r>
                     </m:oMath>
                   </m:oMathPara>
@@ -16005,13 +16048,7 @@
                       <a:rPr lang="en-US" sz="2800" i="1">
                         <a:latin typeface="Cambria Math"/>
                       </a:rPr>
-                      <m:t>=</m:t>
-                    </m:r>
-                    <m:r>
-                      <a:rPr lang="en-US" sz="2800" i="1">
-                        <a:latin typeface="Cambria Math"/>
-                      </a:rPr>
-                      <m:t>130</m:t>
+                      <m:t>=130</m:t>
                     </m:r>
                   </m:oMath>
                 </a14:m>
@@ -16037,13 +16074,7 @@
                           <a:rPr lang="en-US" sz="2800" i="1">
                             <a:latin typeface="Cambria Math"/>
                           </a:rPr>
-                          <m:t>0</m:t>
-                        </m:r>
-                        <m:r>
-                          <a:rPr lang="en-US" sz="2800" i="1">
-                            <a:latin typeface="Cambria Math"/>
-                          </a:rPr>
-                          <m:t>.</m:t>
+                          <m:t>0.</m:t>
                         </m:r>
                         <m:r>
                           <a:rPr lang="en-US" sz="2800" b="0" i="1" smtClean="0">
@@ -16103,13 +16134,7 @@
                           <a:rPr lang="en-US" sz="2800" i="1">
                             <a:latin typeface="Cambria Math"/>
                           </a:rPr>
-                          <m:t>−</m:t>
-                        </m:r>
-                        <m:r>
-                          <a:rPr lang="en-US" sz="2800" i="1">
-                            <a:latin typeface="Cambria Math"/>
-                          </a:rPr>
-                          <m:t>1</m:t>
+                          <m:t>−1</m:t>
                         </m:r>
                       </m:sup>
                     </m:sSup>
@@ -16152,13 +16177,7 @@
                           <a:rPr lang="en-US" sz="2800" i="1">
                             <a:latin typeface="Cambria Math"/>
                           </a:rPr>
-                          <m:t>−</m:t>
-                        </m:r>
-                        <m:r>
-                          <a:rPr lang="en-US" sz="2800" i="1">
-                            <a:latin typeface="Cambria Math"/>
-                          </a:rPr>
-                          <m:t>2</m:t>
+                          <m:t>−2</m:t>
                         </m:r>
                       </m:sup>
                     </m:sSup>
@@ -16166,19 +16185,7 @@
                       <a:rPr lang="en-US" sz="2800" i="1">
                         <a:latin typeface="Cambria Math"/>
                       </a:rPr>
-                      <m:t>+</m:t>
-                    </m:r>
-                    <m:r>
-                      <a:rPr lang="en-US" sz="2800" i="1">
-                        <a:latin typeface="Cambria Math"/>
-                      </a:rPr>
-                      <m:t>1</m:t>
-                    </m:r>
-                    <m:r>
-                      <a:rPr lang="en-US" sz="2800" i="1">
-                        <a:latin typeface="Cambria Math"/>
-                      </a:rPr>
-                      <m:t>×</m:t>
+                      <m:t>+1×</m:t>
                     </m:r>
                     <m:sSup>
                       <m:sSupPr>
@@ -16215,25 +16222,7 @@
                       <a:rPr lang="en-US" sz="2800" i="1">
                         <a:latin typeface="Cambria Math" panose="02040503050406030204" pitchFamily="18" charset="0"/>
                       </a:rPr>
-                      <m:t>=</m:t>
-                    </m:r>
-                    <m:r>
-                      <a:rPr lang="en-US" sz="2800" i="1">
-                        <a:latin typeface="Cambria Math" panose="02040503050406030204" pitchFamily="18" charset="0"/>
-                      </a:rPr>
-                      <m:t>0</m:t>
-                    </m:r>
-                    <m:r>
-                      <a:rPr lang="en-US" sz="2800" i="1">
-                        <a:latin typeface="Cambria Math" panose="02040503050406030204" pitchFamily="18" charset="0"/>
-                      </a:rPr>
-                      <m:t>.</m:t>
-                    </m:r>
-                    <m:r>
-                      <a:rPr lang="en-US" sz="2800" i="1">
-                        <a:latin typeface="Cambria Math" panose="02040503050406030204" pitchFamily="18" charset="0"/>
-                      </a:rPr>
-                      <m:t>8125</m:t>
+                      <m:t>=0.8125</m:t>
                     </m:r>
                   </m:oMath>
                 </a14:m>
@@ -16279,13 +16268,7 @@
                               <a:rPr lang="en-US" sz="2800" i="1">
                                 <a:latin typeface="Cambria Math"/>
                               </a:rPr>
-                              <m:t>−</m:t>
-                            </m:r>
-                            <m:r>
-                              <a:rPr lang="en-US" sz="2800" i="1">
-                                <a:latin typeface="Cambria Math"/>
-                              </a:rPr>
-                              <m:t>1</m:t>
+                              <m:t>−1</m:t>
                             </m:r>
                           </m:e>
                         </m:d>
@@ -16318,13 +16301,7 @@
                           <a:rPr lang="en-US" sz="2800" i="1">
                             <a:latin typeface="Cambria Math"/>
                           </a:rPr>
-                          <m:t>1</m:t>
-                        </m:r>
-                        <m:r>
-                          <a:rPr lang="en-US" sz="2800" i="1">
-                            <a:latin typeface="Cambria Math"/>
-                          </a:rPr>
-                          <m:t>+</m:t>
+                          <m:t>1+</m:t>
                         </m:r>
                         <m:r>
                           <a:rPr lang="en-US" sz="2800" i="1">
@@ -16367,13 +16344,7 @@
                           <a:rPr lang="en-US" sz="2800" i="1">
                             <a:latin typeface="Cambria Math"/>
                           </a:rPr>
-                          <m:t>−</m:t>
-                        </m:r>
-                        <m:r>
-                          <a:rPr lang="en-US" sz="2800" i="1">
-                            <a:latin typeface="Cambria Math"/>
-                          </a:rPr>
-                          <m:t>127</m:t>
+                          <m:t>−127</m:t>
                         </m:r>
                       </m:sup>
                     </m:sSup>
@@ -16424,13 +16395,7 @@
                                 <a:rPr lang="en-US" sz="2800" i="1">
                                   <a:latin typeface="Cambria Math"/>
                                 </a:rPr>
-                                <m:t>−</m:t>
-                              </m:r>
-                              <m:r>
-                                <a:rPr lang="en-US" sz="2800" i="1">
-                                  <a:latin typeface="Cambria Math"/>
-                                </a:rPr>
-                                <m:t>1</m:t>
+                                <m:t>−1</m:t>
                               </m:r>
                             </m:e>
                           </m:d>
@@ -16463,31 +16428,13 @@
                             <a:rPr lang="en-US" sz="2800" i="1">
                               <a:latin typeface="Cambria Math"/>
                             </a:rPr>
-                            <m:t>1</m:t>
-                          </m:r>
-                          <m:r>
-                            <a:rPr lang="en-US" sz="2800" i="1">
-                              <a:latin typeface="Cambria Math"/>
-                            </a:rPr>
-                            <m:t>+</m:t>
+                            <m:t>1+</m:t>
                           </m:r>
                           <m:r>
                             <a:rPr lang="en-US" sz="2800" i="1">
                               <a:latin typeface="Cambria Math" panose="02040503050406030204" pitchFamily="18" charset="0"/>
                             </a:rPr>
-                            <m:t>0</m:t>
-                          </m:r>
-                          <m:r>
-                            <a:rPr lang="en-US" sz="2800" i="1">
-                              <a:latin typeface="Cambria Math" panose="02040503050406030204" pitchFamily="18" charset="0"/>
-                            </a:rPr>
-                            <m:t>.</m:t>
-                          </m:r>
-                          <m:r>
-                            <a:rPr lang="en-US" sz="2800" i="1">
-                              <a:latin typeface="Cambria Math" panose="02040503050406030204" pitchFamily="18" charset="0"/>
-                            </a:rPr>
-                            <m:t>8125</m:t>
+                            <m:t>0.8125</m:t>
                           </m:r>
                         </m:e>
                       </m:d>
@@ -16530,13 +16477,7 @@
                             <a:rPr lang="en-US" sz="2800" i="1">
                               <a:latin typeface="Cambria Math"/>
                             </a:rPr>
-                            <m:t>−</m:t>
-                          </m:r>
-                          <m:r>
-                            <a:rPr lang="en-US" sz="2800" i="1">
-                              <a:latin typeface="Cambria Math"/>
-                            </a:rPr>
-                            <m:t>127</m:t>
+                            <m:t>−127</m:t>
                           </m:r>
                         </m:sup>
                       </m:sSup>
@@ -16555,25 +16496,7 @@
                         <a:rPr lang="en-US" sz="2800" i="1">
                           <a:latin typeface="Cambria Math"/>
                         </a:rPr>
-                        <m:t>1</m:t>
-                      </m:r>
-                      <m:r>
-                        <a:rPr lang="en-US" sz="2800" i="1">
-                          <a:latin typeface="Cambria Math"/>
-                        </a:rPr>
-                        <m:t>×</m:t>
-                      </m:r>
-                      <m:r>
-                        <a:rPr lang="en-US" sz="2800" i="1">
-                          <a:latin typeface="Cambria Math"/>
-                        </a:rPr>
-                        <m:t>1</m:t>
-                      </m:r>
-                      <m:r>
-                        <a:rPr lang="en-US" sz="2800" i="1">
-                          <a:latin typeface="Cambria Math"/>
-                        </a:rPr>
-                        <m:t>.</m:t>
+                        <m:t>1×1.</m:t>
                       </m:r>
                       <m:r>
                         <a:rPr lang="en-US" sz="2800" b="0" i="1" smtClean="0">
@@ -16627,19 +16550,7 @@
                         <a:rPr lang="en-US" sz="2800" b="0" i="1" smtClean="0">
                           <a:latin typeface="Cambria Math" panose="02040503050406030204" pitchFamily="18" charset="0"/>
                         </a:rPr>
-                        <m:t>14</m:t>
-                      </m:r>
-                      <m:r>
-                        <a:rPr lang="en-US" sz="2800" b="0" i="1" smtClean="0">
-                          <a:latin typeface="Cambria Math" panose="02040503050406030204" pitchFamily="18" charset="0"/>
-                        </a:rPr>
-                        <m:t>.</m:t>
-                      </m:r>
-                      <m:r>
-                        <a:rPr lang="en-US" sz="2800" b="0" i="1" smtClean="0">
-                          <a:latin typeface="Cambria Math" panose="02040503050406030204" pitchFamily="18" charset="0"/>
-                        </a:rPr>
-                        <m:t>5</m:t>
+                        <m:t>14.5</m:t>
                       </m:r>
                     </m:oMath>
                   </m:oMathPara>
@@ -18144,8 +18055,8 @@
           </a:p>
         </p:txBody>
       </p:sp>
-      <mc:AlternateContent xmlns:mc="http://schemas.openxmlformats.org/markup-compatibility/2006">
-        <mc:Choice xmlns:a14="http://schemas.microsoft.com/office/drawing/2010/main" Requires="a14">
+      <mc:AlternateContent xmlns:mc="http://schemas.openxmlformats.org/markup-compatibility/2006" xmlns:a14="http://schemas.microsoft.com/office/drawing/2010/main">
+        <mc:Choice Requires="a14">
           <p:sp>
             <p:nvSpPr>
               <p:cNvPr id="4" name="Content Placeholder 3">
@@ -19350,7 +19261,7 @@
             </p:txBody>
           </p:sp>
         </mc:Choice>
-        <mc:Fallback>
+        <mc:Fallback xmlns="">
           <p:sp>
             <p:nvSpPr>
               <p:cNvPr id="4" name="Content Placeholder 3">
@@ -20753,8 +20664,8 @@
           </a:p>
         </p:txBody>
       </p:sp>
-      <mc:AlternateContent xmlns:mc="http://schemas.openxmlformats.org/markup-compatibility/2006">
-        <mc:Choice xmlns:a14="http://schemas.microsoft.com/office/drawing/2010/main" Requires="a14">
+      <mc:AlternateContent xmlns:mc="http://schemas.openxmlformats.org/markup-compatibility/2006" xmlns:a14="http://schemas.microsoft.com/office/drawing/2010/main">
+        <mc:Choice Requires="a14">
           <p:sp>
             <p:nvSpPr>
               <p:cNvPr id="4" name="Content Placeholder 3">
@@ -20862,13 +20773,13 @@
                       <a:rPr lang="en-US" sz="2800" i="1">
                         <a:latin typeface="Cambria Math"/>
                       </a:rPr>
-                      <m:t>=1</m:t>
-                    </m:r>
-                    <m:r>
-                      <a:rPr lang="en-US" sz="2800" b="0" i="1" smtClean="0">
-                        <a:latin typeface="Cambria Math" panose="02040503050406030204" pitchFamily="18" charset="0"/>
-                      </a:rPr>
-                      <m:t>27</m:t>
+                      <m:t>=</m:t>
+                    </m:r>
+                    <m:r>
+                      <a:rPr lang="en-US" sz="2800" i="1">
+                        <a:latin typeface="Cambria Math"/>
+                      </a:rPr>
+                      <m:t>127</m:t>
                     </m:r>
                   </m:oMath>
                 </a14:m>
@@ -20891,7 +20802,13 @@
                       <a:rPr lang="en-US" sz="2800" i="1">
                         <a:latin typeface="Cambria Math" panose="02040503050406030204" pitchFamily="18" charset="0"/>
                       </a:rPr>
-                      <m:t>.29999995</m:t>
+                      <m:t>.</m:t>
+                    </m:r>
+                    <m:r>
+                      <a:rPr lang="en-US" sz="2800" i="1">
+                        <a:latin typeface="Cambria Math" panose="02040503050406030204" pitchFamily="18" charset="0"/>
+                      </a:rPr>
+                      <m:t>29999995</m:t>
                     </m:r>
                   </m:oMath>
                 </a14:m>
@@ -20940,7 +20857,13 @@
                               <a:rPr lang="en-US" sz="2800" i="1">
                                 <a:latin typeface="Cambria Math"/>
                               </a:rPr>
-                              <m:t>−1</m:t>
+                              <m:t>−</m:t>
+                            </m:r>
+                            <m:r>
+                              <a:rPr lang="en-US" sz="2800" i="1">
+                                <a:latin typeface="Cambria Math"/>
+                              </a:rPr>
+                              <m:t>1</m:t>
                             </m:r>
                           </m:e>
                         </m:d>
@@ -20973,7 +20896,13 @@
                           <a:rPr lang="en-US" sz="2800" i="1">
                             <a:latin typeface="Cambria Math"/>
                           </a:rPr>
-                          <m:t>1+</m:t>
+                          <m:t>1</m:t>
+                        </m:r>
+                        <m:r>
+                          <a:rPr lang="en-US" sz="2800" i="1">
+                            <a:latin typeface="Cambria Math"/>
+                          </a:rPr>
+                          <m:t>+</m:t>
                         </m:r>
                         <m:r>
                           <a:rPr lang="en-US" sz="2800" i="1">
@@ -21016,7 +20945,13 @@
                           <a:rPr lang="en-US" sz="2800" i="1">
                             <a:latin typeface="Cambria Math"/>
                           </a:rPr>
-                          <m:t>−127</m:t>
+                          <m:t>−</m:t>
+                        </m:r>
+                        <m:r>
+                          <a:rPr lang="en-US" sz="2800" i="1">
+                            <a:latin typeface="Cambria Math"/>
+                          </a:rPr>
+                          <m:t>127</m:t>
                         </m:r>
                       </m:sup>
                     </m:sSup>
@@ -21067,7 +21002,13 @@
                                 <a:rPr lang="en-US" sz="2800" i="1">
                                   <a:latin typeface="Cambria Math"/>
                                 </a:rPr>
-                                <m:t>−1</m:t>
+                                <m:t>−</m:t>
+                              </m:r>
+                              <m:r>
+                                <a:rPr lang="en-US" sz="2800" i="1">
+                                  <a:latin typeface="Cambria Math"/>
+                                </a:rPr>
+                                <m:t>1</m:t>
                               </m:r>
                             </m:e>
                           </m:d>
@@ -21100,7 +21041,13 @@
                             <a:rPr lang="en-US" sz="2800" i="1">
                               <a:latin typeface="Cambria Math"/>
                             </a:rPr>
-                            <m:t>1+</m:t>
+                            <m:t>1</m:t>
+                          </m:r>
+                          <m:r>
+                            <a:rPr lang="en-US" sz="2800" i="1">
+                              <a:latin typeface="Cambria Math"/>
+                            </a:rPr>
+                            <m:t>+</m:t>
                           </m:r>
                           <m:r>
                             <a:rPr lang="en-US" sz="2800" i="1" dirty="0">
@@ -21112,7 +21059,13 @@
                             <a:rPr lang="en-US" sz="2800" i="1">
                               <a:latin typeface="Cambria Math" panose="02040503050406030204" pitchFamily="18" charset="0"/>
                             </a:rPr>
-                            <m:t>.29999995</m:t>
+                            <m:t>.</m:t>
+                          </m:r>
+                          <m:r>
+                            <a:rPr lang="en-US" sz="2800" i="1">
+                              <a:latin typeface="Cambria Math" panose="02040503050406030204" pitchFamily="18" charset="0"/>
+                            </a:rPr>
+                            <m:t>29999995</m:t>
                           </m:r>
                         </m:e>
                       </m:d>
@@ -21155,7 +21108,13 @@
                             <a:rPr lang="en-US" sz="2800" i="1">
                               <a:latin typeface="Cambria Math"/>
                             </a:rPr>
-                            <m:t>−127</m:t>
+                            <m:t>−</m:t>
+                          </m:r>
+                          <m:r>
+                            <a:rPr lang="en-US" sz="2800" i="1">
+                              <a:latin typeface="Cambria Math"/>
+                            </a:rPr>
+                            <m:t>127</m:t>
                           </m:r>
                         </m:sup>
                       </m:sSup>
@@ -21180,7 +21139,13 @@
                         <a:rPr lang="en-US" sz="2800" i="1">
                           <a:latin typeface="Cambria Math" panose="02040503050406030204" pitchFamily="18" charset="0"/>
                         </a:rPr>
-                        <m:t>.29999995</m:t>
+                        <m:t>.</m:t>
+                      </m:r>
+                      <m:r>
+                        <a:rPr lang="en-US" sz="2800" i="1">
+                          <a:latin typeface="Cambria Math" panose="02040503050406030204" pitchFamily="18" charset="0"/>
+                        </a:rPr>
+                        <m:t>29999995</m:t>
                       </m:r>
                     </m:oMath>
                   </m:oMathPara>
@@ -21198,7 +21163,25 @@
                       <a:rPr lang="en-US" sz="2800" b="0" i="0" smtClean="0">
                         <a:latin typeface="Cambria Math" panose="02040503050406030204" pitchFamily="18" charset="0"/>
                       </a:rPr>
-                      <m:t>1.3−</m:t>
+                      <m:t>1</m:t>
+                    </m:r>
+                    <m:r>
+                      <a:rPr lang="en-US" sz="2800" b="0" i="0" smtClean="0">
+                        <a:latin typeface="Cambria Math" panose="02040503050406030204" pitchFamily="18" charset="0"/>
+                      </a:rPr>
+                      <m:t>.</m:t>
+                    </m:r>
+                    <m:r>
+                      <a:rPr lang="en-US" sz="2800" b="0" i="0" smtClean="0">
+                        <a:latin typeface="Cambria Math" panose="02040503050406030204" pitchFamily="18" charset="0"/>
+                      </a:rPr>
+                      <m:t>3</m:t>
+                    </m:r>
+                    <m:r>
+                      <a:rPr lang="en-US" sz="2800" b="0" i="0" smtClean="0">
+                        <a:latin typeface="Cambria Math" panose="02040503050406030204" pitchFamily="18" charset="0"/>
+                      </a:rPr>
+                      <m:t>−</m:t>
                     </m:r>
                     <m:r>
                       <a:rPr lang="en-US" sz="2800" i="1" dirty="0">
@@ -21210,13 +21193,31 @@
                       <a:rPr lang="en-US" sz="2800" i="1">
                         <a:latin typeface="Cambria Math" panose="02040503050406030204" pitchFamily="18" charset="0"/>
                       </a:rPr>
-                      <m:t>.29999995</m:t>
+                      <m:t>.</m:t>
                     </m:r>
                     <m:r>
                       <a:rPr lang="en-US" sz="2800" i="1">
                         <a:latin typeface="Cambria Math" panose="02040503050406030204" pitchFamily="18" charset="0"/>
                       </a:rPr>
-                      <m:t>=5×</m:t>
+                      <m:t>29999995</m:t>
+                    </m:r>
+                    <m:r>
+                      <a:rPr lang="en-US" sz="2800" i="1">
+                        <a:latin typeface="Cambria Math" panose="02040503050406030204" pitchFamily="18" charset="0"/>
+                      </a:rPr>
+                      <m:t>=</m:t>
+                    </m:r>
+                    <m:r>
+                      <a:rPr lang="en-US" sz="2800" i="1">
+                        <a:latin typeface="Cambria Math" panose="02040503050406030204" pitchFamily="18" charset="0"/>
+                      </a:rPr>
+                      <m:t>5</m:t>
+                    </m:r>
+                    <m:r>
+                      <a:rPr lang="en-US" sz="2800" i="1">
+                        <a:latin typeface="Cambria Math" panose="02040503050406030204" pitchFamily="18" charset="0"/>
+                      </a:rPr>
+                      <m:t>×</m:t>
                     </m:r>
                     <m:sSup>
                       <m:sSupPr>
@@ -21239,7 +21240,13 @@
                           <a:rPr lang="en-US" sz="2800" b="0" i="1" smtClean="0">
                             <a:latin typeface="Cambria Math" panose="02040503050406030204" pitchFamily="18" charset="0"/>
                           </a:rPr>
-                          <m:t>−8</m:t>
+                          <m:t>−</m:t>
+                        </m:r>
+                        <m:r>
+                          <a:rPr lang="en-US" sz="2800" b="0" i="1" smtClean="0">
+                            <a:latin typeface="Cambria Math" panose="02040503050406030204" pitchFamily="18" charset="0"/>
+                          </a:rPr>
+                          <m:t>8</m:t>
                         </m:r>
                       </m:sup>
                     </m:sSup>
@@ -21255,7 +21262,7 @@
             </p:txBody>
           </p:sp>
         </mc:Choice>
-        <mc:Fallback>
+        <mc:Fallback xmlns="">
           <p:sp>
             <p:nvSpPr>
               <p:cNvPr id="4" name="Content Placeholder 3">
@@ -21764,7 +21771,21 @@
                         <a:latin typeface="Cambria Math" panose="02040503050406030204" pitchFamily="18" charset="0"/>
                         <a:ea typeface="Cambria Math" panose="02040503050406030204" pitchFamily="18" charset="0"/>
                       </a:rPr>
-                      <m:t>∞+∞</m:t>
+                      <m:t>∞</m:t>
+                    </m:r>
+                    <m:r>
+                      <a:rPr lang="en-US" i="1">
+                        <a:latin typeface="Cambria Math" panose="02040503050406030204" pitchFamily="18" charset="0"/>
+                        <a:ea typeface="Cambria Math" panose="02040503050406030204" pitchFamily="18" charset="0"/>
+                      </a:rPr>
+                      <m:t>+</m:t>
+                    </m:r>
+                    <m:r>
+                      <a:rPr lang="en-US" i="1">
+                        <a:latin typeface="Cambria Math" panose="02040503050406030204" pitchFamily="18" charset="0"/>
+                        <a:ea typeface="Cambria Math" panose="02040503050406030204" pitchFamily="18" charset="0"/>
+                      </a:rPr>
+                      <m:t>∞</m:t>
                     </m:r>
                   </m:oMath>
                 </a14:m>
@@ -22002,13 +22023,7 @@
                                 <a:rPr lang="en-US" sz="2800">
                                   <a:latin typeface="Cambria Math" panose="02040503050406030204" pitchFamily="18" charset="0"/>
                                 </a:rPr>
-                                <m:t>−</m:t>
-                              </m:r>
-                              <m:r>
-                                <a:rPr lang="en-US" sz="2800">
-                                  <a:latin typeface="Cambria Math" panose="02040503050406030204" pitchFamily="18" charset="0"/>
-                                </a:rPr>
-                                <m:t>1</m:t>
+                                <m:t>−1</m:t>
                               </m:r>
                             </m:e>
                           </m:d>
@@ -22064,16 +22079,7 @@
                               </a:solidFill>
                               <a:latin typeface="Cambria Math" panose="02040503050406030204" pitchFamily="18" charset="0"/>
                             </a:rPr>
-                            <m:t>−</m:t>
-                          </m:r>
-                          <m:r>
-                            <a:rPr lang="en-US" sz="2800">
-                              <a:solidFill>
-                                <a:srgbClr val="FF0000"/>
-                              </a:solidFill>
-                              <a:latin typeface="Cambria Math" panose="02040503050406030204" pitchFamily="18" charset="0"/>
-                            </a:rPr>
-                            <m:t>126</m:t>
+                            <m:t>−126</m:t>
                           </m:r>
                         </m:sup>
                       </m:sSup>
@@ -22176,13 +22182,7 @@
                                 <a:rPr lang="en-US" sz="2800">
                                   <a:latin typeface="Cambria Math" panose="02040503050406030204" pitchFamily="18" charset="0"/>
                                 </a:rPr>
-                                <m:t>−</m:t>
-                              </m:r>
-                              <m:r>
-                                <a:rPr lang="en-US" sz="2800">
-                                  <a:latin typeface="Cambria Math" panose="02040503050406030204" pitchFamily="18" charset="0"/>
-                                </a:rPr>
-                                <m:t>1</m:t>
+                                <m:t>−1</m:t>
                               </m:r>
                             </m:e>
                           </m:d>
@@ -22274,16 +22274,7 @@
                               </a:solidFill>
                               <a:latin typeface="Cambria Math" panose="02040503050406030204" pitchFamily="18" charset="0"/>
                             </a:rPr>
-                            <m:t>−</m:t>
-                          </m:r>
-                          <m:r>
-                            <a:rPr lang="en-US" sz="2800">
-                              <a:solidFill>
-                                <a:srgbClr val="FF0000"/>
-                              </a:solidFill>
-                              <a:latin typeface="Cambria Math" panose="02040503050406030204" pitchFamily="18" charset="0"/>
-                            </a:rPr>
-                            <m:t>12</m:t>
+                            <m:t>−12</m:t>
                           </m:r>
                           <m:r>
                             <a:rPr lang="en-US" sz="2800" i="1">
@@ -22494,19 +22485,7 @@
                             <a:rPr lang="en-US" sz="2400" i="1">
                               <a:latin typeface="Cambria Math"/>
                             </a:rPr>
-                            <m:t>(−</m:t>
-                          </m:r>
-                          <m:r>
-                            <a:rPr lang="en-US" sz="2400" i="1">
-                              <a:latin typeface="Cambria Math"/>
-                            </a:rPr>
-                            <m:t>1</m:t>
-                          </m:r>
-                          <m:r>
-                            <a:rPr lang="en-US" sz="2400" i="1">
-                              <a:latin typeface="Cambria Math"/>
-                            </a:rPr>
-                            <m:t>)</m:t>
+                            <m:t>(−1)</m:t>
                           </m:r>
                         </m:e>
                         <m:sup>
@@ -22537,19 +22516,7 @@
                             <a:rPr lang="en-US" sz="2400" i="1">
                               <a:latin typeface="Cambria Math"/>
                             </a:rPr>
-                            <m:t>1</m:t>
-                          </m:r>
-                          <m:r>
-                            <a:rPr lang="en-US" sz="2400" i="1">
-                              <a:latin typeface="Cambria Math"/>
-                            </a:rPr>
-                            <m:t>+</m:t>
-                          </m:r>
-                          <m:r>
-                            <a:rPr lang="en-US" sz="2400" i="1">
-                              <a:latin typeface="Cambria Math"/>
-                            </a:rPr>
-                            <m:t>0</m:t>
+                            <m:t>1+0</m:t>
                           </m:r>
                         </m:e>
                       </m:d>
@@ -22580,19 +22547,7 @@
                             <a:rPr lang="en-US" sz="2400" i="1">
                               <a:latin typeface="Cambria Math"/>
                             </a:rPr>
-                            <m:t>1</m:t>
-                          </m:r>
-                          <m:r>
-                            <a:rPr lang="en-US" sz="2400" i="1">
-                              <a:latin typeface="Cambria Math"/>
-                            </a:rPr>
-                            <m:t>−</m:t>
-                          </m:r>
-                          <m:r>
-                            <a:rPr lang="en-US" sz="2400" i="1">
-                              <a:latin typeface="Cambria Math"/>
-                            </a:rPr>
-                            <m:t>127</m:t>
+                            <m:t>1−127</m:t>
                           </m:r>
                         </m:sup>
                       </m:sSup>
@@ -22623,13 +22578,7 @@
                             <a:rPr lang="en-US" sz="2400" i="1">
                               <a:latin typeface="Cambria Math"/>
                             </a:rPr>
-                            <m:t>−</m:t>
-                          </m:r>
-                          <m:r>
-                            <a:rPr lang="en-US" sz="2400" i="1">
-                              <a:latin typeface="Cambria Math"/>
-                            </a:rPr>
-                            <m:t>126</m:t>
+                            <m:t>−126</m:t>
                           </m:r>
                         </m:sup>
                       </m:sSup>
@@ -22637,31 +22586,7 @@
                         <a:rPr lang="en-US" sz="2400" i="1">
                           <a:latin typeface="Cambria Math"/>
                         </a:rPr>
-                        <m:t>≈</m:t>
-                      </m:r>
-                      <m:r>
-                        <a:rPr lang="en-US" sz="2400" i="1">
-                          <a:latin typeface="Cambria Math"/>
-                        </a:rPr>
-                        <m:t>1</m:t>
-                      </m:r>
-                      <m:r>
-                        <a:rPr lang="en-US" sz="2400" i="1">
-                          <a:latin typeface="Cambria Math"/>
-                        </a:rPr>
-                        <m:t>.</m:t>
-                      </m:r>
-                      <m:r>
-                        <a:rPr lang="en-US" sz="2400" i="1">
-                          <a:latin typeface="Cambria Math"/>
-                        </a:rPr>
-                        <m:t>18</m:t>
-                      </m:r>
-                      <m:r>
-                        <a:rPr lang="en-US" sz="2400" i="1">
-                          <a:latin typeface="Cambria Math"/>
-                        </a:rPr>
-                        <m:t>×</m:t>
+                        <m:t>≈1.18×</m:t>
                       </m:r>
                       <m:sSup>
                         <m:sSupPr>
@@ -22684,13 +22609,7 @@
                             <a:rPr lang="en-US" sz="2400" i="1">
                               <a:latin typeface="Cambria Math"/>
                             </a:rPr>
-                            <m:t>−</m:t>
-                          </m:r>
-                          <m:r>
-                            <a:rPr lang="en-US" sz="2400" i="1">
-                              <a:latin typeface="Cambria Math"/>
-                            </a:rPr>
-                            <m:t>38</m:t>
+                            <m:t>−38</m:t>
                           </m:r>
                         </m:sup>
                       </m:sSup>
@@ -22970,19 +22889,7 @@
                             <a:rPr lang="en-US" sz="2400" i="1">
                               <a:latin typeface="Cambria Math"/>
                             </a:rPr>
-                            <m:t>(−</m:t>
-                          </m:r>
-                          <m:r>
-                            <a:rPr lang="en-US" sz="2400" i="1">
-                              <a:latin typeface="Cambria Math"/>
-                            </a:rPr>
-                            <m:t>1</m:t>
-                          </m:r>
-                          <m:r>
-                            <a:rPr lang="en-US" sz="2400" i="1">
-                              <a:latin typeface="Cambria Math"/>
-                            </a:rPr>
-                            <m:t>)</m:t>
+                            <m:t>(−1)</m:t>
                           </m:r>
                         </m:e>
                         <m:sup>
@@ -23081,19 +22988,7 @@
                             <a:rPr lang="en-US" sz="2400" i="1">
                               <a:latin typeface="Cambria Math"/>
                             </a:rPr>
-                            <m:t>1</m:t>
-                          </m:r>
-                          <m:r>
-                            <a:rPr lang="en-US" sz="2400" i="1">
-                              <a:latin typeface="Cambria Math"/>
-                            </a:rPr>
-                            <m:t>−</m:t>
-                          </m:r>
-                          <m:r>
-                            <a:rPr lang="en-US" sz="2400" i="1">
-                              <a:latin typeface="Cambria Math"/>
-                            </a:rPr>
-                            <m:t>127</m:t>
+                            <m:t>1−127</m:t>
                           </m:r>
                         </m:sup>
                       </m:sSup>
@@ -23124,13 +23019,7 @@
                             <a:rPr lang="en-US" sz="2400" i="1">
                               <a:latin typeface="Cambria Math"/>
                             </a:rPr>
-                            <m:t>−</m:t>
-                          </m:r>
-                          <m:r>
-                            <a:rPr lang="en-US" sz="2400" i="1">
-                              <a:latin typeface="Cambria Math"/>
-                            </a:rPr>
-                            <m:t>149</m:t>
+                            <m:t>−149</m:t>
                           </m:r>
                         </m:sup>
                       </m:sSup>
@@ -23138,19 +23027,7 @@
                         <a:rPr lang="en-US" sz="2400" i="1">
                           <a:latin typeface="Cambria Math"/>
                         </a:rPr>
-                        <m:t>≈</m:t>
-                      </m:r>
-                      <m:r>
-                        <a:rPr lang="en-US" sz="2400" i="1">
-                          <a:latin typeface="Cambria Math"/>
-                        </a:rPr>
-                        <m:t>1</m:t>
-                      </m:r>
-                      <m:r>
-                        <a:rPr lang="en-US" sz="2400" i="1">
-                          <a:latin typeface="Cambria Math"/>
-                        </a:rPr>
-                        <m:t>.</m:t>
+                        <m:t>≈1.</m:t>
                       </m:r>
                       <m:r>
                         <a:rPr lang="en-US" sz="2400" b="0" i="1" smtClean="0">
@@ -24430,6 +24307,167 @@
           <p:cNvPr id="2" name="Title 1">
             <a:extLst>
               <a:ext uri="{FF2B5EF4-FFF2-40B4-BE49-F238E27FC236}">
+                <a16:creationId xmlns:a16="http://schemas.microsoft.com/office/drawing/2014/main" id="{162E9A7F-FF94-CF8B-8F58-AA740C0B8A5F}"/>
+              </a:ext>
+            </a:extLst>
+          </p:cNvPr>
+          <p:cNvSpPr>
+            <a:spLocks noGrp="1"/>
+          </p:cNvSpPr>
+          <p:nvPr>
+            <p:ph type="title"/>
+          </p:nvPr>
+        </p:nvSpPr>
+        <p:spPr/>
+        <p:txBody>
+          <a:bodyPr>
+            <a:normAutofit/>
+          </a:bodyPr>
+          <a:lstStyle/>
+          <a:p>
+            <a:r>
+              <a:rPr lang="en-US" dirty="0"/>
+              <a:t>FP formats used in AI and machine learning</a:t>
+            </a:r>
+          </a:p>
+        </p:txBody>
+      </p:sp>
+      <p:sp>
+        <p:nvSpPr>
+          <p:cNvPr id="3" name="Slide Number Placeholder 2">
+            <a:extLst>
+              <a:ext uri="{FF2B5EF4-FFF2-40B4-BE49-F238E27FC236}">
+                <a16:creationId xmlns:a16="http://schemas.microsoft.com/office/drawing/2014/main" id="{EDFB585A-1E35-978A-1D8C-F85D9EA378A7}"/>
+              </a:ext>
+            </a:extLst>
+          </p:cNvPr>
+          <p:cNvSpPr>
+            <a:spLocks noGrp="1"/>
+          </p:cNvSpPr>
+          <p:nvPr>
+            <p:ph type="sldNum" sz="quarter" idx="12"/>
+          </p:nvPr>
+        </p:nvSpPr>
+        <p:spPr/>
+        <p:txBody>
+          <a:bodyPr/>
+          <a:lstStyle/>
+          <a:p>
+            <a:fld id="{EA7C8D44-3667-46F6-9772-CC52308E2A7F}" type="slidenum">
+              <a:rPr kumimoji="0" lang="en-US" smtClean="0"/>
+              <a:pPr/>
+              <a:t>27</a:t>
+            </a:fld>
+            <a:endParaRPr kumimoji="0" lang="en-US" dirty="0"/>
+          </a:p>
+        </p:txBody>
+      </p:sp>
+      <p:sp>
+        <p:nvSpPr>
+          <p:cNvPr id="4" name="Content Placeholder 3">
+            <a:extLst>
+              <a:ext uri="{FF2B5EF4-FFF2-40B4-BE49-F238E27FC236}">
+                <a16:creationId xmlns:a16="http://schemas.microsoft.com/office/drawing/2014/main" id="{1F04D77F-669A-A724-34EC-94F5C04F32A5}"/>
+              </a:ext>
+            </a:extLst>
+          </p:cNvPr>
+          <p:cNvSpPr>
+            <a:spLocks noGrp="1"/>
+          </p:cNvSpPr>
+          <p:nvPr>
+            <p:ph sz="quarter" idx="1"/>
+          </p:nvPr>
+        </p:nvSpPr>
+        <p:spPr>
+          <a:xfrm>
+            <a:off x="609600" y="1219200"/>
+            <a:ext cx="6096000" cy="4937760"/>
+          </a:xfrm>
+        </p:spPr>
+        <p:txBody>
+          <a:bodyPr>
+            <a:normAutofit/>
+          </a:bodyPr>
+          <a:lstStyle/>
+          <a:p>
+            <a:r>
+              <a:rPr lang="en-US" dirty="0"/>
+              <a:t>bf16 (bfloat16) and bf8 (bfloat8) are floating point formats used in AI and machine learning for efficient computation with lower precision while retaining useful range.</a:t>
+            </a:r>
+          </a:p>
+          <a:p>
+            <a:r>
+              <a:rPr lang="en-US" dirty="0"/>
+              <a:t>bf8 is cutting edge and experimental for very efficient AI deployment where accuracy can be slightly sacrificed for speed and lower memory footprints. bf16 is established as a good practical balance for many ML tasks</a:t>
+            </a:r>
+          </a:p>
+        </p:txBody>
+      </p:sp>
+      <p:pic>
+        <p:nvPicPr>
+          <p:cNvPr id="6" name="Picture 5">
+            <a:extLst>
+              <a:ext uri="{FF2B5EF4-FFF2-40B4-BE49-F238E27FC236}">
+                <a16:creationId xmlns:a16="http://schemas.microsoft.com/office/drawing/2014/main" id="{FFC9B12A-5BB4-5F2F-BCC2-1CB754290CEB}"/>
+              </a:ext>
+            </a:extLst>
+          </p:cNvPr>
+          <p:cNvPicPr>
+            <a:picLocks noChangeAspect="1"/>
+          </p:cNvPicPr>
+          <p:nvPr/>
+        </p:nvPicPr>
+        <p:blipFill>
+          <a:blip r:embed="rId3"/>
+          <a:stretch>
+            <a:fillRect/>
+          </a:stretch>
+        </p:blipFill>
+        <p:spPr>
+          <a:xfrm>
+            <a:off x="6705600" y="1219200"/>
+            <a:ext cx="5117613" cy="5243456"/>
+          </a:xfrm>
+          <a:prstGeom prst="rect">
+            <a:avLst/>
+          </a:prstGeom>
+        </p:spPr>
+      </p:pic>
+    </p:spTree>
+    <p:extLst>
+      <p:ext uri="{BB962C8B-B14F-4D97-AF65-F5344CB8AC3E}">
+        <p14:creationId xmlns:p14="http://schemas.microsoft.com/office/powerpoint/2010/main" val="4167531389"/>
+      </p:ext>
+    </p:extLst>
+  </p:cSld>
+  <p:clrMapOvr>
+    <a:masterClrMapping/>
+  </p:clrMapOvr>
+</p:sld>
+</file>
+
+<file path=ppt/slides/slide28.xml><?xml version="1.0" encoding="utf-8"?>
+<p:sld xmlns:a="http://schemas.openxmlformats.org/drawingml/2006/main" xmlns:r="http://schemas.openxmlformats.org/officeDocument/2006/relationships" xmlns:p="http://schemas.openxmlformats.org/presentationml/2006/main">
+  <p:cSld>
+    <p:spTree>
+      <p:nvGrpSpPr>
+        <p:cNvPr id="1" name=""/>
+        <p:cNvGrpSpPr/>
+        <p:nvPr/>
+      </p:nvGrpSpPr>
+      <p:grpSpPr>
+        <a:xfrm>
+          <a:off x="0" y="0"/>
+          <a:ext cx="0" cy="0"/>
+          <a:chOff x="0" y="0"/>
+          <a:chExt cx="0" cy="0"/>
+        </a:xfrm>
+      </p:grpSpPr>
+      <p:sp>
+        <p:nvSpPr>
+          <p:cNvPr id="2" name="Title 1">
+            <a:extLst>
+              <a:ext uri="{FF2B5EF4-FFF2-40B4-BE49-F238E27FC236}">
                 <a16:creationId xmlns:a16="http://schemas.microsoft.com/office/drawing/2014/main" id="{07C18DDC-948E-EE03-2F91-C42717B07826}"/>
               </a:ext>
             </a:extLst>
@@ -24477,7 +24515,7 @@
             <a:fld id="{EA7C8D44-3667-46F6-9772-CC52308E2A7F}" type="slidenum">
               <a:rPr kumimoji="0" lang="en-US" smtClean="0"/>
               <a:pPr/>
-              <a:t>27</a:t>
+              <a:t>28</a:t>
             </a:fld>
             <a:endParaRPr kumimoji="0" lang="en-US" dirty="0"/>
           </a:p>
@@ -24931,7 +24969,19 @@
                         <a:rPr lang="en-US" sz="2400">
                           <a:latin typeface="Cambria Math"/>
                         </a:rPr>
-                        <m:t>01.10</m:t>
+                        <m:t>01</m:t>
+                      </m:r>
+                      <m:r>
+                        <a:rPr lang="en-US" sz="2400">
+                          <a:latin typeface="Cambria Math"/>
+                        </a:rPr>
+                        <m:t>.</m:t>
+                      </m:r>
+                      <m:r>
+                        <a:rPr lang="en-US" sz="2400">
+                          <a:latin typeface="Cambria Math"/>
+                        </a:rPr>
+                        <m:t>10</m:t>
                       </m:r>
                       <m:sSub>
                         <m:sSubPr>
@@ -24954,7 +25004,13 @@
                             <a:rPr lang="en-US" sz="2400">
                               <a:latin typeface="Cambria Math"/>
                             </a:rPr>
-                            <m:t>2 </m:t>
+                            <m:t>2</m:t>
+                          </m:r>
+                          <m:r>
+                            <a:rPr lang="en-US" sz="2400">
+                              <a:latin typeface="Cambria Math"/>
+                            </a:rPr>
+                            <m:t> </m:t>
                           </m:r>
                         </m:sub>
                       </m:sSub>
@@ -25047,7 +25103,13 @@
                             <a:rPr lang="en-US" sz="2400" i="1">
                               <a:latin typeface="Cambria Math"/>
                             </a:rPr>
-                            <m:t>−3</m:t>
+                            <m:t>−</m:t>
+                          </m:r>
+                          <m:r>
+                            <a:rPr lang="en-US" sz="2400" i="1">
+                              <a:latin typeface="Cambria Math"/>
+                            </a:rPr>
+                            <m:t>3</m:t>
                           </m:r>
                         </m:sup>
                       </m:sSup>
@@ -25132,7 +25194,25 @@
                         <a:rPr lang="en-US" sz="2400">
                           <a:latin typeface="Cambria Math"/>
                         </a:rPr>
-                        <m:t>=21+5</m:t>
+                        <m:t>=</m:t>
+                      </m:r>
+                      <m:r>
+                        <a:rPr lang="en-US" sz="2400">
+                          <a:latin typeface="Cambria Math"/>
+                        </a:rPr>
+                        <m:t>21</m:t>
+                      </m:r>
+                      <m:r>
+                        <a:rPr lang="en-US" sz="2400">
+                          <a:latin typeface="Cambria Math"/>
+                        </a:rPr>
+                        <m:t>+</m:t>
+                      </m:r>
+                      <m:r>
+                        <a:rPr lang="en-US" sz="2400">
+                          <a:latin typeface="Cambria Math"/>
+                        </a:rPr>
+                        <m:t>5</m:t>
                       </m:r>
                       <m:r>
                         <a:rPr lang="en-US" sz="2400" i="1">
@@ -25161,7 +25241,13 @@
                             <a:rPr lang="en-US" sz="2400" i="1">
                               <a:latin typeface="Cambria Math"/>
                             </a:rPr>
-                            <m:t>−3</m:t>
+                            <m:t>−</m:t>
+                          </m:r>
+                          <m:r>
+                            <a:rPr lang="en-US" sz="2400" i="1">
+                              <a:latin typeface="Cambria Math"/>
+                            </a:rPr>
+                            <m:t>3</m:t>
                           </m:r>
                         </m:sup>
                       </m:sSup>
@@ -25246,7 +25332,25 @@
                         <a:rPr lang="en-US" sz="2400">
                           <a:latin typeface="Cambria Math"/>
                         </a:rPr>
-                        <m:t>=21.625</m:t>
+                        <m:t>=</m:t>
+                      </m:r>
+                      <m:r>
+                        <a:rPr lang="en-US" sz="2400">
+                          <a:latin typeface="Cambria Math"/>
+                        </a:rPr>
+                        <m:t>21</m:t>
+                      </m:r>
+                      <m:r>
+                        <a:rPr lang="en-US" sz="2400">
+                          <a:latin typeface="Cambria Math"/>
+                        </a:rPr>
+                        <m:t>.</m:t>
+                      </m:r>
+                      <m:r>
+                        <a:rPr lang="en-US" sz="2400">
+                          <a:latin typeface="Cambria Math"/>
+                        </a:rPr>
+                        <m:t>625</m:t>
                       </m:r>
                     </m:oMath>
                   </m:oMathPara>
@@ -29235,7 +29339,13 @@
                             <a:rPr lang="en-US" sz="2000">
                               <a:latin typeface="Cambria Math" panose="02040503050406030204" pitchFamily="18" charset="0"/>
                             </a:rPr>
-                            <m:t>2 </m:t>
+                            <m:t>2</m:t>
+                          </m:r>
+                          <m:r>
+                            <a:rPr lang="en-US" sz="2000">
+                              <a:latin typeface="Cambria Math" panose="02040503050406030204" pitchFamily="18" charset="0"/>
+                            </a:rPr>
+                            <m:t> </m:t>
                           </m:r>
                         </m:sub>
                       </m:sSub>
@@ -29327,7 +29437,13 @@
                             <a:rPr lang="en-US" sz="2000" i="1">
                               <a:latin typeface="Cambria Math" panose="02040503050406030204" pitchFamily="18" charset="0"/>
                             </a:rPr>
-                            <m:t>−83</m:t>
+                            <m:t>−</m:t>
+                          </m:r>
+                          <m:r>
+                            <a:rPr lang="en-US" sz="2000" i="1">
+                              <a:latin typeface="Cambria Math" panose="02040503050406030204" pitchFamily="18" charset="0"/>
+                            </a:rPr>
+                            <m:t>83</m:t>
                           </m:r>
                         </m:num>
                         <m:den>
@@ -29343,7 +29459,25 @@
                         <a:rPr lang="en-US" sz="2000" i="1">
                           <a:latin typeface="Cambria Math" panose="02040503050406030204" pitchFamily="18" charset="0"/>
                         </a:rPr>
-                        <m:t>=−10.375</m:t>
+                        <m:t>=−</m:t>
+                      </m:r>
+                      <m:r>
+                        <a:rPr lang="en-US" sz="2000" i="1">
+                          <a:latin typeface="Cambria Math" panose="02040503050406030204" pitchFamily="18" charset="0"/>
+                        </a:rPr>
+                        <m:t>10</m:t>
+                      </m:r>
+                      <m:r>
+                        <a:rPr lang="en-US" sz="2000" i="1">
+                          <a:latin typeface="Cambria Math" panose="02040503050406030204" pitchFamily="18" charset="0"/>
+                        </a:rPr>
+                        <m:t>.</m:t>
+                      </m:r>
+                      <m:r>
+                        <a:rPr lang="en-US" sz="2000" i="1">
+                          <a:latin typeface="Cambria Math" panose="02040503050406030204" pitchFamily="18" charset="0"/>
+                        </a:rPr>
+                        <m:t>375</m:t>
                       </m:r>
                     </m:oMath>
                   </m:oMathPara>
@@ -29828,7 +29962,13 @@
                             <a:rPr lang="en-US" sz="2000">
                               <a:latin typeface="Cambria Math" panose="02040503050406030204" pitchFamily="18" charset="0"/>
                             </a:rPr>
-                            <m:t>2 </m:t>
+                            <m:t>2</m:t>
+                          </m:r>
+                          <m:r>
+                            <a:rPr lang="en-US" sz="2000">
+                              <a:latin typeface="Cambria Math" panose="02040503050406030204" pitchFamily="18" charset="0"/>
+                            </a:rPr>
+                            <m:t> </m:t>
                           </m:r>
                         </m:sub>
                       </m:sSub>
@@ -30153,7 +30293,13 @@
                             <a:rPr lang="en-US" sz="2000">
                               <a:latin typeface="Cambria Math" panose="02040503050406030204" pitchFamily="18" charset="0"/>
                             </a:rPr>
-                            <m:t>−1</m:t>
+                            <m:t>−</m:t>
+                          </m:r>
+                          <m:r>
+                            <a:rPr lang="en-US" sz="2000">
+                              <a:latin typeface="Cambria Math" panose="02040503050406030204" pitchFamily="18" charset="0"/>
+                            </a:rPr>
+                            <m:t>1</m:t>
                           </m:r>
                         </m:sup>
                       </m:sSup>
@@ -30199,7 +30345,13 @@
                             <a:rPr lang="en-US" sz="2000">
                               <a:latin typeface="Cambria Math" panose="02040503050406030204" pitchFamily="18" charset="0"/>
                             </a:rPr>
-                            <m:t>−2</m:t>
+                            <m:t>−</m:t>
+                          </m:r>
+                          <m:r>
+                            <a:rPr lang="en-US" sz="2000">
+                              <a:latin typeface="Cambria Math" panose="02040503050406030204" pitchFamily="18" charset="0"/>
+                            </a:rPr>
+                            <m:t>2</m:t>
                           </m:r>
                         </m:sup>
                       </m:sSup>
@@ -30245,7 +30397,13 @@
                             <a:rPr lang="en-US" sz="2000">
                               <a:latin typeface="Cambria Math" panose="02040503050406030204" pitchFamily="18" charset="0"/>
                             </a:rPr>
-                            <m:t>−3</m:t>
+                            <m:t>−</m:t>
+                          </m:r>
+                          <m:r>
+                            <a:rPr lang="en-US" sz="2000">
+                              <a:latin typeface="Cambria Math" panose="02040503050406030204" pitchFamily="18" charset="0"/>
+                            </a:rPr>
+                            <m:t>3</m:t>
                           </m:r>
                         </m:sup>
                       </m:sSup>
@@ -30285,7 +30443,25 @@
                         <a:rPr lang="en-US" altLang="zh-CN" sz="2000">
                           <a:latin typeface="Cambria Math" panose="02040503050406030204" pitchFamily="18" charset="0"/>
                         </a:rPr>
-                        <m:t>−10.375</m:t>
+                        <m:t>−</m:t>
+                      </m:r>
+                      <m:r>
+                        <a:rPr lang="en-US" altLang="zh-CN" sz="2000">
+                          <a:latin typeface="Cambria Math" panose="02040503050406030204" pitchFamily="18" charset="0"/>
+                        </a:rPr>
+                        <m:t>10</m:t>
+                      </m:r>
+                      <m:r>
+                        <a:rPr lang="en-US" altLang="zh-CN" sz="2000">
+                          <a:latin typeface="Cambria Math" panose="02040503050406030204" pitchFamily="18" charset="0"/>
+                        </a:rPr>
+                        <m:t>.</m:t>
+                      </m:r>
+                      <m:r>
+                        <a:rPr lang="en-US" altLang="zh-CN" sz="2000">
+                          <a:latin typeface="Cambria Math" panose="02040503050406030204" pitchFamily="18" charset="0"/>
+                        </a:rPr>
+                        <m:t>375</m:t>
                       </m:r>
                     </m:oMath>
                   </m:oMathPara>
@@ -31076,7 +31252,19 @@
                         <a:rPr lang="en-US" sz="2400">
                           <a:latin typeface="Cambria Math"/>
                         </a:rPr>
-                        <m:t>01.10</m:t>
+                        <m:t>01</m:t>
+                      </m:r>
+                      <m:r>
+                        <a:rPr lang="en-US" sz="2400">
+                          <a:latin typeface="Cambria Math"/>
+                        </a:rPr>
+                        <m:t>.</m:t>
+                      </m:r>
+                      <m:r>
+                        <a:rPr lang="en-US" sz="2400">
+                          <a:latin typeface="Cambria Math"/>
+                        </a:rPr>
+                        <m:t>10</m:t>
                       </m:r>
                       <m:sSub>
                         <m:sSubPr>
@@ -31099,7 +31287,13 @@
                             <a:rPr lang="en-US" sz="2400">
                               <a:latin typeface="Cambria Math"/>
                             </a:rPr>
-                            <m:t>2 </m:t>
+                            <m:t>2</m:t>
+                          </m:r>
+                          <m:r>
+                            <a:rPr lang="en-US" sz="2400">
+                              <a:latin typeface="Cambria Math"/>
+                            </a:rPr>
+                            <m:t> </m:t>
                           </m:r>
                         </m:sub>
                       </m:sSub>
@@ -31192,7 +31386,13 @@
                             <a:rPr lang="en-US" sz="2400" i="1">
                               <a:latin typeface="Cambria Math"/>
                             </a:rPr>
-                            <m:t>−3</m:t>
+                            <m:t>−</m:t>
+                          </m:r>
+                          <m:r>
+                            <a:rPr lang="en-US" sz="2400" i="1">
+                              <a:latin typeface="Cambria Math"/>
+                            </a:rPr>
+                            <m:t>3</m:t>
                           </m:r>
                         </m:sup>
                       </m:sSup>
@@ -31289,7 +31489,25 @@
                         <a:rPr lang="en-US" sz="2400">
                           <a:latin typeface="Cambria Math"/>
                         </a:rPr>
-                        <m:t>=21+5</m:t>
+                        <m:t>=</m:t>
+                      </m:r>
+                      <m:r>
+                        <a:rPr lang="en-US" sz="2400">
+                          <a:latin typeface="Cambria Math"/>
+                        </a:rPr>
+                        <m:t>21</m:t>
+                      </m:r>
+                      <m:r>
+                        <a:rPr lang="en-US" sz="2400">
+                          <a:latin typeface="Cambria Math"/>
+                        </a:rPr>
+                        <m:t>+</m:t>
+                      </m:r>
+                      <m:r>
+                        <a:rPr lang="en-US" sz="2400">
+                          <a:latin typeface="Cambria Math"/>
+                        </a:rPr>
+                        <m:t>5</m:t>
                       </m:r>
                       <m:r>
                         <a:rPr lang="en-US" sz="2400" i="1">
@@ -31318,7 +31536,13 @@
                             <a:rPr lang="en-US" sz="2400" i="1">
                               <a:latin typeface="Cambria Math"/>
                             </a:rPr>
-                            <m:t>−3</m:t>
+                            <m:t>−</m:t>
+                          </m:r>
+                          <m:r>
+                            <a:rPr lang="en-US" sz="2400" i="1">
+                              <a:latin typeface="Cambria Math"/>
+                            </a:rPr>
+                            <m:t>3</m:t>
                           </m:r>
                         </m:sup>
                       </m:sSup>
@@ -31415,7 +31639,25 @@
                         <a:rPr lang="en-US" sz="2400">
                           <a:latin typeface="Cambria Math"/>
                         </a:rPr>
-                        <m:t>=21.625</m:t>
+                        <m:t>=</m:t>
+                      </m:r>
+                      <m:r>
+                        <a:rPr lang="en-US" sz="2400">
+                          <a:latin typeface="Cambria Math"/>
+                        </a:rPr>
+                        <m:t>21</m:t>
+                      </m:r>
+                      <m:r>
+                        <a:rPr lang="en-US" sz="2400">
+                          <a:latin typeface="Cambria Math"/>
+                        </a:rPr>
+                        <m:t>.</m:t>
+                      </m:r>
+                      <m:r>
+                        <a:rPr lang="en-US" sz="2400">
+                          <a:latin typeface="Cambria Math"/>
+                        </a:rPr>
+                        <m:t>625</m:t>
                       </m:r>
                     </m:oMath>
                   </m:oMathPara>
@@ -31516,7 +31758,19 @@
                         <a:rPr lang="en-US" sz="2400">
                           <a:latin typeface="Cambria Math"/>
                         </a:rPr>
-                        <m:t>01.10</m:t>
+                        <m:t>01</m:t>
+                      </m:r>
+                      <m:r>
+                        <a:rPr lang="en-US" sz="2400">
+                          <a:latin typeface="Cambria Math"/>
+                        </a:rPr>
+                        <m:t>.</m:t>
+                      </m:r>
+                      <m:r>
+                        <a:rPr lang="en-US" sz="2400">
+                          <a:latin typeface="Cambria Math"/>
+                        </a:rPr>
+                        <m:t>10</m:t>
                       </m:r>
                       <m:sSub>
                         <m:sSubPr>
@@ -31539,7 +31793,13 @@
                             <a:rPr lang="en-US" sz="2400">
                               <a:latin typeface="Cambria Math"/>
                             </a:rPr>
-                            <m:t>2 </m:t>
+                            <m:t>2</m:t>
+                          </m:r>
+                          <m:r>
+                            <a:rPr lang="en-US" sz="2400">
+                              <a:latin typeface="Cambria Math"/>
+                            </a:rPr>
+                            <m:t> </m:t>
                           </m:r>
                         </m:sub>
                       </m:sSub>
@@ -31632,7 +31892,13 @@
                             <a:rPr lang="en-US" sz="2400" i="1">
                               <a:latin typeface="Cambria Math"/>
                             </a:rPr>
-                            <m:t>−3</m:t>
+                            <m:t>−</m:t>
+                          </m:r>
+                          <m:r>
+                            <a:rPr lang="en-US" sz="2400" i="1">
+                              <a:latin typeface="Cambria Math"/>
+                            </a:rPr>
+                            <m:t>3</m:t>
                           </m:r>
                         </m:sup>
                       </m:sSup>
@@ -31735,13 +32001,25 @@
                         <a:rPr lang="en-US" sz="2400" b="0" i="0" smtClean="0">
                           <a:latin typeface="Cambria Math" panose="02040503050406030204" pitchFamily="18" charset="0"/>
                         </a:rPr>
-                        <m:t>−11</m:t>
+                        <m:t>−</m:t>
+                      </m:r>
+                      <m:r>
+                        <a:rPr lang="en-US" sz="2400" b="0" i="0" smtClean="0">
+                          <a:latin typeface="Cambria Math" panose="02040503050406030204" pitchFamily="18" charset="0"/>
+                        </a:rPr>
+                        <m:t>11</m:t>
                       </m:r>
                       <m:r>
                         <a:rPr lang="en-US" sz="2400">
                           <a:latin typeface="Cambria Math"/>
                         </a:rPr>
-                        <m:t>+5</m:t>
+                        <m:t>+</m:t>
+                      </m:r>
+                      <m:r>
+                        <a:rPr lang="en-US" sz="2400">
+                          <a:latin typeface="Cambria Math"/>
+                        </a:rPr>
+                        <m:t>5</m:t>
                       </m:r>
                       <m:r>
                         <a:rPr lang="en-US" sz="2400" i="1">
@@ -31770,7 +32048,13 @@
                             <a:rPr lang="en-US" sz="2400" i="1">
                               <a:latin typeface="Cambria Math"/>
                             </a:rPr>
-                            <m:t>−3</m:t>
+                            <m:t>−</m:t>
+                          </m:r>
+                          <m:r>
+                            <a:rPr lang="en-US" sz="2400" i="1">
+                              <a:latin typeface="Cambria Math"/>
+                            </a:rPr>
+                            <m:t>3</m:t>
                           </m:r>
                         </m:sup>
                       </m:sSup>
@@ -31873,7 +32157,25 @@
                         <a:rPr lang="en-US" sz="2400" b="0" i="0" smtClean="0">
                           <a:latin typeface="Cambria Math" panose="02040503050406030204" pitchFamily="18" charset="0"/>
                         </a:rPr>
-                        <m:t>−10.375</m:t>
+                        <m:t>−</m:t>
+                      </m:r>
+                      <m:r>
+                        <a:rPr lang="en-US" sz="2400" b="0" i="0" smtClean="0">
+                          <a:latin typeface="Cambria Math" panose="02040503050406030204" pitchFamily="18" charset="0"/>
+                        </a:rPr>
+                        <m:t>10</m:t>
+                      </m:r>
+                      <m:r>
+                        <a:rPr lang="en-US" sz="2400" b="0" i="0" smtClean="0">
+                          <a:latin typeface="Cambria Math" panose="02040503050406030204" pitchFamily="18" charset="0"/>
+                        </a:rPr>
+                        <m:t>.</m:t>
+                      </m:r>
+                      <m:r>
+                        <a:rPr lang="en-US" sz="2400" b="0" i="0" smtClean="0">
+                          <a:latin typeface="Cambria Math" panose="02040503050406030204" pitchFamily="18" charset="0"/>
+                        </a:rPr>
+                        <m:t>375</m:t>
                       </m:r>
                     </m:oMath>
                   </m:oMathPara>
@@ -32401,7 +32703,49 @@
                       <a:rPr lang="en-US" i="1">
                         <a:latin typeface="Cambria Math" panose="02040503050406030204" pitchFamily="18" charset="0"/>
                       </a:rPr>
-                      <m:t>=−16+4+1=−11</m:t>
+                      <m:t>=−</m:t>
+                    </m:r>
+                    <m:r>
+                      <a:rPr lang="en-US" i="1">
+                        <a:latin typeface="Cambria Math" panose="02040503050406030204" pitchFamily="18" charset="0"/>
+                      </a:rPr>
+                      <m:t>16</m:t>
+                    </m:r>
+                    <m:r>
+                      <a:rPr lang="en-US" i="1">
+                        <a:latin typeface="Cambria Math" panose="02040503050406030204" pitchFamily="18" charset="0"/>
+                      </a:rPr>
+                      <m:t>+</m:t>
+                    </m:r>
+                    <m:r>
+                      <a:rPr lang="en-US" i="1">
+                        <a:latin typeface="Cambria Math" panose="02040503050406030204" pitchFamily="18" charset="0"/>
+                      </a:rPr>
+                      <m:t>4</m:t>
+                    </m:r>
+                    <m:r>
+                      <a:rPr lang="en-US" i="1">
+                        <a:latin typeface="Cambria Math" panose="02040503050406030204" pitchFamily="18" charset="0"/>
+                      </a:rPr>
+                      <m:t>+</m:t>
+                    </m:r>
+                    <m:r>
+                      <a:rPr lang="en-US" i="1">
+                        <a:latin typeface="Cambria Math" panose="02040503050406030204" pitchFamily="18" charset="0"/>
+                      </a:rPr>
+                      <m:t>1</m:t>
+                    </m:r>
+                    <m:r>
+                      <a:rPr lang="en-US" i="1">
+                        <a:latin typeface="Cambria Math" panose="02040503050406030204" pitchFamily="18" charset="0"/>
+                      </a:rPr>
+                      <m:t>=−</m:t>
+                    </m:r>
+                    <m:r>
+                      <a:rPr lang="en-US" i="1">
+                        <a:latin typeface="Cambria Math" panose="02040503050406030204" pitchFamily="18" charset="0"/>
+                      </a:rPr>
+                      <m:t>11</m:t>
                     </m:r>
                   </m:oMath>
                 </a14:m>
@@ -32629,7 +32973,25 @@
                         </a:solidFill>
                         <a:latin typeface="Cambria Math" panose="02040503050406030204" pitchFamily="18" charset="0"/>
                       </a:rPr>
-                      <m:t>12867.964928</m:t>
+                      <m:t>12867</m:t>
+                    </m:r>
+                    <m:r>
+                      <a:rPr lang="en-US" sz="2200" i="1">
+                        <a:solidFill>
+                          <a:srgbClr val="0000FF"/>
+                        </a:solidFill>
+                        <a:latin typeface="Cambria Math" panose="02040503050406030204" pitchFamily="18" charset="0"/>
+                      </a:rPr>
+                      <m:t>.</m:t>
+                    </m:r>
+                    <m:r>
+                      <a:rPr lang="en-US" sz="2200" i="1">
+                        <a:solidFill>
+                          <a:srgbClr val="0000FF"/>
+                        </a:solidFill>
+                        <a:latin typeface="Cambria Math" panose="02040503050406030204" pitchFamily="18" charset="0"/>
+                      </a:rPr>
+                      <m:t>964928</m:t>
                     </m:r>
                   </m:oMath>
                 </a14:m>
@@ -32665,7 +33027,19 @@
                           <a:rPr lang="en-US" sz="2200" i="1">
                             <a:latin typeface="Cambria Math" panose="02040503050406030204" pitchFamily="18" charset="0"/>
                           </a:rPr>
-                          <m:t>12867.964928</m:t>
+                          <m:t>12867</m:t>
+                        </m:r>
+                        <m:r>
+                          <a:rPr lang="en-US" sz="2200" i="1">
+                            <a:latin typeface="Cambria Math" panose="02040503050406030204" pitchFamily="18" charset="0"/>
+                          </a:rPr>
+                          <m:t>.</m:t>
+                        </m:r>
+                        <m:r>
+                          <a:rPr lang="en-US" sz="2200" i="1">
+                            <a:latin typeface="Cambria Math" panose="02040503050406030204" pitchFamily="18" charset="0"/>
+                          </a:rPr>
+                          <m:t>964928</m:t>
                         </m:r>
                         <m:r>
                           <a:rPr lang="en-US" sz="2200">
@@ -32844,7 +33218,31 @@
                       <a:rPr lang="en-US" sz="2200" i="1">
                         <a:latin typeface="Cambria Math" panose="02040503050406030204" pitchFamily="18" charset="0"/>
                       </a:rPr>
-                      <m:t>=8.5625×</m:t>
+                      <m:t>=</m:t>
+                    </m:r>
+                    <m:r>
+                      <a:rPr lang="en-US" sz="2200" i="1">
+                        <a:latin typeface="Cambria Math" panose="02040503050406030204" pitchFamily="18" charset="0"/>
+                      </a:rPr>
+                      <m:t>8</m:t>
+                    </m:r>
+                    <m:r>
+                      <a:rPr lang="en-US" sz="2200" i="1">
+                        <a:latin typeface="Cambria Math" panose="02040503050406030204" pitchFamily="18" charset="0"/>
+                      </a:rPr>
+                      <m:t>.</m:t>
+                    </m:r>
+                    <m:r>
+                      <a:rPr lang="en-US" sz="2200" i="1">
+                        <a:latin typeface="Cambria Math" panose="02040503050406030204" pitchFamily="18" charset="0"/>
+                      </a:rPr>
+                      <m:t>5625</m:t>
+                    </m:r>
+                    <m:r>
+                      <a:rPr lang="en-US" sz="2200" i="1">
+                        <a:latin typeface="Cambria Math" panose="02040503050406030204" pitchFamily="18" charset="0"/>
+                      </a:rPr>
+                      <m:t>×</m:t>
                     </m:r>
                     <m:sSup>
                       <m:sSupPr>
@@ -32867,7 +33265,13 @@
                           <a:rPr lang="en-US" sz="2200" i="1">
                             <a:latin typeface="Cambria Math" panose="02040503050406030204" pitchFamily="18" charset="0"/>
                           </a:rPr>
-                          <m:t>−6</m:t>
+                          <m:t>−</m:t>
+                        </m:r>
+                        <m:r>
+                          <a:rPr lang="en-US" sz="2200" i="1">
+                            <a:latin typeface="Cambria Math" panose="02040503050406030204" pitchFamily="18" charset="0"/>
+                          </a:rPr>
+                          <m:t>6</m:t>
                         </m:r>
                       </m:sup>
                     </m:sSup>
@@ -32958,7 +33362,31 @@
                       <a:rPr lang="en-US" sz="2400">
                         <a:latin typeface="Cambria Math" panose="02040503050406030204" pitchFamily="18" charset="0"/>
                       </a:rPr>
-                      <m:t> = 3. 141593 </m:t>
+                      <m:t> = </m:t>
+                    </m:r>
+                    <m:r>
+                      <a:rPr lang="en-US" sz="2400">
+                        <a:latin typeface="Cambria Math" panose="02040503050406030204" pitchFamily="18" charset="0"/>
+                      </a:rPr>
+                      <m:t>3</m:t>
+                    </m:r>
+                    <m:r>
+                      <a:rPr lang="en-US" sz="2400">
+                        <a:latin typeface="Cambria Math" panose="02040503050406030204" pitchFamily="18" charset="0"/>
+                      </a:rPr>
+                      <m:t>. </m:t>
+                    </m:r>
+                    <m:r>
+                      <a:rPr lang="en-US" sz="2400">
+                        <a:latin typeface="Cambria Math" panose="02040503050406030204" pitchFamily="18" charset="0"/>
+                      </a:rPr>
+                      <m:t>141593</m:t>
+                    </m:r>
+                    <m:r>
+                      <a:rPr lang="en-US" sz="2400">
+                        <a:latin typeface="Cambria Math" panose="02040503050406030204" pitchFamily="18" charset="0"/>
+                      </a:rPr>
+                      <m:t> </m:t>
                     </m:r>
                   </m:oMath>
                 </a14:m>

--- a/PPTs/Ch12_13_Fixed_Floating_Point_Numbers.pptx
+++ b/PPTs/Ch12_13_Fixed_Floating_Point_Numbers.pptx
@@ -5,10 +5,10 @@
     <p:sldMasterId id="2147483660" r:id="rId1"/>
   </p:sldMasterIdLst>
   <p:notesMasterIdLst>
-    <p:notesMasterId r:id="rId30"/>
+    <p:notesMasterId r:id="rId31"/>
   </p:notesMasterIdLst>
   <p:handoutMasterIdLst>
-    <p:handoutMasterId r:id="rId31"/>
+    <p:handoutMasterId r:id="rId32"/>
   </p:handoutMasterIdLst>
   <p:sldIdLst>
     <p:sldId id="734" r:id="rId2"/>
@@ -24,21 +24,22 @@
     <p:sldId id="280" r:id="rId12"/>
     <p:sldId id="259" r:id="rId13"/>
     <p:sldId id="261" r:id="rId14"/>
-    <p:sldId id="736" r:id="rId15"/>
-    <p:sldId id="281" r:id="rId16"/>
-    <p:sldId id="282" r:id="rId17"/>
-    <p:sldId id="284" r:id="rId18"/>
-    <p:sldId id="267" r:id="rId19"/>
-    <p:sldId id="739" r:id="rId20"/>
-    <p:sldId id="741" r:id="rId21"/>
-    <p:sldId id="277" r:id="rId22"/>
-    <p:sldId id="278" r:id="rId23"/>
-    <p:sldId id="737" r:id="rId24"/>
-    <p:sldId id="268" r:id="rId25"/>
-    <p:sldId id="258" r:id="rId26"/>
-    <p:sldId id="732" r:id="rId27"/>
-    <p:sldId id="742" r:id="rId28"/>
-    <p:sldId id="738" r:id="rId29"/>
+    <p:sldId id="743" r:id="rId15"/>
+    <p:sldId id="736" r:id="rId16"/>
+    <p:sldId id="281" r:id="rId17"/>
+    <p:sldId id="282" r:id="rId18"/>
+    <p:sldId id="284" r:id="rId19"/>
+    <p:sldId id="267" r:id="rId20"/>
+    <p:sldId id="739" r:id="rId21"/>
+    <p:sldId id="741" r:id="rId22"/>
+    <p:sldId id="277" r:id="rId23"/>
+    <p:sldId id="278" r:id="rId24"/>
+    <p:sldId id="737" r:id="rId25"/>
+    <p:sldId id="268" r:id="rId26"/>
+    <p:sldId id="258" r:id="rId27"/>
+    <p:sldId id="732" r:id="rId28"/>
+    <p:sldId id="742" r:id="rId29"/>
+    <p:sldId id="738" r:id="rId30"/>
   </p:sldIdLst>
   <p:sldSz cx="12192000" cy="6858000"/>
   <p:notesSz cx="6858000" cy="9144000"/>
@@ -159,7 +160,7 @@
 <file path=ppt/revisionInfo.xml><?xml version="1.0" encoding="utf-8"?>
 <p1510:revInfo xmlns:a="http://schemas.openxmlformats.org/drawingml/2006/main" xmlns:r="http://schemas.openxmlformats.org/officeDocument/2006/relationships" xmlns:p1510="http://schemas.microsoft.com/office/powerpoint/2015/10/main">
   <p1510:revLst>
-    <p1510:client id="{67564324-3CBA-4E84-95E9-F69DCA3B5F12}" v="408" dt="2025-10-12T18:48:07.839"/>
+    <p1510:client id="{67564324-3CBA-4E84-95E9-F69DCA3B5F12}" v="426" dt="2025-10-17T23:35:08.628"/>
   </p1510:revLst>
 </p1510:revInfo>
 </file>
@@ -169,7 +170,7 @@
   <pc:docChgLst>
     <pc:chgData name="Zonghua Gu" userId="9a7e1853e1951ef5" providerId="LiveId" clId="{CF1FAA12-072C-4ED5-BA76-0FFFAEFDB88A}"/>
     <pc:docChg chg="undo custSel addSld delSld modSld sldOrd">
-      <pc:chgData name="Zonghua Gu" userId="9a7e1853e1951ef5" providerId="LiveId" clId="{CF1FAA12-072C-4ED5-BA76-0FFFAEFDB88A}" dt="2025-10-12T18:47:22.216" v="981" actId="20577"/>
+      <pc:chgData name="Zonghua Gu" userId="9a7e1853e1951ef5" providerId="LiveId" clId="{CF1FAA12-072C-4ED5-BA76-0FFFAEFDB88A}" dt="2025-10-17T23:34:43.244" v="1160" actId="20577"/>
       <pc:docMkLst>
         <pc:docMk/>
       </pc:docMkLst>
@@ -223,7 +224,7 @@
         </pc:sldMkLst>
       </pc:sldChg>
       <pc:sldChg chg="modSp add mod">
-        <pc:chgData name="Zonghua Gu" userId="9a7e1853e1951ef5" providerId="LiveId" clId="{CF1FAA12-072C-4ED5-BA76-0FFFAEFDB88A}" dt="2025-10-05T02:00:36.495" v="581" actId="20577"/>
+        <pc:chgData name="Zonghua Gu" userId="9a7e1853e1951ef5" providerId="LiveId" clId="{CF1FAA12-072C-4ED5-BA76-0FFFAEFDB88A}" dt="2025-10-17T23:22:59.711" v="1012" actId="20577"/>
         <pc:sldMkLst>
           <pc:docMk/>
           <pc:sldMk cId="2669434976" sldId="261"/>
@@ -237,7 +238,7 @@
           </ac:spMkLst>
         </pc:spChg>
         <pc:spChg chg="mod">
-          <ac:chgData name="Zonghua Gu" userId="9a7e1853e1951ef5" providerId="LiveId" clId="{CF1FAA12-072C-4ED5-BA76-0FFFAEFDB88A}" dt="2025-10-05T01:06:57.698" v="512" actId="207"/>
+          <ac:chgData name="Zonghua Gu" userId="9a7e1853e1951ef5" providerId="LiveId" clId="{CF1FAA12-072C-4ED5-BA76-0FFFAEFDB88A}" dt="2025-10-17T23:22:59.711" v="1012" actId="20577"/>
           <ac:spMkLst>
             <pc:docMk/>
             <pc:sldMk cId="2669434976" sldId="261"/>
@@ -737,6 +738,45 @@
             <ac:picMk id="6" creationId="{FFC9B12A-5BB4-5F2F-BCC2-1CB754290CEB}"/>
           </ac:picMkLst>
         </pc:picChg>
+      </pc:sldChg>
+      <pc:sldChg chg="addSp delSp modSp new mod">
+        <pc:chgData name="Zonghua Gu" userId="9a7e1853e1951ef5" providerId="LiveId" clId="{CF1FAA12-072C-4ED5-BA76-0FFFAEFDB88A}" dt="2025-10-17T23:34:43.244" v="1160" actId="20577"/>
+        <pc:sldMkLst>
+          <pc:docMk/>
+          <pc:sldMk cId="3892365445" sldId="743"/>
+        </pc:sldMkLst>
+        <pc:spChg chg="mod">
+          <ac:chgData name="Zonghua Gu" userId="9a7e1853e1951ef5" providerId="LiveId" clId="{CF1FAA12-072C-4ED5-BA76-0FFFAEFDB88A}" dt="2025-10-17T23:34:43.244" v="1160" actId="20577"/>
+          <ac:spMkLst>
+            <pc:docMk/>
+            <pc:sldMk cId="3892365445" sldId="743"/>
+            <ac:spMk id="2" creationId="{96369424-0102-7D10-CA3C-02B3C0033DF2}"/>
+          </ac:spMkLst>
+        </pc:spChg>
+        <pc:spChg chg="add del mod">
+          <ac:chgData name="Zonghua Gu" userId="9a7e1853e1951ef5" providerId="LiveId" clId="{CF1FAA12-072C-4ED5-BA76-0FFFAEFDB88A}" dt="2025-10-17T23:34:33.960" v="1138" actId="20577"/>
+          <ac:spMkLst>
+            <pc:docMk/>
+            <pc:sldMk cId="3892365445" sldId="743"/>
+            <ac:spMk id="4" creationId="{F6E9C26C-00C6-ED10-C2C9-02E0EBAC4C6B}"/>
+          </ac:spMkLst>
+        </pc:spChg>
+        <pc:spChg chg="add mod">
+          <ac:chgData name="Zonghua Gu" userId="9a7e1853e1951ef5" providerId="LiveId" clId="{CF1FAA12-072C-4ED5-BA76-0FFFAEFDB88A}" dt="2025-10-17T23:26:15.282" v="1015"/>
+          <ac:spMkLst>
+            <pc:docMk/>
+            <pc:sldMk cId="3892365445" sldId="743"/>
+            <ac:spMk id="5" creationId="{496DB7AA-C6C0-5837-FFD9-46E0944C5621}"/>
+          </ac:spMkLst>
+        </pc:spChg>
+        <pc:spChg chg="add">
+          <ac:chgData name="Zonghua Gu" userId="9a7e1853e1951ef5" providerId="LiveId" clId="{CF1FAA12-072C-4ED5-BA76-0FFFAEFDB88A}" dt="2025-10-17T23:28:44.905" v="1051"/>
+          <ac:spMkLst>
+            <pc:docMk/>
+            <pc:sldMk cId="3892365445" sldId="743"/>
+            <ac:spMk id="6" creationId="{64515890-1ED2-3082-1CA4-FAACF1D35E86}"/>
+          </ac:spMkLst>
+        </pc:spChg>
       </pc:sldChg>
     </pc:docChg>
   </pc:docChgLst>
@@ -6764,7 +6804,7 @@
             <a:fld id="{BD4F56A7-3CDE-194F-B9AF-D598FBBF1989}" type="datetimeFigureOut">
               <a:rPr lang="en-US" smtClean="0"/>
               <a:pPr/>
-              <a:t>10/12/2025</a:t>
+              <a:t>10/17/2025</a:t>
             </a:fld>
             <a:endParaRPr lang="en-US"/>
           </a:p>
@@ -6932,7 +6972,7 @@
             <a:fld id="{1E52AD58-60CE-E948-9CBA-0BD7030FC28E}" type="datetimeFigureOut">
               <a:rPr lang="en-US" smtClean="0"/>
               <a:pPr/>
-              <a:t>10/12/2025</a:t>
+              <a:t>10/17/2025</a:t>
             </a:fld>
             <a:endParaRPr lang="en-US"/>
           </a:p>
@@ -7293,6 +7333,206 @@
 </p:notes>
 </file>
 
+<file path=ppt/notesSlides/notesSlide10.xml><?xml version="1.0" encoding="utf-8"?>
+<p:notes xmlns:a="http://schemas.openxmlformats.org/drawingml/2006/main" xmlns:r="http://schemas.openxmlformats.org/officeDocument/2006/relationships" xmlns:p="http://schemas.openxmlformats.org/presentationml/2006/main">
+  <p:cSld>
+    <p:spTree>
+      <p:nvGrpSpPr>
+        <p:cNvPr id="1" name=""/>
+        <p:cNvGrpSpPr/>
+        <p:nvPr/>
+      </p:nvGrpSpPr>
+      <p:grpSpPr>
+        <a:xfrm>
+          <a:off x="0" y="0"/>
+          <a:ext cx="0" cy="0"/>
+          <a:chOff x="0" y="0"/>
+          <a:chExt cx="0" cy="0"/>
+        </a:xfrm>
+      </p:grpSpPr>
+      <p:sp>
+        <p:nvSpPr>
+          <p:cNvPr id="2" name="Slide Image Placeholder 1"/>
+          <p:cNvSpPr>
+            <a:spLocks noGrp="1" noRot="1" noChangeAspect="1"/>
+          </p:cNvSpPr>
+          <p:nvPr>
+            <p:ph type="sldImg"/>
+          </p:nvPr>
+        </p:nvSpPr>
+        <p:spPr/>
+      </p:sp>
+      <p:sp>
+        <p:nvSpPr>
+          <p:cNvPr id="3" name="Notes Placeholder 2"/>
+          <p:cNvSpPr>
+            <a:spLocks noGrp="1"/>
+          </p:cNvSpPr>
+          <p:nvPr>
+            <p:ph type="body" idx="1"/>
+          </p:nvPr>
+        </p:nvSpPr>
+        <p:spPr/>
+        <p:txBody>
+          <a:bodyPr/>
+          <a:lstStyle/>
+          <a:p>
+            <a:pPr marL="0" marR="0" lvl="0" indent="0" algn="l" defTabSz="457200" rtl="0" eaLnBrk="1" fontAlgn="auto" latinLnBrk="0" hangingPunct="1">
+              <a:lnSpc>
+                <a:spcPct val="100000"/>
+              </a:lnSpc>
+              <a:spcBef>
+                <a:spcPts val="0"/>
+              </a:spcBef>
+              <a:spcAft>
+                <a:spcPts val="0"/>
+              </a:spcAft>
+              <a:buClrTx/>
+              <a:buSzTx/>
+              <a:buFontTx/>
+              <a:buNone/>
+              <a:tabLst/>
+              <a:defRPr/>
+            </a:pPr>
+            <a:r>
+              <a:rPr lang="en-US" b="1" dirty="0">
+                <a:solidFill>
+                  <a:srgbClr val="C00000"/>
+                </a:solidFill>
+              </a:rPr>
+              <a:t>Numbers farthest from zero</a:t>
+            </a:r>
+          </a:p>
+          <a:p>
+            <a:endParaRPr lang="en-US" dirty="0"/>
+          </a:p>
+        </p:txBody>
+      </p:sp>
+      <p:sp>
+        <p:nvSpPr>
+          <p:cNvPr id="4" name="Slide Number Placeholder 3"/>
+          <p:cNvSpPr>
+            <a:spLocks noGrp="1"/>
+          </p:cNvSpPr>
+          <p:nvPr>
+            <p:ph type="sldNum" sz="quarter" idx="5"/>
+          </p:nvPr>
+        </p:nvSpPr>
+        <p:spPr/>
+        <p:txBody>
+          <a:bodyPr/>
+          <a:lstStyle/>
+          <a:p>
+            <a:fld id="{D624DF53-3DD3-9F45-9E7E-472B96F1AB81}" type="slidenum">
+              <a:rPr lang="en-US" smtClean="0"/>
+              <a:pPr/>
+              <a:t>25</a:t>
+            </a:fld>
+            <a:endParaRPr lang="en-US"/>
+          </a:p>
+        </p:txBody>
+      </p:sp>
+    </p:spTree>
+    <p:extLst>
+      <p:ext uri="{BB962C8B-B14F-4D97-AF65-F5344CB8AC3E}">
+        <p14:creationId xmlns:p14="http://schemas.microsoft.com/office/powerpoint/2010/main" val="3727935292"/>
+      </p:ext>
+    </p:extLst>
+  </p:cSld>
+  <p:clrMapOvr>
+    <a:masterClrMapping/>
+  </p:clrMapOvr>
+</p:notes>
+</file>
+
+<file path=ppt/notesSlides/notesSlide11.xml><?xml version="1.0" encoding="utf-8"?>
+<p:notes xmlns:a="http://schemas.openxmlformats.org/drawingml/2006/main" xmlns:r="http://schemas.openxmlformats.org/officeDocument/2006/relationships" xmlns:p="http://schemas.openxmlformats.org/presentationml/2006/main">
+  <p:cSld>
+    <p:spTree>
+      <p:nvGrpSpPr>
+        <p:cNvPr id="1" name=""/>
+        <p:cNvGrpSpPr/>
+        <p:nvPr/>
+      </p:nvGrpSpPr>
+      <p:grpSpPr>
+        <a:xfrm>
+          <a:off x="0" y="0"/>
+          <a:ext cx="0" cy="0"/>
+          <a:chOff x="0" y="0"/>
+          <a:chExt cx="0" cy="0"/>
+        </a:xfrm>
+      </p:grpSpPr>
+      <p:sp>
+        <p:nvSpPr>
+          <p:cNvPr id="2" name="Slide Image Placeholder 1"/>
+          <p:cNvSpPr>
+            <a:spLocks noGrp="1" noRot="1" noChangeAspect="1"/>
+          </p:cNvSpPr>
+          <p:nvPr>
+            <p:ph type="sldImg"/>
+          </p:nvPr>
+        </p:nvSpPr>
+        <p:spPr/>
+      </p:sp>
+      <p:sp>
+        <p:nvSpPr>
+          <p:cNvPr id="3" name="Notes Placeholder 2"/>
+          <p:cNvSpPr>
+            <a:spLocks noGrp="1"/>
+          </p:cNvSpPr>
+          <p:nvPr>
+            <p:ph type="body" idx="1"/>
+          </p:nvPr>
+        </p:nvSpPr>
+        <p:spPr/>
+        <p:txBody>
+          <a:bodyPr/>
+          <a:lstStyle/>
+          <a:p>
+            <a:r>
+              <a:rPr lang="en-US"/>
+              <a:t>https://www.edge-ai-vision.com/2025/08/introduction-to-data-types-for-ai-trade-offs-and-trends-a-presentation-from-synopsys/</a:t>
+            </a:r>
+          </a:p>
+        </p:txBody>
+      </p:sp>
+      <p:sp>
+        <p:nvSpPr>
+          <p:cNvPr id="4" name="Slide Number Placeholder 3"/>
+          <p:cNvSpPr>
+            <a:spLocks noGrp="1"/>
+          </p:cNvSpPr>
+          <p:nvPr>
+            <p:ph type="sldNum" sz="quarter" idx="5"/>
+          </p:nvPr>
+        </p:nvSpPr>
+        <p:spPr/>
+        <p:txBody>
+          <a:bodyPr/>
+          <a:lstStyle/>
+          <a:p>
+            <a:fld id="{D624DF53-3DD3-9F45-9E7E-472B96F1AB81}" type="slidenum">
+              <a:rPr lang="en-US" smtClean="0"/>
+              <a:pPr/>
+              <a:t>28</a:t>
+            </a:fld>
+            <a:endParaRPr lang="en-US"/>
+          </a:p>
+        </p:txBody>
+      </p:sp>
+    </p:spTree>
+    <p:extLst>
+      <p:ext uri="{BB962C8B-B14F-4D97-AF65-F5344CB8AC3E}">
+        <p14:creationId xmlns:p14="http://schemas.microsoft.com/office/powerpoint/2010/main" val="706307618"/>
+      </p:ext>
+    </p:extLst>
+  </p:cSld>
+  <p:clrMapOvr>
+    <a:masterClrMapping/>
+  </p:clrMapOvr>
+</p:notes>
+</file>
+
 <file path=ppt/notesSlides/notesSlide2.xml><?xml version="1.0" encoding="utf-8"?>
 <p:notes xmlns:a="http://schemas.openxmlformats.org/drawingml/2006/main" xmlns:r="http://schemas.openxmlformats.org/officeDocument/2006/relationships" xmlns:p="http://schemas.openxmlformats.org/presentationml/2006/main">
   <p:cSld>
@@ -7427,6 +7667,166 @@
           <a:bodyPr/>
           <a:lstStyle/>
           <a:p>
+            <a:r>
+              <a:rPr lang="en-US" dirty="0"/>
+              <a:t>https://mp.weixin.qq.com/s/LQgPT8opkjjZzbn0nUevUw</a:t>
+            </a:r>
+          </a:p>
+        </p:txBody>
+      </p:sp>
+      <p:sp>
+        <p:nvSpPr>
+          <p:cNvPr id="4" name="Slide Number Placeholder 3"/>
+          <p:cNvSpPr>
+            <a:spLocks noGrp="1"/>
+          </p:cNvSpPr>
+          <p:nvPr>
+            <p:ph type="sldNum" sz="quarter" idx="5"/>
+          </p:nvPr>
+        </p:nvSpPr>
+        <p:spPr/>
+        <p:txBody>
+          <a:bodyPr/>
+          <a:lstStyle/>
+          <a:p>
+            <a:fld id="{D624DF53-3DD3-9F45-9E7E-472B96F1AB81}" type="slidenum">
+              <a:rPr lang="en-US" smtClean="0"/>
+              <a:pPr/>
+              <a:t>13</a:t>
+            </a:fld>
+            <a:endParaRPr lang="en-US"/>
+          </a:p>
+        </p:txBody>
+      </p:sp>
+    </p:spTree>
+    <p:extLst>
+      <p:ext uri="{BB962C8B-B14F-4D97-AF65-F5344CB8AC3E}">
+        <p14:creationId xmlns:p14="http://schemas.microsoft.com/office/powerpoint/2010/main" val="3267956291"/>
+      </p:ext>
+    </p:extLst>
+  </p:cSld>
+  <p:clrMapOvr>
+    <a:masterClrMapping/>
+  </p:clrMapOvr>
+</p:notes>
+</file>
+
+<file path=ppt/notesSlides/notesSlide4.xml><?xml version="1.0" encoding="utf-8"?>
+<p:notes xmlns:a="http://schemas.openxmlformats.org/drawingml/2006/main" xmlns:r="http://schemas.openxmlformats.org/officeDocument/2006/relationships" xmlns:p="http://schemas.openxmlformats.org/presentationml/2006/main">
+  <p:cSld>
+    <p:spTree>
+      <p:nvGrpSpPr>
+        <p:cNvPr id="1" name=""/>
+        <p:cNvGrpSpPr/>
+        <p:nvPr/>
+      </p:nvGrpSpPr>
+      <p:grpSpPr>
+        <a:xfrm>
+          <a:off x="0" y="0"/>
+          <a:ext cx="0" cy="0"/>
+          <a:chOff x="0" y="0"/>
+          <a:chExt cx="0" cy="0"/>
+        </a:xfrm>
+      </p:grpSpPr>
+      <p:sp>
+        <p:nvSpPr>
+          <p:cNvPr id="2" name="Slide Image Placeholder 1"/>
+          <p:cNvSpPr>
+            <a:spLocks noGrp="1" noRot="1" noChangeAspect="1"/>
+          </p:cNvSpPr>
+          <p:nvPr>
+            <p:ph type="sldImg"/>
+          </p:nvPr>
+        </p:nvSpPr>
+        <p:spPr/>
+      </p:sp>
+      <p:sp>
+        <p:nvSpPr>
+          <p:cNvPr id="3" name="Notes Placeholder 2"/>
+          <p:cNvSpPr>
+            <a:spLocks noGrp="1"/>
+          </p:cNvSpPr>
+          <p:nvPr>
+            <p:ph type="body" idx="1"/>
+          </p:nvPr>
+        </p:nvSpPr>
+        <p:spPr/>
+        <p:txBody>
+          <a:bodyPr/>
+          <a:lstStyle/>
+          <a:p>
+            <a:r>
+              <a:rPr lang="en-US" altLang="zh-CN" sz="1200" b="0" i="0" kern="1200" dirty="0">
+                <a:solidFill>
+                  <a:schemeClr val="tx1"/>
+                </a:solidFill>
+                <a:effectLst/>
+                <a:latin typeface="+mn-lt"/>
+                <a:ea typeface="+mn-ea"/>
+                <a:cs typeface="+mn-cs"/>
+              </a:rPr>
+              <a:t>8</a:t>
+            </a:r>
+            <a:r>
+              <a:rPr lang="zh-CN" altLang="en-US" sz="1200" b="0" i="0" kern="1200" dirty="0">
+                <a:solidFill>
+                  <a:schemeClr val="tx1"/>
+                </a:solidFill>
+                <a:effectLst/>
+                <a:latin typeface="+mn-lt"/>
+                <a:ea typeface="+mn-ea"/>
+                <a:cs typeface="+mn-cs"/>
+              </a:rPr>
+              <a:t>位有符号整数的范围是 </a:t>
+            </a:r>
+            <a:r>
+              <a:rPr lang="en-US" altLang="zh-CN" sz="1200" b="1" i="0" kern="1200" dirty="0">
+                <a:solidFill>
+                  <a:schemeClr val="tx1"/>
+                </a:solidFill>
+                <a:effectLst/>
+                <a:latin typeface="+mn-lt"/>
+                <a:ea typeface="+mn-ea"/>
+                <a:cs typeface="+mn-cs"/>
+              </a:rPr>
+              <a:t>-128 </a:t>
+            </a:r>
+            <a:r>
+              <a:rPr lang="zh-CN" altLang="en-US" sz="1200" b="1" i="0" kern="1200" dirty="0">
+                <a:solidFill>
+                  <a:schemeClr val="tx1"/>
+                </a:solidFill>
+                <a:effectLst/>
+                <a:latin typeface="+mn-lt"/>
+                <a:ea typeface="+mn-ea"/>
+                <a:cs typeface="+mn-cs"/>
+              </a:rPr>
+              <a:t>到 </a:t>
+            </a:r>
+            <a:r>
+              <a:rPr lang="en-US" altLang="zh-CN" sz="1200" b="1" i="0" kern="1200" dirty="0">
+                <a:solidFill>
+                  <a:schemeClr val="tx1"/>
+                </a:solidFill>
+                <a:effectLst/>
+                <a:latin typeface="+mn-lt"/>
+                <a:ea typeface="+mn-ea"/>
+                <a:cs typeface="+mn-cs"/>
+              </a:rPr>
+              <a:t>127</a:t>
+            </a:r>
+            <a:r>
+              <a:rPr lang="zh-CN" altLang="en-US" sz="1200" b="0" i="0" kern="1200" dirty="0">
+                <a:solidFill>
+                  <a:schemeClr val="tx1"/>
+                </a:solidFill>
+                <a:effectLst/>
+                <a:latin typeface="+mn-lt"/>
+                <a:ea typeface="+mn-ea"/>
+                <a:cs typeface="+mn-cs"/>
+              </a:rPr>
+              <a:t>。</a:t>
+            </a:r>
             <a:endParaRPr lang="en-US" dirty="0"/>
           </a:p>
         </p:txBody>
@@ -7449,7 +7849,92 @@
             <a:fld id="{D624DF53-3DD3-9F45-9E7E-472B96F1AB81}" type="slidenum">
               <a:rPr lang="en-US" smtClean="0"/>
               <a:pPr/>
-              <a:t>15</a:t>
+              <a:t>14</a:t>
+            </a:fld>
+            <a:endParaRPr lang="en-US"/>
+          </a:p>
+        </p:txBody>
+      </p:sp>
+    </p:spTree>
+    <p:extLst>
+      <p:ext uri="{BB962C8B-B14F-4D97-AF65-F5344CB8AC3E}">
+        <p14:creationId xmlns:p14="http://schemas.microsoft.com/office/powerpoint/2010/main" val="3430681981"/>
+      </p:ext>
+    </p:extLst>
+  </p:cSld>
+  <p:clrMapOvr>
+    <a:masterClrMapping/>
+  </p:clrMapOvr>
+</p:notes>
+</file>
+
+<file path=ppt/notesSlides/notesSlide5.xml><?xml version="1.0" encoding="utf-8"?>
+<p:notes xmlns:a="http://schemas.openxmlformats.org/drawingml/2006/main" xmlns:r="http://schemas.openxmlformats.org/officeDocument/2006/relationships" xmlns:p="http://schemas.openxmlformats.org/presentationml/2006/main">
+  <p:cSld>
+    <p:spTree>
+      <p:nvGrpSpPr>
+        <p:cNvPr id="1" name=""/>
+        <p:cNvGrpSpPr/>
+        <p:nvPr/>
+      </p:nvGrpSpPr>
+      <p:grpSpPr>
+        <a:xfrm>
+          <a:off x="0" y="0"/>
+          <a:ext cx="0" cy="0"/>
+          <a:chOff x="0" y="0"/>
+          <a:chExt cx="0" cy="0"/>
+        </a:xfrm>
+      </p:grpSpPr>
+      <p:sp>
+        <p:nvSpPr>
+          <p:cNvPr id="2" name="Slide Image Placeholder 1"/>
+          <p:cNvSpPr>
+            <a:spLocks noGrp="1" noRot="1" noChangeAspect="1"/>
+          </p:cNvSpPr>
+          <p:nvPr>
+            <p:ph type="sldImg"/>
+          </p:nvPr>
+        </p:nvSpPr>
+        <p:spPr/>
+      </p:sp>
+      <p:sp>
+        <p:nvSpPr>
+          <p:cNvPr id="3" name="Notes Placeholder 2"/>
+          <p:cNvSpPr>
+            <a:spLocks noGrp="1"/>
+          </p:cNvSpPr>
+          <p:nvPr>
+            <p:ph type="body" idx="1"/>
+          </p:nvPr>
+        </p:nvSpPr>
+        <p:spPr/>
+        <p:txBody>
+          <a:bodyPr/>
+          <a:lstStyle/>
+          <a:p>
+            <a:endParaRPr lang="en-US" dirty="0"/>
+          </a:p>
+        </p:txBody>
+      </p:sp>
+      <p:sp>
+        <p:nvSpPr>
+          <p:cNvPr id="4" name="Slide Number Placeholder 3"/>
+          <p:cNvSpPr>
+            <a:spLocks noGrp="1"/>
+          </p:cNvSpPr>
+          <p:nvPr>
+            <p:ph type="sldNum" sz="quarter" idx="5"/>
+          </p:nvPr>
+        </p:nvSpPr>
+        <p:spPr/>
+        <p:txBody>
+          <a:bodyPr/>
+          <a:lstStyle/>
+          <a:p>
+            <a:fld id="{D624DF53-3DD3-9F45-9E7E-472B96F1AB81}" type="slidenum">
+              <a:rPr lang="en-US" smtClean="0"/>
+              <a:pPr/>
+              <a:t>16</a:t>
             </a:fld>
             <a:endParaRPr lang="en-US"/>
           </a:p>
@@ -7468,7 +7953,7 @@
 </p:notes>
 </file>
 
-<file path=ppt/notesSlides/notesSlide4.xml><?xml version="1.0" encoding="utf-8"?>
+<file path=ppt/notesSlides/notesSlide6.xml><?xml version="1.0" encoding="utf-8"?>
 <p:notes xmlns:a="http://schemas.openxmlformats.org/drawingml/2006/main" xmlns:r="http://schemas.openxmlformats.org/officeDocument/2006/relationships" xmlns:p="http://schemas.openxmlformats.org/presentationml/2006/main">
   <p:cSld>
     <p:spTree>
@@ -7558,7 +8043,7 @@
             <a:fld id="{D624DF53-3DD3-9F45-9E7E-472B96F1AB81}" type="slidenum">
               <a:rPr lang="en-US" smtClean="0"/>
               <a:pPr/>
-              <a:t>16</a:t>
+              <a:t>17</a:t>
             </a:fld>
             <a:endParaRPr lang="en-US"/>
           </a:p>
@@ -7577,7 +8062,7 @@
 </p:notes>
 </file>
 
-<file path=ppt/notesSlides/notesSlide5.xml><?xml version="1.0" encoding="utf-8"?>
+<file path=ppt/notesSlides/notesSlide7.xml><?xml version="1.0" encoding="utf-8"?>
 <p:notes xmlns:a="http://schemas.openxmlformats.org/drawingml/2006/main" xmlns:r="http://schemas.openxmlformats.org/officeDocument/2006/relationships" xmlns:p="http://schemas.openxmlformats.org/presentationml/2006/main">
   <p:cSld>
     <p:spTree>
@@ -7667,7 +8152,7 @@
             <a:fld id="{D624DF53-3DD3-9F45-9E7E-472B96F1AB81}" type="slidenum">
               <a:rPr lang="en-US" smtClean="0"/>
               <a:pPr/>
-              <a:t>17</a:t>
+              <a:t>18</a:t>
             </a:fld>
             <a:endParaRPr lang="en-US"/>
           </a:p>
@@ -7686,7 +8171,7 @@
 </p:notes>
 </file>
 
-<file path=ppt/notesSlides/notesSlide6.xml><?xml version="1.0" encoding="utf-8"?>
+<file path=ppt/notesSlides/notesSlide8.xml><?xml version="1.0" encoding="utf-8"?>
 <p:notes xmlns:a="http://schemas.openxmlformats.org/drawingml/2006/main" xmlns:r="http://schemas.openxmlformats.org/officeDocument/2006/relationships" xmlns:p="http://schemas.openxmlformats.org/presentationml/2006/main">
   <p:cSld>
     <p:spTree>
@@ -7755,7 +8240,7 @@
             <a:fld id="{D624DF53-3DD3-9F45-9E7E-472B96F1AB81}" type="slidenum">
               <a:rPr lang="en-US" smtClean="0"/>
               <a:pPr/>
-              <a:t>19</a:t>
+              <a:t>20</a:t>
             </a:fld>
             <a:endParaRPr lang="en-US"/>
           </a:p>
@@ -7774,7 +8259,7 @@
 </p:notes>
 </file>
 
-<file path=ppt/notesSlides/notesSlide7.xml><?xml version="1.0" encoding="utf-8"?>
+<file path=ppt/notesSlides/notesSlide9.xml><?xml version="1.0" encoding="utf-8"?>
 <p:notes xmlns:a="http://schemas.openxmlformats.org/drawingml/2006/main" xmlns:r="http://schemas.openxmlformats.org/officeDocument/2006/relationships" xmlns:p="http://schemas.openxmlformats.org/presentationml/2006/main">
   <p:cSld>
     <p:spTree>
@@ -7864,7 +8349,7 @@
             <a:fld id="{D624DF53-3DD3-9F45-9E7E-472B96F1AB81}" type="slidenum">
               <a:rPr lang="en-US" smtClean="0"/>
               <a:pPr/>
-              <a:t>20</a:t>
+              <a:t>21</a:t>
             </a:fld>
             <a:endParaRPr lang="en-US"/>
           </a:p>
@@ -7874,206 +8359,6 @@
     <p:extLst>
       <p:ext uri="{BB962C8B-B14F-4D97-AF65-F5344CB8AC3E}">
         <p14:creationId xmlns:p14="http://schemas.microsoft.com/office/powerpoint/2010/main" val="245707839"/>
-      </p:ext>
-    </p:extLst>
-  </p:cSld>
-  <p:clrMapOvr>
-    <a:masterClrMapping/>
-  </p:clrMapOvr>
-</p:notes>
-</file>
-
-<file path=ppt/notesSlides/notesSlide8.xml><?xml version="1.0" encoding="utf-8"?>
-<p:notes xmlns:a="http://schemas.openxmlformats.org/drawingml/2006/main" xmlns:r="http://schemas.openxmlformats.org/officeDocument/2006/relationships" xmlns:p="http://schemas.openxmlformats.org/presentationml/2006/main">
-  <p:cSld>
-    <p:spTree>
-      <p:nvGrpSpPr>
-        <p:cNvPr id="1" name=""/>
-        <p:cNvGrpSpPr/>
-        <p:nvPr/>
-      </p:nvGrpSpPr>
-      <p:grpSpPr>
-        <a:xfrm>
-          <a:off x="0" y="0"/>
-          <a:ext cx="0" cy="0"/>
-          <a:chOff x="0" y="0"/>
-          <a:chExt cx="0" cy="0"/>
-        </a:xfrm>
-      </p:grpSpPr>
-      <p:sp>
-        <p:nvSpPr>
-          <p:cNvPr id="2" name="Slide Image Placeholder 1"/>
-          <p:cNvSpPr>
-            <a:spLocks noGrp="1" noRot="1" noChangeAspect="1"/>
-          </p:cNvSpPr>
-          <p:nvPr>
-            <p:ph type="sldImg"/>
-          </p:nvPr>
-        </p:nvSpPr>
-        <p:spPr/>
-      </p:sp>
-      <p:sp>
-        <p:nvSpPr>
-          <p:cNvPr id="3" name="Notes Placeholder 2"/>
-          <p:cNvSpPr>
-            <a:spLocks noGrp="1"/>
-          </p:cNvSpPr>
-          <p:nvPr>
-            <p:ph type="body" idx="1"/>
-          </p:nvPr>
-        </p:nvSpPr>
-        <p:spPr/>
-        <p:txBody>
-          <a:bodyPr/>
-          <a:lstStyle/>
-          <a:p>
-            <a:pPr marL="0" marR="0" lvl="0" indent="0" algn="l" defTabSz="457200" rtl="0" eaLnBrk="1" fontAlgn="auto" latinLnBrk="0" hangingPunct="1">
-              <a:lnSpc>
-                <a:spcPct val="100000"/>
-              </a:lnSpc>
-              <a:spcBef>
-                <a:spcPts val="0"/>
-              </a:spcBef>
-              <a:spcAft>
-                <a:spcPts val="0"/>
-              </a:spcAft>
-              <a:buClrTx/>
-              <a:buSzTx/>
-              <a:buFontTx/>
-              <a:buNone/>
-              <a:tabLst/>
-              <a:defRPr/>
-            </a:pPr>
-            <a:r>
-              <a:rPr lang="en-US" b="1" dirty="0">
-                <a:solidFill>
-                  <a:srgbClr val="C00000"/>
-                </a:solidFill>
-              </a:rPr>
-              <a:t>Numbers farthest from zero</a:t>
-            </a:r>
-          </a:p>
-          <a:p>
-            <a:endParaRPr lang="en-US" dirty="0"/>
-          </a:p>
-        </p:txBody>
-      </p:sp>
-      <p:sp>
-        <p:nvSpPr>
-          <p:cNvPr id="4" name="Slide Number Placeholder 3"/>
-          <p:cNvSpPr>
-            <a:spLocks noGrp="1"/>
-          </p:cNvSpPr>
-          <p:nvPr>
-            <p:ph type="sldNum" sz="quarter" idx="5"/>
-          </p:nvPr>
-        </p:nvSpPr>
-        <p:spPr/>
-        <p:txBody>
-          <a:bodyPr/>
-          <a:lstStyle/>
-          <a:p>
-            <a:fld id="{D624DF53-3DD3-9F45-9E7E-472B96F1AB81}" type="slidenum">
-              <a:rPr lang="en-US" smtClean="0"/>
-              <a:pPr/>
-              <a:t>24</a:t>
-            </a:fld>
-            <a:endParaRPr lang="en-US"/>
-          </a:p>
-        </p:txBody>
-      </p:sp>
-    </p:spTree>
-    <p:extLst>
-      <p:ext uri="{BB962C8B-B14F-4D97-AF65-F5344CB8AC3E}">
-        <p14:creationId xmlns:p14="http://schemas.microsoft.com/office/powerpoint/2010/main" val="3727935292"/>
-      </p:ext>
-    </p:extLst>
-  </p:cSld>
-  <p:clrMapOvr>
-    <a:masterClrMapping/>
-  </p:clrMapOvr>
-</p:notes>
-</file>
-
-<file path=ppt/notesSlides/notesSlide9.xml><?xml version="1.0" encoding="utf-8"?>
-<p:notes xmlns:a="http://schemas.openxmlformats.org/drawingml/2006/main" xmlns:r="http://schemas.openxmlformats.org/officeDocument/2006/relationships" xmlns:p="http://schemas.openxmlformats.org/presentationml/2006/main">
-  <p:cSld>
-    <p:spTree>
-      <p:nvGrpSpPr>
-        <p:cNvPr id="1" name=""/>
-        <p:cNvGrpSpPr/>
-        <p:nvPr/>
-      </p:nvGrpSpPr>
-      <p:grpSpPr>
-        <a:xfrm>
-          <a:off x="0" y="0"/>
-          <a:ext cx="0" cy="0"/>
-          <a:chOff x="0" y="0"/>
-          <a:chExt cx="0" cy="0"/>
-        </a:xfrm>
-      </p:grpSpPr>
-      <p:sp>
-        <p:nvSpPr>
-          <p:cNvPr id="2" name="Slide Image Placeholder 1"/>
-          <p:cNvSpPr>
-            <a:spLocks noGrp="1" noRot="1" noChangeAspect="1"/>
-          </p:cNvSpPr>
-          <p:nvPr>
-            <p:ph type="sldImg"/>
-          </p:nvPr>
-        </p:nvSpPr>
-        <p:spPr/>
-      </p:sp>
-      <p:sp>
-        <p:nvSpPr>
-          <p:cNvPr id="3" name="Notes Placeholder 2"/>
-          <p:cNvSpPr>
-            <a:spLocks noGrp="1"/>
-          </p:cNvSpPr>
-          <p:nvPr>
-            <p:ph type="body" idx="1"/>
-          </p:nvPr>
-        </p:nvSpPr>
-        <p:spPr/>
-        <p:txBody>
-          <a:bodyPr/>
-          <a:lstStyle/>
-          <a:p>
-            <a:r>
-              <a:rPr lang="en-US"/>
-              <a:t>https://www.edge-ai-vision.com/2025/08/introduction-to-data-types-for-ai-trade-offs-and-trends-a-presentation-from-synopsys/</a:t>
-            </a:r>
-          </a:p>
-        </p:txBody>
-      </p:sp>
-      <p:sp>
-        <p:nvSpPr>
-          <p:cNvPr id="4" name="Slide Number Placeholder 3"/>
-          <p:cNvSpPr>
-            <a:spLocks noGrp="1"/>
-          </p:cNvSpPr>
-          <p:nvPr>
-            <p:ph type="sldNum" sz="quarter" idx="5"/>
-          </p:nvPr>
-        </p:nvSpPr>
-        <p:spPr/>
-        <p:txBody>
-          <a:bodyPr/>
-          <a:lstStyle/>
-          <a:p>
-            <a:fld id="{D624DF53-3DD3-9F45-9E7E-472B96F1AB81}" type="slidenum">
-              <a:rPr lang="en-US" smtClean="0"/>
-              <a:pPr/>
-              <a:t>27</a:t>
-            </a:fld>
-            <a:endParaRPr lang="en-US"/>
-          </a:p>
-        </p:txBody>
-      </p:sp>
-    </p:spTree>
-    <p:extLst>
-      <p:ext uri="{BB962C8B-B14F-4D97-AF65-F5344CB8AC3E}">
-        <p14:creationId xmlns:p14="http://schemas.microsoft.com/office/powerpoint/2010/main" val="706307618"/>
       </p:ext>
     </p:extLst>
   </p:cSld>
@@ -8225,7 +8510,7 @@
             <a:pPr eaLnBrk="1" latinLnBrk="0" hangingPunct="1"/>
             <a:fld id="{8E8B2B42-CBC2-7D4E-BA50-0E7F29B4DAAB}" type="datetime1">
               <a:rPr lang="en-US" smtClean="0"/>
-              <a:t>10/12/2025</a:t>
+              <a:t>10/17/2025</a:t>
             </a:fld>
             <a:endParaRPr lang="en-US" sz="1600" dirty="0"/>
           </a:p>
@@ -8585,7 +8870,7 @@
             <a:pPr eaLnBrk="1" latinLnBrk="0" hangingPunct="1"/>
             <a:fld id="{597D1259-3A46-254C-ADDB-B5DA4F1DF3DA}" type="datetime1">
               <a:rPr lang="en-US" smtClean="0"/>
-              <a:t>10/12/2025</a:t>
+              <a:t>10/17/2025</a:t>
             </a:fld>
             <a:endParaRPr lang="en-US"/>
           </a:p>
@@ -8761,7 +9046,7 @@
             <a:pPr eaLnBrk="1" latinLnBrk="0" hangingPunct="1"/>
             <a:fld id="{CCA104EC-54AA-E04F-BDC0-22B4E8892699}" type="datetime1">
               <a:rPr lang="en-US" smtClean="0"/>
-              <a:t>10/12/2025</a:t>
+              <a:t>10/17/2025</a:t>
             </a:fld>
             <a:endParaRPr lang="en-US"/>
           </a:p>
@@ -8997,7 +9282,7 @@
             <a:pPr eaLnBrk="1" latinLnBrk="0" hangingPunct="1"/>
             <a:fld id="{A9E6F060-20EB-3246-9088-08BF5F1271DE}" type="datetime1">
               <a:rPr lang="en-US" smtClean="0"/>
-              <a:t>10/12/2025</a:t>
+              <a:t>10/17/2025</a:t>
             </a:fld>
             <a:endParaRPr lang="en-US" dirty="0"/>
           </a:p>
@@ -9267,7 +9552,7 @@
             <a:pPr eaLnBrk="1" latinLnBrk="0" hangingPunct="1"/>
             <a:fld id="{34C82E41-DA7E-CA4C-823B-C759BEA16CE8}" type="datetime1">
               <a:rPr lang="en-US" smtClean="0"/>
-              <a:t>10/12/2025</a:t>
+              <a:t>10/17/2025</a:t>
             </a:fld>
             <a:endParaRPr lang="en-US" dirty="0"/>
           </a:p>
@@ -9488,7 +9773,7 @@
             <a:pPr eaLnBrk="1" latinLnBrk="0" hangingPunct="1"/>
             <a:fld id="{2500C8B0-EB1A-0A41-B839-C4B99CD2225A}" type="datetime1">
               <a:rPr lang="en-US" smtClean="0"/>
-              <a:t>10/12/2025</a:t>
+              <a:t>10/17/2025</a:t>
             </a:fld>
             <a:endParaRPr lang="en-US"/>
           </a:p>
@@ -9841,7 +10126,7 @@
             <a:pPr eaLnBrk="1" latinLnBrk="0" hangingPunct="1"/>
             <a:fld id="{4F16605B-D952-1149-A111-28A5633BAE48}" type="datetime1">
               <a:rPr lang="en-US" smtClean="0"/>
-              <a:t>10/12/2025</a:t>
+              <a:t>10/17/2025</a:t>
             </a:fld>
             <a:endParaRPr lang="en-US"/>
           </a:p>
@@ -10074,7 +10359,7 @@
             <a:pPr eaLnBrk="1" latinLnBrk="0" hangingPunct="1"/>
             <a:fld id="{91109A1C-29B2-B04E-8365-C9D22C4AE842}" type="datetime1">
               <a:rPr lang="en-US" smtClean="0"/>
-              <a:t>10/12/2025</a:t>
+              <a:t>10/17/2025</a:t>
             </a:fld>
             <a:endParaRPr lang="en-US"/>
           </a:p>
@@ -10216,7 +10501,7 @@
             <a:pPr eaLnBrk="1" latinLnBrk="0" hangingPunct="1"/>
             <a:fld id="{2CE417B6-A42B-064A-8677-46C55C4F613A}" type="datetime1">
               <a:rPr lang="en-US" smtClean="0"/>
-              <a:t>10/12/2025</a:t>
+              <a:t>10/17/2025</a:t>
             </a:fld>
             <a:endParaRPr lang="en-US"/>
           </a:p>
@@ -10494,7 +10779,7 @@
             <a:pPr eaLnBrk="1" latinLnBrk="0" hangingPunct="1"/>
             <a:fld id="{DE76F5AD-3F1F-7141-BC8A-012C5728BE2D}" type="datetime1">
               <a:rPr lang="en-US" smtClean="0"/>
-              <a:t>10/12/2025</a:t>
+              <a:t>10/17/2025</a:t>
             </a:fld>
             <a:endParaRPr lang="en-US"/>
           </a:p>
@@ -10902,7 +11187,7 @@
             <a:pPr eaLnBrk="1" latinLnBrk="0" hangingPunct="1"/>
             <a:fld id="{09FA12B8-739E-4D47-A14C-180C3BC10865}" type="datetime1">
               <a:rPr lang="en-US" smtClean="0"/>
-              <a:t>10/12/2025</a:t>
+              <a:t>10/17/2025</a:t>
             </a:fld>
             <a:endParaRPr lang="en-US"/>
           </a:p>
@@ -11240,7 +11525,7 @@
             <a:pPr eaLnBrk="1" latinLnBrk="0" hangingPunct="1"/>
             <a:fld id="{CDD18CD8-E404-844E-A4BD-DF69B8E5881E}" type="datetime1">
               <a:rPr lang="en-US" smtClean="0"/>
-              <a:t>10/12/2025</a:t>
+              <a:t>10/17/2025</a:t>
             </a:fld>
             <a:endParaRPr lang="en-US" sz="1400" dirty="0">
               <a:solidFill>
@@ -13118,8 +13403,8 @@
           </a:p>
         </p:txBody>
       </p:sp>
-      <mc:AlternateContent xmlns:mc="http://schemas.openxmlformats.org/markup-compatibility/2006" xmlns:a14="http://schemas.microsoft.com/office/drawing/2010/main">
-        <mc:Choice Requires="a14">
+      <mc:AlternateContent xmlns:mc="http://schemas.openxmlformats.org/markup-compatibility/2006">
+        <mc:Choice xmlns:a14="http://schemas.microsoft.com/office/drawing/2010/main" Requires="a14">
           <p:sp>
             <p:nvSpPr>
               <p:cNvPr id="5" name="Rectangle 4"/>
@@ -13281,7 +13566,15 @@
               <a:p>
                 <a:r>
                   <a:rPr lang="en-US" dirty="0"/>
-                  <a:t>where Bias = </a:t>
+                  <a:t>where Bias = 2</a:t>
+                </a:r>
+                <a:r>
+                  <a:rPr lang="en-US" baseline="30000" dirty="0"/>
+                  <a:t>7</a:t>
+                </a:r>
+                <a:r>
+                  <a:rPr lang="en-US" dirty="0"/>
+                  <a:t> - 1 = </a:t>
                 </a:r>
                 <a:r>
                   <a:rPr lang="en-US" b="1" dirty="0">
@@ -13292,13 +13585,21 @@
                 </a:r>
                 <a:r>
                   <a:rPr lang="en-US" dirty="0"/>
-                  <a:t> for single precision </a:t>
+                  <a:t> for single precision FP32 </a:t>
                 </a:r>
               </a:p>
               <a:p>
                 <a:r>
                   <a:rPr lang="en-US" dirty="0"/>
-                  <a:t>          Bias = </a:t>
+                  <a:t>          Bias = 2</a:t>
+                </a:r>
+                <a:r>
+                  <a:rPr lang="en-US" baseline="30000" dirty="0"/>
+                  <a:t>10</a:t>
+                </a:r>
+                <a:r>
+                  <a:rPr lang="en-US" dirty="0"/>
+                  <a:t> - 1 = </a:t>
                 </a:r>
                 <a:r>
                   <a:rPr lang="en-US" b="1" dirty="0">
@@ -13309,7 +13610,7 @@
                 </a:r>
                 <a:r>
                   <a:rPr lang="en-US" dirty="0"/>
-                  <a:t> for double precision</a:t>
+                  <a:t> for double precision FP64</a:t>
                 </a:r>
               </a:p>
               <a:p>
@@ -13329,7 +13630,7 @@
             </p:txBody>
           </p:sp>
         </mc:Choice>
-        <mc:Fallback xmlns="">
+        <mc:Fallback>
           <p:sp>
             <p:nvSpPr>
               <p:cNvPr id="5" name="Rectangle 4"/>
@@ -13347,7 +13648,7 @@
                 <a:avLst/>
               </a:prstGeom>
               <a:blipFill>
-                <a:blip r:embed="rId2"/>
+                <a:blip r:embed="rId3"/>
                 <a:stretch>
                   <a:fillRect l="-655" t="-1429" b="-3714"/>
                 </a:stretch>
@@ -13377,7 +13678,7 @@
           <p:nvPr/>
         </p:nvPicPr>
         <p:blipFill>
-          <a:blip r:embed="rId3">
+          <a:blip r:embed="rId4">
             <a:extLst>
               <a:ext uri="{28A0092B-C50C-407E-A947-70E740481C1C}">
                 <a14:useLocalDpi xmlns:a14="http://schemas.microsoft.com/office/drawing/2010/main" val="0"/>
@@ -13436,6 +13737,191 @@
 </file>
 
 <file path=ppt/slides/slide14.xml><?xml version="1.0" encoding="utf-8"?>
+<p:sld xmlns:a="http://schemas.openxmlformats.org/drawingml/2006/main" xmlns:r="http://schemas.openxmlformats.org/officeDocument/2006/relationships" xmlns:p="http://schemas.openxmlformats.org/presentationml/2006/main">
+  <p:cSld>
+    <p:spTree>
+      <p:nvGrpSpPr>
+        <p:cNvPr id="1" name=""/>
+        <p:cNvGrpSpPr/>
+        <p:nvPr/>
+      </p:nvGrpSpPr>
+      <p:grpSpPr>
+        <a:xfrm>
+          <a:off x="0" y="0"/>
+          <a:ext cx="0" cy="0"/>
+          <a:chOff x="0" y="0"/>
+          <a:chExt cx="0" cy="0"/>
+        </a:xfrm>
+      </p:grpSpPr>
+      <p:sp>
+        <p:nvSpPr>
+          <p:cNvPr id="2" name="Title 1">
+            <a:extLst>
+              <a:ext uri="{FF2B5EF4-FFF2-40B4-BE49-F238E27FC236}">
+                <a16:creationId xmlns:a16="http://schemas.microsoft.com/office/drawing/2014/main" id="{96369424-0102-7D10-CA3C-02B3C0033DF2}"/>
+              </a:ext>
+            </a:extLst>
+          </p:cNvPr>
+          <p:cNvSpPr>
+            <a:spLocks noGrp="1"/>
+          </p:cNvSpPr>
+          <p:nvPr>
+            <p:ph type="title"/>
+          </p:nvPr>
+        </p:nvSpPr>
+        <p:spPr/>
+        <p:txBody>
+          <a:bodyPr/>
+          <a:lstStyle/>
+          <a:p>
+            <a:r>
+              <a:rPr lang="en-US" dirty="0"/>
+              <a:t>Why Bias?</a:t>
+            </a:r>
+          </a:p>
+        </p:txBody>
+      </p:sp>
+      <p:sp>
+        <p:nvSpPr>
+          <p:cNvPr id="3" name="Slide Number Placeholder 2">
+            <a:extLst>
+              <a:ext uri="{FF2B5EF4-FFF2-40B4-BE49-F238E27FC236}">
+                <a16:creationId xmlns:a16="http://schemas.microsoft.com/office/drawing/2014/main" id="{04B665B1-93EA-6963-3A8D-A79CC4FCAC16}"/>
+              </a:ext>
+            </a:extLst>
+          </p:cNvPr>
+          <p:cNvSpPr>
+            <a:spLocks noGrp="1"/>
+          </p:cNvSpPr>
+          <p:nvPr>
+            <p:ph type="sldNum" sz="quarter" idx="12"/>
+          </p:nvPr>
+        </p:nvSpPr>
+        <p:spPr/>
+        <p:txBody>
+          <a:bodyPr/>
+          <a:lstStyle/>
+          <a:p>
+            <a:fld id="{EA7C8D44-3667-46F6-9772-CC52308E2A7F}" type="slidenum">
+              <a:rPr kumimoji="0" lang="en-US" smtClean="0"/>
+              <a:pPr/>
+              <a:t>14</a:t>
+            </a:fld>
+            <a:endParaRPr kumimoji="0" lang="en-US" dirty="0"/>
+          </a:p>
+        </p:txBody>
+      </p:sp>
+      <p:sp>
+        <p:nvSpPr>
+          <p:cNvPr id="4" name="Content Placeholder 3">
+            <a:extLst>
+              <a:ext uri="{FF2B5EF4-FFF2-40B4-BE49-F238E27FC236}">
+                <a16:creationId xmlns:a16="http://schemas.microsoft.com/office/drawing/2014/main" id="{F6E9C26C-00C6-ED10-C2C9-02E0EBAC4C6B}"/>
+              </a:ext>
+            </a:extLst>
+          </p:cNvPr>
+          <p:cNvSpPr>
+            <a:spLocks noGrp="1"/>
+          </p:cNvSpPr>
+          <p:nvPr>
+            <p:ph sz="quarter" idx="1"/>
+          </p:nvPr>
+        </p:nvSpPr>
+        <p:spPr/>
+        <p:txBody>
+          <a:bodyPr>
+            <a:normAutofit lnSpcReduction="10000"/>
+          </a:bodyPr>
+          <a:lstStyle/>
+          <a:p>
+            <a:r>
+              <a:rPr lang="en-US" dirty="0"/>
+              <a:t>FP32’s exponent field has 8 bits. So it can represent integers from 0 to 255. But real exponents in normalized floating-point numbers range roughly from –126 to +127.  To store both negative and positive exponents in that 0–255 range, IEEE-754 adds a bias, shifting all values upward so they become non-negative.</a:t>
+            </a:r>
+          </a:p>
+          <a:p>
+            <a:r>
+              <a:rPr lang="en-US" dirty="0"/>
+              <a:t>For an exponent field of n bits, the bias is 2</a:t>
+            </a:r>
+            <a:r>
+              <a:rPr lang="en-US" baseline="30000" dirty="0"/>
+              <a:t>(n−1)</a:t>
+            </a:r>
+            <a:r>
+              <a:rPr lang="en-US" dirty="0"/>
+              <a:t>- 1.</a:t>
+            </a:r>
+          </a:p>
+          <a:p>
+            <a:r>
+              <a:rPr lang="en-US" dirty="0"/>
+              <a:t>For FP32, the bias is chosen as 2</a:t>
+            </a:r>
+            <a:r>
+              <a:rPr lang="en-US" baseline="30000" dirty="0"/>
+              <a:t>(8−1)</a:t>
+            </a:r>
+            <a:r>
+              <a:rPr lang="en-US" dirty="0"/>
+              <a:t>- 1 = 127, so half the range is allocated for negative exponents, and half for positive. </a:t>
+            </a:r>
+          </a:p>
+          <a:p>
+            <a:pPr lvl="1"/>
+            <a:r>
+              <a:rPr lang="en-US" dirty="0"/>
+              <a:t>Actual Exponent=Stored Exponent -127</a:t>
+            </a:r>
+          </a:p>
+          <a:p>
+            <a:pPr lvl="1"/>
+            <a:r>
+              <a:rPr lang="en-US" dirty="0"/>
+              <a:t>Stored exponent 0 → actual exponent = -127 (used for special/subnormal cases)</a:t>
+            </a:r>
+          </a:p>
+          <a:p>
+            <a:pPr lvl="1"/>
+            <a:r>
+              <a:rPr lang="en-US" dirty="0"/>
+              <a:t>Stored exponent 127 → actual exponent = 0</a:t>
+            </a:r>
+          </a:p>
+          <a:p>
+            <a:pPr lvl="1"/>
+            <a:r>
+              <a:rPr lang="en-US" dirty="0"/>
+              <a:t>Stored exponent 255 → reserved for special values (like infinity and </a:t>
+            </a:r>
+            <a:r>
+              <a:rPr lang="en-US" dirty="0" err="1"/>
+              <a:t>NaN</a:t>
+            </a:r>
+            <a:r>
+              <a:rPr lang="en-US" dirty="0"/>
+              <a:t>)</a:t>
+            </a:r>
+          </a:p>
+          <a:p>
+            <a:endParaRPr lang="en-US" dirty="0"/>
+          </a:p>
+        </p:txBody>
+      </p:sp>
+    </p:spTree>
+    <p:extLst>
+      <p:ext uri="{BB962C8B-B14F-4D97-AF65-F5344CB8AC3E}">
+        <p14:creationId xmlns:p14="http://schemas.microsoft.com/office/powerpoint/2010/main" val="3892365445"/>
+      </p:ext>
+    </p:extLst>
+  </p:cSld>
+  <p:clrMapOvr>
+    <a:masterClrMapping/>
+  </p:clrMapOvr>
+</p:sld>
+</file>
+
+<file path=ppt/slides/slide15.xml><?xml version="1.0" encoding="utf-8"?>
 <p:sld xmlns:a="http://schemas.openxmlformats.org/drawingml/2006/main" xmlns:r="http://schemas.openxmlformats.org/officeDocument/2006/relationships" xmlns:p="http://schemas.openxmlformats.org/presentationml/2006/main">
   <p:cSld>
     <p:spTree>
@@ -13516,7 +14002,7 @@
             <a:fld id="{EA7C8D44-3667-46F6-9772-CC52308E2A7F}" type="slidenum">
               <a:rPr kumimoji="0" lang="en-US" smtClean="0"/>
               <a:pPr/>
-              <a:t>14</a:t>
+              <a:t>15</a:t>
             </a:fld>
             <a:endParaRPr kumimoji="0" lang="en-US" dirty="0"/>
           </a:p>
@@ -13627,7 +14113,13 @@
                       <a:rPr lang="en-US" sz="2800" i="1">
                         <a:latin typeface="Cambria Math"/>
                       </a:rPr>
-                      <m:t>=131</m:t>
+                      <m:t>=</m:t>
+                    </m:r>
+                    <m:r>
+                      <a:rPr lang="en-US" sz="2800" i="1">
+                        <a:latin typeface="Cambria Math"/>
+                      </a:rPr>
+                      <m:t>131</m:t>
                     </m:r>
                   </m:oMath>
                 </a14:m>
@@ -13653,7 +14145,19 @@
                           <a:rPr lang="en-US" sz="2800" i="1">
                             <a:latin typeface="Cambria Math"/>
                           </a:rPr>
-                          <m:t>0.1111111</m:t>
+                          <m:t>0</m:t>
+                        </m:r>
+                        <m:r>
+                          <a:rPr lang="en-US" sz="2800" i="1">
+                            <a:latin typeface="Cambria Math"/>
+                          </a:rPr>
+                          <m:t>.</m:t>
+                        </m:r>
+                        <m:r>
+                          <a:rPr lang="en-US" sz="2800" i="1">
+                            <a:latin typeface="Cambria Math"/>
+                          </a:rPr>
+                          <m:t>1111111</m:t>
                         </m:r>
                       </m:e>
                       <m:sub>
@@ -13678,7 +14182,13 @@
                       <a:rPr lang="en-US" sz="2800" i="1">
                         <a:latin typeface="Cambria Math"/>
                       </a:rPr>
-                      <m:t>1×</m:t>
+                      <m:t>1</m:t>
+                    </m:r>
+                    <m:r>
+                      <a:rPr lang="en-US" sz="2800" i="1">
+                        <a:latin typeface="Cambria Math"/>
+                      </a:rPr>
+                      <m:t>×</m:t>
                     </m:r>
                     <m:sSup>
                       <m:sSupPr>
@@ -13701,7 +14211,13 @@
                           <a:rPr lang="en-US" sz="2800" i="1">
                             <a:latin typeface="Cambria Math"/>
                           </a:rPr>
-                          <m:t>−1</m:t>
+                          <m:t>−</m:t>
+                        </m:r>
+                        <m:r>
+                          <a:rPr lang="en-US" sz="2800" i="1">
+                            <a:latin typeface="Cambria Math"/>
+                          </a:rPr>
+                          <m:t>1</m:t>
                         </m:r>
                       </m:sup>
                     </m:sSup>
@@ -13709,7 +14225,19 @@
                       <a:rPr lang="en-US" sz="2800" i="1">
                         <a:latin typeface="Cambria Math"/>
                       </a:rPr>
-                      <m:t>+1×</m:t>
+                      <m:t>+</m:t>
+                    </m:r>
+                    <m:r>
+                      <a:rPr lang="en-US" sz="2800" i="1">
+                        <a:latin typeface="Cambria Math"/>
+                      </a:rPr>
+                      <m:t>1</m:t>
+                    </m:r>
+                    <m:r>
+                      <a:rPr lang="en-US" sz="2800" i="1">
+                        <a:latin typeface="Cambria Math"/>
+                      </a:rPr>
+                      <m:t>×</m:t>
                     </m:r>
                     <m:sSup>
                       <m:sSupPr>
@@ -13732,7 +14260,13 @@
                           <a:rPr lang="en-US" sz="2800" i="1">
                             <a:latin typeface="Cambria Math"/>
                           </a:rPr>
-                          <m:t>−2</m:t>
+                          <m:t>−</m:t>
+                        </m:r>
+                        <m:r>
+                          <a:rPr lang="en-US" sz="2800" i="1">
+                            <a:latin typeface="Cambria Math"/>
+                          </a:rPr>
+                          <m:t>2</m:t>
                         </m:r>
                       </m:sup>
                     </m:sSup>
@@ -13740,7 +14274,19 @@
                       <a:rPr lang="en-US" sz="2800" i="1">
                         <a:latin typeface="Cambria Math"/>
                       </a:rPr>
-                      <m:t>+1×</m:t>
+                      <m:t>+</m:t>
+                    </m:r>
+                    <m:r>
+                      <a:rPr lang="en-US" sz="2800" i="1">
+                        <a:latin typeface="Cambria Math"/>
+                      </a:rPr>
+                      <m:t>1</m:t>
+                    </m:r>
+                    <m:r>
+                      <a:rPr lang="en-US" sz="2800" i="1">
+                        <a:latin typeface="Cambria Math"/>
+                      </a:rPr>
+                      <m:t>×</m:t>
                     </m:r>
                     <m:sSup>
                       <m:sSupPr>
@@ -13763,7 +14309,13 @@
                           <a:rPr lang="en-US" sz="2800" i="1">
                             <a:latin typeface="Cambria Math"/>
                           </a:rPr>
-                          <m:t>−3</m:t>
+                          <m:t>−</m:t>
+                        </m:r>
+                        <m:r>
+                          <a:rPr lang="en-US" sz="2800" i="1">
+                            <a:latin typeface="Cambria Math"/>
+                          </a:rPr>
+                          <m:t>3</m:t>
                         </m:r>
                       </m:sup>
                     </m:sSup>
@@ -13771,7 +14323,19 @@
                       <a:rPr lang="en-US" sz="2800" i="1">
                         <a:latin typeface="Cambria Math"/>
                       </a:rPr>
-                      <m:t>+1×</m:t>
+                      <m:t>+</m:t>
+                    </m:r>
+                    <m:r>
+                      <a:rPr lang="en-US" sz="2800" i="1">
+                        <a:latin typeface="Cambria Math"/>
+                      </a:rPr>
+                      <m:t>1</m:t>
+                    </m:r>
+                    <m:r>
+                      <a:rPr lang="en-US" sz="2800" i="1">
+                        <a:latin typeface="Cambria Math"/>
+                      </a:rPr>
+                      <m:t>×</m:t>
                     </m:r>
                     <m:sSup>
                       <m:sSupPr>
@@ -13794,7 +14358,13 @@
                           <a:rPr lang="en-US" sz="2800" i="1">
                             <a:latin typeface="Cambria Math"/>
                           </a:rPr>
-                          <m:t>−4</m:t>
+                          <m:t>−</m:t>
+                        </m:r>
+                        <m:r>
+                          <a:rPr lang="en-US" sz="2800" i="1">
+                            <a:latin typeface="Cambria Math"/>
+                          </a:rPr>
+                          <m:t>4</m:t>
                         </m:r>
                       </m:sup>
                     </m:sSup>
@@ -13802,7 +14372,19 @@
                       <a:rPr lang="en-US" sz="2800" i="1">
                         <a:latin typeface="Cambria Math"/>
                       </a:rPr>
-                      <m:t>+1×</m:t>
+                      <m:t>+</m:t>
+                    </m:r>
+                    <m:r>
+                      <a:rPr lang="en-US" sz="2800" i="1">
+                        <a:latin typeface="Cambria Math"/>
+                      </a:rPr>
+                      <m:t>1</m:t>
+                    </m:r>
+                    <m:r>
+                      <a:rPr lang="en-US" sz="2800" i="1">
+                        <a:latin typeface="Cambria Math"/>
+                      </a:rPr>
+                      <m:t>×</m:t>
                     </m:r>
                     <m:sSup>
                       <m:sSupPr>
@@ -13825,7 +14407,13 @@
                           <a:rPr lang="en-US" sz="2800" i="1">
                             <a:latin typeface="Cambria Math"/>
                           </a:rPr>
-                          <m:t>−5</m:t>
+                          <m:t>−</m:t>
+                        </m:r>
+                        <m:r>
+                          <a:rPr lang="en-US" sz="2800" i="1">
+                            <a:latin typeface="Cambria Math"/>
+                          </a:rPr>
+                          <m:t>5</m:t>
                         </m:r>
                       </m:sup>
                     </m:sSup>
@@ -13833,7 +14421,19 @@
                       <a:rPr lang="en-US" sz="2800" i="1">
                         <a:latin typeface="Cambria Math"/>
                       </a:rPr>
-                      <m:t>+1×</m:t>
+                      <m:t>+</m:t>
+                    </m:r>
+                    <m:r>
+                      <a:rPr lang="en-US" sz="2800" i="1">
+                        <a:latin typeface="Cambria Math"/>
+                      </a:rPr>
+                      <m:t>1</m:t>
+                    </m:r>
+                    <m:r>
+                      <a:rPr lang="en-US" sz="2800" i="1">
+                        <a:latin typeface="Cambria Math"/>
+                      </a:rPr>
+                      <m:t>×</m:t>
                     </m:r>
                     <m:sSup>
                       <m:sSupPr>
@@ -13856,7 +14456,13 @@
                           <a:rPr lang="en-US" sz="2800" i="1">
                             <a:latin typeface="Cambria Math"/>
                           </a:rPr>
-                          <m:t>−6</m:t>
+                          <m:t>−</m:t>
+                        </m:r>
+                        <m:r>
+                          <a:rPr lang="en-US" sz="2800" i="1">
+                            <a:latin typeface="Cambria Math"/>
+                          </a:rPr>
+                          <m:t>6</m:t>
                         </m:r>
                       </m:sup>
                     </m:sSup>
@@ -13864,7 +14470,19 @@
                       <a:rPr lang="en-US" sz="2800" i="1">
                         <a:latin typeface="Cambria Math"/>
                       </a:rPr>
-                      <m:t>+1×</m:t>
+                      <m:t>+</m:t>
+                    </m:r>
+                    <m:r>
+                      <a:rPr lang="en-US" sz="2800" i="1">
+                        <a:latin typeface="Cambria Math"/>
+                      </a:rPr>
+                      <m:t>1</m:t>
+                    </m:r>
+                    <m:r>
+                      <a:rPr lang="en-US" sz="2800" i="1">
+                        <a:latin typeface="Cambria Math"/>
+                      </a:rPr>
+                      <m:t>×</m:t>
                     </m:r>
                     <m:sSup>
                       <m:sSupPr>
@@ -13887,7 +14505,13 @@
                           <a:rPr lang="en-US" sz="2800" i="1">
                             <a:latin typeface="Cambria Math"/>
                           </a:rPr>
-                          <m:t>−7</m:t>
+                          <m:t>−</m:t>
+                        </m:r>
+                        <m:r>
+                          <a:rPr lang="en-US" sz="2800" i="1">
+                            <a:latin typeface="Cambria Math"/>
+                          </a:rPr>
+                          <m:t>7</m:t>
                         </m:r>
                       </m:sup>
                     </m:sSup>
@@ -13901,7 +14525,19 @@
                       <a:rPr lang="en-US" sz="2800" i="1">
                         <a:latin typeface="Cambria Math"/>
                       </a:rPr>
-                      <m:t>0.9921875</m:t>
+                      <m:t>0</m:t>
+                    </m:r>
+                    <m:r>
+                      <a:rPr lang="en-US" sz="2800" i="1">
+                        <a:latin typeface="Cambria Math"/>
+                      </a:rPr>
+                      <m:t>.</m:t>
+                    </m:r>
+                    <m:r>
+                      <a:rPr lang="en-US" sz="2800" i="1">
+                        <a:latin typeface="Cambria Math"/>
+                      </a:rPr>
+                      <m:t>9921875</m:t>
                     </m:r>
                   </m:oMath>
                 </a14:m>
@@ -13947,7 +14583,13 @@
                               <a:rPr lang="en-US" sz="2800" i="1">
                                 <a:latin typeface="Cambria Math"/>
                               </a:rPr>
-                              <m:t>−1</m:t>
+                              <m:t>−</m:t>
+                            </m:r>
+                            <m:r>
+                              <a:rPr lang="en-US" sz="2800" i="1">
+                                <a:latin typeface="Cambria Math"/>
+                              </a:rPr>
+                              <m:t>1</m:t>
                             </m:r>
                           </m:e>
                         </m:d>
@@ -13980,7 +14622,13 @@
                           <a:rPr lang="en-US" sz="2800" i="1">
                             <a:latin typeface="Cambria Math"/>
                           </a:rPr>
-                          <m:t>1+</m:t>
+                          <m:t>1</m:t>
+                        </m:r>
+                        <m:r>
+                          <a:rPr lang="en-US" sz="2800" i="1">
+                            <a:latin typeface="Cambria Math"/>
+                          </a:rPr>
+                          <m:t>+</m:t>
                         </m:r>
                         <m:r>
                           <a:rPr lang="en-US" sz="2800" i="1">
@@ -14023,7 +14671,13 @@
                           <a:rPr lang="en-US" sz="2800" i="1">
                             <a:latin typeface="Cambria Math"/>
                           </a:rPr>
-                          <m:t>−127</m:t>
+                          <m:t>−</m:t>
+                        </m:r>
+                        <m:r>
+                          <a:rPr lang="en-US" sz="2800" i="1">
+                            <a:latin typeface="Cambria Math"/>
+                          </a:rPr>
+                          <m:t>127</m:t>
                         </m:r>
                       </m:sup>
                     </m:sSup>
@@ -14074,7 +14728,13 @@
                                 <a:rPr lang="en-US" sz="2800" i="1">
                                   <a:latin typeface="Cambria Math"/>
                                 </a:rPr>
-                                <m:t>−1</m:t>
+                                <m:t>−</m:t>
+                              </m:r>
+                              <m:r>
+                                <a:rPr lang="en-US" sz="2800" i="1">
+                                  <a:latin typeface="Cambria Math"/>
+                                </a:rPr>
+                                <m:t>1</m:t>
                               </m:r>
                             </m:e>
                           </m:d>
@@ -14107,7 +14767,31 @@
                             <a:rPr lang="en-US" sz="2800" i="1">
                               <a:latin typeface="Cambria Math"/>
                             </a:rPr>
-                            <m:t>1+0.9921875</m:t>
+                            <m:t>1</m:t>
+                          </m:r>
+                          <m:r>
+                            <a:rPr lang="en-US" sz="2800" i="1">
+                              <a:latin typeface="Cambria Math"/>
+                            </a:rPr>
+                            <m:t>+</m:t>
+                          </m:r>
+                          <m:r>
+                            <a:rPr lang="en-US" sz="2800" i="1">
+                              <a:latin typeface="Cambria Math"/>
+                            </a:rPr>
+                            <m:t>0</m:t>
+                          </m:r>
+                          <m:r>
+                            <a:rPr lang="en-US" sz="2800" i="1">
+                              <a:latin typeface="Cambria Math"/>
+                            </a:rPr>
+                            <m:t>.</m:t>
+                          </m:r>
+                          <m:r>
+                            <a:rPr lang="en-US" sz="2800" i="1">
+                              <a:latin typeface="Cambria Math"/>
+                            </a:rPr>
+                            <m:t>9921875</m:t>
                           </m:r>
                         </m:e>
                       </m:d>
@@ -14138,7 +14822,19 @@
                             <a:rPr lang="en-US" sz="2800" i="1">
                               <a:latin typeface="Cambria Math"/>
                             </a:rPr>
-                            <m:t>131−127</m:t>
+                            <m:t>131</m:t>
+                          </m:r>
+                          <m:r>
+                            <a:rPr lang="en-US" sz="2800" i="1">
+                              <a:latin typeface="Cambria Math"/>
+                            </a:rPr>
+                            <m:t>−</m:t>
+                          </m:r>
+                          <m:r>
+                            <a:rPr lang="en-US" sz="2800" i="1">
+                              <a:latin typeface="Cambria Math"/>
+                            </a:rPr>
+                            <m:t>127</m:t>
                           </m:r>
                         </m:sup>
                       </m:sSup>
@@ -14157,7 +14853,43 @@
                         <a:rPr lang="en-US" sz="2800" i="1">
                           <a:latin typeface="Cambria Math"/>
                         </a:rPr>
-                        <m:t>−1×1.9921875×</m:t>
+                        <m:t>−</m:t>
+                      </m:r>
+                      <m:r>
+                        <a:rPr lang="en-US" sz="2800" i="1">
+                          <a:latin typeface="Cambria Math"/>
+                        </a:rPr>
+                        <m:t>1</m:t>
+                      </m:r>
+                      <m:r>
+                        <a:rPr lang="en-US" sz="2800" i="1">
+                          <a:latin typeface="Cambria Math"/>
+                        </a:rPr>
+                        <m:t>×</m:t>
+                      </m:r>
+                      <m:r>
+                        <a:rPr lang="en-US" sz="2800" i="1">
+                          <a:latin typeface="Cambria Math"/>
+                        </a:rPr>
+                        <m:t>1</m:t>
+                      </m:r>
+                      <m:r>
+                        <a:rPr lang="en-US" sz="2800" i="1">
+                          <a:latin typeface="Cambria Math"/>
+                        </a:rPr>
+                        <m:t>.</m:t>
+                      </m:r>
+                      <m:r>
+                        <a:rPr lang="en-US" sz="2800" i="1">
+                          <a:latin typeface="Cambria Math"/>
+                        </a:rPr>
+                        <m:t>9921875</m:t>
+                      </m:r>
+                      <m:r>
+                        <a:rPr lang="en-US" sz="2800" i="1">
+                          <a:latin typeface="Cambria Math"/>
+                        </a:rPr>
+                        <m:t>×</m:t>
                       </m:r>
                       <m:sSup>
                         <m:sSupPr>
@@ -14199,7 +14931,25 @@
                         <a:rPr lang="en-US" sz="2800" i="1">
                           <a:latin typeface="Cambria Math"/>
                         </a:rPr>
-                        <m:t>−31.875</m:t>
+                        <m:t>−</m:t>
+                      </m:r>
+                      <m:r>
+                        <a:rPr lang="en-US" sz="2800" i="1">
+                          <a:latin typeface="Cambria Math"/>
+                        </a:rPr>
+                        <m:t>31</m:t>
+                      </m:r>
+                      <m:r>
+                        <a:rPr lang="en-US" sz="2800" i="1">
+                          <a:latin typeface="Cambria Math"/>
+                        </a:rPr>
+                        <m:t>.</m:t>
+                      </m:r>
+                      <m:r>
+                        <a:rPr lang="en-US" sz="2800" i="1">
+                          <a:latin typeface="Cambria Math"/>
+                        </a:rPr>
+                        <m:t>875</m:t>
                       </m:r>
                     </m:oMath>
                   </m:oMathPara>
@@ -14314,7 +15064,7 @@
 </p:sld>
 </file>
 
-<file path=ppt/slides/slide15.xml><?xml version="1.0" encoding="utf-8"?>
+<file path=ppt/slides/slide16.xml><?xml version="1.0" encoding="utf-8"?>
 <p:sld xmlns:a="http://schemas.openxmlformats.org/drawingml/2006/main" xmlns:r="http://schemas.openxmlformats.org/officeDocument/2006/relationships" xmlns:p="http://schemas.openxmlformats.org/presentationml/2006/main">
   <p:cSld>
     <p:spTree>
@@ -14403,7 +15153,7 @@
             <a:fld id="{EA7C8D44-3667-46F6-9772-CC52308E2A7F}" type="slidenum">
               <a:rPr kumimoji="0" lang="en-US" smtClean="0"/>
               <a:pPr/>
-              <a:t>15</a:t>
+              <a:t>16</a:t>
             </a:fld>
             <a:endParaRPr kumimoji="0" lang="en-US" dirty="0"/>
           </a:p>
@@ -15122,7 +15872,7 @@
 </p:sld>
 </file>
 
-<file path=ppt/slides/slide16.xml><?xml version="1.0" encoding="utf-8"?>
+<file path=ppt/slides/slide17.xml><?xml version="1.0" encoding="utf-8"?>
 <p:sld xmlns:a="http://schemas.openxmlformats.org/drawingml/2006/main" xmlns:r="http://schemas.openxmlformats.org/officeDocument/2006/relationships" xmlns:p="http://schemas.openxmlformats.org/presentationml/2006/main">
   <p:cSld>
     <p:spTree>
@@ -15217,7 +15967,7 @@
             <a:fld id="{EA7C8D44-3667-46F6-9772-CC52308E2A7F}" type="slidenum">
               <a:rPr kumimoji="0" lang="en-US" smtClean="0"/>
               <a:pPr/>
-              <a:t>16</a:t>
+              <a:t>17</a:t>
             </a:fld>
             <a:endParaRPr kumimoji="0" lang="en-US" dirty="0"/>
           </a:p>
@@ -15838,7 +16588,7 @@
 </p:sld>
 </file>
 
-<file path=ppt/slides/slide17.xml><?xml version="1.0" encoding="utf-8"?>
+<file path=ppt/slides/slide18.xml><?xml version="1.0" encoding="utf-8"?>
 <p:sld xmlns:a="http://schemas.openxmlformats.org/drawingml/2006/main" xmlns:r="http://schemas.openxmlformats.org/officeDocument/2006/relationships" xmlns:p="http://schemas.openxmlformats.org/presentationml/2006/main">
   <p:cSld>
     <p:spTree>
@@ -15933,7 +16683,7 @@
             <a:fld id="{EA7C8D44-3667-46F6-9772-CC52308E2A7F}" type="slidenum">
               <a:rPr kumimoji="0" lang="en-US" smtClean="0"/>
               <a:pPr/>
-              <a:t>17</a:t>
+              <a:t>18</a:t>
             </a:fld>
             <a:endParaRPr kumimoji="0" lang="en-US" dirty="0"/>
           </a:p>
@@ -16048,7 +16798,13 @@
                       <a:rPr lang="en-US" sz="2800" i="1">
                         <a:latin typeface="Cambria Math"/>
                       </a:rPr>
-                      <m:t>=130</m:t>
+                      <m:t>=</m:t>
+                    </m:r>
+                    <m:r>
+                      <a:rPr lang="en-US" sz="2800" i="1">
+                        <a:latin typeface="Cambria Math"/>
+                      </a:rPr>
+                      <m:t>130</m:t>
                     </m:r>
                   </m:oMath>
                 </a14:m>
@@ -16074,7 +16830,13 @@
                           <a:rPr lang="en-US" sz="2800" i="1">
                             <a:latin typeface="Cambria Math"/>
                           </a:rPr>
-                          <m:t>0.</m:t>
+                          <m:t>0</m:t>
+                        </m:r>
+                        <m:r>
+                          <a:rPr lang="en-US" sz="2800" i="1">
+                            <a:latin typeface="Cambria Math"/>
+                          </a:rPr>
+                          <m:t>.</m:t>
                         </m:r>
                         <m:r>
                           <a:rPr lang="en-US" sz="2800" b="0" i="1" smtClean="0">
@@ -16134,7 +16896,13 @@
                           <a:rPr lang="en-US" sz="2800" i="1">
                             <a:latin typeface="Cambria Math"/>
                           </a:rPr>
-                          <m:t>−1</m:t>
+                          <m:t>−</m:t>
+                        </m:r>
+                        <m:r>
+                          <a:rPr lang="en-US" sz="2800" i="1">
+                            <a:latin typeface="Cambria Math"/>
+                          </a:rPr>
+                          <m:t>1</m:t>
                         </m:r>
                       </m:sup>
                     </m:sSup>
@@ -16177,7 +16945,13 @@
                           <a:rPr lang="en-US" sz="2800" i="1">
                             <a:latin typeface="Cambria Math"/>
                           </a:rPr>
-                          <m:t>−2</m:t>
+                          <m:t>−</m:t>
+                        </m:r>
+                        <m:r>
+                          <a:rPr lang="en-US" sz="2800" i="1">
+                            <a:latin typeface="Cambria Math"/>
+                          </a:rPr>
+                          <m:t>2</m:t>
                         </m:r>
                       </m:sup>
                     </m:sSup>
@@ -16185,7 +16959,19 @@
                       <a:rPr lang="en-US" sz="2800" i="1">
                         <a:latin typeface="Cambria Math"/>
                       </a:rPr>
-                      <m:t>+1×</m:t>
+                      <m:t>+</m:t>
+                    </m:r>
+                    <m:r>
+                      <a:rPr lang="en-US" sz="2800" i="1">
+                        <a:latin typeface="Cambria Math"/>
+                      </a:rPr>
+                      <m:t>1</m:t>
+                    </m:r>
+                    <m:r>
+                      <a:rPr lang="en-US" sz="2800" i="1">
+                        <a:latin typeface="Cambria Math"/>
+                      </a:rPr>
+                      <m:t>×</m:t>
                     </m:r>
                     <m:sSup>
                       <m:sSupPr>
@@ -16222,7 +17008,25 @@
                       <a:rPr lang="en-US" sz="2800" i="1">
                         <a:latin typeface="Cambria Math" panose="02040503050406030204" pitchFamily="18" charset="0"/>
                       </a:rPr>
-                      <m:t>=0.8125</m:t>
+                      <m:t>=</m:t>
+                    </m:r>
+                    <m:r>
+                      <a:rPr lang="en-US" sz="2800" i="1">
+                        <a:latin typeface="Cambria Math" panose="02040503050406030204" pitchFamily="18" charset="0"/>
+                      </a:rPr>
+                      <m:t>0</m:t>
+                    </m:r>
+                    <m:r>
+                      <a:rPr lang="en-US" sz="2800" i="1">
+                        <a:latin typeface="Cambria Math" panose="02040503050406030204" pitchFamily="18" charset="0"/>
+                      </a:rPr>
+                      <m:t>.</m:t>
+                    </m:r>
+                    <m:r>
+                      <a:rPr lang="en-US" sz="2800" i="1">
+                        <a:latin typeface="Cambria Math" panose="02040503050406030204" pitchFamily="18" charset="0"/>
+                      </a:rPr>
+                      <m:t>8125</m:t>
                     </m:r>
                   </m:oMath>
                 </a14:m>
@@ -16268,7 +17072,13 @@
                               <a:rPr lang="en-US" sz="2800" i="1">
                                 <a:latin typeface="Cambria Math"/>
                               </a:rPr>
-                              <m:t>−1</m:t>
+                              <m:t>−</m:t>
+                            </m:r>
+                            <m:r>
+                              <a:rPr lang="en-US" sz="2800" i="1">
+                                <a:latin typeface="Cambria Math"/>
+                              </a:rPr>
+                              <m:t>1</m:t>
                             </m:r>
                           </m:e>
                         </m:d>
@@ -16301,7 +17111,13 @@
                           <a:rPr lang="en-US" sz="2800" i="1">
                             <a:latin typeface="Cambria Math"/>
                           </a:rPr>
-                          <m:t>1+</m:t>
+                          <m:t>1</m:t>
+                        </m:r>
+                        <m:r>
+                          <a:rPr lang="en-US" sz="2800" i="1">
+                            <a:latin typeface="Cambria Math"/>
+                          </a:rPr>
+                          <m:t>+</m:t>
                         </m:r>
                         <m:r>
                           <a:rPr lang="en-US" sz="2800" i="1">
@@ -16344,7 +17160,13 @@
                           <a:rPr lang="en-US" sz="2800" i="1">
                             <a:latin typeface="Cambria Math"/>
                           </a:rPr>
-                          <m:t>−127</m:t>
+                          <m:t>−</m:t>
+                        </m:r>
+                        <m:r>
+                          <a:rPr lang="en-US" sz="2800" i="1">
+                            <a:latin typeface="Cambria Math"/>
+                          </a:rPr>
+                          <m:t>127</m:t>
                         </m:r>
                       </m:sup>
                     </m:sSup>
@@ -16395,7 +17217,13 @@
                                 <a:rPr lang="en-US" sz="2800" i="1">
                                   <a:latin typeface="Cambria Math"/>
                                 </a:rPr>
-                                <m:t>−1</m:t>
+                                <m:t>−</m:t>
+                              </m:r>
+                              <m:r>
+                                <a:rPr lang="en-US" sz="2800" i="1">
+                                  <a:latin typeface="Cambria Math"/>
+                                </a:rPr>
+                                <m:t>1</m:t>
                               </m:r>
                             </m:e>
                           </m:d>
@@ -16428,13 +17256,31 @@
                             <a:rPr lang="en-US" sz="2800" i="1">
                               <a:latin typeface="Cambria Math"/>
                             </a:rPr>
-                            <m:t>1+</m:t>
+                            <m:t>1</m:t>
+                          </m:r>
+                          <m:r>
+                            <a:rPr lang="en-US" sz="2800" i="1">
+                              <a:latin typeface="Cambria Math"/>
+                            </a:rPr>
+                            <m:t>+</m:t>
                           </m:r>
                           <m:r>
                             <a:rPr lang="en-US" sz="2800" i="1">
                               <a:latin typeface="Cambria Math" panose="02040503050406030204" pitchFamily="18" charset="0"/>
                             </a:rPr>
-                            <m:t>0.8125</m:t>
+                            <m:t>0</m:t>
+                          </m:r>
+                          <m:r>
+                            <a:rPr lang="en-US" sz="2800" i="1">
+                              <a:latin typeface="Cambria Math" panose="02040503050406030204" pitchFamily="18" charset="0"/>
+                            </a:rPr>
+                            <m:t>.</m:t>
+                          </m:r>
+                          <m:r>
+                            <a:rPr lang="en-US" sz="2800" i="1">
+                              <a:latin typeface="Cambria Math" panose="02040503050406030204" pitchFamily="18" charset="0"/>
+                            </a:rPr>
+                            <m:t>8125</m:t>
                           </m:r>
                         </m:e>
                       </m:d>
@@ -16477,7 +17323,13 @@
                             <a:rPr lang="en-US" sz="2800" i="1">
                               <a:latin typeface="Cambria Math"/>
                             </a:rPr>
-                            <m:t>−127</m:t>
+                            <m:t>−</m:t>
+                          </m:r>
+                          <m:r>
+                            <a:rPr lang="en-US" sz="2800" i="1">
+                              <a:latin typeface="Cambria Math"/>
+                            </a:rPr>
+                            <m:t>127</m:t>
                           </m:r>
                         </m:sup>
                       </m:sSup>
@@ -16496,7 +17348,25 @@
                         <a:rPr lang="en-US" sz="2800" i="1">
                           <a:latin typeface="Cambria Math"/>
                         </a:rPr>
-                        <m:t>1×1.</m:t>
+                        <m:t>1</m:t>
+                      </m:r>
+                      <m:r>
+                        <a:rPr lang="en-US" sz="2800" i="1">
+                          <a:latin typeface="Cambria Math"/>
+                        </a:rPr>
+                        <m:t>×</m:t>
+                      </m:r>
+                      <m:r>
+                        <a:rPr lang="en-US" sz="2800" i="1">
+                          <a:latin typeface="Cambria Math"/>
+                        </a:rPr>
+                        <m:t>1</m:t>
+                      </m:r>
+                      <m:r>
+                        <a:rPr lang="en-US" sz="2800" i="1">
+                          <a:latin typeface="Cambria Math"/>
+                        </a:rPr>
+                        <m:t>.</m:t>
                       </m:r>
                       <m:r>
                         <a:rPr lang="en-US" sz="2800" b="0" i="1" smtClean="0">
@@ -16550,7 +17420,19 @@
                         <a:rPr lang="en-US" sz="2800" b="0" i="1" smtClean="0">
                           <a:latin typeface="Cambria Math" panose="02040503050406030204" pitchFamily="18" charset="0"/>
                         </a:rPr>
-                        <m:t>14.5</m:t>
+                        <m:t>14</m:t>
+                      </m:r>
+                      <m:r>
+                        <a:rPr lang="en-US" sz="2800" b="0" i="1" smtClean="0">
+                          <a:latin typeface="Cambria Math" panose="02040503050406030204" pitchFamily="18" charset="0"/>
+                        </a:rPr>
+                        <m:t>.</m:t>
+                      </m:r>
+                      <m:r>
+                        <a:rPr lang="en-US" sz="2800" b="0" i="1" smtClean="0">
+                          <a:latin typeface="Cambria Math" panose="02040503050406030204" pitchFamily="18" charset="0"/>
+                        </a:rPr>
+                        <m:t>5</m:t>
                       </m:r>
                     </m:oMath>
                   </m:oMathPara>
@@ -16613,7 +17495,7 @@
 </p:sld>
 </file>
 
-<file path=ppt/slides/slide18.xml><?xml version="1.0" encoding="utf-8"?>
+<file path=ppt/slides/slide19.xml><?xml version="1.0" encoding="utf-8"?>
 <p:sld xmlns:a="http://schemas.openxmlformats.org/drawingml/2006/main" xmlns:r="http://schemas.openxmlformats.org/officeDocument/2006/relationships" xmlns:p="http://schemas.openxmlformats.org/presentationml/2006/main">
   <p:cSld>
     <p:spTree>
@@ -16692,7 +17574,7 @@
             <a:fld id="{EA7C8D44-3667-46F6-9772-CC52308E2A7F}" type="slidenum">
               <a:rPr kumimoji="0" lang="en-US" smtClean="0"/>
               <a:pPr/>
-              <a:t>18</a:t>
+              <a:t>19</a:t>
             </a:fld>
             <a:endParaRPr kumimoji="0" lang="en-US" dirty="0"/>
           </a:p>
@@ -17951,1447 +18833,6 @@
     <p:extLst>
       <p:ext uri="{BB962C8B-B14F-4D97-AF65-F5344CB8AC3E}">
         <p14:creationId xmlns:p14="http://schemas.microsoft.com/office/powerpoint/2010/main" val="378386796"/>
-      </p:ext>
-    </p:extLst>
-  </p:cSld>
-  <p:clrMapOvr>
-    <a:masterClrMapping/>
-  </p:clrMapOvr>
-</p:sld>
-</file>
-
-<file path=ppt/slides/slide19.xml><?xml version="1.0" encoding="utf-8"?>
-<p:sld xmlns:a="http://schemas.openxmlformats.org/drawingml/2006/main" xmlns:r="http://schemas.openxmlformats.org/officeDocument/2006/relationships" xmlns:p="http://schemas.openxmlformats.org/presentationml/2006/main">
-  <p:cSld>
-    <p:spTree>
-      <p:nvGrpSpPr>
-        <p:cNvPr id="1" name="">
-          <a:extLst>
-            <a:ext uri="{FF2B5EF4-FFF2-40B4-BE49-F238E27FC236}">
-              <a16:creationId xmlns:a16="http://schemas.microsoft.com/office/drawing/2014/main" id="{79CA1E23-1948-4AB3-BE51-06B1176B9EDD}"/>
-            </a:ext>
-          </a:extLst>
-        </p:cNvPr>
-        <p:cNvGrpSpPr/>
-        <p:nvPr/>
-      </p:nvGrpSpPr>
-      <p:grpSpPr>
-        <a:xfrm>
-          <a:off x="0" y="0"/>
-          <a:ext cx="0" cy="0"/>
-          <a:chOff x="0" y="0"/>
-          <a:chExt cx="0" cy="0"/>
-        </a:xfrm>
-      </p:grpSpPr>
-      <p:sp>
-        <p:nvSpPr>
-          <p:cNvPr id="2" name="Title 1">
-            <a:extLst>
-              <a:ext uri="{FF2B5EF4-FFF2-40B4-BE49-F238E27FC236}">
-                <a16:creationId xmlns:a16="http://schemas.microsoft.com/office/drawing/2014/main" id="{06D0CDC3-A7FF-9EEE-C5C3-502A76B1D8CC}"/>
-              </a:ext>
-            </a:extLst>
-          </p:cNvPr>
-          <p:cNvSpPr>
-            <a:spLocks noGrp="1"/>
-          </p:cNvSpPr>
-          <p:nvPr>
-            <p:ph type="title"/>
-          </p:nvPr>
-        </p:nvSpPr>
-        <p:spPr/>
-        <p:txBody>
-          <a:bodyPr>
-            <a:normAutofit/>
-          </a:bodyPr>
-          <a:lstStyle/>
-          <a:p>
-            <a:r>
-              <a:rPr lang="en-US" b="1" dirty="0"/>
-              <a:t>Encoding </a:t>
-            </a:r>
-            <a:r>
-              <a:rPr lang="en-US" b="1" dirty="0">
-                <a:solidFill>
-                  <a:srgbClr val="C00000"/>
-                </a:solidFill>
-              </a:rPr>
-              <a:t>1.3</a:t>
-            </a:r>
-            <a:r>
-              <a:rPr lang="en-US" b="1" dirty="0"/>
-              <a:t> into IEEE Std 754 Single-Precision</a:t>
-            </a:r>
-          </a:p>
-        </p:txBody>
-      </p:sp>
-      <p:sp>
-        <p:nvSpPr>
-          <p:cNvPr id="3" name="Slide Number Placeholder 2">
-            <a:extLst>
-              <a:ext uri="{FF2B5EF4-FFF2-40B4-BE49-F238E27FC236}">
-                <a16:creationId xmlns:a16="http://schemas.microsoft.com/office/drawing/2014/main" id="{A5CB2435-927F-ED99-AB72-9D349255325E}"/>
-              </a:ext>
-            </a:extLst>
-          </p:cNvPr>
-          <p:cNvSpPr>
-            <a:spLocks noGrp="1"/>
-          </p:cNvSpPr>
-          <p:nvPr>
-            <p:ph type="sldNum" sz="quarter" idx="12"/>
-          </p:nvPr>
-        </p:nvSpPr>
-        <p:spPr/>
-        <p:txBody>
-          <a:bodyPr/>
-          <a:lstStyle/>
-          <a:p>
-            <a:fld id="{EA7C8D44-3667-46F6-9772-CC52308E2A7F}" type="slidenum">
-              <a:rPr kumimoji="0" lang="en-US" smtClean="0"/>
-              <a:pPr/>
-              <a:t>19</a:t>
-            </a:fld>
-            <a:endParaRPr kumimoji="0" lang="en-US" dirty="0"/>
-          </a:p>
-        </p:txBody>
-      </p:sp>
-      <mc:AlternateContent xmlns:mc="http://schemas.openxmlformats.org/markup-compatibility/2006" xmlns:a14="http://schemas.microsoft.com/office/drawing/2010/main">
-        <mc:Choice Requires="a14">
-          <p:sp>
-            <p:nvSpPr>
-              <p:cNvPr id="4" name="Content Placeholder 3">
-                <a:extLst>
-                  <a:ext uri="{FF2B5EF4-FFF2-40B4-BE49-F238E27FC236}">
-                    <a16:creationId xmlns:a16="http://schemas.microsoft.com/office/drawing/2014/main" id="{B3D4FF65-D71D-3471-F040-1E677F86A2DD}"/>
-                  </a:ext>
-                </a:extLst>
-              </p:cNvPr>
-              <p:cNvSpPr>
-                <a:spLocks noGrp="1"/>
-              </p:cNvSpPr>
-              <p:nvPr>
-                <p:ph sz="quarter" idx="1"/>
-              </p:nvPr>
-            </p:nvSpPr>
-            <p:spPr>
-              <a:xfrm>
-                <a:off x="990600" y="1143000"/>
-                <a:ext cx="10363200" cy="5013960"/>
-              </a:xfrm>
-            </p:spPr>
-            <p:txBody>
-              <a:bodyPr>
-                <a:normAutofit fontScale="77500" lnSpcReduction="20000"/>
-              </a:bodyPr>
-              <a:lstStyle/>
-              <a:p>
-                <a:r>
-                  <a:rPr lang="en-US" dirty="0"/>
-                  <a:t>Normalization:</a:t>
-                </a:r>
-                <a:endParaRPr lang="en-US" i="1" dirty="0">
-                  <a:latin typeface="Cambria Math"/>
-                </a:endParaRPr>
-              </a:p>
-              <a:p>
-                <a14:m>
-                  <m:oMath xmlns:m="http://schemas.openxmlformats.org/officeDocument/2006/math">
-                    <m:sSup>
-                      <m:sSupPr>
-                        <m:ctrlPr>
-                          <a:rPr lang="en-US" i="1" smtClean="0">
-                            <a:latin typeface="Cambria Math" panose="02040503050406030204" pitchFamily="18" charset="0"/>
-                          </a:rPr>
-                        </m:ctrlPr>
-                      </m:sSupPr>
-                      <m:e>
-                        <m:r>
-                          <a:rPr lang="en-US" i="1">
-                            <a:latin typeface="Cambria Math" panose="02040503050406030204" pitchFamily="18" charset="0"/>
-                          </a:rPr>
-                          <m:t>2</m:t>
-                        </m:r>
-                      </m:e>
-                      <m:sup>
-                        <m:r>
-                          <a:rPr lang="en-US" b="0" i="1" smtClean="0">
-                            <a:latin typeface="Cambria Math" panose="02040503050406030204" pitchFamily="18" charset="0"/>
-                          </a:rPr>
-                          <m:t>0</m:t>
-                        </m:r>
-                      </m:sup>
-                    </m:sSup>
-                    <m:r>
-                      <a:rPr lang="en-US" b="0" i="1" smtClean="0">
-                        <a:latin typeface="Cambria Math" panose="02040503050406030204" pitchFamily="18" charset="0"/>
-                      </a:rPr>
-                      <m:t>&lt;</m:t>
-                    </m:r>
-                    <m:r>
-                      <a:rPr lang="en-US" i="1" smtClean="0">
-                        <a:latin typeface="Cambria Math"/>
-                      </a:rPr>
-                      <m:t>1</m:t>
-                    </m:r>
-                    <m:r>
-                      <a:rPr lang="en-US" i="1" smtClean="0">
-                        <a:latin typeface="Cambria Math"/>
-                      </a:rPr>
-                      <m:t>.</m:t>
-                    </m:r>
-                    <m:r>
-                      <a:rPr lang="en-US" b="0" i="1" smtClean="0">
-                        <a:latin typeface="Cambria Math" panose="02040503050406030204" pitchFamily="18" charset="0"/>
-                      </a:rPr>
-                      <m:t>3</m:t>
-                    </m:r>
-                    <m:r>
-                      <a:rPr lang="en-US" b="0" i="1" smtClean="0">
-                        <a:latin typeface="Cambria Math" panose="02040503050406030204" pitchFamily="18" charset="0"/>
-                      </a:rPr>
-                      <m:t>&lt;</m:t>
-                    </m:r>
-                    <m:sSup>
-                      <m:sSupPr>
-                        <m:ctrlPr>
-                          <a:rPr lang="en-US" b="0" i="1" smtClean="0">
-                            <a:latin typeface="Cambria Math" panose="02040503050406030204" pitchFamily="18" charset="0"/>
-                          </a:rPr>
-                        </m:ctrlPr>
-                      </m:sSupPr>
-                      <m:e>
-                        <m:r>
-                          <a:rPr lang="en-US" b="0" i="1" smtClean="0">
-                            <a:latin typeface="Cambria Math" panose="02040503050406030204" pitchFamily="18" charset="0"/>
-                          </a:rPr>
-                          <m:t>2</m:t>
-                        </m:r>
-                      </m:e>
-                      <m:sup>
-                        <m:r>
-                          <a:rPr lang="en-US" b="0" i="1" smtClean="0">
-                            <a:latin typeface="Cambria Math" panose="02040503050406030204" pitchFamily="18" charset="0"/>
-                          </a:rPr>
-                          <m:t>1</m:t>
-                        </m:r>
-                      </m:sup>
-                    </m:sSup>
-                    <m:r>
-                      <a:rPr lang="en-US" b="0" i="1" smtClean="0">
-                        <a:latin typeface="Cambria Math" panose="02040503050406030204" pitchFamily="18" charset="0"/>
-                      </a:rPr>
-                      <m:t>,</m:t>
-                    </m:r>
-                    <m:f>
-                      <m:fPr>
-                        <m:ctrlPr>
-                          <a:rPr lang="en-US" b="0" i="1" smtClean="0">
-                            <a:latin typeface="Cambria Math" panose="02040503050406030204" pitchFamily="18" charset="0"/>
-                          </a:rPr>
-                        </m:ctrlPr>
-                      </m:fPr>
-                      <m:num>
-                        <m:r>
-                          <a:rPr lang="en-US" i="1">
-                            <a:latin typeface="Cambria Math"/>
-                          </a:rPr>
-                          <m:t>14</m:t>
-                        </m:r>
-                        <m:r>
-                          <a:rPr lang="en-US" i="1">
-                            <a:latin typeface="Cambria Math"/>
-                          </a:rPr>
-                          <m:t>.</m:t>
-                        </m:r>
-                        <m:r>
-                          <a:rPr lang="en-US" i="1">
-                            <a:latin typeface="Cambria Math"/>
-                          </a:rPr>
-                          <m:t>5</m:t>
-                        </m:r>
-                      </m:num>
-                      <m:den>
-                        <m:sSup>
-                          <m:sSupPr>
-                            <m:ctrlPr>
-                              <a:rPr lang="en-US" b="0" i="1" smtClean="0">
-                                <a:latin typeface="Cambria Math" panose="02040503050406030204" pitchFamily="18" charset="0"/>
-                              </a:rPr>
-                            </m:ctrlPr>
-                          </m:sSupPr>
-                          <m:e>
-                            <m:r>
-                              <a:rPr lang="en-US" b="0" i="1" smtClean="0">
-                                <a:latin typeface="Cambria Math" panose="02040503050406030204" pitchFamily="18" charset="0"/>
-                              </a:rPr>
-                              <m:t>2</m:t>
-                            </m:r>
-                          </m:e>
-                          <m:sup>
-                            <m:r>
-                              <a:rPr lang="en-US" b="0" i="1" smtClean="0">
-                                <a:latin typeface="Cambria Math" panose="02040503050406030204" pitchFamily="18" charset="0"/>
-                              </a:rPr>
-                              <m:t>0</m:t>
-                            </m:r>
-                          </m:sup>
-                        </m:sSup>
-                      </m:den>
-                    </m:f>
-                    <m:r>
-                      <a:rPr lang="en-US" b="0" i="1" smtClean="0">
-                        <a:latin typeface="Cambria Math" panose="02040503050406030204" pitchFamily="18" charset="0"/>
-                      </a:rPr>
-                      <m:t>=</m:t>
-                    </m:r>
-                    <m:r>
-                      <a:rPr lang="en-US" b="0" i="1" smtClean="0">
-                        <a:latin typeface="Cambria Math" panose="02040503050406030204" pitchFamily="18" charset="0"/>
-                      </a:rPr>
-                      <m:t>1</m:t>
-                    </m:r>
-                    <m:r>
-                      <a:rPr lang="en-US" b="0" i="1" smtClean="0">
-                        <a:latin typeface="Cambria Math" panose="02040503050406030204" pitchFamily="18" charset="0"/>
-                      </a:rPr>
-                      <m:t>.</m:t>
-                    </m:r>
-                    <m:r>
-                      <a:rPr lang="en-US" b="0" i="1" smtClean="0">
-                        <a:latin typeface="Cambria Math" panose="02040503050406030204" pitchFamily="18" charset="0"/>
-                      </a:rPr>
-                      <m:t>3</m:t>
-                    </m:r>
-                  </m:oMath>
-                </a14:m>
-                <a:endParaRPr lang="en-US" i="1" dirty="0">
-                  <a:latin typeface="Cambria Math"/>
-                </a:endParaRPr>
-              </a:p>
-              <a:p>
-                <a:r>
-                  <a:rPr lang="en-US" dirty="0"/>
-                  <a:t>Hence </a:t>
-                </a:r>
-                <a14:m>
-                  <m:oMath xmlns:m="http://schemas.openxmlformats.org/officeDocument/2006/math">
-                    <m:r>
-                      <a:rPr lang="en-US" i="1">
-                        <a:latin typeface="Cambria Math"/>
-                      </a:rPr>
-                      <m:t>1</m:t>
-                    </m:r>
-                    <m:r>
-                      <a:rPr lang="en-US" i="1">
-                        <a:latin typeface="Cambria Math"/>
-                      </a:rPr>
-                      <m:t>.</m:t>
-                    </m:r>
-                    <m:r>
-                      <a:rPr lang="en-US" b="0" i="1" smtClean="0">
-                        <a:latin typeface="Cambria Math" panose="02040503050406030204" pitchFamily="18" charset="0"/>
-                      </a:rPr>
-                      <m:t>3</m:t>
-                    </m:r>
-                    <m:r>
-                      <a:rPr lang="en-US" i="1">
-                        <a:latin typeface="Cambria Math"/>
-                      </a:rPr>
-                      <m:t>=</m:t>
-                    </m:r>
-                    <m:r>
-                      <a:rPr lang="en-US" i="1" smtClean="0">
-                        <a:latin typeface="Cambria Math"/>
-                      </a:rPr>
-                      <m:t> </m:t>
-                    </m:r>
-                    <m:r>
-                      <a:rPr lang="en-US" i="1">
-                        <a:latin typeface="Cambria Math"/>
-                      </a:rPr>
-                      <m:t>(</m:t>
-                    </m:r>
-                    <m:r>
-                      <a:rPr lang="en-US" i="1">
-                        <a:latin typeface="Cambria Math"/>
-                      </a:rPr>
-                      <m:t>1</m:t>
-                    </m:r>
-                    <m:r>
-                      <a:rPr lang="en-US" i="1">
-                        <a:latin typeface="Cambria Math"/>
-                      </a:rPr>
-                      <m:t>+</m:t>
-                    </m:r>
-                    <m:r>
-                      <a:rPr lang="en-US" i="1">
-                        <a:latin typeface="Cambria Math"/>
-                      </a:rPr>
-                      <m:t>0</m:t>
-                    </m:r>
-                    <m:r>
-                      <a:rPr lang="en-US" i="1">
-                        <a:latin typeface="Cambria Math"/>
-                      </a:rPr>
-                      <m:t>.</m:t>
-                    </m:r>
-                    <m:r>
-                      <a:rPr lang="en-US" b="0" i="1" smtClean="0">
-                        <a:latin typeface="Cambria Math" panose="02040503050406030204" pitchFamily="18" charset="0"/>
-                      </a:rPr>
-                      <m:t>3</m:t>
-                    </m:r>
-                    <m:r>
-                      <a:rPr lang="en-US" i="1">
-                        <a:latin typeface="Cambria Math"/>
-                      </a:rPr>
-                      <m:t>)×</m:t>
-                    </m:r>
-                    <m:sSup>
-                      <m:sSupPr>
-                        <m:ctrlPr>
-                          <a:rPr lang="en-US" i="1">
-                            <a:latin typeface="Cambria Math" panose="02040503050406030204" pitchFamily="18" charset="0"/>
-                          </a:rPr>
-                        </m:ctrlPr>
-                      </m:sSupPr>
-                      <m:e>
-                        <m:r>
-                          <a:rPr lang="en-US" i="1">
-                            <a:latin typeface="Cambria Math"/>
-                          </a:rPr>
-                          <m:t>2</m:t>
-                        </m:r>
-                      </m:e>
-                      <m:sup>
-                        <m:r>
-                          <a:rPr lang="en-US" b="0" i="1" smtClean="0">
-                            <a:latin typeface="Cambria Math" panose="02040503050406030204" pitchFamily="18" charset="0"/>
-                          </a:rPr>
-                          <m:t>0</m:t>
-                        </m:r>
-                      </m:sup>
-                    </m:sSup>
-                  </m:oMath>
-                </a14:m>
-                <a:endParaRPr lang="en-US" dirty="0"/>
-              </a:p>
-              <a:p>
-                <a:r>
-                  <a:rPr lang="en-US" dirty="0"/>
-                  <a:t>Conversion:</a:t>
-                </a:r>
-              </a:p>
-              <a:p>
-                <a14:m>
-                  <m:oMath xmlns:m="http://schemas.openxmlformats.org/officeDocument/2006/math">
-                    <m:r>
-                      <a:rPr lang="en-US" b="0" i="1" smtClean="0">
-                        <a:latin typeface="Cambria Math"/>
-                      </a:rPr>
-                      <m:t>𝑆𝑖𝑔𝑛</m:t>
-                    </m:r>
-                    <m:r>
-                      <a:rPr lang="en-US" b="0" i="1" smtClean="0">
-                        <a:latin typeface="Cambria Math"/>
-                      </a:rPr>
-                      <m:t>=</m:t>
-                    </m:r>
-                    <m:r>
-                      <a:rPr lang="en-US" b="0" i="1" smtClean="0">
-                        <a:latin typeface="Cambria Math"/>
-                      </a:rPr>
-                      <m:t>0</m:t>
-                    </m:r>
-                  </m:oMath>
-                </a14:m>
-                <a:endParaRPr lang="en-US" b="0" i="1" dirty="0">
-                  <a:solidFill>
-                    <a:srgbClr val="C00000"/>
-                  </a:solidFill>
-                  <a:latin typeface="Cambria Math"/>
-                </a:endParaRPr>
-              </a:p>
-              <a:p>
-                <a14:m>
-                  <m:oMath xmlns:m="http://schemas.openxmlformats.org/officeDocument/2006/math">
-                    <m:r>
-                      <a:rPr lang="en-US" i="1">
-                        <a:latin typeface="Cambria Math"/>
-                      </a:rPr>
-                      <m:t>𝐸𝑥𝑝𝑜𝑛𝑒𝑛𝑡</m:t>
-                    </m:r>
-                    <m:r>
-                      <m:rPr>
-                        <m:aln/>
-                      </m:rPr>
-                      <a:rPr lang="en-US" i="1">
-                        <a:latin typeface="Cambria Math"/>
-                      </a:rPr>
-                      <m:t>=</m:t>
-                    </m:r>
-                    <m:r>
-                      <a:rPr lang="en-US" b="0" i="1" smtClean="0">
-                        <a:latin typeface="Cambria Math" panose="02040503050406030204" pitchFamily="18" charset="0"/>
-                      </a:rPr>
-                      <m:t>0</m:t>
-                    </m:r>
-                    <m:r>
-                      <a:rPr lang="en-US" i="1">
-                        <a:latin typeface="Cambria Math"/>
-                      </a:rPr>
-                      <m:t>+</m:t>
-                    </m:r>
-                    <m:r>
-                      <a:rPr lang="en-US" i="1">
-                        <a:latin typeface="Cambria Math"/>
-                      </a:rPr>
-                      <m:t>127</m:t>
-                    </m:r>
-                    <m:r>
-                      <a:rPr lang="en-US" i="1">
-                        <a:latin typeface="Cambria Math"/>
-                      </a:rPr>
-                      <m:t>=</m:t>
-                    </m:r>
-                    <m:r>
-                      <a:rPr lang="en-US" i="1">
-                        <a:latin typeface="Cambria Math"/>
-                      </a:rPr>
-                      <m:t>127</m:t>
-                    </m:r>
-                    <m:r>
-                      <a:rPr lang="en-US" i="1">
-                        <a:latin typeface="Cambria Math"/>
-                      </a:rPr>
-                      <m:t>=</m:t>
-                    </m:r>
-                    <m:sSub>
-                      <m:sSubPr>
-                        <m:ctrlPr>
-                          <a:rPr lang="en-US" i="1">
-                            <a:latin typeface="Cambria Math" panose="02040503050406030204" pitchFamily="18" charset="0"/>
-                          </a:rPr>
-                        </m:ctrlPr>
-                      </m:sSubPr>
-                      <m:e>
-                        <m:r>
-                          <a:rPr lang="en-US" b="0" i="1" smtClean="0">
-                            <a:solidFill>
-                              <a:srgbClr val="0000FF"/>
-                            </a:solidFill>
-                            <a:latin typeface="Cambria Math" panose="02040503050406030204" pitchFamily="18" charset="0"/>
-                          </a:rPr>
-                          <m:t>01111111</m:t>
-                        </m:r>
-                      </m:e>
-                      <m:sub>
-                        <m:r>
-                          <a:rPr lang="en-US" i="1">
-                            <a:latin typeface="Cambria Math"/>
-                          </a:rPr>
-                          <m:t>2</m:t>
-                        </m:r>
-                      </m:sub>
-                    </m:sSub>
-                  </m:oMath>
-                </a14:m>
-                <a:endParaRPr lang="en-US" dirty="0"/>
-              </a:p>
-              <a:p>
-                <a14:m>
-                  <m:oMath xmlns:m="http://schemas.openxmlformats.org/officeDocument/2006/math">
-                    <m:r>
-                      <a:rPr lang="en-US" b="0" i="1" smtClean="0">
-                        <a:latin typeface="Cambria Math"/>
-                      </a:rPr>
-                      <m:t>𝐹𝑟𝑎𝑐𝑡𝑖𝑜𝑛</m:t>
-                    </m:r>
-                    <m:r>
-                      <a:rPr lang="en-US" i="1">
-                        <a:latin typeface="Cambria Math"/>
-                      </a:rPr>
-                      <m:t>=</m:t>
-                    </m:r>
-                    <m:sSub>
-                      <m:sSubPr>
-                        <m:ctrlPr>
-                          <a:rPr lang="en-US" i="1">
-                            <a:latin typeface="Cambria Math" panose="02040503050406030204" pitchFamily="18" charset="0"/>
-                          </a:rPr>
-                        </m:ctrlPr>
-                      </m:sSubPr>
-                      <m:e>
-                        <m:r>
-                          <a:rPr lang="en-US" b="0" i="1" smtClean="0">
-                            <a:latin typeface="Cambria Math"/>
-                          </a:rPr>
-                          <m:t>0</m:t>
-                        </m:r>
-                        <m:r>
-                          <a:rPr lang="en-US" b="0" i="1" smtClean="0">
-                            <a:latin typeface="Cambria Math"/>
-                          </a:rPr>
-                          <m:t>.</m:t>
-                        </m:r>
-                        <m:r>
-                          <a:rPr lang="en-US" b="0" i="1" smtClean="0">
-                            <a:solidFill>
-                              <a:srgbClr val="00B050"/>
-                            </a:solidFill>
-                            <a:latin typeface="Cambria Math"/>
-                          </a:rPr>
-                          <m:t>01</m:t>
-                        </m:r>
-                        <m:r>
-                          <a:rPr lang="en-US" b="0" i="1" smtClean="0">
-                            <a:solidFill>
-                              <a:srgbClr val="00B050"/>
-                            </a:solidFill>
-                            <a:latin typeface="Cambria Math" panose="02040503050406030204" pitchFamily="18" charset="0"/>
-                          </a:rPr>
-                          <m:t>001100110011</m:t>
-                        </m:r>
-                        <m:r>
-                          <a:rPr lang="en-US" b="0" i="1" smtClean="0">
-                            <a:solidFill>
-                              <a:srgbClr val="00B050"/>
-                            </a:solidFill>
-                            <a:latin typeface="Cambria Math" panose="02040503050406030204" pitchFamily="18" charset="0"/>
-                          </a:rPr>
-                          <m:t>…</m:t>
-                        </m:r>
-                      </m:e>
-                      <m:sub>
-                        <m:r>
-                          <a:rPr lang="en-US" i="1">
-                            <a:latin typeface="Cambria Math"/>
-                          </a:rPr>
-                          <m:t>2</m:t>
-                        </m:r>
-                      </m:sub>
-                    </m:sSub>
-                  </m:oMath>
-                </a14:m>
-                <a:r>
-                  <a:rPr lang="en-US" dirty="0"/>
-                  <a:t> (multiply by 2 repeatedly)</a:t>
-                </a:r>
-              </a:p>
-              <a:p>
-                <a:r>
-                  <a:rPr lang="en-US" dirty="0"/>
-                  <a:t>Assume </a:t>
-                </a:r>
-                <a14:m>
-                  <m:oMath xmlns:m="http://schemas.openxmlformats.org/officeDocument/2006/math">
-                    <m:r>
-                      <a:rPr lang="en-US" i="1">
-                        <a:latin typeface="Cambria Math"/>
-                      </a:rPr>
-                      <m:t>𝐹𝑟𝑎𝑐𝑡𝑖𝑜𝑛</m:t>
-                    </m:r>
-                    <m:r>
-                      <a:rPr lang="en-US" b="0" i="1" smtClean="0">
-                        <a:latin typeface="Cambria Math" panose="02040503050406030204" pitchFamily="18" charset="0"/>
-                      </a:rPr>
-                      <m:t>=</m:t>
-                    </m:r>
-                    <m:r>
-                      <a:rPr lang="en-US" b="0" i="1" smtClean="0">
-                        <a:latin typeface="Cambria Math" panose="02040503050406030204" pitchFamily="18" charset="0"/>
-                      </a:rPr>
-                      <m:t>𝑏</m:t>
-                    </m:r>
-                    <m:r>
-                      <a:rPr lang="en-US" b="0" i="1" smtClean="0">
-                        <a:latin typeface="Cambria Math" panose="02040503050406030204" pitchFamily="18" charset="0"/>
-                      </a:rPr>
-                      <m:t>1</m:t>
-                    </m:r>
-                    <m:r>
-                      <a:rPr lang="en-US" sz="2400" i="1">
-                        <a:latin typeface="Cambria Math"/>
-                      </a:rPr>
-                      <m:t>×</m:t>
-                    </m:r>
-                    <m:sSup>
-                      <m:sSupPr>
-                        <m:ctrlPr>
-                          <a:rPr lang="en-US" sz="2400" i="1">
-                            <a:latin typeface="Cambria Math" panose="02040503050406030204" pitchFamily="18" charset="0"/>
-                          </a:rPr>
-                        </m:ctrlPr>
-                      </m:sSupPr>
-                      <m:e>
-                        <m:r>
-                          <a:rPr lang="en-US" sz="2400" i="1">
-                            <a:latin typeface="Cambria Math"/>
-                          </a:rPr>
-                          <m:t>2</m:t>
-                        </m:r>
-                      </m:e>
-                      <m:sup>
-                        <m:r>
-                          <a:rPr lang="en-US" sz="2400" i="1">
-                            <a:latin typeface="Cambria Math"/>
-                          </a:rPr>
-                          <m:t>−</m:t>
-                        </m:r>
-                        <m:r>
-                          <a:rPr lang="en-US" sz="2400" i="1">
-                            <a:latin typeface="Cambria Math"/>
-                          </a:rPr>
-                          <m:t>1</m:t>
-                        </m:r>
-                      </m:sup>
-                    </m:sSup>
-                    <m:r>
-                      <a:rPr lang="en-US" sz="2400" i="1">
-                        <a:latin typeface="Cambria Math"/>
-                      </a:rPr>
-                      <m:t>+</m:t>
-                    </m:r>
-                    <m:r>
-                      <a:rPr lang="en-US" sz="2400" b="0" i="1" smtClean="0">
-                        <a:latin typeface="Cambria Math" panose="02040503050406030204" pitchFamily="18" charset="0"/>
-                      </a:rPr>
-                      <m:t>𝑏</m:t>
-                    </m:r>
-                    <m:r>
-                      <a:rPr lang="en-US" sz="2400" b="0" i="1" smtClean="0">
-                        <a:latin typeface="Cambria Math" panose="02040503050406030204" pitchFamily="18" charset="0"/>
-                      </a:rPr>
-                      <m:t>2</m:t>
-                    </m:r>
-                    <m:r>
-                      <a:rPr lang="en-US" sz="2400" b="0" i="1" smtClean="0">
-                        <a:latin typeface="Cambria Math" panose="02040503050406030204" pitchFamily="18" charset="0"/>
-                      </a:rPr>
-                      <m:t>×</m:t>
-                    </m:r>
-                    <m:sSup>
-                      <m:sSupPr>
-                        <m:ctrlPr>
-                          <a:rPr lang="en-US" sz="2400" i="1">
-                            <a:latin typeface="Cambria Math" panose="02040503050406030204" pitchFamily="18" charset="0"/>
-                          </a:rPr>
-                        </m:ctrlPr>
-                      </m:sSupPr>
-                      <m:e>
-                        <m:r>
-                          <a:rPr lang="en-US" sz="2400" i="1">
-                            <a:latin typeface="Cambria Math"/>
-                          </a:rPr>
-                          <m:t>2</m:t>
-                        </m:r>
-                      </m:e>
-                      <m:sup>
-                        <m:r>
-                          <a:rPr lang="en-US" sz="2400" i="1">
-                            <a:latin typeface="Cambria Math"/>
-                          </a:rPr>
-                          <m:t>−</m:t>
-                        </m:r>
-                        <m:r>
-                          <a:rPr lang="en-US" sz="2400" i="1">
-                            <a:latin typeface="Cambria Math"/>
-                          </a:rPr>
-                          <m:t>2</m:t>
-                        </m:r>
-                      </m:sup>
-                    </m:sSup>
-                    <m:r>
-                      <a:rPr lang="en-US" sz="2400" i="1">
-                        <a:latin typeface="Cambria Math"/>
-                      </a:rPr>
-                      <m:t>+</m:t>
-                    </m:r>
-                    <m:r>
-                      <a:rPr lang="en-US" sz="2400" b="0" i="1" smtClean="0">
-                        <a:latin typeface="Cambria Math" panose="02040503050406030204" pitchFamily="18" charset="0"/>
-                      </a:rPr>
-                      <m:t>𝑏</m:t>
-                    </m:r>
-                    <m:r>
-                      <a:rPr lang="en-US" sz="2400" b="0" i="1" smtClean="0">
-                        <a:latin typeface="Cambria Math" panose="02040503050406030204" pitchFamily="18" charset="0"/>
-                      </a:rPr>
-                      <m:t>3</m:t>
-                    </m:r>
-                    <m:r>
-                      <a:rPr lang="en-US" sz="2400" b="0" i="1" smtClean="0">
-                        <a:latin typeface="Cambria Math" panose="02040503050406030204" pitchFamily="18" charset="0"/>
-                      </a:rPr>
-                      <m:t>×</m:t>
-                    </m:r>
-                    <m:sSup>
-                      <m:sSupPr>
-                        <m:ctrlPr>
-                          <a:rPr lang="en-US" sz="2400" i="1">
-                            <a:latin typeface="Cambria Math" panose="02040503050406030204" pitchFamily="18" charset="0"/>
-                          </a:rPr>
-                        </m:ctrlPr>
-                      </m:sSupPr>
-                      <m:e>
-                        <m:r>
-                          <a:rPr lang="en-US" sz="2400" i="1">
-                            <a:latin typeface="Cambria Math"/>
-                          </a:rPr>
-                          <m:t>2</m:t>
-                        </m:r>
-                      </m:e>
-                      <m:sup>
-                        <m:r>
-                          <a:rPr lang="en-US" sz="2400" i="1">
-                            <a:latin typeface="Cambria Math"/>
-                          </a:rPr>
-                          <m:t>−</m:t>
-                        </m:r>
-                        <m:r>
-                          <a:rPr lang="en-US" sz="2400" i="1">
-                            <a:latin typeface="Cambria Math"/>
-                          </a:rPr>
-                          <m:t>3</m:t>
-                        </m:r>
-                      </m:sup>
-                    </m:sSup>
-                    <m:r>
-                      <a:rPr lang="en-US" sz="2400" i="1">
-                        <a:latin typeface="Cambria Math"/>
-                      </a:rPr>
-                      <m:t>+</m:t>
-                    </m:r>
-                    <m:r>
-                      <a:rPr lang="en-US" sz="2400" b="0" i="1" smtClean="0">
-                        <a:latin typeface="Cambria Math" panose="02040503050406030204" pitchFamily="18" charset="0"/>
-                      </a:rPr>
-                      <m:t>𝑏</m:t>
-                    </m:r>
-                    <m:r>
-                      <a:rPr lang="en-US" sz="2400" b="0" i="1" smtClean="0">
-                        <a:latin typeface="Cambria Math" panose="02040503050406030204" pitchFamily="18" charset="0"/>
-                      </a:rPr>
-                      <m:t>4</m:t>
-                    </m:r>
-                    <m:r>
-                      <a:rPr lang="en-US" sz="2400" b="0" i="1" smtClean="0">
-                        <a:latin typeface="Cambria Math" panose="02040503050406030204" pitchFamily="18" charset="0"/>
-                      </a:rPr>
-                      <m:t>×</m:t>
-                    </m:r>
-                    <m:sSup>
-                      <m:sSupPr>
-                        <m:ctrlPr>
-                          <a:rPr lang="en-US" sz="2400" i="1">
-                            <a:latin typeface="Cambria Math" panose="02040503050406030204" pitchFamily="18" charset="0"/>
-                          </a:rPr>
-                        </m:ctrlPr>
-                      </m:sSupPr>
-                      <m:e>
-                        <m:r>
-                          <a:rPr lang="en-US" sz="2400" i="1">
-                            <a:latin typeface="Cambria Math"/>
-                          </a:rPr>
-                          <m:t>2</m:t>
-                        </m:r>
-                      </m:e>
-                      <m:sup>
-                        <m:r>
-                          <a:rPr lang="en-US" sz="2400" i="1">
-                            <a:latin typeface="Cambria Math"/>
-                          </a:rPr>
-                          <m:t>−</m:t>
-                        </m:r>
-                        <m:r>
-                          <a:rPr lang="en-US" sz="2400" i="1">
-                            <a:latin typeface="Cambria Math"/>
-                          </a:rPr>
-                          <m:t>4</m:t>
-                        </m:r>
-                      </m:sup>
-                    </m:sSup>
-                    <m:r>
-                      <a:rPr lang="en-US" sz="2400" b="0" i="1" smtClean="0">
-                        <a:latin typeface="Cambria Math" panose="02040503050406030204" pitchFamily="18" charset="0"/>
-                      </a:rPr>
-                      <m:t>+…</m:t>
-                    </m:r>
-                  </m:oMath>
-                </a14:m>
-                <a:endParaRPr lang="en-US" dirty="0"/>
-              </a:p>
-              <a:p>
-                <a:pPr lvl="1"/>
-                <a14:m>
-                  <m:oMath xmlns:m="http://schemas.openxmlformats.org/officeDocument/2006/math">
-                    <m:r>
-                      <a:rPr lang="en-US" i="1">
-                        <a:latin typeface="Cambria Math"/>
-                      </a:rPr>
-                      <m:t>0</m:t>
-                    </m:r>
-                    <m:r>
-                      <a:rPr lang="en-US" i="1">
-                        <a:latin typeface="Cambria Math"/>
-                      </a:rPr>
-                      <m:t>.</m:t>
-                    </m:r>
-                    <m:r>
-                      <a:rPr lang="en-US" b="0" i="1" smtClean="0">
-                        <a:latin typeface="Cambria Math" panose="02040503050406030204" pitchFamily="18" charset="0"/>
-                      </a:rPr>
-                      <m:t>3</m:t>
-                    </m:r>
-                    <m:r>
-                      <a:rPr lang="en-US" i="1">
-                        <a:latin typeface="Cambria Math"/>
-                      </a:rPr>
-                      <m:t>×</m:t>
-                    </m:r>
-                    <m:r>
-                      <a:rPr lang="en-US" i="1">
-                        <a:latin typeface="Cambria Math"/>
-                      </a:rPr>
-                      <m:t>2</m:t>
-                    </m:r>
-                    <m:r>
-                      <a:rPr lang="en-US" i="1">
-                        <a:latin typeface="Cambria Math"/>
-                      </a:rPr>
-                      <m:t>=</m:t>
-                    </m:r>
-                    <m:r>
-                      <a:rPr lang="en-US" b="0" i="1" smtClean="0">
-                        <a:latin typeface="Cambria Math" panose="02040503050406030204" pitchFamily="18" charset="0"/>
-                      </a:rPr>
-                      <m:t>0</m:t>
-                    </m:r>
-                    <m:r>
-                      <a:rPr lang="en-US" i="1">
-                        <a:latin typeface="Cambria Math"/>
-                      </a:rPr>
-                      <m:t>.</m:t>
-                    </m:r>
-                    <m:r>
-                      <a:rPr lang="en-US" i="1">
-                        <a:latin typeface="Cambria Math"/>
-                      </a:rPr>
-                      <m:t>6</m:t>
-                    </m:r>
-                  </m:oMath>
-                </a14:m>
-                <a:r>
-                  <a:rPr lang="en-US" dirty="0"/>
-                  <a:t> =&gt; b1 = 0</a:t>
-                </a:r>
-              </a:p>
-              <a:p>
-                <a:pPr lvl="1"/>
-                <a14:m>
-                  <m:oMath xmlns:m="http://schemas.openxmlformats.org/officeDocument/2006/math">
-                    <m:r>
-                      <a:rPr lang="en-US" i="1">
-                        <a:latin typeface="Cambria Math"/>
-                      </a:rPr>
-                      <m:t>0</m:t>
-                    </m:r>
-                    <m:r>
-                      <a:rPr lang="en-US" i="1">
-                        <a:latin typeface="Cambria Math"/>
-                      </a:rPr>
-                      <m:t>.</m:t>
-                    </m:r>
-                    <m:r>
-                      <a:rPr lang="en-US" i="1">
-                        <a:latin typeface="Cambria Math"/>
-                      </a:rPr>
-                      <m:t>6</m:t>
-                    </m:r>
-                    <m:r>
-                      <a:rPr lang="en-US" i="1">
-                        <a:latin typeface="Cambria Math"/>
-                      </a:rPr>
-                      <m:t>×</m:t>
-                    </m:r>
-                    <m:r>
-                      <a:rPr lang="en-US" i="1">
-                        <a:latin typeface="Cambria Math"/>
-                      </a:rPr>
-                      <m:t>2</m:t>
-                    </m:r>
-                    <m:r>
-                      <a:rPr lang="en-US" i="1">
-                        <a:latin typeface="Cambria Math"/>
-                      </a:rPr>
-                      <m:t>=</m:t>
-                    </m:r>
-                    <m:r>
-                      <a:rPr lang="en-US" i="1">
-                        <a:latin typeface="Cambria Math"/>
-                      </a:rPr>
-                      <m:t>1</m:t>
-                    </m:r>
-                    <m:r>
-                      <a:rPr lang="en-US" i="1">
-                        <a:latin typeface="Cambria Math"/>
-                      </a:rPr>
-                      <m:t>.</m:t>
-                    </m:r>
-                    <m:r>
-                      <a:rPr lang="en-US" i="1">
-                        <a:latin typeface="Cambria Math"/>
-                      </a:rPr>
-                      <m:t>2</m:t>
-                    </m:r>
-                  </m:oMath>
-                </a14:m>
-                <a:r>
-                  <a:rPr lang="en-US" dirty="0"/>
-                  <a:t> =&gt; b2 = 1</a:t>
-                </a:r>
-              </a:p>
-              <a:p>
-                <a:pPr lvl="1"/>
-                <a14:m>
-                  <m:oMath xmlns:m="http://schemas.openxmlformats.org/officeDocument/2006/math">
-                    <m:r>
-                      <a:rPr lang="en-US" i="1">
-                        <a:latin typeface="Cambria Math"/>
-                      </a:rPr>
-                      <m:t>0</m:t>
-                    </m:r>
-                    <m:r>
-                      <a:rPr lang="en-US" i="1">
-                        <a:latin typeface="Cambria Math"/>
-                      </a:rPr>
-                      <m:t>.</m:t>
-                    </m:r>
-                    <m:r>
-                      <a:rPr lang="en-US" i="1">
-                        <a:latin typeface="Cambria Math"/>
-                      </a:rPr>
-                      <m:t>2</m:t>
-                    </m:r>
-                    <m:r>
-                      <a:rPr lang="en-US" i="1">
-                        <a:latin typeface="Cambria Math"/>
-                      </a:rPr>
-                      <m:t>×</m:t>
-                    </m:r>
-                    <m:r>
-                      <a:rPr lang="en-US" i="1">
-                        <a:latin typeface="Cambria Math"/>
-                      </a:rPr>
-                      <m:t>2</m:t>
-                    </m:r>
-                    <m:r>
-                      <a:rPr lang="en-US" i="1">
-                        <a:latin typeface="Cambria Math"/>
-                      </a:rPr>
-                      <m:t>=</m:t>
-                    </m:r>
-                    <m:r>
-                      <a:rPr lang="en-US" i="1">
-                        <a:latin typeface="Cambria Math"/>
-                      </a:rPr>
-                      <m:t>0</m:t>
-                    </m:r>
-                    <m:r>
-                      <a:rPr lang="en-US" i="1">
-                        <a:latin typeface="Cambria Math"/>
-                      </a:rPr>
-                      <m:t>.</m:t>
-                    </m:r>
-                    <m:r>
-                      <a:rPr lang="en-US" b="0" i="1" smtClean="0">
-                        <a:latin typeface="Cambria Math" panose="02040503050406030204" pitchFamily="18" charset="0"/>
-                      </a:rPr>
-                      <m:t>4</m:t>
-                    </m:r>
-                  </m:oMath>
-                </a14:m>
-                <a:r>
-                  <a:rPr lang="en-US" dirty="0"/>
-                  <a:t> =&gt; b3 = 0</a:t>
-                </a:r>
-              </a:p>
-              <a:p>
-                <a:pPr lvl="1"/>
-                <a14:m>
-                  <m:oMath xmlns:m="http://schemas.openxmlformats.org/officeDocument/2006/math">
-                    <m:r>
-                      <a:rPr lang="en-US" i="1">
-                        <a:latin typeface="Cambria Math"/>
-                      </a:rPr>
-                      <m:t>0</m:t>
-                    </m:r>
-                    <m:r>
-                      <a:rPr lang="en-US" i="1">
-                        <a:latin typeface="Cambria Math"/>
-                      </a:rPr>
-                      <m:t>.</m:t>
-                    </m:r>
-                    <m:r>
-                      <a:rPr lang="en-US" b="0" i="1" smtClean="0">
-                        <a:latin typeface="Cambria Math" panose="02040503050406030204" pitchFamily="18" charset="0"/>
-                      </a:rPr>
-                      <m:t>4</m:t>
-                    </m:r>
-                    <m:r>
-                      <a:rPr lang="en-US" i="1">
-                        <a:latin typeface="Cambria Math"/>
-                      </a:rPr>
-                      <m:t>×</m:t>
-                    </m:r>
-                    <m:r>
-                      <a:rPr lang="en-US" i="1">
-                        <a:latin typeface="Cambria Math"/>
-                      </a:rPr>
-                      <m:t>2</m:t>
-                    </m:r>
-                    <m:r>
-                      <a:rPr lang="en-US" i="1">
-                        <a:latin typeface="Cambria Math"/>
-                      </a:rPr>
-                      <m:t>=</m:t>
-                    </m:r>
-                    <m:r>
-                      <a:rPr lang="en-US" b="0" i="1" smtClean="0">
-                        <a:latin typeface="Cambria Math" panose="02040503050406030204" pitchFamily="18" charset="0"/>
-                      </a:rPr>
-                      <m:t>0</m:t>
-                    </m:r>
-                    <m:r>
-                      <a:rPr lang="en-US" b="0" i="1" smtClean="0">
-                        <a:latin typeface="Cambria Math" panose="02040503050406030204" pitchFamily="18" charset="0"/>
-                      </a:rPr>
-                      <m:t>.</m:t>
-                    </m:r>
-                    <m:r>
-                      <a:rPr lang="en-US" b="0" i="1" smtClean="0">
-                        <a:latin typeface="Cambria Math" panose="02040503050406030204" pitchFamily="18" charset="0"/>
-                      </a:rPr>
-                      <m:t>8</m:t>
-                    </m:r>
-                  </m:oMath>
-                </a14:m>
-                <a:r>
-                  <a:rPr lang="en-US" dirty="0"/>
-                  <a:t> =&gt; b4 = 0</a:t>
-                </a:r>
-              </a:p>
-              <a:p>
-                <a:pPr lvl="1"/>
-                <a14:m>
-                  <m:oMath xmlns:m="http://schemas.openxmlformats.org/officeDocument/2006/math">
-                    <m:r>
-                      <a:rPr lang="en-US" i="1">
-                        <a:latin typeface="Cambria Math"/>
-                      </a:rPr>
-                      <m:t>0</m:t>
-                    </m:r>
-                    <m:r>
-                      <a:rPr lang="en-US" i="1">
-                        <a:latin typeface="Cambria Math"/>
-                      </a:rPr>
-                      <m:t>.</m:t>
-                    </m:r>
-                    <m:r>
-                      <a:rPr lang="en-US" b="0" i="1" smtClean="0">
-                        <a:latin typeface="Cambria Math" panose="02040503050406030204" pitchFamily="18" charset="0"/>
-                      </a:rPr>
-                      <m:t>8</m:t>
-                    </m:r>
-                    <m:r>
-                      <a:rPr lang="en-US" i="1">
-                        <a:latin typeface="Cambria Math"/>
-                      </a:rPr>
-                      <m:t>×</m:t>
-                    </m:r>
-                    <m:r>
-                      <a:rPr lang="en-US" i="1">
-                        <a:latin typeface="Cambria Math"/>
-                      </a:rPr>
-                      <m:t>2</m:t>
-                    </m:r>
-                    <m:r>
-                      <a:rPr lang="en-US" i="1">
-                        <a:latin typeface="Cambria Math"/>
-                      </a:rPr>
-                      <m:t>=</m:t>
-                    </m:r>
-                    <m:r>
-                      <a:rPr lang="en-US" b="0" i="1" smtClean="0">
-                        <a:latin typeface="Cambria Math" panose="02040503050406030204" pitchFamily="18" charset="0"/>
-                      </a:rPr>
-                      <m:t>1</m:t>
-                    </m:r>
-                    <m:r>
-                      <a:rPr lang="en-US" b="0" i="1" smtClean="0">
-                        <a:latin typeface="Cambria Math" panose="02040503050406030204" pitchFamily="18" charset="0"/>
-                      </a:rPr>
-                      <m:t>.</m:t>
-                    </m:r>
-                    <m:r>
-                      <a:rPr lang="en-US" b="0" i="1" smtClean="0">
-                        <a:latin typeface="Cambria Math" panose="02040503050406030204" pitchFamily="18" charset="0"/>
-                      </a:rPr>
-                      <m:t>6</m:t>
-                    </m:r>
-                  </m:oMath>
-                </a14:m>
-                <a:r>
-                  <a:rPr lang="en-US" dirty="0"/>
-                  <a:t> =&gt; b5 = 1</a:t>
-                </a:r>
-              </a:p>
-              <a:p>
-                <a:pPr lvl="1"/>
-                <a14:m>
-                  <m:oMath xmlns:m="http://schemas.openxmlformats.org/officeDocument/2006/math">
-                    <m:r>
-                      <a:rPr lang="en-US" i="1">
-                        <a:latin typeface="Cambria Math"/>
-                      </a:rPr>
-                      <m:t>0</m:t>
-                    </m:r>
-                    <m:r>
-                      <a:rPr lang="en-US" i="1">
-                        <a:latin typeface="Cambria Math"/>
-                      </a:rPr>
-                      <m:t>.</m:t>
-                    </m:r>
-                    <m:r>
-                      <a:rPr lang="en-US" b="0" i="1" smtClean="0">
-                        <a:latin typeface="Cambria Math" panose="02040503050406030204" pitchFamily="18" charset="0"/>
-                      </a:rPr>
-                      <m:t>6</m:t>
-                    </m:r>
-                    <m:r>
-                      <a:rPr lang="en-US" i="1">
-                        <a:latin typeface="Cambria Math"/>
-                      </a:rPr>
-                      <m:t>×</m:t>
-                    </m:r>
-                    <m:r>
-                      <a:rPr lang="en-US" i="1">
-                        <a:latin typeface="Cambria Math"/>
-                      </a:rPr>
-                      <m:t>2</m:t>
-                    </m:r>
-                    <m:r>
-                      <a:rPr lang="en-US" i="1">
-                        <a:latin typeface="Cambria Math"/>
-                      </a:rPr>
-                      <m:t>=</m:t>
-                    </m:r>
-                    <m:r>
-                      <a:rPr lang="en-US" b="0" i="1" smtClean="0">
-                        <a:latin typeface="Cambria Math" panose="02040503050406030204" pitchFamily="18" charset="0"/>
-                      </a:rPr>
-                      <m:t>1</m:t>
-                    </m:r>
-                    <m:r>
-                      <a:rPr lang="en-US" i="1">
-                        <a:latin typeface="Cambria Math" panose="02040503050406030204" pitchFamily="18" charset="0"/>
-                      </a:rPr>
-                      <m:t>.</m:t>
-                    </m:r>
-                    <m:r>
-                      <a:rPr lang="en-US" b="0" i="1" smtClean="0">
-                        <a:latin typeface="Cambria Math" panose="02040503050406030204" pitchFamily="18" charset="0"/>
-                      </a:rPr>
-                      <m:t>2</m:t>
-                    </m:r>
-                  </m:oMath>
-                </a14:m>
-                <a:r>
-                  <a:rPr lang="en-US" dirty="0"/>
-                  <a:t> =&gt; b6 = 1</a:t>
-                </a:r>
-              </a:p>
-              <a:p>
-                <a:r>
-                  <a:rPr lang="en-US" dirty="0">
-                    <a:latin typeface="Consolas" panose="020B0609020204030204" pitchFamily="49" charset="0"/>
-                    <a:cs typeface="Consolas" panose="020B0609020204030204" pitchFamily="49" charset="0"/>
-                  </a:rPr>
-                  <a:t>14.5</a:t>
-                </a:r>
-                <a:r>
-                  <a:rPr lang="en-US" dirty="0"/>
-                  <a:t> = </a:t>
-                </a:r>
-                <a:r>
-                  <a:rPr lang="en-US" dirty="0">
-                    <a:solidFill>
-                      <a:srgbClr val="C00000"/>
-                    </a:solidFill>
-                    <a:latin typeface="Consolas" panose="020B0609020204030204" pitchFamily="49" charset="0"/>
-                    <a:cs typeface="Consolas" panose="020B0609020204030204" pitchFamily="49" charset="0"/>
-                  </a:rPr>
-                  <a:t>0</a:t>
-                </a:r>
-                <a:r>
-                  <a:rPr lang="en-US" dirty="0">
-                    <a:solidFill>
-                      <a:srgbClr val="0000FF"/>
-                    </a:solidFill>
-                    <a:latin typeface="Consolas" panose="020B0609020204030204" pitchFamily="49" charset="0"/>
-                    <a:cs typeface="Consolas" panose="020B0609020204030204" pitchFamily="49" charset="0"/>
-                  </a:rPr>
-                  <a:t>01111111</a:t>
-                </a:r>
-                <a:r>
-                  <a:rPr lang="en-US" dirty="0">
-                    <a:solidFill>
-                      <a:srgbClr val="00B050"/>
-                    </a:solidFill>
-                    <a:latin typeface="Consolas" panose="020B0609020204030204" pitchFamily="49" charset="0"/>
-                    <a:cs typeface="Consolas" panose="020B0609020204030204" pitchFamily="49" charset="0"/>
-                  </a:rPr>
-                  <a:t>01001100110011001100110</a:t>
-                </a:r>
-                <a:r>
-                  <a:rPr lang="en-US" dirty="0"/>
-                  <a:t> in binary or 0x3FA66666 in hex</a:t>
-                </a:r>
-              </a:p>
-            </p:txBody>
-          </p:sp>
-        </mc:Choice>
-        <mc:Fallback xmlns="">
-          <p:sp>
-            <p:nvSpPr>
-              <p:cNvPr id="4" name="Content Placeholder 3">
-                <a:extLst>
-                  <a:ext uri="{FF2B5EF4-FFF2-40B4-BE49-F238E27FC236}">
-                    <a16:creationId xmlns:a16="http://schemas.microsoft.com/office/drawing/2014/main" id="{B3D4FF65-D71D-3471-F040-1E677F86A2DD}"/>
-                  </a:ext>
-                </a:extLst>
-              </p:cNvPr>
-              <p:cNvSpPr>
-                <a:spLocks noGrp="1" noRot="1" noChangeAspect="1" noMove="1" noResize="1" noEditPoints="1" noAdjustHandles="1" noChangeArrowheads="1" noChangeShapeType="1" noTextEdit="1"/>
-              </p:cNvSpPr>
-              <p:nvPr>
-                <p:ph sz="quarter" idx="1"/>
-              </p:nvPr>
-            </p:nvSpPr>
-            <p:spPr>
-              <a:xfrm>
-                <a:off x="990600" y="1143000"/>
-                <a:ext cx="10363200" cy="5013960"/>
-              </a:xfrm>
-              <a:blipFill>
-                <a:blip r:embed="rId3"/>
-                <a:stretch>
-                  <a:fillRect l="-235" t="-1946" b="-122"/>
-                </a:stretch>
-              </a:blipFill>
-            </p:spPr>
-            <p:txBody>
-              <a:bodyPr/>
-              <a:lstStyle/>
-              <a:p>
-                <a:r>
-                  <a:rPr lang="en-US">
-                    <a:noFill/>
-                  </a:rPr>
-                  <a:t> </a:t>
-                </a:r>
-              </a:p>
-            </p:txBody>
-          </p:sp>
-        </mc:Fallback>
-      </mc:AlternateContent>
-      <p:sp>
-        <p:nvSpPr>
-          <p:cNvPr id="8" name="Right Brace 7">
-            <a:extLst>
-              <a:ext uri="{FF2B5EF4-FFF2-40B4-BE49-F238E27FC236}">
-                <a16:creationId xmlns:a16="http://schemas.microsoft.com/office/drawing/2014/main" id="{FADDE5B4-2BF0-3346-B39B-1C17BD95CCA8}"/>
-              </a:ext>
-            </a:extLst>
-          </p:cNvPr>
-          <p:cNvSpPr/>
-          <p:nvPr/>
-        </p:nvSpPr>
-        <p:spPr>
-          <a:xfrm>
-            <a:off x="3979432" y="4686292"/>
-            <a:ext cx="228597" cy="914400"/>
-          </a:xfrm>
-          <a:prstGeom prst="rightBrace">
-            <a:avLst>
-              <a:gd name="adj1" fmla="val 8333"/>
-              <a:gd name="adj2" fmla="val 48117"/>
-            </a:avLst>
-          </a:prstGeom>
-          <a:ln w="19050"/>
-        </p:spPr>
-        <p:style>
-          <a:lnRef idx="1">
-            <a:schemeClr val="accent1"/>
-          </a:lnRef>
-          <a:fillRef idx="0">
-            <a:schemeClr val="accent1"/>
-          </a:fillRef>
-          <a:effectRef idx="0">
-            <a:schemeClr val="accent1"/>
-          </a:effectRef>
-          <a:fontRef idx="minor">
-            <a:schemeClr val="tx1"/>
-          </a:fontRef>
-        </p:style>
-        <p:txBody>
-          <a:bodyPr rtlCol="0" anchor="ctr"/>
-          <a:lstStyle/>
-          <a:p>
-            <a:pPr algn="ctr"/>
-            <a:endParaRPr lang="en-US"/>
-          </a:p>
-        </p:txBody>
-      </p:sp>
-      <p:sp>
-        <p:nvSpPr>
-          <p:cNvPr id="9" name="TextBox 8">
-            <a:extLst>
-              <a:ext uri="{FF2B5EF4-FFF2-40B4-BE49-F238E27FC236}">
-                <a16:creationId xmlns:a16="http://schemas.microsoft.com/office/drawing/2014/main" id="{ACE7E842-BCEF-B6B4-E109-FC4B047B29D0}"/>
-              </a:ext>
-            </a:extLst>
-          </p:cNvPr>
-          <p:cNvSpPr txBox="1"/>
-          <p:nvPr/>
-        </p:nvSpPr>
-        <p:spPr>
-          <a:xfrm flipH="1">
-            <a:off x="4244784" y="4876800"/>
-            <a:ext cx="2057402" cy="369332"/>
-          </a:xfrm>
-          <a:prstGeom prst="rect">
-            <a:avLst/>
-          </a:prstGeom>
-          <a:noFill/>
-        </p:spPr>
-        <p:txBody>
-          <a:bodyPr wrap="square" rtlCol="0">
-            <a:spAutoFit/>
-          </a:bodyPr>
-          <a:lstStyle/>
-          <a:p>
-            <a:r>
-              <a:rPr lang="en-US" dirty="0"/>
-              <a:t>Repeats infinitely</a:t>
-            </a:r>
-          </a:p>
-        </p:txBody>
-      </p:sp>
-    </p:spTree>
-    <p:extLst>
-      <p:ext uri="{BB962C8B-B14F-4D97-AF65-F5344CB8AC3E}">
-        <p14:creationId xmlns:p14="http://schemas.microsoft.com/office/powerpoint/2010/main" val="3951653191"/>
       </p:ext>
     </p:extLst>
   </p:cSld>
@@ -20571,6 +20012,1447 @@
         <p:cNvPr id="1" name="">
           <a:extLst>
             <a:ext uri="{FF2B5EF4-FFF2-40B4-BE49-F238E27FC236}">
+              <a16:creationId xmlns:a16="http://schemas.microsoft.com/office/drawing/2014/main" id="{79CA1E23-1948-4AB3-BE51-06B1176B9EDD}"/>
+            </a:ext>
+          </a:extLst>
+        </p:cNvPr>
+        <p:cNvGrpSpPr/>
+        <p:nvPr/>
+      </p:nvGrpSpPr>
+      <p:grpSpPr>
+        <a:xfrm>
+          <a:off x="0" y="0"/>
+          <a:ext cx="0" cy="0"/>
+          <a:chOff x="0" y="0"/>
+          <a:chExt cx="0" cy="0"/>
+        </a:xfrm>
+      </p:grpSpPr>
+      <p:sp>
+        <p:nvSpPr>
+          <p:cNvPr id="2" name="Title 1">
+            <a:extLst>
+              <a:ext uri="{FF2B5EF4-FFF2-40B4-BE49-F238E27FC236}">
+                <a16:creationId xmlns:a16="http://schemas.microsoft.com/office/drawing/2014/main" id="{06D0CDC3-A7FF-9EEE-C5C3-502A76B1D8CC}"/>
+              </a:ext>
+            </a:extLst>
+          </p:cNvPr>
+          <p:cNvSpPr>
+            <a:spLocks noGrp="1"/>
+          </p:cNvSpPr>
+          <p:nvPr>
+            <p:ph type="title"/>
+          </p:nvPr>
+        </p:nvSpPr>
+        <p:spPr/>
+        <p:txBody>
+          <a:bodyPr>
+            <a:normAutofit/>
+          </a:bodyPr>
+          <a:lstStyle/>
+          <a:p>
+            <a:r>
+              <a:rPr lang="en-US" b="1" dirty="0"/>
+              <a:t>Encoding </a:t>
+            </a:r>
+            <a:r>
+              <a:rPr lang="en-US" b="1" dirty="0">
+                <a:solidFill>
+                  <a:srgbClr val="C00000"/>
+                </a:solidFill>
+              </a:rPr>
+              <a:t>1.3</a:t>
+            </a:r>
+            <a:r>
+              <a:rPr lang="en-US" b="1" dirty="0"/>
+              <a:t> into IEEE Std 754 Single-Precision</a:t>
+            </a:r>
+          </a:p>
+        </p:txBody>
+      </p:sp>
+      <p:sp>
+        <p:nvSpPr>
+          <p:cNvPr id="3" name="Slide Number Placeholder 2">
+            <a:extLst>
+              <a:ext uri="{FF2B5EF4-FFF2-40B4-BE49-F238E27FC236}">
+                <a16:creationId xmlns:a16="http://schemas.microsoft.com/office/drawing/2014/main" id="{A5CB2435-927F-ED99-AB72-9D349255325E}"/>
+              </a:ext>
+            </a:extLst>
+          </p:cNvPr>
+          <p:cNvSpPr>
+            <a:spLocks noGrp="1"/>
+          </p:cNvSpPr>
+          <p:nvPr>
+            <p:ph type="sldNum" sz="quarter" idx="12"/>
+          </p:nvPr>
+        </p:nvSpPr>
+        <p:spPr/>
+        <p:txBody>
+          <a:bodyPr/>
+          <a:lstStyle/>
+          <a:p>
+            <a:fld id="{EA7C8D44-3667-46F6-9772-CC52308E2A7F}" type="slidenum">
+              <a:rPr kumimoji="0" lang="en-US" smtClean="0"/>
+              <a:pPr/>
+              <a:t>20</a:t>
+            </a:fld>
+            <a:endParaRPr kumimoji="0" lang="en-US" dirty="0"/>
+          </a:p>
+        </p:txBody>
+      </p:sp>
+      <mc:AlternateContent xmlns:mc="http://schemas.openxmlformats.org/markup-compatibility/2006" xmlns:a14="http://schemas.microsoft.com/office/drawing/2010/main">
+        <mc:Choice Requires="a14">
+          <p:sp>
+            <p:nvSpPr>
+              <p:cNvPr id="4" name="Content Placeholder 3">
+                <a:extLst>
+                  <a:ext uri="{FF2B5EF4-FFF2-40B4-BE49-F238E27FC236}">
+                    <a16:creationId xmlns:a16="http://schemas.microsoft.com/office/drawing/2014/main" id="{B3D4FF65-D71D-3471-F040-1E677F86A2DD}"/>
+                  </a:ext>
+                </a:extLst>
+              </p:cNvPr>
+              <p:cNvSpPr>
+                <a:spLocks noGrp="1"/>
+              </p:cNvSpPr>
+              <p:nvPr>
+                <p:ph sz="quarter" idx="1"/>
+              </p:nvPr>
+            </p:nvSpPr>
+            <p:spPr>
+              <a:xfrm>
+                <a:off x="990600" y="1143000"/>
+                <a:ext cx="10363200" cy="5013960"/>
+              </a:xfrm>
+            </p:spPr>
+            <p:txBody>
+              <a:bodyPr>
+                <a:normAutofit fontScale="77500" lnSpcReduction="20000"/>
+              </a:bodyPr>
+              <a:lstStyle/>
+              <a:p>
+                <a:r>
+                  <a:rPr lang="en-US" dirty="0"/>
+                  <a:t>Normalization:</a:t>
+                </a:r>
+                <a:endParaRPr lang="en-US" i="1" dirty="0">
+                  <a:latin typeface="Cambria Math"/>
+                </a:endParaRPr>
+              </a:p>
+              <a:p>
+                <a14:m>
+                  <m:oMath xmlns:m="http://schemas.openxmlformats.org/officeDocument/2006/math">
+                    <m:sSup>
+                      <m:sSupPr>
+                        <m:ctrlPr>
+                          <a:rPr lang="en-US" i="1" smtClean="0">
+                            <a:latin typeface="Cambria Math" panose="02040503050406030204" pitchFamily="18" charset="0"/>
+                          </a:rPr>
+                        </m:ctrlPr>
+                      </m:sSupPr>
+                      <m:e>
+                        <m:r>
+                          <a:rPr lang="en-US" i="1">
+                            <a:latin typeface="Cambria Math" panose="02040503050406030204" pitchFamily="18" charset="0"/>
+                          </a:rPr>
+                          <m:t>2</m:t>
+                        </m:r>
+                      </m:e>
+                      <m:sup>
+                        <m:r>
+                          <a:rPr lang="en-US" b="0" i="1" smtClean="0">
+                            <a:latin typeface="Cambria Math" panose="02040503050406030204" pitchFamily="18" charset="0"/>
+                          </a:rPr>
+                          <m:t>0</m:t>
+                        </m:r>
+                      </m:sup>
+                    </m:sSup>
+                    <m:r>
+                      <a:rPr lang="en-US" b="0" i="1" smtClean="0">
+                        <a:latin typeface="Cambria Math" panose="02040503050406030204" pitchFamily="18" charset="0"/>
+                      </a:rPr>
+                      <m:t>&lt;</m:t>
+                    </m:r>
+                    <m:r>
+                      <a:rPr lang="en-US" i="1" smtClean="0">
+                        <a:latin typeface="Cambria Math"/>
+                      </a:rPr>
+                      <m:t>1</m:t>
+                    </m:r>
+                    <m:r>
+                      <a:rPr lang="en-US" i="1" smtClean="0">
+                        <a:latin typeface="Cambria Math"/>
+                      </a:rPr>
+                      <m:t>.</m:t>
+                    </m:r>
+                    <m:r>
+                      <a:rPr lang="en-US" b="0" i="1" smtClean="0">
+                        <a:latin typeface="Cambria Math" panose="02040503050406030204" pitchFamily="18" charset="0"/>
+                      </a:rPr>
+                      <m:t>3</m:t>
+                    </m:r>
+                    <m:r>
+                      <a:rPr lang="en-US" b="0" i="1" smtClean="0">
+                        <a:latin typeface="Cambria Math" panose="02040503050406030204" pitchFamily="18" charset="0"/>
+                      </a:rPr>
+                      <m:t>&lt;</m:t>
+                    </m:r>
+                    <m:sSup>
+                      <m:sSupPr>
+                        <m:ctrlPr>
+                          <a:rPr lang="en-US" b="0" i="1" smtClean="0">
+                            <a:latin typeface="Cambria Math" panose="02040503050406030204" pitchFamily="18" charset="0"/>
+                          </a:rPr>
+                        </m:ctrlPr>
+                      </m:sSupPr>
+                      <m:e>
+                        <m:r>
+                          <a:rPr lang="en-US" b="0" i="1" smtClean="0">
+                            <a:latin typeface="Cambria Math" panose="02040503050406030204" pitchFamily="18" charset="0"/>
+                          </a:rPr>
+                          <m:t>2</m:t>
+                        </m:r>
+                      </m:e>
+                      <m:sup>
+                        <m:r>
+                          <a:rPr lang="en-US" b="0" i="1" smtClean="0">
+                            <a:latin typeface="Cambria Math" panose="02040503050406030204" pitchFamily="18" charset="0"/>
+                          </a:rPr>
+                          <m:t>1</m:t>
+                        </m:r>
+                      </m:sup>
+                    </m:sSup>
+                    <m:r>
+                      <a:rPr lang="en-US" b="0" i="1" smtClean="0">
+                        <a:latin typeface="Cambria Math" panose="02040503050406030204" pitchFamily="18" charset="0"/>
+                      </a:rPr>
+                      <m:t>,</m:t>
+                    </m:r>
+                    <m:f>
+                      <m:fPr>
+                        <m:ctrlPr>
+                          <a:rPr lang="en-US" b="0" i="1" smtClean="0">
+                            <a:latin typeface="Cambria Math" panose="02040503050406030204" pitchFamily="18" charset="0"/>
+                          </a:rPr>
+                        </m:ctrlPr>
+                      </m:fPr>
+                      <m:num>
+                        <m:r>
+                          <a:rPr lang="en-US" i="1">
+                            <a:latin typeface="Cambria Math"/>
+                          </a:rPr>
+                          <m:t>14</m:t>
+                        </m:r>
+                        <m:r>
+                          <a:rPr lang="en-US" i="1">
+                            <a:latin typeface="Cambria Math"/>
+                          </a:rPr>
+                          <m:t>.</m:t>
+                        </m:r>
+                        <m:r>
+                          <a:rPr lang="en-US" i="1">
+                            <a:latin typeface="Cambria Math"/>
+                          </a:rPr>
+                          <m:t>5</m:t>
+                        </m:r>
+                      </m:num>
+                      <m:den>
+                        <m:sSup>
+                          <m:sSupPr>
+                            <m:ctrlPr>
+                              <a:rPr lang="en-US" b="0" i="1" smtClean="0">
+                                <a:latin typeface="Cambria Math" panose="02040503050406030204" pitchFamily="18" charset="0"/>
+                              </a:rPr>
+                            </m:ctrlPr>
+                          </m:sSupPr>
+                          <m:e>
+                            <m:r>
+                              <a:rPr lang="en-US" b="0" i="1" smtClean="0">
+                                <a:latin typeface="Cambria Math" panose="02040503050406030204" pitchFamily="18" charset="0"/>
+                              </a:rPr>
+                              <m:t>2</m:t>
+                            </m:r>
+                          </m:e>
+                          <m:sup>
+                            <m:r>
+                              <a:rPr lang="en-US" b="0" i="1" smtClean="0">
+                                <a:latin typeface="Cambria Math" panose="02040503050406030204" pitchFamily="18" charset="0"/>
+                              </a:rPr>
+                              <m:t>0</m:t>
+                            </m:r>
+                          </m:sup>
+                        </m:sSup>
+                      </m:den>
+                    </m:f>
+                    <m:r>
+                      <a:rPr lang="en-US" b="0" i="1" smtClean="0">
+                        <a:latin typeface="Cambria Math" panose="02040503050406030204" pitchFamily="18" charset="0"/>
+                      </a:rPr>
+                      <m:t>=</m:t>
+                    </m:r>
+                    <m:r>
+                      <a:rPr lang="en-US" b="0" i="1" smtClean="0">
+                        <a:latin typeface="Cambria Math" panose="02040503050406030204" pitchFamily="18" charset="0"/>
+                      </a:rPr>
+                      <m:t>1</m:t>
+                    </m:r>
+                    <m:r>
+                      <a:rPr lang="en-US" b="0" i="1" smtClean="0">
+                        <a:latin typeface="Cambria Math" panose="02040503050406030204" pitchFamily="18" charset="0"/>
+                      </a:rPr>
+                      <m:t>.</m:t>
+                    </m:r>
+                    <m:r>
+                      <a:rPr lang="en-US" b="0" i="1" smtClean="0">
+                        <a:latin typeface="Cambria Math" panose="02040503050406030204" pitchFamily="18" charset="0"/>
+                      </a:rPr>
+                      <m:t>3</m:t>
+                    </m:r>
+                  </m:oMath>
+                </a14:m>
+                <a:endParaRPr lang="en-US" i="1" dirty="0">
+                  <a:latin typeface="Cambria Math"/>
+                </a:endParaRPr>
+              </a:p>
+              <a:p>
+                <a:r>
+                  <a:rPr lang="en-US" dirty="0"/>
+                  <a:t>Hence </a:t>
+                </a:r>
+                <a14:m>
+                  <m:oMath xmlns:m="http://schemas.openxmlformats.org/officeDocument/2006/math">
+                    <m:r>
+                      <a:rPr lang="en-US" i="1">
+                        <a:latin typeface="Cambria Math"/>
+                      </a:rPr>
+                      <m:t>1</m:t>
+                    </m:r>
+                    <m:r>
+                      <a:rPr lang="en-US" i="1">
+                        <a:latin typeface="Cambria Math"/>
+                      </a:rPr>
+                      <m:t>.</m:t>
+                    </m:r>
+                    <m:r>
+                      <a:rPr lang="en-US" b="0" i="1" smtClean="0">
+                        <a:latin typeface="Cambria Math" panose="02040503050406030204" pitchFamily="18" charset="0"/>
+                      </a:rPr>
+                      <m:t>3</m:t>
+                    </m:r>
+                    <m:r>
+                      <a:rPr lang="en-US" i="1">
+                        <a:latin typeface="Cambria Math"/>
+                      </a:rPr>
+                      <m:t>=</m:t>
+                    </m:r>
+                    <m:r>
+                      <a:rPr lang="en-US" i="1" smtClean="0">
+                        <a:latin typeface="Cambria Math"/>
+                      </a:rPr>
+                      <m:t> </m:t>
+                    </m:r>
+                    <m:r>
+                      <a:rPr lang="en-US" i="1">
+                        <a:latin typeface="Cambria Math"/>
+                      </a:rPr>
+                      <m:t>(</m:t>
+                    </m:r>
+                    <m:r>
+                      <a:rPr lang="en-US" i="1">
+                        <a:latin typeface="Cambria Math"/>
+                      </a:rPr>
+                      <m:t>1</m:t>
+                    </m:r>
+                    <m:r>
+                      <a:rPr lang="en-US" i="1">
+                        <a:latin typeface="Cambria Math"/>
+                      </a:rPr>
+                      <m:t>+</m:t>
+                    </m:r>
+                    <m:r>
+                      <a:rPr lang="en-US" i="1">
+                        <a:latin typeface="Cambria Math"/>
+                      </a:rPr>
+                      <m:t>0</m:t>
+                    </m:r>
+                    <m:r>
+                      <a:rPr lang="en-US" i="1">
+                        <a:latin typeface="Cambria Math"/>
+                      </a:rPr>
+                      <m:t>.</m:t>
+                    </m:r>
+                    <m:r>
+                      <a:rPr lang="en-US" b="0" i="1" smtClean="0">
+                        <a:latin typeface="Cambria Math" panose="02040503050406030204" pitchFamily="18" charset="0"/>
+                      </a:rPr>
+                      <m:t>3</m:t>
+                    </m:r>
+                    <m:r>
+                      <a:rPr lang="en-US" i="1">
+                        <a:latin typeface="Cambria Math"/>
+                      </a:rPr>
+                      <m:t>)×</m:t>
+                    </m:r>
+                    <m:sSup>
+                      <m:sSupPr>
+                        <m:ctrlPr>
+                          <a:rPr lang="en-US" i="1">
+                            <a:latin typeface="Cambria Math" panose="02040503050406030204" pitchFamily="18" charset="0"/>
+                          </a:rPr>
+                        </m:ctrlPr>
+                      </m:sSupPr>
+                      <m:e>
+                        <m:r>
+                          <a:rPr lang="en-US" i="1">
+                            <a:latin typeface="Cambria Math"/>
+                          </a:rPr>
+                          <m:t>2</m:t>
+                        </m:r>
+                      </m:e>
+                      <m:sup>
+                        <m:r>
+                          <a:rPr lang="en-US" b="0" i="1" smtClean="0">
+                            <a:latin typeface="Cambria Math" panose="02040503050406030204" pitchFamily="18" charset="0"/>
+                          </a:rPr>
+                          <m:t>0</m:t>
+                        </m:r>
+                      </m:sup>
+                    </m:sSup>
+                  </m:oMath>
+                </a14:m>
+                <a:endParaRPr lang="en-US" dirty="0"/>
+              </a:p>
+              <a:p>
+                <a:r>
+                  <a:rPr lang="en-US" dirty="0"/>
+                  <a:t>Conversion:</a:t>
+                </a:r>
+              </a:p>
+              <a:p>
+                <a14:m>
+                  <m:oMath xmlns:m="http://schemas.openxmlformats.org/officeDocument/2006/math">
+                    <m:r>
+                      <a:rPr lang="en-US" b="0" i="1" smtClean="0">
+                        <a:latin typeface="Cambria Math"/>
+                      </a:rPr>
+                      <m:t>𝑆𝑖𝑔𝑛</m:t>
+                    </m:r>
+                    <m:r>
+                      <a:rPr lang="en-US" b="0" i="1" smtClean="0">
+                        <a:latin typeface="Cambria Math"/>
+                      </a:rPr>
+                      <m:t>=</m:t>
+                    </m:r>
+                    <m:r>
+                      <a:rPr lang="en-US" b="0" i="1" smtClean="0">
+                        <a:latin typeface="Cambria Math"/>
+                      </a:rPr>
+                      <m:t>0</m:t>
+                    </m:r>
+                  </m:oMath>
+                </a14:m>
+                <a:endParaRPr lang="en-US" b="0" i="1" dirty="0">
+                  <a:solidFill>
+                    <a:srgbClr val="C00000"/>
+                  </a:solidFill>
+                  <a:latin typeface="Cambria Math"/>
+                </a:endParaRPr>
+              </a:p>
+              <a:p>
+                <a14:m>
+                  <m:oMath xmlns:m="http://schemas.openxmlformats.org/officeDocument/2006/math">
+                    <m:r>
+                      <a:rPr lang="en-US" i="1">
+                        <a:latin typeface="Cambria Math"/>
+                      </a:rPr>
+                      <m:t>𝐸𝑥𝑝𝑜𝑛𝑒𝑛𝑡</m:t>
+                    </m:r>
+                    <m:r>
+                      <m:rPr>
+                        <m:aln/>
+                      </m:rPr>
+                      <a:rPr lang="en-US" i="1">
+                        <a:latin typeface="Cambria Math"/>
+                      </a:rPr>
+                      <m:t>=</m:t>
+                    </m:r>
+                    <m:r>
+                      <a:rPr lang="en-US" b="0" i="1" smtClean="0">
+                        <a:latin typeface="Cambria Math" panose="02040503050406030204" pitchFamily="18" charset="0"/>
+                      </a:rPr>
+                      <m:t>0</m:t>
+                    </m:r>
+                    <m:r>
+                      <a:rPr lang="en-US" i="1">
+                        <a:latin typeface="Cambria Math"/>
+                      </a:rPr>
+                      <m:t>+</m:t>
+                    </m:r>
+                    <m:r>
+                      <a:rPr lang="en-US" i="1">
+                        <a:latin typeface="Cambria Math"/>
+                      </a:rPr>
+                      <m:t>127</m:t>
+                    </m:r>
+                    <m:r>
+                      <a:rPr lang="en-US" i="1">
+                        <a:latin typeface="Cambria Math"/>
+                      </a:rPr>
+                      <m:t>=</m:t>
+                    </m:r>
+                    <m:r>
+                      <a:rPr lang="en-US" i="1">
+                        <a:latin typeface="Cambria Math"/>
+                      </a:rPr>
+                      <m:t>127</m:t>
+                    </m:r>
+                    <m:r>
+                      <a:rPr lang="en-US" i="1">
+                        <a:latin typeface="Cambria Math"/>
+                      </a:rPr>
+                      <m:t>=</m:t>
+                    </m:r>
+                    <m:sSub>
+                      <m:sSubPr>
+                        <m:ctrlPr>
+                          <a:rPr lang="en-US" i="1">
+                            <a:latin typeface="Cambria Math" panose="02040503050406030204" pitchFamily="18" charset="0"/>
+                          </a:rPr>
+                        </m:ctrlPr>
+                      </m:sSubPr>
+                      <m:e>
+                        <m:r>
+                          <a:rPr lang="en-US" b="0" i="1" smtClean="0">
+                            <a:solidFill>
+                              <a:srgbClr val="0000FF"/>
+                            </a:solidFill>
+                            <a:latin typeface="Cambria Math" panose="02040503050406030204" pitchFamily="18" charset="0"/>
+                          </a:rPr>
+                          <m:t>01111111</m:t>
+                        </m:r>
+                      </m:e>
+                      <m:sub>
+                        <m:r>
+                          <a:rPr lang="en-US" i="1">
+                            <a:latin typeface="Cambria Math"/>
+                          </a:rPr>
+                          <m:t>2</m:t>
+                        </m:r>
+                      </m:sub>
+                    </m:sSub>
+                  </m:oMath>
+                </a14:m>
+                <a:endParaRPr lang="en-US" dirty="0"/>
+              </a:p>
+              <a:p>
+                <a14:m>
+                  <m:oMath xmlns:m="http://schemas.openxmlformats.org/officeDocument/2006/math">
+                    <m:r>
+                      <a:rPr lang="en-US" b="0" i="1" smtClean="0">
+                        <a:latin typeface="Cambria Math"/>
+                      </a:rPr>
+                      <m:t>𝐹𝑟𝑎𝑐𝑡𝑖𝑜𝑛</m:t>
+                    </m:r>
+                    <m:r>
+                      <a:rPr lang="en-US" i="1">
+                        <a:latin typeface="Cambria Math"/>
+                      </a:rPr>
+                      <m:t>=</m:t>
+                    </m:r>
+                    <m:sSub>
+                      <m:sSubPr>
+                        <m:ctrlPr>
+                          <a:rPr lang="en-US" i="1">
+                            <a:latin typeface="Cambria Math" panose="02040503050406030204" pitchFamily="18" charset="0"/>
+                          </a:rPr>
+                        </m:ctrlPr>
+                      </m:sSubPr>
+                      <m:e>
+                        <m:r>
+                          <a:rPr lang="en-US" b="0" i="1" smtClean="0">
+                            <a:latin typeface="Cambria Math"/>
+                          </a:rPr>
+                          <m:t>0</m:t>
+                        </m:r>
+                        <m:r>
+                          <a:rPr lang="en-US" b="0" i="1" smtClean="0">
+                            <a:latin typeface="Cambria Math"/>
+                          </a:rPr>
+                          <m:t>.</m:t>
+                        </m:r>
+                        <m:r>
+                          <a:rPr lang="en-US" b="0" i="1" smtClean="0">
+                            <a:solidFill>
+                              <a:srgbClr val="00B050"/>
+                            </a:solidFill>
+                            <a:latin typeface="Cambria Math"/>
+                          </a:rPr>
+                          <m:t>01</m:t>
+                        </m:r>
+                        <m:r>
+                          <a:rPr lang="en-US" b="0" i="1" smtClean="0">
+                            <a:solidFill>
+                              <a:srgbClr val="00B050"/>
+                            </a:solidFill>
+                            <a:latin typeface="Cambria Math" panose="02040503050406030204" pitchFamily="18" charset="0"/>
+                          </a:rPr>
+                          <m:t>001100110011</m:t>
+                        </m:r>
+                        <m:r>
+                          <a:rPr lang="en-US" b="0" i="1" smtClean="0">
+                            <a:solidFill>
+                              <a:srgbClr val="00B050"/>
+                            </a:solidFill>
+                            <a:latin typeface="Cambria Math" panose="02040503050406030204" pitchFamily="18" charset="0"/>
+                          </a:rPr>
+                          <m:t>…</m:t>
+                        </m:r>
+                      </m:e>
+                      <m:sub>
+                        <m:r>
+                          <a:rPr lang="en-US" i="1">
+                            <a:latin typeface="Cambria Math"/>
+                          </a:rPr>
+                          <m:t>2</m:t>
+                        </m:r>
+                      </m:sub>
+                    </m:sSub>
+                  </m:oMath>
+                </a14:m>
+                <a:r>
+                  <a:rPr lang="en-US" dirty="0"/>
+                  <a:t> (multiply by 2 repeatedly)</a:t>
+                </a:r>
+              </a:p>
+              <a:p>
+                <a:r>
+                  <a:rPr lang="en-US" dirty="0"/>
+                  <a:t>Assume </a:t>
+                </a:r>
+                <a14:m>
+                  <m:oMath xmlns:m="http://schemas.openxmlformats.org/officeDocument/2006/math">
+                    <m:r>
+                      <a:rPr lang="en-US" i="1">
+                        <a:latin typeface="Cambria Math"/>
+                      </a:rPr>
+                      <m:t>𝐹𝑟𝑎𝑐𝑡𝑖𝑜𝑛</m:t>
+                    </m:r>
+                    <m:r>
+                      <a:rPr lang="en-US" b="0" i="1" smtClean="0">
+                        <a:latin typeface="Cambria Math" panose="02040503050406030204" pitchFamily="18" charset="0"/>
+                      </a:rPr>
+                      <m:t>=</m:t>
+                    </m:r>
+                    <m:r>
+                      <a:rPr lang="en-US" b="0" i="1" smtClean="0">
+                        <a:latin typeface="Cambria Math" panose="02040503050406030204" pitchFamily="18" charset="0"/>
+                      </a:rPr>
+                      <m:t>𝑏</m:t>
+                    </m:r>
+                    <m:r>
+                      <a:rPr lang="en-US" b="0" i="1" smtClean="0">
+                        <a:latin typeface="Cambria Math" panose="02040503050406030204" pitchFamily="18" charset="0"/>
+                      </a:rPr>
+                      <m:t>1</m:t>
+                    </m:r>
+                    <m:r>
+                      <a:rPr lang="en-US" sz="2400" i="1">
+                        <a:latin typeface="Cambria Math"/>
+                      </a:rPr>
+                      <m:t>×</m:t>
+                    </m:r>
+                    <m:sSup>
+                      <m:sSupPr>
+                        <m:ctrlPr>
+                          <a:rPr lang="en-US" sz="2400" i="1">
+                            <a:latin typeface="Cambria Math" panose="02040503050406030204" pitchFamily="18" charset="0"/>
+                          </a:rPr>
+                        </m:ctrlPr>
+                      </m:sSupPr>
+                      <m:e>
+                        <m:r>
+                          <a:rPr lang="en-US" sz="2400" i="1">
+                            <a:latin typeface="Cambria Math"/>
+                          </a:rPr>
+                          <m:t>2</m:t>
+                        </m:r>
+                      </m:e>
+                      <m:sup>
+                        <m:r>
+                          <a:rPr lang="en-US" sz="2400" i="1">
+                            <a:latin typeface="Cambria Math"/>
+                          </a:rPr>
+                          <m:t>−</m:t>
+                        </m:r>
+                        <m:r>
+                          <a:rPr lang="en-US" sz="2400" i="1">
+                            <a:latin typeface="Cambria Math"/>
+                          </a:rPr>
+                          <m:t>1</m:t>
+                        </m:r>
+                      </m:sup>
+                    </m:sSup>
+                    <m:r>
+                      <a:rPr lang="en-US" sz="2400" i="1">
+                        <a:latin typeface="Cambria Math"/>
+                      </a:rPr>
+                      <m:t>+</m:t>
+                    </m:r>
+                    <m:r>
+                      <a:rPr lang="en-US" sz="2400" b="0" i="1" smtClean="0">
+                        <a:latin typeface="Cambria Math" panose="02040503050406030204" pitchFamily="18" charset="0"/>
+                      </a:rPr>
+                      <m:t>𝑏</m:t>
+                    </m:r>
+                    <m:r>
+                      <a:rPr lang="en-US" sz="2400" b="0" i="1" smtClean="0">
+                        <a:latin typeface="Cambria Math" panose="02040503050406030204" pitchFamily="18" charset="0"/>
+                      </a:rPr>
+                      <m:t>2</m:t>
+                    </m:r>
+                    <m:r>
+                      <a:rPr lang="en-US" sz="2400" b="0" i="1" smtClean="0">
+                        <a:latin typeface="Cambria Math" panose="02040503050406030204" pitchFamily="18" charset="0"/>
+                      </a:rPr>
+                      <m:t>×</m:t>
+                    </m:r>
+                    <m:sSup>
+                      <m:sSupPr>
+                        <m:ctrlPr>
+                          <a:rPr lang="en-US" sz="2400" i="1">
+                            <a:latin typeface="Cambria Math" panose="02040503050406030204" pitchFamily="18" charset="0"/>
+                          </a:rPr>
+                        </m:ctrlPr>
+                      </m:sSupPr>
+                      <m:e>
+                        <m:r>
+                          <a:rPr lang="en-US" sz="2400" i="1">
+                            <a:latin typeface="Cambria Math"/>
+                          </a:rPr>
+                          <m:t>2</m:t>
+                        </m:r>
+                      </m:e>
+                      <m:sup>
+                        <m:r>
+                          <a:rPr lang="en-US" sz="2400" i="1">
+                            <a:latin typeface="Cambria Math"/>
+                          </a:rPr>
+                          <m:t>−</m:t>
+                        </m:r>
+                        <m:r>
+                          <a:rPr lang="en-US" sz="2400" i="1">
+                            <a:latin typeface="Cambria Math"/>
+                          </a:rPr>
+                          <m:t>2</m:t>
+                        </m:r>
+                      </m:sup>
+                    </m:sSup>
+                    <m:r>
+                      <a:rPr lang="en-US" sz="2400" i="1">
+                        <a:latin typeface="Cambria Math"/>
+                      </a:rPr>
+                      <m:t>+</m:t>
+                    </m:r>
+                    <m:r>
+                      <a:rPr lang="en-US" sz="2400" b="0" i="1" smtClean="0">
+                        <a:latin typeface="Cambria Math" panose="02040503050406030204" pitchFamily="18" charset="0"/>
+                      </a:rPr>
+                      <m:t>𝑏</m:t>
+                    </m:r>
+                    <m:r>
+                      <a:rPr lang="en-US" sz="2400" b="0" i="1" smtClean="0">
+                        <a:latin typeface="Cambria Math" panose="02040503050406030204" pitchFamily="18" charset="0"/>
+                      </a:rPr>
+                      <m:t>3</m:t>
+                    </m:r>
+                    <m:r>
+                      <a:rPr lang="en-US" sz="2400" b="0" i="1" smtClean="0">
+                        <a:latin typeface="Cambria Math" panose="02040503050406030204" pitchFamily="18" charset="0"/>
+                      </a:rPr>
+                      <m:t>×</m:t>
+                    </m:r>
+                    <m:sSup>
+                      <m:sSupPr>
+                        <m:ctrlPr>
+                          <a:rPr lang="en-US" sz="2400" i="1">
+                            <a:latin typeface="Cambria Math" panose="02040503050406030204" pitchFamily="18" charset="0"/>
+                          </a:rPr>
+                        </m:ctrlPr>
+                      </m:sSupPr>
+                      <m:e>
+                        <m:r>
+                          <a:rPr lang="en-US" sz="2400" i="1">
+                            <a:latin typeface="Cambria Math"/>
+                          </a:rPr>
+                          <m:t>2</m:t>
+                        </m:r>
+                      </m:e>
+                      <m:sup>
+                        <m:r>
+                          <a:rPr lang="en-US" sz="2400" i="1">
+                            <a:latin typeface="Cambria Math"/>
+                          </a:rPr>
+                          <m:t>−</m:t>
+                        </m:r>
+                        <m:r>
+                          <a:rPr lang="en-US" sz="2400" i="1">
+                            <a:latin typeface="Cambria Math"/>
+                          </a:rPr>
+                          <m:t>3</m:t>
+                        </m:r>
+                      </m:sup>
+                    </m:sSup>
+                    <m:r>
+                      <a:rPr lang="en-US" sz="2400" i="1">
+                        <a:latin typeface="Cambria Math"/>
+                      </a:rPr>
+                      <m:t>+</m:t>
+                    </m:r>
+                    <m:r>
+                      <a:rPr lang="en-US" sz="2400" b="0" i="1" smtClean="0">
+                        <a:latin typeface="Cambria Math" panose="02040503050406030204" pitchFamily="18" charset="0"/>
+                      </a:rPr>
+                      <m:t>𝑏</m:t>
+                    </m:r>
+                    <m:r>
+                      <a:rPr lang="en-US" sz="2400" b="0" i="1" smtClean="0">
+                        <a:latin typeface="Cambria Math" panose="02040503050406030204" pitchFamily="18" charset="0"/>
+                      </a:rPr>
+                      <m:t>4</m:t>
+                    </m:r>
+                    <m:r>
+                      <a:rPr lang="en-US" sz="2400" b="0" i="1" smtClean="0">
+                        <a:latin typeface="Cambria Math" panose="02040503050406030204" pitchFamily="18" charset="0"/>
+                      </a:rPr>
+                      <m:t>×</m:t>
+                    </m:r>
+                    <m:sSup>
+                      <m:sSupPr>
+                        <m:ctrlPr>
+                          <a:rPr lang="en-US" sz="2400" i="1">
+                            <a:latin typeface="Cambria Math" panose="02040503050406030204" pitchFamily="18" charset="0"/>
+                          </a:rPr>
+                        </m:ctrlPr>
+                      </m:sSupPr>
+                      <m:e>
+                        <m:r>
+                          <a:rPr lang="en-US" sz="2400" i="1">
+                            <a:latin typeface="Cambria Math"/>
+                          </a:rPr>
+                          <m:t>2</m:t>
+                        </m:r>
+                      </m:e>
+                      <m:sup>
+                        <m:r>
+                          <a:rPr lang="en-US" sz="2400" i="1">
+                            <a:latin typeface="Cambria Math"/>
+                          </a:rPr>
+                          <m:t>−</m:t>
+                        </m:r>
+                        <m:r>
+                          <a:rPr lang="en-US" sz="2400" i="1">
+                            <a:latin typeface="Cambria Math"/>
+                          </a:rPr>
+                          <m:t>4</m:t>
+                        </m:r>
+                      </m:sup>
+                    </m:sSup>
+                    <m:r>
+                      <a:rPr lang="en-US" sz="2400" b="0" i="1" smtClean="0">
+                        <a:latin typeface="Cambria Math" panose="02040503050406030204" pitchFamily="18" charset="0"/>
+                      </a:rPr>
+                      <m:t>+…</m:t>
+                    </m:r>
+                  </m:oMath>
+                </a14:m>
+                <a:endParaRPr lang="en-US" dirty="0"/>
+              </a:p>
+              <a:p>
+                <a:pPr lvl="1"/>
+                <a14:m>
+                  <m:oMath xmlns:m="http://schemas.openxmlformats.org/officeDocument/2006/math">
+                    <m:r>
+                      <a:rPr lang="en-US" i="1">
+                        <a:latin typeface="Cambria Math"/>
+                      </a:rPr>
+                      <m:t>0</m:t>
+                    </m:r>
+                    <m:r>
+                      <a:rPr lang="en-US" i="1">
+                        <a:latin typeface="Cambria Math"/>
+                      </a:rPr>
+                      <m:t>.</m:t>
+                    </m:r>
+                    <m:r>
+                      <a:rPr lang="en-US" b="0" i="1" smtClean="0">
+                        <a:latin typeface="Cambria Math" panose="02040503050406030204" pitchFamily="18" charset="0"/>
+                      </a:rPr>
+                      <m:t>3</m:t>
+                    </m:r>
+                    <m:r>
+                      <a:rPr lang="en-US" i="1">
+                        <a:latin typeface="Cambria Math"/>
+                      </a:rPr>
+                      <m:t>×</m:t>
+                    </m:r>
+                    <m:r>
+                      <a:rPr lang="en-US" i="1">
+                        <a:latin typeface="Cambria Math"/>
+                      </a:rPr>
+                      <m:t>2</m:t>
+                    </m:r>
+                    <m:r>
+                      <a:rPr lang="en-US" i="1">
+                        <a:latin typeface="Cambria Math"/>
+                      </a:rPr>
+                      <m:t>=</m:t>
+                    </m:r>
+                    <m:r>
+                      <a:rPr lang="en-US" b="0" i="1" smtClean="0">
+                        <a:latin typeface="Cambria Math" panose="02040503050406030204" pitchFamily="18" charset="0"/>
+                      </a:rPr>
+                      <m:t>0</m:t>
+                    </m:r>
+                    <m:r>
+                      <a:rPr lang="en-US" i="1">
+                        <a:latin typeface="Cambria Math"/>
+                      </a:rPr>
+                      <m:t>.</m:t>
+                    </m:r>
+                    <m:r>
+                      <a:rPr lang="en-US" i="1">
+                        <a:latin typeface="Cambria Math"/>
+                      </a:rPr>
+                      <m:t>6</m:t>
+                    </m:r>
+                  </m:oMath>
+                </a14:m>
+                <a:r>
+                  <a:rPr lang="en-US" dirty="0"/>
+                  <a:t> =&gt; b1 = 0</a:t>
+                </a:r>
+              </a:p>
+              <a:p>
+                <a:pPr lvl="1"/>
+                <a14:m>
+                  <m:oMath xmlns:m="http://schemas.openxmlformats.org/officeDocument/2006/math">
+                    <m:r>
+                      <a:rPr lang="en-US" i="1">
+                        <a:latin typeface="Cambria Math"/>
+                      </a:rPr>
+                      <m:t>0</m:t>
+                    </m:r>
+                    <m:r>
+                      <a:rPr lang="en-US" i="1">
+                        <a:latin typeface="Cambria Math"/>
+                      </a:rPr>
+                      <m:t>.</m:t>
+                    </m:r>
+                    <m:r>
+                      <a:rPr lang="en-US" i="1">
+                        <a:latin typeface="Cambria Math"/>
+                      </a:rPr>
+                      <m:t>6</m:t>
+                    </m:r>
+                    <m:r>
+                      <a:rPr lang="en-US" i="1">
+                        <a:latin typeface="Cambria Math"/>
+                      </a:rPr>
+                      <m:t>×</m:t>
+                    </m:r>
+                    <m:r>
+                      <a:rPr lang="en-US" i="1">
+                        <a:latin typeface="Cambria Math"/>
+                      </a:rPr>
+                      <m:t>2</m:t>
+                    </m:r>
+                    <m:r>
+                      <a:rPr lang="en-US" i="1">
+                        <a:latin typeface="Cambria Math"/>
+                      </a:rPr>
+                      <m:t>=</m:t>
+                    </m:r>
+                    <m:r>
+                      <a:rPr lang="en-US" i="1">
+                        <a:latin typeface="Cambria Math"/>
+                      </a:rPr>
+                      <m:t>1</m:t>
+                    </m:r>
+                    <m:r>
+                      <a:rPr lang="en-US" i="1">
+                        <a:latin typeface="Cambria Math"/>
+                      </a:rPr>
+                      <m:t>.</m:t>
+                    </m:r>
+                    <m:r>
+                      <a:rPr lang="en-US" i="1">
+                        <a:latin typeface="Cambria Math"/>
+                      </a:rPr>
+                      <m:t>2</m:t>
+                    </m:r>
+                  </m:oMath>
+                </a14:m>
+                <a:r>
+                  <a:rPr lang="en-US" dirty="0"/>
+                  <a:t> =&gt; b2 = 1</a:t>
+                </a:r>
+              </a:p>
+              <a:p>
+                <a:pPr lvl="1"/>
+                <a14:m>
+                  <m:oMath xmlns:m="http://schemas.openxmlformats.org/officeDocument/2006/math">
+                    <m:r>
+                      <a:rPr lang="en-US" i="1">
+                        <a:latin typeface="Cambria Math"/>
+                      </a:rPr>
+                      <m:t>0</m:t>
+                    </m:r>
+                    <m:r>
+                      <a:rPr lang="en-US" i="1">
+                        <a:latin typeface="Cambria Math"/>
+                      </a:rPr>
+                      <m:t>.</m:t>
+                    </m:r>
+                    <m:r>
+                      <a:rPr lang="en-US" i="1">
+                        <a:latin typeface="Cambria Math"/>
+                      </a:rPr>
+                      <m:t>2</m:t>
+                    </m:r>
+                    <m:r>
+                      <a:rPr lang="en-US" i="1">
+                        <a:latin typeface="Cambria Math"/>
+                      </a:rPr>
+                      <m:t>×</m:t>
+                    </m:r>
+                    <m:r>
+                      <a:rPr lang="en-US" i="1">
+                        <a:latin typeface="Cambria Math"/>
+                      </a:rPr>
+                      <m:t>2</m:t>
+                    </m:r>
+                    <m:r>
+                      <a:rPr lang="en-US" i="1">
+                        <a:latin typeface="Cambria Math"/>
+                      </a:rPr>
+                      <m:t>=</m:t>
+                    </m:r>
+                    <m:r>
+                      <a:rPr lang="en-US" i="1">
+                        <a:latin typeface="Cambria Math"/>
+                      </a:rPr>
+                      <m:t>0</m:t>
+                    </m:r>
+                    <m:r>
+                      <a:rPr lang="en-US" i="1">
+                        <a:latin typeface="Cambria Math"/>
+                      </a:rPr>
+                      <m:t>.</m:t>
+                    </m:r>
+                    <m:r>
+                      <a:rPr lang="en-US" b="0" i="1" smtClean="0">
+                        <a:latin typeface="Cambria Math" panose="02040503050406030204" pitchFamily="18" charset="0"/>
+                      </a:rPr>
+                      <m:t>4</m:t>
+                    </m:r>
+                  </m:oMath>
+                </a14:m>
+                <a:r>
+                  <a:rPr lang="en-US" dirty="0"/>
+                  <a:t> =&gt; b3 = 0</a:t>
+                </a:r>
+              </a:p>
+              <a:p>
+                <a:pPr lvl="1"/>
+                <a14:m>
+                  <m:oMath xmlns:m="http://schemas.openxmlformats.org/officeDocument/2006/math">
+                    <m:r>
+                      <a:rPr lang="en-US" i="1">
+                        <a:latin typeface="Cambria Math"/>
+                      </a:rPr>
+                      <m:t>0</m:t>
+                    </m:r>
+                    <m:r>
+                      <a:rPr lang="en-US" i="1">
+                        <a:latin typeface="Cambria Math"/>
+                      </a:rPr>
+                      <m:t>.</m:t>
+                    </m:r>
+                    <m:r>
+                      <a:rPr lang="en-US" b="0" i="1" smtClean="0">
+                        <a:latin typeface="Cambria Math" panose="02040503050406030204" pitchFamily="18" charset="0"/>
+                      </a:rPr>
+                      <m:t>4</m:t>
+                    </m:r>
+                    <m:r>
+                      <a:rPr lang="en-US" i="1">
+                        <a:latin typeface="Cambria Math"/>
+                      </a:rPr>
+                      <m:t>×</m:t>
+                    </m:r>
+                    <m:r>
+                      <a:rPr lang="en-US" i="1">
+                        <a:latin typeface="Cambria Math"/>
+                      </a:rPr>
+                      <m:t>2</m:t>
+                    </m:r>
+                    <m:r>
+                      <a:rPr lang="en-US" i="1">
+                        <a:latin typeface="Cambria Math"/>
+                      </a:rPr>
+                      <m:t>=</m:t>
+                    </m:r>
+                    <m:r>
+                      <a:rPr lang="en-US" b="0" i="1" smtClean="0">
+                        <a:latin typeface="Cambria Math" panose="02040503050406030204" pitchFamily="18" charset="0"/>
+                      </a:rPr>
+                      <m:t>0</m:t>
+                    </m:r>
+                    <m:r>
+                      <a:rPr lang="en-US" b="0" i="1" smtClean="0">
+                        <a:latin typeface="Cambria Math" panose="02040503050406030204" pitchFamily="18" charset="0"/>
+                      </a:rPr>
+                      <m:t>.</m:t>
+                    </m:r>
+                    <m:r>
+                      <a:rPr lang="en-US" b="0" i="1" smtClean="0">
+                        <a:latin typeface="Cambria Math" panose="02040503050406030204" pitchFamily="18" charset="0"/>
+                      </a:rPr>
+                      <m:t>8</m:t>
+                    </m:r>
+                  </m:oMath>
+                </a14:m>
+                <a:r>
+                  <a:rPr lang="en-US" dirty="0"/>
+                  <a:t> =&gt; b4 = 0</a:t>
+                </a:r>
+              </a:p>
+              <a:p>
+                <a:pPr lvl="1"/>
+                <a14:m>
+                  <m:oMath xmlns:m="http://schemas.openxmlformats.org/officeDocument/2006/math">
+                    <m:r>
+                      <a:rPr lang="en-US" i="1">
+                        <a:latin typeface="Cambria Math"/>
+                      </a:rPr>
+                      <m:t>0</m:t>
+                    </m:r>
+                    <m:r>
+                      <a:rPr lang="en-US" i="1">
+                        <a:latin typeface="Cambria Math"/>
+                      </a:rPr>
+                      <m:t>.</m:t>
+                    </m:r>
+                    <m:r>
+                      <a:rPr lang="en-US" b="0" i="1" smtClean="0">
+                        <a:latin typeface="Cambria Math" panose="02040503050406030204" pitchFamily="18" charset="0"/>
+                      </a:rPr>
+                      <m:t>8</m:t>
+                    </m:r>
+                    <m:r>
+                      <a:rPr lang="en-US" i="1">
+                        <a:latin typeface="Cambria Math"/>
+                      </a:rPr>
+                      <m:t>×</m:t>
+                    </m:r>
+                    <m:r>
+                      <a:rPr lang="en-US" i="1">
+                        <a:latin typeface="Cambria Math"/>
+                      </a:rPr>
+                      <m:t>2</m:t>
+                    </m:r>
+                    <m:r>
+                      <a:rPr lang="en-US" i="1">
+                        <a:latin typeface="Cambria Math"/>
+                      </a:rPr>
+                      <m:t>=</m:t>
+                    </m:r>
+                    <m:r>
+                      <a:rPr lang="en-US" b="0" i="1" smtClean="0">
+                        <a:latin typeface="Cambria Math" panose="02040503050406030204" pitchFamily="18" charset="0"/>
+                      </a:rPr>
+                      <m:t>1</m:t>
+                    </m:r>
+                    <m:r>
+                      <a:rPr lang="en-US" b="0" i="1" smtClean="0">
+                        <a:latin typeface="Cambria Math" panose="02040503050406030204" pitchFamily="18" charset="0"/>
+                      </a:rPr>
+                      <m:t>.</m:t>
+                    </m:r>
+                    <m:r>
+                      <a:rPr lang="en-US" b="0" i="1" smtClean="0">
+                        <a:latin typeface="Cambria Math" panose="02040503050406030204" pitchFamily="18" charset="0"/>
+                      </a:rPr>
+                      <m:t>6</m:t>
+                    </m:r>
+                  </m:oMath>
+                </a14:m>
+                <a:r>
+                  <a:rPr lang="en-US" dirty="0"/>
+                  <a:t> =&gt; b5 = 1</a:t>
+                </a:r>
+              </a:p>
+              <a:p>
+                <a:pPr lvl="1"/>
+                <a14:m>
+                  <m:oMath xmlns:m="http://schemas.openxmlformats.org/officeDocument/2006/math">
+                    <m:r>
+                      <a:rPr lang="en-US" i="1">
+                        <a:latin typeface="Cambria Math"/>
+                      </a:rPr>
+                      <m:t>0</m:t>
+                    </m:r>
+                    <m:r>
+                      <a:rPr lang="en-US" i="1">
+                        <a:latin typeface="Cambria Math"/>
+                      </a:rPr>
+                      <m:t>.</m:t>
+                    </m:r>
+                    <m:r>
+                      <a:rPr lang="en-US" b="0" i="1" smtClean="0">
+                        <a:latin typeface="Cambria Math" panose="02040503050406030204" pitchFamily="18" charset="0"/>
+                      </a:rPr>
+                      <m:t>6</m:t>
+                    </m:r>
+                    <m:r>
+                      <a:rPr lang="en-US" i="1">
+                        <a:latin typeface="Cambria Math"/>
+                      </a:rPr>
+                      <m:t>×</m:t>
+                    </m:r>
+                    <m:r>
+                      <a:rPr lang="en-US" i="1">
+                        <a:latin typeface="Cambria Math"/>
+                      </a:rPr>
+                      <m:t>2</m:t>
+                    </m:r>
+                    <m:r>
+                      <a:rPr lang="en-US" i="1">
+                        <a:latin typeface="Cambria Math"/>
+                      </a:rPr>
+                      <m:t>=</m:t>
+                    </m:r>
+                    <m:r>
+                      <a:rPr lang="en-US" b="0" i="1" smtClean="0">
+                        <a:latin typeface="Cambria Math" panose="02040503050406030204" pitchFamily="18" charset="0"/>
+                      </a:rPr>
+                      <m:t>1</m:t>
+                    </m:r>
+                    <m:r>
+                      <a:rPr lang="en-US" i="1">
+                        <a:latin typeface="Cambria Math" panose="02040503050406030204" pitchFamily="18" charset="0"/>
+                      </a:rPr>
+                      <m:t>.</m:t>
+                    </m:r>
+                    <m:r>
+                      <a:rPr lang="en-US" b="0" i="1" smtClean="0">
+                        <a:latin typeface="Cambria Math" panose="02040503050406030204" pitchFamily="18" charset="0"/>
+                      </a:rPr>
+                      <m:t>2</m:t>
+                    </m:r>
+                  </m:oMath>
+                </a14:m>
+                <a:r>
+                  <a:rPr lang="en-US" dirty="0"/>
+                  <a:t> =&gt; b6 = 1</a:t>
+                </a:r>
+              </a:p>
+              <a:p>
+                <a:r>
+                  <a:rPr lang="en-US" dirty="0">
+                    <a:latin typeface="Consolas" panose="020B0609020204030204" pitchFamily="49" charset="0"/>
+                    <a:cs typeface="Consolas" panose="020B0609020204030204" pitchFamily="49" charset="0"/>
+                  </a:rPr>
+                  <a:t>14.5</a:t>
+                </a:r>
+                <a:r>
+                  <a:rPr lang="en-US" dirty="0"/>
+                  <a:t> = </a:t>
+                </a:r>
+                <a:r>
+                  <a:rPr lang="en-US" dirty="0">
+                    <a:solidFill>
+                      <a:srgbClr val="C00000"/>
+                    </a:solidFill>
+                    <a:latin typeface="Consolas" panose="020B0609020204030204" pitchFamily="49" charset="0"/>
+                    <a:cs typeface="Consolas" panose="020B0609020204030204" pitchFamily="49" charset="0"/>
+                  </a:rPr>
+                  <a:t>0</a:t>
+                </a:r>
+                <a:r>
+                  <a:rPr lang="en-US" dirty="0">
+                    <a:solidFill>
+                      <a:srgbClr val="0000FF"/>
+                    </a:solidFill>
+                    <a:latin typeface="Consolas" panose="020B0609020204030204" pitchFamily="49" charset="0"/>
+                    <a:cs typeface="Consolas" panose="020B0609020204030204" pitchFamily="49" charset="0"/>
+                  </a:rPr>
+                  <a:t>01111111</a:t>
+                </a:r>
+                <a:r>
+                  <a:rPr lang="en-US" dirty="0">
+                    <a:solidFill>
+                      <a:srgbClr val="00B050"/>
+                    </a:solidFill>
+                    <a:latin typeface="Consolas" panose="020B0609020204030204" pitchFamily="49" charset="0"/>
+                    <a:cs typeface="Consolas" panose="020B0609020204030204" pitchFamily="49" charset="0"/>
+                  </a:rPr>
+                  <a:t>01001100110011001100110</a:t>
+                </a:r>
+                <a:r>
+                  <a:rPr lang="en-US" dirty="0"/>
+                  <a:t> in binary or 0x3FA66666 in hex</a:t>
+                </a:r>
+              </a:p>
+            </p:txBody>
+          </p:sp>
+        </mc:Choice>
+        <mc:Fallback xmlns="">
+          <p:sp>
+            <p:nvSpPr>
+              <p:cNvPr id="4" name="Content Placeholder 3">
+                <a:extLst>
+                  <a:ext uri="{FF2B5EF4-FFF2-40B4-BE49-F238E27FC236}">
+                    <a16:creationId xmlns:a16="http://schemas.microsoft.com/office/drawing/2014/main" id="{B3D4FF65-D71D-3471-F040-1E677F86A2DD}"/>
+                  </a:ext>
+                </a:extLst>
+              </p:cNvPr>
+              <p:cNvSpPr>
+                <a:spLocks noGrp="1" noRot="1" noChangeAspect="1" noMove="1" noResize="1" noEditPoints="1" noAdjustHandles="1" noChangeArrowheads="1" noChangeShapeType="1" noTextEdit="1"/>
+              </p:cNvSpPr>
+              <p:nvPr>
+                <p:ph sz="quarter" idx="1"/>
+              </p:nvPr>
+            </p:nvSpPr>
+            <p:spPr>
+              <a:xfrm>
+                <a:off x="990600" y="1143000"/>
+                <a:ext cx="10363200" cy="5013960"/>
+              </a:xfrm>
+              <a:blipFill>
+                <a:blip r:embed="rId3"/>
+                <a:stretch>
+                  <a:fillRect l="-235" t="-1946" b="-122"/>
+                </a:stretch>
+              </a:blipFill>
+            </p:spPr>
+            <p:txBody>
+              <a:bodyPr/>
+              <a:lstStyle/>
+              <a:p>
+                <a:r>
+                  <a:rPr lang="en-US">
+                    <a:noFill/>
+                  </a:rPr>
+                  <a:t> </a:t>
+                </a:r>
+              </a:p>
+            </p:txBody>
+          </p:sp>
+        </mc:Fallback>
+      </mc:AlternateContent>
+      <p:sp>
+        <p:nvSpPr>
+          <p:cNvPr id="8" name="Right Brace 7">
+            <a:extLst>
+              <a:ext uri="{FF2B5EF4-FFF2-40B4-BE49-F238E27FC236}">
+                <a16:creationId xmlns:a16="http://schemas.microsoft.com/office/drawing/2014/main" id="{FADDE5B4-2BF0-3346-B39B-1C17BD95CCA8}"/>
+              </a:ext>
+            </a:extLst>
+          </p:cNvPr>
+          <p:cNvSpPr/>
+          <p:nvPr/>
+        </p:nvSpPr>
+        <p:spPr>
+          <a:xfrm>
+            <a:off x="3979432" y="4686292"/>
+            <a:ext cx="228597" cy="914400"/>
+          </a:xfrm>
+          <a:prstGeom prst="rightBrace">
+            <a:avLst>
+              <a:gd name="adj1" fmla="val 8333"/>
+              <a:gd name="adj2" fmla="val 48117"/>
+            </a:avLst>
+          </a:prstGeom>
+          <a:ln w="19050"/>
+        </p:spPr>
+        <p:style>
+          <a:lnRef idx="1">
+            <a:schemeClr val="accent1"/>
+          </a:lnRef>
+          <a:fillRef idx="0">
+            <a:schemeClr val="accent1"/>
+          </a:fillRef>
+          <a:effectRef idx="0">
+            <a:schemeClr val="accent1"/>
+          </a:effectRef>
+          <a:fontRef idx="minor">
+            <a:schemeClr val="tx1"/>
+          </a:fontRef>
+        </p:style>
+        <p:txBody>
+          <a:bodyPr rtlCol="0" anchor="ctr"/>
+          <a:lstStyle/>
+          <a:p>
+            <a:pPr algn="ctr"/>
+            <a:endParaRPr lang="en-US"/>
+          </a:p>
+        </p:txBody>
+      </p:sp>
+      <p:sp>
+        <p:nvSpPr>
+          <p:cNvPr id="9" name="TextBox 8">
+            <a:extLst>
+              <a:ext uri="{FF2B5EF4-FFF2-40B4-BE49-F238E27FC236}">
+                <a16:creationId xmlns:a16="http://schemas.microsoft.com/office/drawing/2014/main" id="{ACE7E842-BCEF-B6B4-E109-FC4B047B29D0}"/>
+              </a:ext>
+            </a:extLst>
+          </p:cNvPr>
+          <p:cNvSpPr txBox="1"/>
+          <p:nvPr/>
+        </p:nvSpPr>
+        <p:spPr>
+          <a:xfrm flipH="1">
+            <a:off x="4244784" y="4876800"/>
+            <a:ext cx="2057402" cy="369332"/>
+          </a:xfrm>
+          <a:prstGeom prst="rect">
+            <a:avLst/>
+          </a:prstGeom>
+          <a:noFill/>
+        </p:spPr>
+        <p:txBody>
+          <a:bodyPr wrap="square" rtlCol="0">
+            <a:spAutoFit/>
+          </a:bodyPr>
+          <a:lstStyle/>
+          <a:p>
+            <a:r>
+              <a:rPr lang="en-US" dirty="0"/>
+              <a:t>Repeats infinitely</a:t>
+            </a:r>
+          </a:p>
+        </p:txBody>
+      </p:sp>
+    </p:spTree>
+    <p:extLst>
+      <p:ext uri="{BB962C8B-B14F-4D97-AF65-F5344CB8AC3E}">
+        <p14:creationId xmlns:p14="http://schemas.microsoft.com/office/powerpoint/2010/main" val="3951653191"/>
+      </p:ext>
+    </p:extLst>
+  </p:cSld>
+  <p:clrMapOvr>
+    <a:masterClrMapping/>
+  </p:clrMapOvr>
+</p:sld>
+</file>
+
+<file path=ppt/slides/slide21.xml><?xml version="1.0" encoding="utf-8"?>
+<p:sld xmlns:a="http://schemas.openxmlformats.org/drawingml/2006/main" xmlns:r="http://schemas.openxmlformats.org/officeDocument/2006/relationships" xmlns:p="http://schemas.openxmlformats.org/presentationml/2006/main">
+  <p:cSld>
+    <p:spTree>
+      <p:nvGrpSpPr>
+        <p:cNvPr id="1" name="">
+          <a:extLst>
+            <a:ext uri="{FF2B5EF4-FFF2-40B4-BE49-F238E27FC236}">
               <a16:creationId xmlns:a16="http://schemas.microsoft.com/office/drawing/2014/main" id="{6893DE8F-D6F6-AAA1-D94A-86C18C17534D}"/>
             </a:ext>
           </a:extLst>
@@ -20658,7 +21540,7 @@
             <a:fld id="{EA7C8D44-3667-46F6-9772-CC52308E2A7F}" type="slidenum">
               <a:rPr kumimoji="0" lang="en-US" smtClean="0"/>
               <a:pPr/>
-              <a:t>20</a:t>
+              <a:t>21</a:t>
             </a:fld>
             <a:endParaRPr kumimoji="0" lang="en-US" dirty="0"/>
           </a:p>
@@ -21380,7 +22262,7 @@
 </p:sld>
 </file>
 
-<file path=ppt/slides/slide21.xml><?xml version="1.0" encoding="utf-8"?>
+<file path=ppt/slides/slide22.xml><?xml version="1.0" encoding="utf-8"?>
 <p:sld xmlns:a="http://schemas.openxmlformats.org/drawingml/2006/main" xmlns:r="http://schemas.openxmlformats.org/officeDocument/2006/relationships" xmlns:p="http://schemas.openxmlformats.org/presentationml/2006/main">
   <p:cSld>
     <p:spTree>
@@ -21437,7 +22319,7 @@
             <a:fld id="{EA7C8D44-3667-46F6-9772-CC52308E2A7F}" type="slidenum">
               <a:rPr kumimoji="0" lang="en-US" smtClean="0"/>
               <a:pPr/>
-              <a:t>21</a:t>
+              <a:t>22</a:t>
             </a:fld>
             <a:endParaRPr kumimoji="0" lang="en-US" dirty="0"/>
           </a:p>
@@ -21849,7 +22731,7 @@
 </p:sld>
 </file>
 
-<file path=ppt/slides/slide22.xml><?xml version="1.0" encoding="utf-8"?>
+<file path=ppt/slides/slide23.xml><?xml version="1.0" encoding="utf-8"?>
 <p:sld xmlns:a="http://schemas.openxmlformats.org/drawingml/2006/main" xmlns:r="http://schemas.openxmlformats.org/officeDocument/2006/relationships" xmlns:p="http://schemas.openxmlformats.org/presentationml/2006/main">
   <p:cSld>
     <p:spTree>
@@ -21910,7 +22792,7 @@
             <a:fld id="{EA7C8D44-3667-46F6-9772-CC52308E2A7F}" type="slidenum">
               <a:rPr kumimoji="0" lang="en-US" smtClean="0"/>
               <a:pPr/>
-              <a:t>22</a:t>
+              <a:t>23</a:t>
             </a:fld>
             <a:endParaRPr kumimoji="0" lang="en-US" dirty="0"/>
           </a:p>
@@ -22347,7 +23229,7 @@
 </p:sld>
 </file>
 
-<file path=ppt/slides/slide23.xml><?xml version="1.0" encoding="utf-8"?>
+<file path=ppt/slides/slide24.xml><?xml version="1.0" encoding="utf-8"?>
 <p:sld xmlns:a="http://schemas.openxmlformats.org/drawingml/2006/main" xmlns:r="http://schemas.openxmlformats.org/officeDocument/2006/relationships" xmlns:p="http://schemas.openxmlformats.org/presentationml/2006/main">
   <p:cSld>
     <p:spTree>
@@ -22404,7 +23286,7 @@
             <a:fld id="{EA7C8D44-3667-46F6-9772-CC52308E2A7F}" type="slidenum">
               <a:rPr kumimoji="0" lang="en-US" smtClean="0"/>
               <a:pPr/>
-              <a:t>23</a:t>
+              <a:t>24</a:t>
             </a:fld>
             <a:endParaRPr kumimoji="0" lang="en-US" dirty="0"/>
           </a:p>
@@ -22485,7 +23367,19 @@
                             <a:rPr lang="en-US" sz="2400" i="1">
                               <a:latin typeface="Cambria Math"/>
                             </a:rPr>
-                            <m:t>(−1)</m:t>
+                            <m:t>(−</m:t>
+                          </m:r>
+                          <m:r>
+                            <a:rPr lang="en-US" sz="2400" i="1">
+                              <a:latin typeface="Cambria Math"/>
+                            </a:rPr>
+                            <m:t>1</m:t>
+                          </m:r>
+                          <m:r>
+                            <a:rPr lang="en-US" sz="2400" i="1">
+                              <a:latin typeface="Cambria Math"/>
+                            </a:rPr>
+                            <m:t>)</m:t>
                           </m:r>
                         </m:e>
                         <m:sup>
@@ -22516,7 +23410,19 @@
                             <a:rPr lang="en-US" sz="2400" i="1">
                               <a:latin typeface="Cambria Math"/>
                             </a:rPr>
-                            <m:t>1+0</m:t>
+                            <m:t>1</m:t>
+                          </m:r>
+                          <m:r>
+                            <a:rPr lang="en-US" sz="2400" i="1">
+                              <a:latin typeface="Cambria Math"/>
+                            </a:rPr>
+                            <m:t>+</m:t>
+                          </m:r>
+                          <m:r>
+                            <a:rPr lang="en-US" sz="2400" i="1">
+                              <a:latin typeface="Cambria Math"/>
+                            </a:rPr>
+                            <m:t>0</m:t>
                           </m:r>
                         </m:e>
                       </m:d>
@@ -22547,7 +23453,19 @@
                             <a:rPr lang="en-US" sz="2400" i="1">
                               <a:latin typeface="Cambria Math"/>
                             </a:rPr>
-                            <m:t>1−127</m:t>
+                            <m:t>1</m:t>
+                          </m:r>
+                          <m:r>
+                            <a:rPr lang="en-US" sz="2400" i="1">
+                              <a:latin typeface="Cambria Math"/>
+                            </a:rPr>
+                            <m:t>−</m:t>
+                          </m:r>
+                          <m:r>
+                            <a:rPr lang="en-US" sz="2400" i="1">
+                              <a:latin typeface="Cambria Math"/>
+                            </a:rPr>
+                            <m:t>127</m:t>
                           </m:r>
                         </m:sup>
                       </m:sSup>
@@ -22578,7 +23496,13 @@
                             <a:rPr lang="en-US" sz="2400" i="1">
                               <a:latin typeface="Cambria Math"/>
                             </a:rPr>
-                            <m:t>−126</m:t>
+                            <m:t>−</m:t>
+                          </m:r>
+                          <m:r>
+                            <a:rPr lang="en-US" sz="2400" i="1">
+                              <a:latin typeface="Cambria Math"/>
+                            </a:rPr>
+                            <m:t>126</m:t>
                           </m:r>
                         </m:sup>
                       </m:sSup>
@@ -22586,7 +23510,31 @@
                         <a:rPr lang="en-US" sz="2400" i="1">
                           <a:latin typeface="Cambria Math"/>
                         </a:rPr>
-                        <m:t>≈1.18×</m:t>
+                        <m:t>≈</m:t>
+                      </m:r>
+                      <m:r>
+                        <a:rPr lang="en-US" sz="2400" i="1">
+                          <a:latin typeface="Cambria Math"/>
+                        </a:rPr>
+                        <m:t>1</m:t>
+                      </m:r>
+                      <m:r>
+                        <a:rPr lang="en-US" sz="2400" i="1">
+                          <a:latin typeface="Cambria Math"/>
+                        </a:rPr>
+                        <m:t>.</m:t>
+                      </m:r>
+                      <m:r>
+                        <a:rPr lang="en-US" sz="2400" i="1">
+                          <a:latin typeface="Cambria Math"/>
+                        </a:rPr>
+                        <m:t>18</m:t>
+                      </m:r>
+                      <m:r>
+                        <a:rPr lang="en-US" sz="2400" i="1">
+                          <a:latin typeface="Cambria Math"/>
+                        </a:rPr>
+                        <m:t>×</m:t>
                       </m:r>
                       <m:sSup>
                         <m:sSupPr>
@@ -22609,7 +23557,13 @@
                             <a:rPr lang="en-US" sz="2400" i="1">
                               <a:latin typeface="Cambria Math"/>
                             </a:rPr>
-                            <m:t>−38</m:t>
+                            <m:t>−</m:t>
+                          </m:r>
+                          <m:r>
+                            <a:rPr lang="en-US" sz="2400" i="1">
+                              <a:latin typeface="Cambria Math"/>
+                            </a:rPr>
+                            <m:t>38</m:t>
                           </m:r>
                         </m:sup>
                       </m:sSup>
@@ -22889,7 +23843,19 @@
                             <a:rPr lang="en-US" sz="2400" i="1">
                               <a:latin typeface="Cambria Math"/>
                             </a:rPr>
-                            <m:t>(−1)</m:t>
+                            <m:t>(−</m:t>
+                          </m:r>
+                          <m:r>
+                            <a:rPr lang="en-US" sz="2400" i="1">
+                              <a:latin typeface="Cambria Math"/>
+                            </a:rPr>
+                            <m:t>1</m:t>
+                          </m:r>
+                          <m:r>
+                            <a:rPr lang="en-US" sz="2400" i="1">
+                              <a:latin typeface="Cambria Math"/>
+                            </a:rPr>
+                            <m:t>)</m:t>
                           </m:r>
                         </m:e>
                         <m:sup>
@@ -22988,7 +23954,19 @@
                             <a:rPr lang="en-US" sz="2400" i="1">
                               <a:latin typeface="Cambria Math"/>
                             </a:rPr>
-                            <m:t>1−127</m:t>
+                            <m:t>1</m:t>
+                          </m:r>
+                          <m:r>
+                            <a:rPr lang="en-US" sz="2400" i="1">
+                              <a:latin typeface="Cambria Math"/>
+                            </a:rPr>
+                            <m:t>−</m:t>
+                          </m:r>
+                          <m:r>
+                            <a:rPr lang="en-US" sz="2400" i="1">
+                              <a:latin typeface="Cambria Math"/>
+                            </a:rPr>
+                            <m:t>127</m:t>
                           </m:r>
                         </m:sup>
                       </m:sSup>
@@ -23019,7 +23997,13 @@
                             <a:rPr lang="en-US" sz="2400" i="1">
                               <a:latin typeface="Cambria Math"/>
                             </a:rPr>
-                            <m:t>−149</m:t>
+                            <m:t>−</m:t>
+                          </m:r>
+                          <m:r>
+                            <a:rPr lang="en-US" sz="2400" i="1">
+                              <a:latin typeface="Cambria Math"/>
+                            </a:rPr>
+                            <m:t>149</m:t>
                           </m:r>
                         </m:sup>
                       </m:sSup>
@@ -23027,7 +24011,19 @@
                         <a:rPr lang="en-US" sz="2400" i="1">
                           <a:latin typeface="Cambria Math"/>
                         </a:rPr>
-                        <m:t>≈1.</m:t>
+                        <m:t>≈</m:t>
+                      </m:r>
+                      <m:r>
+                        <a:rPr lang="en-US" sz="2400" i="1">
+                          <a:latin typeface="Cambria Math"/>
+                        </a:rPr>
+                        <m:t>1</m:t>
+                      </m:r>
+                      <m:r>
+                        <a:rPr lang="en-US" sz="2400" i="1">
+                          <a:latin typeface="Cambria Math"/>
+                        </a:rPr>
+                        <m:t>.</m:t>
                       </m:r>
                       <m:r>
                         <a:rPr lang="en-US" sz="2400" b="0" i="1" smtClean="0">
@@ -23226,7 +24222,7 @@
 </p:sld>
 </file>
 
-<file path=ppt/slides/slide24.xml><?xml version="1.0" encoding="utf-8"?>
+<file path=ppt/slides/slide25.xml><?xml version="1.0" encoding="utf-8"?>
 <p:sld xmlns:a="http://schemas.openxmlformats.org/drawingml/2006/main" xmlns:r="http://schemas.openxmlformats.org/officeDocument/2006/relationships" xmlns:p="http://schemas.openxmlformats.org/presentationml/2006/main">
   <p:cSld>
     <p:spTree>
@@ -23283,7 +24279,7 @@
             <a:fld id="{EA7C8D44-3667-46F6-9772-CC52308E2A7F}" type="slidenum">
               <a:rPr kumimoji="0" lang="en-US" smtClean="0"/>
               <a:pPr/>
-              <a:t>24</a:t>
+              <a:t>25</a:t>
             </a:fld>
             <a:endParaRPr kumimoji="0" lang="en-US" dirty="0"/>
           </a:p>
@@ -23886,7 +24882,7 @@
 </p:sld>
 </file>
 
-<file path=ppt/slides/slide25.xml><?xml version="1.0" encoding="utf-8"?>
+<file path=ppt/slides/slide26.xml><?xml version="1.0" encoding="utf-8"?>
 <p:sld xmlns:a="http://schemas.openxmlformats.org/drawingml/2006/main" xmlns:r="http://schemas.openxmlformats.org/officeDocument/2006/relationships" xmlns:p="http://schemas.openxmlformats.org/presentationml/2006/main">
   <p:cSld>
     <p:spTree>
@@ -23943,7 +24939,7 @@
             <a:fld id="{EA7C8D44-3667-46F6-9772-CC52308E2A7F}" type="slidenum">
               <a:rPr kumimoji="0" lang="en-US" smtClean="0"/>
               <a:pPr/>
-              <a:t>25</a:t>
+              <a:t>26</a:t>
             </a:fld>
             <a:endParaRPr kumimoji="0" lang="en-US" dirty="0"/>
           </a:p>
@@ -24053,7 +25049,7 @@
 </p:sld>
 </file>
 
-<file path=ppt/slides/slide26.xml><?xml version="1.0" encoding="utf-8"?>
+<file path=ppt/slides/slide27.xml><?xml version="1.0" encoding="utf-8"?>
 <p:sld xmlns:a="http://schemas.openxmlformats.org/drawingml/2006/main" xmlns:r="http://schemas.openxmlformats.org/officeDocument/2006/relationships" xmlns:p="http://schemas.openxmlformats.org/presentationml/2006/main">
   <p:cSld>
     <p:spTree>
@@ -24122,7 +25118,7 @@
             <a:fld id="{EA7C8D44-3667-46F6-9772-CC52308E2A7F}" type="slidenum">
               <a:rPr kumimoji="0" lang="en-US" smtClean="0"/>
               <a:pPr/>
-              <a:t>26</a:t>
+              <a:t>27</a:t>
             </a:fld>
             <a:endParaRPr kumimoji="0" lang="en-US" dirty="0"/>
           </a:p>
@@ -24285,7 +25281,7 @@
 </p:sld>
 </file>
 
-<file path=ppt/slides/slide27.xml><?xml version="1.0" encoding="utf-8"?>
+<file path=ppt/slides/slide28.xml><?xml version="1.0" encoding="utf-8"?>
 <p:sld xmlns:a="http://schemas.openxmlformats.org/drawingml/2006/main" xmlns:r="http://schemas.openxmlformats.org/officeDocument/2006/relationships" xmlns:p="http://schemas.openxmlformats.org/presentationml/2006/main">
   <p:cSld>
     <p:spTree>
@@ -24356,7 +25352,7 @@
             <a:fld id="{EA7C8D44-3667-46F6-9772-CC52308E2A7F}" type="slidenum">
               <a:rPr kumimoji="0" lang="en-US" smtClean="0"/>
               <a:pPr/>
-              <a:t>27</a:t>
+              <a:t>28</a:t>
             </a:fld>
             <a:endParaRPr kumimoji="0" lang="en-US" dirty="0"/>
           </a:p>
@@ -24446,7 +25442,7 @@
 </p:sld>
 </file>
 
-<file path=ppt/slides/slide28.xml><?xml version="1.0" encoding="utf-8"?>
+<file path=ppt/slides/slide29.xml><?xml version="1.0" encoding="utf-8"?>
 <p:sld xmlns:a="http://schemas.openxmlformats.org/drawingml/2006/main" xmlns:r="http://schemas.openxmlformats.org/officeDocument/2006/relationships" xmlns:p="http://schemas.openxmlformats.org/presentationml/2006/main">
   <p:cSld>
     <p:spTree>
@@ -24515,7 +25511,7 @@
             <a:fld id="{EA7C8D44-3667-46F6-9772-CC52308E2A7F}" type="slidenum">
               <a:rPr kumimoji="0" lang="en-US" smtClean="0"/>
               <a:pPr/>
-              <a:t>28</a:t>
+              <a:t>29</a:t>
             </a:fld>
             <a:endParaRPr kumimoji="0" lang="en-US" dirty="0"/>
           </a:p>

--- a/PPTs/Ch12_13_Fixed_Floating_Point_Numbers.pptx
+++ b/PPTs/Ch12_13_Fixed_Floating_Point_Numbers.pptx
@@ -160,7 +160,7 @@
 <file path=ppt/revisionInfo.xml><?xml version="1.0" encoding="utf-8"?>
 <p1510:revInfo xmlns:a="http://schemas.openxmlformats.org/drawingml/2006/main" xmlns:r="http://schemas.openxmlformats.org/officeDocument/2006/relationships" xmlns:p1510="http://schemas.microsoft.com/office/powerpoint/2015/10/main">
   <p1510:revLst>
-    <p1510:client id="{67564324-3CBA-4E84-95E9-F69DCA3B5F12}" v="426" dt="2025-10-17T23:35:08.628"/>
+    <p1510:client id="{67564324-3CBA-4E84-95E9-F69DCA3B5F12}" v="435" dt="2025-10-26T16:47:46.641"/>
   </p1510:revLst>
 </p1510:revInfo>
 </file>
@@ -170,29 +170,15 @@
   <pc:docChgLst>
     <pc:chgData name="Zonghua Gu" userId="9a7e1853e1951ef5" providerId="LiveId" clId="{CF1FAA12-072C-4ED5-BA76-0FFFAEFDB88A}"/>
     <pc:docChg chg="undo custSel addSld delSld modSld sldOrd">
-      <pc:chgData name="Zonghua Gu" userId="9a7e1853e1951ef5" providerId="LiveId" clId="{CF1FAA12-072C-4ED5-BA76-0FFFAEFDB88A}" dt="2025-10-17T23:34:43.244" v="1160" actId="20577"/>
+      <pc:chgData name="Zonghua Gu" userId="9a7e1853e1951ef5" providerId="LiveId" clId="{CF1FAA12-072C-4ED5-BA76-0FFFAEFDB88A}" dt="2025-10-26T19:32:42.828" v="1192" actId="21"/>
       <pc:docMkLst>
         <pc:docMk/>
       </pc:docMkLst>
-      <pc:sldChg chg="del">
-        <pc:chgData name="Zonghua Gu" userId="9a7e1853e1951ef5" providerId="LiveId" clId="{CF1FAA12-072C-4ED5-BA76-0FFFAEFDB88A}" dt="2025-10-04T18:30:00.858" v="1" actId="47"/>
-        <pc:sldMkLst>
-          <pc:docMk/>
-          <pc:sldMk cId="1683281344" sldId="256"/>
-        </pc:sldMkLst>
-      </pc:sldChg>
       <pc:sldChg chg="add">
         <pc:chgData name="Zonghua Gu" userId="9a7e1853e1951ef5" providerId="LiveId" clId="{CF1FAA12-072C-4ED5-BA76-0FFFAEFDB88A}" dt="2025-10-04T20:56:33.083" v="131"/>
         <pc:sldMkLst>
           <pc:docMk/>
           <pc:sldMk cId="905681104" sldId="257"/>
-        </pc:sldMkLst>
-      </pc:sldChg>
-      <pc:sldChg chg="modSp del">
-        <pc:chgData name="Zonghua Gu" userId="9a7e1853e1951ef5" providerId="LiveId" clId="{CF1FAA12-072C-4ED5-BA76-0FFFAEFDB88A}" dt="2025-10-04T20:56:27.090" v="130" actId="2696"/>
-        <pc:sldMkLst>
-          <pc:docMk/>
-          <pc:sldMk cId="3618025678" sldId="257"/>
         </pc:sldMkLst>
       </pc:sldChg>
       <pc:sldChg chg="add">
@@ -202,25 +188,11 @@
           <pc:sldMk cId="4111405843" sldId="258"/>
         </pc:sldMkLst>
       </pc:sldChg>
-      <pc:sldChg chg="del">
-        <pc:chgData name="Zonghua Gu" userId="9a7e1853e1951ef5" providerId="LiveId" clId="{CF1FAA12-072C-4ED5-BA76-0FFFAEFDB88A}" dt="2025-10-04T21:13:40.649" v="510" actId="47"/>
-        <pc:sldMkLst>
-          <pc:docMk/>
-          <pc:sldMk cId="3232708474" sldId="259"/>
-        </pc:sldMkLst>
-      </pc:sldChg>
       <pc:sldChg chg="add">
         <pc:chgData name="Zonghua Gu" userId="9a7e1853e1951ef5" providerId="LiveId" clId="{CF1FAA12-072C-4ED5-BA76-0FFFAEFDB88A}" dt="2025-10-04T21:14:03.366" v="511"/>
         <pc:sldMkLst>
           <pc:docMk/>
           <pc:sldMk cId="4187797743" sldId="259"/>
-        </pc:sldMkLst>
-      </pc:sldChg>
-      <pc:sldChg chg="del">
-        <pc:chgData name="Zonghua Gu" userId="9a7e1853e1951ef5" providerId="LiveId" clId="{CF1FAA12-072C-4ED5-BA76-0FFFAEFDB88A}" dt="2025-10-04T21:13:40.649" v="510" actId="47"/>
-        <pc:sldMkLst>
-          <pc:docMk/>
-          <pc:sldMk cId="786215291" sldId="260"/>
         </pc:sldMkLst>
       </pc:sldChg>
       <pc:sldChg chg="modSp add mod">
@@ -245,13 +217,6 @@
             <ac:spMk id="5" creationId="{00000000-0000-0000-0000-000000000000}"/>
           </ac:spMkLst>
         </pc:spChg>
-      </pc:sldChg>
-      <pc:sldChg chg="addSp delSp modSp add del mod">
-        <pc:chgData name="Zonghua Gu" userId="9a7e1853e1951ef5" providerId="LiveId" clId="{CF1FAA12-072C-4ED5-BA76-0FFFAEFDB88A}" dt="2025-10-04T20:59:12.335" v="137" actId="2696"/>
-        <pc:sldMkLst>
-          <pc:docMk/>
-          <pc:sldMk cId="1423005339" sldId="263"/>
-        </pc:sldMkLst>
       </pc:sldChg>
       <pc:sldChg chg="addSp modSp add mod ord">
         <pc:chgData name="Zonghua Gu" userId="9a7e1853e1951ef5" providerId="LiveId" clId="{CF1FAA12-072C-4ED5-BA76-0FFFAEFDB88A}" dt="2025-10-04T21:05:11.297" v="212" actId="20577"/>
@@ -364,13 +329,6 @@
           </ac:picMkLst>
         </pc:picChg>
       </pc:sldChg>
-      <pc:sldChg chg="del">
-        <pc:chgData name="Zonghua Gu" userId="9a7e1853e1951ef5" providerId="LiveId" clId="{CF1FAA12-072C-4ED5-BA76-0FFFAEFDB88A}" dt="2025-10-04T20:56:27.090" v="130" actId="2696"/>
-        <pc:sldMkLst>
-          <pc:docMk/>
-          <pc:sldMk cId="3540549890" sldId="263"/>
-        </pc:sldMkLst>
-      </pc:sldChg>
       <pc:sldChg chg="modSp mod">
         <pc:chgData name="Zonghua Gu" userId="9a7e1853e1951ef5" providerId="LiveId" clId="{CF1FAA12-072C-4ED5-BA76-0FFFAEFDB88A}" dt="2025-10-04T20:43:43.566" v="126" actId="14100"/>
         <pc:sldMkLst>
@@ -408,39 +366,11 @@
           <pc:sldMk cId="378386796" sldId="267"/>
         </pc:sldMkLst>
       </pc:sldChg>
-      <pc:sldChg chg="del">
-        <pc:chgData name="Zonghua Gu" userId="9a7e1853e1951ef5" providerId="LiveId" clId="{CF1FAA12-072C-4ED5-BA76-0FFFAEFDB88A}" dt="2025-10-04T21:13:40.649" v="510" actId="47"/>
-        <pc:sldMkLst>
-          <pc:docMk/>
-          <pc:sldMk cId="3325790699" sldId="267"/>
-        </pc:sldMkLst>
-      </pc:sldChg>
       <pc:sldChg chg="add">
         <pc:chgData name="Zonghua Gu" userId="9a7e1853e1951ef5" providerId="LiveId" clId="{CF1FAA12-072C-4ED5-BA76-0FFFAEFDB88A}" dt="2025-10-04T21:14:03.366" v="511"/>
         <pc:sldMkLst>
           <pc:docMk/>
           <pc:sldMk cId="2849682855" sldId="268"/>
-        </pc:sldMkLst>
-      </pc:sldChg>
-      <pc:sldChg chg="del">
-        <pc:chgData name="Zonghua Gu" userId="9a7e1853e1951ef5" providerId="LiveId" clId="{CF1FAA12-072C-4ED5-BA76-0FFFAEFDB88A}" dt="2025-10-04T21:13:40.649" v="510" actId="47"/>
-        <pc:sldMkLst>
-          <pc:docMk/>
-          <pc:sldMk cId="1882193079" sldId="269"/>
-        </pc:sldMkLst>
-      </pc:sldChg>
-      <pc:sldChg chg="del">
-        <pc:chgData name="Zonghua Gu" userId="9a7e1853e1951ef5" providerId="LiveId" clId="{CF1FAA12-072C-4ED5-BA76-0FFFAEFDB88A}" dt="2025-10-04T21:13:40.649" v="510" actId="47"/>
-        <pc:sldMkLst>
-          <pc:docMk/>
-          <pc:sldMk cId="1570755524" sldId="275"/>
-        </pc:sldMkLst>
-      </pc:sldChg>
-      <pc:sldChg chg="del">
-        <pc:chgData name="Zonghua Gu" userId="9a7e1853e1951ef5" providerId="LiveId" clId="{CF1FAA12-072C-4ED5-BA76-0FFFAEFDB88A}" dt="2025-10-04T21:13:40.649" v="510" actId="47"/>
-        <pc:sldMkLst>
-          <pc:docMk/>
-          <pc:sldMk cId="240552340" sldId="276"/>
         </pc:sldMkLst>
       </pc:sldChg>
       <pc:sldChg chg="add">
@@ -450,25 +380,11 @@
           <pc:sldMk cId="430635750" sldId="277"/>
         </pc:sldMkLst>
       </pc:sldChg>
-      <pc:sldChg chg="del">
-        <pc:chgData name="Zonghua Gu" userId="9a7e1853e1951ef5" providerId="LiveId" clId="{CF1FAA12-072C-4ED5-BA76-0FFFAEFDB88A}" dt="2025-10-04T21:13:40.649" v="510" actId="47"/>
-        <pc:sldMkLst>
-          <pc:docMk/>
-          <pc:sldMk cId="3361152785" sldId="277"/>
-        </pc:sldMkLst>
-      </pc:sldChg>
       <pc:sldChg chg="add">
         <pc:chgData name="Zonghua Gu" userId="9a7e1853e1951ef5" providerId="LiveId" clId="{CF1FAA12-072C-4ED5-BA76-0FFFAEFDB88A}" dt="2025-10-04T21:14:03.366" v="511"/>
         <pc:sldMkLst>
           <pc:docMk/>
           <pc:sldMk cId="1945936955" sldId="278"/>
-        </pc:sldMkLst>
-      </pc:sldChg>
-      <pc:sldChg chg="del">
-        <pc:chgData name="Zonghua Gu" userId="9a7e1853e1951ef5" providerId="LiveId" clId="{CF1FAA12-072C-4ED5-BA76-0FFFAEFDB88A}" dt="2025-10-04T21:13:40.649" v="510" actId="47"/>
-        <pc:sldMkLst>
-          <pc:docMk/>
-          <pc:sldMk cId="2115500549" sldId="279"/>
         </pc:sldMkLst>
       </pc:sldChg>
       <pc:sldChg chg="add">
@@ -478,74 +394,56 @@
           <pc:sldMk cId="4199759654" sldId="280"/>
         </pc:sldMkLst>
       </pc:sldChg>
-      <pc:sldChg chg="add">
-        <pc:chgData name="Zonghua Gu" userId="9a7e1853e1951ef5" providerId="LiveId" clId="{CF1FAA12-072C-4ED5-BA76-0FFFAEFDB88A}" dt="2025-10-04T21:14:03.366" v="511"/>
+      <pc:sldChg chg="modSp add mod">
+        <pc:chgData name="Zonghua Gu" userId="9a7e1853e1951ef5" providerId="LiveId" clId="{CF1FAA12-072C-4ED5-BA76-0FFFAEFDB88A}" dt="2025-10-26T16:50:30.808" v="1183" actId="113"/>
         <pc:sldMkLst>
           <pc:docMk/>
           <pc:sldMk cId="3761897037" sldId="281"/>
         </pc:sldMkLst>
+        <pc:spChg chg="mod">
+          <ac:chgData name="Zonghua Gu" userId="9a7e1853e1951ef5" providerId="LiveId" clId="{CF1FAA12-072C-4ED5-BA76-0FFFAEFDB88A}" dt="2025-10-26T16:50:30.808" v="1183" actId="113"/>
+          <ac:spMkLst>
+            <pc:docMk/>
+            <pc:sldMk cId="3761897037" sldId="281"/>
+            <ac:spMk id="2" creationId="{375475F4-E526-1473-6263-AB10E888210F}"/>
+          </ac:spMkLst>
+        </pc:spChg>
       </pc:sldChg>
-      <pc:sldChg chg="add">
-        <pc:chgData name="Zonghua Gu" userId="9a7e1853e1951ef5" providerId="LiveId" clId="{CF1FAA12-072C-4ED5-BA76-0FFFAEFDB88A}" dt="2025-10-04T21:14:03.366" v="511"/>
+      <pc:sldChg chg="modSp add mod">
+        <pc:chgData name="Zonghua Gu" userId="9a7e1853e1951ef5" providerId="LiveId" clId="{CF1FAA12-072C-4ED5-BA76-0FFFAEFDB88A}" dt="2025-10-26T16:50:33.152" v="1184" actId="113"/>
         <pc:sldMkLst>
           <pc:docMk/>
           <pc:sldMk cId="1065607407" sldId="282"/>
         </pc:sldMkLst>
+        <pc:spChg chg="mod">
+          <ac:chgData name="Zonghua Gu" userId="9a7e1853e1951ef5" providerId="LiveId" clId="{CF1FAA12-072C-4ED5-BA76-0FFFAEFDB88A}" dt="2025-10-26T16:50:33.152" v="1184" actId="113"/>
+          <ac:spMkLst>
+            <pc:docMk/>
+            <pc:sldMk cId="1065607407" sldId="282"/>
+            <ac:spMk id="2" creationId="{1F000EC5-11FF-B40D-E96F-A868D391149B}"/>
+          </ac:spMkLst>
+        </pc:spChg>
       </pc:sldChg>
-      <pc:sldChg chg="add">
-        <pc:chgData name="Zonghua Gu" userId="9a7e1853e1951ef5" providerId="LiveId" clId="{CF1FAA12-072C-4ED5-BA76-0FFFAEFDB88A}" dt="2025-10-04T21:14:03.366" v="511"/>
+      <pc:sldChg chg="modSp add mod">
+        <pc:chgData name="Zonghua Gu" userId="9a7e1853e1951ef5" providerId="LiveId" clId="{CF1FAA12-072C-4ED5-BA76-0FFFAEFDB88A}" dt="2025-10-26T16:50:35.425" v="1185" actId="113"/>
         <pc:sldMkLst>
           <pc:docMk/>
           <pc:sldMk cId="2683607622" sldId="284"/>
         </pc:sldMkLst>
-      </pc:sldChg>
-      <pc:sldChg chg="del">
-        <pc:chgData name="Zonghua Gu" userId="9a7e1853e1951ef5" providerId="LiveId" clId="{CF1FAA12-072C-4ED5-BA76-0FFFAEFDB88A}" dt="2025-10-04T21:13:40.649" v="510" actId="47"/>
-        <pc:sldMkLst>
-          <pc:docMk/>
-          <pc:sldMk cId="3530544099" sldId="286"/>
-        </pc:sldMkLst>
-      </pc:sldChg>
-      <pc:sldChg chg="del">
-        <pc:chgData name="Zonghua Gu" userId="9a7e1853e1951ef5" providerId="LiveId" clId="{CF1FAA12-072C-4ED5-BA76-0FFFAEFDB88A}" dt="2025-10-04T21:13:40.649" v="510" actId="47"/>
-        <pc:sldMkLst>
-          <pc:docMk/>
-          <pc:sldMk cId="2682302142" sldId="287"/>
-        </pc:sldMkLst>
-      </pc:sldChg>
-      <pc:sldChg chg="del">
-        <pc:chgData name="Zonghua Gu" userId="9a7e1853e1951ef5" providerId="LiveId" clId="{CF1FAA12-072C-4ED5-BA76-0FFFAEFDB88A}" dt="2025-10-04T21:13:40.649" v="510" actId="47"/>
-        <pc:sldMkLst>
-          <pc:docMk/>
-          <pc:sldMk cId="3859024571" sldId="288"/>
-        </pc:sldMkLst>
-      </pc:sldChg>
-      <pc:sldChg chg="del">
-        <pc:chgData name="Zonghua Gu" userId="9a7e1853e1951ef5" providerId="LiveId" clId="{CF1FAA12-072C-4ED5-BA76-0FFFAEFDB88A}" dt="2025-10-04T21:13:40.649" v="510" actId="47"/>
-        <pc:sldMkLst>
-          <pc:docMk/>
-          <pc:sldMk cId="4182407776" sldId="289"/>
-        </pc:sldMkLst>
-      </pc:sldChg>
-      <pc:sldChg chg="del">
-        <pc:chgData name="Zonghua Gu" userId="9a7e1853e1951ef5" providerId="LiveId" clId="{CF1FAA12-072C-4ED5-BA76-0FFFAEFDB88A}" dt="2025-10-04T21:13:40.649" v="510" actId="47"/>
-        <pc:sldMkLst>
-          <pc:docMk/>
-          <pc:sldMk cId="2339327303" sldId="290"/>
-        </pc:sldMkLst>
+        <pc:spChg chg="mod">
+          <ac:chgData name="Zonghua Gu" userId="9a7e1853e1951ef5" providerId="LiveId" clId="{CF1FAA12-072C-4ED5-BA76-0FFFAEFDB88A}" dt="2025-10-26T16:50:35.425" v="1185" actId="113"/>
+          <ac:spMkLst>
+            <pc:docMk/>
+            <pc:sldMk cId="2683607622" sldId="284"/>
+            <ac:spMk id="2" creationId="{9A89A2AC-1EFE-50A9-F487-AFE87D1F70FC}"/>
+          </ac:spMkLst>
+        </pc:spChg>
       </pc:sldChg>
       <pc:sldChg chg="add del">
         <pc:chgData name="Zonghua Gu" userId="9a7e1853e1951ef5" providerId="LiveId" clId="{CF1FAA12-072C-4ED5-BA76-0FFFAEFDB88A}" dt="2025-10-04T21:14:03.366" v="511"/>
         <pc:sldMkLst>
           <pc:docMk/>
           <pc:sldMk cId="1002974014" sldId="732"/>
-        </pc:sldMkLst>
-      </pc:sldChg>
-      <pc:sldChg chg="del">
-        <pc:chgData name="Zonghua Gu" userId="9a7e1853e1951ef5" providerId="LiveId" clId="{CF1FAA12-072C-4ED5-BA76-0FFFAEFDB88A}" dt="2025-10-04T20:52:00.491" v="127" actId="47"/>
-        <pc:sldMkLst>
-          <pc:docMk/>
-          <pc:sldMk cId="2572157671" sldId="733"/>
         </pc:sldMkLst>
       </pc:sldChg>
       <pc:sldChg chg="modSp add mod">
@@ -594,12 +492,20 @@
           </ac:spMkLst>
         </pc:spChg>
       </pc:sldChg>
-      <pc:sldChg chg="add">
-        <pc:chgData name="Zonghua Gu" userId="9a7e1853e1951ef5" providerId="LiveId" clId="{CF1FAA12-072C-4ED5-BA76-0FFFAEFDB88A}" dt="2025-10-04T21:14:03.366" v="511"/>
+      <pc:sldChg chg="modSp add mod">
+        <pc:chgData name="Zonghua Gu" userId="9a7e1853e1951ef5" providerId="LiveId" clId="{CF1FAA12-072C-4ED5-BA76-0FFFAEFDB88A}" dt="2025-10-26T16:50:28.602" v="1182" actId="113"/>
         <pc:sldMkLst>
           <pc:docMk/>
           <pc:sldMk cId="2896628209" sldId="736"/>
         </pc:sldMkLst>
+        <pc:spChg chg="mod">
+          <ac:chgData name="Zonghua Gu" userId="9a7e1853e1951ef5" providerId="LiveId" clId="{CF1FAA12-072C-4ED5-BA76-0FFFAEFDB88A}" dt="2025-10-26T16:50:28.602" v="1182" actId="113"/>
+          <ac:spMkLst>
+            <pc:docMk/>
+            <pc:sldMk cId="2896628209" sldId="736"/>
+            <ac:spMk id="2" creationId="{00000000-0000-0000-0000-000000000000}"/>
+          </ac:spMkLst>
+        </pc:spChg>
       </pc:sldChg>
       <pc:sldChg chg="add">
         <pc:chgData name="Zonghua Gu" userId="9a7e1853e1951ef5" providerId="LiveId" clId="{CF1FAA12-072C-4ED5-BA76-0FFFAEFDB88A}" dt="2025-10-04T21:14:03.366" v="511"/>
@@ -609,7 +515,7 @@
         </pc:sldMkLst>
       </pc:sldChg>
       <pc:sldChg chg="modSp new mod">
-        <pc:chgData name="Zonghua Gu" userId="9a7e1853e1951ef5" providerId="LiveId" clId="{CF1FAA12-072C-4ED5-BA76-0FFFAEFDB88A}" dt="2025-10-07T18:22:15.667" v="937" actId="20577"/>
+        <pc:chgData name="Zonghua Gu" userId="9a7e1853e1951ef5" providerId="LiveId" clId="{CF1FAA12-072C-4ED5-BA76-0FFFAEFDB88A}" dt="2025-10-26T19:32:42.828" v="1192" actId="21"/>
         <pc:sldMkLst>
           <pc:docMk/>
           <pc:sldMk cId="990295586" sldId="738"/>
@@ -623,7 +529,7 @@
           </ac:spMkLst>
         </pc:spChg>
         <pc:spChg chg="mod">
-          <ac:chgData name="Zonghua Gu" userId="9a7e1853e1951ef5" providerId="LiveId" clId="{CF1FAA12-072C-4ED5-BA76-0FFFAEFDB88A}" dt="2025-10-07T18:22:15.667" v="937" actId="20577"/>
+          <ac:chgData name="Zonghua Gu" userId="9a7e1853e1951ef5" providerId="LiveId" clId="{CF1FAA12-072C-4ED5-BA76-0FFFAEFDB88A}" dt="2025-10-26T19:32:42.828" v="1192" actId="21"/>
           <ac:spMkLst>
             <pc:docMk/>
             <pc:sldMk cId="990295586" sldId="738"/>
@@ -632,7 +538,7 @@
         </pc:spChg>
       </pc:sldChg>
       <pc:sldChg chg="addSp delSp modSp add mod modNotesTx">
-        <pc:chgData name="Zonghua Gu" userId="9a7e1853e1951ef5" providerId="LiveId" clId="{CF1FAA12-072C-4ED5-BA76-0FFFAEFDB88A}" dt="2025-10-07T18:17:20.428" v="835"/>
+        <pc:chgData name="Zonghua Gu" userId="9a7e1853e1951ef5" providerId="LiveId" clId="{CF1FAA12-072C-4ED5-BA76-0FFFAEFDB88A}" dt="2025-10-26T16:47:46.641" v="1181" actId="20577"/>
         <pc:sldMkLst>
           <pc:docMk/>
           <pc:sldMk cId="3951653191" sldId="739"/>
@@ -646,7 +552,7 @@
           </ac:spMkLst>
         </pc:spChg>
         <pc:spChg chg="mod">
-          <ac:chgData name="Zonghua Gu" userId="9a7e1853e1951ef5" providerId="LiveId" clId="{CF1FAA12-072C-4ED5-BA76-0FFFAEFDB88A}" dt="2025-10-07T18:17:20.428" v="835"/>
+          <ac:chgData name="Zonghua Gu" userId="9a7e1853e1951ef5" providerId="LiveId" clId="{CF1FAA12-072C-4ED5-BA76-0FFFAEFDB88A}" dt="2025-10-26T16:47:46.641" v="1181" actId="20577"/>
           <ac:spMkLst>
             <pc:docMk/>
             <pc:sldMk cId="3951653191" sldId="739"/>
@@ -670,15 +576,8 @@
           </ac:spMkLst>
         </pc:spChg>
       </pc:sldChg>
-      <pc:sldChg chg="new del">
-        <pc:chgData name="Zonghua Gu" userId="9a7e1853e1951ef5" providerId="LiveId" clId="{CF1FAA12-072C-4ED5-BA76-0FFFAEFDB88A}" dt="2025-10-07T18:12:44.608" v="780" actId="47"/>
-        <pc:sldMkLst>
-          <pc:docMk/>
-          <pc:sldMk cId="30757699" sldId="740"/>
-        </pc:sldMkLst>
-      </pc:sldChg>
       <pc:sldChg chg="addSp modSp add mod">
-        <pc:chgData name="Zonghua Gu" userId="9a7e1853e1951ef5" providerId="LiveId" clId="{CF1FAA12-072C-4ED5-BA76-0FFFAEFDB88A}" dt="2025-10-07T18:24:06.118" v="946" actId="1076"/>
+        <pc:chgData name="Zonghua Gu" userId="9a7e1853e1951ef5" providerId="LiveId" clId="{CF1FAA12-072C-4ED5-BA76-0FFFAEFDB88A}" dt="2025-10-26T16:44:11.512" v="1178" actId="1076"/>
         <pc:sldMkLst>
           <pc:docMk/>
           <pc:sldMk cId="598855194" sldId="741"/>
@@ -700,7 +599,7 @@
           </ac:spMkLst>
         </pc:spChg>
         <pc:spChg chg="add mod">
-          <ac:chgData name="Zonghua Gu" userId="9a7e1853e1951ef5" providerId="LiveId" clId="{CF1FAA12-072C-4ED5-BA76-0FFFAEFDB88A}" dt="2025-10-07T18:24:06.118" v="946" actId="1076"/>
+          <ac:chgData name="Zonghua Gu" userId="9a7e1853e1951ef5" providerId="LiveId" clId="{CF1FAA12-072C-4ED5-BA76-0FFFAEFDB88A}" dt="2025-10-26T16:44:11.512" v="1178" actId="1076"/>
           <ac:spMkLst>
             <pc:docMk/>
             <pc:sldMk cId="598855194" sldId="741"/>
@@ -759,22 +658,6 @@
             <pc:docMk/>
             <pc:sldMk cId="3892365445" sldId="743"/>
             <ac:spMk id="4" creationId="{F6E9C26C-00C6-ED10-C2C9-02E0EBAC4C6B}"/>
-          </ac:spMkLst>
-        </pc:spChg>
-        <pc:spChg chg="add mod">
-          <ac:chgData name="Zonghua Gu" userId="9a7e1853e1951ef5" providerId="LiveId" clId="{CF1FAA12-072C-4ED5-BA76-0FFFAEFDB88A}" dt="2025-10-17T23:26:15.282" v="1015"/>
-          <ac:spMkLst>
-            <pc:docMk/>
-            <pc:sldMk cId="3892365445" sldId="743"/>
-            <ac:spMk id="5" creationId="{496DB7AA-C6C0-5837-FFD9-46E0944C5621}"/>
-          </ac:spMkLst>
-        </pc:spChg>
-        <pc:spChg chg="add">
-          <ac:chgData name="Zonghua Gu" userId="9a7e1853e1951ef5" providerId="LiveId" clId="{CF1FAA12-072C-4ED5-BA76-0FFFAEFDB88A}" dt="2025-10-17T23:28:44.905" v="1051"/>
-          <ac:spMkLst>
-            <pc:docMk/>
-            <pc:sldMk cId="3892365445" sldId="743"/>
-            <ac:spMk id="6" creationId="{64515890-1ED2-3082-1CA4-FAACF1D35E86}"/>
           </ac:spMkLst>
         </pc:spChg>
       </pc:sldChg>
@@ -1896,8 +1779,8 @@
     <dgm:cxn modelId="{2EC98039-FB87-DA47-AB27-1AD9B5F895CC}" type="presOf" srcId="{ACEB3FAF-AE7D-7845-AB54-9A9392306A94}" destId="{36882827-6B68-0046-A85D-6B8947AD81E2}" srcOrd="0" destOrd="0" presId="urn:microsoft.com/office/officeart/2005/8/layout/balance1"/>
     <dgm:cxn modelId="{952BF13B-A532-A44F-93F4-E13223C5B154}" srcId="{6255E5A6-8A07-A843-A7AD-D502CEFB5584}" destId="{EB5BA813-5FD9-C046-9002-8EDD4D49B9DA}" srcOrd="0" destOrd="0" parTransId="{3C7D64DC-987D-2C46-9800-F2505641095A}" sibTransId="{01006B11-F937-DA4F-848C-842A527F3C1D}"/>
     <dgm:cxn modelId="{81A3CA5F-99D5-2B43-9891-2BE061283332}" srcId="{B4271438-B940-7B47-8FAF-9117657D7D72}" destId="{A64B28A9-5E34-D345-ABAD-CFD42AFAB009}" srcOrd="2" destOrd="0" parTransId="{10194699-8341-AE47-B601-2F4C67E29518}" sibTransId="{14A7B154-5E51-734F-8E3A-EE3A9E1FB9EB}"/>
+    <dgm:cxn modelId="{D0E8C542-1E6A-1A49-B06F-79BA6FBCF20A}" srcId="{B4271438-B940-7B47-8FAF-9117657D7D72}" destId="{6CDDC9FC-08E6-194F-AB44-916912911EF2}" srcOrd="1" destOrd="0" parTransId="{8AC216A7-2FE0-3745-AEC3-DE5C8B16C79B}" sibTransId="{4F533A3B-638B-464B-A588-2205AC82964B}"/>
     <dgm:cxn modelId="{ABAFE562-8F10-0745-BB8C-F1930C9DB625}" type="presOf" srcId="{85D85CB2-FBEA-054D-8678-39B2892A20FC}" destId="{22199B65-2576-9946-8BA7-338828BB5C92}" srcOrd="0" destOrd="0" presId="urn:microsoft.com/office/officeart/2005/8/layout/balance1"/>
-    <dgm:cxn modelId="{D0E8C542-1E6A-1A49-B06F-79BA6FBCF20A}" srcId="{B4271438-B940-7B47-8FAF-9117657D7D72}" destId="{6CDDC9FC-08E6-194F-AB44-916912911EF2}" srcOrd="1" destOrd="0" parTransId="{8AC216A7-2FE0-3745-AEC3-DE5C8B16C79B}" sibTransId="{4F533A3B-638B-464B-A588-2205AC82964B}"/>
     <dgm:cxn modelId="{7F4B9648-057F-A040-B154-14A35FA8AE24}" type="presOf" srcId="{6CDDC9FC-08E6-194F-AB44-916912911EF2}" destId="{D08658B1-8C0F-6445-B262-DE60880B40C3}" srcOrd="0" destOrd="0" presId="urn:microsoft.com/office/officeart/2005/8/layout/balance1"/>
     <dgm:cxn modelId="{EC270871-3D65-DB4F-B9F0-92759EDECD73}" srcId="{5C85AC37-E01B-5D42-890D-6B1249024F64}" destId="{B4271438-B940-7B47-8FAF-9117657D7D72}" srcOrd="1" destOrd="0" parTransId="{59C29BCE-E229-7C44-9C03-73F6EDFE4B32}" sibTransId="{8B39BFA0-3E6A-E340-B579-CF496A73E3D0}"/>
     <dgm:cxn modelId="{128B727E-37EE-0D40-9E1A-80B2CBF50F7F}" type="presOf" srcId="{EB5BA813-5FD9-C046-9002-8EDD4D49B9DA}" destId="{BB3BBC36-90DE-1F40-8652-E9D6FD130FAE}" srcOrd="0" destOrd="0" presId="urn:microsoft.com/office/officeart/2005/8/layout/balance1"/>
@@ -6804,7 +6687,7 @@
             <a:fld id="{BD4F56A7-3CDE-194F-B9AF-D598FBBF1989}" type="datetimeFigureOut">
               <a:rPr lang="en-US" smtClean="0"/>
               <a:pPr/>
-              <a:t>10/17/2025</a:t>
+              <a:t>10/26/2025</a:t>
             </a:fld>
             <a:endParaRPr lang="en-US"/>
           </a:p>
@@ -6972,7 +6855,7 @@
             <a:fld id="{1E52AD58-60CE-E948-9CBA-0BD7030FC28E}" type="datetimeFigureOut">
               <a:rPr lang="en-US" smtClean="0"/>
               <a:pPr/>
-              <a:t>10/17/2025</a:t>
+              <a:t>10/26/2025</a:t>
             </a:fld>
             <a:endParaRPr lang="en-US"/>
           </a:p>
@@ -8510,7 +8393,7 @@
             <a:pPr eaLnBrk="1" latinLnBrk="0" hangingPunct="1"/>
             <a:fld id="{8E8B2B42-CBC2-7D4E-BA50-0E7F29B4DAAB}" type="datetime1">
               <a:rPr lang="en-US" smtClean="0"/>
-              <a:t>10/17/2025</a:t>
+              <a:t>10/26/2025</a:t>
             </a:fld>
             <a:endParaRPr lang="en-US" sz="1600" dirty="0"/>
           </a:p>
@@ -8870,7 +8753,7 @@
             <a:pPr eaLnBrk="1" latinLnBrk="0" hangingPunct="1"/>
             <a:fld id="{597D1259-3A46-254C-ADDB-B5DA4F1DF3DA}" type="datetime1">
               <a:rPr lang="en-US" smtClean="0"/>
-              <a:t>10/17/2025</a:t>
+              <a:t>10/26/2025</a:t>
             </a:fld>
             <a:endParaRPr lang="en-US"/>
           </a:p>
@@ -9046,7 +8929,7 @@
             <a:pPr eaLnBrk="1" latinLnBrk="0" hangingPunct="1"/>
             <a:fld id="{CCA104EC-54AA-E04F-BDC0-22B4E8892699}" type="datetime1">
               <a:rPr lang="en-US" smtClean="0"/>
-              <a:t>10/17/2025</a:t>
+              <a:t>10/26/2025</a:t>
             </a:fld>
             <a:endParaRPr lang="en-US"/>
           </a:p>
@@ -9282,7 +9165,7 @@
             <a:pPr eaLnBrk="1" latinLnBrk="0" hangingPunct="1"/>
             <a:fld id="{A9E6F060-20EB-3246-9088-08BF5F1271DE}" type="datetime1">
               <a:rPr lang="en-US" smtClean="0"/>
-              <a:t>10/17/2025</a:t>
+              <a:t>10/26/2025</a:t>
             </a:fld>
             <a:endParaRPr lang="en-US" dirty="0"/>
           </a:p>
@@ -9552,7 +9435,7 @@
             <a:pPr eaLnBrk="1" latinLnBrk="0" hangingPunct="1"/>
             <a:fld id="{34C82E41-DA7E-CA4C-823B-C759BEA16CE8}" type="datetime1">
               <a:rPr lang="en-US" smtClean="0"/>
-              <a:t>10/17/2025</a:t>
+              <a:t>10/26/2025</a:t>
             </a:fld>
             <a:endParaRPr lang="en-US" dirty="0"/>
           </a:p>
@@ -9773,7 +9656,7 @@
             <a:pPr eaLnBrk="1" latinLnBrk="0" hangingPunct="1"/>
             <a:fld id="{2500C8B0-EB1A-0A41-B839-C4B99CD2225A}" type="datetime1">
               <a:rPr lang="en-US" smtClean="0"/>
-              <a:t>10/17/2025</a:t>
+              <a:t>10/26/2025</a:t>
             </a:fld>
             <a:endParaRPr lang="en-US"/>
           </a:p>
@@ -10126,7 +10009,7 @@
             <a:pPr eaLnBrk="1" latinLnBrk="0" hangingPunct="1"/>
             <a:fld id="{4F16605B-D952-1149-A111-28A5633BAE48}" type="datetime1">
               <a:rPr lang="en-US" smtClean="0"/>
-              <a:t>10/17/2025</a:t>
+              <a:t>10/26/2025</a:t>
             </a:fld>
             <a:endParaRPr lang="en-US"/>
           </a:p>
@@ -10359,7 +10242,7 @@
             <a:pPr eaLnBrk="1" latinLnBrk="0" hangingPunct="1"/>
             <a:fld id="{91109A1C-29B2-B04E-8365-C9D22C4AE842}" type="datetime1">
               <a:rPr lang="en-US" smtClean="0"/>
-              <a:t>10/17/2025</a:t>
+              <a:t>10/26/2025</a:t>
             </a:fld>
             <a:endParaRPr lang="en-US"/>
           </a:p>
@@ -10501,7 +10384,7 @@
             <a:pPr eaLnBrk="1" latinLnBrk="0" hangingPunct="1"/>
             <a:fld id="{2CE417B6-A42B-064A-8677-46C55C4F613A}" type="datetime1">
               <a:rPr lang="en-US" smtClean="0"/>
-              <a:t>10/17/2025</a:t>
+              <a:t>10/26/2025</a:t>
             </a:fld>
             <a:endParaRPr lang="en-US"/>
           </a:p>
@@ -10779,7 +10662,7 @@
             <a:pPr eaLnBrk="1" latinLnBrk="0" hangingPunct="1"/>
             <a:fld id="{DE76F5AD-3F1F-7141-BC8A-012C5728BE2D}" type="datetime1">
               <a:rPr lang="en-US" smtClean="0"/>
-              <a:t>10/17/2025</a:t>
+              <a:t>10/26/2025</a:t>
             </a:fld>
             <a:endParaRPr lang="en-US"/>
           </a:p>
@@ -11187,7 +11070,7 @@
             <a:pPr eaLnBrk="1" latinLnBrk="0" hangingPunct="1"/>
             <a:fld id="{09FA12B8-739E-4D47-A14C-180C3BC10865}" type="datetime1">
               <a:rPr lang="en-US" smtClean="0"/>
-              <a:t>10/17/2025</a:t>
+              <a:t>10/26/2025</a:t>
             </a:fld>
             <a:endParaRPr lang="en-US"/>
           </a:p>
@@ -11525,7 +11408,7 @@
             <a:pPr eaLnBrk="1" latinLnBrk="0" hangingPunct="1"/>
             <a:fld id="{CDD18CD8-E404-844E-A4BD-DF69B8E5881E}" type="datetime1">
               <a:rPr lang="en-US" smtClean="0"/>
-              <a:t>10/17/2025</a:t>
+              <a:t>10/26/2025</a:t>
             </a:fld>
             <a:endParaRPr lang="en-US" sz="1400" dirty="0">
               <a:solidFill>
@@ -12947,34 +12830,7 @@
                           </a:solidFill>
                           <a:latin typeface="Cambria Math" panose="02040503050406030204" pitchFamily="18" charset="0"/>
                         </a:rPr>
-                        <m:t>10</m:t>
-                      </m:r>
-                      <m:r>
-                        <a:rPr lang="en-US" i="1">
-                          <a:solidFill>
-                            <a:srgbClr val="000000"/>
-                          </a:solidFill>
-                          <a:latin typeface="Cambria Math" panose="02040503050406030204" pitchFamily="18" charset="0"/>
-                        </a:rPr>
-                        <m:t>.</m:t>
-                      </m:r>
-                      <m:r>
-                        <a:rPr lang="en-US" i="1">
-                          <a:solidFill>
-                            <a:srgbClr val="000000"/>
-                          </a:solidFill>
-                          <a:latin typeface="Cambria Math" panose="02040503050406030204" pitchFamily="18" charset="0"/>
-                        </a:rPr>
-                        <m:t>746</m:t>
-                      </m:r>
-                      <m:r>
-                        <a:rPr lang="en-US" i="1">
-                          <a:solidFill>
-                            <a:srgbClr val="000000"/>
-                          </a:solidFill>
-                          <a:latin typeface="Cambria Math" panose="02040503050406030204" pitchFamily="18" charset="0"/>
-                        </a:rPr>
-                        <m:t>×</m:t>
+                        <m:t>10.746×</m:t>
                       </m:r>
                       <m:sSup>
                         <m:sSupPr>
@@ -13038,25 +12894,7 @@
                               </a:solidFill>
                               <a:latin typeface="Cambria Math" panose="02040503050406030204" pitchFamily="18" charset="0"/>
                             </a:rPr>
-                            <m:t>10</m:t>
-                          </m:r>
-                          <m:r>
-                            <a:rPr lang="en-US" i="1">
-                              <a:solidFill>
-                                <a:srgbClr val="000000"/>
-                              </a:solidFill>
-                              <a:latin typeface="Cambria Math" panose="02040503050406030204" pitchFamily="18" charset="0"/>
-                            </a:rPr>
-                            <m:t>.</m:t>
-                          </m:r>
-                          <m:r>
-                            <a:rPr lang="en-US" i="1">
-                              <a:solidFill>
-                                <a:srgbClr val="000000"/>
-                              </a:solidFill>
-                              <a:latin typeface="Cambria Math" panose="02040503050406030204" pitchFamily="18" charset="0"/>
-                            </a:rPr>
-                            <m:t>746</m:t>
+                            <m:t>10.746</m:t>
                           </m:r>
                         </m:num>
                         <m:den>
@@ -13078,25 +12916,7 @@
                           </a:solidFill>
                           <a:latin typeface="Cambria Math" panose="02040503050406030204" pitchFamily="18" charset="0"/>
                         </a:rPr>
-                        <m:t>×</m:t>
-                      </m:r>
-                      <m:r>
-                        <a:rPr lang="en-US" i="1">
-                          <a:solidFill>
-                            <a:srgbClr val="000000"/>
-                          </a:solidFill>
-                          <a:latin typeface="Cambria Math" panose="02040503050406030204" pitchFamily="18" charset="0"/>
-                        </a:rPr>
-                        <m:t>8</m:t>
-                      </m:r>
-                      <m:r>
-                        <a:rPr lang="en-US" i="1">
-                          <a:solidFill>
-                            <a:srgbClr val="000000"/>
-                          </a:solidFill>
-                          <a:latin typeface="Cambria Math" panose="02040503050406030204" pitchFamily="18" charset="0"/>
-                        </a:rPr>
-                        <m:t>×</m:t>
+                        <m:t>×8×</m:t>
                       </m:r>
                       <m:sSup>
                         <m:sSupPr>
@@ -13403,8 +13223,8 @@
           </a:p>
         </p:txBody>
       </p:sp>
-      <mc:AlternateContent xmlns:mc="http://schemas.openxmlformats.org/markup-compatibility/2006">
-        <mc:Choice xmlns:a14="http://schemas.microsoft.com/office/drawing/2010/main" Requires="a14">
+      <mc:AlternateContent xmlns:mc="http://schemas.openxmlformats.org/markup-compatibility/2006" xmlns:a14="http://schemas.microsoft.com/office/drawing/2010/main">
+        <mc:Choice Requires="a14">
           <p:sp>
             <p:nvSpPr>
               <p:cNvPr id="5" name="Rectangle 4"/>
@@ -13455,19 +13275,7 @@
                             <a:rPr lang="en-US" sz="2400" i="1">
                               <a:latin typeface="Cambria Math"/>
                             </a:rPr>
-                            <m:t>(−</m:t>
-                          </m:r>
-                          <m:r>
-                            <a:rPr lang="en-US" sz="2400" i="1">
-                              <a:latin typeface="Cambria Math"/>
-                            </a:rPr>
-                            <m:t>1</m:t>
-                          </m:r>
-                          <m:r>
-                            <a:rPr lang="en-US" sz="2400" i="1">
-                              <a:latin typeface="Cambria Math"/>
-                            </a:rPr>
-                            <m:t>)</m:t>
+                            <m:t>(−1)</m:t>
                           </m:r>
                         </m:e>
                         <m:sup>
@@ -13486,19 +13294,7 @@
                         <a:rPr lang="en-US" sz="2400" i="1">
                           <a:latin typeface="Cambria Math"/>
                         </a:rPr>
-                        <m:t>×(</m:t>
-                      </m:r>
-                      <m:r>
-                        <a:rPr lang="en-US" sz="2400" i="1">
-                          <a:latin typeface="Cambria Math"/>
-                        </a:rPr>
-                        <m:t>1</m:t>
-                      </m:r>
-                      <m:r>
-                        <a:rPr lang="en-US" sz="2400" i="1">
-                          <a:latin typeface="Cambria Math"/>
-                        </a:rPr>
-                        <m:t>+</m:t>
+                        <m:t>×(1+</m:t>
                       </m:r>
                       <m:r>
                         <a:rPr lang="en-US" sz="2400" i="1">
@@ -13630,7 +13426,7 @@
             </p:txBody>
           </p:sp>
         </mc:Choice>
-        <mc:Fallback>
+        <mc:Fallback xmlns="">
           <p:sp>
             <p:nvSpPr>
               <p:cNvPr id="5" name="Rectangle 4"/>
@@ -13956,11 +13752,11 @@
           <a:lstStyle/>
           <a:p>
             <a:r>
-              <a:rPr lang="en-US" b="1" dirty="0"/>
+              <a:rPr lang="en-US" dirty="0"/>
               <a:t>Decoding </a:t>
             </a:r>
             <a:r>
-              <a:rPr lang="en-US" sz="3600" b="1" dirty="0">
+              <a:rPr lang="en-US" sz="3600" dirty="0">
                 <a:solidFill>
                   <a:srgbClr val="C00000"/>
                 </a:solidFill>
@@ -13970,17 +13766,16 @@
               <a:t>0xC1FF0000</a:t>
             </a:r>
             <a:r>
-              <a:rPr lang="en-US" sz="3600" b="1" dirty="0"/>
+              <a:rPr lang="en-US" sz="3600" dirty="0"/>
               <a:t> </a:t>
             </a:r>
             <a:br>
-              <a:rPr lang="en-US" b="1" dirty="0"/>
+              <a:rPr lang="en-US" dirty="0"/>
             </a:br>
             <a:r>
-              <a:rPr lang="en-US" b="1" dirty="0"/>
+              <a:rPr lang="en-US" dirty="0"/>
               <a:t>into a floating-point number</a:t>
             </a:r>
-            <a:endParaRPr lang="en-US" dirty="0"/>
           </a:p>
         </p:txBody>
       </p:sp>
@@ -14113,13 +13908,7 @@
                       <a:rPr lang="en-US" sz="2800" i="1">
                         <a:latin typeface="Cambria Math"/>
                       </a:rPr>
-                      <m:t>=</m:t>
-                    </m:r>
-                    <m:r>
-                      <a:rPr lang="en-US" sz="2800" i="1">
-                        <a:latin typeface="Cambria Math"/>
-                      </a:rPr>
-                      <m:t>131</m:t>
+                      <m:t>=131</m:t>
                     </m:r>
                   </m:oMath>
                 </a14:m>
@@ -14145,19 +13934,7 @@
                           <a:rPr lang="en-US" sz="2800" i="1">
                             <a:latin typeface="Cambria Math"/>
                           </a:rPr>
-                          <m:t>0</m:t>
-                        </m:r>
-                        <m:r>
-                          <a:rPr lang="en-US" sz="2800" i="1">
-                            <a:latin typeface="Cambria Math"/>
-                          </a:rPr>
-                          <m:t>.</m:t>
-                        </m:r>
-                        <m:r>
-                          <a:rPr lang="en-US" sz="2800" i="1">
-                            <a:latin typeface="Cambria Math"/>
-                          </a:rPr>
-                          <m:t>1111111</m:t>
+                          <m:t>0.1111111</m:t>
                         </m:r>
                       </m:e>
                       <m:sub>
@@ -14182,13 +13959,7 @@
                       <a:rPr lang="en-US" sz="2800" i="1">
                         <a:latin typeface="Cambria Math"/>
                       </a:rPr>
-                      <m:t>1</m:t>
-                    </m:r>
-                    <m:r>
-                      <a:rPr lang="en-US" sz="2800" i="1">
-                        <a:latin typeface="Cambria Math"/>
-                      </a:rPr>
-                      <m:t>×</m:t>
+                      <m:t>1×</m:t>
                     </m:r>
                     <m:sSup>
                       <m:sSupPr>
@@ -14211,13 +13982,7 @@
                           <a:rPr lang="en-US" sz="2800" i="1">
                             <a:latin typeface="Cambria Math"/>
                           </a:rPr>
-                          <m:t>−</m:t>
-                        </m:r>
-                        <m:r>
-                          <a:rPr lang="en-US" sz="2800" i="1">
-                            <a:latin typeface="Cambria Math"/>
-                          </a:rPr>
-                          <m:t>1</m:t>
+                          <m:t>−1</m:t>
                         </m:r>
                       </m:sup>
                     </m:sSup>
@@ -14225,19 +13990,7 @@
                       <a:rPr lang="en-US" sz="2800" i="1">
                         <a:latin typeface="Cambria Math"/>
                       </a:rPr>
-                      <m:t>+</m:t>
-                    </m:r>
-                    <m:r>
-                      <a:rPr lang="en-US" sz="2800" i="1">
-                        <a:latin typeface="Cambria Math"/>
-                      </a:rPr>
-                      <m:t>1</m:t>
-                    </m:r>
-                    <m:r>
-                      <a:rPr lang="en-US" sz="2800" i="1">
-                        <a:latin typeface="Cambria Math"/>
-                      </a:rPr>
-                      <m:t>×</m:t>
+                      <m:t>+1×</m:t>
                     </m:r>
                     <m:sSup>
                       <m:sSupPr>
@@ -14260,13 +14013,7 @@
                           <a:rPr lang="en-US" sz="2800" i="1">
                             <a:latin typeface="Cambria Math"/>
                           </a:rPr>
-                          <m:t>−</m:t>
-                        </m:r>
-                        <m:r>
-                          <a:rPr lang="en-US" sz="2800" i="1">
-                            <a:latin typeface="Cambria Math"/>
-                          </a:rPr>
-                          <m:t>2</m:t>
+                          <m:t>−2</m:t>
                         </m:r>
                       </m:sup>
                     </m:sSup>
@@ -14274,19 +14021,7 @@
                       <a:rPr lang="en-US" sz="2800" i="1">
                         <a:latin typeface="Cambria Math"/>
                       </a:rPr>
-                      <m:t>+</m:t>
-                    </m:r>
-                    <m:r>
-                      <a:rPr lang="en-US" sz="2800" i="1">
-                        <a:latin typeface="Cambria Math"/>
-                      </a:rPr>
-                      <m:t>1</m:t>
-                    </m:r>
-                    <m:r>
-                      <a:rPr lang="en-US" sz="2800" i="1">
-                        <a:latin typeface="Cambria Math"/>
-                      </a:rPr>
-                      <m:t>×</m:t>
+                      <m:t>+1×</m:t>
                     </m:r>
                     <m:sSup>
                       <m:sSupPr>
@@ -14309,13 +14044,7 @@
                           <a:rPr lang="en-US" sz="2800" i="1">
                             <a:latin typeface="Cambria Math"/>
                           </a:rPr>
-                          <m:t>−</m:t>
-                        </m:r>
-                        <m:r>
-                          <a:rPr lang="en-US" sz="2800" i="1">
-                            <a:latin typeface="Cambria Math"/>
-                          </a:rPr>
-                          <m:t>3</m:t>
+                          <m:t>−3</m:t>
                         </m:r>
                       </m:sup>
                     </m:sSup>
@@ -14323,19 +14052,7 @@
                       <a:rPr lang="en-US" sz="2800" i="1">
                         <a:latin typeface="Cambria Math"/>
                       </a:rPr>
-                      <m:t>+</m:t>
-                    </m:r>
-                    <m:r>
-                      <a:rPr lang="en-US" sz="2800" i="1">
-                        <a:latin typeface="Cambria Math"/>
-                      </a:rPr>
-                      <m:t>1</m:t>
-                    </m:r>
-                    <m:r>
-                      <a:rPr lang="en-US" sz="2800" i="1">
-                        <a:latin typeface="Cambria Math"/>
-                      </a:rPr>
-                      <m:t>×</m:t>
+                      <m:t>+1×</m:t>
                     </m:r>
                     <m:sSup>
                       <m:sSupPr>
@@ -14358,13 +14075,7 @@
                           <a:rPr lang="en-US" sz="2800" i="1">
                             <a:latin typeface="Cambria Math"/>
                           </a:rPr>
-                          <m:t>−</m:t>
-                        </m:r>
-                        <m:r>
-                          <a:rPr lang="en-US" sz="2800" i="1">
-                            <a:latin typeface="Cambria Math"/>
-                          </a:rPr>
-                          <m:t>4</m:t>
+                          <m:t>−4</m:t>
                         </m:r>
                       </m:sup>
                     </m:sSup>
@@ -14372,19 +14083,7 @@
                       <a:rPr lang="en-US" sz="2800" i="1">
                         <a:latin typeface="Cambria Math"/>
                       </a:rPr>
-                      <m:t>+</m:t>
-                    </m:r>
-                    <m:r>
-                      <a:rPr lang="en-US" sz="2800" i="1">
-                        <a:latin typeface="Cambria Math"/>
-                      </a:rPr>
-                      <m:t>1</m:t>
-                    </m:r>
-                    <m:r>
-                      <a:rPr lang="en-US" sz="2800" i="1">
-                        <a:latin typeface="Cambria Math"/>
-                      </a:rPr>
-                      <m:t>×</m:t>
+                      <m:t>+1×</m:t>
                     </m:r>
                     <m:sSup>
                       <m:sSupPr>
@@ -14407,13 +14106,7 @@
                           <a:rPr lang="en-US" sz="2800" i="1">
                             <a:latin typeface="Cambria Math"/>
                           </a:rPr>
-                          <m:t>−</m:t>
-                        </m:r>
-                        <m:r>
-                          <a:rPr lang="en-US" sz="2800" i="1">
-                            <a:latin typeface="Cambria Math"/>
-                          </a:rPr>
-                          <m:t>5</m:t>
+                          <m:t>−5</m:t>
                         </m:r>
                       </m:sup>
                     </m:sSup>
@@ -14421,19 +14114,7 @@
                       <a:rPr lang="en-US" sz="2800" i="1">
                         <a:latin typeface="Cambria Math"/>
                       </a:rPr>
-                      <m:t>+</m:t>
-                    </m:r>
-                    <m:r>
-                      <a:rPr lang="en-US" sz="2800" i="1">
-                        <a:latin typeface="Cambria Math"/>
-                      </a:rPr>
-                      <m:t>1</m:t>
-                    </m:r>
-                    <m:r>
-                      <a:rPr lang="en-US" sz="2800" i="1">
-                        <a:latin typeface="Cambria Math"/>
-                      </a:rPr>
-                      <m:t>×</m:t>
+                      <m:t>+1×</m:t>
                     </m:r>
                     <m:sSup>
                       <m:sSupPr>
@@ -14456,13 +14137,7 @@
                           <a:rPr lang="en-US" sz="2800" i="1">
                             <a:latin typeface="Cambria Math"/>
                           </a:rPr>
-                          <m:t>−</m:t>
-                        </m:r>
-                        <m:r>
-                          <a:rPr lang="en-US" sz="2800" i="1">
-                            <a:latin typeface="Cambria Math"/>
-                          </a:rPr>
-                          <m:t>6</m:t>
+                          <m:t>−6</m:t>
                         </m:r>
                       </m:sup>
                     </m:sSup>
@@ -14470,19 +14145,7 @@
                       <a:rPr lang="en-US" sz="2800" i="1">
                         <a:latin typeface="Cambria Math"/>
                       </a:rPr>
-                      <m:t>+</m:t>
-                    </m:r>
-                    <m:r>
-                      <a:rPr lang="en-US" sz="2800" i="1">
-                        <a:latin typeface="Cambria Math"/>
-                      </a:rPr>
-                      <m:t>1</m:t>
-                    </m:r>
-                    <m:r>
-                      <a:rPr lang="en-US" sz="2800" i="1">
-                        <a:latin typeface="Cambria Math"/>
-                      </a:rPr>
-                      <m:t>×</m:t>
+                      <m:t>+1×</m:t>
                     </m:r>
                     <m:sSup>
                       <m:sSupPr>
@@ -14505,13 +14168,7 @@
                           <a:rPr lang="en-US" sz="2800" i="1">
                             <a:latin typeface="Cambria Math"/>
                           </a:rPr>
-                          <m:t>−</m:t>
-                        </m:r>
-                        <m:r>
-                          <a:rPr lang="en-US" sz="2800" i="1">
-                            <a:latin typeface="Cambria Math"/>
-                          </a:rPr>
-                          <m:t>7</m:t>
+                          <m:t>−7</m:t>
                         </m:r>
                       </m:sup>
                     </m:sSup>
@@ -14525,19 +14182,7 @@
                       <a:rPr lang="en-US" sz="2800" i="1">
                         <a:latin typeface="Cambria Math"/>
                       </a:rPr>
-                      <m:t>0</m:t>
-                    </m:r>
-                    <m:r>
-                      <a:rPr lang="en-US" sz="2800" i="1">
-                        <a:latin typeface="Cambria Math"/>
-                      </a:rPr>
-                      <m:t>.</m:t>
-                    </m:r>
-                    <m:r>
-                      <a:rPr lang="en-US" sz="2800" i="1">
-                        <a:latin typeface="Cambria Math"/>
-                      </a:rPr>
-                      <m:t>9921875</m:t>
+                      <m:t>0.9921875</m:t>
                     </m:r>
                   </m:oMath>
                 </a14:m>
@@ -14583,13 +14228,7 @@
                               <a:rPr lang="en-US" sz="2800" i="1">
                                 <a:latin typeface="Cambria Math"/>
                               </a:rPr>
-                              <m:t>−</m:t>
-                            </m:r>
-                            <m:r>
-                              <a:rPr lang="en-US" sz="2800" i="1">
-                                <a:latin typeface="Cambria Math"/>
-                              </a:rPr>
-                              <m:t>1</m:t>
+                              <m:t>−1</m:t>
                             </m:r>
                           </m:e>
                         </m:d>
@@ -14622,13 +14261,7 @@
                           <a:rPr lang="en-US" sz="2800" i="1">
                             <a:latin typeface="Cambria Math"/>
                           </a:rPr>
-                          <m:t>1</m:t>
-                        </m:r>
-                        <m:r>
-                          <a:rPr lang="en-US" sz="2800" i="1">
-                            <a:latin typeface="Cambria Math"/>
-                          </a:rPr>
-                          <m:t>+</m:t>
+                          <m:t>1+</m:t>
                         </m:r>
                         <m:r>
                           <a:rPr lang="en-US" sz="2800" i="1">
@@ -14671,13 +14304,7 @@
                           <a:rPr lang="en-US" sz="2800" i="1">
                             <a:latin typeface="Cambria Math"/>
                           </a:rPr>
-                          <m:t>−</m:t>
-                        </m:r>
-                        <m:r>
-                          <a:rPr lang="en-US" sz="2800" i="1">
-                            <a:latin typeface="Cambria Math"/>
-                          </a:rPr>
-                          <m:t>127</m:t>
+                          <m:t>−127</m:t>
                         </m:r>
                       </m:sup>
                     </m:sSup>
@@ -14728,13 +14355,7 @@
                                 <a:rPr lang="en-US" sz="2800" i="1">
                                   <a:latin typeface="Cambria Math"/>
                                 </a:rPr>
-                                <m:t>−</m:t>
-                              </m:r>
-                              <m:r>
-                                <a:rPr lang="en-US" sz="2800" i="1">
-                                  <a:latin typeface="Cambria Math"/>
-                                </a:rPr>
-                                <m:t>1</m:t>
+                                <m:t>−1</m:t>
                               </m:r>
                             </m:e>
                           </m:d>
@@ -14767,31 +14388,7 @@
                             <a:rPr lang="en-US" sz="2800" i="1">
                               <a:latin typeface="Cambria Math"/>
                             </a:rPr>
-                            <m:t>1</m:t>
-                          </m:r>
-                          <m:r>
-                            <a:rPr lang="en-US" sz="2800" i="1">
-                              <a:latin typeface="Cambria Math"/>
-                            </a:rPr>
-                            <m:t>+</m:t>
-                          </m:r>
-                          <m:r>
-                            <a:rPr lang="en-US" sz="2800" i="1">
-                              <a:latin typeface="Cambria Math"/>
-                            </a:rPr>
-                            <m:t>0</m:t>
-                          </m:r>
-                          <m:r>
-                            <a:rPr lang="en-US" sz="2800" i="1">
-                              <a:latin typeface="Cambria Math"/>
-                            </a:rPr>
-                            <m:t>.</m:t>
-                          </m:r>
-                          <m:r>
-                            <a:rPr lang="en-US" sz="2800" i="1">
-                              <a:latin typeface="Cambria Math"/>
-                            </a:rPr>
-                            <m:t>9921875</m:t>
+                            <m:t>1+0.9921875</m:t>
                           </m:r>
                         </m:e>
                       </m:d>
@@ -14822,19 +14419,7 @@
                             <a:rPr lang="en-US" sz="2800" i="1">
                               <a:latin typeface="Cambria Math"/>
                             </a:rPr>
-                            <m:t>131</m:t>
-                          </m:r>
-                          <m:r>
-                            <a:rPr lang="en-US" sz="2800" i="1">
-                              <a:latin typeface="Cambria Math"/>
-                            </a:rPr>
-                            <m:t>−</m:t>
-                          </m:r>
-                          <m:r>
-                            <a:rPr lang="en-US" sz="2800" i="1">
-                              <a:latin typeface="Cambria Math"/>
-                            </a:rPr>
-                            <m:t>127</m:t>
+                            <m:t>131−127</m:t>
                           </m:r>
                         </m:sup>
                       </m:sSup>
@@ -14853,43 +14438,7 @@
                         <a:rPr lang="en-US" sz="2800" i="1">
                           <a:latin typeface="Cambria Math"/>
                         </a:rPr>
-                        <m:t>−</m:t>
-                      </m:r>
-                      <m:r>
-                        <a:rPr lang="en-US" sz="2800" i="1">
-                          <a:latin typeface="Cambria Math"/>
-                        </a:rPr>
-                        <m:t>1</m:t>
-                      </m:r>
-                      <m:r>
-                        <a:rPr lang="en-US" sz="2800" i="1">
-                          <a:latin typeface="Cambria Math"/>
-                        </a:rPr>
-                        <m:t>×</m:t>
-                      </m:r>
-                      <m:r>
-                        <a:rPr lang="en-US" sz="2800" i="1">
-                          <a:latin typeface="Cambria Math"/>
-                        </a:rPr>
-                        <m:t>1</m:t>
-                      </m:r>
-                      <m:r>
-                        <a:rPr lang="en-US" sz="2800" i="1">
-                          <a:latin typeface="Cambria Math"/>
-                        </a:rPr>
-                        <m:t>.</m:t>
-                      </m:r>
-                      <m:r>
-                        <a:rPr lang="en-US" sz="2800" i="1">
-                          <a:latin typeface="Cambria Math"/>
-                        </a:rPr>
-                        <m:t>9921875</m:t>
-                      </m:r>
-                      <m:r>
-                        <a:rPr lang="en-US" sz="2800" i="1">
-                          <a:latin typeface="Cambria Math"/>
-                        </a:rPr>
-                        <m:t>×</m:t>
+                        <m:t>−1×1.9921875×</m:t>
                       </m:r>
                       <m:sSup>
                         <m:sSupPr>
@@ -14931,25 +14480,7 @@
                         <a:rPr lang="en-US" sz="2800" i="1">
                           <a:latin typeface="Cambria Math"/>
                         </a:rPr>
-                        <m:t>−</m:t>
-                      </m:r>
-                      <m:r>
-                        <a:rPr lang="en-US" sz="2800" i="1">
-                          <a:latin typeface="Cambria Math"/>
-                        </a:rPr>
-                        <m:t>31</m:t>
-                      </m:r>
-                      <m:r>
-                        <a:rPr lang="en-US" sz="2800" i="1">
-                          <a:latin typeface="Cambria Math"/>
-                        </a:rPr>
-                        <m:t>.</m:t>
-                      </m:r>
-                      <m:r>
-                        <a:rPr lang="en-US" sz="2800" i="1">
-                          <a:latin typeface="Cambria Math"/>
-                        </a:rPr>
-                        <m:t>875</m:t>
+                        <m:t>−31.875</m:t>
                       </m:r>
                     </m:oMath>
                   </m:oMathPara>
@@ -15105,11 +14636,11 @@
           <a:lstStyle/>
           <a:p>
             <a:r>
-              <a:rPr lang="en-US" b="1" dirty="0"/>
+              <a:rPr lang="en-US" dirty="0"/>
               <a:t>Decoding </a:t>
             </a:r>
             <a:r>
-              <a:rPr lang="en-US" sz="3600" b="1" dirty="0">
+              <a:rPr lang="en-US" sz="3600" dirty="0">
                 <a:solidFill>
                   <a:srgbClr val="C00000"/>
                 </a:solidFill>
@@ -15119,13 +14650,12 @@
               <a:t>0x40920000</a:t>
             </a:r>
             <a:br>
-              <a:rPr lang="en-US" b="1" dirty="0"/>
+              <a:rPr lang="en-US" dirty="0"/>
             </a:br>
             <a:r>
-              <a:rPr lang="en-US" b="1" dirty="0"/>
+              <a:rPr lang="en-US" dirty="0"/>
               <a:t>into a floating-point number</a:t>
             </a:r>
-            <a:endParaRPr lang="en-US" dirty="0"/>
           </a:p>
         </p:txBody>
       </p:sp>
@@ -15280,7 +14810,13 @@
                       <a:rPr lang="en-US" sz="2800" i="1">
                         <a:latin typeface="Cambria Math"/>
                       </a:rPr>
-                      <m:t>=129</m:t>
+                      <m:t>=</m:t>
+                    </m:r>
+                    <m:r>
+                      <a:rPr lang="en-US" sz="2800" i="1">
+                        <a:latin typeface="Cambria Math"/>
+                      </a:rPr>
+                      <m:t>129</m:t>
                     </m:r>
                   </m:oMath>
                 </a14:m>
@@ -15306,7 +14842,13 @@
                           <a:rPr lang="en-US" sz="2800" i="1">
                             <a:latin typeface="Cambria Math"/>
                           </a:rPr>
-                          <m:t>0.</m:t>
+                          <m:t>0</m:t>
+                        </m:r>
+                        <m:r>
+                          <a:rPr lang="en-US" sz="2800" i="1">
+                            <a:latin typeface="Cambria Math"/>
+                          </a:rPr>
+                          <m:t>.</m:t>
                         </m:r>
                         <m:r>
                           <a:rPr lang="en-US" sz="2800" b="0" i="1" smtClean="0">
@@ -15366,7 +14908,13 @@
                           <a:rPr lang="en-US" sz="2800" i="1">
                             <a:latin typeface="Cambria Math"/>
                           </a:rPr>
-                          <m:t>−1</m:t>
+                          <m:t>−</m:t>
+                        </m:r>
+                        <m:r>
+                          <a:rPr lang="en-US" sz="2800" i="1">
+                            <a:latin typeface="Cambria Math"/>
+                          </a:rPr>
+                          <m:t>1</m:t>
                         </m:r>
                       </m:sup>
                     </m:sSup>
@@ -15409,7 +14957,13 @@
                           <a:rPr lang="en-US" sz="2800" i="1">
                             <a:latin typeface="Cambria Math"/>
                           </a:rPr>
-                          <m:t>−2</m:t>
+                          <m:t>−</m:t>
+                        </m:r>
+                        <m:r>
+                          <a:rPr lang="en-US" sz="2800" i="1">
+                            <a:latin typeface="Cambria Math"/>
+                          </a:rPr>
+                          <m:t>2</m:t>
                         </m:r>
                       </m:sup>
                     </m:sSup>
@@ -15417,7 +14971,19 @@
                       <a:rPr lang="en-US" sz="2800" i="1">
                         <a:latin typeface="Cambria Math"/>
                       </a:rPr>
-                      <m:t>+1×</m:t>
+                      <m:t>+</m:t>
+                    </m:r>
+                    <m:r>
+                      <a:rPr lang="en-US" sz="2800" i="1">
+                        <a:latin typeface="Cambria Math"/>
+                      </a:rPr>
+                      <m:t>1</m:t>
+                    </m:r>
+                    <m:r>
+                      <a:rPr lang="en-US" sz="2800" i="1">
+                        <a:latin typeface="Cambria Math"/>
+                      </a:rPr>
+                      <m:t>×</m:t>
                     </m:r>
                     <m:sSup>
                       <m:sSupPr>
@@ -15440,7 +15006,13 @@
                           <a:rPr lang="en-US" sz="2800" i="1">
                             <a:latin typeface="Cambria Math"/>
                           </a:rPr>
-                          <m:t>−3</m:t>
+                          <m:t>−</m:t>
+                        </m:r>
+                        <m:r>
+                          <a:rPr lang="en-US" sz="2800" i="1">
+                            <a:latin typeface="Cambria Math"/>
+                          </a:rPr>
+                          <m:t>3</m:t>
                         </m:r>
                       </m:sup>
                     </m:sSup>
@@ -15454,7 +15026,13 @@
                       <a:rPr lang="en-US" sz="2800" i="1">
                         <a:latin typeface="Cambria Math"/>
                       </a:rPr>
-                      <m:t>0.</m:t>
+                      <m:t>0</m:t>
+                    </m:r>
+                    <m:r>
+                      <a:rPr lang="en-US" sz="2800" i="1">
+                        <a:latin typeface="Cambria Math"/>
+                      </a:rPr>
+                      <m:t>.</m:t>
                     </m:r>
                     <m:r>
                       <a:rPr lang="en-US" sz="2800" b="0" i="1" smtClean="0">
@@ -15506,7 +15084,13 @@
                               <a:rPr lang="en-US" sz="2800" i="1">
                                 <a:latin typeface="Cambria Math"/>
                               </a:rPr>
-                              <m:t>−1</m:t>
+                              <m:t>−</m:t>
+                            </m:r>
+                            <m:r>
+                              <a:rPr lang="en-US" sz="2800" i="1">
+                                <a:latin typeface="Cambria Math"/>
+                              </a:rPr>
+                              <m:t>1</m:t>
                             </m:r>
                           </m:e>
                         </m:d>
@@ -15539,7 +15123,13 @@
                           <a:rPr lang="en-US" sz="2800" i="1">
                             <a:latin typeface="Cambria Math"/>
                           </a:rPr>
-                          <m:t>1+</m:t>
+                          <m:t>1</m:t>
+                        </m:r>
+                        <m:r>
+                          <a:rPr lang="en-US" sz="2800" i="1">
+                            <a:latin typeface="Cambria Math"/>
+                          </a:rPr>
+                          <m:t>+</m:t>
                         </m:r>
                         <m:r>
                           <a:rPr lang="en-US" sz="2800" i="1">
@@ -15582,7 +15172,13 @@
                           <a:rPr lang="en-US" sz="2800" i="1">
                             <a:latin typeface="Cambria Math"/>
                           </a:rPr>
-                          <m:t>−127</m:t>
+                          <m:t>−</m:t>
+                        </m:r>
+                        <m:r>
+                          <a:rPr lang="en-US" sz="2800" i="1">
+                            <a:latin typeface="Cambria Math"/>
+                          </a:rPr>
+                          <m:t>127</m:t>
                         </m:r>
                       </m:sup>
                     </m:sSup>
@@ -15633,7 +15229,13 @@
                                 <a:rPr lang="en-US" sz="2800" i="1">
                                   <a:latin typeface="Cambria Math"/>
                                 </a:rPr>
-                                <m:t>−1</m:t>
+                                <m:t>−</m:t>
+                              </m:r>
+                              <m:r>
+                                <a:rPr lang="en-US" sz="2800" i="1">
+                                  <a:latin typeface="Cambria Math"/>
+                                </a:rPr>
+                                <m:t>1</m:t>
                               </m:r>
                             </m:e>
                           </m:d>
@@ -15666,7 +15268,25 @@
                             <a:rPr lang="en-US" sz="2800" i="1">
                               <a:latin typeface="Cambria Math"/>
                             </a:rPr>
-                            <m:t>1+0.</m:t>
+                            <m:t>1</m:t>
+                          </m:r>
+                          <m:r>
+                            <a:rPr lang="en-US" sz="2800" i="1">
+                              <a:latin typeface="Cambria Math"/>
+                            </a:rPr>
+                            <m:t>+</m:t>
+                          </m:r>
+                          <m:r>
+                            <a:rPr lang="en-US" sz="2800" i="1">
+                              <a:latin typeface="Cambria Math"/>
+                            </a:rPr>
+                            <m:t>0</m:t>
+                          </m:r>
+                          <m:r>
+                            <a:rPr lang="en-US" sz="2800" i="1">
+                              <a:latin typeface="Cambria Math"/>
+                            </a:rPr>
+                            <m:t>.</m:t>
                           </m:r>
                           <m:r>
                             <a:rPr lang="en-US" sz="2800" b="0" i="1" smtClean="0">
@@ -15715,7 +15335,13 @@
                             <a:rPr lang="en-US" sz="2800" i="1">
                               <a:latin typeface="Cambria Math"/>
                             </a:rPr>
-                            <m:t>−127</m:t>
+                            <m:t>−</m:t>
+                          </m:r>
+                          <m:r>
+                            <a:rPr lang="en-US" sz="2800" i="1">
+                              <a:latin typeface="Cambria Math"/>
+                            </a:rPr>
+                            <m:t>127</m:t>
                           </m:r>
                         </m:sup>
                       </m:sSup>
@@ -15734,7 +15360,31 @@
                         <a:rPr lang="en-US" sz="2800" i="1">
                           <a:latin typeface="Cambria Math"/>
                         </a:rPr>
-                        <m:t>−1×1.</m:t>
+                        <m:t>−</m:t>
+                      </m:r>
+                      <m:r>
+                        <a:rPr lang="en-US" sz="2800" i="1">
+                          <a:latin typeface="Cambria Math"/>
+                        </a:rPr>
+                        <m:t>1</m:t>
+                      </m:r>
+                      <m:r>
+                        <a:rPr lang="en-US" sz="2800" i="1">
+                          <a:latin typeface="Cambria Math"/>
+                        </a:rPr>
+                        <m:t>×</m:t>
+                      </m:r>
+                      <m:r>
+                        <a:rPr lang="en-US" sz="2800" i="1">
+                          <a:latin typeface="Cambria Math"/>
+                        </a:rPr>
+                        <m:t>1</m:t>
+                      </m:r>
+                      <m:r>
+                        <a:rPr lang="en-US" sz="2800" i="1">
+                          <a:latin typeface="Cambria Math"/>
+                        </a:rPr>
+                        <m:t>.</m:t>
                       </m:r>
                       <m:r>
                         <a:rPr lang="en-US" sz="2800" b="0" i="1" smtClean="0">
@@ -15788,7 +15438,19 @@
                         <a:rPr lang="en-US" sz="2800" b="0" i="1" smtClean="0">
                           <a:latin typeface="Cambria Math" panose="02040503050406030204" pitchFamily="18" charset="0"/>
                         </a:rPr>
-                        <m:t>4.5</m:t>
+                        <m:t>4</m:t>
+                      </m:r>
+                      <m:r>
+                        <a:rPr lang="en-US" sz="2800" b="0" i="1" smtClean="0">
+                          <a:latin typeface="Cambria Math" panose="02040503050406030204" pitchFamily="18" charset="0"/>
+                        </a:rPr>
+                        <m:t>.</m:t>
+                      </m:r>
+                      <m:r>
+                        <a:rPr lang="en-US" sz="2800" b="0" i="1" smtClean="0">
+                          <a:latin typeface="Cambria Math" panose="02040503050406030204" pitchFamily="18" charset="0"/>
+                        </a:rPr>
+                        <m:t>5</m:t>
                       </m:r>
                     </m:oMath>
                   </m:oMathPara>
@@ -15919,11 +15581,11 @@
           <a:lstStyle/>
           <a:p>
             <a:r>
-              <a:rPr lang="en-US" b="1" dirty="0"/>
+              <a:rPr lang="en-US" dirty="0"/>
               <a:t>Decoding </a:t>
             </a:r>
             <a:r>
-              <a:rPr lang="en-US" sz="3600" b="1" dirty="0">
+              <a:rPr lang="en-US" sz="3600" dirty="0">
                 <a:solidFill>
                   <a:srgbClr val="C00000"/>
                 </a:solidFill>
@@ -15933,13 +15595,12 @@
               <a:t>0x3F800000</a:t>
             </a:r>
             <a:br>
-              <a:rPr lang="en-US" b="1" dirty="0"/>
+              <a:rPr lang="en-US" dirty="0"/>
             </a:br>
             <a:r>
-              <a:rPr lang="en-US" b="1" dirty="0"/>
+              <a:rPr lang="en-US" dirty="0"/>
               <a:t>into a floating-point number</a:t>
             </a:r>
-            <a:endParaRPr lang="en-US" dirty="0"/>
           </a:p>
         </p:txBody>
       </p:sp>
@@ -16635,11 +16296,11 @@
           <a:lstStyle/>
           <a:p>
             <a:r>
-              <a:rPr lang="en-US" b="1" dirty="0"/>
+              <a:rPr lang="en-US" dirty="0"/>
               <a:t>Decoding </a:t>
             </a:r>
             <a:r>
-              <a:rPr lang="en-US" sz="3600" b="1" dirty="0">
+              <a:rPr lang="en-US" sz="3600" dirty="0">
                 <a:solidFill>
                   <a:srgbClr val="C00000"/>
                 </a:solidFill>
@@ -16649,13 +16310,12 @@
               <a:t>0x41680000</a:t>
             </a:r>
             <a:br>
-              <a:rPr lang="en-US" b="1" dirty="0"/>
+              <a:rPr lang="en-US" dirty="0"/>
             </a:br>
             <a:r>
-              <a:rPr lang="en-US" b="1" dirty="0"/>
+              <a:rPr lang="en-US" dirty="0"/>
               <a:t>into a floating-point number</a:t>
             </a:r>
-            <a:endParaRPr lang="en-US" dirty="0"/>
           </a:p>
         </p:txBody>
       </p:sp>
@@ -16798,13 +16458,7 @@
                       <a:rPr lang="en-US" sz="2800" i="1">
                         <a:latin typeface="Cambria Math"/>
                       </a:rPr>
-                      <m:t>=</m:t>
-                    </m:r>
-                    <m:r>
-                      <a:rPr lang="en-US" sz="2800" i="1">
-                        <a:latin typeface="Cambria Math"/>
-                      </a:rPr>
-                      <m:t>130</m:t>
+                      <m:t>=130</m:t>
                     </m:r>
                   </m:oMath>
                 </a14:m>
@@ -16830,13 +16484,7 @@
                           <a:rPr lang="en-US" sz="2800" i="1">
                             <a:latin typeface="Cambria Math"/>
                           </a:rPr>
-                          <m:t>0</m:t>
-                        </m:r>
-                        <m:r>
-                          <a:rPr lang="en-US" sz="2800" i="1">
-                            <a:latin typeface="Cambria Math"/>
-                          </a:rPr>
-                          <m:t>.</m:t>
+                          <m:t>0.</m:t>
                         </m:r>
                         <m:r>
                           <a:rPr lang="en-US" sz="2800" b="0" i="1" smtClean="0">
@@ -16896,13 +16544,7 @@
                           <a:rPr lang="en-US" sz="2800" i="1">
                             <a:latin typeface="Cambria Math"/>
                           </a:rPr>
-                          <m:t>−</m:t>
-                        </m:r>
-                        <m:r>
-                          <a:rPr lang="en-US" sz="2800" i="1">
-                            <a:latin typeface="Cambria Math"/>
-                          </a:rPr>
-                          <m:t>1</m:t>
+                          <m:t>−1</m:t>
                         </m:r>
                       </m:sup>
                     </m:sSup>
@@ -16945,13 +16587,7 @@
                           <a:rPr lang="en-US" sz="2800" i="1">
                             <a:latin typeface="Cambria Math"/>
                           </a:rPr>
-                          <m:t>−</m:t>
-                        </m:r>
-                        <m:r>
-                          <a:rPr lang="en-US" sz="2800" i="1">
-                            <a:latin typeface="Cambria Math"/>
-                          </a:rPr>
-                          <m:t>2</m:t>
+                          <m:t>−2</m:t>
                         </m:r>
                       </m:sup>
                     </m:sSup>
@@ -16959,19 +16595,7 @@
                       <a:rPr lang="en-US" sz="2800" i="1">
                         <a:latin typeface="Cambria Math"/>
                       </a:rPr>
-                      <m:t>+</m:t>
-                    </m:r>
-                    <m:r>
-                      <a:rPr lang="en-US" sz="2800" i="1">
-                        <a:latin typeface="Cambria Math"/>
-                      </a:rPr>
-                      <m:t>1</m:t>
-                    </m:r>
-                    <m:r>
-                      <a:rPr lang="en-US" sz="2800" i="1">
-                        <a:latin typeface="Cambria Math"/>
-                      </a:rPr>
-                      <m:t>×</m:t>
+                      <m:t>+1×</m:t>
                     </m:r>
                     <m:sSup>
                       <m:sSupPr>
@@ -17008,25 +16632,7 @@
                       <a:rPr lang="en-US" sz="2800" i="1">
                         <a:latin typeface="Cambria Math" panose="02040503050406030204" pitchFamily="18" charset="0"/>
                       </a:rPr>
-                      <m:t>=</m:t>
-                    </m:r>
-                    <m:r>
-                      <a:rPr lang="en-US" sz="2800" i="1">
-                        <a:latin typeface="Cambria Math" panose="02040503050406030204" pitchFamily="18" charset="0"/>
-                      </a:rPr>
-                      <m:t>0</m:t>
-                    </m:r>
-                    <m:r>
-                      <a:rPr lang="en-US" sz="2800" i="1">
-                        <a:latin typeface="Cambria Math" panose="02040503050406030204" pitchFamily="18" charset="0"/>
-                      </a:rPr>
-                      <m:t>.</m:t>
-                    </m:r>
-                    <m:r>
-                      <a:rPr lang="en-US" sz="2800" i="1">
-                        <a:latin typeface="Cambria Math" panose="02040503050406030204" pitchFamily="18" charset="0"/>
-                      </a:rPr>
-                      <m:t>8125</m:t>
+                      <m:t>=0.8125</m:t>
                     </m:r>
                   </m:oMath>
                 </a14:m>
@@ -17072,13 +16678,7 @@
                               <a:rPr lang="en-US" sz="2800" i="1">
                                 <a:latin typeface="Cambria Math"/>
                               </a:rPr>
-                              <m:t>−</m:t>
-                            </m:r>
-                            <m:r>
-                              <a:rPr lang="en-US" sz="2800" i="1">
-                                <a:latin typeface="Cambria Math"/>
-                              </a:rPr>
-                              <m:t>1</m:t>
+                              <m:t>−1</m:t>
                             </m:r>
                           </m:e>
                         </m:d>
@@ -17111,13 +16711,7 @@
                           <a:rPr lang="en-US" sz="2800" i="1">
                             <a:latin typeface="Cambria Math"/>
                           </a:rPr>
-                          <m:t>1</m:t>
-                        </m:r>
-                        <m:r>
-                          <a:rPr lang="en-US" sz="2800" i="1">
-                            <a:latin typeface="Cambria Math"/>
-                          </a:rPr>
-                          <m:t>+</m:t>
+                          <m:t>1+</m:t>
                         </m:r>
                         <m:r>
                           <a:rPr lang="en-US" sz="2800" i="1">
@@ -17160,13 +16754,7 @@
                           <a:rPr lang="en-US" sz="2800" i="1">
                             <a:latin typeface="Cambria Math"/>
                           </a:rPr>
-                          <m:t>−</m:t>
-                        </m:r>
-                        <m:r>
-                          <a:rPr lang="en-US" sz="2800" i="1">
-                            <a:latin typeface="Cambria Math"/>
-                          </a:rPr>
-                          <m:t>127</m:t>
+                          <m:t>−127</m:t>
                         </m:r>
                       </m:sup>
                     </m:sSup>
@@ -17217,13 +16805,7 @@
                                 <a:rPr lang="en-US" sz="2800" i="1">
                                   <a:latin typeface="Cambria Math"/>
                                 </a:rPr>
-                                <m:t>−</m:t>
-                              </m:r>
-                              <m:r>
-                                <a:rPr lang="en-US" sz="2800" i="1">
-                                  <a:latin typeface="Cambria Math"/>
-                                </a:rPr>
-                                <m:t>1</m:t>
+                                <m:t>−1</m:t>
                               </m:r>
                             </m:e>
                           </m:d>
@@ -17256,31 +16838,13 @@
                             <a:rPr lang="en-US" sz="2800" i="1">
                               <a:latin typeface="Cambria Math"/>
                             </a:rPr>
-                            <m:t>1</m:t>
-                          </m:r>
-                          <m:r>
-                            <a:rPr lang="en-US" sz="2800" i="1">
-                              <a:latin typeface="Cambria Math"/>
-                            </a:rPr>
-                            <m:t>+</m:t>
+                            <m:t>1+</m:t>
                           </m:r>
                           <m:r>
                             <a:rPr lang="en-US" sz="2800" i="1">
                               <a:latin typeface="Cambria Math" panose="02040503050406030204" pitchFamily="18" charset="0"/>
                             </a:rPr>
-                            <m:t>0</m:t>
-                          </m:r>
-                          <m:r>
-                            <a:rPr lang="en-US" sz="2800" i="1">
-                              <a:latin typeface="Cambria Math" panose="02040503050406030204" pitchFamily="18" charset="0"/>
-                            </a:rPr>
-                            <m:t>.</m:t>
-                          </m:r>
-                          <m:r>
-                            <a:rPr lang="en-US" sz="2800" i="1">
-                              <a:latin typeface="Cambria Math" panose="02040503050406030204" pitchFamily="18" charset="0"/>
-                            </a:rPr>
-                            <m:t>8125</m:t>
+                            <m:t>0.8125</m:t>
                           </m:r>
                         </m:e>
                       </m:d>
@@ -17323,13 +16887,7 @@
                             <a:rPr lang="en-US" sz="2800" i="1">
                               <a:latin typeface="Cambria Math"/>
                             </a:rPr>
-                            <m:t>−</m:t>
-                          </m:r>
-                          <m:r>
-                            <a:rPr lang="en-US" sz="2800" i="1">
-                              <a:latin typeface="Cambria Math"/>
-                            </a:rPr>
-                            <m:t>127</m:t>
+                            <m:t>−127</m:t>
                           </m:r>
                         </m:sup>
                       </m:sSup>
@@ -17348,25 +16906,7 @@
                         <a:rPr lang="en-US" sz="2800" i="1">
                           <a:latin typeface="Cambria Math"/>
                         </a:rPr>
-                        <m:t>1</m:t>
-                      </m:r>
-                      <m:r>
-                        <a:rPr lang="en-US" sz="2800" i="1">
-                          <a:latin typeface="Cambria Math"/>
-                        </a:rPr>
-                        <m:t>×</m:t>
-                      </m:r>
-                      <m:r>
-                        <a:rPr lang="en-US" sz="2800" i="1">
-                          <a:latin typeface="Cambria Math"/>
-                        </a:rPr>
-                        <m:t>1</m:t>
-                      </m:r>
-                      <m:r>
-                        <a:rPr lang="en-US" sz="2800" i="1">
-                          <a:latin typeface="Cambria Math"/>
-                        </a:rPr>
-                        <m:t>.</m:t>
+                        <m:t>1×1.</m:t>
                       </m:r>
                       <m:r>
                         <a:rPr lang="en-US" sz="2800" b="0" i="1" smtClean="0">
@@ -17420,19 +16960,7 @@
                         <a:rPr lang="en-US" sz="2800" b="0" i="1" smtClean="0">
                           <a:latin typeface="Cambria Math" panose="02040503050406030204" pitchFamily="18" charset="0"/>
                         </a:rPr>
-                        <m:t>14</m:t>
-                      </m:r>
-                      <m:r>
-                        <a:rPr lang="en-US" sz="2800" b="0" i="1" smtClean="0">
-                          <a:latin typeface="Cambria Math" panose="02040503050406030204" pitchFamily="18" charset="0"/>
-                        </a:rPr>
-                        <m:t>.</m:t>
-                      </m:r>
-                      <m:r>
-                        <a:rPr lang="en-US" sz="2800" b="0" i="1" smtClean="0">
-                          <a:latin typeface="Cambria Math" panose="02040503050406030204" pitchFamily="18" charset="0"/>
-                        </a:rPr>
-                        <m:t>5</m:t>
+                        <m:t>14.5</m:t>
                       </m:r>
                     </m:oMath>
                   </m:oMathPara>
@@ -20239,7 +19767,7 @@
                           <a:rPr lang="en-US" i="1">
                             <a:latin typeface="Cambria Math"/>
                           </a:rPr>
-                          <m:t>14</m:t>
+                          <m:t>1</m:t>
                         </m:r>
                         <m:r>
                           <a:rPr lang="en-US" i="1">
@@ -20248,10 +19776,10 @@
                           <m:t>.</m:t>
                         </m:r>
                         <m:r>
-                          <a:rPr lang="en-US" i="1">
-                            <a:latin typeface="Cambria Math"/>
+                          <a:rPr lang="en-US" b="0" i="1" smtClean="0">
+                            <a:latin typeface="Cambria Math" panose="02040503050406030204" pitchFamily="18" charset="0"/>
                           </a:rPr>
-                          <m:t>5</m:t>
+                          <m:t>3</m:t>
                         </m:r>
                       </m:num>
                       <m:den>
@@ -21330,7 +20858,7 @@
               <a:blipFill>
                 <a:blip r:embed="rId3"/>
                 <a:stretch>
-                  <a:fillRect l="-235" t="-1946" b="-122"/>
+                  <a:fillRect l="-235" t="-1946"/>
                 </a:stretch>
               </a:blipFill>
             </p:spPr>
@@ -21655,13 +21183,7 @@
                       <a:rPr lang="en-US" sz="2800" i="1">
                         <a:latin typeface="Cambria Math"/>
                       </a:rPr>
-                      <m:t>=</m:t>
-                    </m:r>
-                    <m:r>
-                      <a:rPr lang="en-US" sz="2800" i="1">
-                        <a:latin typeface="Cambria Math"/>
-                      </a:rPr>
-                      <m:t>127</m:t>
+                      <m:t>=127</m:t>
                     </m:r>
                   </m:oMath>
                 </a14:m>
@@ -21684,13 +21206,7 @@
                       <a:rPr lang="en-US" sz="2800" i="1">
                         <a:latin typeface="Cambria Math" panose="02040503050406030204" pitchFamily="18" charset="0"/>
                       </a:rPr>
-                      <m:t>.</m:t>
-                    </m:r>
-                    <m:r>
-                      <a:rPr lang="en-US" sz="2800" i="1">
-                        <a:latin typeface="Cambria Math" panose="02040503050406030204" pitchFamily="18" charset="0"/>
-                      </a:rPr>
-                      <m:t>29999995</m:t>
+                      <m:t>.29999995</m:t>
                     </m:r>
                   </m:oMath>
                 </a14:m>
@@ -21739,13 +21255,7 @@
                               <a:rPr lang="en-US" sz="2800" i="1">
                                 <a:latin typeface="Cambria Math"/>
                               </a:rPr>
-                              <m:t>−</m:t>
-                            </m:r>
-                            <m:r>
-                              <a:rPr lang="en-US" sz="2800" i="1">
-                                <a:latin typeface="Cambria Math"/>
-                              </a:rPr>
-                              <m:t>1</m:t>
+                              <m:t>−1</m:t>
                             </m:r>
                           </m:e>
                         </m:d>
@@ -21778,13 +21288,7 @@
                           <a:rPr lang="en-US" sz="2800" i="1">
                             <a:latin typeface="Cambria Math"/>
                           </a:rPr>
-                          <m:t>1</m:t>
-                        </m:r>
-                        <m:r>
-                          <a:rPr lang="en-US" sz="2800" i="1">
-                            <a:latin typeface="Cambria Math"/>
-                          </a:rPr>
-                          <m:t>+</m:t>
+                          <m:t>1+</m:t>
                         </m:r>
                         <m:r>
                           <a:rPr lang="en-US" sz="2800" i="1">
@@ -21827,13 +21331,7 @@
                           <a:rPr lang="en-US" sz="2800" i="1">
                             <a:latin typeface="Cambria Math"/>
                           </a:rPr>
-                          <m:t>−</m:t>
-                        </m:r>
-                        <m:r>
-                          <a:rPr lang="en-US" sz="2800" i="1">
-                            <a:latin typeface="Cambria Math"/>
-                          </a:rPr>
-                          <m:t>127</m:t>
+                          <m:t>−127</m:t>
                         </m:r>
                       </m:sup>
                     </m:sSup>
@@ -21884,13 +21382,7 @@
                                 <a:rPr lang="en-US" sz="2800" i="1">
                                   <a:latin typeface="Cambria Math"/>
                                 </a:rPr>
-                                <m:t>−</m:t>
-                              </m:r>
-                              <m:r>
-                                <a:rPr lang="en-US" sz="2800" i="1">
-                                  <a:latin typeface="Cambria Math"/>
-                                </a:rPr>
-                                <m:t>1</m:t>
+                                <m:t>−1</m:t>
                               </m:r>
                             </m:e>
                           </m:d>
@@ -21923,13 +21415,7 @@
                             <a:rPr lang="en-US" sz="2800" i="1">
                               <a:latin typeface="Cambria Math"/>
                             </a:rPr>
-                            <m:t>1</m:t>
-                          </m:r>
-                          <m:r>
-                            <a:rPr lang="en-US" sz="2800" i="1">
-                              <a:latin typeface="Cambria Math"/>
-                            </a:rPr>
-                            <m:t>+</m:t>
+                            <m:t>1+</m:t>
                           </m:r>
                           <m:r>
                             <a:rPr lang="en-US" sz="2800" i="1" dirty="0">
@@ -21941,13 +21427,7 @@
                             <a:rPr lang="en-US" sz="2800" i="1">
                               <a:latin typeface="Cambria Math" panose="02040503050406030204" pitchFamily="18" charset="0"/>
                             </a:rPr>
-                            <m:t>.</m:t>
-                          </m:r>
-                          <m:r>
-                            <a:rPr lang="en-US" sz="2800" i="1">
-                              <a:latin typeface="Cambria Math" panose="02040503050406030204" pitchFamily="18" charset="0"/>
-                            </a:rPr>
-                            <m:t>29999995</m:t>
+                            <m:t>.29999995</m:t>
                           </m:r>
                         </m:e>
                       </m:d>
@@ -21990,13 +21470,7 @@
                             <a:rPr lang="en-US" sz="2800" i="1">
                               <a:latin typeface="Cambria Math"/>
                             </a:rPr>
-                            <m:t>−</m:t>
-                          </m:r>
-                          <m:r>
-                            <a:rPr lang="en-US" sz="2800" i="1">
-                              <a:latin typeface="Cambria Math"/>
-                            </a:rPr>
-                            <m:t>127</m:t>
+                            <m:t>−127</m:t>
                           </m:r>
                         </m:sup>
                       </m:sSup>
@@ -22021,13 +21495,7 @@
                         <a:rPr lang="en-US" sz="2800" i="1">
                           <a:latin typeface="Cambria Math" panose="02040503050406030204" pitchFamily="18" charset="0"/>
                         </a:rPr>
-                        <m:t>.</m:t>
-                      </m:r>
-                      <m:r>
-                        <a:rPr lang="en-US" sz="2800" i="1">
-                          <a:latin typeface="Cambria Math" panose="02040503050406030204" pitchFamily="18" charset="0"/>
-                        </a:rPr>
-                        <m:t>29999995</m:t>
+                        <m:t>.29999995</m:t>
                       </m:r>
                     </m:oMath>
                   </m:oMathPara>
@@ -22045,25 +21513,7 @@
                       <a:rPr lang="en-US" sz="2800" b="0" i="0" smtClean="0">
                         <a:latin typeface="Cambria Math" panose="02040503050406030204" pitchFamily="18" charset="0"/>
                       </a:rPr>
-                      <m:t>1</m:t>
-                    </m:r>
-                    <m:r>
-                      <a:rPr lang="en-US" sz="2800" b="0" i="0" smtClean="0">
-                        <a:latin typeface="Cambria Math" panose="02040503050406030204" pitchFamily="18" charset="0"/>
-                      </a:rPr>
-                      <m:t>.</m:t>
-                    </m:r>
-                    <m:r>
-                      <a:rPr lang="en-US" sz="2800" b="0" i="0" smtClean="0">
-                        <a:latin typeface="Cambria Math" panose="02040503050406030204" pitchFamily="18" charset="0"/>
-                      </a:rPr>
-                      <m:t>3</m:t>
-                    </m:r>
-                    <m:r>
-                      <a:rPr lang="en-US" sz="2800" b="0" i="0" smtClean="0">
-                        <a:latin typeface="Cambria Math" panose="02040503050406030204" pitchFamily="18" charset="0"/>
-                      </a:rPr>
-                      <m:t>−</m:t>
+                      <m:t>1.3−</m:t>
                     </m:r>
                     <m:r>
                       <a:rPr lang="en-US" sz="2800" i="1" dirty="0">
@@ -22075,31 +21525,7 @@
                       <a:rPr lang="en-US" sz="2800" i="1">
                         <a:latin typeface="Cambria Math" panose="02040503050406030204" pitchFamily="18" charset="0"/>
                       </a:rPr>
-                      <m:t>.</m:t>
-                    </m:r>
-                    <m:r>
-                      <a:rPr lang="en-US" sz="2800" i="1">
-                        <a:latin typeface="Cambria Math" panose="02040503050406030204" pitchFamily="18" charset="0"/>
-                      </a:rPr>
-                      <m:t>29999995</m:t>
-                    </m:r>
-                    <m:r>
-                      <a:rPr lang="en-US" sz="2800" i="1">
-                        <a:latin typeface="Cambria Math" panose="02040503050406030204" pitchFamily="18" charset="0"/>
-                      </a:rPr>
-                      <m:t>=</m:t>
-                    </m:r>
-                    <m:r>
-                      <a:rPr lang="en-US" sz="2800" i="1">
-                        <a:latin typeface="Cambria Math" panose="02040503050406030204" pitchFamily="18" charset="0"/>
-                      </a:rPr>
-                      <m:t>5</m:t>
-                    </m:r>
-                    <m:r>
-                      <a:rPr lang="en-US" sz="2800" i="1">
-                        <a:latin typeface="Cambria Math" panose="02040503050406030204" pitchFamily="18" charset="0"/>
-                      </a:rPr>
-                      <m:t>×</m:t>
+                      <m:t>.29999995=5×</m:t>
                     </m:r>
                     <m:sSup>
                       <m:sSupPr>
@@ -22122,13 +21548,7 @@
                           <a:rPr lang="en-US" sz="2800" b="0" i="1" smtClean="0">
                             <a:latin typeface="Cambria Math" panose="02040503050406030204" pitchFamily="18" charset="0"/>
                           </a:rPr>
-                          <m:t>−</m:t>
-                        </m:r>
-                        <m:r>
-                          <a:rPr lang="en-US" sz="2800" b="0" i="1" smtClean="0">
-                            <a:latin typeface="Cambria Math" panose="02040503050406030204" pitchFamily="18" charset="0"/>
-                          </a:rPr>
-                          <m:t>8</m:t>
+                          <m:t>−8</m:t>
                         </m:r>
                       </m:sup>
                     </m:sSup>
@@ -22198,7 +21618,7 @@
         </p:nvSpPr>
         <p:spPr>
           <a:xfrm>
-            <a:off x="2895600" y="5638800"/>
+            <a:off x="3581400" y="5710019"/>
             <a:ext cx="5360378" cy="646331"/>
           </a:xfrm>
           <a:prstGeom prst="rect">
@@ -22653,21 +22073,7 @@
                         <a:latin typeface="Cambria Math" panose="02040503050406030204" pitchFamily="18" charset="0"/>
                         <a:ea typeface="Cambria Math" panose="02040503050406030204" pitchFamily="18" charset="0"/>
                       </a:rPr>
-                      <m:t>∞</m:t>
-                    </m:r>
-                    <m:r>
-                      <a:rPr lang="en-US" i="1">
-                        <a:latin typeface="Cambria Math" panose="02040503050406030204" pitchFamily="18" charset="0"/>
-                        <a:ea typeface="Cambria Math" panose="02040503050406030204" pitchFamily="18" charset="0"/>
-                      </a:rPr>
-                      <m:t>+</m:t>
-                    </m:r>
-                    <m:r>
-                      <a:rPr lang="en-US" i="1">
-                        <a:latin typeface="Cambria Math" panose="02040503050406030204" pitchFamily="18" charset="0"/>
-                        <a:ea typeface="Cambria Math" panose="02040503050406030204" pitchFamily="18" charset="0"/>
-                      </a:rPr>
-                      <m:t>∞</m:t>
+                      <m:t>∞+∞</m:t>
                     </m:r>
                   </m:oMath>
                 </a14:m>
@@ -22905,7 +22311,13 @@
                                 <a:rPr lang="en-US" sz="2800">
                                   <a:latin typeface="Cambria Math" panose="02040503050406030204" pitchFamily="18" charset="0"/>
                                 </a:rPr>
-                                <m:t>−1</m:t>
+                                <m:t>−</m:t>
+                              </m:r>
+                              <m:r>
+                                <a:rPr lang="en-US" sz="2800">
+                                  <a:latin typeface="Cambria Math" panose="02040503050406030204" pitchFamily="18" charset="0"/>
+                                </a:rPr>
+                                <m:t>1</m:t>
                               </m:r>
                             </m:e>
                           </m:d>
@@ -22961,7 +22373,16 @@
                               </a:solidFill>
                               <a:latin typeface="Cambria Math" panose="02040503050406030204" pitchFamily="18" charset="0"/>
                             </a:rPr>
-                            <m:t>−126</m:t>
+                            <m:t>−</m:t>
+                          </m:r>
+                          <m:r>
+                            <a:rPr lang="en-US" sz="2800">
+                              <a:solidFill>
+                                <a:srgbClr val="FF0000"/>
+                              </a:solidFill>
+                              <a:latin typeface="Cambria Math" panose="02040503050406030204" pitchFamily="18" charset="0"/>
+                            </a:rPr>
+                            <m:t>126</m:t>
                           </m:r>
                         </m:sup>
                       </m:sSup>
@@ -23064,7 +22485,13 @@
                                 <a:rPr lang="en-US" sz="2800">
                                   <a:latin typeface="Cambria Math" panose="02040503050406030204" pitchFamily="18" charset="0"/>
                                 </a:rPr>
-                                <m:t>−1</m:t>
+                                <m:t>−</m:t>
+                              </m:r>
+                              <m:r>
+                                <a:rPr lang="en-US" sz="2800">
+                                  <a:latin typeface="Cambria Math" panose="02040503050406030204" pitchFamily="18" charset="0"/>
+                                </a:rPr>
+                                <m:t>1</m:t>
                               </m:r>
                             </m:e>
                           </m:d>
@@ -23156,7 +22583,16 @@
                               </a:solidFill>
                               <a:latin typeface="Cambria Math" panose="02040503050406030204" pitchFamily="18" charset="0"/>
                             </a:rPr>
-                            <m:t>−12</m:t>
+                            <m:t>−</m:t>
+                          </m:r>
+                          <m:r>
+                            <a:rPr lang="en-US" sz="2800">
+                              <a:solidFill>
+                                <a:srgbClr val="FF0000"/>
+                              </a:solidFill>
+                              <a:latin typeface="Cambria Math" panose="02040503050406030204" pitchFamily="18" charset="0"/>
+                            </a:rPr>
+                            <m:t>12</m:t>
                           </m:r>
                           <m:r>
                             <a:rPr lang="en-US" sz="2800" i="1">
@@ -23367,19 +22803,7 @@
                             <a:rPr lang="en-US" sz="2400" i="1">
                               <a:latin typeface="Cambria Math"/>
                             </a:rPr>
-                            <m:t>(−</m:t>
-                          </m:r>
-                          <m:r>
-                            <a:rPr lang="en-US" sz="2400" i="1">
-                              <a:latin typeface="Cambria Math"/>
-                            </a:rPr>
-                            <m:t>1</m:t>
-                          </m:r>
-                          <m:r>
-                            <a:rPr lang="en-US" sz="2400" i="1">
-                              <a:latin typeface="Cambria Math"/>
-                            </a:rPr>
-                            <m:t>)</m:t>
+                            <m:t>(−1)</m:t>
                           </m:r>
                         </m:e>
                         <m:sup>
@@ -23410,19 +22834,7 @@
                             <a:rPr lang="en-US" sz="2400" i="1">
                               <a:latin typeface="Cambria Math"/>
                             </a:rPr>
-                            <m:t>1</m:t>
-                          </m:r>
-                          <m:r>
-                            <a:rPr lang="en-US" sz="2400" i="1">
-                              <a:latin typeface="Cambria Math"/>
-                            </a:rPr>
-                            <m:t>+</m:t>
-                          </m:r>
-                          <m:r>
-                            <a:rPr lang="en-US" sz="2400" i="1">
-                              <a:latin typeface="Cambria Math"/>
-                            </a:rPr>
-                            <m:t>0</m:t>
+                            <m:t>1+0</m:t>
                           </m:r>
                         </m:e>
                       </m:d>
@@ -23453,19 +22865,7 @@
                             <a:rPr lang="en-US" sz="2400" i="1">
                               <a:latin typeface="Cambria Math"/>
                             </a:rPr>
-                            <m:t>1</m:t>
-                          </m:r>
-                          <m:r>
-                            <a:rPr lang="en-US" sz="2400" i="1">
-                              <a:latin typeface="Cambria Math"/>
-                            </a:rPr>
-                            <m:t>−</m:t>
-                          </m:r>
-                          <m:r>
-                            <a:rPr lang="en-US" sz="2400" i="1">
-                              <a:latin typeface="Cambria Math"/>
-                            </a:rPr>
-                            <m:t>127</m:t>
+                            <m:t>1−127</m:t>
                           </m:r>
                         </m:sup>
                       </m:sSup>
@@ -23496,13 +22896,7 @@
                             <a:rPr lang="en-US" sz="2400" i="1">
                               <a:latin typeface="Cambria Math"/>
                             </a:rPr>
-                            <m:t>−</m:t>
-                          </m:r>
-                          <m:r>
-                            <a:rPr lang="en-US" sz="2400" i="1">
-                              <a:latin typeface="Cambria Math"/>
-                            </a:rPr>
-                            <m:t>126</m:t>
+                            <m:t>−126</m:t>
                           </m:r>
                         </m:sup>
                       </m:sSup>
@@ -23510,31 +22904,7 @@
                         <a:rPr lang="en-US" sz="2400" i="1">
                           <a:latin typeface="Cambria Math"/>
                         </a:rPr>
-                        <m:t>≈</m:t>
-                      </m:r>
-                      <m:r>
-                        <a:rPr lang="en-US" sz="2400" i="1">
-                          <a:latin typeface="Cambria Math"/>
-                        </a:rPr>
-                        <m:t>1</m:t>
-                      </m:r>
-                      <m:r>
-                        <a:rPr lang="en-US" sz="2400" i="1">
-                          <a:latin typeface="Cambria Math"/>
-                        </a:rPr>
-                        <m:t>.</m:t>
-                      </m:r>
-                      <m:r>
-                        <a:rPr lang="en-US" sz="2400" i="1">
-                          <a:latin typeface="Cambria Math"/>
-                        </a:rPr>
-                        <m:t>18</m:t>
-                      </m:r>
-                      <m:r>
-                        <a:rPr lang="en-US" sz="2400" i="1">
-                          <a:latin typeface="Cambria Math"/>
-                        </a:rPr>
-                        <m:t>×</m:t>
+                        <m:t>≈1.18×</m:t>
                       </m:r>
                       <m:sSup>
                         <m:sSupPr>
@@ -23557,13 +22927,7 @@
                             <a:rPr lang="en-US" sz="2400" i="1">
                               <a:latin typeface="Cambria Math"/>
                             </a:rPr>
-                            <m:t>−</m:t>
-                          </m:r>
-                          <m:r>
-                            <a:rPr lang="en-US" sz="2400" i="1">
-                              <a:latin typeface="Cambria Math"/>
-                            </a:rPr>
-                            <m:t>38</m:t>
+                            <m:t>−38</m:t>
                           </m:r>
                         </m:sup>
                       </m:sSup>
@@ -23843,19 +23207,7 @@
                             <a:rPr lang="en-US" sz="2400" i="1">
                               <a:latin typeface="Cambria Math"/>
                             </a:rPr>
-                            <m:t>(−</m:t>
-                          </m:r>
-                          <m:r>
-                            <a:rPr lang="en-US" sz="2400" i="1">
-                              <a:latin typeface="Cambria Math"/>
-                            </a:rPr>
-                            <m:t>1</m:t>
-                          </m:r>
-                          <m:r>
-                            <a:rPr lang="en-US" sz="2400" i="1">
-                              <a:latin typeface="Cambria Math"/>
-                            </a:rPr>
-                            <m:t>)</m:t>
+                            <m:t>(−1)</m:t>
                           </m:r>
                         </m:e>
                         <m:sup>
@@ -23954,19 +23306,7 @@
                             <a:rPr lang="en-US" sz="2400" i="1">
                               <a:latin typeface="Cambria Math"/>
                             </a:rPr>
-                            <m:t>1</m:t>
-                          </m:r>
-                          <m:r>
-                            <a:rPr lang="en-US" sz="2400" i="1">
-                              <a:latin typeface="Cambria Math"/>
-                            </a:rPr>
-                            <m:t>−</m:t>
-                          </m:r>
-                          <m:r>
-                            <a:rPr lang="en-US" sz="2400" i="1">
-                              <a:latin typeface="Cambria Math"/>
-                            </a:rPr>
-                            <m:t>127</m:t>
+                            <m:t>1−127</m:t>
                           </m:r>
                         </m:sup>
                       </m:sSup>
@@ -23997,13 +23337,7 @@
                             <a:rPr lang="en-US" sz="2400" i="1">
                               <a:latin typeface="Cambria Math"/>
                             </a:rPr>
-                            <m:t>−</m:t>
-                          </m:r>
-                          <m:r>
-                            <a:rPr lang="en-US" sz="2400" i="1">
-                              <a:latin typeface="Cambria Math"/>
-                            </a:rPr>
-                            <m:t>149</m:t>
+                            <m:t>−149</m:t>
                           </m:r>
                         </m:sup>
                       </m:sSup>
@@ -24011,19 +23345,7 @@
                         <a:rPr lang="en-US" sz="2400" i="1">
                           <a:latin typeface="Cambria Math"/>
                         </a:rPr>
-                        <m:t>≈</m:t>
-                      </m:r>
-                      <m:r>
-                        <a:rPr lang="en-US" sz="2400" i="1">
-                          <a:latin typeface="Cambria Math"/>
-                        </a:rPr>
-                        <m:t>1</m:t>
-                      </m:r>
-                      <m:r>
-                        <a:rPr lang="en-US" sz="2400" i="1">
-                          <a:latin typeface="Cambria Math"/>
-                        </a:rPr>
-                        <m:t>.</m:t>
+                        <m:t>≈1.</m:t>
                       </m:r>
                       <m:r>
                         <a:rPr lang="en-US" sz="2400" b="0" i="1" smtClean="0">
@@ -25535,7 +24857,9 @@
         </p:nvSpPr>
         <p:spPr/>
         <p:txBody>
-          <a:bodyPr/>
+          <a:bodyPr>
+            <a:normAutofit fontScale="92500"/>
+          </a:bodyPr>
           <a:lstStyle/>
           <a:p>
             <a:r>
@@ -25590,6 +24914,48 @@
               <a:rPr lang="en-US" dirty="0"/>
               <a:t> </a:t>
             </a:r>
+          </a:p>
+          <a:p>
+            <a:r>
+              <a:rPr lang="en-US" dirty="0"/>
+              <a:t>IEEE 754 Binary to Float Conversion</a:t>
+            </a:r>
+          </a:p>
+          <a:p>
+            <a:pPr lvl="1"/>
+            <a:r>
+              <a:rPr lang="en-US" dirty="0">
+                <a:hlinkClick r:id="rId5"/>
+              </a:rPr>
+              <a:t>https://www.youtube.com/watch?v=9k5rdPUzij8&amp;list=PL-ftFcielQtGxBUfzkbz9tWlRZb-rlJ2p&amp;index=2</a:t>
+            </a:r>
+            <a:r>
+              <a:rPr lang="en-US" dirty="0"/>
+              <a:t> </a:t>
+            </a:r>
+          </a:p>
+          <a:p>
+            <a:r>
+              <a:rPr lang="en-US" dirty="0"/>
+              <a:t>IEEE 754 Float to Binary Conversion</a:t>
+            </a:r>
+          </a:p>
+          <a:p>
+            <a:pPr lvl="1"/>
+            <a:r>
+              <a:rPr lang="en-US" dirty="0">
+                <a:hlinkClick r:id="rId5"/>
+              </a:rPr>
+              <a:t>https://www.youtube.com/watch?v=9k5rdPUzij8&amp;list=PL-ftFcielQtGxBUfzkbz9tWlRZb-rlJ2p&amp;index=2</a:t>
+            </a:r>
+            <a:r>
+              <a:rPr lang="en-US" dirty="0"/>
+              <a:t> </a:t>
+            </a:r>
+          </a:p>
+          <a:p>
+            <a:pPr lvl="1"/>
+            <a:endParaRPr lang="en-US" dirty="0"/>
           </a:p>
         </p:txBody>
       </p:sp>
@@ -30335,13 +29701,7 @@
                             <a:rPr lang="en-US" sz="2000">
                               <a:latin typeface="Cambria Math" panose="02040503050406030204" pitchFamily="18" charset="0"/>
                             </a:rPr>
-                            <m:t>2</m:t>
-                          </m:r>
-                          <m:r>
-                            <a:rPr lang="en-US" sz="2000">
-                              <a:latin typeface="Cambria Math" panose="02040503050406030204" pitchFamily="18" charset="0"/>
-                            </a:rPr>
-                            <m:t> </m:t>
+                            <m:t>2 </m:t>
                           </m:r>
                         </m:sub>
                       </m:sSub>
@@ -30433,13 +29793,7 @@
                             <a:rPr lang="en-US" sz="2000" i="1">
                               <a:latin typeface="Cambria Math" panose="02040503050406030204" pitchFamily="18" charset="0"/>
                             </a:rPr>
-                            <m:t>−</m:t>
-                          </m:r>
-                          <m:r>
-                            <a:rPr lang="en-US" sz="2000" i="1">
-                              <a:latin typeface="Cambria Math" panose="02040503050406030204" pitchFamily="18" charset="0"/>
-                            </a:rPr>
-                            <m:t>83</m:t>
+                            <m:t>−83</m:t>
                           </m:r>
                         </m:num>
                         <m:den>
@@ -30455,25 +29809,7 @@
                         <a:rPr lang="en-US" sz="2000" i="1">
                           <a:latin typeface="Cambria Math" panose="02040503050406030204" pitchFamily="18" charset="0"/>
                         </a:rPr>
-                        <m:t>=−</m:t>
-                      </m:r>
-                      <m:r>
-                        <a:rPr lang="en-US" sz="2000" i="1">
-                          <a:latin typeface="Cambria Math" panose="02040503050406030204" pitchFamily="18" charset="0"/>
-                        </a:rPr>
-                        <m:t>10</m:t>
-                      </m:r>
-                      <m:r>
-                        <a:rPr lang="en-US" sz="2000" i="1">
-                          <a:latin typeface="Cambria Math" panose="02040503050406030204" pitchFamily="18" charset="0"/>
-                        </a:rPr>
-                        <m:t>.</m:t>
-                      </m:r>
-                      <m:r>
-                        <a:rPr lang="en-US" sz="2000" i="1">
-                          <a:latin typeface="Cambria Math" panose="02040503050406030204" pitchFamily="18" charset="0"/>
-                        </a:rPr>
-                        <m:t>375</m:t>
+                        <m:t>=−10.375</m:t>
                       </m:r>
                     </m:oMath>
                   </m:oMathPara>
@@ -30958,13 +30294,7 @@
                             <a:rPr lang="en-US" sz="2000">
                               <a:latin typeface="Cambria Math" panose="02040503050406030204" pitchFamily="18" charset="0"/>
                             </a:rPr>
-                            <m:t>2</m:t>
-                          </m:r>
-                          <m:r>
-                            <a:rPr lang="en-US" sz="2000">
-                              <a:latin typeface="Cambria Math" panose="02040503050406030204" pitchFamily="18" charset="0"/>
-                            </a:rPr>
-                            <m:t> </m:t>
+                            <m:t>2 </m:t>
                           </m:r>
                         </m:sub>
                       </m:sSub>
@@ -31289,13 +30619,7 @@
                             <a:rPr lang="en-US" sz="2000">
                               <a:latin typeface="Cambria Math" panose="02040503050406030204" pitchFamily="18" charset="0"/>
                             </a:rPr>
-                            <m:t>−</m:t>
-                          </m:r>
-                          <m:r>
-                            <a:rPr lang="en-US" sz="2000">
-                              <a:latin typeface="Cambria Math" panose="02040503050406030204" pitchFamily="18" charset="0"/>
-                            </a:rPr>
-                            <m:t>1</m:t>
+                            <m:t>−1</m:t>
                           </m:r>
                         </m:sup>
                       </m:sSup>
@@ -31341,13 +30665,7 @@
                             <a:rPr lang="en-US" sz="2000">
                               <a:latin typeface="Cambria Math" panose="02040503050406030204" pitchFamily="18" charset="0"/>
                             </a:rPr>
-                            <m:t>−</m:t>
-                          </m:r>
-                          <m:r>
-                            <a:rPr lang="en-US" sz="2000">
-                              <a:latin typeface="Cambria Math" panose="02040503050406030204" pitchFamily="18" charset="0"/>
-                            </a:rPr>
-                            <m:t>2</m:t>
+                            <m:t>−2</m:t>
                           </m:r>
                         </m:sup>
                       </m:sSup>
@@ -31393,13 +30711,7 @@
                             <a:rPr lang="en-US" sz="2000">
                               <a:latin typeface="Cambria Math" panose="02040503050406030204" pitchFamily="18" charset="0"/>
                             </a:rPr>
-                            <m:t>−</m:t>
-                          </m:r>
-                          <m:r>
-                            <a:rPr lang="en-US" sz="2000">
-                              <a:latin typeface="Cambria Math" panose="02040503050406030204" pitchFamily="18" charset="0"/>
-                            </a:rPr>
-                            <m:t>3</m:t>
+                            <m:t>−3</m:t>
                           </m:r>
                         </m:sup>
                       </m:sSup>
@@ -31439,25 +30751,7 @@
                         <a:rPr lang="en-US" altLang="zh-CN" sz="2000">
                           <a:latin typeface="Cambria Math" panose="02040503050406030204" pitchFamily="18" charset="0"/>
                         </a:rPr>
-                        <m:t>−</m:t>
-                      </m:r>
-                      <m:r>
-                        <a:rPr lang="en-US" altLang="zh-CN" sz="2000">
-                          <a:latin typeface="Cambria Math" panose="02040503050406030204" pitchFamily="18" charset="0"/>
-                        </a:rPr>
-                        <m:t>10</m:t>
-                      </m:r>
-                      <m:r>
-                        <a:rPr lang="en-US" altLang="zh-CN" sz="2000">
-                          <a:latin typeface="Cambria Math" panose="02040503050406030204" pitchFamily="18" charset="0"/>
-                        </a:rPr>
-                        <m:t>.</m:t>
-                      </m:r>
-                      <m:r>
-                        <a:rPr lang="en-US" altLang="zh-CN" sz="2000">
-                          <a:latin typeface="Cambria Math" panose="02040503050406030204" pitchFamily="18" charset="0"/>
-                        </a:rPr>
-                        <m:t>375</m:t>
+                        <m:t>−10.375</m:t>
                       </m:r>
                     </m:oMath>
                   </m:oMathPara>
@@ -32248,19 +31542,7 @@
                         <a:rPr lang="en-US" sz="2400">
                           <a:latin typeface="Cambria Math"/>
                         </a:rPr>
-                        <m:t>01</m:t>
-                      </m:r>
-                      <m:r>
-                        <a:rPr lang="en-US" sz="2400">
-                          <a:latin typeface="Cambria Math"/>
-                        </a:rPr>
-                        <m:t>.</m:t>
-                      </m:r>
-                      <m:r>
-                        <a:rPr lang="en-US" sz="2400">
-                          <a:latin typeface="Cambria Math"/>
-                        </a:rPr>
-                        <m:t>10</m:t>
+                        <m:t>01.10</m:t>
                       </m:r>
                       <m:sSub>
                         <m:sSubPr>
@@ -32283,13 +31565,7 @@
                             <a:rPr lang="en-US" sz="2400">
                               <a:latin typeface="Cambria Math"/>
                             </a:rPr>
-                            <m:t>2</m:t>
-                          </m:r>
-                          <m:r>
-                            <a:rPr lang="en-US" sz="2400">
-                              <a:latin typeface="Cambria Math"/>
-                            </a:rPr>
-                            <m:t> </m:t>
+                            <m:t>2 </m:t>
                           </m:r>
                         </m:sub>
                       </m:sSub>
@@ -32382,13 +31658,7 @@
                             <a:rPr lang="en-US" sz="2400" i="1">
                               <a:latin typeface="Cambria Math"/>
                             </a:rPr>
-                            <m:t>−</m:t>
-                          </m:r>
-                          <m:r>
-                            <a:rPr lang="en-US" sz="2400" i="1">
-                              <a:latin typeface="Cambria Math"/>
-                            </a:rPr>
-                            <m:t>3</m:t>
+                            <m:t>−3</m:t>
                           </m:r>
                         </m:sup>
                       </m:sSup>
@@ -32485,25 +31755,7 @@
                         <a:rPr lang="en-US" sz="2400">
                           <a:latin typeface="Cambria Math"/>
                         </a:rPr>
-                        <m:t>=</m:t>
-                      </m:r>
-                      <m:r>
-                        <a:rPr lang="en-US" sz="2400">
-                          <a:latin typeface="Cambria Math"/>
-                        </a:rPr>
-                        <m:t>21</m:t>
-                      </m:r>
-                      <m:r>
-                        <a:rPr lang="en-US" sz="2400">
-                          <a:latin typeface="Cambria Math"/>
-                        </a:rPr>
-                        <m:t>+</m:t>
-                      </m:r>
-                      <m:r>
-                        <a:rPr lang="en-US" sz="2400">
-                          <a:latin typeface="Cambria Math"/>
-                        </a:rPr>
-                        <m:t>5</m:t>
+                        <m:t>=21+5</m:t>
                       </m:r>
                       <m:r>
                         <a:rPr lang="en-US" sz="2400" i="1">
@@ -32532,13 +31784,7 @@
                             <a:rPr lang="en-US" sz="2400" i="1">
                               <a:latin typeface="Cambria Math"/>
                             </a:rPr>
-                            <m:t>−</m:t>
-                          </m:r>
-                          <m:r>
-                            <a:rPr lang="en-US" sz="2400" i="1">
-                              <a:latin typeface="Cambria Math"/>
-                            </a:rPr>
-                            <m:t>3</m:t>
+                            <m:t>−3</m:t>
                           </m:r>
                         </m:sup>
                       </m:sSup>
@@ -32635,25 +31881,7 @@
                         <a:rPr lang="en-US" sz="2400">
                           <a:latin typeface="Cambria Math"/>
                         </a:rPr>
-                        <m:t>=</m:t>
-                      </m:r>
-                      <m:r>
-                        <a:rPr lang="en-US" sz="2400">
-                          <a:latin typeface="Cambria Math"/>
-                        </a:rPr>
-                        <m:t>21</m:t>
-                      </m:r>
-                      <m:r>
-                        <a:rPr lang="en-US" sz="2400">
-                          <a:latin typeface="Cambria Math"/>
-                        </a:rPr>
-                        <m:t>.</m:t>
-                      </m:r>
-                      <m:r>
-                        <a:rPr lang="en-US" sz="2400">
-                          <a:latin typeface="Cambria Math"/>
-                        </a:rPr>
-                        <m:t>625</m:t>
+                        <m:t>=21.625</m:t>
                       </m:r>
                     </m:oMath>
                   </m:oMathPara>
@@ -32754,19 +31982,7 @@
                         <a:rPr lang="en-US" sz="2400">
                           <a:latin typeface="Cambria Math"/>
                         </a:rPr>
-                        <m:t>01</m:t>
-                      </m:r>
-                      <m:r>
-                        <a:rPr lang="en-US" sz="2400">
-                          <a:latin typeface="Cambria Math"/>
-                        </a:rPr>
-                        <m:t>.</m:t>
-                      </m:r>
-                      <m:r>
-                        <a:rPr lang="en-US" sz="2400">
-                          <a:latin typeface="Cambria Math"/>
-                        </a:rPr>
-                        <m:t>10</m:t>
+                        <m:t>01.10</m:t>
                       </m:r>
                       <m:sSub>
                         <m:sSubPr>
@@ -32789,13 +32005,7 @@
                             <a:rPr lang="en-US" sz="2400">
                               <a:latin typeface="Cambria Math"/>
                             </a:rPr>
-                            <m:t>2</m:t>
-                          </m:r>
-                          <m:r>
-                            <a:rPr lang="en-US" sz="2400">
-                              <a:latin typeface="Cambria Math"/>
-                            </a:rPr>
-                            <m:t> </m:t>
+                            <m:t>2 </m:t>
                           </m:r>
                         </m:sub>
                       </m:sSub>
@@ -32888,13 +32098,7 @@
                             <a:rPr lang="en-US" sz="2400" i="1">
                               <a:latin typeface="Cambria Math"/>
                             </a:rPr>
-                            <m:t>−</m:t>
-                          </m:r>
-                          <m:r>
-                            <a:rPr lang="en-US" sz="2400" i="1">
-                              <a:latin typeface="Cambria Math"/>
-                            </a:rPr>
-                            <m:t>3</m:t>
+                            <m:t>−3</m:t>
                           </m:r>
                         </m:sup>
                       </m:sSup>
@@ -32997,25 +32201,13 @@
                         <a:rPr lang="en-US" sz="2400" b="0" i="0" smtClean="0">
                           <a:latin typeface="Cambria Math" panose="02040503050406030204" pitchFamily="18" charset="0"/>
                         </a:rPr>
-                        <m:t>−</m:t>
-                      </m:r>
-                      <m:r>
-                        <a:rPr lang="en-US" sz="2400" b="0" i="0" smtClean="0">
-                          <a:latin typeface="Cambria Math" panose="02040503050406030204" pitchFamily="18" charset="0"/>
-                        </a:rPr>
-                        <m:t>11</m:t>
+                        <m:t>−11</m:t>
                       </m:r>
                       <m:r>
                         <a:rPr lang="en-US" sz="2400">
                           <a:latin typeface="Cambria Math"/>
                         </a:rPr>
-                        <m:t>+</m:t>
-                      </m:r>
-                      <m:r>
-                        <a:rPr lang="en-US" sz="2400">
-                          <a:latin typeface="Cambria Math"/>
-                        </a:rPr>
-                        <m:t>5</m:t>
+                        <m:t>+5</m:t>
                       </m:r>
                       <m:r>
                         <a:rPr lang="en-US" sz="2400" i="1">
@@ -33044,13 +32236,7 @@
                             <a:rPr lang="en-US" sz="2400" i="1">
                               <a:latin typeface="Cambria Math"/>
                             </a:rPr>
-                            <m:t>−</m:t>
-                          </m:r>
-                          <m:r>
-                            <a:rPr lang="en-US" sz="2400" i="1">
-                              <a:latin typeface="Cambria Math"/>
-                            </a:rPr>
-                            <m:t>3</m:t>
+                            <m:t>−3</m:t>
                           </m:r>
                         </m:sup>
                       </m:sSup>
@@ -33153,25 +32339,7 @@
                         <a:rPr lang="en-US" sz="2400" b="0" i="0" smtClean="0">
                           <a:latin typeface="Cambria Math" panose="02040503050406030204" pitchFamily="18" charset="0"/>
                         </a:rPr>
-                        <m:t>−</m:t>
-                      </m:r>
-                      <m:r>
-                        <a:rPr lang="en-US" sz="2400" b="0" i="0" smtClean="0">
-                          <a:latin typeface="Cambria Math" panose="02040503050406030204" pitchFamily="18" charset="0"/>
-                        </a:rPr>
-                        <m:t>10</m:t>
-                      </m:r>
-                      <m:r>
-                        <a:rPr lang="en-US" sz="2400" b="0" i="0" smtClean="0">
-                          <a:latin typeface="Cambria Math" panose="02040503050406030204" pitchFamily="18" charset="0"/>
-                        </a:rPr>
-                        <m:t>.</m:t>
-                      </m:r>
-                      <m:r>
-                        <a:rPr lang="en-US" sz="2400" b="0" i="0" smtClean="0">
-                          <a:latin typeface="Cambria Math" panose="02040503050406030204" pitchFamily="18" charset="0"/>
-                        </a:rPr>
-                        <m:t>375</m:t>
+                        <m:t>−10.375</m:t>
                       </m:r>
                     </m:oMath>
                   </m:oMathPara>
@@ -33699,49 +32867,7 @@
                       <a:rPr lang="en-US" i="1">
                         <a:latin typeface="Cambria Math" panose="02040503050406030204" pitchFamily="18" charset="0"/>
                       </a:rPr>
-                      <m:t>=−</m:t>
-                    </m:r>
-                    <m:r>
-                      <a:rPr lang="en-US" i="1">
-                        <a:latin typeface="Cambria Math" panose="02040503050406030204" pitchFamily="18" charset="0"/>
-                      </a:rPr>
-                      <m:t>16</m:t>
-                    </m:r>
-                    <m:r>
-                      <a:rPr lang="en-US" i="1">
-                        <a:latin typeface="Cambria Math" panose="02040503050406030204" pitchFamily="18" charset="0"/>
-                      </a:rPr>
-                      <m:t>+</m:t>
-                    </m:r>
-                    <m:r>
-                      <a:rPr lang="en-US" i="1">
-                        <a:latin typeface="Cambria Math" panose="02040503050406030204" pitchFamily="18" charset="0"/>
-                      </a:rPr>
-                      <m:t>4</m:t>
-                    </m:r>
-                    <m:r>
-                      <a:rPr lang="en-US" i="1">
-                        <a:latin typeface="Cambria Math" panose="02040503050406030204" pitchFamily="18" charset="0"/>
-                      </a:rPr>
-                      <m:t>+</m:t>
-                    </m:r>
-                    <m:r>
-                      <a:rPr lang="en-US" i="1">
-                        <a:latin typeface="Cambria Math" panose="02040503050406030204" pitchFamily="18" charset="0"/>
-                      </a:rPr>
-                      <m:t>1</m:t>
-                    </m:r>
-                    <m:r>
-                      <a:rPr lang="en-US" i="1">
-                        <a:latin typeface="Cambria Math" panose="02040503050406030204" pitchFamily="18" charset="0"/>
-                      </a:rPr>
-                      <m:t>=−</m:t>
-                    </m:r>
-                    <m:r>
-                      <a:rPr lang="en-US" i="1">
-                        <a:latin typeface="Cambria Math" panose="02040503050406030204" pitchFamily="18" charset="0"/>
-                      </a:rPr>
-                      <m:t>11</m:t>
+                      <m:t>=−16+4+1=−11</m:t>
                     </m:r>
                   </m:oMath>
                 </a14:m>
@@ -35203,34 +34329,7 @@
                         </a:solidFill>
                         <a:latin typeface="Cambria Math" panose="02040503050406030204" pitchFamily="18" charset="0"/>
                       </a:rPr>
-                      <m:t>−</m:t>
-                    </m:r>
-                    <m:r>
-                      <a:rPr lang="en-US" sz="2000" i="1">
-                        <a:solidFill>
-                          <a:srgbClr val="0000FF"/>
-                        </a:solidFill>
-                        <a:latin typeface="Cambria Math" panose="02040503050406030204" pitchFamily="18" charset="0"/>
-                      </a:rPr>
-                      <m:t>12867</m:t>
-                    </m:r>
-                    <m:r>
-                      <a:rPr lang="en-US" sz="2000" i="1">
-                        <a:solidFill>
-                          <a:srgbClr val="0000FF"/>
-                        </a:solidFill>
-                        <a:latin typeface="Cambria Math" panose="02040503050406030204" pitchFamily="18" charset="0"/>
-                      </a:rPr>
-                      <m:t>.</m:t>
-                    </m:r>
-                    <m:r>
-                      <a:rPr lang="en-US" sz="2000" i="1">
-                        <a:solidFill>
-                          <a:srgbClr val="0000FF"/>
-                        </a:solidFill>
-                        <a:latin typeface="Cambria Math" panose="02040503050406030204" pitchFamily="18" charset="0"/>
-                      </a:rPr>
-                      <m:t>964928</m:t>
+                      <m:t>−12867.964928</m:t>
                     </m:r>
                   </m:oMath>
                 </a14:m>
@@ -35271,25 +34370,7 @@
                           <a:rPr lang="en-US" sz="2000" i="1">
                             <a:latin typeface="Cambria Math" panose="02040503050406030204" pitchFamily="18" charset="0"/>
                           </a:rPr>
-                          <m:t>−</m:t>
-                        </m:r>
-                        <m:r>
-                          <a:rPr lang="en-US" sz="2000" i="1">
-                            <a:latin typeface="Cambria Math" panose="02040503050406030204" pitchFamily="18" charset="0"/>
-                          </a:rPr>
-                          <m:t>12867</m:t>
-                        </m:r>
-                        <m:r>
-                          <a:rPr lang="en-US" sz="2000" i="1">
-                            <a:latin typeface="Cambria Math" panose="02040503050406030204" pitchFamily="18" charset="0"/>
-                          </a:rPr>
-                          <m:t>.</m:t>
-                        </m:r>
-                        <m:r>
-                          <a:rPr lang="en-US" sz="2000" i="1">
-                            <a:latin typeface="Cambria Math" panose="02040503050406030204" pitchFamily="18" charset="0"/>
-                          </a:rPr>
-                          <m:t>964928</m:t>
+                          <m:t>−12867.964928</m:t>
                         </m:r>
                         <m:r>
                           <a:rPr lang="en-US" sz="2000">

--- a/PPTs/Ch12_13_Fixed_Floating_Point_Numbers.pptx
+++ b/PPTs/Ch12_13_Fixed_Floating_Point_Numbers.pptx
@@ -160,7 +160,7 @@
 <file path=ppt/revisionInfo.xml><?xml version="1.0" encoding="utf-8"?>
 <p1510:revInfo xmlns:a="http://schemas.openxmlformats.org/drawingml/2006/main" xmlns:r="http://schemas.openxmlformats.org/officeDocument/2006/relationships" xmlns:p1510="http://schemas.microsoft.com/office/powerpoint/2015/10/main">
   <p1510:revLst>
-    <p1510:client id="{67564324-3CBA-4E84-95E9-F69DCA3B5F12}" v="435" dt="2025-10-26T16:47:46.641"/>
+    <p1510:client id="{67564324-3CBA-4E84-95E9-F69DCA3B5F12}" v="568" dt="2025-11-02T15:18:19.595"/>
   </p1510:revLst>
 </p1510:revInfo>
 </file>
@@ -169,8 +169,8 @@
 <pc:chgInfo xmlns:a="http://schemas.openxmlformats.org/drawingml/2006/main" xmlns:r="http://schemas.openxmlformats.org/officeDocument/2006/relationships" xmlns:ac="http://schemas.microsoft.com/office/drawing/2013/main/command" xmlns:pc="http://schemas.microsoft.com/office/powerpoint/2013/main/command">
   <pc:docChgLst>
     <pc:chgData name="Zonghua Gu" userId="9a7e1853e1951ef5" providerId="LiveId" clId="{CF1FAA12-072C-4ED5-BA76-0FFFAEFDB88A}"/>
-    <pc:docChg chg="undo custSel addSld delSld modSld sldOrd">
-      <pc:chgData name="Zonghua Gu" userId="9a7e1853e1951ef5" providerId="LiveId" clId="{CF1FAA12-072C-4ED5-BA76-0FFFAEFDB88A}" dt="2025-10-26T19:32:42.828" v="1192" actId="21"/>
+    <pc:docChg chg="undo redo custSel addSld delSld modSld sldOrd">
+      <pc:chgData name="Zonghua Gu" userId="9a7e1853e1951ef5" providerId="LiveId" clId="{CF1FAA12-072C-4ED5-BA76-0FFFAEFDB88A}" dt="2025-11-02T15:24:54.877" v="1426" actId="1076"/>
       <pc:docMkLst>
         <pc:docMk/>
       </pc:docMkLst>
@@ -196,7 +196,7 @@
         </pc:sldMkLst>
       </pc:sldChg>
       <pc:sldChg chg="modSp add mod">
-        <pc:chgData name="Zonghua Gu" userId="9a7e1853e1951ef5" providerId="LiveId" clId="{CF1FAA12-072C-4ED5-BA76-0FFFAEFDB88A}" dt="2025-10-17T23:22:59.711" v="1012" actId="20577"/>
+        <pc:chgData name="Zonghua Gu" userId="9a7e1853e1951ef5" providerId="LiveId" clId="{CF1FAA12-072C-4ED5-BA76-0FFFAEFDB88A}" dt="2025-11-02T15:24:54.877" v="1426" actId="1076"/>
         <pc:sldMkLst>
           <pc:docMk/>
           <pc:sldMk cId="2669434976" sldId="261"/>
@@ -210,7 +210,7 @@
           </ac:spMkLst>
         </pc:spChg>
         <pc:spChg chg="mod">
-          <ac:chgData name="Zonghua Gu" userId="9a7e1853e1951ef5" providerId="LiveId" clId="{CF1FAA12-072C-4ED5-BA76-0FFFAEFDB88A}" dt="2025-10-17T23:22:59.711" v="1012" actId="20577"/>
+          <ac:chgData name="Zonghua Gu" userId="9a7e1853e1951ef5" providerId="LiveId" clId="{CF1FAA12-072C-4ED5-BA76-0FFFAEFDB88A}" dt="2025-11-02T15:24:54.877" v="1426" actId="1076"/>
           <ac:spMkLst>
             <pc:docMk/>
             <pc:sldMk cId="2669434976" sldId="261"/>
@@ -219,7 +219,7 @@
         </pc:spChg>
       </pc:sldChg>
       <pc:sldChg chg="addSp modSp add mod ord">
-        <pc:chgData name="Zonghua Gu" userId="9a7e1853e1951ef5" providerId="LiveId" clId="{CF1FAA12-072C-4ED5-BA76-0FFFAEFDB88A}" dt="2025-10-04T21:05:11.297" v="212" actId="20577"/>
+        <pc:chgData name="Zonghua Gu" userId="9a7e1853e1951ef5" providerId="LiveId" clId="{CF1FAA12-072C-4ED5-BA76-0FFFAEFDB88A}" dt="2025-11-02T14:59:33.253" v="1204" actId="1076"/>
         <pc:sldMkLst>
           <pc:docMk/>
           <pc:sldMk cId="2690786522" sldId="263"/>
@@ -257,7 +257,7 @@
           </ac:spMkLst>
         </pc:spChg>
         <pc:spChg chg="add mod">
-          <ac:chgData name="Zonghua Gu" userId="9a7e1853e1951ef5" providerId="LiveId" clId="{CF1FAA12-072C-4ED5-BA76-0FFFAEFDB88A}" dt="2025-10-04T21:03:34.552" v="157" actId="1076"/>
+          <ac:chgData name="Zonghua Gu" userId="9a7e1853e1951ef5" providerId="LiveId" clId="{CF1FAA12-072C-4ED5-BA76-0FFFAEFDB88A}" dt="2025-11-02T14:59:33.253" v="1204" actId="1076"/>
           <ac:spMkLst>
             <pc:docMk/>
             <pc:sldMk cId="2690786522" sldId="263"/>
@@ -265,7 +265,7 @@
           </ac:spMkLst>
         </pc:spChg>
         <pc:spChg chg="add mod">
-          <ac:chgData name="Zonghua Gu" userId="9a7e1853e1951ef5" providerId="LiveId" clId="{CF1FAA12-072C-4ED5-BA76-0FFFAEFDB88A}" dt="2025-10-04T21:03:34.552" v="157" actId="1076"/>
+          <ac:chgData name="Zonghua Gu" userId="9a7e1853e1951ef5" providerId="LiveId" clId="{CF1FAA12-072C-4ED5-BA76-0FFFAEFDB88A}" dt="2025-11-02T14:59:33.253" v="1204" actId="1076"/>
           <ac:spMkLst>
             <pc:docMk/>
             <pc:sldMk cId="2690786522" sldId="263"/>
@@ -330,32 +330,48 @@
         </pc:picChg>
       </pc:sldChg>
       <pc:sldChg chg="modSp mod">
-        <pc:chgData name="Zonghua Gu" userId="9a7e1853e1951ef5" providerId="LiveId" clId="{CF1FAA12-072C-4ED5-BA76-0FFFAEFDB88A}" dt="2025-10-04T20:43:43.566" v="126" actId="14100"/>
+        <pc:chgData name="Zonghua Gu" userId="9a7e1853e1951ef5" providerId="LiveId" clId="{CF1FAA12-072C-4ED5-BA76-0FFFAEFDB88A}" dt="2025-11-02T15:03:21.949" v="1271" actId="20577"/>
         <pc:sldMkLst>
           <pc:docMk/>
           <pc:sldMk cId="1922114052" sldId="264"/>
         </pc:sldMkLst>
         <pc:spChg chg="mod">
-          <ac:chgData name="Zonghua Gu" userId="9a7e1853e1951ef5" providerId="LiveId" clId="{CF1FAA12-072C-4ED5-BA76-0FFFAEFDB88A}" dt="2025-10-04T20:43:43.566" v="126" actId="14100"/>
+          <ac:chgData name="Zonghua Gu" userId="9a7e1853e1951ef5" providerId="LiveId" clId="{CF1FAA12-072C-4ED5-BA76-0FFFAEFDB88A}" dt="2025-11-02T15:02:34.666" v="1248" actId="20577"/>
           <ac:spMkLst>
             <pc:docMk/>
             <pc:sldMk cId="1922114052" sldId="264"/>
             <ac:spMk id="4" creationId="{00000000-0000-0000-0000-000000000000}"/>
           </ac:spMkLst>
         </pc:spChg>
+        <pc:spChg chg="mod">
+          <ac:chgData name="Zonghua Gu" userId="9a7e1853e1951ef5" providerId="LiveId" clId="{CF1FAA12-072C-4ED5-BA76-0FFFAEFDB88A}" dt="2025-11-02T15:03:21.949" v="1271" actId="20577"/>
+          <ac:spMkLst>
+            <pc:docMk/>
+            <pc:sldMk cId="1922114052" sldId="264"/>
+            <ac:spMk id="5" creationId="{00000000-0000-0000-0000-000000000000}"/>
+          </ac:spMkLst>
+        </pc:spChg>
       </pc:sldChg>
       <pc:sldChg chg="modSp mod">
-        <pc:chgData name="Zonghua Gu" userId="9a7e1853e1951ef5" providerId="LiveId" clId="{CF1FAA12-072C-4ED5-BA76-0FFFAEFDB88A}" dt="2025-10-04T20:42:58.706" v="123" actId="20577"/>
+        <pc:chgData name="Zonghua Gu" userId="9a7e1853e1951ef5" providerId="LiveId" clId="{CF1FAA12-072C-4ED5-BA76-0FFFAEFDB88A}" dt="2025-11-02T15:03:18.690" v="1270" actId="14100"/>
         <pc:sldMkLst>
           <pc:docMk/>
           <pc:sldMk cId="3002516707" sldId="265"/>
         </pc:sldMkLst>
         <pc:spChg chg="mod">
-          <ac:chgData name="Zonghua Gu" userId="9a7e1853e1951ef5" providerId="LiveId" clId="{CF1FAA12-072C-4ED5-BA76-0FFFAEFDB88A}" dt="2025-10-04T20:42:58.706" v="123" actId="20577"/>
+          <ac:chgData name="Zonghua Gu" userId="9a7e1853e1951ef5" providerId="LiveId" clId="{CF1FAA12-072C-4ED5-BA76-0FFFAEFDB88A}" dt="2025-11-02T15:02:40.849" v="1250" actId="20577"/>
           <ac:spMkLst>
             <pc:docMk/>
             <pc:sldMk cId="3002516707" sldId="265"/>
             <ac:spMk id="4" creationId="{00000000-0000-0000-0000-000000000000}"/>
+          </ac:spMkLst>
+        </pc:spChg>
+        <pc:spChg chg="mod">
+          <ac:chgData name="Zonghua Gu" userId="9a7e1853e1951ef5" providerId="LiveId" clId="{CF1FAA12-072C-4ED5-BA76-0FFFAEFDB88A}" dt="2025-11-02T15:03:18.690" v="1270" actId="14100"/>
+          <ac:spMkLst>
+            <pc:docMk/>
+            <pc:sldMk cId="3002516707" sldId="265"/>
+            <ac:spMk id="5" creationId="{00000000-0000-0000-0000-000000000000}"/>
           </ac:spMkLst>
         </pc:spChg>
       </pc:sldChg>
@@ -394,8 +410,8 @@
           <pc:sldMk cId="4199759654" sldId="280"/>
         </pc:sldMkLst>
       </pc:sldChg>
-      <pc:sldChg chg="modSp add mod">
-        <pc:chgData name="Zonghua Gu" userId="9a7e1853e1951ef5" providerId="LiveId" clId="{CF1FAA12-072C-4ED5-BA76-0FFFAEFDB88A}" dt="2025-10-26T16:50:30.808" v="1183" actId="113"/>
+      <pc:sldChg chg="modSp add mod ord">
+        <pc:chgData name="Zonghua Gu" userId="9a7e1853e1951ef5" providerId="LiveId" clId="{CF1FAA12-072C-4ED5-BA76-0FFFAEFDB88A}" dt="2025-11-02T15:06:54.689" v="1278" actId="20578"/>
         <pc:sldMkLst>
           <pc:docMk/>
           <pc:sldMk cId="3761897037" sldId="281"/>
@@ -470,7 +486,7 @@
         </pc:spChg>
       </pc:sldChg>
       <pc:sldChg chg="modSp new mod">
-        <pc:chgData name="Zonghua Gu" userId="9a7e1853e1951ef5" providerId="LiveId" clId="{CF1FAA12-072C-4ED5-BA76-0FFFAEFDB88A}" dt="2025-10-04T21:12:51.990" v="509" actId="27636"/>
+        <pc:chgData name="Zonghua Gu" userId="9a7e1853e1951ef5" providerId="LiveId" clId="{CF1FAA12-072C-4ED5-BA76-0FFFAEFDB88A}" dt="2025-11-02T15:11:14.203" v="1317" actId="20577"/>
         <pc:sldMkLst>
           <pc:docMk/>
           <pc:sldMk cId="3161310983" sldId="735"/>
@@ -484,7 +500,7 @@
           </ac:spMkLst>
         </pc:spChg>
         <pc:spChg chg="mod">
-          <ac:chgData name="Zonghua Gu" userId="9a7e1853e1951ef5" providerId="LiveId" clId="{CF1FAA12-072C-4ED5-BA76-0FFFAEFDB88A}" dt="2025-10-04T21:12:32.446" v="497" actId="108"/>
+          <ac:chgData name="Zonghua Gu" userId="9a7e1853e1951ef5" providerId="LiveId" clId="{CF1FAA12-072C-4ED5-BA76-0FFFAEFDB88A}" dt="2025-11-02T15:11:14.203" v="1317" actId="20577"/>
           <ac:spMkLst>
             <pc:docMk/>
             <pc:sldMk cId="3161310983" sldId="735"/>
@@ -492,8 +508,8 @@
           </ac:spMkLst>
         </pc:spChg>
       </pc:sldChg>
-      <pc:sldChg chg="modSp add mod">
-        <pc:chgData name="Zonghua Gu" userId="9a7e1853e1951ef5" providerId="LiveId" clId="{CF1FAA12-072C-4ED5-BA76-0FFFAEFDB88A}" dt="2025-10-26T16:50:28.602" v="1182" actId="113"/>
+      <pc:sldChg chg="addSp delSp modSp add mod">
+        <pc:chgData name="Zonghua Gu" userId="9a7e1853e1951ef5" providerId="LiveId" clId="{CF1FAA12-072C-4ED5-BA76-0FFFAEFDB88A}" dt="2025-11-02T15:18:19.595" v="1375" actId="20577"/>
         <pc:sldMkLst>
           <pc:docMk/>
           <pc:sldMk cId="2896628209" sldId="736"/>
@@ -506,6 +522,30 @@
             <ac:spMk id="2" creationId="{00000000-0000-0000-0000-000000000000}"/>
           </ac:spMkLst>
         </pc:spChg>
+        <pc:spChg chg="mod">
+          <ac:chgData name="Zonghua Gu" userId="9a7e1853e1951ef5" providerId="LiveId" clId="{CF1FAA12-072C-4ED5-BA76-0FFFAEFDB88A}" dt="2025-11-02T15:18:19.595" v="1375" actId="20577"/>
+          <ac:spMkLst>
+            <pc:docMk/>
+            <pc:sldMk cId="2896628209" sldId="736"/>
+            <ac:spMk id="4" creationId="{00000000-0000-0000-0000-000000000000}"/>
+          </ac:spMkLst>
+        </pc:spChg>
+        <pc:picChg chg="add mod">
+          <ac:chgData name="Zonghua Gu" userId="9a7e1853e1951ef5" providerId="LiveId" clId="{CF1FAA12-072C-4ED5-BA76-0FFFAEFDB88A}" dt="2025-11-02T15:07:56.158" v="1292" actId="1076"/>
+          <ac:picMkLst>
+            <pc:docMk/>
+            <pc:sldMk cId="2896628209" sldId="736"/>
+            <ac:picMk id="5" creationId="{00000000-0000-0000-0000-000000000000}"/>
+          </ac:picMkLst>
+        </pc:picChg>
+        <pc:picChg chg="del">
+          <ac:chgData name="Zonghua Gu" userId="9a7e1853e1951ef5" providerId="LiveId" clId="{CF1FAA12-072C-4ED5-BA76-0FFFAEFDB88A}" dt="2025-11-02T15:07:08.190" v="1281" actId="21"/>
+          <ac:picMkLst>
+            <pc:docMk/>
+            <pc:sldMk cId="2896628209" sldId="736"/>
+            <ac:picMk id="7" creationId="{00000000-0000-0000-0000-000000000000}"/>
+          </ac:picMkLst>
+        </pc:picChg>
       </pc:sldChg>
       <pc:sldChg chg="add">
         <pc:chgData name="Zonghua Gu" userId="9a7e1853e1951ef5" providerId="LiveId" clId="{CF1FAA12-072C-4ED5-BA76-0FFFAEFDB88A}" dt="2025-10-04T21:14:03.366" v="511"/>
@@ -6687,7 +6727,7 @@
             <a:fld id="{BD4F56A7-3CDE-194F-B9AF-D598FBBF1989}" type="datetimeFigureOut">
               <a:rPr lang="en-US" smtClean="0"/>
               <a:pPr/>
-              <a:t>10/26/2025</a:t>
+              <a:t>11/2/2025</a:t>
             </a:fld>
             <a:endParaRPr lang="en-US"/>
           </a:p>
@@ -6855,7 +6895,7 @@
             <a:fld id="{1E52AD58-60CE-E948-9CBA-0BD7030FC28E}" type="datetimeFigureOut">
               <a:rPr lang="en-US" smtClean="0"/>
               <a:pPr/>
-              <a:t>10/26/2025</a:t>
+              <a:t>11/2/2025</a:t>
             </a:fld>
             <a:endParaRPr lang="en-US"/>
           </a:p>
@@ -7221,6 +7261,115 @@
   <p:cSld>
     <p:spTree>
       <p:nvGrpSpPr>
+        <p:cNvPr id="1" name="">
+          <a:extLst>
+            <a:ext uri="{FF2B5EF4-FFF2-40B4-BE49-F238E27FC236}">
+              <a16:creationId xmlns:a16="http://schemas.microsoft.com/office/drawing/2014/main" id="{44452D85-D859-2CF8-7D62-5A49E921D316}"/>
+            </a:ext>
+          </a:extLst>
+        </p:cNvPr>
+        <p:cNvGrpSpPr/>
+        <p:nvPr/>
+      </p:nvGrpSpPr>
+      <p:grpSpPr>
+        <a:xfrm>
+          <a:off x="0" y="0"/>
+          <a:ext cx="0" cy="0"/>
+          <a:chOff x="0" y="0"/>
+          <a:chExt cx="0" cy="0"/>
+        </a:xfrm>
+      </p:grpSpPr>
+      <p:sp>
+        <p:nvSpPr>
+          <p:cNvPr id="2" name="Slide Image Placeholder 1">
+            <a:extLst>
+              <a:ext uri="{FF2B5EF4-FFF2-40B4-BE49-F238E27FC236}">
+                <a16:creationId xmlns:a16="http://schemas.microsoft.com/office/drawing/2014/main" id="{98DF6E65-26C7-0006-F5A4-55C9D53786AD}"/>
+              </a:ext>
+            </a:extLst>
+          </p:cNvPr>
+          <p:cNvSpPr>
+            <a:spLocks noGrp="1" noRot="1" noChangeAspect="1"/>
+          </p:cNvSpPr>
+          <p:nvPr>
+            <p:ph type="sldImg"/>
+          </p:nvPr>
+        </p:nvSpPr>
+        <p:spPr/>
+      </p:sp>
+      <p:sp>
+        <p:nvSpPr>
+          <p:cNvPr id="3" name="Notes Placeholder 2">
+            <a:extLst>
+              <a:ext uri="{FF2B5EF4-FFF2-40B4-BE49-F238E27FC236}">
+                <a16:creationId xmlns:a16="http://schemas.microsoft.com/office/drawing/2014/main" id="{0D6A1A13-74FB-B694-8E30-7E1DD0742705}"/>
+              </a:ext>
+            </a:extLst>
+          </p:cNvPr>
+          <p:cNvSpPr>
+            <a:spLocks noGrp="1"/>
+          </p:cNvSpPr>
+          <p:nvPr>
+            <p:ph type="body" idx="1"/>
+          </p:nvPr>
+        </p:nvSpPr>
+        <p:spPr/>
+        <p:txBody>
+          <a:bodyPr/>
+          <a:lstStyle/>
+          <a:p>
+            <a:endParaRPr lang="en-US" dirty="0"/>
+          </a:p>
+        </p:txBody>
+      </p:sp>
+      <p:sp>
+        <p:nvSpPr>
+          <p:cNvPr id="4" name="Slide Number Placeholder 3">
+            <a:extLst>
+              <a:ext uri="{FF2B5EF4-FFF2-40B4-BE49-F238E27FC236}">
+                <a16:creationId xmlns:a16="http://schemas.microsoft.com/office/drawing/2014/main" id="{30FC9427-E730-9A2A-12E7-328DE01C1AA9}"/>
+              </a:ext>
+            </a:extLst>
+          </p:cNvPr>
+          <p:cNvSpPr>
+            <a:spLocks noGrp="1"/>
+          </p:cNvSpPr>
+          <p:nvPr>
+            <p:ph type="sldNum" sz="quarter" idx="5"/>
+          </p:nvPr>
+        </p:nvSpPr>
+        <p:spPr/>
+        <p:txBody>
+          <a:bodyPr/>
+          <a:lstStyle/>
+          <a:p>
+            <a:fld id="{D624DF53-3DD3-9F45-9E7E-472B96F1AB81}" type="slidenum">
+              <a:rPr lang="en-US" smtClean="0"/>
+              <a:pPr/>
+              <a:t>21</a:t>
+            </a:fld>
+            <a:endParaRPr lang="en-US"/>
+          </a:p>
+        </p:txBody>
+      </p:sp>
+    </p:spTree>
+    <p:extLst>
+      <p:ext uri="{BB962C8B-B14F-4D97-AF65-F5344CB8AC3E}">
+        <p14:creationId xmlns:p14="http://schemas.microsoft.com/office/powerpoint/2010/main" val="245707839"/>
+      </p:ext>
+    </p:extLst>
+  </p:cSld>
+  <p:clrMapOvr>
+    <a:masterClrMapping/>
+  </p:clrMapOvr>
+</p:notes>
+</file>
+
+<file path=ppt/notesSlides/notesSlide11.xml><?xml version="1.0" encoding="utf-8"?>
+<p:notes xmlns:a="http://schemas.openxmlformats.org/drawingml/2006/main" xmlns:r="http://schemas.openxmlformats.org/officeDocument/2006/relationships" xmlns:p="http://schemas.openxmlformats.org/presentationml/2006/main">
+  <p:cSld>
+    <p:spTree>
+      <p:nvGrpSpPr>
         <p:cNvPr id="1" name=""/>
         <p:cNvGrpSpPr/>
         <p:nvPr/>
@@ -7328,7 +7477,7 @@
 </p:notes>
 </file>
 
-<file path=ppt/notesSlides/notesSlide11.xml><?xml version="1.0" encoding="utf-8"?>
+<file path=ppt/notesSlides/notesSlide12.xml><?xml version="1.0" encoding="utf-8"?>
 <p:notes xmlns:a="http://schemas.openxmlformats.org/drawingml/2006/main" xmlns:r="http://schemas.openxmlformats.org/officeDocument/2006/relationships" xmlns:p="http://schemas.openxmlformats.org/presentationml/2006/main">
   <p:cSld>
     <p:spTree>
@@ -7795,6 +7944,95 @@
           <a:bodyPr/>
           <a:lstStyle/>
           <a:p>
+            <a:r>
+              <a:rPr lang="en-US" b="1" dirty="0"/>
+              <a:t>10000101</a:t>
+            </a:r>
+            <a:endParaRPr lang="en-US" dirty="0"/>
+          </a:p>
+        </p:txBody>
+      </p:sp>
+      <p:sp>
+        <p:nvSpPr>
+          <p:cNvPr id="4" name="Slide Number Placeholder 3"/>
+          <p:cNvSpPr>
+            <a:spLocks noGrp="1"/>
+          </p:cNvSpPr>
+          <p:nvPr>
+            <p:ph type="sldNum" sz="quarter" idx="5"/>
+          </p:nvPr>
+        </p:nvSpPr>
+        <p:spPr/>
+        <p:txBody>
+          <a:bodyPr/>
+          <a:lstStyle/>
+          <a:p>
+            <a:fld id="{D624DF53-3DD3-9F45-9E7E-472B96F1AB81}" type="slidenum">
+              <a:rPr lang="en-US" smtClean="0"/>
+              <a:pPr/>
+              <a:t>15</a:t>
+            </a:fld>
+            <a:endParaRPr lang="en-US"/>
+          </a:p>
+        </p:txBody>
+      </p:sp>
+    </p:spTree>
+    <p:extLst>
+      <p:ext uri="{BB962C8B-B14F-4D97-AF65-F5344CB8AC3E}">
+        <p14:creationId xmlns:p14="http://schemas.microsoft.com/office/powerpoint/2010/main" val="3579015947"/>
+      </p:ext>
+    </p:extLst>
+  </p:cSld>
+  <p:clrMapOvr>
+    <a:masterClrMapping/>
+  </p:clrMapOvr>
+</p:notes>
+</file>
+
+<file path=ppt/notesSlides/notesSlide6.xml><?xml version="1.0" encoding="utf-8"?>
+<p:notes xmlns:a="http://schemas.openxmlformats.org/drawingml/2006/main" xmlns:r="http://schemas.openxmlformats.org/officeDocument/2006/relationships" xmlns:p="http://schemas.openxmlformats.org/presentationml/2006/main">
+  <p:cSld>
+    <p:spTree>
+      <p:nvGrpSpPr>
+        <p:cNvPr id="1" name=""/>
+        <p:cNvGrpSpPr/>
+        <p:nvPr/>
+      </p:nvGrpSpPr>
+      <p:grpSpPr>
+        <a:xfrm>
+          <a:off x="0" y="0"/>
+          <a:ext cx="0" cy="0"/>
+          <a:chOff x="0" y="0"/>
+          <a:chExt cx="0" cy="0"/>
+        </a:xfrm>
+      </p:grpSpPr>
+      <p:sp>
+        <p:nvSpPr>
+          <p:cNvPr id="2" name="Slide Image Placeholder 1"/>
+          <p:cNvSpPr>
+            <a:spLocks noGrp="1" noRot="1" noChangeAspect="1"/>
+          </p:cNvSpPr>
+          <p:nvPr>
+            <p:ph type="sldImg"/>
+          </p:nvPr>
+        </p:nvSpPr>
+        <p:spPr/>
+      </p:sp>
+      <p:sp>
+        <p:nvSpPr>
+          <p:cNvPr id="3" name="Notes Placeholder 2"/>
+          <p:cNvSpPr>
+            <a:spLocks noGrp="1"/>
+          </p:cNvSpPr>
+          <p:nvPr>
+            <p:ph type="body" idx="1"/>
+          </p:nvPr>
+        </p:nvSpPr>
+        <p:spPr/>
+        <p:txBody>
+          <a:bodyPr/>
+          <a:lstStyle/>
+          <a:p>
             <a:endParaRPr lang="en-US" dirty="0"/>
           </a:p>
         </p:txBody>
@@ -7836,7 +8074,7 @@
 </p:notes>
 </file>
 
-<file path=ppt/notesSlides/notesSlide6.xml><?xml version="1.0" encoding="utf-8"?>
+<file path=ppt/notesSlides/notesSlide7.xml><?xml version="1.0" encoding="utf-8"?>
 <p:notes xmlns:a="http://schemas.openxmlformats.org/drawingml/2006/main" xmlns:r="http://schemas.openxmlformats.org/officeDocument/2006/relationships" xmlns:p="http://schemas.openxmlformats.org/presentationml/2006/main">
   <p:cSld>
     <p:spTree>
@@ -7945,7 +8183,7 @@
 </p:notes>
 </file>
 
-<file path=ppt/notesSlides/notesSlide7.xml><?xml version="1.0" encoding="utf-8"?>
+<file path=ppt/notesSlides/notesSlide8.xml><?xml version="1.0" encoding="utf-8"?>
 <p:notes xmlns:a="http://schemas.openxmlformats.org/drawingml/2006/main" xmlns:r="http://schemas.openxmlformats.org/officeDocument/2006/relationships" xmlns:p="http://schemas.openxmlformats.org/presentationml/2006/main">
   <p:cSld>
     <p:spTree>
@@ -8054,7 +8292,7 @@
 </p:notes>
 </file>
 
-<file path=ppt/notesSlides/notesSlide8.xml><?xml version="1.0" encoding="utf-8"?>
+<file path=ppt/notesSlides/notesSlide9.xml><?xml version="1.0" encoding="utf-8"?>
 <p:notes xmlns:a="http://schemas.openxmlformats.org/drawingml/2006/main" xmlns:r="http://schemas.openxmlformats.org/officeDocument/2006/relationships" xmlns:p="http://schemas.openxmlformats.org/presentationml/2006/main">
   <p:cSld>
     <p:spTree>
@@ -8133,115 +8371,6 @@
     <p:extLst>
       <p:ext uri="{BB962C8B-B14F-4D97-AF65-F5344CB8AC3E}">
         <p14:creationId xmlns:p14="http://schemas.microsoft.com/office/powerpoint/2010/main" val="2676423194"/>
-      </p:ext>
-    </p:extLst>
-  </p:cSld>
-  <p:clrMapOvr>
-    <a:masterClrMapping/>
-  </p:clrMapOvr>
-</p:notes>
-</file>
-
-<file path=ppt/notesSlides/notesSlide9.xml><?xml version="1.0" encoding="utf-8"?>
-<p:notes xmlns:a="http://schemas.openxmlformats.org/drawingml/2006/main" xmlns:r="http://schemas.openxmlformats.org/officeDocument/2006/relationships" xmlns:p="http://schemas.openxmlformats.org/presentationml/2006/main">
-  <p:cSld>
-    <p:spTree>
-      <p:nvGrpSpPr>
-        <p:cNvPr id="1" name="">
-          <a:extLst>
-            <a:ext uri="{FF2B5EF4-FFF2-40B4-BE49-F238E27FC236}">
-              <a16:creationId xmlns:a16="http://schemas.microsoft.com/office/drawing/2014/main" id="{44452D85-D859-2CF8-7D62-5A49E921D316}"/>
-            </a:ext>
-          </a:extLst>
-        </p:cNvPr>
-        <p:cNvGrpSpPr/>
-        <p:nvPr/>
-      </p:nvGrpSpPr>
-      <p:grpSpPr>
-        <a:xfrm>
-          <a:off x="0" y="0"/>
-          <a:ext cx="0" cy="0"/>
-          <a:chOff x="0" y="0"/>
-          <a:chExt cx="0" cy="0"/>
-        </a:xfrm>
-      </p:grpSpPr>
-      <p:sp>
-        <p:nvSpPr>
-          <p:cNvPr id="2" name="Slide Image Placeholder 1">
-            <a:extLst>
-              <a:ext uri="{FF2B5EF4-FFF2-40B4-BE49-F238E27FC236}">
-                <a16:creationId xmlns:a16="http://schemas.microsoft.com/office/drawing/2014/main" id="{98DF6E65-26C7-0006-F5A4-55C9D53786AD}"/>
-              </a:ext>
-            </a:extLst>
-          </p:cNvPr>
-          <p:cNvSpPr>
-            <a:spLocks noGrp="1" noRot="1" noChangeAspect="1"/>
-          </p:cNvSpPr>
-          <p:nvPr>
-            <p:ph type="sldImg"/>
-          </p:nvPr>
-        </p:nvSpPr>
-        <p:spPr/>
-      </p:sp>
-      <p:sp>
-        <p:nvSpPr>
-          <p:cNvPr id="3" name="Notes Placeholder 2">
-            <a:extLst>
-              <a:ext uri="{FF2B5EF4-FFF2-40B4-BE49-F238E27FC236}">
-                <a16:creationId xmlns:a16="http://schemas.microsoft.com/office/drawing/2014/main" id="{0D6A1A13-74FB-B694-8E30-7E1DD0742705}"/>
-              </a:ext>
-            </a:extLst>
-          </p:cNvPr>
-          <p:cNvSpPr>
-            <a:spLocks noGrp="1"/>
-          </p:cNvSpPr>
-          <p:nvPr>
-            <p:ph type="body" idx="1"/>
-          </p:nvPr>
-        </p:nvSpPr>
-        <p:spPr/>
-        <p:txBody>
-          <a:bodyPr/>
-          <a:lstStyle/>
-          <a:p>
-            <a:endParaRPr lang="en-US" dirty="0"/>
-          </a:p>
-        </p:txBody>
-      </p:sp>
-      <p:sp>
-        <p:nvSpPr>
-          <p:cNvPr id="4" name="Slide Number Placeholder 3">
-            <a:extLst>
-              <a:ext uri="{FF2B5EF4-FFF2-40B4-BE49-F238E27FC236}">
-                <a16:creationId xmlns:a16="http://schemas.microsoft.com/office/drawing/2014/main" id="{30FC9427-E730-9A2A-12E7-328DE01C1AA9}"/>
-              </a:ext>
-            </a:extLst>
-          </p:cNvPr>
-          <p:cNvSpPr>
-            <a:spLocks noGrp="1"/>
-          </p:cNvSpPr>
-          <p:nvPr>
-            <p:ph type="sldNum" sz="quarter" idx="5"/>
-          </p:nvPr>
-        </p:nvSpPr>
-        <p:spPr/>
-        <p:txBody>
-          <a:bodyPr/>
-          <a:lstStyle/>
-          <a:p>
-            <a:fld id="{D624DF53-3DD3-9F45-9E7E-472B96F1AB81}" type="slidenum">
-              <a:rPr lang="en-US" smtClean="0"/>
-              <a:pPr/>
-              <a:t>21</a:t>
-            </a:fld>
-            <a:endParaRPr lang="en-US"/>
-          </a:p>
-        </p:txBody>
-      </p:sp>
-    </p:spTree>
-    <p:extLst>
-      <p:ext uri="{BB962C8B-B14F-4D97-AF65-F5344CB8AC3E}">
-        <p14:creationId xmlns:p14="http://schemas.microsoft.com/office/powerpoint/2010/main" val="245707839"/>
       </p:ext>
     </p:extLst>
   </p:cSld>
@@ -8393,7 +8522,7 @@
             <a:pPr eaLnBrk="1" latinLnBrk="0" hangingPunct="1"/>
             <a:fld id="{8E8B2B42-CBC2-7D4E-BA50-0E7F29B4DAAB}" type="datetime1">
               <a:rPr lang="en-US" smtClean="0"/>
-              <a:t>10/26/2025</a:t>
+              <a:t>11/2/2025</a:t>
             </a:fld>
             <a:endParaRPr lang="en-US" sz="1600" dirty="0"/>
           </a:p>
@@ -8753,7 +8882,7 @@
             <a:pPr eaLnBrk="1" latinLnBrk="0" hangingPunct="1"/>
             <a:fld id="{597D1259-3A46-254C-ADDB-B5DA4F1DF3DA}" type="datetime1">
               <a:rPr lang="en-US" smtClean="0"/>
-              <a:t>10/26/2025</a:t>
+              <a:t>11/2/2025</a:t>
             </a:fld>
             <a:endParaRPr lang="en-US"/>
           </a:p>
@@ -8929,7 +9058,7 @@
             <a:pPr eaLnBrk="1" latinLnBrk="0" hangingPunct="1"/>
             <a:fld id="{CCA104EC-54AA-E04F-BDC0-22B4E8892699}" type="datetime1">
               <a:rPr lang="en-US" smtClean="0"/>
-              <a:t>10/26/2025</a:t>
+              <a:t>11/2/2025</a:t>
             </a:fld>
             <a:endParaRPr lang="en-US"/>
           </a:p>
@@ -9165,7 +9294,7 @@
             <a:pPr eaLnBrk="1" latinLnBrk="0" hangingPunct="1"/>
             <a:fld id="{A9E6F060-20EB-3246-9088-08BF5F1271DE}" type="datetime1">
               <a:rPr lang="en-US" smtClean="0"/>
-              <a:t>10/26/2025</a:t>
+              <a:t>11/2/2025</a:t>
             </a:fld>
             <a:endParaRPr lang="en-US" dirty="0"/>
           </a:p>
@@ -9435,7 +9564,7 @@
             <a:pPr eaLnBrk="1" latinLnBrk="0" hangingPunct="1"/>
             <a:fld id="{34C82E41-DA7E-CA4C-823B-C759BEA16CE8}" type="datetime1">
               <a:rPr lang="en-US" smtClean="0"/>
-              <a:t>10/26/2025</a:t>
+              <a:t>11/2/2025</a:t>
             </a:fld>
             <a:endParaRPr lang="en-US" dirty="0"/>
           </a:p>
@@ -9656,7 +9785,7 @@
             <a:pPr eaLnBrk="1" latinLnBrk="0" hangingPunct="1"/>
             <a:fld id="{2500C8B0-EB1A-0A41-B839-C4B99CD2225A}" type="datetime1">
               <a:rPr lang="en-US" smtClean="0"/>
-              <a:t>10/26/2025</a:t>
+              <a:t>11/2/2025</a:t>
             </a:fld>
             <a:endParaRPr lang="en-US"/>
           </a:p>
@@ -10009,7 +10138,7 @@
             <a:pPr eaLnBrk="1" latinLnBrk="0" hangingPunct="1"/>
             <a:fld id="{4F16605B-D952-1149-A111-28A5633BAE48}" type="datetime1">
               <a:rPr lang="en-US" smtClean="0"/>
-              <a:t>10/26/2025</a:t>
+              <a:t>11/2/2025</a:t>
             </a:fld>
             <a:endParaRPr lang="en-US"/>
           </a:p>
@@ -10242,7 +10371,7 @@
             <a:pPr eaLnBrk="1" latinLnBrk="0" hangingPunct="1"/>
             <a:fld id="{91109A1C-29B2-B04E-8365-C9D22C4AE842}" type="datetime1">
               <a:rPr lang="en-US" smtClean="0"/>
-              <a:t>10/26/2025</a:t>
+              <a:t>11/2/2025</a:t>
             </a:fld>
             <a:endParaRPr lang="en-US"/>
           </a:p>
@@ -10384,7 +10513,7 @@
             <a:pPr eaLnBrk="1" latinLnBrk="0" hangingPunct="1"/>
             <a:fld id="{2CE417B6-A42B-064A-8677-46C55C4F613A}" type="datetime1">
               <a:rPr lang="en-US" smtClean="0"/>
-              <a:t>10/26/2025</a:t>
+              <a:t>11/2/2025</a:t>
             </a:fld>
             <a:endParaRPr lang="en-US"/>
           </a:p>
@@ -10662,7 +10791,7 @@
             <a:pPr eaLnBrk="1" latinLnBrk="0" hangingPunct="1"/>
             <a:fld id="{DE76F5AD-3F1F-7141-BC8A-012C5728BE2D}" type="datetime1">
               <a:rPr lang="en-US" smtClean="0"/>
-              <a:t>10/26/2025</a:t>
+              <a:t>11/2/2025</a:t>
             </a:fld>
             <a:endParaRPr lang="en-US"/>
           </a:p>
@@ -11070,7 +11199,7 @@
             <a:pPr eaLnBrk="1" latinLnBrk="0" hangingPunct="1"/>
             <a:fld id="{09FA12B8-739E-4D47-A14C-180C3BC10865}" type="datetime1">
               <a:rPr lang="en-US" smtClean="0"/>
-              <a:t>10/26/2025</a:t>
+              <a:t>11/2/2025</a:t>
             </a:fld>
             <a:endParaRPr lang="en-US"/>
           </a:p>
@@ -11408,7 +11537,7 @@
             <a:pPr eaLnBrk="1" latinLnBrk="0" hangingPunct="1"/>
             <a:fld id="{CDD18CD8-E404-844E-A4BD-DF69B8E5881E}" type="datetime1">
               <a:rPr lang="en-US" smtClean="0"/>
-              <a:t>10/26/2025</a:t>
+              <a:t>11/2/2025</a:t>
             </a:fld>
             <a:endParaRPr lang="en-US" sz="1400" dirty="0">
               <a:solidFill>
@@ -13223,8 +13352,8 @@
           </a:p>
         </p:txBody>
       </p:sp>
-      <mc:AlternateContent xmlns:mc="http://schemas.openxmlformats.org/markup-compatibility/2006" xmlns:a14="http://schemas.microsoft.com/office/drawing/2010/main">
-        <mc:Choice Requires="a14">
+      <mc:AlternateContent xmlns:mc="http://schemas.openxmlformats.org/markup-compatibility/2006">
+        <mc:Choice xmlns:a14="http://schemas.microsoft.com/office/drawing/2010/main" Requires="a14">
           <p:sp>
             <p:nvSpPr>
               <p:cNvPr id="5" name="Rectangle 4"/>
@@ -13233,8 +13362,8 @@
             </p:nvSpPr>
             <p:spPr>
               <a:xfrm>
-                <a:off x="2057400" y="4267200"/>
-                <a:ext cx="8382000" cy="2135585"/>
+                <a:off x="1862667" y="3943766"/>
+                <a:ext cx="8382000" cy="2412584"/>
               </a:xfrm>
               <a:prstGeom prst="rect">
                 <a:avLst/>
@@ -13412,6 +13541,12 @@
               <a:p>
                 <a:r>
                   <a:rPr lang="en-US" dirty="0"/>
+                  <a:t>Hidden bit refer to the implicit leading 1 in (1 + fraction)</a:t>
+                </a:r>
+              </a:p>
+              <a:p>
+                <a:r>
+                  <a:rPr lang="en-US" dirty="0"/>
                   <a:t>Fraction is also called significand or </a:t>
                 </a:r>
                 <a:r>
@@ -13426,7 +13561,7 @@
             </p:txBody>
           </p:sp>
         </mc:Choice>
-        <mc:Fallback xmlns="">
+        <mc:Fallback>
           <p:sp>
             <p:nvSpPr>
               <p:cNvPr id="5" name="Rectangle 4"/>
@@ -13437,8 +13572,8 @@
             </p:nvSpPr>
             <p:spPr>
               <a:xfrm>
-                <a:off x="2057400" y="4267200"/>
-                <a:ext cx="8382000" cy="2135585"/>
+                <a:off x="1862667" y="3943766"/>
+                <a:ext cx="8382000" cy="2412584"/>
               </a:xfrm>
               <a:prstGeom prst="rect">
                 <a:avLst/>
@@ -13446,7 +13581,7 @@
               <a:blipFill>
                 <a:blip r:embed="rId3"/>
                 <a:stretch>
-                  <a:fillRect l="-655" t="-1429" b="-3714"/>
+                  <a:fillRect l="-655" t="-1515" b="-3030"/>
                 </a:stretch>
               </a:blipFill>
             </p:spPr>
@@ -13803,8 +13938,8 @@
           </a:p>
         </p:txBody>
       </p:sp>
-      <mc:AlternateContent xmlns:mc="http://schemas.openxmlformats.org/markup-compatibility/2006" xmlns:a14="http://schemas.microsoft.com/office/drawing/2010/main">
-        <mc:Choice Requires="a14">
+      <mc:AlternateContent xmlns:mc="http://schemas.openxmlformats.org/markup-compatibility/2006">
+        <mc:Choice xmlns:a14="http://schemas.microsoft.com/office/drawing/2010/main" Requires="a14">
           <p:sp>
             <p:nvSpPr>
               <p:cNvPr id="4" name="Content Placeholder 3"/>
@@ -13818,12 +13953,12 @@
             <p:spPr>
               <a:xfrm>
                 <a:off x="609600" y="1263579"/>
-                <a:ext cx="10972800" cy="4893382"/>
+                <a:ext cx="10972800" cy="3841821"/>
               </a:xfrm>
             </p:spPr>
             <p:txBody>
               <a:bodyPr>
-                <a:noAutofit/>
+                <a:normAutofit fontScale="77500" lnSpcReduction="20000"/>
               </a:bodyPr>
               <a:lstStyle/>
               <a:p>
@@ -13834,7 +13969,7 @@
                 <a:r>
                   <a:rPr lang="en-US" sz="2800" dirty="0">
                     <a:solidFill>
-                      <a:srgbClr val="C00000"/>
+                      <a:srgbClr val="FF0000"/>
                     </a:solidFill>
                     <a:latin typeface="Consolas" panose="020B0609020204030204" pitchFamily="49" charset="0"/>
                   </a:rPr>
@@ -13852,7 +13987,7 @@
                 <a:r>
                   <a:rPr lang="en-US" sz="2800" dirty="0">
                     <a:solidFill>
-                      <a:srgbClr val="C00000"/>
+                      <a:srgbClr val="00B050"/>
                     </a:solidFill>
                     <a:latin typeface="Consolas" panose="020B0609020204030204" pitchFamily="49" charset="0"/>
                   </a:rPr>
@@ -13908,7 +14043,13 @@
                       <a:rPr lang="en-US" sz="2800" i="1">
                         <a:latin typeface="Cambria Math"/>
                       </a:rPr>
-                      <m:t>=131</m:t>
+                      <m:t>=</m:t>
+                    </m:r>
+                    <m:r>
+                      <a:rPr lang="en-US" sz="2800" i="1">
+                        <a:latin typeface="Cambria Math"/>
+                      </a:rPr>
+                      <m:t>131</m:t>
                     </m:r>
                   </m:oMath>
                 </a14:m>
@@ -13934,7 +14075,19 @@
                           <a:rPr lang="en-US" sz="2800" i="1">
                             <a:latin typeface="Cambria Math"/>
                           </a:rPr>
-                          <m:t>0.1111111</m:t>
+                          <m:t>0</m:t>
+                        </m:r>
+                        <m:r>
+                          <a:rPr lang="en-US" sz="2800" i="1">
+                            <a:latin typeface="Cambria Math"/>
+                          </a:rPr>
+                          <m:t>.</m:t>
+                        </m:r>
+                        <m:r>
+                          <a:rPr lang="en-US" sz="2800" i="1">
+                            <a:latin typeface="Cambria Math"/>
+                          </a:rPr>
+                          <m:t>1111111</m:t>
                         </m:r>
                       </m:e>
                       <m:sub>
@@ -13959,7 +14112,13 @@
                       <a:rPr lang="en-US" sz="2800" i="1">
                         <a:latin typeface="Cambria Math"/>
                       </a:rPr>
-                      <m:t>1×</m:t>
+                      <m:t>1</m:t>
+                    </m:r>
+                    <m:r>
+                      <a:rPr lang="en-US" sz="2800" i="1">
+                        <a:latin typeface="Cambria Math"/>
+                      </a:rPr>
+                      <m:t>×</m:t>
                     </m:r>
                     <m:sSup>
                       <m:sSupPr>
@@ -13982,7 +14141,13 @@
                           <a:rPr lang="en-US" sz="2800" i="1">
                             <a:latin typeface="Cambria Math"/>
                           </a:rPr>
-                          <m:t>−1</m:t>
+                          <m:t>−</m:t>
+                        </m:r>
+                        <m:r>
+                          <a:rPr lang="en-US" sz="2800" i="1">
+                            <a:latin typeface="Cambria Math"/>
+                          </a:rPr>
+                          <m:t>1</m:t>
                         </m:r>
                       </m:sup>
                     </m:sSup>
@@ -13990,7 +14155,19 @@
                       <a:rPr lang="en-US" sz="2800" i="1">
                         <a:latin typeface="Cambria Math"/>
                       </a:rPr>
-                      <m:t>+1×</m:t>
+                      <m:t>+</m:t>
+                    </m:r>
+                    <m:r>
+                      <a:rPr lang="en-US" sz="2800" i="1">
+                        <a:latin typeface="Cambria Math"/>
+                      </a:rPr>
+                      <m:t>1</m:t>
+                    </m:r>
+                    <m:r>
+                      <a:rPr lang="en-US" sz="2800" i="1">
+                        <a:latin typeface="Cambria Math"/>
+                      </a:rPr>
+                      <m:t>×</m:t>
                     </m:r>
                     <m:sSup>
                       <m:sSupPr>
@@ -14013,7 +14190,13 @@
                           <a:rPr lang="en-US" sz="2800" i="1">
                             <a:latin typeface="Cambria Math"/>
                           </a:rPr>
-                          <m:t>−2</m:t>
+                          <m:t>−</m:t>
+                        </m:r>
+                        <m:r>
+                          <a:rPr lang="en-US" sz="2800" i="1">
+                            <a:latin typeface="Cambria Math"/>
+                          </a:rPr>
+                          <m:t>2</m:t>
                         </m:r>
                       </m:sup>
                     </m:sSup>
@@ -14021,7 +14204,19 @@
                       <a:rPr lang="en-US" sz="2800" i="1">
                         <a:latin typeface="Cambria Math"/>
                       </a:rPr>
-                      <m:t>+1×</m:t>
+                      <m:t>+</m:t>
+                    </m:r>
+                    <m:r>
+                      <a:rPr lang="en-US" sz="2800" i="1">
+                        <a:latin typeface="Cambria Math"/>
+                      </a:rPr>
+                      <m:t>1</m:t>
+                    </m:r>
+                    <m:r>
+                      <a:rPr lang="en-US" sz="2800" i="1">
+                        <a:latin typeface="Cambria Math"/>
+                      </a:rPr>
+                      <m:t>×</m:t>
                     </m:r>
                     <m:sSup>
                       <m:sSupPr>
@@ -14044,7 +14239,13 @@
                           <a:rPr lang="en-US" sz="2800" i="1">
                             <a:latin typeface="Cambria Math"/>
                           </a:rPr>
-                          <m:t>−3</m:t>
+                          <m:t>−</m:t>
+                        </m:r>
+                        <m:r>
+                          <a:rPr lang="en-US" sz="2800" i="1">
+                            <a:latin typeface="Cambria Math"/>
+                          </a:rPr>
+                          <m:t>3</m:t>
                         </m:r>
                       </m:sup>
                     </m:sSup>
@@ -14052,7 +14253,19 @@
                       <a:rPr lang="en-US" sz="2800" i="1">
                         <a:latin typeface="Cambria Math"/>
                       </a:rPr>
-                      <m:t>+1×</m:t>
+                      <m:t>+</m:t>
+                    </m:r>
+                    <m:r>
+                      <a:rPr lang="en-US" sz="2800" i="1">
+                        <a:latin typeface="Cambria Math"/>
+                      </a:rPr>
+                      <m:t>1</m:t>
+                    </m:r>
+                    <m:r>
+                      <a:rPr lang="en-US" sz="2800" i="1">
+                        <a:latin typeface="Cambria Math"/>
+                      </a:rPr>
+                      <m:t>×</m:t>
                     </m:r>
                     <m:sSup>
                       <m:sSupPr>
@@ -14075,7 +14288,13 @@
                           <a:rPr lang="en-US" sz="2800" i="1">
                             <a:latin typeface="Cambria Math"/>
                           </a:rPr>
-                          <m:t>−4</m:t>
+                          <m:t>−</m:t>
+                        </m:r>
+                        <m:r>
+                          <a:rPr lang="en-US" sz="2800" i="1">
+                            <a:latin typeface="Cambria Math"/>
+                          </a:rPr>
+                          <m:t>4</m:t>
                         </m:r>
                       </m:sup>
                     </m:sSup>
@@ -14083,7 +14302,19 @@
                       <a:rPr lang="en-US" sz="2800" i="1">
                         <a:latin typeface="Cambria Math"/>
                       </a:rPr>
-                      <m:t>+1×</m:t>
+                      <m:t>+</m:t>
+                    </m:r>
+                    <m:r>
+                      <a:rPr lang="en-US" sz="2800" i="1">
+                        <a:latin typeface="Cambria Math"/>
+                      </a:rPr>
+                      <m:t>1</m:t>
+                    </m:r>
+                    <m:r>
+                      <a:rPr lang="en-US" sz="2800" i="1">
+                        <a:latin typeface="Cambria Math"/>
+                      </a:rPr>
+                      <m:t>×</m:t>
                     </m:r>
                     <m:sSup>
                       <m:sSupPr>
@@ -14106,7 +14337,13 @@
                           <a:rPr lang="en-US" sz="2800" i="1">
                             <a:latin typeface="Cambria Math"/>
                           </a:rPr>
-                          <m:t>−5</m:t>
+                          <m:t>−</m:t>
+                        </m:r>
+                        <m:r>
+                          <a:rPr lang="en-US" sz="2800" i="1">
+                            <a:latin typeface="Cambria Math"/>
+                          </a:rPr>
+                          <m:t>5</m:t>
                         </m:r>
                       </m:sup>
                     </m:sSup>
@@ -14114,7 +14351,19 @@
                       <a:rPr lang="en-US" sz="2800" i="1">
                         <a:latin typeface="Cambria Math"/>
                       </a:rPr>
-                      <m:t>+1×</m:t>
+                      <m:t>+</m:t>
+                    </m:r>
+                    <m:r>
+                      <a:rPr lang="en-US" sz="2800" i="1">
+                        <a:latin typeface="Cambria Math"/>
+                      </a:rPr>
+                      <m:t>1</m:t>
+                    </m:r>
+                    <m:r>
+                      <a:rPr lang="en-US" sz="2800" i="1">
+                        <a:latin typeface="Cambria Math"/>
+                      </a:rPr>
+                      <m:t>×</m:t>
                     </m:r>
                     <m:sSup>
                       <m:sSupPr>
@@ -14137,7 +14386,13 @@
                           <a:rPr lang="en-US" sz="2800" i="1">
                             <a:latin typeface="Cambria Math"/>
                           </a:rPr>
-                          <m:t>−6</m:t>
+                          <m:t>−</m:t>
+                        </m:r>
+                        <m:r>
+                          <a:rPr lang="en-US" sz="2800" i="1">
+                            <a:latin typeface="Cambria Math"/>
+                          </a:rPr>
+                          <m:t>6</m:t>
                         </m:r>
                       </m:sup>
                     </m:sSup>
@@ -14145,7 +14400,19 @@
                       <a:rPr lang="en-US" sz="2800" i="1">
                         <a:latin typeface="Cambria Math"/>
                       </a:rPr>
-                      <m:t>+1×</m:t>
+                      <m:t>+</m:t>
+                    </m:r>
+                    <m:r>
+                      <a:rPr lang="en-US" sz="2800" i="1">
+                        <a:latin typeface="Cambria Math"/>
+                      </a:rPr>
+                      <m:t>1</m:t>
+                    </m:r>
+                    <m:r>
+                      <a:rPr lang="en-US" sz="2800" i="1">
+                        <a:latin typeface="Cambria Math"/>
+                      </a:rPr>
+                      <m:t>×</m:t>
                     </m:r>
                     <m:sSup>
                       <m:sSupPr>
@@ -14168,7 +14435,13 @@
                           <a:rPr lang="en-US" sz="2800" i="1">
                             <a:latin typeface="Cambria Math"/>
                           </a:rPr>
-                          <m:t>−7</m:t>
+                          <m:t>−</m:t>
+                        </m:r>
+                        <m:r>
+                          <a:rPr lang="en-US" sz="2800" i="1">
+                            <a:latin typeface="Cambria Math"/>
+                          </a:rPr>
+                          <m:t>7</m:t>
                         </m:r>
                       </m:sup>
                     </m:sSup>
@@ -14182,7 +14455,19 @@
                       <a:rPr lang="en-US" sz="2800" i="1">
                         <a:latin typeface="Cambria Math"/>
                       </a:rPr>
-                      <m:t>0.9921875</m:t>
+                      <m:t>0</m:t>
+                    </m:r>
+                    <m:r>
+                      <a:rPr lang="en-US" sz="2800" i="1">
+                        <a:latin typeface="Cambria Math"/>
+                      </a:rPr>
+                      <m:t>.</m:t>
+                    </m:r>
+                    <m:r>
+                      <a:rPr lang="en-US" sz="2800" i="1">
+                        <a:latin typeface="Cambria Math"/>
+                      </a:rPr>
+                      <m:t>9921875</m:t>
                     </m:r>
                   </m:oMath>
                 </a14:m>
@@ -14228,7 +14513,13 @@
                               <a:rPr lang="en-US" sz="2800" i="1">
                                 <a:latin typeface="Cambria Math"/>
                               </a:rPr>
-                              <m:t>−1</m:t>
+                              <m:t>−</m:t>
+                            </m:r>
+                            <m:r>
+                              <a:rPr lang="en-US" sz="2800" i="1">
+                                <a:latin typeface="Cambria Math"/>
+                              </a:rPr>
+                              <m:t>1</m:t>
                             </m:r>
                           </m:e>
                         </m:d>
@@ -14261,7 +14552,13 @@
                           <a:rPr lang="en-US" sz="2800" i="1">
                             <a:latin typeface="Cambria Math"/>
                           </a:rPr>
-                          <m:t>1+</m:t>
+                          <m:t>1</m:t>
+                        </m:r>
+                        <m:r>
+                          <a:rPr lang="en-US" sz="2800" i="1">
+                            <a:latin typeface="Cambria Math"/>
+                          </a:rPr>
+                          <m:t>+</m:t>
                         </m:r>
                         <m:r>
                           <a:rPr lang="en-US" sz="2800" i="1">
@@ -14304,7 +14601,13 @@
                           <a:rPr lang="en-US" sz="2800" i="1">
                             <a:latin typeface="Cambria Math"/>
                           </a:rPr>
-                          <m:t>−127</m:t>
+                          <m:t>−</m:t>
+                        </m:r>
+                        <m:r>
+                          <a:rPr lang="en-US" sz="2800" i="1">
+                            <a:latin typeface="Cambria Math"/>
+                          </a:rPr>
+                          <m:t>127</m:t>
                         </m:r>
                       </m:sup>
                     </m:sSup>
@@ -14355,7 +14658,13 @@
                                 <a:rPr lang="en-US" sz="2800" i="1">
                                   <a:latin typeface="Cambria Math"/>
                                 </a:rPr>
-                                <m:t>−1</m:t>
+                                <m:t>−</m:t>
+                              </m:r>
+                              <m:r>
+                                <a:rPr lang="en-US" sz="2800" i="1">
+                                  <a:latin typeface="Cambria Math"/>
+                                </a:rPr>
+                                <m:t>1</m:t>
                               </m:r>
                             </m:e>
                           </m:d>
@@ -14388,7 +14697,31 @@
                             <a:rPr lang="en-US" sz="2800" i="1">
                               <a:latin typeface="Cambria Math"/>
                             </a:rPr>
-                            <m:t>1+0.9921875</m:t>
+                            <m:t>1</m:t>
+                          </m:r>
+                          <m:r>
+                            <a:rPr lang="en-US" sz="2800" i="1">
+                              <a:latin typeface="Cambria Math"/>
+                            </a:rPr>
+                            <m:t>+</m:t>
+                          </m:r>
+                          <m:r>
+                            <a:rPr lang="en-US" sz="2800" i="1">
+                              <a:latin typeface="Cambria Math"/>
+                            </a:rPr>
+                            <m:t>0</m:t>
+                          </m:r>
+                          <m:r>
+                            <a:rPr lang="en-US" sz="2800" i="1">
+                              <a:latin typeface="Cambria Math"/>
+                            </a:rPr>
+                            <m:t>.</m:t>
+                          </m:r>
+                          <m:r>
+                            <a:rPr lang="en-US" sz="2800" i="1">
+                              <a:latin typeface="Cambria Math"/>
+                            </a:rPr>
+                            <m:t>9921875</m:t>
                           </m:r>
                         </m:e>
                       </m:d>
@@ -14419,7 +14752,19 @@
                             <a:rPr lang="en-US" sz="2800" i="1">
                               <a:latin typeface="Cambria Math"/>
                             </a:rPr>
-                            <m:t>131−127</m:t>
+                            <m:t>131</m:t>
+                          </m:r>
+                          <m:r>
+                            <a:rPr lang="en-US" sz="2800" i="1">
+                              <a:latin typeface="Cambria Math"/>
+                            </a:rPr>
+                            <m:t>−</m:t>
+                          </m:r>
+                          <m:r>
+                            <a:rPr lang="en-US" sz="2800" i="1">
+                              <a:latin typeface="Cambria Math"/>
+                            </a:rPr>
+                            <m:t>127</m:t>
                           </m:r>
                         </m:sup>
                       </m:sSup>
@@ -14438,7 +14783,43 @@
                         <a:rPr lang="en-US" sz="2800" i="1">
                           <a:latin typeface="Cambria Math"/>
                         </a:rPr>
-                        <m:t>−1×1.9921875×</m:t>
+                        <m:t>−</m:t>
+                      </m:r>
+                      <m:r>
+                        <a:rPr lang="en-US" sz="2800" i="1">
+                          <a:latin typeface="Cambria Math"/>
+                        </a:rPr>
+                        <m:t>1</m:t>
+                      </m:r>
+                      <m:r>
+                        <a:rPr lang="en-US" sz="2800" i="1">
+                          <a:latin typeface="Cambria Math"/>
+                        </a:rPr>
+                        <m:t>×</m:t>
+                      </m:r>
+                      <m:r>
+                        <a:rPr lang="en-US" sz="2800" i="1">
+                          <a:latin typeface="Cambria Math"/>
+                        </a:rPr>
+                        <m:t>1</m:t>
+                      </m:r>
+                      <m:r>
+                        <a:rPr lang="en-US" sz="2800" i="1">
+                          <a:latin typeface="Cambria Math"/>
+                        </a:rPr>
+                        <m:t>.</m:t>
+                      </m:r>
+                      <m:r>
+                        <a:rPr lang="en-US" sz="2800" i="1">
+                          <a:latin typeface="Cambria Math"/>
+                        </a:rPr>
+                        <m:t>9921875</m:t>
+                      </m:r>
+                      <m:r>
+                        <a:rPr lang="en-US" sz="2800" i="1">
+                          <a:latin typeface="Cambria Math"/>
+                        </a:rPr>
+                        <m:t>×</m:t>
                       </m:r>
                       <m:sSup>
                         <m:sSupPr>
@@ -14480,17 +14861,383 @@
                         <a:rPr lang="en-US" sz="2800" i="1">
                           <a:latin typeface="Cambria Math"/>
                         </a:rPr>
-                        <m:t>−31.875</m:t>
+                        <m:t>−</m:t>
+                      </m:r>
+                      <m:r>
+                        <a:rPr lang="en-US" sz="2800" i="1">
+                          <a:latin typeface="Cambria Math"/>
+                        </a:rPr>
+                        <m:t>31</m:t>
+                      </m:r>
+                      <m:r>
+                        <a:rPr lang="en-US" sz="2800" i="1">
+                          <a:latin typeface="Cambria Math"/>
+                        </a:rPr>
+                        <m:t>.</m:t>
+                      </m:r>
+                      <m:r>
+                        <a:rPr lang="en-US" sz="2800" i="1">
+                          <a:latin typeface="Cambria Math"/>
+                        </a:rPr>
+                        <m:t>875</m:t>
                       </m:r>
                     </m:oMath>
                   </m:oMathPara>
                 </a14:m>
                 <a:endParaRPr lang="en-US" sz="2800" dirty="0"/>
               </a:p>
+              <a:p>
+                <a:r>
+                  <a:rPr lang="en-US" sz="2800" dirty="0"/>
+                  <a:t>If Exponent = </a:t>
+                </a:r>
+                <a14:m>
+                  <m:oMath xmlns:m="http://schemas.openxmlformats.org/officeDocument/2006/math">
+                    <m:sSub>
+                      <m:sSubPr>
+                        <m:ctrlPr>
+                          <a:rPr lang="en-US" sz="2800" i="1">
+                            <a:latin typeface="Cambria Math" panose="02040503050406030204" pitchFamily="18" charset="0"/>
+                          </a:rPr>
+                        </m:ctrlPr>
+                      </m:sSubPr>
+                      <m:e>
+                        <m:r>
+                          <a:rPr lang="en-US" sz="2800" i="1">
+                            <a:latin typeface="Cambria Math"/>
+                          </a:rPr>
+                          <m:t>10000</m:t>
+                        </m:r>
+                        <m:r>
+                          <a:rPr lang="en-US" sz="2800" b="0" i="1" smtClean="0">
+                            <a:latin typeface="Cambria Math" panose="02040503050406030204" pitchFamily="18" charset="0"/>
+                          </a:rPr>
+                          <m:t>10</m:t>
+                        </m:r>
+                        <m:r>
+                          <a:rPr lang="en-US" sz="2800" i="1">
+                            <a:latin typeface="Cambria Math"/>
+                          </a:rPr>
+                          <m:t>1</m:t>
+                        </m:r>
+                      </m:e>
+                      <m:sub>
+                        <m:r>
+                          <a:rPr lang="en-US" sz="2800" i="1">
+                            <a:latin typeface="Cambria Math"/>
+                          </a:rPr>
+                          <m:t>2</m:t>
+                        </m:r>
+                      </m:sub>
+                    </m:sSub>
+                    <m:r>
+                      <a:rPr lang="en-US" sz="2800" i="1">
+                        <a:latin typeface="Cambria Math"/>
+                      </a:rPr>
+                      <m:t>=</m:t>
+                    </m:r>
+                    <m:r>
+                      <a:rPr lang="en-US" sz="2800" i="1">
+                        <a:latin typeface="Cambria Math"/>
+                      </a:rPr>
+                      <m:t>133</m:t>
+                    </m:r>
+                  </m:oMath>
+                </a14:m>
+                <a:r>
+                  <a:rPr lang="en-US" sz="2800" dirty="0"/>
+                  <a:t>, then </a:t>
+                </a:r>
+                <a14:m>
+                  <m:oMath xmlns:m="http://schemas.openxmlformats.org/officeDocument/2006/math">
+                    <m:r>
+                      <a:rPr lang="en-US" sz="2800" i="1">
+                        <a:latin typeface="Cambria Math"/>
+                      </a:rPr>
+                      <m:t>𝑓</m:t>
+                    </m:r>
+                    <m:r>
+                      <a:rPr lang="en-US" sz="2800" b="0" i="1" smtClean="0">
+                        <a:latin typeface="Cambria Math" panose="02040503050406030204" pitchFamily="18" charset="0"/>
+                      </a:rPr>
+                      <m:t>=</m:t>
+                    </m:r>
+                    <m:r>
+                      <a:rPr lang="en-US" sz="2800" i="1">
+                        <a:latin typeface="Cambria Math"/>
+                      </a:rPr>
+                      <m:t>−</m:t>
+                    </m:r>
+                    <m:r>
+                      <a:rPr lang="en-US" sz="2800" i="1">
+                        <a:latin typeface="Cambria Math"/>
+                      </a:rPr>
+                      <m:t>1</m:t>
+                    </m:r>
+                    <m:r>
+                      <a:rPr lang="en-US" sz="2800" i="1">
+                        <a:latin typeface="Cambria Math"/>
+                      </a:rPr>
+                      <m:t>×</m:t>
+                    </m:r>
+                    <m:r>
+                      <a:rPr lang="en-US" sz="2800" i="1">
+                        <a:latin typeface="Cambria Math"/>
+                      </a:rPr>
+                      <m:t>1</m:t>
+                    </m:r>
+                    <m:r>
+                      <a:rPr lang="en-US" sz="2800" i="1">
+                        <a:latin typeface="Cambria Math"/>
+                      </a:rPr>
+                      <m:t>.</m:t>
+                    </m:r>
+                    <m:r>
+                      <a:rPr lang="en-US" sz="2800" i="1">
+                        <a:latin typeface="Cambria Math"/>
+                      </a:rPr>
+                      <m:t>9921875</m:t>
+                    </m:r>
+                    <m:r>
+                      <a:rPr lang="en-US" sz="2800" i="1">
+                        <a:latin typeface="Cambria Math"/>
+                      </a:rPr>
+                      <m:t>×</m:t>
+                    </m:r>
+                    <m:sSup>
+                      <m:sSupPr>
+                        <m:ctrlPr>
+                          <a:rPr lang="en-US" sz="2800" i="1">
+                            <a:latin typeface="Cambria Math" panose="02040503050406030204" pitchFamily="18" charset="0"/>
+                          </a:rPr>
+                        </m:ctrlPr>
+                      </m:sSupPr>
+                      <m:e>
+                        <m:r>
+                          <a:rPr lang="en-US" sz="2800" i="1">
+                            <a:latin typeface="Cambria Math"/>
+                          </a:rPr>
+                          <m:t>2</m:t>
+                        </m:r>
+                      </m:e>
+                      <m:sup>
+                        <m:r>
+                          <a:rPr lang="en-US" sz="2800" b="0" i="1" smtClean="0">
+                            <a:latin typeface="Cambria Math" panose="02040503050406030204" pitchFamily="18" charset="0"/>
+                          </a:rPr>
+                          <m:t>6</m:t>
+                        </m:r>
+                      </m:sup>
+                    </m:sSup>
+                    <m:r>
+                      <a:rPr lang="en-US" sz="2800" b="0" i="1" smtClean="0">
+                        <a:latin typeface="Cambria Math" panose="02040503050406030204" pitchFamily="18" charset="0"/>
+                      </a:rPr>
+                      <m:t>=−</m:t>
+                    </m:r>
+                    <m:r>
+                      <a:rPr lang="en-US" sz="2800" b="0" i="1" smtClean="0">
+                        <a:latin typeface="Cambria Math" panose="02040503050406030204" pitchFamily="18" charset="0"/>
+                      </a:rPr>
+                      <m:t>127</m:t>
+                    </m:r>
+                    <m:r>
+                      <a:rPr lang="en-US" sz="2800" b="0" i="1" smtClean="0">
+                        <a:latin typeface="Cambria Math" panose="02040503050406030204" pitchFamily="18" charset="0"/>
+                      </a:rPr>
+                      <m:t>.</m:t>
+                    </m:r>
+                    <m:r>
+                      <a:rPr lang="en-US" sz="2800" b="0" i="1" smtClean="0">
+                        <a:latin typeface="Cambria Math" panose="02040503050406030204" pitchFamily="18" charset="0"/>
+                      </a:rPr>
+                      <m:t>5</m:t>
+                    </m:r>
+                  </m:oMath>
+                </a14:m>
+                <a:endParaRPr lang="en-US" sz="2800" dirty="0"/>
+              </a:p>
+              <a:p>
+                <a:r>
+                  <a:rPr lang="en-US" sz="2800" dirty="0"/>
+                  <a:t>If Exponent = </a:t>
+                </a:r>
+                <a14:m>
+                  <m:oMath xmlns:m="http://schemas.openxmlformats.org/officeDocument/2006/math">
+                    <m:sSub>
+                      <m:sSubPr>
+                        <m:ctrlPr>
+                          <a:rPr lang="en-US" sz="2800" i="1">
+                            <a:latin typeface="Cambria Math" panose="02040503050406030204" pitchFamily="18" charset="0"/>
+                          </a:rPr>
+                        </m:ctrlPr>
+                      </m:sSubPr>
+                      <m:e>
+                        <m:r>
+                          <a:rPr lang="en-US" sz="2800" i="1">
+                            <a:latin typeface="Cambria Math"/>
+                          </a:rPr>
+                          <m:t>10000</m:t>
+                        </m:r>
+                        <m:r>
+                          <a:rPr lang="en-US" sz="2800" i="1">
+                            <a:latin typeface="Cambria Math" panose="02040503050406030204" pitchFamily="18" charset="0"/>
+                          </a:rPr>
+                          <m:t>1</m:t>
+                        </m:r>
+                        <m:r>
+                          <a:rPr lang="en-US" sz="2800" b="0" i="1" smtClean="0">
+                            <a:latin typeface="Cambria Math" panose="02040503050406030204" pitchFamily="18" charset="0"/>
+                          </a:rPr>
+                          <m:t>10</m:t>
+                        </m:r>
+                      </m:e>
+                      <m:sub>
+                        <m:r>
+                          <a:rPr lang="en-US" sz="2800" i="1">
+                            <a:latin typeface="Cambria Math"/>
+                          </a:rPr>
+                          <m:t>2</m:t>
+                        </m:r>
+                      </m:sub>
+                    </m:sSub>
+                    <m:r>
+                      <a:rPr lang="en-US" sz="2800" i="1">
+                        <a:latin typeface="Cambria Math"/>
+                      </a:rPr>
+                      <m:t>=</m:t>
+                    </m:r>
+                    <m:r>
+                      <a:rPr lang="en-US" sz="2800" i="1">
+                        <a:latin typeface="Cambria Math"/>
+                      </a:rPr>
+                      <m:t>134</m:t>
+                    </m:r>
+                  </m:oMath>
+                </a14:m>
+                <a:r>
+                  <a:rPr lang="en-US" sz="2800" dirty="0"/>
+                  <a:t>, then </a:t>
+                </a:r>
+                <a14:m>
+                  <m:oMath xmlns:m="http://schemas.openxmlformats.org/officeDocument/2006/math">
+                    <m:r>
+                      <a:rPr lang="en-US" sz="2800" i="1">
+                        <a:latin typeface="Cambria Math"/>
+                      </a:rPr>
+                      <m:t>𝑓</m:t>
+                    </m:r>
+                    <m:r>
+                      <a:rPr lang="en-US" sz="2800" b="0" i="1" smtClean="0">
+                        <a:latin typeface="Cambria Math" panose="02040503050406030204" pitchFamily="18" charset="0"/>
+                      </a:rPr>
+                      <m:t>=</m:t>
+                    </m:r>
+                    <m:r>
+                      <a:rPr lang="en-US" sz="2800" i="1">
+                        <a:latin typeface="Cambria Math"/>
+                      </a:rPr>
+                      <m:t>−</m:t>
+                    </m:r>
+                    <m:r>
+                      <a:rPr lang="en-US" sz="2800" i="1">
+                        <a:latin typeface="Cambria Math"/>
+                      </a:rPr>
+                      <m:t>1</m:t>
+                    </m:r>
+                    <m:r>
+                      <a:rPr lang="en-US" sz="2800" i="1">
+                        <a:latin typeface="Cambria Math"/>
+                      </a:rPr>
+                      <m:t>×</m:t>
+                    </m:r>
+                    <m:r>
+                      <a:rPr lang="en-US" sz="2800" i="1">
+                        <a:latin typeface="Cambria Math"/>
+                      </a:rPr>
+                      <m:t>1</m:t>
+                    </m:r>
+                    <m:r>
+                      <a:rPr lang="en-US" sz="2800" i="1">
+                        <a:latin typeface="Cambria Math"/>
+                      </a:rPr>
+                      <m:t>.</m:t>
+                    </m:r>
+                    <m:r>
+                      <a:rPr lang="en-US" sz="2800" i="1">
+                        <a:latin typeface="Cambria Math"/>
+                      </a:rPr>
+                      <m:t>9921875</m:t>
+                    </m:r>
+                    <m:r>
+                      <a:rPr lang="en-US" sz="2800" i="1">
+                        <a:latin typeface="Cambria Math"/>
+                      </a:rPr>
+                      <m:t>×</m:t>
+                    </m:r>
+                    <m:sSup>
+                      <m:sSupPr>
+                        <m:ctrlPr>
+                          <a:rPr lang="en-US" sz="2800" i="1">
+                            <a:latin typeface="Cambria Math" panose="02040503050406030204" pitchFamily="18" charset="0"/>
+                          </a:rPr>
+                        </m:ctrlPr>
+                      </m:sSupPr>
+                      <m:e>
+                        <m:r>
+                          <a:rPr lang="en-US" sz="2800" i="1">
+                            <a:latin typeface="Cambria Math"/>
+                          </a:rPr>
+                          <m:t>2</m:t>
+                        </m:r>
+                      </m:e>
+                      <m:sup>
+                        <m:r>
+                          <a:rPr lang="en-US" sz="2800" b="0" i="1" smtClean="0">
+                            <a:latin typeface="Cambria Math" panose="02040503050406030204" pitchFamily="18" charset="0"/>
+                          </a:rPr>
+                          <m:t>7</m:t>
+                        </m:r>
+                      </m:sup>
+                    </m:sSup>
+                    <m:r>
+                      <a:rPr lang="en-US" sz="2800" i="1">
+                        <a:latin typeface="Cambria Math" panose="02040503050406030204" pitchFamily="18" charset="0"/>
+                      </a:rPr>
+                      <m:t>=−</m:t>
+                    </m:r>
+                    <m:r>
+                      <a:rPr lang="en-US" sz="2800" b="0" i="1" smtClean="0">
+                        <a:latin typeface="Cambria Math" panose="02040503050406030204" pitchFamily="18" charset="0"/>
+                      </a:rPr>
+                      <m:t>255</m:t>
+                    </m:r>
+                  </m:oMath>
+                </a14:m>
+                <a:endParaRPr lang="en-US" sz="2800" dirty="0"/>
+              </a:p>
+              <a:p>
+                <a:pPr marL="0" indent="0">
+                  <a:buNone/>
+                </a:pPr>
+                <a:endParaRPr lang="en-US" sz="2800" dirty="0"/>
+              </a:p>
+              <a:p>
+                <a:pPr marL="0" indent="0">
+                  <a:buNone/>
+                </a:pPr>
+                <a:endParaRPr lang="en-US" sz="2800" dirty="0"/>
+              </a:p>
+              <a:p>
+                <a:pPr marL="0" indent="0">
+                  <a:buNone/>
+                </a:pPr>
+                <a:endParaRPr lang="en-US" sz="2800" dirty="0"/>
+              </a:p>
             </p:txBody>
           </p:sp>
         </mc:Choice>
-        <mc:Fallback xmlns="">
+        <mc:Fallback>
           <p:sp>
             <p:nvSpPr>
               <p:cNvPr id="4" name="Content Placeholder 3"/>
@@ -14504,12 +15251,12 @@
             <p:spPr>
               <a:xfrm>
                 <a:off x="609600" y="1263579"/>
-                <a:ext cx="10972800" cy="4893382"/>
+                <a:ext cx="10972800" cy="3841821"/>
               </a:xfrm>
               <a:blipFill>
-                <a:blip r:embed="rId2"/>
+                <a:blip r:embed="rId3"/>
                 <a:stretch>
-                  <a:fillRect l="-556" t="-1370"/>
+                  <a:fillRect l="-278" t="-2694" b="-1426"/>
                 </a:stretch>
               </a:blipFill>
             </p:spPr>
@@ -14530,14 +15277,14 @@
       </mc:AlternateContent>
       <p:pic>
         <p:nvPicPr>
-          <p:cNvPr id="7" name="Picture 2"/>
+          <p:cNvPr id="5" name="Picture 2"/>
           <p:cNvPicPr>
             <a:picLocks noChangeAspect="1" noChangeArrowheads="1"/>
           </p:cNvPicPr>
           <p:nvPr/>
         </p:nvPicPr>
         <p:blipFill>
-          <a:blip r:embed="rId3" cstate="print">
+          <a:blip r:embed="rId4" cstate="print">
             <a:extLst>
               <a:ext uri="{28A0092B-C50C-407E-A947-70E740481C1C}">
                 <a14:useLocalDpi xmlns:a14="http://schemas.microsoft.com/office/drawing/2010/main" val="0"/>
@@ -14551,8 +15298,8 @@
         </p:blipFill>
         <p:spPr bwMode="auto">
           <a:xfrm>
-            <a:off x="6934199" y="31821"/>
-            <a:ext cx="5220629" cy="1369658"/>
+            <a:off x="5715000" y="5105400"/>
+            <a:ext cx="6337174" cy="1662589"/>
           </a:xfrm>
           <a:prstGeom prst="rect">
             <a:avLst/>
@@ -19703,25 +20450,13 @@
                       <a:rPr lang="en-US" i="1" smtClean="0">
                         <a:latin typeface="Cambria Math"/>
                       </a:rPr>
-                      <m:t>1</m:t>
-                    </m:r>
-                    <m:r>
-                      <a:rPr lang="en-US" i="1" smtClean="0">
-                        <a:latin typeface="Cambria Math"/>
-                      </a:rPr>
-                      <m:t>.</m:t>
+                      <m:t>1.</m:t>
                     </m:r>
                     <m:r>
                       <a:rPr lang="en-US" b="0" i="1" smtClean="0">
                         <a:latin typeface="Cambria Math" panose="02040503050406030204" pitchFamily="18" charset="0"/>
                       </a:rPr>
-                      <m:t>3</m:t>
-                    </m:r>
-                    <m:r>
-                      <a:rPr lang="en-US" b="0" i="1" smtClean="0">
-                        <a:latin typeface="Cambria Math" panose="02040503050406030204" pitchFamily="18" charset="0"/>
-                      </a:rPr>
-                      <m:t>&lt;</m:t>
+                      <m:t>3&lt;</m:t>
                     </m:r>
                     <m:sSup>
                       <m:sSupPr>
@@ -19767,13 +20502,7 @@
                           <a:rPr lang="en-US" i="1">
                             <a:latin typeface="Cambria Math"/>
                           </a:rPr>
-                          <m:t>1</m:t>
-                        </m:r>
-                        <m:r>
-                          <a:rPr lang="en-US" i="1">
-                            <a:latin typeface="Cambria Math"/>
-                          </a:rPr>
-                          <m:t>.</m:t>
+                          <m:t>1.</m:t>
                         </m:r>
                         <m:r>
                           <a:rPr lang="en-US" b="0" i="1" smtClean="0">
@@ -19814,25 +20543,7 @@
                       <a:rPr lang="en-US" b="0" i="1" smtClean="0">
                         <a:latin typeface="Cambria Math" panose="02040503050406030204" pitchFamily="18" charset="0"/>
                       </a:rPr>
-                      <m:t>=</m:t>
-                    </m:r>
-                    <m:r>
-                      <a:rPr lang="en-US" b="0" i="1" smtClean="0">
-                        <a:latin typeface="Cambria Math" panose="02040503050406030204" pitchFamily="18" charset="0"/>
-                      </a:rPr>
-                      <m:t>1</m:t>
-                    </m:r>
-                    <m:r>
-                      <a:rPr lang="en-US" b="0" i="1" smtClean="0">
-                        <a:latin typeface="Cambria Math" panose="02040503050406030204" pitchFamily="18" charset="0"/>
-                      </a:rPr>
-                      <m:t>.</m:t>
-                    </m:r>
-                    <m:r>
-                      <a:rPr lang="en-US" b="0" i="1" smtClean="0">
-                        <a:latin typeface="Cambria Math" panose="02040503050406030204" pitchFamily="18" charset="0"/>
-                      </a:rPr>
-                      <m:t>3</m:t>
+                      <m:t>=1.3</m:t>
                     </m:r>
                   </m:oMath>
                 </a14:m>
@@ -19851,13 +20562,7 @@
                       <a:rPr lang="en-US" i="1">
                         <a:latin typeface="Cambria Math"/>
                       </a:rPr>
-                      <m:t>1</m:t>
-                    </m:r>
-                    <m:r>
-                      <a:rPr lang="en-US" i="1">
-                        <a:latin typeface="Cambria Math"/>
-                      </a:rPr>
-                      <m:t>.</m:t>
+                      <m:t>1.</m:t>
                     </m:r>
                     <m:r>
                       <a:rPr lang="en-US" b="0" i="1" smtClean="0">
@@ -19881,31 +20586,7 @@
                       <a:rPr lang="en-US" i="1">
                         <a:latin typeface="Cambria Math"/>
                       </a:rPr>
-                      <m:t>(</m:t>
-                    </m:r>
-                    <m:r>
-                      <a:rPr lang="en-US" i="1">
-                        <a:latin typeface="Cambria Math"/>
-                      </a:rPr>
-                      <m:t>1</m:t>
-                    </m:r>
-                    <m:r>
-                      <a:rPr lang="en-US" i="1">
-                        <a:latin typeface="Cambria Math"/>
-                      </a:rPr>
-                      <m:t>+</m:t>
-                    </m:r>
-                    <m:r>
-                      <a:rPr lang="en-US" i="1">
-                        <a:latin typeface="Cambria Math"/>
-                      </a:rPr>
-                      <m:t>0</m:t>
-                    </m:r>
-                    <m:r>
-                      <a:rPr lang="en-US" i="1">
-                        <a:latin typeface="Cambria Math"/>
-                      </a:rPr>
-                      <m:t>.</m:t>
+                      <m:t>(1+0.</m:t>
                     </m:r>
                     <m:r>
                       <a:rPr lang="en-US" b="0" i="1" smtClean="0">
@@ -19967,13 +20648,7 @@
                       <a:rPr lang="en-US" b="0" i="1" smtClean="0">
                         <a:latin typeface="Cambria Math"/>
                       </a:rPr>
-                      <m:t>=</m:t>
-                    </m:r>
-                    <m:r>
-                      <a:rPr lang="en-US" b="0" i="1" smtClean="0">
-                        <a:latin typeface="Cambria Math"/>
-                      </a:rPr>
-                      <m:t>0</m:t>
+                      <m:t>=0</m:t>
                     </m:r>
                   </m:oMath>
                 </a14:m>
@@ -20012,31 +20687,7 @@
                       <a:rPr lang="en-US" i="1">
                         <a:latin typeface="Cambria Math"/>
                       </a:rPr>
-                      <m:t>+</m:t>
-                    </m:r>
-                    <m:r>
-                      <a:rPr lang="en-US" i="1">
-                        <a:latin typeface="Cambria Math"/>
-                      </a:rPr>
-                      <m:t>127</m:t>
-                    </m:r>
-                    <m:r>
-                      <a:rPr lang="en-US" i="1">
-                        <a:latin typeface="Cambria Math"/>
-                      </a:rPr>
-                      <m:t>=</m:t>
-                    </m:r>
-                    <m:r>
-                      <a:rPr lang="en-US" i="1">
-                        <a:latin typeface="Cambria Math"/>
-                      </a:rPr>
-                      <m:t>127</m:t>
-                    </m:r>
-                    <m:r>
-                      <a:rPr lang="en-US" i="1">
-                        <a:latin typeface="Cambria Math"/>
-                      </a:rPr>
-                      <m:t>=</m:t>
+                      <m:t>+127=127=</m:t>
                     </m:r>
                     <m:sSub>
                       <m:sSubPr>
@@ -20098,13 +20749,7 @@
                           <a:rPr lang="en-US" b="0" i="1" smtClean="0">
                             <a:latin typeface="Cambria Math"/>
                           </a:rPr>
-                          <m:t>0</m:t>
-                        </m:r>
-                        <m:r>
-                          <a:rPr lang="en-US" b="0" i="1" smtClean="0">
-                            <a:latin typeface="Cambria Math"/>
-                          </a:rPr>
-                          <m:t>.</m:t>
+                          <m:t>0.</m:t>
                         </m:r>
                         <m:r>
                           <a:rPr lang="en-US" b="0" i="1" smtClean="0">
@@ -20122,16 +20767,7 @@
                             </a:solidFill>
                             <a:latin typeface="Cambria Math" panose="02040503050406030204" pitchFamily="18" charset="0"/>
                           </a:rPr>
-                          <m:t>001100110011</m:t>
-                        </m:r>
-                        <m:r>
-                          <a:rPr lang="en-US" b="0" i="1" smtClean="0">
-                            <a:solidFill>
-                              <a:srgbClr val="00B050"/>
-                            </a:solidFill>
-                            <a:latin typeface="Cambria Math" panose="02040503050406030204" pitchFamily="18" charset="0"/>
-                          </a:rPr>
-                          <m:t>…</m:t>
+                          <m:t>001100110011…</m:t>
                         </m:r>
                       </m:e>
                       <m:sub>
@@ -20208,13 +20844,7 @@
                           <a:rPr lang="en-US" sz="2400" i="1">
                             <a:latin typeface="Cambria Math"/>
                           </a:rPr>
-                          <m:t>−</m:t>
-                        </m:r>
-                        <m:r>
-                          <a:rPr lang="en-US" sz="2400" i="1">
-                            <a:latin typeface="Cambria Math"/>
-                          </a:rPr>
-                          <m:t>1</m:t>
+                          <m:t>−1</m:t>
                         </m:r>
                       </m:sup>
                     </m:sSup>
@@ -20234,13 +20864,7 @@
                       <a:rPr lang="en-US" sz="2400" b="0" i="1" smtClean="0">
                         <a:latin typeface="Cambria Math" panose="02040503050406030204" pitchFamily="18" charset="0"/>
                       </a:rPr>
-                      <m:t>2</m:t>
-                    </m:r>
-                    <m:r>
-                      <a:rPr lang="en-US" sz="2400" b="0" i="1" smtClean="0">
-                        <a:latin typeface="Cambria Math" panose="02040503050406030204" pitchFamily="18" charset="0"/>
-                      </a:rPr>
-                      <m:t>×</m:t>
+                      <m:t>2×</m:t>
                     </m:r>
                     <m:sSup>
                       <m:sSupPr>
@@ -20263,13 +20887,7 @@
                           <a:rPr lang="en-US" sz="2400" i="1">
                             <a:latin typeface="Cambria Math"/>
                           </a:rPr>
-                          <m:t>−</m:t>
-                        </m:r>
-                        <m:r>
-                          <a:rPr lang="en-US" sz="2400" i="1">
-                            <a:latin typeface="Cambria Math"/>
-                          </a:rPr>
-                          <m:t>2</m:t>
+                          <m:t>−2</m:t>
                         </m:r>
                       </m:sup>
                     </m:sSup>
@@ -20289,13 +20907,7 @@
                       <a:rPr lang="en-US" sz="2400" b="0" i="1" smtClean="0">
                         <a:latin typeface="Cambria Math" panose="02040503050406030204" pitchFamily="18" charset="0"/>
                       </a:rPr>
-                      <m:t>3</m:t>
-                    </m:r>
-                    <m:r>
-                      <a:rPr lang="en-US" sz="2400" b="0" i="1" smtClean="0">
-                        <a:latin typeface="Cambria Math" panose="02040503050406030204" pitchFamily="18" charset="0"/>
-                      </a:rPr>
-                      <m:t>×</m:t>
+                      <m:t>3×</m:t>
                     </m:r>
                     <m:sSup>
                       <m:sSupPr>
@@ -20318,13 +20930,7 @@
                           <a:rPr lang="en-US" sz="2400" i="1">
                             <a:latin typeface="Cambria Math"/>
                           </a:rPr>
-                          <m:t>−</m:t>
-                        </m:r>
-                        <m:r>
-                          <a:rPr lang="en-US" sz="2400" i="1">
-                            <a:latin typeface="Cambria Math"/>
-                          </a:rPr>
-                          <m:t>3</m:t>
+                          <m:t>−3</m:t>
                         </m:r>
                       </m:sup>
                     </m:sSup>
@@ -20344,13 +20950,7 @@
                       <a:rPr lang="en-US" sz="2400" b="0" i="1" smtClean="0">
                         <a:latin typeface="Cambria Math" panose="02040503050406030204" pitchFamily="18" charset="0"/>
                       </a:rPr>
-                      <m:t>4</m:t>
-                    </m:r>
-                    <m:r>
-                      <a:rPr lang="en-US" sz="2400" b="0" i="1" smtClean="0">
-                        <a:latin typeface="Cambria Math" panose="02040503050406030204" pitchFamily="18" charset="0"/>
-                      </a:rPr>
-                      <m:t>×</m:t>
+                      <m:t>4×</m:t>
                     </m:r>
                     <m:sSup>
                       <m:sSupPr>
@@ -20373,13 +20973,7 @@
                           <a:rPr lang="en-US" sz="2400" i="1">
                             <a:latin typeface="Cambria Math"/>
                           </a:rPr>
-                          <m:t>−</m:t>
-                        </m:r>
-                        <m:r>
-                          <a:rPr lang="en-US" sz="2400" i="1">
-                            <a:latin typeface="Cambria Math"/>
-                          </a:rPr>
-                          <m:t>4</m:t>
+                          <m:t>−4</m:t>
                         </m:r>
                       </m:sup>
                     </m:sSup>
@@ -20401,13 +20995,7 @@
                       <a:rPr lang="en-US" i="1">
                         <a:latin typeface="Cambria Math"/>
                       </a:rPr>
-                      <m:t>0</m:t>
-                    </m:r>
-                    <m:r>
-                      <a:rPr lang="en-US" i="1">
-                        <a:latin typeface="Cambria Math"/>
-                      </a:rPr>
-                      <m:t>.</m:t>
+                      <m:t>0.</m:t>
                     </m:r>
                     <m:r>
                       <a:rPr lang="en-US" b="0" i="1" smtClean="0">
@@ -20419,19 +21007,7 @@
                       <a:rPr lang="en-US" i="1">
                         <a:latin typeface="Cambria Math"/>
                       </a:rPr>
-                      <m:t>×</m:t>
-                    </m:r>
-                    <m:r>
-                      <a:rPr lang="en-US" i="1">
-                        <a:latin typeface="Cambria Math"/>
-                      </a:rPr>
-                      <m:t>2</m:t>
-                    </m:r>
-                    <m:r>
-                      <a:rPr lang="en-US" i="1">
-                        <a:latin typeface="Cambria Math"/>
-                      </a:rPr>
-                      <m:t>=</m:t>
+                      <m:t>×2=</m:t>
                     </m:r>
                     <m:r>
                       <a:rPr lang="en-US" b="0" i="1" smtClean="0">
@@ -20443,13 +21019,7 @@
                       <a:rPr lang="en-US" i="1">
                         <a:latin typeface="Cambria Math"/>
                       </a:rPr>
-                      <m:t>.</m:t>
-                    </m:r>
-                    <m:r>
-                      <a:rPr lang="en-US" i="1">
-                        <a:latin typeface="Cambria Math"/>
-                      </a:rPr>
-                      <m:t>6</m:t>
+                      <m:t>.6</m:t>
                     </m:r>
                   </m:oMath>
                 </a14:m>
@@ -20466,55 +21036,7 @@
                       <a:rPr lang="en-US" i="1">
                         <a:latin typeface="Cambria Math"/>
                       </a:rPr>
-                      <m:t>0</m:t>
-                    </m:r>
-                    <m:r>
-                      <a:rPr lang="en-US" i="1">
-                        <a:latin typeface="Cambria Math"/>
-                      </a:rPr>
-                      <m:t>.</m:t>
-                    </m:r>
-                    <m:r>
-                      <a:rPr lang="en-US" i="1">
-                        <a:latin typeface="Cambria Math"/>
-                      </a:rPr>
-                      <m:t>6</m:t>
-                    </m:r>
-                    <m:r>
-                      <a:rPr lang="en-US" i="1">
-                        <a:latin typeface="Cambria Math"/>
-                      </a:rPr>
-                      <m:t>×</m:t>
-                    </m:r>
-                    <m:r>
-                      <a:rPr lang="en-US" i="1">
-                        <a:latin typeface="Cambria Math"/>
-                      </a:rPr>
-                      <m:t>2</m:t>
-                    </m:r>
-                    <m:r>
-                      <a:rPr lang="en-US" i="1">
-                        <a:latin typeface="Cambria Math"/>
-                      </a:rPr>
-                      <m:t>=</m:t>
-                    </m:r>
-                    <m:r>
-                      <a:rPr lang="en-US" i="1">
-                        <a:latin typeface="Cambria Math"/>
-                      </a:rPr>
-                      <m:t>1</m:t>
-                    </m:r>
-                    <m:r>
-                      <a:rPr lang="en-US" i="1">
-                        <a:latin typeface="Cambria Math"/>
-                      </a:rPr>
-                      <m:t>.</m:t>
-                    </m:r>
-                    <m:r>
-                      <a:rPr lang="en-US" i="1">
-                        <a:latin typeface="Cambria Math"/>
-                      </a:rPr>
-                      <m:t>2</m:t>
+                      <m:t>0.6×2=1.2</m:t>
                     </m:r>
                   </m:oMath>
                 </a14:m>
@@ -20531,49 +21053,7 @@
                       <a:rPr lang="en-US" i="1">
                         <a:latin typeface="Cambria Math"/>
                       </a:rPr>
-                      <m:t>0</m:t>
-                    </m:r>
-                    <m:r>
-                      <a:rPr lang="en-US" i="1">
-                        <a:latin typeface="Cambria Math"/>
-                      </a:rPr>
-                      <m:t>.</m:t>
-                    </m:r>
-                    <m:r>
-                      <a:rPr lang="en-US" i="1">
-                        <a:latin typeface="Cambria Math"/>
-                      </a:rPr>
-                      <m:t>2</m:t>
-                    </m:r>
-                    <m:r>
-                      <a:rPr lang="en-US" i="1">
-                        <a:latin typeface="Cambria Math"/>
-                      </a:rPr>
-                      <m:t>×</m:t>
-                    </m:r>
-                    <m:r>
-                      <a:rPr lang="en-US" i="1">
-                        <a:latin typeface="Cambria Math"/>
-                      </a:rPr>
-                      <m:t>2</m:t>
-                    </m:r>
-                    <m:r>
-                      <a:rPr lang="en-US" i="1">
-                        <a:latin typeface="Cambria Math"/>
-                      </a:rPr>
-                      <m:t>=</m:t>
-                    </m:r>
-                    <m:r>
-                      <a:rPr lang="en-US" i="1">
-                        <a:latin typeface="Cambria Math"/>
-                      </a:rPr>
-                      <m:t>0</m:t>
-                    </m:r>
-                    <m:r>
-                      <a:rPr lang="en-US" i="1">
-                        <a:latin typeface="Cambria Math"/>
-                      </a:rPr>
-                      <m:t>.</m:t>
+                      <m:t>0.2×2=0.</m:t>
                     </m:r>
                     <m:r>
                       <a:rPr lang="en-US" b="0" i="1" smtClean="0">
@@ -20596,13 +21076,7 @@
                       <a:rPr lang="en-US" i="1">
                         <a:latin typeface="Cambria Math"/>
                       </a:rPr>
-                      <m:t>0</m:t>
-                    </m:r>
-                    <m:r>
-                      <a:rPr lang="en-US" i="1">
-                        <a:latin typeface="Cambria Math"/>
-                      </a:rPr>
-                      <m:t>.</m:t>
+                      <m:t>0.</m:t>
                     </m:r>
                     <m:r>
                       <a:rPr lang="en-US" b="0" i="1" smtClean="0">
@@ -20614,37 +21088,13 @@
                       <a:rPr lang="en-US" i="1">
                         <a:latin typeface="Cambria Math"/>
                       </a:rPr>
-                      <m:t>×</m:t>
-                    </m:r>
-                    <m:r>
-                      <a:rPr lang="en-US" i="1">
-                        <a:latin typeface="Cambria Math"/>
-                      </a:rPr>
-                      <m:t>2</m:t>
-                    </m:r>
-                    <m:r>
-                      <a:rPr lang="en-US" i="1">
-                        <a:latin typeface="Cambria Math"/>
-                      </a:rPr>
-                      <m:t>=</m:t>
+                      <m:t>×2=</m:t>
                     </m:r>
                     <m:r>
                       <a:rPr lang="en-US" b="0" i="1" smtClean="0">
                         <a:latin typeface="Cambria Math" panose="02040503050406030204" pitchFamily="18" charset="0"/>
                       </a:rPr>
-                      <m:t>0</m:t>
-                    </m:r>
-                    <m:r>
-                      <a:rPr lang="en-US" b="0" i="1" smtClean="0">
-                        <a:latin typeface="Cambria Math" panose="02040503050406030204" pitchFamily="18" charset="0"/>
-                      </a:rPr>
-                      <m:t>.</m:t>
-                    </m:r>
-                    <m:r>
-                      <a:rPr lang="en-US" b="0" i="1" smtClean="0">
-                        <a:latin typeface="Cambria Math" panose="02040503050406030204" pitchFamily="18" charset="0"/>
-                      </a:rPr>
-                      <m:t>8</m:t>
+                      <m:t>0.8</m:t>
                     </m:r>
                   </m:oMath>
                 </a14:m>
@@ -20661,13 +21111,7 @@
                       <a:rPr lang="en-US" i="1">
                         <a:latin typeface="Cambria Math"/>
                       </a:rPr>
-                      <m:t>0</m:t>
-                    </m:r>
-                    <m:r>
-                      <a:rPr lang="en-US" i="1">
-                        <a:latin typeface="Cambria Math"/>
-                      </a:rPr>
-                      <m:t>.</m:t>
+                      <m:t>0.</m:t>
                     </m:r>
                     <m:r>
                       <a:rPr lang="en-US" b="0" i="1" smtClean="0">
@@ -20679,37 +21123,13 @@
                       <a:rPr lang="en-US" i="1">
                         <a:latin typeface="Cambria Math"/>
                       </a:rPr>
-                      <m:t>×</m:t>
-                    </m:r>
-                    <m:r>
-                      <a:rPr lang="en-US" i="1">
-                        <a:latin typeface="Cambria Math"/>
-                      </a:rPr>
-                      <m:t>2</m:t>
-                    </m:r>
-                    <m:r>
-                      <a:rPr lang="en-US" i="1">
-                        <a:latin typeface="Cambria Math"/>
-                      </a:rPr>
-                      <m:t>=</m:t>
+                      <m:t>×2=</m:t>
                     </m:r>
                     <m:r>
                       <a:rPr lang="en-US" b="0" i="1" smtClean="0">
                         <a:latin typeface="Cambria Math" panose="02040503050406030204" pitchFamily="18" charset="0"/>
                       </a:rPr>
-                      <m:t>1</m:t>
-                    </m:r>
-                    <m:r>
-                      <a:rPr lang="en-US" b="0" i="1" smtClean="0">
-                        <a:latin typeface="Cambria Math" panose="02040503050406030204" pitchFamily="18" charset="0"/>
-                      </a:rPr>
-                      <m:t>.</m:t>
-                    </m:r>
-                    <m:r>
-                      <a:rPr lang="en-US" b="0" i="1" smtClean="0">
-                        <a:latin typeface="Cambria Math" panose="02040503050406030204" pitchFamily="18" charset="0"/>
-                      </a:rPr>
-                      <m:t>6</m:t>
+                      <m:t>1.6</m:t>
                     </m:r>
                   </m:oMath>
                 </a14:m>
@@ -20726,13 +21146,7 @@
                       <a:rPr lang="en-US" i="1">
                         <a:latin typeface="Cambria Math"/>
                       </a:rPr>
-                      <m:t>0</m:t>
-                    </m:r>
-                    <m:r>
-                      <a:rPr lang="en-US" i="1">
-                        <a:latin typeface="Cambria Math"/>
-                      </a:rPr>
-                      <m:t>.</m:t>
+                      <m:t>0.</m:t>
                     </m:r>
                     <m:r>
                       <a:rPr lang="en-US" b="0" i="1" smtClean="0">
@@ -20744,19 +21158,7 @@
                       <a:rPr lang="en-US" i="1">
                         <a:latin typeface="Cambria Math"/>
                       </a:rPr>
-                      <m:t>×</m:t>
-                    </m:r>
-                    <m:r>
-                      <a:rPr lang="en-US" i="1">
-                        <a:latin typeface="Cambria Math"/>
-                      </a:rPr>
-                      <m:t>2</m:t>
-                    </m:r>
-                    <m:r>
-                      <a:rPr lang="en-US" i="1">
-                        <a:latin typeface="Cambria Math"/>
-                      </a:rPr>
-                      <m:t>=</m:t>
+                      <m:t>×2=</m:t>
                     </m:r>
                     <m:r>
                       <a:rPr lang="en-US" b="0" i="1" smtClean="0">
@@ -22073,7 +22475,21 @@
                         <a:latin typeface="Cambria Math" panose="02040503050406030204" pitchFamily="18" charset="0"/>
                         <a:ea typeface="Cambria Math" panose="02040503050406030204" pitchFamily="18" charset="0"/>
                       </a:rPr>
-                      <m:t>∞+∞</m:t>
+                      <m:t>∞</m:t>
+                    </m:r>
+                    <m:r>
+                      <a:rPr lang="en-US" i="1">
+                        <a:latin typeface="Cambria Math" panose="02040503050406030204" pitchFamily="18" charset="0"/>
+                        <a:ea typeface="Cambria Math" panose="02040503050406030204" pitchFamily="18" charset="0"/>
+                      </a:rPr>
+                      <m:t>+</m:t>
+                    </m:r>
+                    <m:r>
+                      <a:rPr lang="en-US" i="1">
+                        <a:latin typeface="Cambria Math" panose="02040503050406030204" pitchFamily="18" charset="0"/>
+                        <a:ea typeface="Cambria Math" panose="02040503050406030204" pitchFamily="18" charset="0"/>
+                      </a:rPr>
+                      <m:t>∞</m:t>
                     </m:r>
                   </m:oMath>
                 </a14:m>
@@ -27093,13 +27509,7 @@
                             <a:rPr lang="en-US" sz="2000">
                               <a:latin typeface="Cambria Math" panose="02040503050406030204" pitchFamily="18" charset="0"/>
                             </a:rPr>
-                            <m:t>2</m:t>
-                          </m:r>
-                          <m:r>
-                            <a:rPr lang="en-US" sz="2000">
-                              <a:latin typeface="Cambria Math" panose="02040503050406030204" pitchFamily="18" charset="0"/>
-                            </a:rPr>
-                            <m:t> </m:t>
+                            <m:t>2 </m:t>
                           </m:r>
                         </m:sub>
                       </m:sSub>
@@ -27395,13 +27805,7 @@
                             <a:rPr lang="en-US" sz="2000">
                               <a:latin typeface="Cambria Math" panose="02040503050406030204" pitchFamily="18" charset="0"/>
                             </a:rPr>
-                            <m:t>−</m:t>
-                          </m:r>
-                          <m:r>
-                            <a:rPr lang="en-US" sz="2000">
-                              <a:latin typeface="Cambria Math" panose="02040503050406030204" pitchFamily="18" charset="0"/>
-                            </a:rPr>
-                            <m:t>1</m:t>
+                            <m:t>−1</m:t>
                           </m:r>
                         </m:sup>
                       </m:sSup>
@@ -27447,13 +27851,7 @@
                             <a:rPr lang="en-US" sz="2000">
                               <a:latin typeface="Cambria Math" panose="02040503050406030204" pitchFamily="18" charset="0"/>
                             </a:rPr>
-                            <m:t>−</m:t>
-                          </m:r>
-                          <m:r>
-                            <a:rPr lang="en-US" sz="2000">
-                              <a:latin typeface="Cambria Math" panose="02040503050406030204" pitchFamily="18" charset="0"/>
-                            </a:rPr>
-                            <m:t>2</m:t>
+                            <m:t>−2</m:t>
                           </m:r>
                         </m:sup>
                       </m:sSup>
@@ -27499,13 +27897,7 @@
                             <a:rPr lang="en-US" sz="2000">
                               <a:latin typeface="Cambria Math" panose="02040503050406030204" pitchFamily="18" charset="0"/>
                             </a:rPr>
-                            <m:t>−</m:t>
-                          </m:r>
-                          <m:r>
-                            <a:rPr lang="en-US" sz="2000">
-                              <a:latin typeface="Cambria Math" panose="02040503050406030204" pitchFamily="18" charset="0"/>
-                            </a:rPr>
-                            <m:t>3</m:t>
+                            <m:t>−3</m:t>
                           </m:r>
                         </m:sup>
                       </m:sSup>
@@ -27551,13 +27943,7 @@
                         <a:rPr lang="en-US" sz="2000">
                           <a:latin typeface="Cambria Math" panose="02040503050406030204" pitchFamily="18" charset="0"/>
                         </a:rPr>
-                        <m:t>.</m:t>
-                      </m:r>
-                      <m:r>
-                        <a:rPr lang="en-US" sz="2000">
-                          <a:latin typeface="Cambria Math" panose="02040503050406030204" pitchFamily="18" charset="0"/>
-                        </a:rPr>
-                        <m:t>625</m:t>
+                        <m:t>.625</m:t>
                       </m:r>
                     </m:oMath>
                   </m:oMathPara>
@@ -27878,13 +28264,7 @@
                             <a:rPr lang="en-US" sz="2000">
                               <a:latin typeface="Cambria Math" panose="02040503050406030204" pitchFamily="18" charset="0"/>
                             </a:rPr>
-                            <m:t>2</m:t>
-                          </m:r>
-                          <m:r>
-                            <a:rPr lang="en-US" sz="2000">
-                              <a:latin typeface="Cambria Math" panose="02040503050406030204" pitchFamily="18" charset="0"/>
-                            </a:rPr>
-                            <m:t> </m:t>
+                            <m:t>2 </m:t>
                           </m:r>
                         </m:sub>
                       </m:sSub>
@@ -27992,25 +28372,7 @@
                         <a:rPr lang="en-US" sz="2000" i="1">
                           <a:latin typeface="Cambria Math" panose="02040503050406030204" pitchFamily="18" charset="0"/>
                         </a:rPr>
-                        <m:t>=</m:t>
-                      </m:r>
-                      <m:r>
-                        <a:rPr lang="en-US" sz="2000" i="1">
-                          <a:latin typeface="Cambria Math" panose="02040503050406030204" pitchFamily="18" charset="0"/>
-                        </a:rPr>
-                        <m:t>21</m:t>
-                      </m:r>
-                      <m:r>
-                        <a:rPr lang="en-US" sz="2000" i="1">
-                          <a:latin typeface="Cambria Math" panose="02040503050406030204" pitchFamily="18" charset="0"/>
-                        </a:rPr>
-                        <m:t>.</m:t>
-                      </m:r>
-                      <m:r>
-                        <a:rPr lang="en-US" sz="2000" i="1">
-                          <a:latin typeface="Cambria Math" panose="02040503050406030204" pitchFamily="18" charset="0"/>
-                        </a:rPr>
-                        <m:t>625</m:t>
+                        <m:t>=21.625</m:t>
                       </m:r>
                     </m:oMath>
                   </m:oMathPara>
@@ -31715,8 +32077,8 @@
           </p:sp>
         </mc:Fallback>
       </mc:AlternateContent>
-      <mc:AlternateContent xmlns:mc="http://schemas.openxmlformats.org/markup-compatibility/2006" xmlns:a14="http://schemas.microsoft.com/office/drawing/2010/main">
-        <mc:Choice Requires="a14">
+      <mc:AlternateContent xmlns:mc="http://schemas.openxmlformats.org/markup-compatibility/2006">
+        <mc:Choice xmlns:a14="http://schemas.microsoft.com/office/drawing/2010/main" Requires="a14">
           <p:sp>
             <p:nvSpPr>
               <p:cNvPr id="9" name="Rectangle 8">
@@ -31731,7 +32093,7 @@
             </p:nvSpPr>
             <p:spPr>
               <a:xfrm>
-                <a:off x="8570829" y="2916633"/>
+                <a:off x="8618549" y="2907553"/>
                 <a:ext cx="2155783" cy="461665"/>
               </a:xfrm>
               <a:prstGeom prst="rect">
@@ -31796,7 +32158,7 @@
             </p:txBody>
           </p:sp>
         </mc:Choice>
-        <mc:Fallback xmlns="">
+        <mc:Fallback>
           <p:sp>
             <p:nvSpPr>
               <p:cNvPr id="9" name="Rectangle 8">
@@ -31813,7 +32175,7 @@
             </p:nvSpPr>
             <p:spPr>
               <a:xfrm>
-                <a:off x="8570829" y="2916633"/>
+                <a:off x="8618549" y="2907553"/>
                 <a:ext cx="2155783" cy="461665"/>
               </a:xfrm>
               <a:prstGeom prst="rect">
@@ -31822,7 +32184,7 @@
               <a:blipFill>
                 <a:blip r:embed="rId7"/>
                 <a:stretch>
-                  <a:fillRect/>
+                  <a:fillRect r="-283"/>
                 </a:stretch>
               </a:blipFill>
             </p:spPr>
@@ -31841,8 +32203,8 @@
           </p:sp>
         </mc:Fallback>
       </mc:AlternateContent>
-      <mc:AlternateContent xmlns:mc="http://schemas.openxmlformats.org/markup-compatibility/2006" xmlns:a14="http://schemas.microsoft.com/office/drawing/2010/main">
-        <mc:Choice Requires="a14">
+      <mc:AlternateContent xmlns:mc="http://schemas.openxmlformats.org/markup-compatibility/2006">
+        <mc:Choice xmlns:a14="http://schemas.microsoft.com/office/drawing/2010/main" Requires="a14">
           <p:sp>
             <p:nvSpPr>
               <p:cNvPr id="10" name="Rectangle 9">
@@ -31857,7 +32219,7 @@
             </p:nvSpPr>
             <p:spPr>
               <a:xfrm>
-                <a:off x="8605009" y="3450033"/>
+                <a:off x="8618549" y="3440953"/>
                 <a:ext cx="1496435" cy="461665"/>
               </a:xfrm>
               <a:prstGeom prst="rect">
@@ -31891,7 +32253,7 @@
             </p:txBody>
           </p:sp>
         </mc:Choice>
-        <mc:Fallback xmlns="">
+        <mc:Fallback>
           <p:sp>
             <p:nvSpPr>
               <p:cNvPr id="10" name="Rectangle 9">
@@ -31908,7 +32270,7 @@
             </p:nvSpPr>
             <p:spPr>
               <a:xfrm>
-                <a:off x="8605009" y="3450033"/>
+                <a:off x="8618549" y="3440953"/>
                 <a:ext cx="1496435" cy="461665"/>
               </a:xfrm>
               <a:prstGeom prst="rect">
@@ -32572,8 +32934,8 @@
           </a:p>
         </p:txBody>
       </p:sp>
-      <mc:AlternateContent xmlns:mc="http://schemas.openxmlformats.org/markup-compatibility/2006" xmlns:a14="http://schemas.microsoft.com/office/drawing/2010/main">
-        <mc:Choice Requires="a14">
+      <mc:AlternateContent xmlns:mc="http://schemas.openxmlformats.org/markup-compatibility/2006">
+        <mc:Choice xmlns:a14="http://schemas.microsoft.com/office/drawing/2010/main" Requires="a14">
           <p:sp>
             <p:nvSpPr>
               <p:cNvPr id="4" name="Content Placeholder 3">
@@ -32877,12 +33239,18 @@
                 </a:r>
               </a:p>
               <a:p>
+                <a:r>
+                  <a:rPr lang="en-US" dirty="0"/>
+                  <a:t>The two definitions are mathematically identical (proof omitted)</a:t>
+                </a:r>
+              </a:p>
+              <a:p>
                 <a:endParaRPr lang="en-US" dirty="0"/>
               </a:p>
             </p:txBody>
           </p:sp>
         </mc:Choice>
-        <mc:Fallback xmlns="">
+        <mc:Fallback>
           <p:sp>
             <p:nvSpPr>
               <p:cNvPr id="4" name="Content Placeholder 3">
@@ -33014,8 +33382,8 @@
           </a:p>
         </p:txBody>
       </p:sp>
-      <mc:AlternateContent xmlns:mc="http://schemas.openxmlformats.org/markup-compatibility/2006" xmlns:a14="http://schemas.microsoft.com/office/drawing/2010/main">
-        <mc:Choice Requires="a14">
+      <mc:AlternateContent xmlns:mc="http://schemas.openxmlformats.org/markup-compatibility/2006">
+        <mc:Choice xmlns:a14="http://schemas.microsoft.com/office/drawing/2010/main" Requires="a14">
           <p:sp>
             <p:nvSpPr>
               <p:cNvPr id="4" name="Content Placeholder 3"/>
@@ -33095,25 +33463,7 @@
                         </a:solidFill>
                         <a:latin typeface="Cambria Math" panose="02040503050406030204" pitchFamily="18" charset="0"/>
                       </a:rPr>
-                      <m:t>12867</m:t>
-                    </m:r>
-                    <m:r>
-                      <a:rPr lang="en-US" sz="2200" i="1">
-                        <a:solidFill>
-                          <a:srgbClr val="0000FF"/>
-                        </a:solidFill>
-                        <a:latin typeface="Cambria Math" panose="02040503050406030204" pitchFamily="18" charset="0"/>
-                      </a:rPr>
-                      <m:t>.</m:t>
-                    </m:r>
-                    <m:r>
-                      <a:rPr lang="en-US" sz="2200" i="1">
-                        <a:solidFill>
-                          <a:srgbClr val="0000FF"/>
-                        </a:solidFill>
-                        <a:latin typeface="Cambria Math" panose="02040503050406030204" pitchFamily="18" charset="0"/>
-                      </a:rPr>
-                      <m:t>964928</m:t>
+                      <m:t>12867.964928</m:t>
                     </m:r>
                   </m:oMath>
                 </a14:m>
@@ -33149,19 +33499,7 @@
                           <a:rPr lang="en-US" sz="2200" i="1">
                             <a:latin typeface="Cambria Math" panose="02040503050406030204" pitchFamily="18" charset="0"/>
                           </a:rPr>
-                          <m:t>12867</m:t>
-                        </m:r>
-                        <m:r>
-                          <a:rPr lang="en-US" sz="2200" i="1">
-                            <a:latin typeface="Cambria Math" panose="02040503050406030204" pitchFamily="18" charset="0"/>
-                          </a:rPr>
-                          <m:t>.</m:t>
-                        </m:r>
-                        <m:r>
-                          <a:rPr lang="en-US" sz="2200" i="1">
-                            <a:latin typeface="Cambria Math" panose="02040503050406030204" pitchFamily="18" charset="0"/>
-                          </a:rPr>
-                          <m:t>964928</m:t>
+                          <m:t>12867.964928</m:t>
                         </m:r>
                         <m:r>
                           <a:rPr lang="en-US" sz="2200">
@@ -33260,7 +33598,7 @@
                 <a:pPr lvl="0"/>
                 <a:r>
                   <a:rPr lang="en-US" sz="2200" dirty="0"/>
-                  <a:t>Final result in Hex: </a:t>
+                  <a:t>Final result in hex: </a:t>
                 </a:r>
                 <a:r>
                   <a:rPr lang="en-US" sz="2200" b="1" dirty="0">
@@ -33276,7 +33614,23 @@
               <a:p>
                 <a:r>
                   <a:rPr lang="en-US" sz="2200" dirty="0"/>
-                  <a:t>Error: </a:t>
+                  <a:t>Error = </a:t>
+                </a:r>
+                <a:r>
+                  <a:rPr lang="en-US" sz="2200" dirty="0" err="1"/>
+                  <a:t>reconstructed_value</a:t>
+                </a:r>
+                <a:r>
+                  <a:rPr lang="en-US" sz="2200" dirty="0"/>
+                  <a:t> − </a:t>
+                </a:r>
+                <a:r>
+                  <a:rPr lang="en-US" sz="2200" dirty="0" err="1"/>
+                  <a:t>true_value</a:t>
+                </a:r>
+                <a:r>
+                  <a:rPr lang="en-US" sz="2200" dirty="0"/>
+                  <a:t> = </a:t>
                 </a:r>
                 <a14:m>
                   <m:oMath xmlns:m="http://schemas.openxmlformats.org/officeDocument/2006/math">
@@ -33340,31 +33694,7 @@
                       <a:rPr lang="en-US" sz="2200" i="1">
                         <a:latin typeface="Cambria Math" panose="02040503050406030204" pitchFamily="18" charset="0"/>
                       </a:rPr>
-                      <m:t>=</m:t>
-                    </m:r>
-                    <m:r>
-                      <a:rPr lang="en-US" sz="2200" i="1">
-                        <a:latin typeface="Cambria Math" panose="02040503050406030204" pitchFamily="18" charset="0"/>
-                      </a:rPr>
-                      <m:t>8</m:t>
-                    </m:r>
-                    <m:r>
-                      <a:rPr lang="en-US" sz="2200" i="1">
-                        <a:latin typeface="Cambria Math" panose="02040503050406030204" pitchFamily="18" charset="0"/>
-                      </a:rPr>
-                      <m:t>.</m:t>
-                    </m:r>
-                    <m:r>
-                      <a:rPr lang="en-US" sz="2200" i="1">
-                        <a:latin typeface="Cambria Math" panose="02040503050406030204" pitchFamily="18" charset="0"/>
-                      </a:rPr>
-                      <m:t>5625</m:t>
-                    </m:r>
-                    <m:r>
-                      <a:rPr lang="en-US" sz="2200" i="1">
-                        <a:latin typeface="Cambria Math" panose="02040503050406030204" pitchFamily="18" charset="0"/>
-                      </a:rPr>
-                      <m:t>×</m:t>
+                      <m:t>=8.5625×</m:t>
                     </m:r>
                     <m:sSup>
                       <m:sSupPr>
@@ -33387,13 +33717,7 @@
                           <a:rPr lang="en-US" sz="2200" i="1">
                             <a:latin typeface="Cambria Math" panose="02040503050406030204" pitchFamily="18" charset="0"/>
                           </a:rPr>
-                          <m:t>−</m:t>
-                        </m:r>
-                        <m:r>
-                          <a:rPr lang="en-US" sz="2200" i="1">
-                            <a:latin typeface="Cambria Math" panose="02040503050406030204" pitchFamily="18" charset="0"/>
-                          </a:rPr>
-                          <m:t>6</m:t>
+                          <m:t>−6</m:t>
                         </m:r>
                       </m:sup>
                     </m:sSup>
@@ -33407,7 +33731,7 @@
             </p:txBody>
           </p:sp>
         </mc:Choice>
-        <mc:Fallback xmlns="">
+        <mc:Fallback>
           <p:sp>
             <p:nvSpPr>
               <p:cNvPr id="4" name="Content Placeholder 3"/>
@@ -33445,8 +33769,8 @@
           </p:sp>
         </mc:Fallback>
       </mc:AlternateContent>
-      <mc:AlternateContent xmlns:mc="http://schemas.openxmlformats.org/markup-compatibility/2006" xmlns:a14="http://schemas.microsoft.com/office/drawing/2010/main">
-        <mc:Choice Requires="a14">
+      <mc:AlternateContent xmlns:mc="http://schemas.openxmlformats.org/markup-compatibility/2006">
+        <mc:Choice xmlns:a14="http://schemas.microsoft.com/office/drawing/2010/main" Requires="a14">
           <p:sp>
             <p:nvSpPr>
               <p:cNvPr id="5" name="Rectangle 4"/>
@@ -33456,7 +33780,7 @@
             <p:spPr>
               <a:xfrm>
                 <a:off x="596630" y="2691745"/>
-                <a:ext cx="8458200" cy="461665"/>
+                <a:ext cx="10071370" cy="461665"/>
               </a:xfrm>
               <a:prstGeom prst="rect">
                 <a:avLst/>
@@ -33484,43 +33808,19 @@
                       <a:rPr lang="en-US" sz="2400">
                         <a:latin typeface="Cambria Math" panose="02040503050406030204" pitchFamily="18" charset="0"/>
                       </a:rPr>
-                      <m:t> = </m:t>
-                    </m:r>
-                    <m:r>
-                      <a:rPr lang="en-US" sz="2400">
-                        <a:latin typeface="Cambria Math" panose="02040503050406030204" pitchFamily="18" charset="0"/>
-                      </a:rPr>
-                      <m:t>3</m:t>
-                    </m:r>
-                    <m:r>
-                      <a:rPr lang="en-US" sz="2400">
-                        <a:latin typeface="Cambria Math" panose="02040503050406030204" pitchFamily="18" charset="0"/>
-                      </a:rPr>
-                      <m:t>. </m:t>
-                    </m:r>
-                    <m:r>
-                      <a:rPr lang="en-US" sz="2400">
-                        <a:latin typeface="Cambria Math" panose="02040503050406030204" pitchFamily="18" charset="0"/>
-                      </a:rPr>
-                      <m:t>141593</m:t>
-                    </m:r>
-                    <m:r>
-                      <a:rPr lang="en-US" sz="2400">
-                        <a:latin typeface="Cambria Math" panose="02040503050406030204" pitchFamily="18" charset="0"/>
-                      </a:rPr>
-                      <m:t> </m:t>
+                      <m:t> = 3. 141593 </m:t>
                     </m:r>
                   </m:oMath>
                 </a14:m>
                 <a:r>
                   <a:rPr lang="en-US" sz="2400" dirty="0"/>
-                  <a:t> to UQ4.12</a:t>
+                  <a:t> to UQ4.12 (4 bits integer, 12 bits fraction)</a:t>
                 </a:r>
               </a:p>
             </p:txBody>
           </p:sp>
         </mc:Choice>
-        <mc:Fallback xmlns="">
+        <mc:Fallback>
           <p:sp>
             <p:nvSpPr>
               <p:cNvPr id="5" name="Rectangle 4"/>
@@ -33532,7 +33832,7 @@
             <p:spPr>
               <a:xfrm>
                 <a:off x="596630" y="2691745"/>
-                <a:ext cx="8458200" cy="461665"/>
+                <a:ext cx="10071370" cy="461665"/>
               </a:xfrm>
               <a:prstGeom prst="rect">
                 <a:avLst/>
@@ -33540,7 +33840,7 @@
               <a:blipFill>
                 <a:blip r:embed="rId3"/>
                 <a:stretch>
-                  <a:fillRect l="-1201" t="-13514" b="-29730"/>
+                  <a:fillRect l="-969" t="-10667" b="-30667"/>
                 </a:stretch>
               </a:blipFill>
             </p:spPr>
@@ -34248,8 +34548,8 @@
           </a:p>
         </p:txBody>
       </p:sp>
-      <mc:AlternateContent xmlns:mc="http://schemas.openxmlformats.org/markup-compatibility/2006" xmlns:a14="http://schemas.microsoft.com/office/drawing/2010/main">
-        <mc:Choice Requires="a14">
+      <mc:AlternateContent xmlns:mc="http://schemas.openxmlformats.org/markup-compatibility/2006">
+        <mc:Choice xmlns:a14="http://schemas.microsoft.com/office/drawing/2010/main" Requires="a14">
           <p:sp>
             <p:nvSpPr>
               <p:cNvPr id="4" name="Content Placeholder 3"/>
@@ -34670,7 +34970,7 @@
                 <a:pPr lvl="0"/>
                 <a:r>
                   <a:rPr lang="en-US" sz="2000" dirty="0"/>
-                  <a:t>Final result in Hex: </a:t>
+                  <a:t>Final result in hex: </a:t>
                 </a:r>
                 <a:r>
                   <a:rPr lang="en-US" sz="2000" b="1" dirty="0">
@@ -34686,7 +34986,23 @@
               <a:p>
                 <a:r>
                   <a:rPr lang="en-US" sz="2000" dirty="0"/>
-                  <a:t>Error: </a:t>
+                  <a:t>Error = </a:t>
+                </a:r>
+                <a:r>
+                  <a:rPr lang="en-US" sz="2000" dirty="0" err="1"/>
+                  <a:t>reconstructed_value</a:t>
+                </a:r>
+                <a:r>
+                  <a:rPr lang="en-US" sz="2000" dirty="0"/>
+                  <a:t> − </a:t>
+                </a:r>
+                <a:r>
+                  <a:rPr lang="en-US" sz="2000" dirty="0" err="1"/>
+                  <a:t>true_value</a:t>
+                </a:r>
+                <a:r>
+                  <a:rPr lang="en-US" sz="2000" dirty="0"/>
+                  <a:t> = </a:t>
                 </a:r>
                 <a14:m>
                   <m:oMath xmlns:m="http://schemas.openxmlformats.org/officeDocument/2006/math">
@@ -34820,7 +35136,7 @@
             </p:txBody>
           </p:sp>
         </mc:Choice>
-        <mc:Fallback xmlns="">
+        <mc:Fallback>
           <p:sp>
             <p:nvSpPr>
               <p:cNvPr id="4" name="Content Placeholder 3"/>
@@ -34858,8 +35174,8 @@
           </p:sp>
         </mc:Fallback>
       </mc:AlternateContent>
-      <mc:AlternateContent xmlns:mc="http://schemas.openxmlformats.org/markup-compatibility/2006" xmlns:a14="http://schemas.microsoft.com/office/drawing/2010/main">
-        <mc:Choice Requires="a14">
+      <mc:AlternateContent xmlns:mc="http://schemas.openxmlformats.org/markup-compatibility/2006">
+        <mc:Choice xmlns:a14="http://schemas.microsoft.com/office/drawing/2010/main" Requires="a14">
           <p:sp>
             <p:nvSpPr>
               <p:cNvPr id="5" name="Rectangle 4"/>
@@ -34869,7 +35185,7 @@
             <p:spPr>
               <a:xfrm>
                 <a:off x="609600" y="2888931"/>
-                <a:ext cx="8229600" cy="461665"/>
+                <a:ext cx="11277600" cy="461665"/>
               </a:xfrm>
               <a:prstGeom prst="rect">
                 <a:avLst/>
@@ -34933,13 +35249,13 @@
                 </a14:m>
                 <a:r>
                   <a:rPr lang="en-US" sz="2400" dirty="0"/>
-                  <a:t> to Q3.12</a:t>
+                  <a:t> to Q3.12 (1 sign bit, 3 bits integer, 12 bits fraction)</a:t>
                 </a:r>
               </a:p>
             </p:txBody>
           </p:sp>
         </mc:Choice>
-        <mc:Fallback xmlns="">
+        <mc:Fallback>
           <p:sp>
             <p:nvSpPr>
               <p:cNvPr id="5" name="Rectangle 4"/>
@@ -34951,7 +35267,7 @@
             <p:spPr>
               <a:xfrm>
                 <a:off x="609600" y="2888931"/>
-                <a:ext cx="8229600" cy="461665"/>
+                <a:ext cx="11277600" cy="461665"/>
               </a:xfrm>
               <a:prstGeom prst="rect">
                 <a:avLst/>
@@ -34959,7 +35275,7 @@
               <a:blipFill>
                 <a:blip r:embed="rId3"/>
                 <a:stretch>
-                  <a:fillRect l="-1235" t="-10811" b="-32432"/>
+                  <a:fillRect l="-811" t="-10526" b="-28947"/>
                 </a:stretch>
               </a:blipFill>
             </p:spPr>

--- a/PPTs/Ch12_13_Fixed_Floating_Point_Numbers.pptx
+++ b/PPTs/Ch12_13_Fixed_Floating_Point_Numbers.pptx
@@ -170,45 +170,16 @@
   <pc:docChgLst>
     <pc:chgData name="Zonghua Gu" userId="9a7e1853e1951ef5" providerId="LiveId" clId="{CF1FAA12-072C-4ED5-BA76-0FFFAEFDB88A}"/>
     <pc:docChg chg="undo redo custSel addSld delSld modSld sldOrd">
-      <pc:chgData name="Zonghua Gu" userId="9a7e1853e1951ef5" providerId="LiveId" clId="{CF1FAA12-072C-4ED5-BA76-0FFFAEFDB88A}" dt="2025-11-02T15:24:54.877" v="1426" actId="1076"/>
+      <pc:chgData name="Zonghua Gu" userId="9a7e1853e1951ef5" providerId="LiveId" clId="{CF1FAA12-072C-4ED5-BA76-0FFFAEFDB88A}" dt="2025-11-15T01:06:04.191" v="1428" actId="20577"/>
       <pc:docMkLst>
         <pc:docMk/>
       </pc:docMkLst>
-      <pc:sldChg chg="add">
-        <pc:chgData name="Zonghua Gu" userId="9a7e1853e1951ef5" providerId="LiveId" clId="{CF1FAA12-072C-4ED5-BA76-0FFFAEFDB88A}" dt="2025-10-04T20:56:33.083" v="131"/>
-        <pc:sldMkLst>
-          <pc:docMk/>
-          <pc:sldMk cId="905681104" sldId="257"/>
-        </pc:sldMkLst>
-      </pc:sldChg>
-      <pc:sldChg chg="add">
-        <pc:chgData name="Zonghua Gu" userId="9a7e1853e1951ef5" providerId="LiveId" clId="{CF1FAA12-072C-4ED5-BA76-0FFFAEFDB88A}" dt="2025-10-04T21:14:03.366" v="511"/>
-        <pc:sldMkLst>
-          <pc:docMk/>
-          <pc:sldMk cId="4111405843" sldId="258"/>
-        </pc:sldMkLst>
-      </pc:sldChg>
-      <pc:sldChg chg="add">
-        <pc:chgData name="Zonghua Gu" userId="9a7e1853e1951ef5" providerId="LiveId" clId="{CF1FAA12-072C-4ED5-BA76-0FFFAEFDB88A}" dt="2025-10-04T21:14:03.366" v="511"/>
-        <pc:sldMkLst>
-          <pc:docMk/>
-          <pc:sldMk cId="4187797743" sldId="259"/>
-        </pc:sldMkLst>
-      </pc:sldChg>
       <pc:sldChg chg="modSp add mod">
         <pc:chgData name="Zonghua Gu" userId="9a7e1853e1951ef5" providerId="LiveId" clId="{CF1FAA12-072C-4ED5-BA76-0FFFAEFDB88A}" dt="2025-11-02T15:24:54.877" v="1426" actId="1076"/>
         <pc:sldMkLst>
           <pc:docMk/>
           <pc:sldMk cId="2669434976" sldId="261"/>
         </pc:sldMkLst>
-        <pc:spChg chg="mod">
-          <ac:chgData name="Zonghua Gu" userId="9a7e1853e1951ef5" providerId="LiveId" clId="{CF1FAA12-072C-4ED5-BA76-0FFFAEFDB88A}" dt="2025-10-05T02:00:36.495" v="581" actId="20577"/>
-          <ac:spMkLst>
-            <pc:docMk/>
-            <pc:sldMk cId="2669434976" sldId="261"/>
-            <ac:spMk id="2" creationId="{00000000-0000-0000-0000-000000000000}"/>
-          </ac:spMkLst>
-        </pc:spChg>
         <pc:spChg chg="mod">
           <ac:chgData name="Zonghua Gu" userId="9a7e1853e1951ef5" providerId="LiveId" clId="{CF1FAA12-072C-4ED5-BA76-0FFFAEFDB88A}" dt="2025-11-02T15:24:54.877" v="1426" actId="1076"/>
           <ac:spMkLst>
@@ -224,38 +195,6 @@
           <pc:docMk/>
           <pc:sldMk cId="2690786522" sldId="263"/>
         </pc:sldMkLst>
-        <pc:spChg chg="mod">
-          <ac:chgData name="Zonghua Gu" userId="9a7e1853e1951ef5" providerId="LiveId" clId="{CF1FAA12-072C-4ED5-BA76-0FFFAEFDB88A}" dt="2025-10-04T21:04:43.214" v="204" actId="108"/>
-          <ac:spMkLst>
-            <pc:docMk/>
-            <pc:sldMk cId="2690786522" sldId="263"/>
-            <ac:spMk id="2" creationId="{00000000-0000-0000-0000-000000000000}"/>
-          </ac:spMkLst>
-        </pc:spChg>
-        <pc:spChg chg="mod">
-          <ac:chgData name="Zonghua Gu" userId="9a7e1853e1951ef5" providerId="LiveId" clId="{CF1FAA12-072C-4ED5-BA76-0FFFAEFDB88A}" dt="2025-10-04T21:03:34.552" v="157" actId="1076"/>
-          <ac:spMkLst>
-            <pc:docMk/>
-            <pc:sldMk cId="2690786522" sldId="263"/>
-            <ac:spMk id="4" creationId="{588CFBB5-1212-601B-2237-368E039FFF71}"/>
-          </ac:spMkLst>
-        </pc:spChg>
-        <pc:spChg chg="add mod">
-          <ac:chgData name="Zonghua Gu" userId="9a7e1853e1951ef5" providerId="LiveId" clId="{CF1FAA12-072C-4ED5-BA76-0FFFAEFDB88A}" dt="2025-10-04T21:03:34.552" v="157" actId="1076"/>
-          <ac:spMkLst>
-            <pc:docMk/>
-            <pc:sldMk cId="2690786522" sldId="263"/>
-            <ac:spMk id="6" creationId="{8FAE8020-4EB0-3A3C-B817-2E0CDD071A13}"/>
-          </ac:spMkLst>
-        </pc:spChg>
-        <pc:spChg chg="add mod">
-          <ac:chgData name="Zonghua Gu" userId="9a7e1853e1951ef5" providerId="LiveId" clId="{CF1FAA12-072C-4ED5-BA76-0FFFAEFDB88A}" dt="2025-10-04T21:03:34.552" v="157" actId="1076"/>
-          <ac:spMkLst>
-            <pc:docMk/>
-            <pc:sldMk cId="2690786522" sldId="263"/>
-            <ac:spMk id="8" creationId="{0786CA58-35DC-35A0-59CB-E995AC9A6AC0}"/>
-          </ac:spMkLst>
-        </pc:spChg>
         <pc:spChg chg="add mod">
           <ac:chgData name="Zonghua Gu" userId="9a7e1853e1951ef5" providerId="LiveId" clId="{CF1FAA12-072C-4ED5-BA76-0FFFAEFDB88A}" dt="2025-11-02T14:59:33.253" v="1204" actId="1076"/>
           <ac:spMkLst>
@@ -272,62 +211,6 @@
             <ac:spMk id="10" creationId="{A48B9F24-9B86-C996-2235-D44777E997D0}"/>
           </ac:spMkLst>
         </pc:spChg>
-        <pc:spChg chg="add mod">
-          <ac:chgData name="Zonghua Gu" userId="9a7e1853e1951ef5" providerId="LiveId" clId="{CF1FAA12-072C-4ED5-BA76-0FFFAEFDB88A}" dt="2025-10-04T21:03:34.552" v="157" actId="1076"/>
-          <ac:spMkLst>
-            <pc:docMk/>
-            <pc:sldMk cId="2690786522" sldId="263"/>
-            <ac:spMk id="11" creationId="{0F545598-B5FA-FE94-4620-A1EE2EC37783}"/>
-          </ac:spMkLst>
-        </pc:spChg>
-        <pc:spChg chg="add mod">
-          <ac:chgData name="Zonghua Gu" userId="9a7e1853e1951ef5" providerId="LiveId" clId="{CF1FAA12-072C-4ED5-BA76-0FFFAEFDB88A}" dt="2025-10-04T21:03:34.552" v="157" actId="1076"/>
-          <ac:spMkLst>
-            <pc:docMk/>
-            <pc:sldMk cId="2690786522" sldId="263"/>
-            <ac:spMk id="12" creationId="{31A8DD24-1DA5-CB13-6660-A497481550D9}"/>
-          </ac:spMkLst>
-        </pc:spChg>
-        <pc:spChg chg="add mod">
-          <ac:chgData name="Zonghua Gu" userId="9a7e1853e1951ef5" providerId="LiveId" clId="{CF1FAA12-072C-4ED5-BA76-0FFFAEFDB88A}" dt="2025-10-04T21:05:11.297" v="212" actId="20577"/>
-          <ac:spMkLst>
-            <pc:docMk/>
-            <pc:sldMk cId="2690786522" sldId="263"/>
-            <ac:spMk id="13" creationId="{CAE22E4F-AFA9-45D6-550A-06ADB794B1A9}"/>
-          </ac:spMkLst>
-        </pc:spChg>
-        <pc:spChg chg="add mod">
-          <ac:chgData name="Zonghua Gu" userId="9a7e1853e1951ef5" providerId="LiveId" clId="{CF1FAA12-072C-4ED5-BA76-0FFFAEFDB88A}" dt="2025-10-04T21:03:34.552" v="157" actId="1076"/>
-          <ac:spMkLst>
-            <pc:docMk/>
-            <pc:sldMk cId="2690786522" sldId="263"/>
-            <ac:spMk id="15" creationId="{D5F8D846-E86A-6AC9-7F97-F7A2747DA131}"/>
-          </ac:spMkLst>
-        </pc:spChg>
-        <pc:spChg chg="add mod">
-          <ac:chgData name="Zonghua Gu" userId="9a7e1853e1951ef5" providerId="LiveId" clId="{CF1FAA12-072C-4ED5-BA76-0FFFAEFDB88A}" dt="2025-10-04T21:03:43.118" v="163" actId="20577"/>
-          <ac:spMkLst>
-            <pc:docMk/>
-            <pc:sldMk cId="2690786522" sldId="263"/>
-            <ac:spMk id="16" creationId="{2367B1F1-0089-5E89-6DC4-7AA2C4B2AA6A}"/>
-          </ac:spMkLst>
-        </pc:spChg>
-        <pc:picChg chg="mod">
-          <ac:chgData name="Zonghua Gu" userId="9a7e1853e1951ef5" providerId="LiveId" clId="{CF1FAA12-072C-4ED5-BA76-0FFFAEFDB88A}" dt="2025-10-04T21:00:59.149" v="144" actId="1076"/>
-          <ac:picMkLst>
-            <pc:docMk/>
-            <pc:sldMk cId="2690786522" sldId="263"/>
-            <ac:picMk id="5" creationId="{00000000-0000-0000-0000-000000000000}"/>
-          </ac:picMkLst>
-        </pc:picChg>
-        <pc:picChg chg="add mod">
-          <ac:chgData name="Zonghua Gu" userId="9a7e1853e1951ef5" providerId="LiveId" clId="{CF1FAA12-072C-4ED5-BA76-0FFFAEFDB88A}" dt="2025-10-04T21:00:14.958" v="140"/>
-          <ac:picMkLst>
-            <pc:docMk/>
-            <pc:sldMk cId="2690786522" sldId="263"/>
-            <ac:picMk id="7" creationId="{F26A787C-D5E8-DF93-A947-D5D06F2FA2D2}"/>
-          </ac:picMkLst>
-        </pc:picChg>
       </pc:sldChg>
       <pc:sldChg chg="modSp mod">
         <pc:chgData name="Zonghua Gu" userId="9a7e1853e1951ef5" providerId="LiveId" clId="{CF1FAA12-072C-4ED5-BA76-0FFFAEFDB88A}" dt="2025-11-02T15:03:21.949" v="1271" actId="20577"/>
@@ -375,41 +258,6 @@
           </ac:spMkLst>
         </pc:spChg>
       </pc:sldChg>
-      <pc:sldChg chg="add">
-        <pc:chgData name="Zonghua Gu" userId="9a7e1853e1951ef5" providerId="LiveId" clId="{CF1FAA12-072C-4ED5-BA76-0FFFAEFDB88A}" dt="2025-10-04T21:14:03.366" v="511"/>
-        <pc:sldMkLst>
-          <pc:docMk/>
-          <pc:sldMk cId="378386796" sldId="267"/>
-        </pc:sldMkLst>
-      </pc:sldChg>
-      <pc:sldChg chg="add">
-        <pc:chgData name="Zonghua Gu" userId="9a7e1853e1951ef5" providerId="LiveId" clId="{CF1FAA12-072C-4ED5-BA76-0FFFAEFDB88A}" dt="2025-10-04T21:14:03.366" v="511"/>
-        <pc:sldMkLst>
-          <pc:docMk/>
-          <pc:sldMk cId="2849682855" sldId="268"/>
-        </pc:sldMkLst>
-      </pc:sldChg>
-      <pc:sldChg chg="add">
-        <pc:chgData name="Zonghua Gu" userId="9a7e1853e1951ef5" providerId="LiveId" clId="{CF1FAA12-072C-4ED5-BA76-0FFFAEFDB88A}" dt="2025-10-04T21:14:03.366" v="511"/>
-        <pc:sldMkLst>
-          <pc:docMk/>
-          <pc:sldMk cId="430635750" sldId="277"/>
-        </pc:sldMkLst>
-      </pc:sldChg>
-      <pc:sldChg chg="add">
-        <pc:chgData name="Zonghua Gu" userId="9a7e1853e1951ef5" providerId="LiveId" clId="{CF1FAA12-072C-4ED5-BA76-0FFFAEFDB88A}" dt="2025-10-04T21:14:03.366" v="511"/>
-        <pc:sldMkLst>
-          <pc:docMk/>
-          <pc:sldMk cId="1945936955" sldId="278"/>
-        </pc:sldMkLst>
-      </pc:sldChg>
-      <pc:sldChg chg="add">
-        <pc:chgData name="Zonghua Gu" userId="9a7e1853e1951ef5" providerId="LiveId" clId="{CF1FAA12-072C-4ED5-BA76-0FFFAEFDB88A}" dt="2025-10-04T21:14:03.366" v="511"/>
-        <pc:sldMkLst>
-          <pc:docMk/>
-          <pc:sldMk cId="4199759654" sldId="280"/>
-        </pc:sldMkLst>
-      </pc:sldChg>
       <pc:sldChg chg="modSp add mod ord">
         <pc:chgData name="Zonghua Gu" userId="9a7e1853e1951ef5" providerId="LiveId" clId="{CF1FAA12-072C-4ED5-BA76-0FFFAEFDB88A}" dt="2025-11-02T15:06:54.689" v="1278" actId="20578"/>
         <pc:sldMkLst>
@@ -455,50 +303,12 @@
           </ac:spMkLst>
         </pc:spChg>
       </pc:sldChg>
-      <pc:sldChg chg="add del">
-        <pc:chgData name="Zonghua Gu" userId="9a7e1853e1951ef5" providerId="LiveId" clId="{CF1FAA12-072C-4ED5-BA76-0FFFAEFDB88A}" dt="2025-10-04T21:14:03.366" v="511"/>
-        <pc:sldMkLst>
-          <pc:docMk/>
-          <pc:sldMk cId="1002974014" sldId="732"/>
-        </pc:sldMkLst>
-      </pc:sldChg>
-      <pc:sldChg chg="modSp add mod">
-        <pc:chgData name="Zonghua Gu" userId="9a7e1853e1951ef5" providerId="LiveId" clId="{CF1FAA12-072C-4ED5-BA76-0FFFAEFDB88A}" dt="2025-10-04T20:23:48.621" v="12"/>
-        <pc:sldMkLst>
-          <pc:docMk/>
-          <pc:sldMk cId="4001237007" sldId="734"/>
-        </pc:sldMkLst>
-        <pc:spChg chg="mod">
-          <ac:chgData name="Zonghua Gu" userId="9a7e1853e1951ef5" providerId="LiveId" clId="{CF1FAA12-072C-4ED5-BA76-0FFFAEFDB88A}" dt="2025-10-04T18:30:07.733" v="2" actId="1076"/>
-          <ac:spMkLst>
-            <pc:docMk/>
-            <pc:sldMk cId="4001237007" sldId="734"/>
-            <ac:spMk id="5" creationId="{00000000-0000-0000-0000-000000000000}"/>
-          </ac:spMkLst>
-        </pc:spChg>
-        <pc:spChg chg="mod">
-          <ac:chgData name="Zonghua Gu" userId="9a7e1853e1951ef5" providerId="LiveId" clId="{CF1FAA12-072C-4ED5-BA76-0FFFAEFDB88A}" dt="2025-10-04T20:23:48.621" v="12"/>
-          <ac:spMkLst>
-            <pc:docMk/>
-            <pc:sldMk cId="4001237007" sldId="734"/>
-            <ac:spMk id="6" creationId="{00000000-0000-0000-0000-000000000000}"/>
-          </ac:spMkLst>
-        </pc:spChg>
-      </pc:sldChg>
       <pc:sldChg chg="modSp new mod">
         <pc:chgData name="Zonghua Gu" userId="9a7e1853e1951ef5" providerId="LiveId" clId="{CF1FAA12-072C-4ED5-BA76-0FFFAEFDB88A}" dt="2025-11-02T15:11:14.203" v="1317" actId="20577"/>
         <pc:sldMkLst>
           <pc:docMk/>
           <pc:sldMk cId="3161310983" sldId="735"/>
         </pc:sldMkLst>
-        <pc:spChg chg="mod">
-          <ac:chgData name="Zonghua Gu" userId="9a7e1853e1951ef5" providerId="LiveId" clId="{CF1FAA12-072C-4ED5-BA76-0FFFAEFDB88A}" dt="2025-10-04T21:12:51.990" v="509" actId="27636"/>
-          <ac:spMkLst>
-            <pc:docMk/>
-            <pc:sldMk cId="3161310983" sldId="735"/>
-            <ac:spMk id="2" creationId="{9066D74F-45C0-6BB9-583C-6A413F518C38}"/>
-          </ac:spMkLst>
-        </pc:spChg>
         <pc:spChg chg="mod">
           <ac:chgData name="Zonghua Gu" userId="9a7e1853e1951ef5" providerId="LiveId" clId="{CF1FAA12-072C-4ED5-BA76-0FFFAEFDB88A}" dt="2025-11-02T15:11:14.203" v="1317" actId="20577"/>
           <ac:spMkLst>
@@ -538,21 +348,6 @@
             <ac:picMk id="5" creationId="{00000000-0000-0000-0000-000000000000}"/>
           </ac:picMkLst>
         </pc:picChg>
-        <pc:picChg chg="del">
-          <ac:chgData name="Zonghua Gu" userId="9a7e1853e1951ef5" providerId="LiveId" clId="{CF1FAA12-072C-4ED5-BA76-0FFFAEFDB88A}" dt="2025-11-02T15:07:08.190" v="1281" actId="21"/>
-          <ac:picMkLst>
-            <pc:docMk/>
-            <pc:sldMk cId="2896628209" sldId="736"/>
-            <ac:picMk id="7" creationId="{00000000-0000-0000-0000-000000000000}"/>
-          </ac:picMkLst>
-        </pc:picChg>
-      </pc:sldChg>
-      <pc:sldChg chg="add">
-        <pc:chgData name="Zonghua Gu" userId="9a7e1853e1951ef5" providerId="LiveId" clId="{CF1FAA12-072C-4ED5-BA76-0FFFAEFDB88A}" dt="2025-10-04T21:14:03.366" v="511"/>
-        <pc:sldMkLst>
-          <pc:docMk/>
-          <pc:sldMk cId="4218711516" sldId="737"/>
-        </pc:sldMkLst>
       </pc:sldChg>
       <pc:sldChg chg="modSp new mod">
         <pc:chgData name="Zonghua Gu" userId="9a7e1853e1951ef5" providerId="LiveId" clId="{CF1FAA12-072C-4ED5-BA76-0FFFAEFDB88A}" dt="2025-10-26T19:32:42.828" v="1192" actId="21"/>
@@ -560,14 +355,6 @@
           <pc:docMk/>
           <pc:sldMk cId="990295586" sldId="738"/>
         </pc:sldMkLst>
-        <pc:spChg chg="mod">
-          <ac:chgData name="Zonghua Gu" userId="9a7e1853e1951ef5" providerId="LiveId" clId="{CF1FAA12-072C-4ED5-BA76-0FFFAEFDB88A}" dt="2025-10-05T01:27:09.067" v="525" actId="20577"/>
-          <ac:spMkLst>
-            <pc:docMk/>
-            <pc:sldMk cId="990295586" sldId="738"/>
-            <ac:spMk id="2" creationId="{07C18DDC-948E-EE03-2F91-C42717B07826}"/>
-          </ac:spMkLst>
-        </pc:spChg>
         <pc:spChg chg="mod">
           <ac:chgData name="Zonghua Gu" userId="9a7e1853e1951ef5" providerId="LiveId" clId="{CF1FAA12-072C-4ED5-BA76-0FFFAEFDB88A}" dt="2025-10-26T19:32:42.828" v="1192" actId="21"/>
           <ac:spMkLst>
@@ -584,35 +371,11 @@
           <pc:sldMk cId="3951653191" sldId="739"/>
         </pc:sldMkLst>
         <pc:spChg chg="mod">
-          <ac:chgData name="Zonghua Gu" userId="9a7e1853e1951ef5" providerId="LiveId" clId="{CF1FAA12-072C-4ED5-BA76-0FFFAEFDB88A}" dt="2025-10-07T18:00:28.039" v="584" actId="20577"/>
-          <ac:spMkLst>
-            <pc:docMk/>
-            <pc:sldMk cId="3951653191" sldId="739"/>
-            <ac:spMk id="2" creationId="{06D0CDC3-A7FF-9EEE-C5C3-502A76B1D8CC}"/>
-          </ac:spMkLst>
-        </pc:spChg>
-        <pc:spChg chg="mod">
           <ac:chgData name="Zonghua Gu" userId="9a7e1853e1951ef5" providerId="LiveId" clId="{CF1FAA12-072C-4ED5-BA76-0FFFAEFDB88A}" dt="2025-10-26T16:47:46.641" v="1181" actId="20577"/>
           <ac:spMkLst>
             <pc:docMk/>
             <pc:sldMk cId="3951653191" sldId="739"/>
             <ac:spMk id="4" creationId="{B3D4FF65-D71D-3471-F040-1E677F86A2DD}"/>
-          </ac:spMkLst>
-        </pc:spChg>
-        <pc:spChg chg="add mod">
-          <ac:chgData name="Zonghua Gu" userId="9a7e1853e1951ef5" providerId="LiveId" clId="{CF1FAA12-072C-4ED5-BA76-0FFFAEFDB88A}" dt="2025-10-07T18:09:33.366" v="755" actId="1037"/>
-          <ac:spMkLst>
-            <pc:docMk/>
-            <pc:sldMk cId="3951653191" sldId="739"/>
-            <ac:spMk id="8" creationId="{FADDE5B4-2BF0-3346-B39B-1C17BD95CCA8}"/>
-          </ac:spMkLst>
-        </pc:spChg>
-        <pc:spChg chg="add mod">
-          <ac:chgData name="Zonghua Gu" userId="9a7e1853e1951ef5" providerId="LiveId" clId="{CF1FAA12-072C-4ED5-BA76-0FFFAEFDB88A}" dt="2025-10-07T18:09:37.018" v="756" actId="1076"/>
-          <ac:spMkLst>
-            <pc:docMk/>
-            <pc:sldMk cId="3951653191" sldId="739"/>
-            <ac:spMk id="9" creationId="{ACE7E842-BCEF-B6B4-E109-FC4B047B29D0}"/>
           </ac:spMkLst>
         </pc:spChg>
       </pc:sldChg>
@@ -622,22 +385,6 @@
           <pc:docMk/>
           <pc:sldMk cId="598855194" sldId="741"/>
         </pc:sldMkLst>
-        <pc:spChg chg="mod">
-          <ac:chgData name="Zonghua Gu" userId="9a7e1853e1951ef5" providerId="LiveId" clId="{CF1FAA12-072C-4ED5-BA76-0FFFAEFDB88A}" dt="2025-10-07T18:17:28.947" v="847" actId="20577"/>
-          <ac:spMkLst>
-            <pc:docMk/>
-            <pc:sldMk cId="598855194" sldId="741"/>
-            <ac:spMk id="2" creationId="{EE7BB3F4-71E3-6480-2DD5-AA4EAD4E5DBE}"/>
-          </ac:spMkLst>
-        </pc:spChg>
-        <pc:spChg chg="mod">
-          <ac:chgData name="Zonghua Gu" userId="9a7e1853e1951ef5" providerId="LiveId" clId="{CF1FAA12-072C-4ED5-BA76-0FFFAEFDB88A}" dt="2025-10-07T18:21:37.296" v="930" actId="6549"/>
-          <ac:spMkLst>
-            <pc:docMk/>
-            <pc:sldMk cId="598855194" sldId="741"/>
-            <ac:spMk id="4" creationId="{1E35FFBE-A292-0D67-EFA6-AEFA3301A8EC}"/>
-          </ac:spMkLst>
-        </pc:spChg>
         <pc:spChg chg="add mod">
           <ac:chgData name="Zonghua Gu" userId="9a7e1853e1951ef5" providerId="LiveId" clId="{CF1FAA12-072C-4ED5-BA76-0FFFAEFDB88A}" dt="2025-10-26T16:44:11.512" v="1178" actId="1076"/>
           <ac:spMkLst>
@@ -647,39 +394,8 @@
           </ac:spMkLst>
         </pc:spChg>
       </pc:sldChg>
-      <pc:sldChg chg="addSp modSp new mod">
-        <pc:chgData name="Zonghua Gu" userId="9a7e1853e1951ef5" providerId="LiveId" clId="{CF1FAA12-072C-4ED5-BA76-0FFFAEFDB88A}" dt="2025-10-12T18:47:22.216" v="981" actId="20577"/>
-        <pc:sldMkLst>
-          <pc:docMk/>
-          <pc:sldMk cId="4167531389" sldId="742"/>
-        </pc:sldMkLst>
-        <pc:spChg chg="mod">
-          <ac:chgData name="Zonghua Gu" userId="9a7e1853e1951ef5" providerId="LiveId" clId="{CF1FAA12-072C-4ED5-BA76-0FFFAEFDB88A}" dt="2025-10-12T18:47:22.216" v="981" actId="20577"/>
-          <ac:spMkLst>
-            <pc:docMk/>
-            <pc:sldMk cId="4167531389" sldId="742"/>
-            <ac:spMk id="2" creationId="{162E9A7F-FF94-CF8B-8F58-AA740C0B8A5F}"/>
-          </ac:spMkLst>
-        </pc:spChg>
-        <pc:spChg chg="mod">
-          <ac:chgData name="Zonghua Gu" userId="9a7e1853e1951ef5" providerId="LiveId" clId="{CF1FAA12-072C-4ED5-BA76-0FFFAEFDB88A}" dt="2025-10-12T18:46:57.308" v="970" actId="20577"/>
-          <ac:spMkLst>
-            <pc:docMk/>
-            <pc:sldMk cId="4167531389" sldId="742"/>
-            <ac:spMk id="4" creationId="{1F04D77F-669A-A724-34EC-94F5C04F32A5}"/>
-          </ac:spMkLst>
-        </pc:spChg>
-        <pc:picChg chg="add mod">
-          <ac:chgData name="Zonghua Gu" userId="9a7e1853e1951ef5" providerId="LiveId" clId="{CF1FAA12-072C-4ED5-BA76-0FFFAEFDB88A}" dt="2025-10-12T18:47:08.554" v="976" actId="1076"/>
-          <ac:picMkLst>
-            <pc:docMk/>
-            <pc:sldMk cId="4167531389" sldId="742"/>
-            <ac:picMk id="6" creationId="{FFC9B12A-5BB4-5F2F-BCC2-1CB754290CEB}"/>
-          </ac:picMkLst>
-        </pc:picChg>
-      </pc:sldChg>
       <pc:sldChg chg="addSp delSp modSp new mod">
-        <pc:chgData name="Zonghua Gu" userId="9a7e1853e1951ef5" providerId="LiveId" clId="{CF1FAA12-072C-4ED5-BA76-0FFFAEFDB88A}" dt="2025-10-17T23:34:43.244" v="1160" actId="20577"/>
+        <pc:chgData name="Zonghua Gu" userId="9a7e1853e1951ef5" providerId="LiveId" clId="{CF1FAA12-072C-4ED5-BA76-0FFFAEFDB88A}" dt="2025-11-15T01:06:04.191" v="1428" actId="20577"/>
         <pc:sldMkLst>
           <pc:docMk/>
           <pc:sldMk cId="3892365445" sldId="743"/>
@@ -693,7 +409,7 @@
           </ac:spMkLst>
         </pc:spChg>
         <pc:spChg chg="add del mod">
-          <ac:chgData name="Zonghua Gu" userId="9a7e1853e1951ef5" providerId="LiveId" clId="{CF1FAA12-072C-4ED5-BA76-0FFFAEFDB88A}" dt="2025-10-17T23:34:33.960" v="1138" actId="20577"/>
+          <ac:chgData name="Zonghua Gu" userId="9a7e1853e1951ef5" providerId="LiveId" clId="{CF1FAA12-072C-4ED5-BA76-0FFFAEFDB88A}" dt="2025-11-15T01:06:04.191" v="1428" actId="20577"/>
           <ac:spMkLst>
             <pc:docMk/>
             <pc:sldMk cId="3892365445" sldId="743"/>
@@ -6727,7 +6443,7 @@
             <a:fld id="{BD4F56A7-3CDE-194F-B9AF-D598FBBF1989}" type="datetimeFigureOut">
               <a:rPr lang="en-US" smtClean="0"/>
               <a:pPr/>
-              <a:t>11/2/2025</a:t>
+              <a:t>11/14/2025</a:t>
             </a:fld>
             <a:endParaRPr lang="en-US"/>
           </a:p>
@@ -6895,7 +6611,7 @@
             <a:fld id="{1E52AD58-60CE-E948-9CBA-0BD7030FC28E}" type="datetimeFigureOut">
               <a:rPr lang="en-US" smtClean="0"/>
               <a:pPr/>
-              <a:t>11/2/2025</a:t>
+              <a:t>11/14/2025</a:t>
             </a:fld>
             <a:endParaRPr lang="en-US"/>
           </a:p>
@@ -8522,7 +8238,7 @@
             <a:pPr eaLnBrk="1" latinLnBrk="0" hangingPunct="1"/>
             <a:fld id="{8E8B2B42-CBC2-7D4E-BA50-0E7F29B4DAAB}" type="datetime1">
               <a:rPr lang="en-US" smtClean="0"/>
-              <a:t>11/2/2025</a:t>
+              <a:t>11/14/2025</a:t>
             </a:fld>
             <a:endParaRPr lang="en-US" sz="1600" dirty="0"/>
           </a:p>
@@ -8882,7 +8598,7 @@
             <a:pPr eaLnBrk="1" latinLnBrk="0" hangingPunct="1"/>
             <a:fld id="{597D1259-3A46-254C-ADDB-B5DA4F1DF3DA}" type="datetime1">
               <a:rPr lang="en-US" smtClean="0"/>
-              <a:t>11/2/2025</a:t>
+              <a:t>11/14/2025</a:t>
             </a:fld>
             <a:endParaRPr lang="en-US"/>
           </a:p>
@@ -9058,7 +8774,7 @@
             <a:pPr eaLnBrk="1" latinLnBrk="0" hangingPunct="1"/>
             <a:fld id="{CCA104EC-54AA-E04F-BDC0-22B4E8892699}" type="datetime1">
               <a:rPr lang="en-US" smtClean="0"/>
-              <a:t>11/2/2025</a:t>
+              <a:t>11/14/2025</a:t>
             </a:fld>
             <a:endParaRPr lang="en-US"/>
           </a:p>
@@ -9294,7 +9010,7 @@
             <a:pPr eaLnBrk="1" latinLnBrk="0" hangingPunct="1"/>
             <a:fld id="{A9E6F060-20EB-3246-9088-08BF5F1271DE}" type="datetime1">
               <a:rPr lang="en-US" smtClean="0"/>
-              <a:t>11/2/2025</a:t>
+              <a:t>11/14/2025</a:t>
             </a:fld>
             <a:endParaRPr lang="en-US" dirty="0"/>
           </a:p>
@@ -9564,7 +9280,7 @@
             <a:pPr eaLnBrk="1" latinLnBrk="0" hangingPunct="1"/>
             <a:fld id="{34C82E41-DA7E-CA4C-823B-C759BEA16CE8}" type="datetime1">
               <a:rPr lang="en-US" smtClean="0"/>
-              <a:t>11/2/2025</a:t>
+              <a:t>11/14/2025</a:t>
             </a:fld>
             <a:endParaRPr lang="en-US" dirty="0"/>
           </a:p>
@@ -9785,7 +9501,7 @@
             <a:pPr eaLnBrk="1" latinLnBrk="0" hangingPunct="1"/>
             <a:fld id="{2500C8B0-EB1A-0A41-B839-C4B99CD2225A}" type="datetime1">
               <a:rPr lang="en-US" smtClean="0"/>
-              <a:t>11/2/2025</a:t>
+              <a:t>11/14/2025</a:t>
             </a:fld>
             <a:endParaRPr lang="en-US"/>
           </a:p>
@@ -10138,7 +9854,7 @@
             <a:pPr eaLnBrk="1" latinLnBrk="0" hangingPunct="1"/>
             <a:fld id="{4F16605B-D952-1149-A111-28A5633BAE48}" type="datetime1">
               <a:rPr lang="en-US" smtClean="0"/>
-              <a:t>11/2/2025</a:t>
+              <a:t>11/14/2025</a:t>
             </a:fld>
             <a:endParaRPr lang="en-US"/>
           </a:p>
@@ -10371,7 +10087,7 @@
             <a:pPr eaLnBrk="1" latinLnBrk="0" hangingPunct="1"/>
             <a:fld id="{91109A1C-29B2-B04E-8365-C9D22C4AE842}" type="datetime1">
               <a:rPr lang="en-US" smtClean="0"/>
-              <a:t>11/2/2025</a:t>
+              <a:t>11/14/2025</a:t>
             </a:fld>
             <a:endParaRPr lang="en-US"/>
           </a:p>
@@ -10513,7 +10229,7 @@
             <a:pPr eaLnBrk="1" latinLnBrk="0" hangingPunct="1"/>
             <a:fld id="{2CE417B6-A42B-064A-8677-46C55C4F613A}" type="datetime1">
               <a:rPr lang="en-US" smtClean="0"/>
-              <a:t>11/2/2025</a:t>
+              <a:t>11/14/2025</a:t>
             </a:fld>
             <a:endParaRPr lang="en-US"/>
           </a:p>
@@ -10791,7 +10507,7 @@
             <a:pPr eaLnBrk="1" latinLnBrk="0" hangingPunct="1"/>
             <a:fld id="{DE76F5AD-3F1F-7141-BC8A-012C5728BE2D}" type="datetime1">
               <a:rPr lang="en-US" smtClean="0"/>
-              <a:t>11/2/2025</a:t>
+              <a:t>11/14/2025</a:t>
             </a:fld>
             <a:endParaRPr lang="en-US"/>
           </a:p>
@@ -11199,7 +10915,7 @@
             <a:pPr eaLnBrk="1" latinLnBrk="0" hangingPunct="1"/>
             <a:fld id="{09FA12B8-739E-4D47-A14C-180C3BC10865}" type="datetime1">
               <a:rPr lang="en-US" smtClean="0"/>
-              <a:t>11/2/2025</a:t>
+              <a:t>11/14/2025</a:t>
             </a:fld>
             <a:endParaRPr lang="en-US"/>
           </a:p>
@@ -11537,7 +11253,7 @@
             <a:pPr eaLnBrk="1" latinLnBrk="0" hangingPunct="1"/>
             <a:fld id="{CDD18CD8-E404-844E-A4BD-DF69B8E5881E}" type="datetime1">
               <a:rPr lang="en-US" smtClean="0"/>
-              <a:t>11/2/2025</a:t>
+              <a:t>11/14/2025</a:t>
             </a:fld>
             <a:endParaRPr lang="en-US" sz="1400" dirty="0">
               <a:solidFill>
@@ -13352,8 +13068,8 @@
           </a:p>
         </p:txBody>
       </p:sp>
-      <mc:AlternateContent xmlns:mc="http://schemas.openxmlformats.org/markup-compatibility/2006">
-        <mc:Choice xmlns:a14="http://schemas.microsoft.com/office/drawing/2010/main" Requires="a14">
+      <mc:AlternateContent xmlns:mc="http://schemas.openxmlformats.org/markup-compatibility/2006" xmlns:a14="http://schemas.microsoft.com/office/drawing/2010/main">
+        <mc:Choice Requires="a14">
           <p:sp>
             <p:nvSpPr>
               <p:cNvPr id="5" name="Rectangle 4"/>
@@ -13404,7 +13120,19 @@
                             <a:rPr lang="en-US" sz="2400" i="1">
                               <a:latin typeface="Cambria Math"/>
                             </a:rPr>
-                            <m:t>(−1)</m:t>
+                            <m:t>(−</m:t>
+                          </m:r>
+                          <m:r>
+                            <a:rPr lang="en-US" sz="2400" i="1">
+                              <a:latin typeface="Cambria Math"/>
+                            </a:rPr>
+                            <m:t>1</m:t>
+                          </m:r>
+                          <m:r>
+                            <a:rPr lang="en-US" sz="2400" i="1">
+                              <a:latin typeface="Cambria Math"/>
+                            </a:rPr>
+                            <m:t>)</m:t>
                           </m:r>
                         </m:e>
                         <m:sup>
@@ -13423,7 +13151,19 @@
                         <a:rPr lang="en-US" sz="2400" i="1">
                           <a:latin typeface="Cambria Math"/>
                         </a:rPr>
-                        <m:t>×(1+</m:t>
+                        <m:t>×(</m:t>
+                      </m:r>
+                      <m:r>
+                        <a:rPr lang="en-US" sz="2400" i="1">
+                          <a:latin typeface="Cambria Math"/>
+                        </a:rPr>
+                        <m:t>1</m:t>
+                      </m:r>
+                      <m:r>
+                        <a:rPr lang="en-US" sz="2400" i="1">
+                          <a:latin typeface="Cambria Math"/>
+                        </a:rPr>
+                        <m:t>+</m:t>
                       </m:r>
                       <m:r>
                         <a:rPr lang="en-US" sz="2400" i="1">
@@ -13561,7 +13301,7 @@
             </p:txBody>
           </p:sp>
         </mc:Choice>
-        <mc:Fallback>
+        <mc:Fallback xmlns="">
           <p:sp>
             <p:nvSpPr>
               <p:cNvPr id="5" name="Rectangle 4"/>
@@ -13802,7 +13542,7 @@
             <a:pPr lvl="1"/>
             <a:r>
               <a:rPr lang="en-US" dirty="0"/>
-              <a:t>Actual Exponent=Stored Exponent -127</a:t>
+              <a:t>Actual Exponent = Stored Exponent -127</a:t>
             </a:r>
           </a:p>
           <a:p>
@@ -13938,8 +13678,8 @@
           </a:p>
         </p:txBody>
       </p:sp>
-      <mc:AlternateContent xmlns:mc="http://schemas.openxmlformats.org/markup-compatibility/2006">
-        <mc:Choice xmlns:a14="http://schemas.microsoft.com/office/drawing/2010/main" Requires="a14">
+      <mc:AlternateContent xmlns:mc="http://schemas.openxmlformats.org/markup-compatibility/2006" xmlns:a14="http://schemas.microsoft.com/office/drawing/2010/main">
+        <mc:Choice Requires="a14">
           <p:sp>
             <p:nvSpPr>
               <p:cNvPr id="4" name="Content Placeholder 3"/>
@@ -14043,13 +13783,7 @@
                       <a:rPr lang="en-US" sz="2800" i="1">
                         <a:latin typeface="Cambria Math"/>
                       </a:rPr>
-                      <m:t>=</m:t>
-                    </m:r>
-                    <m:r>
-                      <a:rPr lang="en-US" sz="2800" i="1">
-                        <a:latin typeface="Cambria Math"/>
-                      </a:rPr>
-                      <m:t>131</m:t>
+                      <m:t>=131</m:t>
                     </m:r>
                   </m:oMath>
                 </a14:m>
@@ -14075,19 +13809,7 @@
                           <a:rPr lang="en-US" sz="2800" i="1">
                             <a:latin typeface="Cambria Math"/>
                           </a:rPr>
-                          <m:t>0</m:t>
-                        </m:r>
-                        <m:r>
-                          <a:rPr lang="en-US" sz="2800" i="1">
-                            <a:latin typeface="Cambria Math"/>
-                          </a:rPr>
-                          <m:t>.</m:t>
-                        </m:r>
-                        <m:r>
-                          <a:rPr lang="en-US" sz="2800" i="1">
-                            <a:latin typeface="Cambria Math"/>
-                          </a:rPr>
-                          <m:t>1111111</m:t>
+                          <m:t>0.1111111</m:t>
                         </m:r>
                       </m:e>
                       <m:sub>
@@ -14112,13 +13834,7 @@
                       <a:rPr lang="en-US" sz="2800" i="1">
                         <a:latin typeface="Cambria Math"/>
                       </a:rPr>
-                      <m:t>1</m:t>
-                    </m:r>
-                    <m:r>
-                      <a:rPr lang="en-US" sz="2800" i="1">
-                        <a:latin typeface="Cambria Math"/>
-                      </a:rPr>
-                      <m:t>×</m:t>
+                      <m:t>1×</m:t>
                     </m:r>
                     <m:sSup>
                       <m:sSupPr>
@@ -14141,13 +13857,7 @@
                           <a:rPr lang="en-US" sz="2800" i="1">
                             <a:latin typeface="Cambria Math"/>
                           </a:rPr>
-                          <m:t>−</m:t>
-                        </m:r>
-                        <m:r>
-                          <a:rPr lang="en-US" sz="2800" i="1">
-                            <a:latin typeface="Cambria Math"/>
-                          </a:rPr>
-                          <m:t>1</m:t>
+                          <m:t>−1</m:t>
                         </m:r>
                       </m:sup>
                     </m:sSup>
@@ -14155,19 +13865,7 @@
                       <a:rPr lang="en-US" sz="2800" i="1">
                         <a:latin typeface="Cambria Math"/>
                       </a:rPr>
-                      <m:t>+</m:t>
-                    </m:r>
-                    <m:r>
-                      <a:rPr lang="en-US" sz="2800" i="1">
-                        <a:latin typeface="Cambria Math"/>
-                      </a:rPr>
-                      <m:t>1</m:t>
-                    </m:r>
-                    <m:r>
-                      <a:rPr lang="en-US" sz="2800" i="1">
-                        <a:latin typeface="Cambria Math"/>
-                      </a:rPr>
-                      <m:t>×</m:t>
+                      <m:t>+1×</m:t>
                     </m:r>
                     <m:sSup>
                       <m:sSupPr>
@@ -14190,13 +13888,7 @@
                           <a:rPr lang="en-US" sz="2800" i="1">
                             <a:latin typeface="Cambria Math"/>
                           </a:rPr>
-                          <m:t>−</m:t>
-                        </m:r>
-                        <m:r>
-                          <a:rPr lang="en-US" sz="2800" i="1">
-                            <a:latin typeface="Cambria Math"/>
-                          </a:rPr>
-                          <m:t>2</m:t>
+                          <m:t>−2</m:t>
                         </m:r>
                       </m:sup>
                     </m:sSup>
@@ -14204,19 +13896,7 @@
                       <a:rPr lang="en-US" sz="2800" i="1">
                         <a:latin typeface="Cambria Math"/>
                       </a:rPr>
-                      <m:t>+</m:t>
-                    </m:r>
-                    <m:r>
-                      <a:rPr lang="en-US" sz="2800" i="1">
-                        <a:latin typeface="Cambria Math"/>
-                      </a:rPr>
-                      <m:t>1</m:t>
-                    </m:r>
-                    <m:r>
-                      <a:rPr lang="en-US" sz="2800" i="1">
-                        <a:latin typeface="Cambria Math"/>
-                      </a:rPr>
-                      <m:t>×</m:t>
+                      <m:t>+1×</m:t>
                     </m:r>
                     <m:sSup>
                       <m:sSupPr>
@@ -14239,13 +13919,7 @@
                           <a:rPr lang="en-US" sz="2800" i="1">
                             <a:latin typeface="Cambria Math"/>
                           </a:rPr>
-                          <m:t>−</m:t>
-                        </m:r>
-                        <m:r>
-                          <a:rPr lang="en-US" sz="2800" i="1">
-                            <a:latin typeface="Cambria Math"/>
-                          </a:rPr>
-                          <m:t>3</m:t>
+                          <m:t>−3</m:t>
                         </m:r>
                       </m:sup>
                     </m:sSup>
@@ -14253,19 +13927,7 @@
                       <a:rPr lang="en-US" sz="2800" i="1">
                         <a:latin typeface="Cambria Math"/>
                       </a:rPr>
-                      <m:t>+</m:t>
-                    </m:r>
-                    <m:r>
-                      <a:rPr lang="en-US" sz="2800" i="1">
-                        <a:latin typeface="Cambria Math"/>
-                      </a:rPr>
-                      <m:t>1</m:t>
-                    </m:r>
-                    <m:r>
-                      <a:rPr lang="en-US" sz="2800" i="1">
-                        <a:latin typeface="Cambria Math"/>
-                      </a:rPr>
-                      <m:t>×</m:t>
+                      <m:t>+1×</m:t>
                     </m:r>
                     <m:sSup>
                       <m:sSupPr>
@@ -14288,13 +13950,7 @@
                           <a:rPr lang="en-US" sz="2800" i="1">
                             <a:latin typeface="Cambria Math"/>
                           </a:rPr>
-                          <m:t>−</m:t>
-                        </m:r>
-                        <m:r>
-                          <a:rPr lang="en-US" sz="2800" i="1">
-                            <a:latin typeface="Cambria Math"/>
-                          </a:rPr>
-                          <m:t>4</m:t>
+                          <m:t>−4</m:t>
                         </m:r>
                       </m:sup>
                     </m:sSup>
@@ -14302,19 +13958,7 @@
                       <a:rPr lang="en-US" sz="2800" i="1">
                         <a:latin typeface="Cambria Math"/>
                       </a:rPr>
-                      <m:t>+</m:t>
-                    </m:r>
-                    <m:r>
-                      <a:rPr lang="en-US" sz="2800" i="1">
-                        <a:latin typeface="Cambria Math"/>
-                      </a:rPr>
-                      <m:t>1</m:t>
-                    </m:r>
-                    <m:r>
-                      <a:rPr lang="en-US" sz="2800" i="1">
-                        <a:latin typeface="Cambria Math"/>
-                      </a:rPr>
-                      <m:t>×</m:t>
+                      <m:t>+1×</m:t>
                     </m:r>
                     <m:sSup>
                       <m:sSupPr>
@@ -14337,13 +13981,7 @@
                           <a:rPr lang="en-US" sz="2800" i="1">
                             <a:latin typeface="Cambria Math"/>
                           </a:rPr>
-                          <m:t>−</m:t>
-                        </m:r>
-                        <m:r>
-                          <a:rPr lang="en-US" sz="2800" i="1">
-                            <a:latin typeface="Cambria Math"/>
-                          </a:rPr>
-                          <m:t>5</m:t>
+                          <m:t>−5</m:t>
                         </m:r>
                       </m:sup>
                     </m:sSup>
@@ -14351,19 +13989,7 @@
                       <a:rPr lang="en-US" sz="2800" i="1">
                         <a:latin typeface="Cambria Math"/>
                       </a:rPr>
-                      <m:t>+</m:t>
-                    </m:r>
-                    <m:r>
-                      <a:rPr lang="en-US" sz="2800" i="1">
-                        <a:latin typeface="Cambria Math"/>
-                      </a:rPr>
-                      <m:t>1</m:t>
-                    </m:r>
-                    <m:r>
-                      <a:rPr lang="en-US" sz="2800" i="1">
-                        <a:latin typeface="Cambria Math"/>
-                      </a:rPr>
-                      <m:t>×</m:t>
+                      <m:t>+1×</m:t>
                     </m:r>
                     <m:sSup>
                       <m:sSupPr>
@@ -14386,13 +14012,7 @@
                           <a:rPr lang="en-US" sz="2800" i="1">
                             <a:latin typeface="Cambria Math"/>
                           </a:rPr>
-                          <m:t>−</m:t>
-                        </m:r>
-                        <m:r>
-                          <a:rPr lang="en-US" sz="2800" i="1">
-                            <a:latin typeface="Cambria Math"/>
-                          </a:rPr>
-                          <m:t>6</m:t>
+                          <m:t>−6</m:t>
                         </m:r>
                       </m:sup>
                     </m:sSup>
@@ -14400,19 +14020,7 @@
                       <a:rPr lang="en-US" sz="2800" i="1">
                         <a:latin typeface="Cambria Math"/>
                       </a:rPr>
-                      <m:t>+</m:t>
-                    </m:r>
-                    <m:r>
-                      <a:rPr lang="en-US" sz="2800" i="1">
-                        <a:latin typeface="Cambria Math"/>
-                      </a:rPr>
-                      <m:t>1</m:t>
-                    </m:r>
-                    <m:r>
-                      <a:rPr lang="en-US" sz="2800" i="1">
-                        <a:latin typeface="Cambria Math"/>
-                      </a:rPr>
-                      <m:t>×</m:t>
+                      <m:t>+1×</m:t>
                     </m:r>
                     <m:sSup>
                       <m:sSupPr>
@@ -14435,13 +14043,7 @@
                           <a:rPr lang="en-US" sz="2800" i="1">
                             <a:latin typeface="Cambria Math"/>
                           </a:rPr>
-                          <m:t>−</m:t>
-                        </m:r>
-                        <m:r>
-                          <a:rPr lang="en-US" sz="2800" i="1">
-                            <a:latin typeface="Cambria Math"/>
-                          </a:rPr>
-                          <m:t>7</m:t>
+                          <m:t>−7</m:t>
                         </m:r>
                       </m:sup>
                     </m:sSup>
@@ -14455,19 +14057,7 @@
                       <a:rPr lang="en-US" sz="2800" i="1">
                         <a:latin typeface="Cambria Math"/>
                       </a:rPr>
-                      <m:t>0</m:t>
-                    </m:r>
-                    <m:r>
-                      <a:rPr lang="en-US" sz="2800" i="1">
-                        <a:latin typeface="Cambria Math"/>
-                      </a:rPr>
-                      <m:t>.</m:t>
-                    </m:r>
-                    <m:r>
-                      <a:rPr lang="en-US" sz="2800" i="1">
-                        <a:latin typeface="Cambria Math"/>
-                      </a:rPr>
-                      <m:t>9921875</m:t>
+                      <m:t>0.9921875</m:t>
                     </m:r>
                   </m:oMath>
                 </a14:m>
@@ -14513,13 +14103,7 @@
                               <a:rPr lang="en-US" sz="2800" i="1">
                                 <a:latin typeface="Cambria Math"/>
                               </a:rPr>
-                              <m:t>−</m:t>
-                            </m:r>
-                            <m:r>
-                              <a:rPr lang="en-US" sz="2800" i="1">
-                                <a:latin typeface="Cambria Math"/>
-                              </a:rPr>
-                              <m:t>1</m:t>
+                              <m:t>−1</m:t>
                             </m:r>
                           </m:e>
                         </m:d>
@@ -14552,13 +14136,7 @@
                           <a:rPr lang="en-US" sz="2800" i="1">
                             <a:latin typeface="Cambria Math"/>
                           </a:rPr>
-                          <m:t>1</m:t>
-                        </m:r>
-                        <m:r>
-                          <a:rPr lang="en-US" sz="2800" i="1">
-                            <a:latin typeface="Cambria Math"/>
-                          </a:rPr>
-                          <m:t>+</m:t>
+                          <m:t>1+</m:t>
                         </m:r>
                         <m:r>
                           <a:rPr lang="en-US" sz="2800" i="1">
@@ -14601,13 +14179,7 @@
                           <a:rPr lang="en-US" sz="2800" i="1">
                             <a:latin typeface="Cambria Math"/>
                           </a:rPr>
-                          <m:t>−</m:t>
-                        </m:r>
-                        <m:r>
-                          <a:rPr lang="en-US" sz="2800" i="1">
-                            <a:latin typeface="Cambria Math"/>
-                          </a:rPr>
-                          <m:t>127</m:t>
+                          <m:t>−127</m:t>
                         </m:r>
                       </m:sup>
                     </m:sSup>
@@ -14658,13 +14230,7 @@
                                 <a:rPr lang="en-US" sz="2800" i="1">
                                   <a:latin typeface="Cambria Math"/>
                                 </a:rPr>
-                                <m:t>−</m:t>
-                              </m:r>
-                              <m:r>
-                                <a:rPr lang="en-US" sz="2800" i="1">
-                                  <a:latin typeface="Cambria Math"/>
-                                </a:rPr>
-                                <m:t>1</m:t>
+                                <m:t>−1</m:t>
                               </m:r>
                             </m:e>
                           </m:d>
@@ -14697,31 +14263,7 @@
                             <a:rPr lang="en-US" sz="2800" i="1">
                               <a:latin typeface="Cambria Math"/>
                             </a:rPr>
-                            <m:t>1</m:t>
-                          </m:r>
-                          <m:r>
-                            <a:rPr lang="en-US" sz="2800" i="1">
-                              <a:latin typeface="Cambria Math"/>
-                            </a:rPr>
-                            <m:t>+</m:t>
-                          </m:r>
-                          <m:r>
-                            <a:rPr lang="en-US" sz="2800" i="1">
-                              <a:latin typeface="Cambria Math"/>
-                            </a:rPr>
-                            <m:t>0</m:t>
-                          </m:r>
-                          <m:r>
-                            <a:rPr lang="en-US" sz="2800" i="1">
-                              <a:latin typeface="Cambria Math"/>
-                            </a:rPr>
-                            <m:t>.</m:t>
-                          </m:r>
-                          <m:r>
-                            <a:rPr lang="en-US" sz="2800" i="1">
-                              <a:latin typeface="Cambria Math"/>
-                            </a:rPr>
-                            <m:t>9921875</m:t>
+                            <m:t>1+0.9921875</m:t>
                           </m:r>
                         </m:e>
                       </m:d>
@@ -14752,19 +14294,7 @@
                             <a:rPr lang="en-US" sz="2800" i="1">
                               <a:latin typeface="Cambria Math"/>
                             </a:rPr>
-                            <m:t>131</m:t>
-                          </m:r>
-                          <m:r>
-                            <a:rPr lang="en-US" sz="2800" i="1">
-                              <a:latin typeface="Cambria Math"/>
-                            </a:rPr>
-                            <m:t>−</m:t>
-                          </m:r>
-                          <m:r>
-                            <a:rPr lang="en-US" sz="2800" i="1">
-                              <a:latin typeface="Cambria Math"/>
-                            </a:rPr>
-                            <m:t>127</m:t>
+                            <m:t>131−127</m:t>
                           </m:r>
                         </m:sup>
                       </m:sSup>
@@ -14783,43 +14313,7 @@
                         <a:rPr lang="en-US" sz="2800" i="1">
                           <a:latin typeface="Cambria Math"/>
                         </a:rPr>
-                        <m:t>−</m:t>
-                      </m:r>
-                      <m:r>
-                        <a:rPr lang="en-US" sz="2800" i="1">
-                          <a:latin typeface="Cambria Math"/>
-                        </a:rPr>
-                        <m:t>1</m:t>
-                      </m:r>
-                      <m:r>
-                        <a:rPr lang="en-US" sz="2800" i="1">
-                          <a:latin typeface="Cambria Math"/>
-                        </a:rPr>
-                        <m:t>×</m:t>
-                      </m:r>
-                      <m:r>
-                        <a:rPr lang="en-US" sz="2800" i="1">
-                          <a:latin typeface="Cambria Math"/>
-                        </a:rPr>
-                        <m:t>1</m:t>
-                      </m:r>
-                      <m:r>
-                        <a:rPr lang="en-US" sz="2800" i="1">
-                          <a:latin typeface="Cambria Math"/>
-                        </a:rPr>
-                        <m:t>.</m:t>
-                      </m:r>
-                      <m:r>
-                        <a:rPr lang="en-US" sz="2800" i="1">
-                          <a:latin typeface="Cambria Math"/>
-                        </a:rPr>
-                        <m:t>9921875</m:t>
-                      </m:r>
-                      <m:r>
-                        <a:rPr lang="en-US" sz="2800" i="1">
-                          <a:latin typeface="Cambria Math"/>
-                        </a:rPr>
-                        <m:t>×</m:t>
+                        <m:t>−1×1.9921875×</m:t>
                       </m:r>
                       <m:sSup>
                         <m:sSupPr>
@@ -14861,25 +14355,7 @@
                         <a:rPr lang="en-US" sz="2800" i="1">
                           <a:latin typeface="Cambria Math"/>
                         </a:rPr>
-                        <m:t>−</m:t>
-                      </m:r>
-                      <m:r>
-                        <a:rPr lang="en-US" sz="2800" i="1">
-                          <a:latin typeface="Cambria Math"/>
-                        </a:rPr>
-                        <m:t>31</m:t>
-                      </m:r>
-                      <m:r>
-                        <a:rPr lang="en-US" sz="2800" i="1">
-                          <a:latin typeface="Cambria Math"/>
-                        </a:rPr>
-                        <m:t>.</m:t>
-                      </m:r>
-                      <m:r>
-                        <a:rPr lang="en-US" sz="2800" i="1">
-                          <a:latin typeface="Cambria Math"/>
-                        </a:rPr>
-                        <m:t>875</m:t>
+                        <m:t>−31.875</m:t>
                       </m:r>
                     </m:oMath>
                   </m:oMathPara>
@@ -14934,13 +14410,7 @@
                       <a:rPr lang="en-US" sz="2800" i="1">
                         <a:latin typeface="Cambria Math"/>
                       </a:rPr>
-                      <m:t>=</m:t>
-                    </m:r>
-                    <m:r>
-                      <a:rPr lang="en-US" sz="2800" i="1">
-                        <a:latin typeface="Cambria Math"/>
-                      </a:rPr>
-                      <m:t>133</m:t>
+                      <m:t>=133</m:t>
                     </m:r>
                   </m:oMath>
                 </a14:m>
@@ -14966,43 +14436,7 @@
                       <a:rPr lang="en-US" sz="2800" i="1">
                         <a:latin typeface="Cambria Math"/>
                       </a:rPr>
-                      <m:t>−</m:t>
-                    </m:r>
-                    <m:r>
-                      <a:rPr lang="en-US" sz="2800" i="1">
-                        <a:latin typeface="Cambria Math"/>
-                      </a:rPr>
-                      <m:t>1</m:t>
-                    </m:r>
-                    <m:r>
-                      <a:rPr lang="en-US" sz="2800" i="1">
-                        <a:latin typeface="Cambria Math"/>
-                      </a:rPr>
-                      <m:t>×</m:t>
-                    </m:r>
-                    <m:r>
-                      <a:rPr lang="en-US" sz="2800" i="1">
-                        <a:latin typeface="Cambria Math"/>
-                      </a:rPr>
-                      <m:t>1</m:t>
-                    </m:r>
-                    <m:r>
-                      <a:rPr lang="en-US" sz="2800" i="1">
-                        <a:latin typeface="Cambria Math"/>
-                      </a:rPr>
-                      <m:t>.</m:t>
-                    </m:r>
-                    <m:r>
-                      <a:rPr lang="en-US" sz="2800" i="1">
-                        <a:latin typeface="Cambria Math"/>
-                      </a:rPr>
-                      <m:t>9921875</m:t>
-                    </m:r>
-                    <m:r>
-                      <a:rPr lang="en-US" sz="2800" i="1">
-                        <a:latin typeface="Cambria Math"/>
-                      </a:rPr>
-                      <m:t>×</m:t>
+                      <m:t>−1×1.9921875×</m:t>
                     </m:r>
                     <m:sSup>
                       <m:sSupPr>
@@ -15033,25 +14467,7 @@
                       <a:rPr lang="en-US" sz="2800" b="0" i="1" smtClean="0">
                         <a:latin typeface="Cambria Math" panose="02040503050406030204" pitchFamily="18" charset="0"/>
                       </a:rPr>
-                      <m:t>=−</m:t>
-                    </m:r>
-                    <m:r>
-                      <a:rPr lang="en-US" sz="2800" b="0" i="1" smtClean="0">
-                        <a:latin typeface="Cambria Math" panose="02040503050406030204" pitchFamily="18" charset="0"/>
-                      </a:rPr>
-                      <m:t>127</m:t>
-                    </m:r>
-                    <m:r>
-                      <a:rPr lang="en-US" sz="2800" b="0" i="1" smtClean="0">
-                        <a:latin typeface="Cambria Math" panose="02040503050406030204" pitchFamily="18" charset="0"/>
-                      </a:rPr>
-                      <m:t>.</m:t>
-                    </m:r>
-                    <m:r>
-                      <a:rPr lang="en-US" sz="2800" b="0" i="1" smtClean="0">
-                        <a:latin typeface="Cambria Math" panose="02040503050406030204" pitchFamily="18" charset="0"/>
-                      </a:rPr>
-                      <m:t>5</m:t>
+                      <m:t>=−127.5</m:t>
                     </m:r>
                   </m:oMath>
                 </a14:m>
@@ -15105,13 +14521,7 @@
                       <a:rPr lang="en-US" sz="2800" i="1">
                         <a:latin typeface="Cambria Math"/>
                       </a:rPr>
-                      <m:t>=</m:t>
-                    </m:r>
-                    <m:r>
-                      <a:rPr lang="en-US" sz="2800" i="1">
-                        <a:latin typeface="Cambria Math"/>
-                      </a:rPr>
-                      <m:t>134</m:t>
+                      <m:t>=134</m:t>
                     </m:r>
                   </m:oMath>
                 </a14:m>
@@ -15137,43 +14547,7 @@
                       <a:rPr lang="en-US" sz="2800" i="1">
                         <a:latin typeface="Cambria Math"/>
                       </a:rPr>
-                      <m:t>−</m:t>
-                    </m:r>
-                    <m:r>
-                      <a:rPr lang="en-US" sz="2800" i="1">
-                        <a:latin typeface="Cambria Math"/>
-                      </a:rPr>
-                      <m:t>1</m:t>
-                    </m:r>
-                    <m:r>
-                      <a:rPr lang="en-US" sz="2800" i="1">
-                        <a:latin typeface="Cambria Math"/>
-                      </a:rPr>
-                      <m:t>×</m:t>
-                    </m:r>
-                    <m:r>
-                      <a:rPr lang="en-US" sz="2800" i="1">
-                        <a:latin typeface="Cambria Math"/>
-                      </a:rPr>
-                      <m:t>1</m:t>
-                    </m:r>
-                    <m:r>
-                      <a:rPr lang="en-US" sz="2800" i="1">
-                        <a:latin typeface="Cambria Math"/>
-                      </a:rPr>
-                      <m:t>.</m:t>
-                    </m:r>
-                    <m:r>
-                      <a:rPr lang="en-US" sz="2800" i="1">
-                        <a:latin typeface="Cambria Math"/>
-                      </a:rPr>
-                      <m:t>9921875</m:t>
-                    </m:r>
-                    <m:r>
-                      <a:rPr lang="en-US" sz="2800" i="1">
-                        <a:latin typeface="Cambria Math"/>
-                      </a:rPr>
-                      <m:t>×</m:t>
+                      <m:t>−1×1.9921875×</m:t>
                     </m:r>
                     <m:sSup>
                       <m:sSupPr>
@@ -15237,7 +14611,7 @@
             </p:txBody>
           </p:sp>
         </mc:Choice>
-        <mc:Fallback>
+        <mc:Fallback xmlns="">
           <p:sp>
             <p:nvSpPr>
               <p:cNvPr id="4" name="Content Placeholder 3"/>
@@ -15557,13 +14931,7 @@
                       <a:rPr lang="en-US" sz="2800" i="1">
                         <a:latin typeface="Cambria Math"/>
                       </a:rPr>
-                      <m:t>=</m:t>
-                    </m:r>
-                    <m:r>
-                      <a:rPr lang="en-US" sz="2800" i="1">
-                        <a:latin typeface="Cambria Math"/>
-                      </a:rPr>
-                      <m:t>129</m:t>
+                      <m:t>=129</m:t>
                     </m:r>
                   </m:oMath>
                 </a14:m>
@@ -15589,13 +14957,7 @@
                           <a:rPr lang="en-US" sz="2800" i="1">
                             <a:latin typeface="Cambria Math"/>
                           </a:rPr>
-                          <m:t>0</m:t>
-                        </m:r>
-                        <m:r>
-                          <a:rPr lang="en-US" sz="2800" i="1">
-                            <a:latin typeface="Cambria Math"/>
-                          </a:rPr>
-                          <m:t>.</m:t>
+                          <m:t>0.</m:t>
                         </m:r>
                         <m:r>
                           <a:rPr lang="en-US" sz="2800" b="0" i="1" smtClean="0">
@@ -15655,13 +15017,7 @@
                           <a:rPr lang="en-US" sz="2800" i="1">
                             <a:latin typeface="Cambria Math"/>
                           </a:rPr>
-                          <m:t>−</m:t>
-                        </m:r>
-                        <m:r>
-                          <a:rPr lang="en-US" sz="2800" i="1">
-                            <a:latin typeface="Cambria Math"/>
-                          </a:rPr>
-                          <m:t>1</m:t>
+                          <m:t>−1</m:t>
                         </m:r>
                       </m:sup>
                     </m:sSup>
@@ -15704,13 +15060,7 @@
                           <a:rPr lang="en-US" sz="2800" i="1">
                             <a:latin typeface="Cambria Math"/>
                           </a:rPr>
-                          <m:t>−</m:t>
-                        </m:r>
-                        <m:r>
-                          <a:rPr lang="en-US" sz="2800" i="1">
-                            <a:latin typeface="Cambria Math"/>
-                          </a:rPr>
-                          <m:t>2</m:t>
+                          <m:t>−2</m:t>
                         </m:r>
                       </m:sup>
                     </m:sSup>
@@ -15718,19 +15068,7 @@
                       <a:rPr lang="en-US" sz="2800" i="1">
                         <a:latin typeface="Cambria Math"/>
                       </a:rPr>
-                      <m:t>+</m:t>
-                    </m:r>
-                    <m:r>
-                      <a:rPr lang="en-US" sz="2800" i="1">
-                        <a:latin typeface="Cambria Math"/>
-                      </a:rPr>
-                      <m:t>1</m:t>
-                    </m:r>
-                    <m:r>
-                      <a:rPr lang="en-US" sz="2800" i="1">
-                        <a:latin typeface="Cambria Math"/>
-                      </a:rPr>
-                      <m:t>×</m:t>
+                      <m:t>+1×</m:t>
                     </m:r>
                     <m:sSup>
                       <m:sSupPr>
@@ -15753,13 +15091,7 @@
                           <a:rPr lang="en-US" sz="2800" i="1">
                             <a:latin typeface="Cambria Math"/>
                           </a:rPr>
-                          <m:t>−</m:t>
-                        </m:r>
-                        <m:r>
-                          <a:rPr lang="en-US" sz="2800" i="1">
-                            <a:latin typeface="Cambria Math"/>
-                          </a:rPr>
-                          <m:t>3</m:t>
+                          <m:t>−3</m:t>
                         </m:r>
                       </m:sup>
                     </m:sSup>
@@ -15773,13 +15105,7 @@
                       <a:rPr lang="en-US" sz="2800" i="1">
                         <a:latin typeface="Cambria Math"/>
                       </a:rPr>
-                      <m:t>0</m:t>
-                    </m:r>
-                    <m:r>
-                      <a:rPr lang="en-US" sz="2800" i="1">
-                        <a:latin typeface="Cambria Math"/>
-                      </a:rPr>
-                      <m:t>.</m:t>
+                      <m:t>0.</m:t>
                     </m:r>
                     <m:r>
                       <a:rPr lang="en-US" sz="2800" b="0" i="1" smtClean="0">
@@ -15831,13 +15157,7 @@
                               <a:rPr lang="en-US" sz="2800" i="1">
                                 <a:latin typeface="Cambria Math"/>
                               </a:rPr>
-                              <m:t>−</m:t>
-                            </m:r>
-                            <m:r>
-                              <a:rPr lang="en-US" sz="2800" i="1">
-                                <a:latin typeface="Cambria Math"/>
-                              </a:rPr>
-                              <m:t>1</m:t>
+                              <m:t>−1</m:t>
                             </m:r>
                           </m:e>
                         </m:d>
@@ -15870,13 +15190,7 @@
                           <a:rPr lang="en-US" sz="2800" i="1">
                             <a:latin typeface="Cambria Math"/>
                           </a:rPr>
-                          <m:t>1</m:t>
-                        </m:r>
-                        <m:r>
-                          <a:rPr lang="en-US" sz="2800" i="1">
-                            <a:latin typeface="Cambria Math"/>
-                          </a:rPr>
-                          <m:t>+</m:t>
+                          <m:t>1+</m:t>
                         </m:r>
                         <m:r>
                           <a:rPr lang="en-US" sz="2800" i="1">
@@ -15919,13 +15233,7 @@
                           <a:rPr lang="en-US" sz="2800" i="1">
                             <a:latin typeface="Cambria Math"/>
                           </a:rPr>
-                          <m:t>−</m:t>
-                        </m:r>
-                        <m:r>
-                          <a:rPr lang="en-US" sz="2800" i="1">
-                            <a:latin typeface="Cambria Math"/>
-                          </a:rPr>
-                          <m:t>127</m:t>
+                          <m:t>−127</m:t>
                         </m:r>
                       </m:sup>
                     </m:sSup>
@@ -15976,13 +15284,7 @@
                                 <a:rPr lang="en-US" sz="2800" i="1">
                                   <a:latin typeface="Cambria Math"/>
                                 </a:rPr>
-                                <m:t>−</m:t>
-                              </m:r>
-                              <m:r>
-                                <a:rPr lang="en-US" sz="2800" i="1">
-                                  <a:latin typeface="Cambria Math"/>
-                                </a:rPr>
-                                <m:t>1</m:t>
+                                <m:t>−1</m:t>
                               </m:r>
                             </m:e>
                           </m:d>
@@ -16015,25 +15317,7 @@
                             <a:rPr lang="en-US" sz="2800" i="1">
                               <a:latin typeface="Cambria Math"/>
                             </a:rPr>
-                            <m:t>1</m:t>
-                          </m:r>
-                          <m:r>
-                            <a:rPr lang="en-US" sz="2800" i="1">
-                              <a:latin typeface="Cambria Math"/>
-                            </a:rPr>
-                            <m:t>+</m:t>
-                          </m:r>
-                          <m:r>
-                            <a:rPr lang="en-US" sz="2800" i="1">
-                              <a:latin typeface="Cambria Math"/>
-                            </a:rPr>
-                            <m:t>0</m:t>
-                          </m:r>
-                          <m:r>
-                            <a:rPr lang="en-US" sz="2800" i="1">
-                              <a:latin typeface="Cambria Math"/>
-                            </a:rPr>
-                            <m:t>.</m:t>
+                            <m:t>1+0.</m:t>
                           </m:r>
                           <m:r>
                             <a:rPr lang="en-US" sz="2800" b="0" i="1" smtClean="0">
@@ -16082,13 +15366,7 @@
                             <a:rPr lang="en-US" sz="2800" i="1">
                               <a:latin typeface="Cambria Math"/>
                             </a:rPr>
-                            <m:t>−</m:t>
-                          </m:r>
-                          <m:r>
-                            <a:rPr lang="en-US" sz="2800" i="1">
-                              <a:latin typeface="Cambria Math"/>
-                            </a:rPr>
-                            <m:t>127</m:t>
+                            <m:t>−127</m:t>
                           </m:r>
                         </m:sup>
                       </m:sSup>
@@ -16107,31 +15385,7 @@
                         <a:rPr lang="en-US" sz="2800" i="1">
                           <a:latin typeface="Cambria Math"/>
                         </a:rPr>
-                        <m:t>−</m:t>
-                      </m:r>
-                      <m:r>
-                        <a:rPr lang="en-US" sz="2800" i="1">
-                          <a:latin typeface="Cambria Math"/>
-                        </a:rPr>
-                        <m:t>1</m:t>
-                      </m:r>
-                      <m:r>
-                        <a:rPr lang="en-US" sz="2800" i="1">
-                          <a:latin typeface="Cambria Math"/>
-                        </a:rPr>
-                        <m:t>×</m:t>
-                      </m:r>
-                      <m:r>
-                        <a:rPr lang="en-US" sz="2800" i="1">
-                          <a:latin typeface="Cambria Math"/>
-                        </a:rPr>
-                        <m:t>1</m:t>
-                      </m:r>
-                      <m:r>
-                        <a:rPr lang="en-US" sz="2800" i="1">
-                          <a:latin typeface="Cambria Math"/>
-                        </a:rPr>
-                        <m:t>.</m:t>
+                        <m:t>−1×1.</m:t>
                       </m:r>
                       <m:r>
                         <a:rPr lang="en-US" sz="2800" b="0" i="1" smtClean="0">
@@ -16185,19 +15439,7 @@
                         <a:rPr lang="en-US" sz="2800" b="0" i="1" smtClean="0">
                           <a:latin typeface="Cambria Math" panose="02040503050406030204" pitchFamily="18" charset="0"/>
                         </a:rPr>
-                        <m:t>4</m:t>
-                      </m:r>
-                      <m:r>
-                        <a:rPr lang="en-US" sz="2800" b="0" i="1" smtClean="0">
-                          <a:latin typeface="Cambria Math" panose="02040503050406030204" pitchFamily="18" charset="0"/>
-                        </a:rPr>
-                        <m:t>.</m:t>
-                      </m:r>
-                      <m:r>
-                        <a:rPr lang="en-US" sz="2800" b="0" i="1" smtClean="0">
-                          <a:latin typeface="Cambria Math" panose="02040503050406030204" pitchFamily="18" charset="0"/>
-                        </a:rPr>
-                        <m:t>5</m:t>
+                        <m:t>4.5</m:t>
                       </m:r>
                     </m:oMath>
                   </m:oMathPara>
@@ -16490,13 +15732,7 @@
                       <a:rPr lang="en-US" sz="2800" i="1">
                         <a:latin typeface="Cambria Math"/>
                       </a:rPr>
-                      <m:t>=</m:t>
-                    </m:r>
-                    <m:r>
-                      <a:rPr lang="en-US" sz="2800" i="1">
-                        <a:latin typeface="Cambria Math"/>
-                      </a:rPr>
-                      <m:t>127</m:t>
+                      <m:t>=127</m:t>
                     </m:r>
                   </m:oMath>
                 </a14:m>
@@ -16559,13 +15795,7 @@
                               <a:rPr lang="en-US" sz="2800" i="1">
                                 <a:latin typeface="Cambria Math"/>
                               </a:rPr>
-                              <m:t>−</m:t>
-                            </m:r>
-                            <m:r>
-                              <a:rPr lang="en-US" sz="2800" i="1">
-                                <a:latin typeface="Cambria Math"/>
-                              </a:rPr>
-                              <m:t>1</m:t>
+                              <m:t>−1</m:t>
                             </m:r>
                           </m:e>
                         </m:d>
@@ -16598,13 +15828,7 @@
                           <a:rPr lang="en-US" sz="2800" i="1">
                             <a:latin typeface="Cambria Math"/>
                           </a:rPr>
-                          <m:t>1</m:t>
-                        </m:r>
-                        <m:r>
-                          <a:rPr lang="en-US" sz="2800" i="1">
-                            <a:latin typeface="Cambria Math"/>
-                          </a:rPr>
-                          <m:t>+</m:t>
+                          <m:t>1+</m:t>
                         </m:r>
                         <m:r>
                           <a:rPr lang="en-US" sz="2800" i="1">
@@ -16647,13 +15871,7 @@
                           <a:rPr lang="en-US" sz="2800" i="1">
                             <a:latin typeface="Cambria Math"/>
                           </a:rPr>
-                          <m:t>−</m:t>
-                        </m:r>
-                        <m:r>
-                          <a:rPr lang="en-US" sz="2800" i="1">
-                            <a:latin typeface="Cambria Math"/>
-                          </a:rPr>
-                          <m:t>127</m:t>
+                          <m:t>−127</m:t>
                         </m:r>
                       </m:sup>
                     </m:sSup>
@@ -16704,13 +15922,7 @@
                                 <a:rPr lang="en-US" sz="2800" i="1">
                                   <a:latin typeface="Cambria Math"/>
                                 </a:rPr>
-                                <m:t>−</m:t>
-                              </m:r>
-                              <m:r>
-                                <a:rPr lang="en-US" sz="2800" i="1">
-                                  <a:latin typeface="Cambria Math"/>
-                                </a:rPr>
-                                <m:t>1</m:t>
+                                <m:t>−1</m:t>
                               </m:r>
                             </m:e>
                           </m:d>
@@ -16749,13 +15961,7 @@
                             <a:rPr lang="en-US" sz="2800" b="0" i="1" smtClean="0">
                               <a:latin typeface="Cambria Math" panose="02040503050406030204" pitchFamily="18" charset="0"/>
                             </a:rPr>
-                            <m:t>+</m:t>
-                          </m:r>
-                          <m:r>
-                            <a:rPr lang="en-US" sz="2800" b="0" i="1" smtClean="0">
-                              <a:latin typeface="Cambria Math" panose="02040503050406030204" pitchFamily="18" charset="0"/>
-                            </a:rPr>
-                            <m:t>0</m:t>
+                            <m:t>+0</m:t>
                           </m:r>
                         </m:e>
                       </m:d>
@@ -16798,13 +16004,7 @@
                             <a:rPr lang="en-US" sz="2800" i="1">
                               <a:latin typeface="Cambria Math"/>
                             </a:rPr>
-                            <m:t>−</m:t>
-                          </m:r>
-                          <m:r>
-                            <a:rPr lang="en-US" sz="2800" i="1">
-                              <a:latin typeface="Cambria Math"/>
-                            </a:rPr>
-                            <m:t>127</m:t>
+                            <m:t>−127</m:t>
                           </m:r>
                         </m:sup>
                       </m:sSup>
@@ -16823,31 +16023,7 @@
                         <a:rPr lang="en-US" sz="2800" i="1">
                           <a:latin typeface="Cambria Math"/>
                         </a:rPr>
-                        <m:t>−</m:t>
-                      </m:r>
-                      <m:r>
-                        <a:rPr lang="en-US" sz="2800" i="1">
-                          <a:latin typeface="Cambria Math"/>
-                        </a:rPr>
-                        <m:t>1</m:t>
-                      </m:r>
-                      <m:r>
-                        <a:rPr lang="en-US" sz="2800" i="1">
-                          <a:latin typeface="Cambria Math"/>
-                        </a:rPr>
-                        <m:t>×</m:t>
-                      </m:r>
-                      <m:r>
-                        <a:rPr lang="en-US" sz="2800" i="1">
-                          <a:latin typeface="Cambria Math"/>
-                        </a:rPr>
-                        <m:t>1</m:t>
-                      </m:r>
-                      <m:r>
-                        <a:rPr lang="en-US" sz="2800" i="1">
-                          <a:latin typeface="Cambria Math"/>
-                        </a:rPr>
-                        <m:t>×</m:t>
+                        <m:t>−1×1×</m:t>
                       </m:r>
                       <m:sSup>
                         <m:sSupPr>
@@ -16889,19 +16065,7 @@
                         <a:rPr lang="en-US" sz="2800" b="0" i="1" smtClean="0">
                           <a:latin typeface="Cambria Math" panose="02040503050406030204" pitchFamily="18" charset="0"/>
                         </a:rPr>
-                        <m:t>1</m:t>
-                      </m:r>
-                      <m:r>
-                        <a:rPr lang="en-US" sz="2800" b="0" i="1" smtClean="0">
-                          <a:latin typeface="Cambria Math" panose="02040503050406030204" pitchFamily="18" charset="0"/>
-                        </a:rPr>
-                        <m:t>.</m:t>
-                      </m:r>
-                      <m:r>
-                        <a:rPr lang="en-US" sz="2800" b="0" i="1" smtClean="0">
-                          <a:latin typeface="Cambria Math" panose="02040503050406030204" pitchFamily="18" charset="0"/>
-                        </a:rPr>
-                        <m:t>0</m:t>
+                        <m:t>1.0</m:t>
                       </m:r>
                     </m:oMath>
                   </m:oMathPara>
@@ -17205,7 +16369,13 @@
                       <a:rPr lang="en-US" sz="2800" i="1">
                         <a:latin typeface="Cambria Math"/>
                       </a:rPr>
-                      <m:t>=130</m:t>
+                      <m:t>=</m:t>
+                    </m:r>
+                    <m:r>
+                      <a:rPr lang="en-US" sz="2800" i="1">
+                        <a:latin typeface="Cambria Math"/>
+                      </a:rPr>
+                      <m:t>130</m:t>
                     </m:r>
                   </m:oMath>
                 </a14:m>
@@ -17231,7 +16401,13 @@
                           <a:rPr lang="en-US" sz="2800" i="1">
                             <a:latin typeface="Cambria Math"/>
                           </a:rPr>
-                          <m:t>0.</m:t>
+                          <m:t>0</m:t>
+                        </m:r>
+                        <m:r>
+                          <a:rPr lang="en-US" sz="2800" i="1">
+                            <a:latin typeface="Cambria Math"/>
+                          </a:rPr>
+                          <m:t>.</m:t>
                         </m:r>
                         <m:r>
                           <a:rPr lang="en-US" sz="2800" b="0" i="1" smtClean="0">
@@ -17291,7 +16467,13 @@
                           <a:rPr lang="en-US" sz="2800" i="1">
                             <a:latin typeface="Cambria Math"/>
                           </a:rPr>
-                          <m:t>−1</m:t>
+                          <m:t>−</m:t>
+                        </m:r>
+                        <m:r>
+                          <a:rPr lang="en-US" sz="2800" i="1">
+                            <a:latin typeface="Cambria Math"/>
+                          </a:rPr>
+                          <m:t>1</m:t>
                         </m:r>
                       </m:sup>
                     </m:sSup>
@@ -17334,7 +16516,13 @@
                           <a:rPr lang="en-US" sz="2800" i="1">
                             <a:latin typeface="Cambria Math"/>
                           </a:rPr>
-                          <m:t>−2</m:t>
+                          <m:t>−</m:t>
+                        </m:r>
+                        <m:r>
+                          <a:rPr lang="en-US" sz="2800" i="1">
+                            <a:latin typeface="Cambria Math"/>
+                          </a:rPr>
+                          <m:t>2</m:t>
                         </m:r>
                       </m:sup>
                     </m:sSup>
@@ -17342,7 +16530,19 @@
                       <a:rPr lang="en-US" sz="2800" i="1">
                         <a:latin typeface="Cambria Math"/>
                       </a:rPr>
-                      <m:t>+1×</m:t>
+                      <m:t>+</m:t>
+                    </m:r>
+                    <m:r>
+                      <a:rPr lang="en-US" sz="2800" i="1">
+                        <a:latin typeface="Cambria Math"/>
+                      </a:rPr>
+                      <m:t>1</m:t>
+                    </m:r>
+                    <m:r>
+                      <a:rPr lang="en-US" sz="2800" i="1">
+                        <a:latin typeface="Cambria Math"/>
+                      </a:rPr>
+                      <m:t>×</m:t>
                     </m:r>
                     <m:sSup>
                       <m:sSupPr>
@@ -17379,7 +16579,25 @@
                       <a:rPr lang="en-US" sz="2800" i="1">
                         <a:latin typeface="Cambria Math" panose="02040503050406030204" pitchFamily="18" charset="0"/>
                       </a:rPr>
-                      <m:t>=0.8125</m:t>
+                      <m:t>=</m:t>
+                    </m:r>
+                    <m:r>
+                      <a:rPr lang="en-US" sz="2800" i="1">
+                        <a:latin typeface="Cambria Math" panose="02040503050406030204" pitchFamily="18" charset="0"/>
+                      </a:rPr>
+                      <m:t>0</m:t>
+                    </m:r>
+                    <m:r>
+                      <a:rPr lang="en-US" sz="2800" i="1">
+                        <a:latin typeface="Cambria Math" panose="02040503050406030204" pitchFamily="18" charset="0"/>
+                      </a:rPr>
+                      <m:t>.</m:t>
+                    </m:r>
+                    <m:r>
+                      <a:rPr lang="en-US" sz="2800" i="1">
+                        <a:latin typeface="Cambria Math" panose="02040503050406030204" pitchFamily="18" charset="0"/>
+                      </a:rPr>
+                      <m:t>8125</m:t>
                     </m:r>
                   </m:oMath>
                 </a14:m>
@@ -17425,7 +16643,13 @@
                               <a:rPr lang="en-US" sz="2800" i="1">
                                 <a:latin typeface="Cambria Math"/>
                               </a:rPr>
-                              <m:t>−1</m:t>
+                              <m:t>−</m:t>
+                            </m:r>
+                            <m:r>
+                              <a:rPr lang="en-US" sz="2800" i="1">
+                                <a:latin typeface="Cambria Math"/>
+                              </a:rPr>
+                              <m:t>1</m:t>
                             </m:r>
                           </m:e>
                         </m:d>
@@ -17458,7 +16682,13 @@
                           <a:rPr lang="en-US" sz="2800" i="1">
                             <a:latin typeface="Cambria Math"/>
                           </a:rPr>
-                          <m:t>1+</m:t>
+                          <m:t>1</m:t>
+                        </m:r>
+                        <m:r>
+                          <a:rPr lang="en-US" sz="2800" i="1">
+                            <a:latin typeface="Cambria Math"/>
+                          </a:rPr>
+                          <m:t>+</m:t>
                         </m:r>
                         <m:r>
                           <a:rPr lang="en-US" sz="2800" i="1">
@@ -17501,7 +16731,13 @@
                           <a:rPr lang="en-US" sz="2800" i="1">
                             <a:latin typeface="Cambria Math"/>
                           </a:rPr>
-                          <m:t>−127</m:t>
+                          <m:t>−</m:t>
+                        </m:r>
+                        <m:r>
+                          <a:rPr lang="en-US" sz="2800" i="1">
+                            <a:latin typeface="Cambria Math"/>
+                          </a:rPr>
+                          <m:t>127</m:t>
                         </m:r>
                       </m:sup>
                     </m:sSup>
@@ -17552,7 +16788,13 @@
                                 <a:rPr lang="en-US" sz="2800" i="1">
                                   <a:latin typeface="Cambria Math"/>
                                 </a:rPr>
-                                <m:t>−1</m:t>
+                                <m:t>−</m:t>
+                              </m:r>
+                              <m:r>
+                                <a:rPr lang="en-US" sz="2800" i="1">
+                                  <a:latin typeface="Cambria Math"/>
+                                </a:rPr>
+                                <m:t>1</m:t>
                               </m:r>
                             </m:e>
                           </m:d>
@@ -17585,13 +16827,31 @@
                             <a:rPr lang="en-US" sz="2800" i="1">
                               <a:latin typeface="Cambria Math"/>
                             </a:rPr>
-                            <m:t>1+</m:t>
+                            <m:t>1</m:t>
+                          </m:r>
+                          <m:r>
+                            <a:rPr lang="en-US" sz="2800" i="1">
+                              <a:latin typeface="Cambria Math"/>
+                            </a:rPr>
+                            <m:t>+</m:t>
                           </m:r>
                           <m:r>
                             <a:rPr lang="en-US" sz="2800" i="1">
                               <a:latin typeface="Cambria Math" panose="02040503050406030204" pitchFamily="18" charset="0"/>
                             </a:rPr>
-                            <m:t>0.8125</m:t>
+                            <m:t>0</m:t>
+                          </m:r>
+                          <m:r>
+                            <a:rPr lang="en-US" sz="2800" i="1">
+                              <a:latin typeface="Cambria Math" panose="02040503050406030204" pitchFamily="18" charset="0"/>
+                            </a:rPr>
+                            <m:t>.</m:t>
+                          </m:r>
+                          <m:r>
+                            <a:rPr lang="en-US" sz="2800" i="1">
+                              <a:latin typeface="Cambria Math" panose="02040503050406030204" pitchFamily="18" charset="0"/>
+                            </a:rPr>
+                            <m:t>8125</m:t>
                           </m:r>
                         </m:e>
                       </m:d>
@@ -17634,7 +16894,13 @@
                             <a:rPr lang="en-US" sz="2800" i="1">
                               <a:latin typeface="Cambria Math"/>
                             </a:rPr>
-                            <m:t>−127</m:t>
+                            <m:t>−</m:t>
+                          </m:r>
+                          <m:r>
+                            <a:rPr lang="en-US" sz="2800" i="1">
+                              <a:latin typeface="Cambria Math"/>
+                            </a:rPr>
+                            <m:t>127</m:t>
                           </m:r>
                         </m:sup>
                       </m:sSup>
@@ -17653,7 +16919,25 @@
                         <a:rPr lang="en-US" sz="2800" i="1">
                           <a:latin typeface="Cambria Math"/>
                         </a:rPr>
-                        <m:t>1×1.</m:t>
+                        <m:t>1</m:t>
+                      </m:r>
+                      <m:r>
+                        <a:rPr lang="en-US" sz="2800" i="1">
+                          <a:latin typeface="Cambria Math"/>
+                        </a:rPr>
+                        <m:t>×</m:t>
+                      </m:r>
+                      <m:r>
+                        <a:rPr lang="en-US" sz="2800" i="1">
+                          <a:latin typeface="Cambria Math"/>
+                        </a:rPr>
+                        <m:t>1</m:t>
+                      </m:r>
+                      <m:r>
+                        <a:rPr lang="en-US" sz="2800" i="1">
+                          <a:latin typeface="Cambria Math"/>
+                        </a:rPr>
+                        <m:t>.</m:t>
                       </m:r>
                       <m:r>
                         <a:rPr lang="en-US" sz="2800" b="0" i="1" smtClean="0">
@@ -17707,7 +16991,19 @@
                         <a:rPr lang="en-US" sz="2800" b="0" i="1" smtClean="0">
                           <a:latin typeface="Cambria Math" panose="02040503050406030204" pitchFamily="18" charset="0"/>
                         </a:rPr>
-                        <m:t>14.5</m:t>
+                        <m:t>14</m:t>
+                      </m:r>
+                      <m:r>
+                        <a:rPr lang="en-US" sz="2800" b="0" i="1" smtClean="0">
+                          <a:latin typeface="Cambria Math" panose="02040503050406030204" pitchFamily="18" charset="0"/>
+                        </a:rPr>
+                        <m:t>.</m:t>
+                      </m:r>
+                      <m:r>
+                        <a:rPr lang="en-US" sz="2800" b="0" i="1" smtClean="0">
+                          <a:latin typeface="Cambria Math" panose="02040503050406030204" pitchFamily="18" charset="0"/>
+                        </a:rPr>
+                        <m:t>5</m:t>
                       </m:r>
                     </m:oMath>
                   </m:oMathPara>
@@ -17925,19 +17221,7 @@
                       <a:rPr lang="en-US" i="1" smtClean="0">
                         <a:latin typeface="Cambria Math"/>
                       </a:rPr>
-                      <m:t>14</m:t>
-                    </m:r>
-                    <m:r>
-                      <a:rPr lang="en-US" i="1" smtClean="0">
-                        <a:latin typeface="Cambria Math"/>
-                      </a:rPr>
-                      <m:t>.</m:t>
-                    </m:r>
-                    <m:r>
-                      <a:rPr lang="en-US" i="1" smtClean="0">
-                        <a:latin typeface="Cambria Math"/>
-                      </a:rPr>
-                      <m:t>5</m:t>
+                      <m:t>14.5</m:t>
                     </m:r>
                     <m:r>
                       <a:rPr lang="en-US" b="0" i="1" smtClean="0">
@@ -17989,19 +17273,7 @@
                           <a:rPr lang="en-US" i="1">
                             <a:latin typeface="Cambria Math"/>
                           </a:rPr>
-                          <m:t>14</m:t>
-                        </m:r>
-                        <m:r>
-                          <a:rPr lang="en-US" i="1">
-                            <a:latin typeface="Cambria Math"/>
-                          </a:rPr>
-                          <m:t>.</m:t>
-                        </m:r>
-                        <m:r>
-                          <a:rPr lang="en-US" i="1">
-                            <a:latin typeface="Cambria Math"/>
-                          </a:rPr>
-                          <m:t>5</m:t>
+                          <m:t>14.5</m:t>
                         </m:r>
                       </m:num>
                       <m:den>
@@ -18036,25 +17308,7 @@
                       <a:rPr lang="en-US" b="0" i="1" smtClean="0">
                         <a:latin typeface="Cambria Math" panose="02040503050406030204" pitchFamily="18" charset="0"/>
                       </a:rPr>
-                      <m:t>=</m:t>
-                    </m:r>
-                    <m:r>
-                      <a:rPr lang="en-US" b="0" i="1" smtClean="0">
-                        <a:latin typeface="Cambria Math" panose="02040503050406030204" pitchFamily="18" charset="0"/>
-                      </a:rPr>
-                      <m:t>1</m:t>
-                    </m:r>
-                    <m:r>
-                      <a:rPr lang="en-US" b="0" i="1" smtClean="0">
-                        <a:latin typeface="Cambria Math" panose="02040503050406030204" pitchFamily="18" charset="0"/>
-                      </a:rPr>
-                      <m:t>.</m:t>
-                    </m:r>
-                    <m:r>
-                      <a:rPr lang="en-US" b="0" i="1" smtClean="0">
-                        <a:latin typeface="Cambria Math" panose="02040503050406030204" pitchFamily="18" charset="0"/>
-                      </a:rPr>
-                      <m:t>8125</m:t>
+                      <m:t>=1.8125</m:t>
                     </m:r>
                   </m:oMath>
                 </a14:m>
@@ -18073,49 +17327,7 @@
                       <a:rPr lang="en-US" i="1">
                         <a:latin typeface="Cambria Math"/>
                       </a:rPr>
-                      <m:t>14</m:t>
-                    </m:r>
-                    <m:r>
-                      <a:rPr lang="en-US" i="1">
-                        <a:latin typeface="Cambria Math"/>
-                      </a:rPr>
-                      <m:t>.</m:t>
-                    </m:r>
-                    <m:r>
-                      <a:rPr lang="en-US" i="1">
-                        <a:latin typeface="Cambria Math"/>
-                      </a:rPr>
-                      <m:t>5</m:t>
-                    </m:r>
-                    <m:r>
-                      <a:rPr lang="en-US" i="1">
-                        <a:latin typeface="Cambria Math"/>
-                      </a:rPr>
-                      <m:t>=</m:t>
-                    </m:r>
-                    <m:r>
-                      <a:rPr lang="en-US" i="1">
-                        <a:latin typeface="Cambria Math"/>
-                      </a:rPr>
-                      <m:t>1</m:t>
-                    </m:r>
-                    <m:r>
-                      <a:rPr lang="en-US" i="1">
-                        <a:latin typeface="Cambria Math"/>
-                      </a:rPr>
-                      <m:t>.</m:t>
-                    </m:r>
-                    <m:r>
-                      <a:rPr lang="en-US" i="1">
-                        <a:latin typeface="Cambria Math"/>
-                      </a:rPr>
-                      <m:t>8125</m:t>
-                    </m:r>
-                    <m:r>
-                      <a:rPr lang="en-US" i="1">
-                        <a:latin typeface="Cambria Math"/>
-                      </a:rPr>
-                      <m:t>×</m:t>
+                      <m:t>14.5=1.8125×</m:t>
                     </m:r>
                     <m:sSup>
                       <m:sSupPr>
@@ -18155,43 +17367,7 @@
                       <a:rPr lang="en-US" i="1">
                         <a:latin typeface="Cambria Math"/>
                       </a:rPr>
-                      <m:t>(</m:t>
-                    </m:r>
-                    <m:r>
-                      <a:rPr lang="en-US" i="1">
-                        <a:latin typeface="Cambria Math"/>
-                      </a:rPr>
-                      <m:t>1</m:t>
-                    </m:r>
-                    <m:r>
-                      <a:rPr lang="en-US" i="1">
-                        <a:latin typeface="Cambria Math"/>
-                      </a:rPr>
-                      <m:t>+</m:t>
-                    </m:r>
-                    <m:r>
-                      <a:rPr lang="en-US" i="1">
-                        <a:latin typeface="Cambria Math"/>
-                      </a:rPr>
-                      <m:t>0</m:t>
-                    </m:r>
-                    <m:r>
-                      <a:rPr lang="en-US" i="1">
-                        <a:latin typeface="Cambria Math"/>
-                      </a:rPr>
-                      <m:t>.</m:t>
-                    </m:r>
-                    <m:r>
-                      <a:rPr lang="en-US" i="1">
-                        <a:latin typeface="Cambria Math"/>
-                      </a:rPr>
-                      <m:t>8125</m:t>
-                    </m:r>
-                    <m:r>
-                      <a:rPr lang="en-US" i="1">
-                        <a:latin typeface="Cambria Math"/>
-                      </a:rPr>
-                      <m:t>)×</m:t>
+                      <m:t>(1+0.8125)×</m:t>
                     </m:r>
                     <m:sSup>
                       <m:sSupPr>
@@ -18241,13 +17417,7 @@
                       <a:rPr lang="en-US" b="0" i="1" smtClean="0">
                         <a:latin typeface="Cambria Math"/>
                       </a:rPr>
-                      <m:t>=</m:t>
-                    </m:r>
-                    <m:r>
-                      <a:rPr lang="en-US" b="0" i="1" smtClean="0">
-                        <a:latin typeface="Cambria Math"/>
-                      </a:rPr>
-                      <m:t>0</m:t>
+                      <m:t>=0</m:t>
                     </m:r>
                   </m:oMath>
                 </a14:m>
@@ -18280,37 +17450,7 @@
                       <a:rPr lang="en-US" i="1">
                         <a:latin typeface="Cambria Math"/>
                       </a:rPr>
-                      <m:t>3</m:t>
-                    </m:r>
-                    <m:r>
-                      <a:rPr lang="en-US" i="1">
-                        <a:latin typeface="Cambria Math"/>
-                      </a:rPr>
-                      <m:t>+</m:t>
-                    </m:r>
-                    <m:r>
-                      <a:rPr lang="en-US" i="1">
-                        <a:latin typeface="Cambria Math"/>
-                      </a:rPr>
-                      <m:t>127</m:t>
-                    </m:r>
-                    <m:r>
-                      <a:rPr lang="en-US" i="1">
-                        <a:latin typeface="Cambria Math"/>
-                      </a:rPr>
-                      <m:t>=</m:t>
-                    </m:r>
-                    <m:r>
-                      <a:rPr lang="en-US" i="1">
-                        <a:latin typeface="Cambria Math"/>
-                      </a:rPr>
-                      <m:t>130</m:t>
-                    </m:r>
-                    <m:r>
-                      <a:rPr lang="en-US" i="1">
-                        <a:latin typeface="Cambria Math"/>
-                      </a:rPr>
-                      <m:t>=</m:t>
+                      <m:t>3+127=130=</m:t>
                     </m:r>
                     <m:sSub>
                       <m:sSubPr>
@@ -18372,13 +17512,7 @@
                           <a:rPr lang="en-US" b="0" i="1" smtClean="0">
                             <a:latin typeface="Cambria Math"/>
                           </a:rPr>
-                          <m:t>0</m:t>
-                        </m:r>
-                        <m:r>
-                          <a:rPr lang="en-US" b="0" i="1" smtClean="0">
-                            <a:latin typeface="Cambria Math"/>
-                          </a:rPr>
-                          <m:t>.</m:t>
+                          <m:t>0.</m:t>
                         </m:r>
                         <m:r>
                           <a:rPr lang="en-US" b="0" i="1" smtClean="0">
@@ -18464,13 +17598,7 @@
                           <a:rPr lang="en-US" sz="2400" i="1">
                             <a:latin typeface="Cambria Math"/>
                           </a:rPr>
-                          <m:t>−</m:t>
-                        </m:r>
-                        <m:r>
-                          <a:rPr lang="en-US" sz="2400" i="1">
-                            <a:latin typeface="Cambria Math"/>
-                          </a:rPr>
-                          <m:t>1</m:t>
+                          <m:t>−1</m:t>
                         </m:r>
                       </m:sup>
                     </m:sSup>
@@ -18490,13 +17618,7 @@
                       <a:rPr lang="en-US" sz="2400" b="0" i="1" smtClean="0">
                         <a:latin typeface="Cambria Math" panose="02040503050406030204" pitchFamily="18" charset="0"/>
                       </a:rPr>
-                      <m:t>2</m:t>
-                    </m:r>
-                    <m:r>
-                      <a:rPr lang="en-US" sz="2400" b="0" i="1" smtClean="0">
-                        <a:latin typeface="Cambria Math" panose="02040503050406030204" pitchFamily="18" charset="0"/>
-                      </a:rPr>
-                      <m:t>×</m:t>
+                      <m:t>2×</m:t>
                     </m:r>
                     <m:sSup>
                       <m:sSupPr>
@@ -18519,13 +17641,7 @@
                           <a:rPr lang="en-US" sz="2400" i="1">
                             <a:latin typeface="Cambria Math"/>
                           </a:rPr>
-                          <m:t>−</m:t>
-                        </m:r>
-                        <m:r>
-                          <a:rPr lang="en-US" sz="2400" i="1">
-                            <a:latin typeface="Cambria Math"/>
-                          </a:rPr>
-                          <m:t>2</m:t>
+                          <m:t>−2</m:t>
                         </m:r>
                       </m:sup>
                     </m:sSup>
@@ -18545,13 +17661,7 @@
                       <a:rPr lang="en-US" sz="2400" b="0" i="1" smtClean="0">
                         <a:latin typeface="Cambria Math" panose="02040503050406030204" pitchFamily="18" charset="0"/>
                       </a:rPr>
-                      <m:t>3</m:t>
-                    </m:r>
-                    <m:r>
-                      <a:rPr lang="en-US" sz="2400" b="0" i="1" smtClean="0">
-                        <a:latin typeface="Cambria Math" panose="02040503050406030204" pitchFamily="18" charset="0"/>
-                      </a:rPr>
-                      <m:t>×</m:t>
+                      <m:t>3×</m:t>
                     </m:r>
                     <m:sSup>
                       <m:sSupPr>
@@ -18574,13 +17684,7 @@
                           <a:rPr lang="en-US" sz="2400" i="1">
                             <a:latin typeface="Cambria Math"/>
                           </a:rPr>
-                          <m:t>−</m:t>
-                        </m:r>
-                        <m:r>
-                          <a:rPr lang="en-US" sz="2400" i="1">
-                            <a:latin typeface="Cambria Math"/>
-                          </a:rPr>
-                          <m:t>3</m:t>
+                          <m:t>−3</m:t>
                         </m:r>
                       </m:sup>
                     </m:sSup>
@@ -18600,13 +17704,7 @@
                       <a:rPr lang="en-US" sz="2400" b="0" i="1" smtClean="0">
                         <a:latin typeface="Cambria Math" panose="02040503050406030204" pitchFamily="18" charset="0"/>
                       </a:rPr>
-                      <m:t>4</m:t>
-                    </m:r>
-                    <m:r>
-                      <a:rPr lang="en-US" sz="2400" b="0" i="1" smtClean="0">
-                        <a:latin typeface="Cambria Math" panose="02040503050406030204" pitchFamily="18" charset="0"/>
-                      </a:rPr>
-                      <m:t>×</m:t>
+                      <m:t>4×</m:t>
                     </m:r>
                     <m:sSup>
                       <m:sSupPr>
@@ -18629,13 +17727,7 @@
                           <a:rPr lang="en-US" sz="2400" i="1">
                             <a:latin typeface="Cambria Math"/>
                           </a:rPr>
-                          <m:t>−</m:t>
-                        </m:r>
-                        <m:r>
-                          <a:rPr lang="en-US" sz="2400" i="1">
-                            <a:latin typeface="Cambria Math"/>
-                          </a:rPr>
-                          <m:t>4</m:t>
+                          <m:t>−4</m:t>
                         </m:r>
                       </m:sup>
                     </m:sSup>
@@ -18657,91 +17749,7 @@
                       <a:rPr lang="en-US" i="1">
                         <a:latin typeface="Cambria Math"/>
                       </a:rPr>
-                      <m:t>0</m:t>
-                    </m:r>
-                    <m:r>
-                      <a:rPr lang="en-US" i="1">
-                        <a:latin typeface="Cambria Math"/>
-                      </a:rPr>
-                      <m:t>.</m:t>
-                    </m:r>
-                    <m:r>
-                      <a:rPr lang="en-US" i="1">
-                        <a:latin typeface="Cambria Math"/>
-                      </a:rPr>
-                      <m:t>8125</m:t>
-                    </m:r>
-                    <m:r>
-                      <a:rPr lang="en-US" i="1">
-                        <a:latin typeface="Cambria Math"/>
-                      </a:rPr>
-                      <m:t>×</m:t>
-                    </m:r>
-                    <m:r>
-                      <a:rPr lang="en-US" i="1">
-                        <a:latin typeface="Cambria Math"/>
-                      </a:rPr>
-                      <m:t>2</m:t>
-                    </m:r>
-                    <m:r>
-                      <a:rPr lang="en-US" i="1">
-                        <a:latin typeface="Cambria Math"/>
-                      </a:rPr>
-                      <m:t>=</m:t>
-                    </m:r>
-                    <m:r>
-                      <a:rPr lang="en-US" i="1">
-                        <a:latin typeface="Cambria Math"/>
-                      </a:rPr>
-                      <m:t>1</m:t>
-                    </m:r>
-                    <m:r>
-                      <a:rPr lang="en-US" i="1">
-                        <a:latin typeface="Cambria Math"/>
-                      </a:rPr>
-                      <m:t>.</m:t>
-                    </m:r>
-                    <m:r>
-                      <a:rPr lang="en-US" i="1">
-                        <a:latin typeface="Cambria Math"/>
-                      </a:rPr>
-                      <m:t>625</m:t>
-                    </m:r>
-                    <m:r>
-                      <a:rPr lang="en-US" i="1">
-                        <a:latin typeface="Cambria Math"/>
-                      </a:rPr>
-                      <m:t>=</m:t>
-                    </m:r>
-                    <m:r>
-                      <a:rPr lang="en-US" i="1">
-                        <a:latin typeface="Cambria Math"/>
-                      </a:rPr>
-                      <m:t>1</m:t>
-                    </m:r>
-                    <m:r>
-                      <a:rPr lang="en-US" i="1">
-                        <a:latin typeface="Cambria Math"/>
-                      </a:rPr>
-                      <m:t>+</m:t>
-                    </m:r>
-                    <m:r>
-                      <a:rPr lang="en-US" i="1">
-                        <a:latin typeface="Cambria Math"/>
-                      </a:rPr>
-                      <m:t>0</m:t>
-                    </m:r>
-                    <m:r>
-                      <a:rPr lang="en-US" i="1">
-                        <a:latin typeface="Cambria Math"/>
-                      </a:rPr>
-                      <m:t>.</m:t>
-                    </m:r>
-                    <m:r>
-                      <a:rPr lang="en-US" i="1">
-                        <a:latin typeface="Cambria Math"/>
-                      </a:rPr>
-                      <m:t>625</m:t>
+                      <m:t>0.8125×2=1.625=1+0.625</m:t>
                     </m:r>
                   </m:oMath>
                 </a14:m>
@@ -18758,91 +17766,7 @@
                       <a:rPr lang="en-US" i="1">
                         <a:latin typeface="Cambria Math"/>
                       </a:rPr>
-                      <m:t>0</m:t>
-                    </m:r>
-                    <m:r>
-                      <a:rPr lang="en-US" i="1">
-                        <a:latin typeface="Cambria Math"/>
-                      </a:rPr>
-                      <m:t>.</m:t>
-                    </m:r>
-                    <m:r>
-                      <a:rPr lang="en-US" i="1">
-                        <a:latin typeface="Cambria Math"/>
-                      </a:rPr>
-                      <m:t>625</m:t>
-                    </m:r>
-                    <m:r>
-                      <a:rPr lang="en-US" i="1">
-                        <a:latin typeface="Cambria Math"/>
-                      </a:rPr>
-                      <m:t>×</m:t>
-                    </m:r>
-                    <m:r>
-                      <a:rPr lang="en-US" i="1">
-                        <a:latin typeface="Cambria Math"/>
-                      </a:rPr>
-                      <m:t>2</m:t>
-                    </m:r>
-                    <m:r>
-                      <a:rPr lang="en-US" i="1">
-                        <a:latin typeface="Cambria Math"/>
-                      </a:rPr>
-                      <m:t>=</m:t>
-                    </m:r>
-                    <m:r>
-                      <a:rPr lang="en-US" i="1">
-                        <a:latin typeface="Cambria Math"/>
-                      </a:rPr>
-                      <m:t>1</m:t>
-                    </m:r>
-                    <m:r>
-                      <a:rPr lang="en-US" i="1">
-                        <a:latin typeface="Cambria Math"/>
-                      </a:rPr>
-                      <m:t>.</m:t>
-                    </m:r>
-                    <m:r>
-                      <a:rPr lang="en-US" i="1">
-                        <a:latin typeface="Cambria Math"/>
-                      </a:rPr>
-                      <m:t>25</m:t>
-                    </m:r>
-                    <m:r>
-                      <a:rPr lang="en-US" i="1">
-                        <a:latin typeface="Cambria Math"/>
-                      </a:rPr>
-                      <m:t>=</m:t>
-                    </m:r>
-                    <m:r>
-                      <a:rPr lang="en-US" i="1">
-                        <a:latin typeface="Cambria Math"/>
-                      </a:rPr>
-                      <m:t>1</m:t>
-                    </m:r>
-                    <m:r>
-                      <a:rPr lang="en-US" i="1">
-                        <a:latin typeface="Cambria Math"/>
-                      </a:rPr>
-                      <m:t>+</m:t>
-                    </m:r>
-                    <m:r>
-                      <a:rPr lang="en-US" i="1">
-                        <a:latin typeface="Cambria Math"/>
-                      </a:rPr>
-                      <m:t>0</m:t>
-                    </m:r>
-                    <m:r>
-                      <a:rPr lang="en-US" i="1">
-                        <a:latin typeface="Cambria Math"/>
-                      </a:rPr>
-                      <m:t>.</m:t>
-                    </m:r>
-                    <m:r>
-                      <a:rPr lang="en-US" i="1">
-                        <a:latin typeface="Cambria Math"/>
-                      </a:rPr>
-                      <m:t>25</m:t>
+                      <m:t>0.625×2=1.25=1+0.25</m:t>
                     </m:r>
                   </m:oMath>
                 </a14:m>
@@ -18859,91 +17783,7 @@
                       <a:rPr lang="en-US" i="1">
                         <a:latin typeface="Cambria Math"/>
                       </a:rPr>
-                      <m:t>0</m:t>
-                    </m:r>
-                    <m:r>
-                      <a:rPr lang="en-US" i="1">
-                        <a:latin typeface="Cambria Math"/>
-                      </a:rPr>
-                      <m:t>.</m:t>
-                    </m:r>
-                    <m:r>
-                      <a:rPr lang="en-US" i="1">
-                        <a:latin typeface="Cambria Math"/>
-                      </a:rPr>
-                      <m:t>25</m:t>
-                    </m:r>
-                    <m:r>
-                      <a:rPr lang="en-US" i="1">
-                        <a:latin typeface="Cambria Math"/>
-                      </a:rPr>
-                      <m:t>×</m:t>
-                    </m:r>
-                    <m:r>
-                      <a:rPr lang="en-US" i="1">
-                        <a:latin typeface="Cambria Math"/>
-                      </a:rPr>
-                      <m:t>2</m:t>
-                    </m:r>
-                    <m:r>
-                      <a:rPr lang="en-US" i="1">
-                        <a:latin typeface="Cambria Math"/>
-                      </a:rPr>
-                      <m:t>=</m:t>
-                    </m:r>
-                    <m:r>
-                      <a:rPr lang="en-US" i="1">
-                        <a:latin typeface="Cambria Math"/>
-                      </a:rPr>
-                      <m:t>0</m:t>
-                    </m:r>
-                    <m:r>
-                      <a:rPr lang="en-US" i="1">
-                        <a:latin typeface="Cambria Math"/>
-                      </a:rPr>
-                      <m:t>.</m:t>
-                    </m:r>
-                    <m:r>
-                      <a:rPr lang="en-US" i="1">
-                        <a:latin typeface="Cambria Math"/>
-                      </a:rPr>
-                      <m:t>5</m:t>
-                    </m:r>
-                    <m:r>
-                      <a:rPr lang="en-US" i="1">
-                        <a:latin typeface="Cambria Math"/>
-                      </a:rPr>
-                      <m:t>=</m:t>
-                    </m:r>
-                    <m:r>
-                      <a:rPr lang="en-US" i="1">
-                        <a:latin typeface="Cambria Math"/>
-                      </a:rPr>
-                      <m:t>0</m:t>
-                    </m:r>
-                    <m:r>
-                      <a:rPr lang="en-US" i="1">
-                        <a:latin typeface="Cambria Math"/>
-                      </a:rPr>
-                      <m:t>+</m:t>
-                    </m:r>
-                    <m:r>
-                      <a:rPr lang="en-US" i="1">
-                        <a:latin typeface="Cambria Math"/>
-                      </a:rPr>
-                      <m:t>0</m:t>
-                    </m:r>
-                    <m:r>
-                      <a:rPr lang="en-US" i="1">
-                        <a:latin typeface="Cambria Math"/>
-                      </a:rPr>
-                      <m:t>.</m:t>
-                    </m:r>
-                    <m:r>
-                      <a:rPr lang="en-US" i="1">
-                        <a:latin typeface="Cambria Math"/>
-                      </a:rPr>
-                      <m:t>5</m:t>
+                      <m:t>0.25×2=0.5=0+0.5</m:t>
                     </m:r>
                   </m:oMath>
                 </a14:m>
@@ -18960,43 +17800,7 @@
                       <a:rPr lang="en-US" i="1">
                         <a:latin typeface="Cambria Math"/>
                       </a:rPr>
-                      <m:t>0</m:t>
-                    </m:r>
-                    <m:r>
-                      <a:rPr lang="en-US" i="1">
-                        <a:latin typeface="Cambria Math"/>
-                      </a:rPr>
-                      <m:t>.</m:t>
-                    </m:r>
-                    <m:r>
-                      <a:rPr lang="en-US" i="1">
-                        <a:latin typeface="Cambria Math"/>
-                      </a:rPr>
-                      <m:t>5</m:t>
-                    </m:r>
-                    <m:r>
-                      <a:rPr lang="en-US" i="1">
-                        <a:latin typeface="Cambria Math"/>
-                      </a:rPr>
-                      <m:t>×</m:t>
-                    </m:r>
-                    <m:r>
-                      <a:rPr lang="en-US" i="1">
-                        <a:latin typeface="Cambria Math"/>
-                      </a:rPr>
-                      <m:t>2</m:t>
-                    </m:r>
-                    <m:r>
-                      <a:rPr lang="en-US" i="1">
-                        <a:latin typeface="Cambria Math"/>
-                      </a:rPr>
-                      <m:t>=</m:t>
-                    </m:r>
-                    <m:r>
-                      <a:rPr lang="en-US" i="1">
-                        <a:latin typeface="Cambria Math"/>
-                      </a:rPr>
-                      <m:t>1</m:t>
+                      <m:t>0.5×2=1</m:t>
                     </m:r>
                   </m:oMath>
                 </a14:m>
@@ -20450,13 +19254,25 @@
                       <a:rPr lang="en-US" i="1" smtClean="0">
                         <a:latin typeface="Cambria Math"/>
                       </a:rPr>
-                      <m:t>1.</m:t>
+                      <m:t>1</m:t>
+                    </m:r>
+                    <m:r>
+                      <a:rPr lang="en-US" i="1" smtClean="0">
+                        <a:latin typeface="Cambria Math"/>
+                      </a:rPr>
+                      <m:t>.</m:t>
                     </m:r>
                     <m:r>
                       <a:rPr lang="en-US" b="0" i="1" smtClean="0">
                         <a:latin typeface="Cambria Math" panose="02040503050406030204" pitchFamily="18" charset="0"/>
                       </a:rPr>
-                      <m:t>3&lt;</m:t>
+                      <m:t>3</m:t>
+                    </m:r>
+                    <m:r>
+                      <a:rPr lang="en-US" b="0" i="1" smtClean="0">
+                        <a:latin typeface="Cambria Math" panose="02040503050406030204" pitchFamily="18" charset="0"/>
+                      </a:rPr>
+                      <m:t>&lt;</m:t>
                     </m:r>
                     <m:sSup>
                       <m:sSupPr>
@@ -20502,7 +19318,13 @@
                           <a:rPr lang="en-US" i="1">
                             <a:latin typeface="Cambria Math"/>
                           </a:rPr>
-                          <m:t>1.</m:t>
+                          <m:t>1</m:t>
+                        </m:r>
+                        <m:r>
+                          <a:rPr lang="en-US" i="1">
+                            <a:latin typeface="Cambria Math"/>
+                          </a:rPr>
+                          <m:t>.</m:t>
                         </m:r>
                         <m:r>
                           <a:rPr lang="en-US" b="0" i="1" smtClean="0">
@@ -20543,7 +19365,25 @@
                       <a:rPr lang="en-US" b="0" i="1" smtClean="0">
                         <a:latin typeface="Cambria Math" panose="02040503050406030204" pitchFamily="18" charset="0"/>
                       </a:rPr>
-                      <m:t>=1.3</m:t>
+                      <m:t>=</m:t>
+                    </m:r>
+                    <m:r>
+                      <a:rPr lang="en-US" b="0" i="1" smtClean="0">
+                        <a:latin typeface="Cambria Math" panose="02040503050406030204" pitchFamily="18" charset="0"/>
+                      </a:rPr>
+                      <m:t>1</m:t>
+                    </m:r>
+                    <m:r>
+                      <a:rPr lang="en-US" b="0" i="1" smtClean="0">
+                        <a:latin typeface="Cambria Math" panose="02040503050406030204" pitchFamily="18" charset="0"/>
+                      </a:rPr>
+                      <m:t>.</m:t>
+                    </m:r>
+                    <m:r>
+                      <a:rPr lang="en-US" b="0" i="1" smtClean="0">
+                        <a:latin typeface="Cambria Math" panose="02040503050406030204" pitchFamily="18" charset="0"/>
+                      </a:rPr>
+                      <m:t>3</m:t>
                     </m:r>
                   </m:oMath>
                 </a14:m>
@@ -20562,7 +19402,13 @@
                       <a:rPr lang="en-US" i="1">
                         <a:latin typeface="Cambria Math"/>
                       </a:rPr>
-                      <m:t>1.</m:t>
+                      <m:t>1</m:t>
+                    </m:r>
+                    <m:r>
+                      <a:rPr lang="en-US" i="1">
+                        <a:latin typeface="Cambria Math"/>
+                      </a:rPr>
+                      <m:t>.</m:t>
                     </m:r>
                     <m:r>
                       <a:rPr lang="en-US" b="0" i="1" smtClean="0">
@@ -20586,7 +19432,31 @@
                       <a:rPr lang="en-US" i="1">
                         <a:latin typeface="Cambria Math"/>
                       </a:rPr>
-                      <m:t>(1+0.</m:t>
+                      <m:t>(</m:t>
+                    </m:r>
+                    <m:r>
+                      <a:rPr lang="en-US" i="1">
+                        <a:latin typeface="Cambria Math"/>
+                      </a:rPr>
+                      <m:t>1</m:t>
+                    </m:r>
+                    <m:r>
+                      <a:rPr lang="en-US" i="1">
+                        <a:latin typeface="Cambria Math"/>
+                      </a:rPr>
+                      <m:t>+</m:t>
+                    </m:r>
+                    <m:r>
+                      <a:rPr lang="en-US" i="1">
+                        <a:latin typeface="Cambria Math"/>
+                      </a:rPr>
+                      <m:t>0</m:t>
+                    </m:r>
+                    <m:r>
+                      <a:rPr lang="en-US" i="1">
+                        <a:latin typeface="Cambria Math"/>
+                      </a:rPr>
+                      <m:t>.</m:t>
                     </m:r>
                     <m:r>
                       <a:rPr lang="en-US" b="0" i="1" smtClean="0">
@@ -20648,7 +19518,13 @@
                       <a:rPr lang="en-US" b="0" i="1" smtClean="0">
                         <a:latin typeface="Cambria Math"/>
                       </a:rPr>
-                      <m:t>=0</m:t>
+                      <m:t>=</m:t>
+                    </m:r>
+                    <m:r>
+                      <a:rPr lang="en-US" b="0" i="1" smtClean="0">
+                        <a:latin typeface="Cambria Math"/>
+                      </a:rPr>
+                      <m:t>0</m:t>
                     </m:r>
                   </m:oMath>
                 </a14:m>
@@ -20687,7 +19563,31 @@
                       <a:rPr lang="en-US" i="1">
                         <a:latin typeface="Cambria Math"/>
                       </a:rPr>
-                      <m:t>+127=127=</m:t>
+                      <m:t>+</m:t>
+                    </m:r>
+                    <m:r>
+                      <a:rPr lang="en-US" i="1">
+                        <a:latin typeface="Cambria Math"/>
+                      </a:rPr>
+                      <m:t>127</m:t>
+                    </m:r>
+                    <m:r>
+                      <a:rPr lang="en-US" i="1">
+                        <a:latin typeface="Cambria Math"/>
+                      </a:rPr>
+                      <m:t>=</m:t>
+                    </m:r>
+                    <m:r>
+                      <a:rPr lang="en-US" i="1">
+                        <a:latin typeface="Cambria Math"/>
+                      </a:rPr>
+                      <m:t>127</m:t>
+                    </m:r>
+                    <m:r>
+                      <a:rPr lang="en-US" i="1">
+                        <a:latin typeface="Cambria Math"/>
+                      </a:rPr>
+                      <m:t>=</m:t>
                     </m:r>
                     <m:sSub>
                       <m:sSubPr>
@@ -20749,7 +19649,13 @@
                           <a:rPr lang="en-US" b="0" i="1" smtClean="0">
                             <a:latin typeface="Cambria Math"/>
                           </a:rPr>
-                          <m:t>0.</m:t>
+                          <m:t>0</m:t>
+                        </m:r>
+                        <m:r>
+                          <a:rPr lang="en-US" b="0" i="1" smtClean="0">
+                            <a:latin typeface="Cambria Math"/>
+                          </a:rPr>
+                          <m:t>.</m:t>
                         </m:r>
                         <m:r>
                           <a:rPr lang="en-US" b="0" i="1" smtClean="0">
@@ -20767,7 +19673,16 @@
                             </a:solidFill>
                             <a:latin typeface="Cambria Math" panose="02040503050406030204" pitchFamily="18" charset="0"/>
                           </a:rPr>
-                          <m:t>001100110011…</m:t>
+                          <m:t>001100110011</m:t>
+                        </m:r>
+                        <m:r>
+                          <a:rPr lang="en-US" b="0" i="1" smtClean="0">
+                            <a:solidFill>
+                              <a:srgbClr val="00B050"/>
+                            </a:solidFill>
+                            <a:latin typeface="Cambria Math" panose="02040503050406030204" pitchFamily="18" charset="0"/>
+                          </a:rPr>
+                          <m:t>…</m:t>
                         </m:r>
                       </m:e>
                       <m:sub>
@@ -20844,7 +19759,13 @@
                           <a:rPr lang="en-US" sz="2400" i="1">
                             <a:latin typeface="Cambria Math"/>
                           </a:rPr>
-                          <m:t>−1</m:t>
+                          <m:t>−</m:t>
+                        </m:r>
+                        <m:r>
+                          <a:rPr lang="en-US" sz="2400" i="1">
+                            <a:latin typeface="Cambria Math"/>
+                          </a:rPr>
+                          <m:t>1</m:t>
                         </m:r>
                       </m:sup>
                     </m:sSup>
@@ -20864,7 +19785,13 @@
                       <a:rPr lang="en-US" sz="2400" b="0" i="1" smtClean="0">
                         <a:latin typeface="Cambria Math" panose="02040503050406030204" pitchFamily="18" charset="0"/>
                       </a:rPr>
-                      <m:t>2×</m:t>
+                      <m:t>2</m:t>
+                    </m:r>
+                    <m:r>
+                      <a:rPr lang="en-US" sz="2400" b="0" i="1" smtClean="0">
+                        <a:latin typeface="Cambria Math" panose="02040503050406030204" pitchFamily="18" charset="0"/>
+                      </a:rPr>
+                      <m:t>×</m:t>
                     </m:r>
                     <m:sSup>
                       <m:sSupPr>
@@ -20887,7 +19814,13 @@
                           <a:rPr lang="en-US" sz="2400" i="1">
                             <a:latin typeface="Cambria Math"/>
                           </a:rPr>
-                          <m:t>−2</m:t>
+                          <m:t>−</m:t>
+                        </m:r>
+                        <m:r>
+                          <a:rPr lang="en-US" sz="2400" i="1">
+                            <a:latin typeface="Cambria Math"/>
+                          </a:rPr>
+                          <m:t>2</m:t>
                         </m:r>
                       </m:sup>
                     </m:sSup>
@@ -20907,7 +19840,13 @@
                       <a:rPr lang="en-US" sz="2400" b="0" i="1" smtClean="0">
                         <a:latin typeface="Cambria Math" panose="02040503050406030204" pitchFamily="18" charset="0"/>
                       </a:rPr>
-                      <m:t>3×</m:t>
+                      <m:t>3</m:t>
+                    </m:r>
+                    <m:r>
+                      <a:rPr lang="en-US" sz="2400" b="0" i="1" smtClean="0">
+                        <a:latin typeface="Cambria Math" panose="02040503050406030204" pitchFamily="18" charset="0"/>
+                      </a:rPr>
+                      <m:t>×</m:t>
                     </m:r>
                     <m:sSup>
                       <m:sSupPr>
@@ -20930,7 +19869,13 @@
                           <a:rPr lang="en-US" sz="2400" i="1">
                             <a:latin typeface="Cambria Math"/>
                           </a:rPr>
-                          <m:t>−3</m:t>
+                          <m:t>−</m:t>
+                        </m:r>
+                        <m:r>
+                          <a:rPr lang="en-US" sz="2400" i="1">
+                            <a:latin typeface="Cambria Math"/>
+                          </a:rPr>
+                          <m:t>3</m:t>
                         </m:r>
                       </m:sup>
                     </m:sSup>
@@ -20950,7 +19895,13 @@
                       <a:rPr lang="en-US" sz="2400" b="0" i="1" smtClean="0">
                         <a:latin typeface="Cambria Math" panose="02040503050406030204" pitchFamily="18" charset="0"/>
                       </a:rPr>
-                      <m:t>4×</m:t>
+                      <m:t>4</m:t>
+                    </m:r>
+                    <m:r>
+                      <a:rPr lang="en-US" sz="2400" b="0" i="1" smtClean="0">
+                        <a:latin typeface="Cambria Math" panose="02040503050406030204" pitchFamily="18" charset="0"/>
+                      </a:rPr>
+                      <m:t>×</m:t>
                     </m:r>
                     <m:sSup>
                       <m:sSupPr>
@@ -20973,7 +19924,13 @@
                           <a:rPr lang="en-US" sz="2400" i="1">
                             <a:latin typeface="Cambria Math"/>
                           </a:rPr>
-                          <m:t>−4</m:t>
+                          <m:t>−</m:t>
+                        </m:r>
+                        <m:r>
+                          <a:rPr lang="en-US" sz="2400" i="1">
+                            <a:latin typeface="Cambria Math"/>
+                          </a:rPr>
+                          <m:t>4</m:t>
                         </m:r>
                       </m:sup>
                     </m:sSup>
@@ -20995,7 +19952,13 @@
                       <a:rPr lang="en-US" i="1">
                         <a:latin typeface="Cambria Math"/>
                       </a:rPr>
-                      <m:t>0.</m:t>
+                      <m:t>0</m:t>
+                    </m:r>
+                    <m:r>
+                      <a:rPr lang="en-US" i="1">
+                        <a:latin typeface="Cambria Math"/>
+                      </a:rPr>
+                      <m:t>.</m:t>
                     </m:r>
                     <m:r>
                       <a:rPr lang="en-US" b="0" i="1" smtClean="0">
@@ -21007,7 +19970,19 @@
                       <a:rPr lang="en-US" i="1">
                         <a:latin typeface="Cambria Math"/>
                       </a:rPr>
-                      <m:t>×2=</m:t>
+                      <m:t>×</m:t>
+                    </m:r>
+                    <m:r>
+                      <a:rPr lang="en-US" i="1">
+                        <a:latin typeface="Cambria Math"/>
+                      </a:rPr>
+                      <m:t>2</m:t>
+                    </m:r>
+                    <m:r>
+                      <a:rPr lang="en-US" i="1">
+                        <a:latin typeface="Cambria Math"/>
+                      </a:rPr>
+                      <m:t>=</m:t>
                     </m:r>
                     <m:r>
                       <a:rPr lang="en-US" b="0" i="1" smtClean="0">
@@ -21019,7 +19994,13 @@
                       <a:rPr lang="en-US" i="1">
                         <a:latin typeface="Cambria Math"/>
                       </a:rPr>
-                      <m:t>.6</m:t>
+                      <m:t>.</m:t>
+                    </m:r>
+                    <m:r>
+                      <a:rPr lang="en-US" i="1">
+                        <a:latin typeface="Cambria Math"/>
+                      </a:rPr>
+                      <m:t>6</m:t>
                     </m:r>
                   </m:oMath>
                 </a14:m>
@@ -21036,7 +20017,55 @@
                       <a:rPr lang="en-US" i="1">
                         <a:latin typeface="Cambria Math"/>
                       </a:rPr>
-                      <m:t>0.6×2=1.2</m:t>
+                      <m:t>0</m:t>
+                    </m:r>
+                    <m:r>
+                      <a:rPr lang="en-US" i="1">
+                        <a:latin typeface="Cambria Math"/>
+                      </a:rPr>
+                      <m:t>.</m:t>
+                    </m:r>
+                    <m:r>
+                      <a:rPr lang="en-US" i="1">
+                        <a:latin typeface="Cambria Math"/>
+                      </a:rPr>
+                      <m:t>6</m:t>
+                    </m:r>
+                    <m:r>
+                      <a:rPr lang="en-US" i="1">
+                        <a:latin typeface="Cambria Math"/>
+                      </a:rPr>
+                      <m:t>×</m:t>
+                    </m:r>
+                    <m:r>
+                      <a:rPr lang="en-US" i="1">
+                        <a:latin typeface="Cambria Math"/>
+                      </a:rPr>
+                      <m:t>2</m:t>
+                    </m:r>
+                    <m:r>
+                      <a:rPr lang="en-US" i="1">
+                        <a:latin typeface="Cambria Math"/>
+                      </a:rPr>
+                      <m:t>=</m:t>
+                    </m:r>
+                    <m:r>
+                      <a:rPr lang="en-US" i="1">
+                        <a:latin typeface="Cambria Math"/>
+                      </a:rPr>
+                      <m:t>1</m:t>
+                    </m:r>
+                    <m:r>
+                      <a:rPr lang="en-US" i="1">
+                        <a:latin typeface="Cambria Math"/>
+                      </a:rPr>
+                      <m:t>.</m:t>
+                    </m:r>
+                    <m:r>
+                      <a:rPr lang="en-US" i="1">
+                        <a:latin typeface="Cambria Math"/>
+                      </a:rPr>
+                      <m:t>2</m:t>
                     </m:r>
                   </m:oMath>
                 </a14:m>
@@ -21053,7 +20082,49 @@
                       <a:rPr lang="en-US" i="1">
                         <a:latin typeface="Cambria Math"/>
                       </a:rPr>
-                      <m:t>0.2×2=0.</m:t>
+                      <m:t>0</m:t>
+                    </m:r>
+                    <m:r>
+                      <a:rPr lang="en-US" i="1">
+                        <a:latin typeface="Cambria Math"/>
+                      </a:rPr>
+                      <m:t>.</m:t>
+                    </m:r>
+                    <m:r>
+                      <a:rPr lang="en-US" i="1">
+                        <a:latin typeface="Cambria Math"/>
+                      </a:rPr>
+                      <m:t>2</m:t>
+                    </m:r>
+                    <m:r>
+                      <a:rPr lang="en-US" i="1">
+                        <a:latin typeface="Cambria Math"/>
+                      </a:rPr>
+                      <m:t>×</m:t>
+                    </m:r>
+                    <m:r>
+                      <a:rPr lang="en-US" i="1">
+                        <a:latin typeface="Cambria Math"/>
+                      </a:rPr>
+                      <m:t>2</m:t>
+                    </m:r>
+                    <m:r>
+                      <a:rPr lang="en-US" i="1">
+                        <a:latin typeface="Cambria Math"/>
+                      </a:rPr>
+                      <m:t>=</m:t>
+                    </m:r>
+                    <m:r>
+                      <a:rPr lang="en-US" i="1">
+                        <a:latin typeface="Cambria Math"/>
+                      </a:rPr>
+                      <m:t>0</m:t>
+                    </m:r>
+                    <m:r>
+                      <a:rPr lang="en-US" i="1">
+                        <a:latin typeface="Cambria Math"/>
+                      </a:rPr>
+                      <m:t>.</m:t>
                     </m:r>
                     <m:r>
                       <a:rPr lang="en-US" b="0" i="1" smtClean="0">
@@ -21076,7 +20147,13 @@
                       <a:rPr lang="en-US" i="1">
                         <a:latin typeface="Cambria Math"/>
                       </a:rPr>
-                      <m:t>0.</m:t>
+                      <m:t>0</m:t>
+                    </m:r>
+                    <m:r>
+                      <a:rPr lang="en-US" i="1">
+                        <a:latin typeface="Cambria Math"/>
+                      </a:rPr>
+                      <m:t>.</m:t>
                     </m:r>
                     <m:r>
                       <a:rPr lang="en-US" b="0" i="1" smtClean="0">
@@ -21088,13 +20165,37 @@
                       <a:rPr lang="en-US" i="1">
                         <a:latin typeface="Cambria Math"/>
                       </a:rPr>
-                      <m:t>×2=</m:t>
+                      <m:t>×</m:t>
+                    </m:r>
+                    <m:r>
+                      <a:rPr lang="en-US" i="1">
+                        <a:latin typeface="Cambria Math"/>
+                      </a:rPr>
+                      <m:t>2</m:t>
+                    </m:r>
+                    <m:r>
+                      <a:rPr lang="en-US" i="1">
+                        <a:latin typeface="Cambria Math"/>
+                      </a:rPr>
+                      <m:t>=</m:t>
                     </m:r>
                     <m:r>
                       <a:rPr lang="en-US" b="0" i="1" smtClean="0">
                         <a:latin typeface="Cambria Math" panose="02040503050406030204" pitchFamily="18" charset="0"/>
                       </a:rPr>
-                      <m:t>0.8</m:t>
+                      <m:t>0</m:t>
+                    </m:r>
+                    <m:r>
+                      <a:rPr lang="en-US" b="0" i="1" smtClean="0">
+                        <a:latin typeface="Cambria Math" panose="02040503050406030204" pitchFamily="18" charset="0"/>
+                      </a:rPr>
+                      <m:t>.</m:t>
+                    </m:r>
+                    <m:r>
+                      <a:rPr lang="en-US" b="0" i="1" smtClean="0">
+                        <a:latin typeface="Cambria Math" panose="02040503050406030204" pitchFamily="18" charset="0"/>
+                      </a:rPr>
+                      <m:t>8</m:t>
                     </m:r>
                   </m:oMath>
                 </a14:m>
@@ -21111,7 +20212,13 @@
                       <a:rPr lang="en-US" i="1">
                         <a:latin typeface="Cambria Math"/>
                       </a:rPr>
-                      <m:t>0.</m:t>
+                      <m:t>0</m:t>
+                    </m:r>
+                    <m:r>
+                      <a:rPr lang="en-US" i="1">
+                        <a:latin typeface="Cambria Math"/>
+                      </a:rPr>
+                      <m:t>.</m:t>
                     </m:r>
                     <m:r>
                       <a:rPr lang="en-US" b="0" i="1" smtClean="0">
@@ -21123,13 +20230,37 @@
                       <a:rPr lang="en-US" i="1">
                         <a:latin typeface="Cambria Math"/>
                       </a:rPr>
-                      <m:t>×2=</m:t>
+                      <m:t>×</m:t>
+                    </m:r>
+                    <m:r>
+                      <a:rPr lang="en-US" i="1">
+                        <a:latin typeface="Cambria Math"/>
+                      </a:rPr>
+                      <m:t>2</m:t>
+                    </m:r>
+                    <m:r>
+                      <a:rPr lang="en-US" i="1">
+                        <a:latin typeface="Cambria Math"/>
+                      </a:rPr>
+                      <m:t>=</m:t>
                     </m:r>
                     <m:r>
                       <a:rPr lang="en-US" b="0" i="1" smtClean="0">
                         <a:latin typeface="Cambria Math" panose="02040503050406030204" pitchFamily="18" charset="0"/>
                       </a:rPr>
-                      <m:t>1.6</m:t>
+                      <m:t>1</m:t>
+                    </m:r>
+                    <m:r>
+                      <a:rPr lang="en-US" b="0" i="1" smtClean="0">
+                        <a:latin typeface="Cambria Math" panose="02040503050406030204" pitchFamily="18" charset="0"/>
+                      </a:rPr>
+                      <m:t>.</m:t>
+                    </m:r>
+                    <m:r>
+                      <a:rPr lang="en-US" b="0" i="1" smtClean="0">
+                        <a:latin typeface="Cambria Math" panose="02040503050406030204" pitchFamily="18" charset="0"/>
+                      </a:rPr>
+                      <m:t>6</m:t>
                     </m:r>
                   </m:oMath>
                 </a14:m>
@@ -21146,7 +20277,13 @@
                       <a:rPr lang="en-US" i="1">
                         <a:latin typeface="Cambria Math"/>
                       </a:rPr>
-                      <m:t>0.</m:t>
+                      <m:t>0</m:t>
+                    </m:r>
+                    <m:r>
+                      <a:rPr lang="en-US" i="1">
+                        <a:latin typeface="Cambria Math"/>
+                      </a:rPr>
+                      <m:t>.</m:t>
                     </m:r>
                     <m:r>
                       <a:rPr lang="en-US" b="0" i="1" smtClean="0">
@@ -21158,7 +20295,19 @@
                       <a:rPr lang="en-US" i="1">
                         <a:latin typeface="Cambria Math"/>
                       </a:rPr>
-                      <m:t>×2=</m:t>
+                      <m:t>×</m:t>
+                    </m:r>
+                    <m:r>
+                      <a:rPr lang="en-US" i="1">
+                        <a:latin typeface="Cambria Math"/>
+                      </a:rPr>
+                      <m:t>2</m:t>
+                    </m:r>
+                    <m:r>
+                      <a:rPr lang="en-US" i="1">
+                        <a:latin typeface="Cambria Math"/>
+                      </a:rPr>
+                      <m:t>=</m:t>
                     </m:r>
                     <m:r>
                       <a:rPr lang="en-US" b="0" i="1" smtClean="0">
@@ -22475,21 +21624,7 @@
                         <a:latin typeface="Cambria Math" panose="02040503050406030204" pitchFamily="18" charset="0"/>
                         <a:ea typeface="Cambria Math" panose="02040503050406030204" pitchFamily="18" charset="0"/>
                       </a:rPr>
-                      <m:t>∞</m:t>
-                    </m:r>
-                    <m:r>
-                      <a:rPr lang="en-US" i="1">
-                        <a:latin typeface="Cambria Math" panose="02040503050406030204" pitchFamily="18" charset="0"/>
-                        <a:ea typeface="Cambria Math" panose="02040503050406030204" pitchFamily="18" charset="0"/>
-                      </a:rPr>
-                      <m:t>+</m:t>
-                    </m:r>
-                    <m:r>
-                      <a:rPr lang="en-US" i="1">
-                        <a:latin typeface="Cambria Math" panose="02040503050406030204" pitchFamily="18" charset="0"/>
-                        <a:ea typeface="Cambria Math" panose="02040503050406030204" pitchFamily="18" charset="0"/>
-                      </a:rPr>
-                      <m:t>∞</m:t>
+                      <m:t>∞+∞</m:t>
                     </m:r>
                   </m:oMath>
                 </a14:m>
@@ -22727,13 +21862,7 @@
                                 <a:rPr lang="en-US" sz="2800">
                                   <a:latin typeface="Cambria Math" panose="02040503050406030204" pitchFamily="18" charset="0"/>
                                 </a:rPr>
-                                <m:t>−</m:t>
-                              </m:r>
-                              <m:r>
-                                <a:rPr lang="en-US" sz="2800">
-                                  <a:latin typeface="Cambria Math" panose="02040503050406030204" pitchFamily="18" charset="0"/>
-                                </a:rPr>
-                                <m:t>1</m:t>
+                                <m:t>−1</m:t>
                               </m:r>
                             </m:e>
                           </m:d>
@@ -22789,16 +21918,7 @@
                               </a:solidFill>
                               <a:latin typeface="Cambria Math" panose="02040503050406030204" pitchFamily="18" charset="0"/>
                             </a:rPr>
-                            <m:t>−</m:t>
-                          </m:r>
-                          <m:r>
-                            <a:rPr lang="en-US" sz="2800">
-                              <a:solidFill>
-                                <a:srgbClr val="FF0000"/>
-                              </a:solidFill>
-                              <a:latin typeface="Cambria Math" panose="02040503050406030204" pitchFamily="18" charset="0"/>
-                            </a:rPr>
-                            <m:t>126</m:t>
+                            <m:t>−126</m:t>
                           </m:r>
                         </m:sup>
                       </m:sSup>
@@ -22901,13 +22021,7 @@
                                 <a:rPr lang="en-US" sz="2800">
                                   <a:latin typeface="Cambria Math" panose="02040503050406030204" pitchFamily="18" charset="0"/>
                                 </a:rPr>
-                                <m:t>−</m:t>
-                              </m:r>
-                              <m:r>
-                                <a:rPr lang="en-US" sz="2800">
-                                  <a:latin typeface="Cambria Math" panose="02040503050406030204" pitchFamily="18" charset="0"/>
-                                </a:rPr>
-                                <m:t>1</m:t>
+                                <m:t>−1</m:t>
                               </m:r>
                             </m:e>
                           </m:d>
@@ -22999,16 +22113,7 @@
                               </a:solidFill>
                               <a:latin typeface="Cambria Math" panose="02040503050406030204" pitchFamily="18" charset="0"/>
                             </a:rPr>
-                            <m:t>−</m:t>
-                          </m:r>
-                          <m:r>
-                            <a:rPr lang="en-US" sz="2800">
-                              <a:solidFill>
-                                <a:srgbClr val="FF0000"/>
-                              </a:solidFill>
-                              <a:latin typeface="Cambria Math" panose="02040503050406030204" pitchFamily="18" charset="0"/>
-                            </a:rPr>
-                            <m:t>12</m:t>
+                            <m:t>−12</m:t>
                           </m:r>
                           <m:r>
                             <a:rPr lang="en-US" sz="2800" i="1">
@@ -23219,7 +22324,19 @@
                             <a:rPr lang="en-US" sz="2400" i="1">
                               <a:latin typeface="Cambria Math"/>
                             </a:rPr>
-                            <m:t>(−1)</m:t>
+                            <m:t>(−</m:t>
+                          </m:r>
+                          <m:r>
+                            <a:rPr lang="en-US" sz="2400" i="1">
+                              <a:latin typeface="Cambria Math"/>
+                            </a:rPr>
+                            <m:t>1</m:t>
+                          </m:r>
+                          <m:r>
+                            <a:rPr lang="en-US" sz="2400" i="1">
+                              <a:latin typeface="Cambria Math"/>
+                            </a:rPr>
+                            <m:t>)</m:t>
                           </m:r>
                         </m:e>
                         <m:sup>
@@ -23250,7 +22367,19 @@
                             <a:rPr lang="en-US" sz="2400" i="1">
                               <a:latin typeface="Cambria Math"/>
                             </a:rPr>
-                            <m:t>1+0</m:t>
+                            <m:t>1</m:t>
+                          </m:r>
+                          <m:r>
+                            <a:rPr lang="en-US" sz="2400" i="1">
+                              <a:latin typeface="Cambria Math"/>
+                            </a:rPr>
+                            <m:t>+</m:t>
+                          </m:r>
+                          <m:r>
+                            <a:rPr lang="en-US" sz="2400" i="1">
+                              <a:latin typeface="Cambria Math"/>
+                            </a:rPr>
+                            <m:t>0</m:t>
                           </m:r>
                         </m:e>
                       </m:d>
@@ -23281,7 +22410,19 @@
                             <a:rPr lang="en-US" sz="2400" i="1">
                               <a:latin typeface="Cambria Math"/>
                             </a:rPr>
-                            <m:t>1−127</m:t>
+                            <m:t>1</m:t>
+                          </m:r>
+                          <m:r>
+                            <a:rPr lang="en-US" sz="2400" i="1">
+                              <a:latin typeface="Cambria Math"/>
+                            </a:rPr>
+                            <m:t>−</m:t>
+                          </m:r>
+                          <m:r>
+                            <a:rPr lang="en-US" sz="2400" i="1">
+                              <a:latin typeface="Cambria Math"/>
+                            </a:rPr>
+                            <m:t>127</m:t>
                           </m:r>
                         </m:sup>
                       </m:sSup>
@@ -23312,7 +22453,13 @@
                             <a:rPr lang="en-US" sz="2400" i="1">
                               <a:latin typeface="Cambria Math"/>
                             </a:rPr>
-                            <m:t>−126</m:t>
+                            <m:t>−</m:t>
+                          </m:r>
+                          <m:r>
+                            <a:rPr lang="en-US" sz="2400" i="1">
+                              <a:latin typeface="Cambria Math"/>
+                            </a:rPr>
+                            <m:t>126</m:t>
                           </m:r>
                         </m:sup>
                       </m:sSup>
@@ -23320,7 +22467,31 @@
                         <a:rPr lang="en-US" sz="2400" i="1">
                           <a:latin typeface="Cambria Math"/>
                         </a:rPr>
-                        <m:t>≈1.18×</m:t>
+                        <m:t>≈</m:t>
+                      </m:r>
+                      <m:r>
+                        <a:rPr lang="en-US" sz="2400" i="1">
+                          <a:latin typeface="Cambria Math"/>
+                        </a:rPr>
+                        <m:t>1</m:t>
+                      </m:r>
+                      <m:r>
+                        <a:rPr lang="en-US" sz="2400" i="1">
+                          <a:latin typeface="Cambria Math"/>
+                        </a:rPr>
+                        <m:t>.</m:t>
+                      </m:r>
+                      <m:r>
+                        <a:rPr lang="en-US" sz="2400" i="1">
+                          <a:latin typeface="Cambria Math"/>
+                        </a:rPr>
+                        <m:t>18</m:t>
+                      </m:r>
+                      <m:r>
+                        <a:rPr lang="en-US" sz="2400" i="1">
+                          <a:latin typeface="Cambria Math"/>
+                        </a:rPr>
+                        <m:t>×</m:t>
                       </m:r>
                       <m:sSup>
                         <m:sSupPr>
@@ -23343,7 +22514,13 @@
                             <a:rPr lang="en-US" sz="2400" i="1">
                               <a:latin typeface="Cambria Math"/>
                             </a:rPr>
-                            <m:t>−38</m:t>
+                            <m:t>−</m:t>
+                          </m:r>
+                          <m:r>
+                            <a:rPr lang="en-US" sz="2400" i="1">
+                              <a:latin typeface="Cambria Math"/>
+                            </a:rPr>
+                            <m:t>38</m:t>
                           </m:r>
                         </m:sup>
                       </m:sSup>
@@ -23623,7 +22800,19 @@
                             <a:rPr lang="en-US" sz="2400" i="1">
                               <a:latin typeface="Cambria Math"/>
                             </a:rPr>
-                            <m:t>(−1)</m:t>
+                            <m:t>(−</m:t>
+                          </m:r>
+                          <m:r>
+                            <a:rPr lang="en-US" sz="2400" i="1">
+                              <a:latin typeface="Cambria Math"/>
+                            </a:rPr>
+                            <m:t>1</m:t>
+                          </m:r>
+                          <m:r>
+                            <a:rPr lang="en-US" sz="2400" i="1">
+                              <a:latin typeface="Cambria Math"/>
+                            </a:rPr>
+                            <m:t>)</m:t>
                           </m:r>
                         </m:e>
                         <m:sup>
@@ -23722,7 +22911,19 @@
                             <a:rPr lang="en-US" sz="2400" i="1">
                               <a:latin typeface="Cambria Math"/>
                             </a:rPr>
-                            <m:t>1−127</m:t>
+                            <m:t>1</m:t>
+                          </m:r>
+                          <m:r>
+                            <a:rPr lang="en-US" sz="2400" i="1">
+                              <a:latin typeface="Cambria Math"/>
+                            </a:rPr>
+                            <m:t>−</m:t>
+                          </m:r>
+                          <m:r>
+                            <a:rPr lang="en-US" sz="2400" i="1">
+                              <a:latin typeface="Cambria Math"/>
+                            </a:rPr>
+                            <m:t>127</m:t>
                           </m:r>
                         </m:sup>
                       </m:sSup>
@@ -23753,7 +22954,13 @@
                             <a:rPr lang="en-US" sz="2400" i="1">
                               <a:latin typeface="Cambria Math"/>
                             </a:rPr>
-                            <m:t>−149</m:t>
+                            <m:t>−</m:t>
+                          </m:r>
+                          <m:r>
+                            <a:rPr lang="en-US" sz="2400" i="1">
+                              <a:latin typeface="Cambria Math"/>
+                            </a:rPr>
+                            <m:t>149</m:t>
                           </m:r>
                         </m:sup>
                       </m:sSup>
@@ -23761,7 +22968,19 @@
                         <a:rPr lang="en-US" sz="2400" i="1">
                           <a:latin typeface="Cambria Math"/>
                         </a:rPr>
-                        <m:t>≈1.</m:t>
+                        <m:t>≈</m:t>
+                      </m:r>
+                      <m:r>
+                        <a:rPr lang="en-US" sz="2400" i="1">
+                          <a:latin typeface="Cambria Math"/>
+                        </a:rPr>
+                        <m:t>1</m:t>
+                      </m:r>
+                      <m:r>
+                        <a:rPr lang="en-US" sz="2400" i="1">
+                          <a:latin typeface="Cambria Math"/>
+                        </a:rPr>
+                        <m:t>.</m:t>
                       </m:r>
                       <m:r>
                         <a:rPr lang="en-US" sz="2400" b="0" i="1" smtClean="0">
@@ -25747,19 +24966,7 @@
                         <a:rPr lang="en-US" sz="2400">
                           <a:latin typeface="Cambria Math"/>
                         </a:rPr>
-                        <m:t>01</m:t>
-                      </m:r>
-                      <m:r>
-                        <a:rPr lang="en-US" sz="2400">
-                          <a:latin typeface="Cambria Math"/>
-                        </a:rPr>
-                        <m:t>.</m:t>
-                      </m:r>
-                      <m:r>
-                        <a:rPr lang="en-US" sz="2400">
-                          <a:latin typeface="Cambria Math"/>
-                        </a:rPr>
-                        <m:t>10</m:t>
+                        <m:t>01.10</m:t>
                       </m:r>
                       <m:sSub>
                         <m:sSubPr>
@@ -25782,13 +24989,7 @@
                             <a:rPr lang="en-US" sz="2400">
                               <a:latin typeface="Cambria Math"/>
                             </a:rPr>
-                            <m:t>2</m:t>
-                          </m:r>
-                          <m:r>
-                            <a:rPr lang="en-US" sz="2400">
-                              <a:latin typeface="Cambria Math"/>
-                            </a:rPr>
-                            <m:t> </m:t>
+                            <m:t>2 </m:t>
                           </m:r>
                         </m:sub>
                       </m:sSub>
@@ -25881,13 +25082,7 @@
                             <a:rPr lang="en-US" sz="2400" i="1">
                               <a:latin typeface="Cambria Math"/>
                             </a:rPr>
-                            <m:t>−</m:t>
-                          </m:r>
-                          <m:r>
-                            <a:rPr lang="en-US" sz="2400" i="1">
-                              <a:latin typeface="Cambria Math"/>
-                            </a:rPr>
-                            <m:t>3</m:t>
+                            <m:t>−3</m:t>
                           </m:r>
                         </m:sup>
                       </m:sSup>
@@ -25972,25 +25167,7 @@
                         <a:rPr lang="en-US" sz="2400">
                           <a:latin typeface="Cambria Math"/>
                         </a:rPr>
-                        <m:t>=</m:t>
-                      </m:r>
-                      <m:r>
-                        <a:rPr lang="en-US" sz="2400">
-                          <a:latin typeface="Cambria Math"/>
-                        </a:rPr>
-                        <m:t>21</m:t>
-                      </m:r>
-                      <m:r>
-                        <a:rPr lang="en-US" sz="2400">
-                          <a:latin typeface="Cambria Math"/>
-                        </a:rPr>
-                        <m:t>+</m:t>
-                      </m:r>
-                      <m:r>
-                        <a:rPr lang="en-US" sz="2400">
-                          <a:latin typeface="Cambria Math"/>
-                        </a:rPr>
-                        <m:t>5</m:t>
+                        <m:t>=21+5</m:t>
                       </m:r>
                       <m:r>
                         <a:rPr lang="en-US" sz="2400" i="1">
@@ -26019,13 +25196,7 @@
                             <a:rPr lang="en-US" sz="2400" i="1">
                               <a:latin typeface="Cambria Math"/>
                             </a:rPr>
-                            <m:t>−</m:t>
-                          </m:r>
-                          <m:r>
-                            <a:rPr lang="en-US" sz="2400" i="1">
-                              <a:latin typeface="Cambria Math"/>
-                            </a:rPr>
-                            <m:t>3</m:t>
+                            <m:t>−3</m:t>
                           </m:r>
                         </m:sup>
                       </m:sSup>
@@ -26110,25 +25281,7 @@
                         <a:rPr lang="en-US" sz="2400">
                           <a:latin typeface="Cambria Math"/>
                         </a:rPr>
-                        <m:t>=</m:t>
-                      </m:r>
-                      <m:r>
-                        <a:rPr lang="en-US" sz="2400">
-                          <a:latin typeface="Cambria Math"/>
-                        </a:rPr>
-                        <m:t>21</m:t>
-                      </m:r>
-                      <m:r>
-                        <a:rPr lang="en-US" sz="2400">
-                          <a:latin typeface="Cambria Math"/>
-                        </a:rPr>
-                        <m:t>.</m:t>
-                      </m:r>
-                      <m:r>
-                        <a:rPr lang="en-US" sz="2400">
-                          <a:latin typeface="Cambria Math"/>
-                        </a:rPr>
-                        <m:t>625</m:t>
+                        <m:t>=21.625</m:t>
                       </m:r>
                     </m:oMath>
                   </m:oMathPara>
@@ -32077,8 +31230,8 @@
           </p:sp>
         </mc:Fallback>
       </mc:AlternateContent>
-      <mc:AlternateContent xmlns:mc="http://schemas.openxmlformats.org/markup-compatibility/2006">
-        <mc:Choice xmlns:a14="http://schemas.microsoft.com/office/drawing/2010/main" Requires="a14">
+      <mc:AlternateContent xmlns:mc="http://schemas.openxmlformats.org/markup-compatibility/2006" xmlns:a14="http://schemas.microsoft.com/office/drawing/2010/main">
+        <mc:Choice Requires="a14">
           <p:sp>
             <p:nvSpPr>
               <p:cNvPr id="9" name="Rectangle 8">
@@ -32158,7 +31311,7 @@
             </p:txBody>
           </p:sp>
         </mc:Choice>
-        <mc:Fallback>
+        <mc:Fallback xmlns="">
           <p:sp>
             <p:nvSpPr>
               <p:cNvPr id="9" name="Rectangle 8">
@@ -32203,8 +31356,8 @@
           </p:sp>
         </mc:Fallback>
       </mc:AlternateContent>
-      <mc:AlternateContent xmlns:mc="http://schemas.openxmlformats.org/markup-compatibility/2006">
-        <mc:Choice xmlns:a14="http://schemas.microsoft.com/office/drawing/2010/main" Requires="a14">
+      <mc:AlternateContent xmlns:mc="http://schemas.openxmlformats.org/markup-compatibility/2006" xmlns:a14="http://schemas.microsoft.com/office/drawing/2010/main">
+        <mc:Choice Requires="a14">
           <p:sp>
             <p:nvSpPr>
               <p:cNvPr id="10" name="Rectangle 9">
@@ -32253,7 +31406,7 @@
             </p:txBody>
           </p:sp>
         </mc:Choice>
-        <mc:Fallback>
+        <mc:Fallback xmlns="">
           <p:sp>
             <p:nvSpPr>
               <p:cNvPr id="10" name="Rectangle 9">
@@ -32934,8 +32087,8 @@
           </a:p>
         </p:txBody>
       </p:sp>
-      <mc:AlternateContent xmlns:mc="http://schemas.openxmlformats.org/markup-compatibility/2006">
-        <mc:Choice xmlns:a14="http://schemas.microsoft.com/office/drawing/2010/main" Requires="a14">
+      <mc:AlternateContent xmlns:mc="http://schemas.openxmlformats.org/markup-compatibility/2006" xmlns:a14="http://schemas.microsoft.com/office/drawing/2010/main">
+        <mc:Choice Requires="a14">
           <p:sp>
             <p:nvSpPr>
               <p:cNvPr id="4" name="Content Placeholder 3">
@@ -33229,7 +32382,49 @@
                       <a:rPr lang="en-US" i="1">
                         <a:latin typeface="Cambria Math" panose="02040503050406030204" pitchFamily="18" charset="0"/>
                       </a:rPr>
-                      <m:t>=−16+4+1=−11</m:t>
+                      <m:t>=−</m:t>
+                    </m:r>
+                    <m:r>
+                      <a:rPr lang="en-US" i="1">
+                        <a:latin typeface="Cambria Math" panose="02040503050406030204" pitchFamily="18" charset="0"/>
+                      </a:rPr>
+                      <m:t>16</m:t>
+                    </m:r>
+                    <m:r>
+                      <a:rPr lang="en-US" i="1">
+                        <a:latin typeface="Cambria Math" panose="02040503050406030204" pitchFamily="18" charset="0"/>
+                      </a:rPr>
+                      <m:t>+</m:t>
+                    </m:r>
+                    <m:r>
+                      <a:rPr lang="en-US" i="1">
+                        <a:latin typeface="Cambria Math" panose="02040503050406030204" pitchFamily="18" charset="0"/>
+                      </a:rPr>
+                      <m:t>4</m:t>
+                    </m:r>
+                    <m:r>
+                      <a:rPr lang="en-US" i="1">
+                        <a:latin typeface="Cambria Math" panose="02040503050406030204" pitchFamily="18" charset="0"/>
+                      </a:rPr>
+                      <m:t>+</m:t>
+                    </m:r>
+                    <m:r>
+                      <a:rPr lang="en-US" i="1">
+                        <a:latin typeface="Cambria Math" panose="02040503050406030204" pitchFamily="18" charset="0"/>
+                      </a:rPr>
+                      <m:t>1</m:t>
+                    </m:r>
+                    <m:r>
+                      <a:rPr lang="en-US" i="1">
+                        <a:latin typeface="Cambria Math" panose="02040503050406030204" pitchFamily="18" charset="0"/>
+                      </a:rPr>
+                      <m:t>=−</m:t>
+                    </m:r>
+                    <m:r>
+                      <a:rPr lang="en-US" i="1">
+                        <a:latin typeface="Cambria Math" panose="02040503050406030204" pitchFamily="18" charset="0"/>
+                      </a:rPr>
+                      <m:t>11</m:t>
                     </m:r>
                   </m:oMath>
                 </a14:m>
@@ -33250,7 +32445,7 @@
             </p:txBody>
           </p:sp>
         </mc:Choice>
-        <mc:Fallback>
+        <mc:Fallback xmlns="">
           <p:sp>
             <p:nvSpPr>
               <p:cNvPr id="4" name="Content Placeholder 3">
@@ -33382,8 +32577,8 @@
           </a:p>
         </p:txBody>
       </p:sp>
-      <mc:AlternateContent xmlns:mc="http://schemas.openxmlformats.org/markup-compatibility/2006">
-        <mc:Choice xmlns:a14="http://schemas.microsoft.com/office/drawing/2010/main" Requires="a14">
+      <mc:AlternateContent xmlns:mc="http://schemas.openxmlformats.org/markup-compatibility/2006" xmlns:a14="http://schemas.microsoft.com/office/drawing/2010/main">
+        <mc:Choice Requires="a14">
           <p:sp>
             <p:nvSpPr>
               <p:cNvPr id="4" name="Content Placeholder 3"/>
@@ -33463,7 +32658,25 @@
                         </a:solidFill>
                         <a:latin typeface="Cambria Math" panose="02040503050406030204" pitchFamily="18" charset="0"/>
                       </a:rPr>
-                      <m:t>12867.964928</m:t>
+                      <m:t>12867</m:t>
+                    </m:r>
+                    <m:r>
+                      <a:rPr lang="en-US" sz="2200" i="1">
+                        <a:solidFill>
+                          <a:srgbClr val="0000FF"/>
+                        </a:solidFill>
+                        <a:latin typeface="Cambria Math" panose="02040503050406030204" pitchFamily="18" charset="0"/>
+                      </a:rPr>
+                      <m:t>.</m:t>
+                    </m:r>
+                    <m:r>
+                      <a:rPr lang="en-US" sz="2200" i="1">
+                        <a:solidFill>
+                          <a:srgbClr val="0000FF"/>
+                        </a:solidFill>
+                        <a:latin typeface="Cambria Math" panose="02040503050406030204" pitchFamily="18" charset="0"/>
+                      </a:rPr>
+                      <m:t>964928</m:t>
                     </m:r>
                   </m:oMath>
                 </a14:m>
@@ -33499,7 +32712,19 @@
                           <a:rPr lang="en-US" sz="2200" i="1">
                             <a:latin typeface="Cambria Math" panose="02040503050406030204" pitchFamily="18" charset="0"/>
                           </a:rPr>
-                          <m:t>12867.964928</m:t>
+                          <m:t>12867</m:t>
+                        </m:r>
+                        <m:r>
+                          <a:rPr lang="en-US" sz="2200" i="1">
+                            <a:latin typeface="Cambria Math" panose="02040503050406030204" pitchFamily="18" charset="0"/>
+                          </a:rPr>
+                          <m:t>.</m:t>
+                        </m:r>
+                        <m:r>
+                          <a:rPr lang="en-US" sz="2200" i="1">
+                            <a:latin typeface="Cambria Math" panose="02040503050406030204" pitchFamily="18" charset="0"/>
+                          </a:rPr>
+                          <m:t>964928</m:t>
                         </m:r>
                         <m:r>
                           <a:rPr lang="en-US" sz="2200">
@@ -33694,7 +32919,31 @@
                       <a:rPr lang="en-US" sz="2200" i="1">
                         <a:latin typeface="Cambria Math" panose="02040503050406030204" pitchFamily="18" charset="0"/>
                       </a:rPr>
-                      <m:t>=8.5625×</m:t>
+                      <m:t>=</m:t>
+                    </m:r>
+                    <m:r>
+                      <a:rPr lang="en-US" sz="2200" i="1">
+                        <a:latin typeface="Cambria Math" panose="02040503050406030204" pitchFamily="18" charset="0"/>
+                      </a:rPr>
+                      <m:t>8</m:t>
+                    </m:r>
+                    <m:r>
+                      <a:rPr lang="en-US" sz="2200" i="1">
+                        <a:latin typeface="Cambria Math" panose="02040503050406030204" pitchFamily="18" charset="0"/>
+                      </a:rPr>
+                      <m:t>.</m:t>
+                    </m:r>
+                    <m:r>
+                      <a:rPr lang="en-US" sz="2200" i="1">
+                        <a:latin typeface="Cambria Math" panose="02040503050406030204" pitchFamily="18" charset="0"/>
+                      </a:rPr>
+                      <m:t>5625</m:t>
+                    </m:r>
+                    <m:r>
+                      <a:rPr lang="en-US" sz="2200" i="1">
+                        <a:latin typeface="Cambria Math" panose="02040503050406030204" pitchFamily="18" charset="0"/>
+                      </a:rPr>
+                      <m:t>×</m:t>
                     </m:r>
                     <m:sSup>
                       <m:sSupPr>
@@ -33717,7 +32966,13 @@
                           <a:rPr lang="en-US" sz="2200" i="1">
                             <a:latin typeface="Cambria Math" panose="02040503050406030204" pitchFamily="18" charset="0"/>
                           </a:rPr>
-                          <m:t>−6</m:t>
+                          <m:t>−</m:t>
+                        </m:r>
+                        <m:r>
+                          <a:rPr lang="en-US" sz="2200" i="1">
+                            <a:latin typeface="Cambria Math" panose="02040503050406030204" pitchFamily="18" charset="0"/>
+                          </a:rPr>
+                          <m:t>6</m:t>
                         </m:r>
                       </m:sup>
                     </m:sSup>
@@ -33731,7 +32986,7 @@
             </p:txBody>
           </p:sp>
         </mc:Choice>
-        <mc:Fallback>
+        <mc:Fallback xmlns="">
           <p:sp>
             <p:nvSpPr>
               <p:cNvPr id="4" name="Content Placeholder 3"/>
@@ -33769,8 +33024,8 @@
           </p:sp>
         </mc:Fallback>
       </mc:AlternateContent>
-      <mc:AlternateContent xmlns:mc="http://schemas.openxmlformats.org/markup-compatibility/2006">
-        <mc:Choice xmlns:a14="http://schemas.microsoft.com/office/drawing/2010/main" Requires="a14">
+      <mc:AlternateContent xmlns:mc="http://schemas.openxmlformats.org/markup-compatibility/2006" xmlns:a14="http://schemas.microsoft.com/office/drawing/2010/main">
+        <mc:Choice Requires="a14">
           <p:sp>
             <p:nvSpPr>
               <p:cNvPr id="5" name="Rectangle 4"/>
@@ -33808,7 +33063,31 @@
                       <a:rPr lang="en-US" sz="2400">
                         <a:latin typeface="Cambria Math" panose="02040503050406030204" pitchFamily="18" charset="0"/>
                       </a:rPr>
-                      <m:t> = 3. 141593 </m:t>
+                      <m:t> = </m:t>
+                    </m:r>
+                    <m:r>
+                      <a:rPr lang="en-US" sz="2400">
+                        <a:latin typeface="Cambria Math" panose="02040503050406030204" pitchFamily="18" charset="0"/>
+                      </a:rPr>
+                      <m:t>3</m:t>
+                    </m:r>
+                    <m:r>
+                      <a:rPr lang="en-US" sz="2400">
+                        <a:latin typeface="Cambria Math" panose="02040503050406030204" pitchFamily="18" charset="0"/>
+                      </a:rPr>
+                      <m:t>. </m:t>
+                    </m:r>
+                    <m:r>
+                      <a:rPr lang="en-US" sz="2400">
+                        <a:latin typeface="Cambria Math" panose="02040503050406030204" pitchFamily="18" charset="0"/>
+                      </a:rPr>
+                      <m:t>141593</m:t>
+                    </m:r>
+                    <m:r>
+                      <a:rPr lang="en-US" sz="2400">
+                        <a:latin typeface="Cambria Math" panose="02040503050406030204" pitchFamily="18" charset="0"/>
+                      </a:rPr>
+                      <m:t> </m:t>
                     </m:r>
                   </m:oMath>
                 </a14:m>
@@ -33820,7 +33099,7 @@
             </p:txBody>
           </p:sp>
         </mc:Choice>
-        <mc:Fallback>
+        <mc:Fallback xmlns="">
           <p:sp>
             <p:nvSpPr>
               <p:cNvPr id="5" name="Rectangle 4"/>
@@ -34548,8 +33827,8 @@
           </a:p>
         </p:txBody>
       </p:sp>
-      <mc:AlternateContent xmlns:mc="http://schemas.openxmlformats.org/markup-compatibility/2006">
-        <mc:Choice xmlns:a14="http://schemas.microsoft.com/office/drawing/2010/main" Requires="a14">
+      <mc:AlternateContent xmlns:mc="http://schemas.openxmlformats.org/markup-compatibility/2006" xmlns:a14="http://schemas.microsoft.com/office/drawing/2010/main">
+        <mc:Choice Requires="a14">
           <p:sp>
             <p:nvSpPr>
               <p:cNvPr id="4" name="Content Placeholder 3"/>
@@ -35136,7 +34415,7 @@
             </p:txBody>
           </p:sp>
         </mc:Choice>
-        <mc:Fallback>
+        <mc:Fallback xmlns="">
           <p:sp>
             <p:nvSpPr>
               <p:cNvPr id="4" name="Content Placeholder 3"/>
@@ -35174,8 +34453,8 @@
           </p:sp>
         </mc:Fallback>
       </mc:AlternateContent>
-      <mc:AlternateContent xmlns:mc="http://schemas.openxmlformats.org/markup-compatibility/2006">
-        <mc:Choice xmlns:a14="http://schemas.microsoft.com/office/drawing/2010/main" Requires="a14">
+      <mc:AlternateContent xmlns:mc="http://schemas.openxmlformats.org/markup-compatibility/2006" xmlns:a14="http://schemas.microsoft.com/office/drawing/2010/main">
+        <mc:Choice Requires="a14">
           <p:sp>
             <p:nvSpPr>
               <p:cNvPr id="5" name="Rectangle 4"/>
@@ -35255,7 +34534,7 @@
             </p:txBody>
           </p:sp>
         </mc:Choice>
-        <mc:Fallback>
+        <mc:Fallback xmlns="">
           <p:sp>
             <p:nvSpPr>
               <p:cNvPr id="5" name="Rectangle 4"/>
